--- a/generated_exports/ticket_timeline_price_mix_2026.pptx
+++ b/generated_exports/ticket_timeline_price_mix_2026.pptx
@@ -2,16 +2,16 @@
 <file path=ppt/presentation.xml><?xml version="1.0" encoding="utf-8"?>
 <p:presentation xmlns:p="http://schemas.openxmlformats.org/presentationml/2006/main">
   <p:sldMasterIdLst>
-    <p:sldMasterId xmlns:r="http://schemas.openxmlformats.org/officeDocument/2006/relationships" id="2147483648" r:id="Rd9fe81a980334815"/>
+    <p:sldMasterId xmlns:r="http://schemas.openxmlformats.org/officeDocument/2006/relationships" id="2147483648" r:id="R0c568de446f742c6"/>
   </p:sldMasterIdLst>
   <p:notesMasterIdLst>
-    <p:notesMasterId xmlns:r="http://schemas.openxmlformats.org/officeDocument/2006/relationships" r:id="Racc9154a654d4eee"/>
+    <p:notesMasterId xmlns:r="http://schemas.openxmlformats.org/officeDocument/2006/relationships" r:id="R4b7088ca1b854c68"/>
   </p:notesMasterIdLst>
   <p:sldIdLst>
-    <p:sldId xmlns:r="http://schemas.openxmlformats.org/officeDocument/2006/relationships" id="256" r:id="R04267ee192114db9"/>
-    <p:sldId xmlns:r="http://schemas.openxmlformats.org/officeDocument/2006/relationships" id="257" r:id="Rea9e46adddc845df"/>
-    <p:sldId xmlns:r="http://schemas.openxmlformats.org/officeDocument/2006/relationships" id="258" r:id="Rab478d781bb7423e"/>
-    <p:sldId xmlns:r="http://schemas.openxmlformats.org/officeDocument/2006/relationships" id="259" r:id="Rf6aafddeca6a40fb"/>
+    <p:sldId xmlns:r="http://schemas.openxmlformats.org/officeDocument/2006/relationships" id="256" r:id="Rb5e2977bee0347f6"/>
+    <p:sldId xmlns:r="http://schemas.openxmlformats.org/officeDocument/2006/relationships" id="257" r:id="R72397cbb80bc47c4"/>
+    <p:sldId xmlns:r="http://schemas.openxmlformats.org/officeDocument/2006/relationships" id="258" r:id="R7c3cc9ce753f4b0e"/>
+    <p:sldId xmlns:r="http://schemas.openxmlformats.org/officeDocument/2006/relationships" id="259" r:id="R3b6fa0a7bfa64bc8"/>
   </p:sldIdLst>
   <p:sldSz cx="12192000" cy="6858000"/>
   <p:notesSz cx="6858000" cy="9144000"/>
@@ -802,7 +802,7 @@
   </p:cSld>
   <p:clrMap bg1="lt1" tx1="dk1" bg2="lt2" tx2="dk2" accent1="accent1" accent2="accent2" accent3="accent3" accent4="accent4" accent5="accent5" accent6="accent6" hlink="hlink" folHlink="folHlink"/>
   <p:sldLayoutIdLst>
-    <p:sldLayoutId xmlns:r="http://schemas.openxmlformats.org/officeDocument/2006/relationships" id="2147483649" r:id="R7be6cc88d1e942e7"/>
+    <p:sldLayoutId xmlns:r="http://schemas.openxmlformats.org/officeDocument/2006/relationships" id="2147483649" r:id="Rb80d79f1d19b4e40"/>
   </p:sldLayoutIdLst>
   <p:txStyles>
     <p:titleStyle>
@@ -3261,7 +3261,7 @@
           <p:cNvPr id="22" name="">
             <a:extLst xmlns:a="http://schemas.openxmlformats.org/drawingml/2006/main">
               <a:ext uri="{FF2B5EF4-FFF2-40B4-BE49-F238E27FC236}">
-                <a16:creationId xmlns:a16="http://schemas.microsoft.com/office/drawing/2014/main" id="{27E34564-7F8E-4580-9411-BD7301F55C4E}"/>
+                <a16:creationId xmlns:a16="http://schemas.microsoft.com/office/drawing/2014/main" id="{99CB8817-2CAA-4396-A302-2AF367E1B1EA}"/>
               </a:ext>
             </a:extLst>
           </p:cNvPr>
@@ -3311,7 +3311,7 @@
           <p:cNvPr id="2" name="">
             <a:extLst xmlns:a="http://schemas.openxmlformats.org/drawingml/2006/main">
               <a:ext uri="{FF2B5EF4-FFF2-40B4-BE49-F238E27FC236}">
-                <a16:creationId xmlns:a16="http://schemas.microsoft.com/office/drawing/2014/main" id="{4F909E60-2C2A-4A74-8174-0C74B1A054A6}"/>
+                <a16:creationId xmlns:a16="http://schemas.microsoft.com/office/drawing/2014/main" id="{6E889785-CEF4-4EBD-947C-87B7F90C3992}"/>
               </a:ext>
             </a:extLst>
           </p:cNvPr>
@@ -3361,7 +3361,7 @@
           <p:cNvPr id="3" name="">
             <a:extLst xmlns:a="http://schemas.openxmlformats.org/drawingml/2006/main">
               <a:ext uri="{FF2B5EF4-FFF2-40B4-BE49-F238E27FC236}">
-                <a16:creationId xmlns:a16="http://schemas.microsoft.com/office/drawing/2014/main" id="{77CDDDA4-C7E7-4732-8954-E6E506422075}"/>
+                <a16:creationId xmlns:a16="http://schemas.microsoft.com/office/drawing/2014/main" id="{95F158F5-D247-43FC-B4CF-87BD39D26090}"/>
               </a:ext>
             </a:extLst>
           </p:cNvPr>
@@ -3411,7 +3411,7 @@
           <p:cNvPr id="4" name="">
             <a:extLst xmlns:a="http://schemas.openxmlformats.org/drawingml/2006/main">
               <a:ext uri="{FF2B5EF4-FFF2-40B4-BE49-F238E27FC236}">
-                <a16:creationId xmlns:a16="http://schemas.microsoft.com/office/drawing/2014/main" id="{FB2EEBB7-2197-40F2-989D-7313059BF1A9}"/>
+                <a16:creationId xmlns:a16="http://schemas.microsoft.com/office/drawing/2014/main" id="{14B224E6-0466-4308-BB28-D6E9423BDF8F}"/>
               </a:ext>
             </a:extLst>
           </p:cNvPr>
@@ -3452,7 +3452,7 @@
           <p:cNvPr id="5" name="">
             <a:extLst xmlns:a="http://schemas.openxmlformats.org/drawingml/2006/main">
               <a:ext uri="{FF2B5EF4-FFF2-40B4-BE49-F238E27FC236}">
-                <a16:creationId xmlns:a16="http://schemas.microsoft.com/office/drawing/2014/main" id="{4B338A13-229A-410D-B654-733CEE6C5327}"/>
+                <a16:creationId xmlns:a16="http://schemas.microsoft.com/office/drawing/2014/main" id="{F06FE27E-240C-453B-AACE-485F4CC91C41}"/>
               </a:ext>
             </a:extLst>
           </p:cNvPr>
@@ -3502,7 +3502,7 @@
           <p:cNvPr id="6" name="">
             <a:extLst xmlns:a="http://schemas.openxmlformats.org/drawingml/2006/main">
               <a:ext uri="{FF2B5EF4-FFF2-40B4-BE49-F238E27FC236}">
-                <a16:creationId xmlns:a16="http://schemas.microsoft.com/office/drawing/2014/main" id="{221896AE-547D-41C0-88E7-8B0F42BB97AC}"/>
+                <a16:creationId xmlns:a16="http://schemas.microsoft.com/office/drawing/2014/main" id="{5D9489E9-A1FE-411F-9536-355993D2A710}"/>
               </a:ext>
             </a:extLst>
           </p:cNvPr>
@@ -3552,7 +3552,7 @@
           <p:cNvPr id="7" name="">
             <a:extLst xmlns:a="http://schemas.openxmlformats.org/drawingml/2006/main">
               <a:ext uri="{FF2B5EF4-FFF2-40B4-BE49-F238E27FC236}">
-                <a16:creationId xmlns:a16="http://schemas.microsoft.com/office/drawing/2014/main" id="{2292D2AD-C894-41F3-B7B2-B98B8B110BDB}"/>
+                <a16:creationId xmlns:a16="http://schemas.microsoft.com/office/drawing/2014/main" id="{CD634985-8F8E-402E-81DF-7C2AB817875B}"/>
               </a:ext>
             </a:extLst>
           </p:cNvPr>
@@ -3602,7 +3602,7 @@
           <p:cNvPr id="8" name="">
             <a:extLst xmlns:a="http://schemas.openxmlformats.org/drawingml/2006/main">
               <a:ext uri="{FF2B5EF4-FFF2-40B4-BE49-F238E27FC236}">
-                <a16:creationId xmlns:a16="http://schemas.microsoft.com/office/drawing/2014/main" id="{549D4913-F46C-4BF7-BA3A-6AE6362AA807}"/>
+                <a16:creationId xmlns:a16="http://schemas.microsoft.com/office/drawing/2014/main" id="{12A7FB76-D20C-4F4B-A998-7EDC29EB3310}"/>
               </a:ext>
             </a:extLst>
           </p:cNvPr>
@@ -3652,7 +3652,7 @@
           <p:cNvPr id="9" name="">
             <a:extLst xmlns:a="http://schemas.openxmlformats.org/drawingml/2006/main">
               <a:ext uri="{FF2B5EF4-FFF2-40B4-BE49-F238E27FC236}">
-                <a16:creationId xmlns:a16="http://schemas.microsoft.com/office/drawing/2014/main" id="{537B3BD4-FB2B-4CB0-BB3E-D51F07CF3A0F}"/>
+                <a16:creationId xmlns:a16="http://schemas.microsoft.com/office/drawing/2014/main" id="{0A9435D6-1F58-42F2-955B-6FA074CE1AA3}"/>
               </a:ext>
             </a:extLst>
           </p:cNvPr>
@@ -3693,7 +3693,7 @@
           <p:cNvPr id="10" name="">
             <a:extLst xmlns:a="http://schemas.openxmlformats.org/drawingml/2006/main">
               <a:ext uri="{FF2B5EF4-FFF2-40B4-BE49-F238E27FC236}">
-                <a16:creationId xmlns:a16="http://schemas.microsoft.com/office/drawing/2014/main" id="{311863E8-7731-4076-BC42-F908F2D86FA3}"/>
+                <a16:creationId xmlns:a16="http://schemas.microsoft.com/office/drawing/2014/main" id="{52769EB1-BF88-4786-9193-E191ACAC9500}"/>
               </a:ext>
             </a:extLst>
           </p:cNvPr>
@@ -3743,7 +3743,7 @@
           <p:cNvPr id="11" name="">
             <a:extLst xmlns:a="http://schemas.openxmlformats.org/drawingml/2006/main">
               <a:ext uri="{FF2B5EF4-FFF2-40B4-BE49-F238E27FC236}">
-                <a16:creationId xmlns:a16="http://schemas.microsoft.com/office/drawing/2014/main" id="{CD713023-9C67-4F27-8AA2-3F3856B7664B}"/>
+                <a16:creationId xmlns:a16="http://schemas.microsoft.com/office/drawing/2014/main" id="{022F3D33-76AF-44D8-9786-78BA0C834076}"/>
               </a:ext>
             </a:extLst>
           </p:cNvPr>
@@ -3793,7 +3793,7 @@
           <p:cNvPr id="12" name="">
             <a:extLst xmlns:a="http://schemas.openxmlformats.org/drawingml/2006/main">
               <a:ext uri="{FF2B5EF4-FFF2-40B4-BE49-F238E27FC236}">
-                <a16:creationId xmlns:a16="http://schemas.microsoft.com/office/drawing/2014/main" id="{D0E36867-4C18-438A-AD25-8EFA719070EC}"/>
+                <a16:creationId xmlns:a16="http://schemas.microsoft.com/office/drawing/2014/main" id="{EDD39959-2EE0-48BE-A18F-F881853E7529}"/>
               </a:ext>
             </a:extLst>
           </p:cNvPr>
@@ -3843,7 +3843,7 @@
           <p:cNvPr id="13" name="">
             <a:extLst xmlns:a="http://schemas.openxmlformats.org/drawingml/2006/main">
               <a:ext uri="{FF2B5EF4-FFF2-40B4-BE49-F238E27FC236}">
-                <a16:creationId xmlns:a16="http://schemas.microsoft.com/office/drawing/2014/main" id="{E4318DF4-8DCB-46CF-82F3-7D10CBA0320D}"/>
+                <a16:creationId xmlns:a16="http://schemas.microsoft.com/office/drawing/2014/main" id="{1280CDAA-48A9-423C-BFE8-12D9E000A1B0}"/>
               </a:ext>
             </a:extLst>
           </p:cNvPr>
@@ -3893,7 +3893,7 @@
           <p:cNvPr id="14" name="">
             <a:extLst xmlns:a="http://schemas.openxmlformats.org/drawingml/2006/main">
               <a:ext uri="{FF2B5EF4-FFF2-40B4-BE49-F238E27FC236}">
-                <a16:creationId xmlns:a16="http://schemas.microsoft.com/office/drawing/2014/main" id="{2D7F66BC-81AC-45DA-9E5B-1249EAD2FD02}"/>
+                <a16:creationId xmlns:a16="http://schemas.microsoft.com/office/drawing/2014/main" id="{E16E5B7E-245B-4228-AB39-DDC50CFD352A}"/>
               </a:ext>
             </a:extLst>
           </p:cNvPr>
@@ -3934,7 +3934,7 @@
           <p:cNvPr id="15" name="">
             <a:extLst xmlns:a="http://schemas.openxmlformats.org/drawingml/2006/main">
               <a:ext uri="{FF2B5EF4-FFF2-40B4-BE49-F238E27FC236}">
-                <a16:creationId xmlns:a16="http://schemas.microsoft.com/office/drawing/2014/main" id="{64AEAE35-7584-4D8E-ACB8-A4209128F567}"/>
+                <a16:creationId xmlns:a16="http://schemas.microsoft.com/office/drawing/2014/main" id="{0ACE45C9-D789-46B7-925C-9238AAD0CC62}"/>
               </a:ext>
             </a:extLst>
           </p:cNvPr>
@@ -3984,7 +3984,7 @@
           <p:cNvPr id="16" name="">
             <a:extLst xmlns:a="http://schemas.openxmlformats.org/drawingml/2006/main">
               <a:ext uri="{FF2B5EF4-FFF2-40B4-BE49-F238E27FC236}">
-                <a16:creationId xmlns:a16="http://schemas.microsoft.com/office/drawing/2014/main" id="{73A514E5-C3E6-4B09-99C2-25DE3DCFA486}"/>
+                <a16:creationId xmlns:a16="http://schemas.microsoft.com/office/drawing/2014/main" id="{AD8AABBB-3132-42E8-B1C6-2A5EB858D305}"/>
               </a:ext>
             </a:extLst>
           </p:cNvPr>
@@ -4034,7 +4034,7 @@
           <p:cNvPr id="17" name="">
             <a:extLst xmlns:a="http://schemas.openxmlformats.org/drawingml/2006/main">
               <a:ext uri="{FF2B5EF4-FFF2-40B4-BE49-F238E27FC236}">
-                <a16:creationId xmlns:a16="http://schemas.microsoft.com/office/drawing/2014/main" id="{1F1C7A72-B90B-4567-A184-19664163D7CE}"/>
+                <a16:creationId xmlns:a16="http://schemas.microsoft.com/office/drawing/2014/main" id="{CEC7EB9A-0A7A-4A60-8634-E24A2BD64D15}"/>
               </a:ext>
             </a:extLst>
           </p:cNvPr>
@@ -4084,7 +4084,7 @@
           <p:cNvPr id="18" name="">
             <a:extLst xmlns:a="http://schemas.openxmlformats.org/drawingml/2006/main">
               <a:ext uri="{FF2B5EF4-FFF2-40B4-BE49-F238E27FC236}">
-                <a16:creationId xmlns:a16="http://schemas.microsoft.com/office/drawing/2014/main" id="{43C7AB3A-F56D-45D2-B61B-31C9FAEC9D5B}"/>
+                <a16:creationId xmlns:a16="http://schemas.microsoft.com/office/drawing/2014/main" id="{1071471F-0B21-442B-AA6B-455E2E32053B}"/>
               </a:ext>
             </a:extLst>
           </p:cNvPr>
@@ -4134,7 +4134,7 @@
           <p:cNvPr id="19" name="">
             <a:extLst xmlns:a="http://schemas.openxmlformats.org/drawingml/2006/main">
               <a:ext uri="{FF2B5EF4-FFF2-40B4-BE49-F238E27FC236}">
-                <a16:creationId xmlns:a16="http://schemas.microsoft.com/office/drawing/2014/main" id="{9A2A2C85-09F9-474F-9A45-400BA11BEC4B}"/>
+                <a16:creationId xmlns:a16="http://schemas.microsoft.com/office/drawing/2014/main" id="{65A8C77A-C026-4C45-A587-BCBC59E815D4}"/>
               </a:ext>
             </a:extLst>
           </p:cNvPr>
@@ -4165,7 +4165,7 @@
           <p:cNvPr id="20" name="">
             <a:extLst xmlns:a="http://schemas.openxmlformats.org/drawingml/2006/main">
               <a:ext uri="{FF2B5EF4-FFF2-40B4-BE49-F238E27FC236}">
-                <a16:creationId xmlns:a16="http://schemas.microsoft.com/office/drawing/2014/main" id="{193B47AA-E170-4F86-84BF-BE20026F5A81}"/>
+                <a16:creationId xmlns:a16="http://schemas.microsoft.com/office/drawing/2014/main" id="{3EF5FA05-E318-42CA-9A11-BD48857803CC}"/>
               </a:ext>
             </a:extLst>
           </p:cNvPr>
@@ -4215,7 +4215,7 @@
           <p:cNvPr id="21" name="">
             <a:extLst xmlns:a="http://schemas.openxmlformats.org/drawingml/2006/main">
               <a:ext uri="{FF2B5EF4-FFF2-40B4-BE49-F238E27FC236}">
-                <a16:creationId xmlns:a16="http://schemas.microsoft.com/office/drawing/2014/main" id="{94DA3AF6-517B-41DA-A4DA-BA6B446BDEF3}"/>
+                <a16:creationId xmlns:a16="http://schemas.microsoft.com/office/drawing/2014/main" id="{49621D31-1984-4BB5-A2D8-22A2DA18BF0B}"/>
               </a:ext>
             </a:extLst>
           </p:cNvPr>
@@ -4263,7 +4263,7 @@
     </p:spTree>
     <p:extLst>
       <p:ext uri="{BB962C8B-B14F-4D97-AF65-F5344CB8AC3E}">
-        <p14:creationId xmlns:p14="http://schemas.microsoft.com/office/powerpoint/2010/main" val="215631877"/>
+        <p14:creationId xmlns:p14="http://schemas.microsoft.com/office/powerpoint/2010/main" val="2137657363"/>
       </p:ext>
     </p:extLst>
   </p:cSld>
@@ -4294,7 +4294,7 @@
           <p:cNvPr id="120" name="">
             <a:extLst xmlns:a="http://schemas.openxmlformats.org/drawingml/2006/main">
               <a:ext uri="{FF2B5EF4-FFF2-40B4-BE49-F238E27FC236}">
-                <a16:creationId xmlns:a16="http://schemas.microsoft.com/office/drawing/2014/main" id="{7308FFAE-B58C-4FA4-A2CC-543D84094BB4}"/>
+                <a16:creationId xmlns:a16="http://schemas.microsoft.com/office/drawing/2014/main" id="{460508EE-4A59-4AC2-81F3-D67F45605384}"/>
               </a:ext>
             </a:extLst>
           </p:cNvPr>
@@ -4344,7 +4344,7 @@
           <p:cNvPr id="2" name="">
             <a:extLst xmlns:a="http://schemas.openxmlformats.org/drawingml/2006/main">
               <a:ext uri="{FF2B5EF4-FFF2-40B4-BE49-F238E27FC236}">
-                <a16:creationId xmlns:a16="http://schemas.microsoft.com/office/drawing/2014/main" id="{B10BEFDF-EE25-4438-A4BB-2C7A30375A72}"/>
+                <a16:creationId xmlns:a16="http://schemas.microsoft.com/office/drawing/2014/main" id="{99D81683-FD9B-40DB-9E82-DCB78A00CD42}"/>
               </a:ext>
             </a:extLst>
           </p:cNvPr>
@@ -4394,7 +4394,7 @@
           <p:cNvPr id="3" name="">
             <a:extLst xmlns:a="http://schemas.openxmlformats.org/drawingml/2006/main">
               <a:ext uri="{FF2B5EF4-FFF2-40B4-BE49-F238E27FC236}">
-                <a16:creationId xmlns:a16="http://schemas.microsoft.com/office/drawing/2014/main" id="{91359CB5-BBF8-4227-8390-96D65C09CDC2}"/>
+                <a16:creationId xmlns:a16="http://schemas.microsoft.com/office/drawing/2014/main" id="{0058CFCE-769F-4D69-A133-3C76974CC07B}"/>
               </a:ext>
             </a:extLst>
           </p:cNvPr>
@@ -4444,7 +4444,7 @@
           <p:cNvPr id="4" name="">
             <a:extLst xmlns:a="http://schemas.openxmlformats.org/drawingml/2006/main">
               <a:ext uri="{FF2B5EF4-FFF2-40B4-BE49-F238E27FC236}">
-                <a16:creationId xmlns:a16="http://schemas.microsoft.com/office/drawing/2014/main" id="{FC930FD6-3A4A-400E-89A1-2266655EC592}"/>
+                <a16:creationId xmlns:a16="http://schemas.microsoft.com/office/drawing/2014/main" id="{8611AB12-050C-4FB9-9EDC-24B58F3B0D45}"/>
               </a:ext>
             </a:extLst>
           </p:cNvPr>
@@ -4485,7 +4485,7 @@
           <p:cNvPr id="5" name="">
             <a:extLst xmlns:a="http://schemas.openxmlformats.org/drawingml/2006/main">
               <a:ext uri="{FF2B5EF4-FFF2-40B4-BE49-F238E27FC236}">
-                <a16:creationId xmlns:a16="http://schemas.microsoft.com/office/drawing/2014/main" id="{75260AD8-954F-45A0-8F16-5F30D79973AE}"/>
+                <a16:creationId xmlns:a16="http://schemas.microsoft.com/office/drawing/2014/main" id="{6DBBA0CC-8A83-484D-8D40-33F11C00C147}"/>
               </a:ext>
             </a:extLst>
           </p:cNvPr>
@@ -4535,7 +4535,7 @@
           <p:cNvPr id="6" name="">
             <a:extLst xmlns:a="http://schemas.openxmlformats.org/drawingml/2006/main">
               <a:ext uri="{FF2B5EF4-FFF2-40B4-BE49-F238E27FC236}">
-                <a16:creationId xmlns:a16="http://schemas.microsoft.com/office/drawing/2014/main" id="{4D216A4A-5865-4E17-B0C5-8E7CFF7EF5E9}"/>
+                <a16:creationId xmlns:a16="http://schemas.microsoft.com/office/drawing/2014/main" id="{20D8DDD0-23A7-4356-AD19-4EA1FE37EDB0}"/>
               </a:ext>
             </a:extLst>
           </p:cNvPr>
@@ -4592,7 +4592,7 @@
         </p:xfrm>
         <a:graphic xmlns:a="http://schemas.openxmlformats.org/drawingml/2006/main">
           <a:graphicData uri="http://schemas.openxmlformats.org/drawingml/2006/chart">
-            <c:chart xmlns:r="http://schemas.openxmlformats.org/officeDocument/2006/relationships" xmlns:c="http://schemas.openxmlformats.org/drawingml/2006/chart" r:id="R0a735f9d15c74d11"/>
+            <c:chart xmlns:r="http://schemas.openxmlformats.org/officeDocument/2006/relationships" xmlns:c="http://schemas.openxmlformats.org/drawingml/2006/chart" r:id="R7496fd136aa449ab"/>
           </a:graphicData>
         </a:graphic>
       </p:graphicFrame>
@@ -4601,7 +4601,7 @@
           <p:cNvPr id="8" name="">
             <a:extLst xmlns:a="http://schemas.openxmlformats.org/drawingml/2006/main">
               <a:ext uri="{FF2B5EF4-FFF2-40B4-BE49-F238E27FC236}">
-                <a16:creationId xmlns:a16="http://schemas.microsoft.com/office/drawing/2014/main" id="{301533FB-23CE-4A9C-820E-AF6ED567F197}"/>
+                <a16:creationId xmlns:a16="http://schemas.microsoft.com/office/drawing/2014/main" id="{D4049F2B-A4A0-4AFF-A5CC-8D65B9AB3820}"/>
               </a:ext>
             </a:extLst>
           </p:cNvPr>
@@ -4632,7 +4632,7 @@
           <p:cNvPr id="9" name="">
             <a:extLst xmlns:a="http://schemas.openxmlformats.org/drawingml/2006/main">
               <a:ext uri="{FF2B5EF4-FFF2-40B4-BE49-F238E27FC236}">
-                <a16:creationId xmlns:a16="http://schemas.microsoft.com/office/drawing/2014/main" id="{FD16DA89-EF88-41EB-8113-4A3649EB0945}"/>
+                <a16:creationId xmlns:a16="http://schemas.microsoft.com/office/drawing/2014/main" id="{A236E41A-4D57-498E-A71B-E36C8149AD92}"/>
               </a:ext>
             </a:extLst>
           </p:cNvPr>
@@ -4682,7 +4682,7 @@
           <p:cNvPr id="10" name="">
             <a:extLst xmlns:a="http://schemas.openxmlformats.org/drawingml/2006/main">
               <a:ext uri="{FF2B5EF4-FFF2-40B4-BE49-F238E27FC236}">
-                <a16:creationId xmlns:a16="http://schemas.microsoft.com/office/drawing/2014/main" id="{EF1F4996-4A29-4DBA-8E40-BAED5C9640E1}"/>
+                <a16:creationId xmlns:a16="http://schemas.microsoft.com/office/drawing/2014/main" id="{2B4ADA7E-59D7-4130-80F8-052DEBFEC440}"/>
               </a:ext>
             </a:extLst>
           </p:cNvPr>
@@ -4732,7 +4732,7 @@
           <p:cNvPr id="11" name="">
             <a:extLst xmlns:a="http://schemas.openxmlformats.org/drawingml/2006/main">
               <a:ext uri="{FF2B5EF4-FFF2-40B4-BE49-F238E27FC236}">
-                <a16:creationId xmlns:a16="http://schemas.microsoft.com/office/drawing/2014/main" id="{0F1D3D59-C406-4CD4-B6EC-CA6BF2041B38}"/>
+                <a16:creationId xmlns:a16="http://schemas.microsoft.com/office/drawing/2014/main" id="{657C2973-F9B2-4C67-9D19-0A1844B708B5}"/>
               </a:ext>
             </a:extLst>
           </p:cNvPr>
@@ -4782,7 +4782,7 @@
           <p:cNvPr id="12" name="">
             <a:extLst xmlns:a="http://schemas.openxmlformats.org/drawingml/2006/main">
               <a:ext uri="{FF2B5EF4-FFF2-40B4-BE49-F238E27FC236}">
-                <a16:creationId xmlns:a16="http://schemas.microsoft.com/office/drawing/2014/main" id="{917F23FC-F99A-429E-BC88-440AE436D014}"/>
+                <a16:creationId xmlns:a16="http://schemas.microsoft.com/office/drawing/2014/main" id="{9FFB2226-9D1A-4C0A-96B2-8DEF0855B618}"/>
               </a:ext>
             </a:extLst>
           </p:cNvPr>
@@ -4813,7 +4813,7 @@
           <p:cNvPr id="13" name="">
             <a:extLst xmlns:a="http://schemas.openxmlformats.org/drawingml/2006/main">
               <a:ext uri="{FF2B5EF4-FFF2-40B4-BE49-F238E27FC236}">
-                <a16:creationId xmlns:a16="http://schemas.microsoft.com/office/drawing/2014/main" id="{D8DF0A2E-5484-4F43-90D7-FD92FDD13F1F}"/>
+                <a16:creationId xmlns:a16="http://schemas.microsoft.com/office/drawing/2014/main" id="{CBADA86B-ADBC-4792-9AC4-0F29486F7B9D}"/>
               </a:ext>
             </a:extLst>
           </p:cNvPr>
@@ -4863,7 +4863,7 @@
           <p:cNvPr id="14" name="">
             <a:extLst xmlns:a="http://schemas.openxmlformats.org/drawingml/2006/main">
               <a:ext uri="{FF2B5EF4-FFF2-40B4-BE49-F238E27FC236}">
-                <a16:creationId xmlns:a16="http://schemas.microsoft.com/office/drawing/2014/main" id="{D6D95D88-82FB-4455-A025-500EE60B12DD}"/>
+                <a16:creationId xmlns:a16="http://schemas.microsoft.com/office/drawing/2014/main" id="{B641E753-F0A8-435D-BED5-566813EB96F2}"/>
               </a:ext>
             </a:extLst>
           </p:cNvPr>
@@ -4913,7 +4913,7 @@
           <p:cNvPr id="15" name="">
             <a:extLst xmlns:a="http://schemas.openxmlformats.org/drawingml/2006/main">
               <a:ext uri="{FF2B5EF4-FFF2-40B4-BE49-F238E27FC236}">
-                <a16:creationId xmlns:a16="http://schemas.microsoft.com/office/drawing/2014/main" id="{17E30006-B47B-4E4B-A1F5-B2037A4ABDCE}"/>
+                <a16:creationId xmlns:a16="http://schemas.microsoft.com/office/drawing/2014/main" id="{350347B7-6240-44E7-A6D0-0DE6000DE518}"/>
               </a:ext>
             </a:extLst>
           </p:cNvPr>
@@ -4963,7 +4963,7 @@
           <p:cNvPr id="16" name="">
             <a:extLst xmlns:a="http://schemas.openxmlformats.org/drawingml/2006/main">
               <a:ext uri="{FF2B5EF4-FFF2-40B4-BE49-F238E27FC236}">
-                <a16:creationId xmlns:a16="http://schemas.microsoft.com/office/drawing/2014/main" id="{E7DA6FD4-BFC8-4548-AC72-C25FD0DAA1B4}"/>
+                <a16:creationId xmlns:a16="http://schemas.microsoft.com/office/drawing/2014/main" id="{C4C57E0B-BA99-4495-B08D-E2A2D0A67E64}"/>
               </a:ext>
             </a:extLst>
           </p:cNvPr>
@@ -4994,7 +4994,7 @@
           <p:cNvPr id="17" name="">
             <a:extLst xmlns:a="http://schemas.openxmlformats.org/drawingml/2006/main">
               <a:ext uri="{FF2B5EF4-FFF2-40B4-BE49-F238E27FC236}">
-                <a16:creationId xmlns:a16="http://schemas.microsoft.com/office/drawing/2014/main" id="{45FC6A58-353E-46A2-AB50-D221C4644329}"/>
+                <a16:creationId xmlns:a16="http://schemas.microsoft.com/office/drawing/2014/main" id="{C3B94384-612F-4EBE-A8BF-B6D9D1988334}"/>
               </a:ext>
             </a:extLst>
           </p:cNvPr>
@@ -5044,7 +5044,7 @@
           <p:cNvPr id="18" name="">
             <a:extLst xmlns:a="http://schemas.openxmlformats.org/drawingml/2006/main">
               <a:ext uri="{FF2B5EF4-FFF2-40B4-BE49-F238E27FC236}">
-                <a16:creationId xmlns:a16="http://schemas.microsoft.com/office/drawing/2014/main" id="{E1E54325-69C7-40C5-B1BE-A0271CEED5B9}"/>
+                <a16:creationId xmlns:a16="http://schemas.microsoft.com/office/drawing/2014/main" id="{FA47484B-653A-4B48-A58E-C81C3FB2BFF6}"/>
               </a:ext>
             </a:extLst>
           </p:cNvPr>
@@ -5094,7 +5094,7 @@
           <p:cNvPr id="19" name="">
             <a:extLst xmlns:a="http://schemas.openxmlformats.org/drawingml/2006/main">
               <a:ext uri="{FF2B5EF4-FFF2-40B4-BE49-F238E27FC236}">
-                <a16:creationId xmlns:a16="http://schemas.microsoft.com/office/drawing/2014/main" id="{B36483B0-9140-42D1-A3D9-FC370264C2DB}"/>
+                <a16:creationId xmlns:a16="http://schemas.microsoft.com/office/drawing/2014/main" id="{537AC326-D8D8-437D-9D8C-64744756DA4F}"/>
               </a:ext>
             </a:extLst>
           </p:cNvPr>
@@ -5144,7 +5144,7 @@
           <p:cNvPr id="20" name="">
             <a:extLst xmlns:a="http://schemas.openxmlformats.org/drawingml/2006/main">
               <a:ext uri="{FF2B5EF4-FFF2-40B4-BE49-F238E27FC236}">
-                <a16:creationId xmlns:a16="http://schemas.microsoft.com/office/drawing/2014/main" id="{6E1DA9AF-8B31-4182-8E5A-D980E8DF7AE7}"/>
+                <a16:creationId xmlns:a16="http://schemas.microsoft.com/office/drawing/2014/main" id="{3FB63F91-5248-4C9E-8091-5635CCFF0209}"/>
               </a:ext>
             </a:extLst>
           </p:cNvPr>
@@ -5175,7 +5175,7 @@
           <p:cNvPr id="21" name="">
             <a:extLst xmlns:a="http://schemas.openxmlformats.org/drawingml/2006/main">
               <a:ext uri="{FF2B5EF4-FFF2-40B4-BE49-F238E27FC236}">
-                <a16:creationId xmlns:a16="http://schemas.microsoft.com/office/drawing/2014/main" id="{5D8ADA02-34FA-4024-BB44-F950BDB7DD01}"/>
+                <a16:creationId xmlns:a16="http://schemas.microsoft.com/office/drawing/2014/main" id="{C478C477-E44A-4FCD-A13D-449B1C1560B7}"/>
               </a:ext>
             </a:extLst>
           </p:cNvPr>
@@ -5225,7 +5225,7 @@
           <p:cNvPr id="22" name="">
             <a:extLst xmlns:a="http://schemas.openxmlformats.org/drawingml/2006/main">
               <a:ext uri="{FF2B5EF4-FFF2-40B4-BE49-F238E27FC236}">
-                <a16:creationId xmlns:a16="http://schemas.microsoft.com/office/drawing/2014/main" id="{85692FDD-B999-41D7-97FE-5627269216A8}"/>
+                <a16:creationId xmlns:a16="http://schemas.microsoft.com/office/drawing/2014/main" id="{9929CAB8-0A00-4BF9-8A20-125F7C4416C8}"/>
               </a:ext>
             </a:extLst>
           </p:cNvPr>
@@ -5275,7 +5275,7 @@
           <p:cNvPr id="23" name="">
             <a:extLst xmlns:a="http://schemas.openxmlformats.org/drawingml/2006/main">
               <a:ext uri="{FF2B5EF4-FFF2-40B4-BE49-F238E27FC236}">
-                <a16:creationId xmlns:a16="http://schemas.microsoft.com/office/drawing/2014/main" id="{58F4D3D4-ED54-4591-A497-B86A27454692}"/>
+                <a16:creationId xmlns:a16="http://schemas.microsoft.com/office/drawing/2014/main" id="{90905B9F-BCE4-4197-B38A-00B4574096E8}"/>
               </a:ext>
             </a:extLst>
           </p:cNvPr>
@@ -5325,7 +5325,7 @@
           <p:cNvPr id="24" name="">
             <a:extLst xmlns:a="http://schemas.openxmlformats.org/drawingml/2006/main">
               <a:ext uri="{FF2B5EF4-FFF2-40B4-BE49-F238E27FC236}">
-                <a16:creationId xmlns:a16="http://schemas.microsoft.com/office/drawing/2014/main" id="{9A18ECFB-0BB7-4D35-BAFB-74921C267CAC}"/>
+                <a16:creationId xmlns:a16="http://schemas.microsoft.com/office/drawing/2014/main" id="{B6A88E6F-E63F-40D0-A69E-F4791C1ADDCD}"/>
               </a:ext>
             </a:extLst>
           </p:cNvPr>
@@ -5356,7 +5356,7 @@
           <p:cNvPr id="25" name="">
             <a:extLst xmlns:a="http://schemas.openxmlformats.org/drawingml/2006/main">
               <a:ext uri="{FF2B5EF4-FFF2-40B4-BE49-F238E27FC236}">
-                <a16:creationId xmlns:a16="http://schemas.microsoft.com/office/drawing/2014/main" id="{F7676EA8-F5C9-48D6-BFDE-333DADF1FCD4}"/>
+                <a16:creationId xmlns:a16="http://schemas.microsoft.com/office/drawing/2014/main" id="{7F6E2DDF-15E3-4A6C-85D7-CF8770CCEC96}"/>
               </a:ext>
             </a:extLst>
           </p:cNvPr>
@@ -5406,7 +5406,7 @@
           <p:cNvPr id="26" name="">
             <a:extLst xmlns:a="http://schemas.openxmlformats.org/drawingml/2006/main">
               <a:ext uri="{FF2B5EF4-FFF2-40B4-BE49-F238E27FC236}">
-                <a16:creationId xmlns:a16="http://schemas.microsoft.com/office/drawing/2014/main" id="{C7D86497-4EF1-4A59-965C-D8E9C32C78FB}"/>
+                <a16:creationId xmlns:a16="http://schemas.microsoft.com/office/drawing/2014/main" id="{9BD8D197-270D-4D5F-B083-ABF13E449ACB}"/>
               </a:ext>
             </a:extLst>
           </p:cNvPr>
@@ -5456,7 +5456,7 @@
           <p:cNvPr id="27" name="">
             <a:extLst xmlns:a="http://schemas.openxmlformats.org/drawingml/2006/main">
               <a:ext uri="{FF2B5EF4-FFF2-40B4-BE49-F238E27FC236}">
-                <a16:creationId xmlns:a16="http://schemas.microsoft.com/office/drawing/2014/main" id="{3DF79D82-04B0-4727-9E00-DA271F29AC13}"/>
+                <a16:creationId xmlns:a16="http://schemas.microsoft.com/office/drawing/2014/main" id="{90BF3252-A85A-48DD-A37E-6A3C258F3305}"/>
               </a:ext>
             </a:extLst>
           </p:cNvPr>
@@ -5506,7 +5506,7 @@
           <p:cNvPr id="28" name="">
             <a:extLst xmlns:a="http://schemas.openxmlformats.org/drawingml/2006/main">
               <a:ext uri="{FF2B5EF4-FFF2-40B4-BE49-F238E27FC236}">
-                <a16:creationId xmlns:a16="http://schemas.microsoft.com/office/drawing/2014/main" id="{B0201237-7F5F-4D7D-9A92-ED106DFDD9F4}"/>
+                <a16:creationId xmlns:a16="http://schemas.microsoft.com/office/drawing/2014/main" id="{19020E52-1436-46D1-8F20-935D033C0A58}"/>
               </a:ext>
             </a:extLst>
           </p:cNvPr>
@@ -5537,7 +5537,7 @@
           <p:cNvPr id="29" name="">
             <a:extLst xmlns:a="http://schemas.openxmlformats.org/drawingml/2006/main">
               <a:ext uri="{FF2B5EF4-FFF2-40B4-BE49-F238E27FC236}">
-                <a16:creationId xmlns:a16="http://schemas.microsoft.com/office/drawing/2014/main" id="{B0BBEFFC-9330-4347-BE7F-9806F6755C91}"/>
+                <a16:creationId xmlns:a16="http://schemas.microsoft.com/office/drawing/2014/main" id="{B3F65F8B-5DD6-4FE3-A82E-36C50583BFA7}"/>
               </a:ext>
             </a:extLst>
           </p:cNvPr>
@@ -5587,7 +5587,7 @@
           <p:cNvPr id="30" name="">
             <a:extLst xmlns:a="http://schemas.openxmlformats.org/drawingml/2006/main">
               <a:ext uri="{FF2B5EF4-FFF2-40B4-BE49-F238E27FC236}">
-                <a16:creationId xmlns:a16="http://schemas.microsoft.com/office/drawing/2014/main" id="{A4E01606-1DFF-4304-975A-169BC5CCCC33}"/>
+                <a16:creationId xmlns:a16="http://schemas.microsoft.com/office/drawing/2014/main" id="{DBB0DBA5-E0FC-497E-876B-B285B3D3CA90}"/>
               </a:ext>
             </a:extLst>
           </p:cNvPr>
@@ -5637,7 +5637,7 @@
           <p:cNvPr id="31" name="">
             <a:extLst xmlns:a="http://schemas.openxmlformats.org/drawingml/2006/main">
               <a:ext uri="{FF2B5EF4-FFF2-40B4-BE49-F238E27FC236}">
-                <a16:creationId xmlns:a16="http://schemas.microsoft.com/office/drawing/2014/main" id="{0154386C-BE9F-4FCD-83A4-CD224542FE8C}"/>
+                <a16:creationId xmlns:a16="http://schemas.microsoft.com/office/drawing/2014/main" id="{DD1BF183-269B-4800-B6A8-E7A0047518B4}"/>
               </a:ext>
             </a:extLst>
           </p:cNvPr>
@@ -5687,7 +5687,7 @@
           <p:cNvPr id="32" name="">
             <a:extLst xmlns:a="http://schemas.openxmlformats.org/drawingml/2006/main">
               <a:ext uri="{FF2B5EF4-FFF2-40B4-BE49-F238E27FC236}">
-                <a16:creationId xmlns:a16="http://schemas.microsoft.com/office/drawing/2014/main" id="{F0EE8525-7904-4938-B8C3-A83CF6846C56}"/>
+                <a16:creationId xmlns:a16="http://schemas.microsoft.com/office/drawing/2014/main" id="{3EE06272-81AB-4211-8A78-75358059006D}"/>
               </a:ext>
             </a:extLst>
           </p:cNvPr>
@@ -5728,7 +5728,7 @@
           <p:cNvPr id="33" name="">
             <a:extLst xmlns:a="http://schemas.openxmlformats.org/drawingml/2006/main">
               <a:ext uri="{FF2B5EF4-FFF2-40B4-BE49-F238E27FC236}">
-                <a16:creationId xmlns:a16="http://schemas.microsoft.com/office/drawing/2014/main" id="{1049343C-34E3-4F4D-90A1-CF69D0588B44}"/>
+                <a16:creationId xmlns:a16="http://schemas.microsoft.com/office/drawing/2014/main" id="{D0670D01-18ED-467E-8E48-D40578959491}"/>
               </a:ext>
             </a:extLst>
           </p:cNvPr>
@@ -5778,7 +5778,7 @@
           <p:cNvPr id="34" name="">
             <a:extLst xmlns:a="http://schemas.openxmlformats.org/drawingml/2006/main">
               <a:ext uri="{FF2B5EF4-FFF2-40B4-BE49-F238E27FC236}">
-                <a16:creationId xmlns:a16="http://schemas.microsoft.com/office/drawing/2014/main" id="{5A55586F-675E-4033-BB26-51B9FF4F394D}"/>
+                <a16:creationId xmlns:a16="http://schemas.microsoft.com/office/drawing/2014/main" id="{41D623E4-051F-4471-B309-ED9ABA20EA84}"/>
               </a:ext>
             </a:extLst>
           </p:cNvPr>
@@ -5835,7 +5835,7 @@
         </p:xfrm>
         <a:graphic xmlns:a="http://schemas.openxmlformats.org/drawingml/2006/main">
           <a:graphicData uri="http://schemas.openxmlformats.org/drawingml/2006/chart">
-            <c:chart xmlns:r="http://schemas.openxmlformats.org/officeDocument/2006/relationships" xmlns:c="http://schemas.openxmlformats.org/drawingml/2006/chart" r:id="R08b464645c5248b1"/>
+            <c:chart xmlns:r="http://schemas.openxmlformats.org/officeDocument/2006/relationships" xmlns:c="http://schemas.openxmlformats.org/drawingml/2006/chart" r:id="Rb1b9b449baa04ea4"/>
           </a:graphicData>
         </a:graphic>
       </p:graphicFrame>
@@ -5844,7 +5844,7 @@
           <p:cNvPr id="36" name="">
             <a:extLst xmlns:a="http://schemas.openxmlformats.org/drawingml/2006/main">
               <a:ext uri="{FF2B5EF4-FFF2-40B4-BE49-F238E27FC236}">
-                <a16:creationId xmlns:a16="http://schemas.microsoft.com/office/drawing/2014/main" id="{A14CCBDE-FB39-4784-B8D7-52D45867BB32}"/>
+                <a16:creationId xmlns:a16="http://schemas.microsoft.com/office/drawing/2014/main" id="{73817B98-7C1D-4F40-B9CB-2C44F261C0E3}"/>
               </a:ext>
             </a:extLst>
           </p:cNvPr>
@@ -5875,7 +5875,7 @@
           <p:cNvPr id="37" name="">
             <a:extLst xmlns:a="http://schemas.openxmlformats.org/drawingml/2006/main">
               <a:ext uri="{FF2B5EF4-FFF2-40B4-BE49-F238E27FC236}">
-                <a16:creationId xmlns:a16="http://schemas.microsoft.com/office/drawing/2014/main" id="{02D1B5C6-CF6B-4233-BA77-C31E0749EBC0}"/>
+                <a16:creationId xmlns:a16="http://schemas.microsoft.com/office/drawing/2014/main" id="{18FE8304-28ED-4243-9808-7CAC1D2D7D34}"/>
               </a:ext>
             </a:extLst>
           </p:cNvPr>
@@ -5925,7 +5925,7 @@
           <p:cNvPr id="38" name="">
             <a:extLst xmlns:a="http://schemas.openxmlformats.org/drawingml/2006/main">
               <a:ext uri="{FF2B5EF4-FFF2-40B4-BE49-F238E27FC236}">
-                <a16:creationId xmlns:a16="http://schemas.microsoft.com/office/drawing/2014/main" id="{502FB42A-683A-4BCD-8980-39130903A9DD}"/>
+                <a16:creationId xmlns:a16="http://schemas.microsoft.com/office/drawing/2014/main" id="{ED86667E-5DB5-46D4-86B2-CF34646F5809}"/>
               </a:ext>
             </a:extLst>
           </p:cNvPr>
@@ -5975,7 +5975,7 @@
           <p:cNvPr id="39" name="">
             <a:extLst xmlns:a="http://schemas.openxmlformats.org/drawingml/2006/main">
               <a:ext uri="{FF2B5EF4-FFF2-40B4-BE49-F238E27FC236}">
-                <a16:creationId xmlns:a16="http://schemas.microsoft.com/office/drawing/2014/main" id="{6EBC78E7-3AD4-45C9-90C8-4041F546B5AF}"/>
+                <a16:creationId xmlns:a16="http://schemas.microsoft.com/office/drawing/2014/main" id="{B331E133-D2DA-4454-86E8-CE892383EAE2}"/>
               </a:ext>
             </a:extLst>
           </p:cNvPr>
@@ -6025,7 +6025,7 @@
           <p:cNvPr id="40" name="">
             <a:extLst xmlns:a="http://schemas.openxmlformats.org/drawingml/2006/main">
               <a:ext uri="{FF2B5EF4-FFF2-40B4-BE49-F238E27FC236}">
-                <a16:creationId xmlns:a16="http://schemas.microsoft.com/office/drawing/2014/main" id="{E197919C-9470-48D6-A8C8-44FB0A73E4DC}"/>
+                <a16:creationId xmlns:a16="http://schemas.microsoft.com/office/drawing/2014/main" id="{8F510225-CC14-4F28-B370-3DBB6A16EC8B}"/>
               </a:ext>
             </a:extLst>
           </p:cNvPr>
@@ -6056,7 +6056,7 @@
           <p:cNvPr id="41" name="">
             <a:extLst xmlns:a="http://schemas.openxmlformats.org/drawingml/2006/main">
               <a:ext uri="{FF2B5EF4-FFF2-40B4-BE49-F238E27FC236}">
-                <a16:creationId xmlns:a16="http://schemas.microsoft.com/office/drawing/2014/main" id="{4CF9B79C-32B1-4C14-AE07-889C5CE4E77D}"/>
+                <a16:creationId xmlns:a16="http://schemas.microsoft.com/office/drawing/2014/main" id="{7BC5D149-8FD2-4C60-87E2-4716EA8E6219}"/>
               </a:ext>
             </a:extLst>
           </p:cNvPr>
@@ -6106,7 +6106,7 @@
           <p:cNvPr id="42" name="">
             <a:extLst xmlns:a="http://schemas.openxmlformats.org/drawingml/2006/main">
               <a:ext uri="{FF2B5EF4-FFF2-40B4-BE49-F238E27FC236}">
-                <a16:creationId xmlns:a16="http://schemas.microsoft.com/office/drawing/2014/main" id="{65CCB642-348B-41BC-A716-F67C8C2F0C6C}"/>
+                <a16:creationId xmlns:a16="http://schemas.microsoft.com/office/drawing/2014/main" id="{251523F7-C378-48EC-AF02-C27AEAC450A1}"/>
               </a:ext>
             </a:extLst>
           </p:cNvPr>
@@ -6156,7 +6156,7 @@
           <p:cNvPr id="43" name="">
             <a:extLst xmlns:a="http://schemas.openxmlformats.org/drawingml/2006/main">
               <a:ext uri="{FF2B5EF4-FFF2-40B4-BE49-F238E27FC236}">
-                <a16:creationId xmlns:a16="http://schemas.microsoft.com/office/drawing/2014/main" id="{494A332B-6955-4C3F-85AB-B00AEA516937}"/>
+                <a16:creationId xmlns:a16="http://schemas.microsoft.com/office/drawing/2014/main" id="{79954268-C694-490D-9068-B403CE65B10E}"/>
               </a:ext>
             </a:extLst>
           </p:cNvPr>
@@ -6206,7 +6206,7 @@
           <p:cNvPr id="44" name="">
             <a:extLst xmlns:a="http://schemas.openxmlformats.org/drawingml/2006/main">
               <a:ext uri="{FF2B5EF4-FFF2-40B4-BE49-F238E27FC236}">
-                <a16:creationId xmlns:a16="http://schemas.microsoft.com/office/drawing/2014/main" id="{A35CAD58-D229-4A19-A924-AB9E240A8A1E}"/>
+                <a16:creationId xmlns:a16="http://schemas.microsoft.com/office/drawing/2014/main" id="{95517683-7ACF-40D9-8510-6B06C427073F}"/>
               </a:ext>
             </a:extLst>
           </p:cNvPr>
@@ -6237,7 +6237,7 @@
           <p:cNvPr id="45" name="">
             <a:extLst xmlns:a="http://schemas.openxmlformats.org/drawingml/2006/main">
               <a:ext uri="{FF2B5EF4-FFF2-40B4-BE49-F238E27FC236}">
-                <a16:creationId xmlns:a16="http://schemas.microsoft.com/office/drawing/2014/main" id="{714CD809-104E-41CA-8288-9E0852F774E9}"/>
+                <a16:creationId xmlns:a16="http://schemas.microsoft.com/office/drawing/2014/main" id="{1ED75842-CE4C-4C7B-85FE-D44A8D44FC2E}"/>
               </a:ext>
             </a:extLst>
           </p:cNvPr>
@@ -6287,7 +6287,7 @@
           <p:cNvPr id="46" name="">
             <a:extLst xmlns:a="http://schemas.openxmlformats.org/drawingml/2006/main">
               <a:ext uri="{FF2B5EF4-FFF2-40B4-BE49-F238E27FC236}">
-                <a16:creationId xmlns:a16="http://schemas.microsoft.com/office/drawing/2014/main" id="{5A630511-E552-410F-801E-0F928D56F664}"/>
+                <a16:creationId xmlns:a16="http://schemas.microsoft.com/office/drawing/2014/main" id="{E34223E6-A51A-40A5-BAA8-F6B2A2CB42B2}"/>
               </a:ext>
             </a:extLst>
           </p:cNvPr>
@@ -6337,7 +6337,7 @@
           <p:cNvPr id="47" name="">
             <a:extLst xmlns:a="http://schemas.openxmlformats.org/drawingml/2006/main">
               <a:ext uri="{FF2B5EF4-FFF2-40B4-BE49-F238E27FC236}">
-                <a16:creationId xmlns:a16="http://schemas.microsoft.com/office/drawing/2014/main" id="{3870D1CB-EA1A-45D9-9ED3-C21E327E171A}"/>
+                <a16:creationId xmlns:a16="http://schemas.microsoft.com/office/drawing/2014/main" id="{A536220D-85E4-4C21-BBE9-587BD95FC902}"/>
               </a:ext>
             </a:extLst>
           </p:cNvPr>
@@ -6387,7 +6387,7 @@
           <p:cNvPr id="48" name="">
             <a:extLst xmlns:a="http://schemas.openxmlformats.org/drawingml/2006/main">
               <a:ext uri="{FF2B5EF4-FFF2-40B4-BE49-F238E27FC236}">
-                <a16:creationId xmlns:a16="http://schemas.microsoft.com/office/drawing/2014/main" id="{003D15F0-59A8-4B27-839F-31472DEC0939}"/>
+                <a16:creationId xmlns:a16="http://schemas.microsoft.com/office/drawing/2014/main" id="{3E6802C8-CC29-433D-AD57-487BB192557E}"/>
               </a:ext>
             </a:extLst>
           </p:cNvPr>
@@ -6418,7 +6418,7 @@
           <p:cNvPr id="49" name="">
             <a:extLst xmlns:a="http://schemas.openxmlformats.org/drawingml/2006/main">
               <a:ext uri="{FF2B5EF4-FFF2-40B4-BE49-F238E27FC236}">
-                <a16:creationId xmlns:a16="http://schemas.microsoft.com/office/drawing/2014/main" id="{DDA23E75-A39A-4721-9559-34AE60D4A650}"/>
+                <a16:creationId xmlns:a16="http://schemas.microsoft.com/office/drawing/2014/main" id="{7C6DC717-4FB3-470D-B875-877FE0DABBEB}"/>
               </a:ext>
             </a:extLst>
           </p:cNvPr>
@@ -6468,7 +6468,7 @@
           <p:cNvPr id="50" name="">
             <a:extLst xmlns:a="http://schemas.openxmlformats.org/drawingml/2006/main">
               <a:ext uri="{FF2B5EF4-FFF2-40B4-BE49-F238E27FC236}">
-                <a16:creationId xmlns:a16="http://schemas.microsoft.com/office/drawing/2014/main" id="{3890C31E-B470-4F94-8251-7C671F343686}"/>
+                <a16:creationId xmlns:a16="http://schemas.microsoft.com/office/drawing/2014/main" id="{0C2D7F18-100C-4738-80E8-E22F86D4982F}"/>
               </a:ext>
             </a:extLst>
           </p:cNvPr>
@@ -6518,7 +6518,7 @@
           <p:cNvPr id="51" name="">
             <a:extLst xmlns:a="http://schemas.openxmlformats.org/drawingml/2006/main">
               <a:ext uri="{FF2B5EF4-FFF2-40B4-BE49-F238E27FC236}">
-                <a16:creationId xmlns:a16="http://schemas.microsoft.com/office/drawing/2014/main" id="{2EBAC9CC-190E-4E0B-A8AB-F924E32D616C}"/>
+                <a16:creationId xmlns:a16="http://schemas.microsoft.com/office/drawing/2014/main" id="{0626B10E-1A4A-425E-AA1A-709455109E99}"/>
               </a:ext>
             </a:extLst>
           </p:cNvPr>
@@ -6568,7 +6568,7 @@
           <p:cNvPr id="52" name="">
             <a:extLst xmlns:a="http://schemas.openxmlformats.org/drawingml/2006/main">
               <a:ext uri="{FF2B5EF4-FFF2-40B4-BE49-F238E27FC236}">
-                <a16:creationId xmlns:a16="http://schemas.microsoft.com/office/drawing/2014/main" id="{A6D82916-E012-4E54-9EBA-9993D0B527C0}"/>
+                <a16:creationId xmlns:a16="http://schemas.microsoft.com/office/drawing/2014/main" id="{944322A9-BCA3-425F-96D0-64914D79D4DC}"/>
               </a:ext>
             </a:extLst>
           </p:cNvPr>
@@ -6599,7 +6599,7 @@
           <p:cNvPr id="53" name="">
             <a:extLst xmlns:a="http://schemas.openxmlformats.org/drawingml/2006/main">
               <a:ext uri="{FF2B5EF4-FFF2-40B4-BE49-F238E27FC236}">
-                <a16:creationId xmlns:a16="http://schemas.microsoft.com/office/drawing/2014/main" id="{A35D17AD-472D-4001-BE23-81AB6D9B49D5}"/>
+                <a16:creationId xmlns:a16="http://schemas.microsoft.com/office/drawing/2014/main" id="{22B174E1-E1AC-4E88-BBFF-EBBBDFE14C30}"/>
               </a:ext>
             </a:extLst>
           </p:cNvPr>
@@ -6649,7 +6649,7 @@
           <p:cNvPr id="54" name="">
             <a:extLst xmlns:a="http://schemas.openxmlformats.org/drawingml/2006/main">
               <a:ext uri="{FF2B5EF4-FFF2-40B4-BE49-F238E27FC236}">
-                <a16:creationId xmlns:a16="http://schemas.microsoft.com/office/drawing/2014/main" id="{8F68CD70-94E3-4961-8794-7CF987EFAD09}"/>
+                <a16:creationId xmlns:a16="http://schemas.microsoft.com/office/drawing/2014/main" id="{6CF16949-C510-45CF-8BCD-CBE1CBB3FA9E}"/>
               </a:ext>
             </a:extLst>
           </p:cNvPr>
@@ -6699,7 +6699,7 @@
           <p:cNvPr id="55" name="">
             <a:extLst xmlns:a="http://schemas.openxmlformats.org/drawingml/2006/main">
               <a:ext uri="{FF2B5EF4-FFF2-40B4-BE49-F238E27FC236}">
-                <a16:creationId xmlns:a16="http://schemas.microsoft.com/office/drawing/2014/main" id="{33B35B1A-BC0A-496B-A32F-27A8236E296B}"/>
+                <a16:creationId xmlns:a16="http://schemas.microsoft.com/office/drawing/2014/main" id="{230870E6-08AA-4A56-97F0-B51F4F6FF2C0}"/>
               </a:ext>
             </a:extLst>
           </p:cNvPr>
@@ -6749,7 +6749,7 @@
           <p:cNvPr id="56" name="">
             <a:extLst xmlns:a="http://schemas.openxmlformats.org/drawingml/2006/main">
               <a:ext uri="{FF2B5EF4-FFF2-40B4-BE49-F238E27FC236}">
-                <a16:creationId xmlns:a16="http://schemas.microsoft.com/office/drawing/2014/main" id="{B7A28BB0-BECA-4B25-8684-B6142C76A77C}"/>
+                <a16:creationId xmlns:a16="http://schemas.microsoft.com/office/drawing/2014/main" id="{5940BEA4-845D-4578-A6CA-AAADDEA38590}"/>
               </a:ext>
             </a:extLst>
           </p:cNvPr>
@@ -6780,7 +6780,7 @@
           <p:cNvPr id="57" name="">
             <a:extLst xmlns:a="http://schemas.openxmlformats.org/drawingml/2006/main">
               <a:ext uri="{FF2B5EF4-FFF2-40B4-BE49-F238E27FC236}">
-                <a16:creationId xmlns:a16="http://schemas.microsoft.com/office/drawing/2014/main" id="{866F80AB-3DBC-4506-B24C-771136A9E25A}"/>
+                <a16:creationId xmlns:a16="http://schemas.microsoft.com/office/drawing/2014/main" id="{99B973D6-CC61-4268-8963-F3CA35133087}"/>
               </a:ext>
             </a:extLst>
           </p:cNvPr>
@@ -6830,7 +6830,7 @@
           <p:cNvPr id="58" name="">
             <a:extLst xmlns:a="http://schemas.openxmlformats.org/drawingml/2006/main">
               <a:ext uri="{FF2B5EF4-FFF2-40B4-BE49-F238E27FC236}">
-                <a16:creationId xmlns:a16="http://schemas.microsoft.com/office/drawing/2014/main" id="{8AFBCB4E-7DE6-4DC9-9B70-59A9C5C3C384}"/>
+                <a16:creationId xmlns:a16="http://schemas.microsoft.com/office/drawing/2014/main" id="{929702D5-21DC-4BDF-904C-01EB02577010}"/>
               </a:ext>
             </a:extLst>
           </p:cNvPr>
@@ -6880,7 +6880,7 @@
           <p:cNvPr id="59" name="">
             <a:extLst xmlns:a="http://schemas.openxmlformats.org/drawingml/2006/main">
               <a:ext uri="{FF2B5EF4-FFF2-40B4-BE49-F238E27FC236}">
-                <a16:creationId xmlns:a16="http://schemas.microsoft.com/office/drawing/2014/main" id="{D22E7C43-59B6-4CA6-94A5-20304D930042}"/>
+                <a16:creationId xmlns:a16="http://schemas.microsoft.com/office/drawing/2014/main" id="{AAD577E2-8A44-401B-A6A9-963C986C1E9E}"/>
               </a:ext>
             </a:extLst>
           </p:cNvPr>
@@ -6930,7 +6930,7 @@
           <p:cNvPr id="60" name="">
             <a:extLst xmlns:a="http://schemas.openxmlformats.org/drawingml/2006/main">
               <a:ext uri="{FF2B5EF4-FFF2-40B4-BE49-F238E27FC236}">
-                <a16:creationId xmlns:a16="http://schemas.microsoft.com/office/drawing/2014/main" id="{A0058B36-BA77-489B-8A23-824D41F873D5}"/>
+                <a16:creationId xmlns:a16="http://schemas.microsoft.com/office/drawing/2014/main" id="{8498A9CD-53B7-4A53-BB75-46B8841C3A47}"/>
               </a:ext>
             </a:extLst>
           </p:cNvPr>
@@ -6971,7 +6971,7 @@
           <p:cNvPr id="61" name="">
             <a:extLst xmlns:a="http://schemas.openxmlformats.org/drawingml/2006/main">
               <a:ext uri="{FF2B5EF4-FFF2-40B4-BE49-F238E27FC236}">
-                <a16:creationId xmlns:a16="http://schemas.microsoft.com/office/drawing/2014/main" id="{D72DFB86-4838-43E4-8FAA-EB8178BE141A}"/>
+                <a16:creationId xmlns:a16="http://schemas.microsoft.com/office/drawing/2014/main" id="{E999D8C9-ED18-4477-B4DB-AD171E230735}"/>
               </a:ext>
             </a:extLst>
           </p:cNvPr>
@@ -7021,7 +7021,7 @@
           <p:cNvPr id="62" name="">
             <a:extLst xmlns:a="http://schemas.openxmlformats.org/drawingml/2006/main">
               <a:ext uri="{FF2B5EF4-FFF2-40B4-BE49-F238E27FC236}">
-                <a16:creationId xmlns:a16="http://schemas.microsoft.com/office/drawing/2014/main" id="{4DA1E6F2-C115-4E4A-A6A2-81769B8F32AC}"/>
+                <a16:creationId xmlns:a16="http://schemas.microsoft.com/office/drawing/2014/main" id="{B0359A5A-8373-4040-8AB7-14FF2DF1748C}"/>
               </a:ext>
             </a:extLst>
           </p:cNvPr>
@@ -7078,7 +7078,7 @@
         </p:xfrm>
         <a:graphic xmlns:a="http://schemas.openxmlformats.org/drawingml/2006/main">
           <a:graphicData uri="http://schemas.openxmlformats.org/drawingml/2006/chart">
-            <c:chart xmlns:r="http://schemas.openxmlformats.org/officeDocument/2006/relationships" xmlns:c="http://schemas.openxmlformats.org/drawingml/2006/chart" r:id="R0a68c5e4fda54dc0"/>
+            <c:chart xmlns:r="http://schemas.openxmlformats.org/officeDocument/2006/relationships" xmlns:c="http://schemas.openxmlformats.org/drawingml/2006/chart" r:id="Re7fa05b884954f06"/>
           </a:graphicData>
         </a:graphic>
       </p:graphicFrame>
@@ -7087,7 +7087,7 @@
           <p:cNvPr id="64" name="">
             <a:extLst xmlns:a="http://schemas.openxmlformats.org/drawingml/2006/main">
               <a:ext uri="{FF2B5EF4-FFF2-40B4-BE49-F238E27FC236}">
-                <a16:creationId xmlns:a16="http://schemas.microsoft.com/office/drawing/2014/main" id="{E355A142-9398-430A-B3E6-8C0F33942A6B}"/>
+                <a16:creationId xmlns:a16="http://schemas.microsoft.com/office/drawing/2014/main" id="{BAB6DA6F-0E4F-4429-85FF-A87610D2F7F1}"/>
               </a:ext>
             </a:extLst>
           </p:cNvPr>
@@ -7118,7 +7118,7 @@
           <p:cNvPr id="65" name="">
             <a:extLst xmlns:a="http://schemas.openxmlformats.org/drawingml/2006/main">
               <a:ext uri="{FF2B5EF4-FFF2-40B4-BE49-F238E27FC236}">
-                <a16:creationId xmlns:a16="http://schemas.microsoft.com/office/drawing/2014/main" id="{200FA245-73E1-4011-9FF0-9E79E71044AA}"/>
+                <a16:creationId xmlns:a16="http://schemas.microsoft.com/office/drawing/2014/main" id="{DC5A70A9-C82F-4C0E-97C9-7A704C0C8ADA}"/>
               </a:ext>
             </a:extLst>
           </p:cNvPr>
@@ -7168,7 +7168,7 @@
           <p:cNvPr id="66" name="">
             <a:extLst xmlns:a="http://schemas.openxmlformats.org/drawingml/2006/main">
               <a:ext uri="{FF2B5EF4-FFF2-40B4-BE49-F238E27FC236}">
-                <a16:creationId xmlns:a16="http://schemas.microsoft.com/office/drawing/2014/main" id="{2542C95B-8CF9-407F-A6BE-3784039C4137}"/>
+                <a16:creationId xmlns:a16="http://schemas.microsoft.com/office/drawing/2014/main" id="{D3F4AC3B-CAC8-4B21-A571-65D99B84C378}"/>
               </a:ext>
             </a:extLst>
           </p:cNvPr>
@@ -7218,7 +7218,7 @@
           <p:cNvPr id="67" name="">
             <a:extLst xmlns:a="http://schemas.openxmlformats.org/drawingml/2006/main">
               <a:ext uri="{FF2B5EF4-FFF2-40B4-BE49-F238E27FC236}">
-                <a16:creationId xmlns:a16="http://schemas.microsoft.com/office/drawing/2014/main" id="{7403B738-975A-4A79-9E08-FDC1E1F3F918}"/>
+                <a16:creationId xmlns:a16="http://schemas.microsoft.com/office/drawing/2014/main" id="{C0C61CAD-B297-4C53-B9A6-4BE40AC3CB30}"/>
               </a:ext>
             </a:extLst>
           </p:cNvPr>
@@ -7268,7 +7268,7 @@
           <p:cNvPr id="68" name="">
             <a:extLst xmlns:a="http://schemas.openxmlformats.org/drawingml/2006/main">
               <a:ext uri="{FF2B5EF4-FFF2-40B4-BE49-F238E27FC236}">
-                <a16:creationId xmlns:a16="http://schemas.microsoft.com/office/drawing/2014/main" id="{5B2FE3F8-3CC9-4668-9673-49AAF3F71446}"/>
+                <a16:creationId xmlns:a16="http://schemas.microsoft.com/office/drawing/2014/main" id="{11175EF5-7B17-44E2-966A-7C0BC5583635}"/>
               </a:ext>
             </a:extLst>
           </p:cNvPr>
@@ -7299,7 +7299,7 @@
           <p:cNvPr id="69" name="">
             <a:extLst xmlns:a="http://schemas.openxmlformats.org/drawingml/2006/main">
               <a:ext uri="{FF2B5EF4-FFF2-40B4-BE49-F238E27FC236}">
-                <a16:creationId xmlns:a16="http://schemas.microsoft.com/office/drawing/2014/main" id="{72AE98D2-94B1-4520-B2DE-64E1524C3C28}"/>
+                <a16:creationId xmlns:a16="http://schemas.microsoft.com/office/drawing/2014/main" id="{A0596240-A9CF-4D99-8F9E-ED0FB2849F6A}"/>
               </a:ext>
             </a:extLst>
           </p:cNvPr>
@@ -7349,7 +7349,7 @@
           <p:cNvPr id="70" name="">
             <a:extLst xmlns:a="http://schemas.openxmlformats.org/drawingml/2006/main">
               <a:ext uri="{FF2B5EF4-FFF2-40B4-BE49-F238E27FC236}">
-                <a16:creationId xmlns:a16="http://schemas.microsoft.com/office/drawing/2014/main" id="{6B750F1A-593C-44DD-BE1F-88451EE3C75B}"/>
+                <a16:creationId xmlns:a16="http://schemas.microsoft.com/office/drawing/2014/main" id="{08EAA16B-C135-4CAD-AC24-DB96C59E7CF6}"/>
               </a:ext>
             </a:extLst>
           </p:cNvPr>
@@ -7399,7 +7399,7 @@
           <p:cNvPr id="71" name="">
             <a:extLst xmlns:a="http://schemas.openxmlformats.org/drawingml/2006/main">
               <a:ext uri="{FF2B5EF4-FFF2-40B4-BE49-F238E27FC236}">
-                <a16:creationId xmlns:a16="http://schemas.microsoft.com/office/drawing/2014/main" id="{90B2FABF-8075-4A77-A847-873D50C62818}"/>
+                <a16:creationId xmlns:a16="http://schemas.microsoft.com/office/drawing/2014/main" id="{82DDB580-8C73-4DCF-AADE-386D1333514E}"/>
               </a:ext>
             </a:extLst>
           </p:cNvPr>
@@ -7449,7 +7449,7 @@
           <p:cNvPr id="72" name="">
             <a:extLst xmlns:a="http://schemas.openxmlformats.org/drawingml/2006/main">
               <a:ext uri="{FF2B5EF4-FFF2-40B4-BE49-F238E27FC236}">
-                <a16:creationId xmlns:a16="http://schemas.microsoft.com/office/drawing/2014/main" id="{B42E1575-D0B5-48C4-B574-2352C0A747F9}"/>
+                <a16:creationId xmlns:a16="http://schemas.microsoft.com/office/drawing/2014/main" id="{A3D47704-D94A-4F17-8CCD-6AB945A141B3}"/>
               </a:ext>
             </a:extLst>
           </p:cNvPr>
@@ -7480,7 +7480,7 @@
           <p:cNvPr id="73" name="">
             <a:extLst xmlns:a="http://schemas.openxmlformats.org/drawingml/2006/main">
               <a:ext uri="{FF2B5EF4-FFF2-40B4-BE49-F238E27FC236}">
-                <a16:creationId xmlns:a16="http://schemas.microsoft.com/office/drawing/2014/main" id="{7BCB3171-5F6E-4C56-A3F9-20EDDCE958DD}"/>
+                <a16:creationId xmlns:a16="http://schemas.microsoft.com/office/drawing/2014/main" id="{A3431812-C098-4AAE-9EB8-C59BC7166786}"/>
               </a:ext>
             </a:extLst>
           </p:cNvPr>
@@ -7530,7 +7530,7 @@
           <p:cNvPr id="74" name="">
             <a:extLst xmlns:a="http://schemas.openxmlformats.org/drawingml/2006/main">
               <a:ext uri="{FF2B5EF4-FFF2-40B4-BE49-F238E27FC236}">
-                <a16:creationId xmlns:a16="http://schemas.microsoft.com/office/drawing/2014/main" id="{03CA8270-DA68-4CE9-95A2-3B7FD1D1C454}"/>
+                <a16:creationId xmlns:a16="http://schemas.microsoft.com/office/drawing/2014/main" id="{82D05892-13A8-4EEF-86E2-14E4135C0909}"/>
               </a:ext>
             </a:extLst>
           </p:cNvPr>
@@ -7580,7 +7580,7 @@
           <p:cNvPr id="75" name="">
             <a:extLst xmlns:a="http://schemas.openxmlformats.org/drawingml/2006/main">
               <a:ext uri="{FF2B5EF4-FFF2-40B4-BE49-F238E27FC236}">
-                <a16:creationId xmlns:a16="http://schemas.microsoft.com/office/drawing/2014/main" id="{B9EC3369-2789-45F3-8192-BC159202288F}"/>
+                <a16:creationId xmlns:a16="http://schemas.microsoft.com/office/drawing/2014/main" id="{E8F00E01-15B0-409F-B621-DE13F4D38B02}"/>
               </a:ext>
             </a:extLst>
           </p:cNvPr>
@@ -7630,7 +7630,7 @@
           <p:cNvPr id="76" name="">
             <a:extLst xmlns:a="http://schemas.openxmlformats.org/drawingml/2006/main">
               <a:ext uri="{FF2B5EF4-FFF2-40B4-BE49-F238E27FC236}">
-                <a16:creationId xmlns:a16="http://schemas.microsoft.com/office/drawing/2014/main" id="{9505185E-FF2B-4C06-8F59-FD4019984BCF}"/>
+                <a16:creationId xmlns:a16="http://schemas.microsoft.com/office/drawing/2014/main" id="{C6BBF034-2EE0-448A-A3FA-E0B83DFD4B51}"/>
               </a:ext>
             </a:extLst>
           </p:cNvPr>
@@ -7661,7 +7661,7 @@
           <p:cNvPr id="77" name="">
             <a:extLst xmlns:a="http://schemas.openxmlformats.org/drawingml/2006/main">
               <a:ext uri="{FF2B5EF4-FFF2-40B4-BE49-F238E27FC236}">
-                <a16:creationId xmlns:a16="http://schemas.microsoft.com/office/drawing/2014/main" id="{07A5CEF1-19C9-4815-A209-0ED238DE2F9D}"/>
+                <a16:creationId xmlns:a16="http://schemas.microsoft.com/office/drawing/2014/main" id="{585B4479-49D4-490A-9015-7A17DC55A6D4}"/>
               </a:ext>
             </a:extLst>
           </p:cNvPr>
@@ -7711,7 +7711,7 @@
           <p:cNvPr id="78" name="">
             <a:extLst xmlns:a="http://schemas.openxmlformats.org/drawingml/2006/main">
               <a:ext uri="{FF2B5EF4-FFF2-40B4-BE49-F238E27FC236}">
-                <a16:creationId xmlns:a16="http://schemas.microsoft.com/office/drawing/2014/main" id="{CDBD41F7-B3BF-49FD-A427-85399F30784D}"/>
+                <a16:creationId xmlns:a16="http://schemas.microsoft.com/office/drawing/2014/main" id="{6CC7C470-C55F-4903-AA64-8D0CED7519E6}"/>
               </a:ext>
             </a:extLst>
           </p:cNvPr>
@@ -7761,7 +7761,7 @@
           <p:cNvPr id="79" name="">
             <a:extLst xmlns:a="http://schemas.openxmlformats.org/drawingml/2006/main">
               <a:ext uri="{FF2B5EF4-FFF2-40B4-BE49-F238E27FC236}">
-                <a16:creationId xmlns:a16="http://schemas.microsoft.com/office/drawing/2014/main" id="{7A395CEF-BE8E-4ABF-AA41-118D3DDECA39}"/>
+                <a16:creationId xmlns:a16="http://schemas.microsoft.com/office/drawing/2014/main" id="{F23C7DAD-8643-46A5-A3B2-91244FD64572}"/>
               </a:ext>
             </a:extLst>
           </p:cNvPr>
@@ -7811,7 +7811,7 @@
           <p:cNvPr id="80" name="">
             <a:extLst xmlns:a="http://schemas.openxmlformats.org/drawingml/2006/main">
               <a:ext uri="{FF2B5EF4-FFF2-40B4-BE49-F238E27FC236}">
-                <a16:creationId xmlns:a16="http://schemas.microsoft.com/office/drawing/2014/main" id="{8B5C7D77-9291-47AA-A4CE-2D988059704A}"/>
+                <a16:creationId xmlns:a16="http://schemas.microsoft.com/office/drawing/2014/main" id="{8BCAD459-6813-4037-ABB4-4FE56F8D626E}"/>
               </a:ext>
             </a:extLst>
           </p:cNvPr>
@@ -7842,7 +7842,7 @@
           <p:cNvPr id="81" name="">
             <a:extLst xmlns:a="http://schemas.openxmlformats.org/drawingml/2006/main">
               <a:ext uri="{FF2B5EF4-FFF2-40B4-BE49-F238E27FC236}">
-                <a16:creationId xmlns:a16="http://schemas.microsoft.com/office/drawing/2014/main" id="{9537EC5E-9519-44EF-8ECE-101377D08F35}"/>
+                <a16:creationId xmlns:a16="http://schemas.microsoft.com/office/drawing/2014/main" id="{F8F8F4D6-8BA4-49A2-8696-F6C724836699}"/>
               </a:ext>
             </a:extLst>
           </p:cNvPr>
@@ -7892,7 +7892,7 @@
           <p:cNvPr id="82" name="">
             <a:extLst xmlns:a="http://schemas.openxmlformats.org/drawingml/2006/main">
               <a:ext uri="{FF2B5EF4-FFF2-40B4-BE49-F238E27FC236}">
-                <a16:creationId xmlns:a16="http://schemas.microsoft.com/office/drawing/2014/main" id="{332CF66F-C294-4E2D-9AF7-A2CEFFBD5C84}"/>
+                <a16:creationId xmlns:a16="http://schemas.microsoft.com/office/drawing/2014/main" id="{F2152D0C-B6AC-40E4-B64B-DC30D9CB28CF}"/>
               </a:ext>
             </a:extLst>
           </p:cNvPr>
@@ -7942,7 +7942,7 @@
           <p:cNvPr id="83" name="">
             <a:extLst xmlns:a="http://schemas.openxmlformats.org/drawingml/2006/main">
               <a:ext uri="{FF2B5EF4-FFF2-40B4-BE49-F238E27FC236}">
-                <a16:creationId xmlns:a16="http://schemas.microsoft.com/office/drawing/2014/main" id="{D3D0304D-4F19-4D7A-97D5-71E67FF89738}"/>
+                <a16:creationId xmlns:a16="http://schemas.microsoft.com/office/drawing/2014/main" id="{82D8C6EC-1132-4C75-B9F2-EDCA7706F262}"/>
               </a:ext>
             </a:extLst>
           </p:cNvPr>
@@ -7992,7 +7992,7 @@
           <p:cNvPr id="84" name="">
             <a:extLst xmlns:a="http://schemas.openxmlformats.org/drawingml/2006/main">
               <a:ext uri="{FF2B5EF4-FFF2-40B4-BE49-F238E27FC236}">
-                <a16:creationId xmlns:a16="http://schemas.microsoft.com/office/drawing/2014/main" id="{B6AC3084-B931-4AC8-AE7B-5427C1068B7E}"/>
+                <a16:creationId xmlns:a16="http://schemas.microsoft.com/office/drawing/2014/main" id="{237C5BA4-4733-4152-B3AC-EB5A0FB6A70F}"/>
               </a:ext>
             </a:extLst>
           </p:cNvPr>
@@ -8023,7 +8023,7 @@
           <p:cNvPr id="85" name="">
             <a:extLst xmlns:a="http://schemas.openxmlformats.org/drawingml/2006/main">
               <a:ext uri="{FF2B5EF4-FFF2-40B4-BE49-F238E27FC236}">
-                <a16:creationId xmlns:a16="http://schemas.microsoft.com/office/drawing/2014/main" id="{6565D9E8-DB9B-4232-9BB3-E81D43706AF1}"/>
+                <a16:creationId xmlns:a16="http://schemas.microsoft.com/office/drawing/2014/main" id="{3B3DE86C-56A1-48ED-8FF3-0B130765A902}"/>
               </a:ext>
             </a:extLst>
           </p:cNvPr>
@@ -8073,7 +8073,7 @@
           <p:cNvPr id="86" name="">
             <a:extLst xmlns:a="http://schemas.openxmlformats.org/drawingml/2006/main">
               <a:ext uri="{FF2B5EF4-FFF2-40B4-BE49-F238E27FC236}">
-                <a16:creationId xmlns:a16="http://schemas.microsoft.com/office/drawing/2014/main" id="{36954442-4FB1-40B2-8173-8F50CCC0661D}"/>
+                <a16:creationId xmlns:a16="http://schemas.microsoft.com/office/drawing/2014/main" id="{E60D491E-68E8-454B-AD34-17FB22AC3198}"/>
               </a:ext>
             </a:extLst>
           </p:cNvPr>
@@ -8123,7 +8123,7 @@
           <p:cNvPr id="87" name="">
             <a:extLst xmlns:a="http://schemas.openxmlformats.org/drawingml/2006/main">
               <a:ext uri="{FF2B5EF4-FFF2-40B4-BE49-F238E27FC236}">
-                <a16:creationId xmlns:a16="http://schemas.microsoft.com/office/drawing/2014/main" id="{CF04CB1D-9C0D-4640-9840-554EC494DD2A}"/>
+                <a16:creationId xmlns:a16="http://schemas.microsoft.com/office/drawing/2014/main" id="{9FDF2919-A6AC-4829-A09B-1D9EF3F701A9}"/>
               </a:ext>
             </a:extLst>
           </p:cNvPr>
@@ -8173,7 +8173,7 @@
           <p:cNvPr id="88" name="">
             <a:extLst xmlns:a="http://schemas.openxmlformats.org/drawingml/2006/main">
               <a:ext uri="{FF2B5EF4-FFF2-40B4-BE49-F238E27FC236}">
-                <a16:creationId xmlns:a16="http://schemas.microsoft.com/office/drawing/2014/main" id="{3FFA486E-6937-48AA-954F-0DDC754BB40B}"/>
+                <a16:creationId xmlns:a16="http://schemas.microsoft.com/office/drawing/2014/main" id="{818D86B9-E93E-42F2-A79B-8DE79CB9FEA9}"/>
               </a:ext>
             </a:extLst>
           </p:cNvPr>
@@ -8214,7 +8214,7 @@
           <p:cNvPr id="89" name="">
             <a:extLst xmlns:a="http://schemas.openxmlformats.org/drawingml/2006/main">
               <a:ext uri="{FF2B5EF4-FFF2-40B4-BE49-F238E27FC236}">
-                <a16:creationId xmlns:a16="http://schemas.microsoft.com/office/drawing/2014/main" id="{D2BD3E0D-7E00-4896-AE58-3F95A8E2B457}"/>
+                <a16:creationId xmlns:a16="http://schemas.microsoft.com/office/drawing/2014/main" id="{FC49CC2C-1927-496A-92D6-778B9B494BAC}"/>
               </a:ext>
             </a:extLst>
           </p:cNvPr>
@@ -8264,7 +8264,7 @@
           <p:cNvPr id="90" name="">
             <a:extLst xmlns:a="http://schemas.openxmlformats.org/drawingml/2006/main">
               <a:ext uri="{FF2B5EF4-FFF2-40B4-BE49-F238E27FC236}">
-                <a16:creationId xmlns:a16="http://schemas.microsoft.com/office/drawing/2014/main" id="{0D457773-6444-46AF-B080-57C71CD026DF}"/>
+                <a16:creationId xmlns:a16="http://schemas.microsoft.com/office/drawing/2014/main" id="{515038F6-0108-4A0C-B7B1-A554F05621DD}"/>
               </a:ext>
             </a:extLst>
           </p:cNvPr>
@@ -8321,7 +8321,7 @@
         </p:xfrm>
         <a:graphic xmlns:a="http://schemas.openxmlformats.org/drawingml/2006/main">
           <a:graphicData uri="http://schemas.openxmlformats.org/drawingml/2006/chart">
-            <c:chart xmlns:r="http://schemas.openxmlformats.org/officeDocument/2006/relationships" xmlns:c="http://schemas.openxmlformats.org/drawingml/2006/chart" r:id="Rbdb0347ab1b7422a"/>
+            <c:chart xmlns:r="http://schemas.openxmlformats.org/officeDocument/2006/relationships" xmlns:c="http://schemas.openxmlformats.org/drawingml/2006/chart" r:id="Re4c87f6ce7df4941"/>
           </a:graphicData>
         </a:graphic>
       </p:graphicFrame>
@@ -8330,7 +8330,7 @@
           <p:cNvPr id="92" name="">
             <a:extLst xmlns:a="http://schemas.openxmlformats.org/drawingml/2006/main">
               <a:ext uri="{FF2B5EF4-FFF2-40B4-BE49-F238E27FC236}">
-                <a16:creationId xmlns:a16="http://schemas.microsoft.com/office/drawing/2014/main" id="{8806B8F0-3317-42A8-BDBA-715B1720A237}"/>
+                <a16:creationId xmlns:a16="http://schemas.microsoft.com/office/drawing/2014/main" id="{941FDBB2-8C9C-426E-B6DA-D1E76DF71076}"/>
               </a:ext>
             </a:extLst>
           </p:cNvPr>
@@ -8361,7 +8361,7 @@
           <p:cNvPr id="93" name="">
             <a:extLst xmlns:a="http://schemas.openxmlformats.org/drawingml/2006/main">
               <a:ext uri="{FF2B5EF4-FFF2-40B4-BE49-F238E27FC236}">
-                <a16:creationId xmlns:a16="http://schemas.microsoft.com/office/drawing/2014/main" id="{B36CD2DE-122A-45F6-BDA8-F02F19A0A2F4}"/>
+                <a16:creationId xmlns:a16="http://schemas.microsoft.com/office/drawing/2014/main" id="{AE52B68B-C336-49F5-88F7-31BB2AE31F66}"/>
               </a:ext>
             </a:extLst>
           </p:cNvPr>
@@ -8411,7 +8411,7 @@
           <p:cNvPr id="94" name="">
             <a:extLst xmlns:a="http://schemas.openxmlformats.org/drawingml/2006/main">
               <a:ext uri="{FF2B5EF4-FFF2-40B4-BE49-F238E27FC236}">
-                <a16:creationId xmlns:a16="http://schemas.microsoft.com/office/drawing/2014/main" id="{752E0EFC-CB78-4876-B460-1A0E5BD1ECB1}"/>
+                <a16:creationId xmlns:a16="http://schemas.microsoft.com/office/drawing/2014/main" id="{C0A0A66C-242C-4E9B-AA3C-B3773D99CBD1}"/>
               </a:ext>
             </a:extLst>
           </p:cNvPr>
@@ -8461,7 +8461,7 @@
           <p:cNvPr id="95" name="">
             <a:extLst xmlns:a="http://schemas.openxmlformats.org/drawingml/2006/main">
               <a:ext uri="{FF2B5EF4-FFF2-40B4-BE49-F238E27FC236}">
-                <a16:creationId xmlns:a16="http://schemas.microsoft.com/office/drawing/2014/main" id="{CF79FEBA-6957-4A86-854C-A4D9F697F54C}"/>
+                <a16:creationId xmlns:a16="http://schemas.microsoft.com/office/drawing/2014/main" id="{3741D688-5CD0-428E-88BD-05AFC3E64213}"/>
               </a:ext>
             </a:extLst>
           </p:cNvPr>
@@ -8511,7 +8511,7 @@
           <p:cNvPr id="96" name="">
             <a:extLst xmlns:a="http://schemas.openxmlformats.org/drawingml/2006/main">
               <a:ext uri="{FF2B5EF4-FFF2-40B4-BE49-F238E27FC236}">
-                <a16:creationId xmlns:a16="http://schemas.microsoft.com/office/drawing/2014/main" id="{B19E1433-4030-43C8-8BCE-8E0987AC571C}"/>
+                <a16:creationId xmlns:a16="http://schemas.microsoft.com/office/drawing/2014/main" id="{ED16D225-9A07-4B46-83D8-A81929FAE416}"/>
               </a:ext>
             </a:extLst>
           </p:cNvPr>
@@ -8542,7 +8542,7 @@
           <p:cNvPr id="97" name="">
             <a:extLst xmlns:a="http://schemas.openxmlformats.org/drawingml/2006/main">
               <a:ext uri="{FF2B5EF4-FFF2-40B4-BE49-F238E27FC236}">
-                <a16:creationId xmlns:a16="http://schemas.microsoft.com/office/drawing/2014/main" id="{DD434F33-E64D-4C9B-8DFC-C26A885FD730}"/>
+                <a16:creationId xmlns:a16="http://schemas.microsoft.com/office/drawing/2014/main" id="{BD05F389-5197-4E44-982B-851202993602}"/>
               </a:ext>
             </a:extLst>
           </p:cNvPr>
@@ -8592,7 +8592,7 @@
           <p:cNvPr id="98" name="">
             <a:extLst xmlns:a="http://schemas.openxmlformats.org/drawingml/2006/main">
               <a:ext uri="{FF2B5EF4-FFF2-40B4-BE49-F238E27FC236}">
-                <a16:creationId xmlns:a16="http://schemas.microsoft.com/office/drawing/2014/main" id="{3E95FC16-4ACF-4442-B44E-2A5723475258}"/>
+                <a16:creationId xmlns:a16="http://schemas.microsoft.com/office/drawing/2014/main" id="{A9D30F2F-1496-4E1F-8A7F-B574E23C0582}"/>
               </a:ext>
             </a:extLst>
           </p:cNvPr>
@@ -8642,7 +8642,7 @@
           <p:cNvPr id="99" name="">
             <a:extLst xmlns:a="http://schemas.openxmlformats.org/drawingml/2006/main">
               <a:ext uri="{FF2B5EF4-FFF2-40B4-BE49-F238E27FC236}">
-                <a16:creationId xmlns:a16="http://schemas.microsoft.com/office/drawing/2014/main" id="{933FB748-EB3B-4011-B2CA-C6019EE5544B}"/>
+                <a16:creationId xmlns:a16="http://schemas.microsoft.com/office/drawing/2014/main" id="{6611E664-9A2F-4986-864E-80BA3A657FF7}"/>
               </a:ext>
             </a:extLst>
           </p:cNvPr>
@@ -8692,7 +8692,7 @@
           <p:cNvPr id="100" name="">
             <a:extLst xmlns:a="http://schemas.openxmlformats.org/drawingml/2006/main">
               <a:ext uri="{FF2B5EF4-FFF2-40B4-BE49-F238E27FC236}">
-                <a16:creationId xmlns:a16="http://schemas.microsoft.com/office/drawing/2014/main" id="{4F34D89E-5154-46D3-AAA5-1AD3E3A20B4A}"/>
+                <a16:creationId xmlns:a16="http://schemas.microsoft.com/office/drawing/2014/main" id="{35AB0254-82DF-454D-B203-348BE0822065}"/>
               </a:ext>
             </a:extLst>
           </p:cNvPr>
@@ -8723,7 +8723,7 @@
           <p:cNvPr id="101" name="">
             <a:extLst xmlns:a="http://schemas.openxmlformats.org/drawingml/2006/main">
               <a:ext uri="{FF2B5EF4-FFF2-40B4-BE49-F238E27FC236}">
-                <a16:creationId xmlns:a16="http://schemas.microsoft.com/office/drawing/2014/main" id="{32452C0A-114A-4EC2-B74B-35A2556E4A81}"/>
+                <a16:creationId xmlns:a16="http://schemas.microsoft.com/office/drawing/2014/main" id="{6B51F218-4A08-4684-B2DE-A2ABCC8E3659}"/>
               </a:ext>
             </a:extLst>
           </p:cNvPr>
@@ -8773,7 +8773,7 @@
           <p:cNvPr id="102" name="">
             <a:extLst xmlns:a="http://schemas.openxmlformats.org/drawingml/2006/main">
               <a:ext uri="{FF2B5EF4-FFF2-40B4-BE49-F238E27FC236}">
-                <a16:creationId xmlns:a16="http://schemas.microsoft.com/office/drawing/2014/main" id="{95DEFB4E-5C41-44D2-B397-51B00DAB07F3}"/>
+                <a16:creationId xmlns:a16="http://schemas.microsoft.com/office/drawing/2014/main" id="{CD6B5CBE-E79E-48AC-84F5-2670E800D3E2}"/>
               </a:ext>
             </a:extLst>
           </p:cNvPr>
@@ -8823,7 +8823,7 @@
           <p:cNvPr id="103" name="">
             <a:extLst xmlns:a="http://schemas.openxmlformats.org/drawingml/2006/main">
               <a:ext uri="{FF2B5EF4-FFF2-40B4-BE49-F238E27FC236}">
-                <a16:creationId xmlns:a16="http://schemas.microsoft.com/office/drawing/2014/main" id="{6B4F0452-5DFB-4819-8ABA-6F6C0F6D3462}"/>
+                <a16:creationId xmlns:a16="http://schemas.microsoft.com/office/drawing/2014/main" id="{4D96FE08-8DEC-4454-B98C-7A427875E416}"/>
               </a:ext>
             </a:extLst>
           </p:cNvPr>
@@ -8873,7 +8873,7 @@
           <p:cNvPr id="104" name="">
             <a:extLst xmlns:a="http://schemas.openxmlformats.org/drawingml/2006/main">
               <a:ext uri="{FF2B5EF4-FFF2-40B4-BE49-F238E27FC236}">
-                <a16:creationId xmlns:a16="http://schemas.microsoft.com/office/drawing/2014/main" id="{760613CD-FF99-41EE-8688-FCAFA6EABC3F}"/>
+                <a16:creationId xmlns:a16="http://schemas.microsoft.com/office/drawing/2014/main" id="{38349CF6-9439-46CC-B4F6-6E245587EC9C}"/>
               </a:ext>
             </a:extLst>
           </p:cNvPr>
@@ -8904,7 +8904,7 @@
           <p:cNvPr id="105" name="">
             <a:extLst xmlns:a="http://schemas.openxmlformats.org/drawingml/2006/main">
               <a:ext uri="{FF2B5EF4-FFF2-40B4-BE49-F238E27FC236}">
-                <a16:creationId xmlns:a16="http://schemas.microsoft.com/office/drawing/2014/main" id="{9827B9DD-417F-40D7-80B7-0C274CBA213E}"/>
+                <a16:creationId xmlns:a16="http://schemas.microsoft.com/office/drawing/2014/main" id="{DEAC53B9-20DC-45F7-8BE9-A857FD76644E}"/>
               </a:ext>
             </a:extLst>
           </p:cNvPr>
@@ -8954,7 +8954,7 @@
           <p:cNvPr id="106" name="">
             <a:extLst xmlns:a="http://schemas.openxmlformats.org/drawingml/2006/main">
               <a:ext uri="{FF2B5EF4-FFF2-40B4-BE49-F238E27FC236}">
-                <a16:creationId xmlns:a16="http://schemas.microsoft.com/office/drawing/2014/main" id="{F3C28438-4E81-44E3-9C86-1CC964590D3F}"/>
+                <a16:creationId xmlns:a16="http://schemas.microsoft.com/office/drawing/2014/main" id="{A810BBBF-5D1C-4892-A1BA-AA2CC32E9E95}"/>
               </a:ext>
             </a:extLst>
           </p:cNvPr>
@@ -9004,7 +9004,7 @@
           <p:cNvPr id="107" name="">
             <a:extLst xmlns:a="http://schemas.openxmlformats.org/drawingml/2006/main">
               <a:ext uri="{FF2B5EF4-FFF2-40B4-BE49-F238E27FC236}">
-                <a16:creationId xmlns:a16="http://schemas.microsoft.com/office/drawing/2014/main" id="{F8F11DA9-1AD7-4730-8FF1-C0FEA8A35BA7}"/>
+                <a16:creationId xmlns:a16="http://schemas.microsoft.com/office/drawing/2014/main" id="{AADA0492-E270-4CF4-9F36-7C76DD1EBCB8}"/>
               </a:ext>
             </a:extLst>
           </p:cNvPr>
@@ -9054,7 +9054,7 @@
           <p:cNvPr id="108" name="">
             <a:extLst xmlns:a="http://schemas.openxmlformats.org/drawingml/2006/main">
               <a:ext uri="{FF2B5EF4-FFF2-40B4-BE49-F238E27FC236}">
-                <a16:creationId xmlns:a16="http://schemas.microsoft.com/office/drawing/2014/main" id="{DDBAE5A9-B3F6-451D-B0B5-D65926405AD8}"/>
+                <a16:creationId xmlns:a16="http://schemas.microsoft.com/office/drawing/2014/main" id="{19120F34-9E32-4FC0-BFE7-D84EA7AA0D51}"/>
               </a:ext>
             </a:extLst>
           </p:cNvPr>
@@ -9085,7 +9085,7 @@
           <p:cNvPr id="109" name="">
             <a:extLst xmlns:a="http://schemas.openxmlformats.org/drawingml/2006/main">
               <a:ext uri="{FF2B5EF4-FFF2-40B4-BE49-F238E27FC236}">
-                <a16:creationId xmlns:a16="http://schemas.microsoft.com/office/drawing/2014/main" id="{2CBD4479-447D-460B-B957-EC8F0B9A7ABD}"/>
+                <a16:creationId xmlns:a16="http://schemas.microsoft.com/office/drawing/2014/main" id="{9E5C1777-0670-4D4A-8863-B3CFD9ABE738}"/>
               </a:ext>
             </a:extLst>
           </p:cNvPr>
@@ -9135,7 +9135,7 @@
           <p:cNvPr id="110" name="">
             <a:extLst xmlns:a="http://schemas.openxmlformats.org/drawingml/2006/main">
               <a:ext uri="{FF2B5EF4-FFF2-40B4-BE49-F238E27FC236}">
-                <a16:creationId xmlns:a16="http://schemas.microsoft.com/office/drawing/2014/main" id="{614F495A-789B-4C7C-8FDE-73F4EB3C7B81}"/>
+                <a16:creationId xmlns:a16="http://schemas.microsoft.com/office/drawing/2014/main" id="{4803076D-220B-424A-816F-73B52B70DCC4}"/>
               </a:ext>
             </a:extLst>
           </p:cNvPr>
@@ -9185,7 +9185,7 @@
           <p:cNvPr id="111" name="">
             <a:extLst xmlns:a="http://schemas.openxmlformats.org/drawingml/2006/main">
               <a:ext uri="{FF2B5EF4-FFF2-40B4-BE49-F238E27FC236}">
-                <a16:creationId xmlns:a16="http://schemas.microsoft.com/office/drawing/2014/main" id="{7DE3628E-D91A-441C-A338-84D09D696B2D}"/>
+                <a16:creationId xmlns:a16="http://schemas.microsoft.com/office/drawing/2014/main" id="{099B21DB-D764-4459-BF39-7B1718CAFF1F}"/>
               </a:ext>
             </a:extLst>
           </p:cNvPr>
@@ -9235,7 +9235,7 @@
           <p:cNvPr id="112" name="">
             <a:extLst xmlns:a="http://schemas.openxmlformats.org/drawingml/2006/main">
               <a:ext uri="{FF2B5EF4-FFF2-40B4-BE49-F238E27FC236}">
-                <a16:creationId xmlns:a16="http://schemas.microsoft.com/office/drawing/2014/main" id="{03184752-8AE9-4714-ADC8-B535F0975698}"/>
+                <a16:creationId xmlns:a16="http://schemas.microsoft.com/office/drawing/2014/main" id="{B21B9718-C9B1-4355-A594-C96AC3AB7F65}"/>
               </a:ext>
             </a:extLst>
           </p:cNvPr>
@@ -9266,7 +9266,7 @@
           <p:cNvPr id="113" name="">
             <a:extLst xmlns:a="http://schemas.openxmlformats.org/drawingml/2006/main">
               <a:ext uri="{FF2B5EF4-FFF2-40B4-BE49-F238E27FC236}">
-                <a16:creationId xmlns:a16="http://schemas.microsoft.com/office/drawing/2014/main" id="{29C1234B-C30D-4957-8A8D-28F52497682F}"/>
+                <a16:creationId xmlns:a16="http://schemas.microsoft.com/office/drawing/2014/main" id="{7E61FCD8-7D65-4AFC-AFF9-2F89AD6732FC}"/>
               </a:ext>
             </a:extLst>
           </p:cNvPr>
@@ -9316,7 +9316,7 @@
           <p:cNvPr id="114" name="">
             <a:extLst xmlns:a="http://schemas.openxmlformats.org/drawingml/2006/main">
               <a:ext uri="{FF2B5EF4-FFF2-40B4-BE49-F238E27FC236}">
-                <a16:creationId xmlns:a16="http://schemas.microsoft.com/office/drawing/2014/main" id="{297DE330-0C06-44B7-A6B1-42CA69FF3F0E}"/>
+                <a16:creationId xmlns:a16="http://schemas.microsoft.com/office/drawing/2014/main" id="{B6E5BE87-33EC-471D-8BDF-21D7F5C765E6}"/>
               </a:ext>
             </a:extLst>
           </p:cNvPr>
@@ -9366,7 +9366,7 @@
           <p:cNvPr id="115" name="">
             <a:extLst xmlns:a="http://schemas.openxmlformats.org/drawingml/2006/main">
               <a:ext uri="{FF2B5EF4-FFF2-40B4-BE49-F238E27FC236}">
-                <a16:creationId xmlns:a16="http://schemas.microsoft.com/office/drawing/2014/main" id="{D51FCA76-06D6-4B8B-B9FA-5FF761C93528}"/>
+                <a16:creationId xmlns:a16="http://schemas.microsoft.com/office/drawing/2014/main" id="{B0A2C33A-480C-4480-8D18-1383666B73F8}"/>
               </a:ext>
             </a:extLst>
           </p:cNvPr>
@@ -9416,7 +9416,7 @@
           <p:cNvPr id="116" name="">
             <a:extLst xmlns:a="http://schemas.openxmlformats.org/drawingml/2006/main">
               <a:ext uri="{FF2B5EF4-FFF2-40B4-BE49-F238E27FC236}">
-                <a16:creationId xmlns:a16="http://schemas.microsoft.com/office/drawing/2014/main" id="{F60CF63F-C33D-43DA-905B-6DB53E1FB40C}"/>
+                <a16:creationId xmlns:a16="http://schemas.microsoft.com/office/drawing/2014/main" id="{974CC25D-AD62-4076-B247-E794D3BD8172}"/>
               </a:ext>
             </a:extLst>
           </p:cNvPr>
@@ -9466,7 +9466,7 @@
           <p:cNvPr id="117" name="">
             <a:extLst xmlns:a="http://schemas.openxmlformats.org/drawingml/2006/main">
               <a:ext uri="{FF2B5EF4-FFF2-40B4-BE49-F238E27FC236}">
-                <a16:creationId xmlns:a16="http://schemas.microsoft.com/office/drawing/2014/main" id="{D5EF48E1-DFAF-4B37-9E07-4188219C08FC}"/>
+                <a16:creationId xmlns:a16="http://schemas.microsoft.com/office/drawing/2014/main" id="{9D67E988-5AEF-4925-AC5F-04C4C85CA1D2}"/>
               </a:ext>
             </a:extLst>
           </p:cNvPr>
@@ -9497,7 +9497,7 @@
           <p:cNvPr id="118" name="">
             <a:extLst xmlns:a="http://schemas.openxmlformats.org/drawingml/2006/main">
               <a:ext uri="{FF2B5EF4-FFF2-40B4-BE49-F238E27FC236}">
-                <a16:creationId xmlns:a16="http://schemas.microsoft.com/office/drawing/2014/main" id="{18395597-91FB-44DF-A584-E5542EF86518}"/>
+                <a16:creationId xmlns:a16="http://schemas.microsoft.com/office/drawing/2014/main" id="{C2A791ED-EF2D-4551-B4D8-9880C829701C}"/>
               </a:ext>
             </a:extLst>
           </p:cNvPr>
@@ -9547,7 +9547,7 @@
           <p:cNvPr id="119" name="">
             <a:extLst xmlns:a="http://schemas.openxmlformats.org/drawingml/2006/main">
               <a:ext uri="{FF2B5EF4-FFF2-40B4-BE49-F238E27FC236}">
-                <a16:creationId xmlns:a16="http://schemas.microsoft.com/office/drawing/2014/main" id="{6DAB3D4A-B1EB-4A71-84BC-F26359A56256}"/>
+                <a16:creationId xmlns:a16="http://schemas.microsoft.com/office/drawing/2014/main" id="{70913508-E15E-4039-98EC-03DDB5C3F314}"/>
               </a:ext>
             </a:extLst>
           </p:cNvPr>
@@ -9595,7 +9595,7 @@
     </p:spTree>
     <p:extLst>
       <p:ext uri="{BB962C8B-B14F-4D97-AF65-F5344CB8AC3E}">
-        <p14:creationId xmlns:p14="http://schemas.microsoft.com/office/powerpoint/2010/main" val="551426351"/>
+        <p14:creationId xmlns:p14="http://schemas.microsoft.com/office/powerpoint/2010/main" val="1079828853"/>
       </p:ext>
     </p:extLst>
   </p:cSld>
@@ -9626,7 +9626,7 @@
           <p:cNvPr id="120" name="">
             <a:extLst xmlns:a="http://schemas.openxmlformats.org/drawingml/2006/main">
               <a:ext uri="{FF2B5EF4-FFF2-40B4-BE49-F238E27FC236}">
-                <a16:creationId xmlns:a16="http://schemas.microsoft.com/office/drawing/2014/main" id="{31EB1874-E354-4519-8661-00F29FE7366E}"/>
+                <a16:creationId xmlns:a16="http://schemas.microsoft.com/office/drawing/2014/main" id="{72C975AD-A7B8-4D51-87F2-6CEB2A8BE440}"/>
               </a:ext>
             </a:extLst>
           </p:cNvPr>
@@ -9676,7 +9676,7 @@
           <p:cNvPr id="2" name="">
             <a:extLst xmlns:a="http://schemas.openxmlformats.org/drawingml/2006/main">
               <a:ext uri="{FF2B5EF4-FFF2-40B4-BE49-F238E27FC236}">
-                <a16:creationId xmlns:a16="http://schemas.microsoft.com/office/drawing/2014/main" id="{183D03E3-184D-408A-803B-E69830E467AC}"/>
+                <a16:creationId xmlns:a16="http://schemas.microsoft.com/office/drawing/2014/main" id="{77E1B6A1-B811-4822-931A-9E09B77F5E57}"/>
               </a:ext>
             </a:extLst>
           </p:cNvPr>
@@ -9726,7 +9726,7 @@
           <p:cNvPr id="3" name="">
             <a:extLst xmlns:a="http://schemas.openxmlformats.org/drawingml/2006/main">
               <a:ext uri="{FF2B5EF4-FFF2-40B4-BE49-F238E27FC236}">
-                <a16:creationId xmlns:a16="http://schemas.microsoft.com/office/drawing/2014/main" id="{E8D56BB9-4843-4152-9227-D1C532D98767}"/>
+                <a16:creationId xmlns:a16="http://schemas.microsoft.com/office/drawing/2014/main" id="{9BC316BA-B15A-46A6-8397-EA6FD778A478}"/>
               </a:ext>
             </a:extLst>
           </p:cNvPr>
@@ -9776,7 +9776,7 @@
           <p:cNvPr id="4" name="">
             <a:extLst xmlns:a="http://schemas.openxmlformats.org/drawingml/2006/main">
               <a:ext uri="{FF2B5EF4-FFF2-40B4-BE49-F238E27FC236}">
-                <a16:creationId xmlns:a16="http://schemas.microsoft.com/office/drawing/2014/main" id="{3E64F419-D093-4765-8E4F-3387E2330161}"/>
+                <a16:creationId xmlns:a16="http://schemas.microsoft.com/office/drawing/2014/main" id="{466CA948-5180-40FC-B796-B86DC4796105}"/>
               </a:ext>
             </a:extLst>
           </p:cNvPr>
@@ -9817,7 +9817,7 @@
           <p:cNvPr id="5" name="">
             <a:extLst xmlns:a="http://schemas.openxmlformats.org/drawingml/2006/main">
               <a:ext uri="{FF2B5EF4-FFF2-40B4-BE49-F238E27FC236}">
-                <a16:creationId xmlns:a16="http://schemas.microsoft.com/office/drawing/2014/main" id="{1D33EF32-D085-4118-8A56-2C7617646A08}"/>
+                <a16:creationId xmlns:a16="http://schemas.microsoft.com/office/drawing/2014/main" id="{CAB58F5E-02D7-49D4-8CEF-42B902704735}"/>
               </a:ext>
             </a:extLst>
           </p:cNvPr>
@@ -9867,7 +9867,7 @@
           <p:cNvPr id="6" name="">
             <a:extLst xmlns:a="http://schemas.openxmlformats.org/drawingml/2006/main">
               <a:ext uri="{FF2B5EF4-FFF2-40B4-BE49-F238E27FC236}">
-                <a16:creationId xmlns:a16="http://schemas.microsoft.com/office/drawing/2014/main" id="{B0BA978E-15BB-4E3E-9DCD-F7F064899D89}"/>
+                <a16:creationId xmlns:a16="http://schemas.microsoft.com/office/drawing/2014/main" id="{2FE6EC5F-2050-4413-B917-4114D845AFB8}"/>
               </a:ext>
             </a:extLst>
           </p:cNvPr>
@@ -9924,7 +9924,7 @@
         </p:xfrm>
         <a:graphic xmlns:a="http://schemas.openxmlformats.org/drawingml/2006/main">
           <a:graphicData uri="http://schemas.openxmlformats.org/drawingml/2006/chart">
-            <c:chart xmlns:r="http://schemas.openxmlformats.org/officeDocument/2006/relationships" xmlns:c="http://schemas.openxmlformats.org/drawingml/2006/chart" r:id="Rb365dcacee974621"/>
+            <c:chart xmlns:r="http://schemas.openxmlformats.org/officeDocument/2006/relationships" xmlns:c="http://schemas.openxmlformats.org/drawingml/2006/chart" r:id="R31aa60cfdc4c48a4"/>
           </a:graphicData>
         </a:graphic>
       </p:graphicFrame>
@@ -9933,7 +9933,7 @@
           <p:cNvPr id="8" name="">
             <a:extLst xmlns:a="http://schemas.openxmlformats.org/drawingml/2006/main">
               <a:ext uri="{FF2B5EF4-FFF2-40B4-BE49-F238E27FC236}">
-                <a16:creationId xmlns:a16="http://schemas.microsoft.com/office/drawing/2014/main" id="{88DDCBAA-19B2-4F22-8A3F-73560B4AE27E}"/>
+                <a16:creationId xmlns:a16="http://schemas.microsoft.com/office/drawing/2014/main" id="{AA079CDC-07F1-49FD-978B-A2558A38FD6C}"/>
               </a:ext>
             </a:extLst>
           </p:cNvPr>
@@ -9964,7 +9964,7 @@
           <p:cNvPr id="9" name="">
             <a:extLst xmlns:a="http://schemas.openxmlformats.org/drawingml/2006/main">
               <a:ext uri="{FF2B5EF4-FFF2-40B4-BE49-F238E27FC236}">
-                <a16:creationId xmlns:a16="http://schemas.microsoft.com/office/drawing/2014/main" id="{EE6F081A-13F6-4135-B010-996ADADD941C}"/>
+                <a16:creationId xmlns:a16="http://schemas.microsoft.com/office/drawing/2014/main" id="{67424177-1A64-44AD-8970-83B530EEA242}"/>
               </a:ext>
             </a:extLst>
           </p:cNvPr>
@@ -10014,7 +10014,7 @@
           <p:cNvPr id="10" name="">
             <a:extLst xmlns:a="http://schemas.openxmlformats.org/drawingml/2006/main">
               <a:ext uri="{FF2B5EF4-FFF2-40B4-BE49-F238E27FC236}">
-                <a16:creationId xmlns:a16="http://schemas.microsoft.com/office/drawing/2014/main" id="{CD3A4E50-F0C2-4F3F-9EA0-C1696F9BE8AD}"/>
+                <a16:creationId xmlns:a16="http://schemas.microsoft.com/office/drawing/2014/main" id="{97950D45-72BB-46AE-B13A-4D7A9DA4C926}"/>
               </a:ext>
             </a:extLst>
           </p:cNvPr>
@@ -10064,7 +10064,7 @@
           <p:cNvPr id="11" name="">
             <a:extLst xmlns:a="http://schemas.openxmlformats.org/drawingml/2006/main">
               <a:ext uri="{FF2B5EF4-FFF2-40B4-BE49-F238E27FC236}">
-                <a16:creationId xmlns:a16="http://schemas.microsoft.com/office/drawing/2014/main" id="{77E7CFDB-1396-49D1-B1EC-64248BDB4A34}"/>
+                <a16:creationId xmlns:a16="http://schemas.microsoft.com/office/drawing/2014/main" id="{498579CE-6C2F-41AE-84EA-02EC028CF0E6}"/>
               </a:ext>
             </a:extLst>
           </p:cNvPr>
@@ -10114,7 +10114,7 @@
           <p:cNvPr id="12" name="">
             <a:extLst xmlns:a="http://schemas.openxmlformats.org/drawingml/2006/main">
               <a:ext uri="{FF2B5EF4-FFF2-40B4-BE49-F238E27FC236}">
-                <a16:creationId xmlns:a16="http://schemas.microsoft.com/office/drawing/2014/main" id="{303A7A6F-ACE7-4A90-9D2E-B1A8D0468C60}"/>
+                <a16:creationId xmlns:a16="http://schemas.microsoft.com/office/drawing/2014/main" id="{16BA5D10-4614-4272-9CB4-A7D629A08C3B}"/>
               </a:ext>
             </a:extLst>
           </p:cNvPr>
@@ -10145,7 +10145,7 @@
           <p:cNvPr id="13" name="">
             <a:extLst xmlns:a="http://schemas.openxmlformats.org/drawingml/2006/main">
               <a:ext uri="{FF2B5EF4-FFF2-40B4-BE49-F238E27FC236}">
-                <a16:creationId xmlns:a16="http://schemas.microsoft.com/office/drawing/2014/main" id="{81CFE506-47A3-4226-A911-8AF299579CFB}"/>
+                <a16:creationId xmlns:a16="http://schemas.microsoft.com/office/drawing/2014/main" id="{706A56DA-7298-4CB4-B326-A6BAB2830586}"/>
               </a:ext>
             </a:extLst>
           </p:cNvPr>
@@ -10195,7 +10195,7 @@
           <p:cNvPr id="14" name="">
             <a:extLst xmlns:a="http://schemas.openxmlformats.org/drawingml/2006/main">
               <a:ext uri="{FF2B5EF4-FFF2-40B4-BE49-F238E27FC236}">
-                <a16:creationId xmlns:a16="http://schemas.microsoft.com/office/drawing/2014/main" id="{D188BC27-F7A2-44D4-9603-BF184EAC6002}"/>
+                <a16:creationId xmlns:a16="http://schemas.microsoft.com/office/drawing/2014/main" id="{A605FC84-E886-4EF0-9808-D8747C41C865}"/>
               </a:ext>
             </a:extLst>
           </p:cNvPr>
@@ -10245,7 +10245,7 @@
           <p:cNvPr id="15" name="">
             <a:extLst xmlns:a="http://schemas.openxmlformats.org/drawingml/2006/main">
               <a:ext uri="{FF2B5EF4-FFF2-40B4-BE49-F238E27FC236}">
-                <a16:creationId xmlns:a16="http://schemas.microsoft.com/office/drawing/2014/main" id="{11A60A7F-26B9-4EA1-8409-9703F3902391}"/>
+                <a16:creationId xmlns:a16="http://schemas.microsoft.com/office/drawing/2014/main" id="{66E1483E-40F6-46C6-9E90-45D7C652778B}"/>
               </a:ext>
             </a:extLst>
           </p:cNvPr>
@@ -10295,7 +10295,7 @@
           <p:cNvPr id="16" name="">
             <a:extLst xmlns:a="http://schemas.openxmlformats.org/drawingml/2006/main">
               <a:ext uri="{FF2B5EF4-FFF2-40B4-BE49-F238E27FC236}">
-                <a16:creationId xmlns:a16="http://schemas.microsoft.com/office/drawing/2014/main" id="{EEC13A3C-964C-4698-8005-92CC3FE5303D}"/>
+                <a16:creationId xmlns:a16="http://schemas.microsoft.com/office/drawing/2014/main" id="{76887B5F-7D07-4571-AE86-29B2128DDC42}"/>
               </a:ext>
             </a:extLst>
           </p:cNvPr>
@@ -10326,7 +10326,7 @@
           <p:cNvPr id="17" name="">
             <a:extLst xmlns:a="http://schemas.openxmlformats.org/drawingml/2006/main">
               <a:ext uri="{FF2B5EF4-FFF2-40B4-BE49-F238E27FC236}">
-                <a16:creationId xmlns:a16="http://schemas.microsoft.com/office/drawing/2014/main" id="{C069E0D3-C426-4840-874D-DD8452A0FA23}"/>
+                <a16:creationId xmlns:a16="http://schemas.microsoft.com/office/drawing/2014/main" id="{C8D67B02-247F-4264-8C67-13AD72527A57}"/>
               </a:ext>
             </a:extLst>
           </p:cNvPr>
@@ -10376,7 +10376,7 @@
           <p:cNvPr id="18" name="">
             <a:extLst xmlns:a="http://schemas.openxmlformats.org/drawingml/2006/main">
               <a:ext uri="{FF2B5EF4-FFF2-40B4-BE49-F238E27FC236}">
-                <a16:creationId xmlns:a16="http://schemas.microsoft.com/office/drawing/2014/main" id="{7734957E-335A-4C52-A2A3-576B4FFAA7E7}"/>
+                <a16:creationId xmlns:a16="http://schemas.microsoft.com/office/drawing/2014/main" id="{7501143A-AB0C-457B-A23D-306F4714A517}"/>
               </a:ext>
             </a:extLst>
           </p:cNvPr>
@@ -10426,7 +10426,7 @@
           <p:cNvPr id="19" name="">
             <a:extLst xmlns:a="http://schemas.openxmlformats.org/drawingml/2006/main">
               <a:ext uri="{FF2B5EF4-FFF2-40B4-BE49-F238E27FC236}">
-                <a16:creationId xmlns:a16="http://schemas.microsoft.com/office/drawing/2014/main" id="{A3ECE343-E6B5-4491-8D81-6863D298FC08}"/>
+                <a16:creationId xmlns:a16="http://schemas.microsoft.com/office/drawing/2014/main" id="{5A6FB25F-BB9F-42E3-8F1A-CD1CF61EB671}"/>
               </a:ext>
             </a:extLst>
           </p:cNvPr>
@@ -10476,7 +10476,7 @@
           <p:cNvPr id="20" name="">
             <a:extLst xmlns:a="http://schemas.openxmlformats.org/drawingml/2006/main">
               <a:ext uri="{FF2B5EF4-FFF2-40B4-BE49-F238E27FC236}">
-                <a16:creationId xmlns:a16="http://schemas.microsoft.com/office/drawing/2014/main" id="{065D189A-7D92-45FC-BCAB-034BCC228328}"/>
+                <a16:creationId xmlns:a16="http://schemas.microsoft.com/office/drawing/2014/main" id="{6B71F067-4693-4D51-A0DD-CC656479693D}"/>
               </a:ext>
             </a:extLst>
           </p:cNvPr>
@@ -10507,7 +10507,7 @@
           <p:cNvPr id="21" name="">
             <a:extLst xmlns:a="http://schemas.openxmlformats.org/drawingml/2006/main">
               <a:ext uri="{FF2B5EF4-FFF2-40B4-BE49-F238E27FC236}">
-                <a16:creationId xmlns:a16="http://schemas.microsoft.com/office/drawing/2014/main" id="{31014996-6683-4521-8DDE-E49CE8A986E3}"/>
+                <a16:creationId xmlns:a16="http://schemas.microsoft.com/office/drawing/2014/main" id="{DE32BCF7-D798-467F-B3D2-D5D78948227A}"/>
               </a:ext>
             </a:extLst>
           </p:cNvPr>
@@ -10557,7 +10557,7 @@
           <p:cNvPr id="22" name="">
             <a:extLst xmlns:a="http://schemas.openxmlformats.org/drawingml/2006/main">
               <a:ext uri="{FF2B5EF4-FFF2-40B4-BE49-F238E27FC236}">
-                <a16:creationId xmlns:a16="http://schemas.microsoft.com/office/drawing/2014/main" id="{1B5EACE8-DACB-4389-A76D-1B0C89C941A4}"/>
+                <a16:creationId xmlns:a16="http://schemas.microsoft.com/office/drawing/2014/main" id="{9BB46EFB-7779-4D4C-81D8-0FDFA931025D}"/>
               </a:ext>
             </a:extLst>
           </p:cNvPr>
@@ -10607,7 +10607,7 @@
           <p:cNvPr id="23" name="">
             <a:extLst xmlns:a="http://schemas.openxmlformats.org/drawingml/2006/main">
               <a:ext uri="{FF2B5EF4-FFF2-40B4-BE49-F238E27FC236}">
-                <a16:creationId xmlns:a16="http://schemas.microsoft.com/office/drawing/2014/main" id="{E639495B-D3AA-4FE9-90D8-99CFA70CEF51}"/>
+                <a16:creationId xmlns:a16="http://schemas.microsoft.com/office/drawing/2014/main" id="{2779C3CE-1187-47FD-AF5C-86B7C2650833}"/>
               </a:ext>
             </a:extLst>
           </p:cNvPr>
@@ -10657,7 +10657,7 @@
           <p:cNvPr id="24" name="">
             <a:extLst xmlns:a="http://schemas.openxmlformats.org/drawingml/2006/main">
               <a:ext uri="{FF2B5EF4-FFF2-40B4-BE49-F238E27FC236}">
-                <a16:creationId xmlns:a16="http://schemas.microsoft.com/office/drawing/2014/main" id="{F6ABD6EB-984C-4293-892C-67B394E69425}"/>
+                <a16:creationId xmlns:a16="http://schemas.microsoft.com/office/drawing/2014/main" id="{866CC5E1-106E-4F12-8C66-B62BDD352CE0}"/>
               </a:ext>
             </a:extLst>
           </p:cNvPr>
@@ -10688,7 +10688,7 @@
           <p:cNvPr id="25" name="">
             <a:extLst xmlns:a="http://schemas.openxmlformats.org/drawingml/2006/main">
               <a:ext uri="{FF2B5EF4-FFF2-40B4-BE49-F238E27FC236}">
-                <a16:creationId xmlns:a16="http://schemas.microsoft.com/office/drawing/2014/main" id="{66026940-650C-4516-9455-A1129568C7BF}"/>
+                <a16:creationId xmlns:a16="http://schemas.microsoft.com/office/drawing/2014/main" id="{C3A4DA2E-6FC7-4389-BDA3-FE1E81338C65}"/>
               </a:ext>
             </a:extLst>
           </p:cNvPr>
@@ -10738,7 +10738,7 @@
           <p:cNvPr id="26" name="">
             <a:extLst xmlns:a="http://schemas.openxmlformats.org/drawingml/2006/main">
               <a:ext uri="{FF2B5EF4-FFF2-40B4-BE49-F238E27FC236}">
-                <a16:creationId xmlns:a16="http://schemas.microsoft.com/office/drawing/2014/main" id="{345DD57F-851A-471F-A373-D9C67AC0BAA8}"/>
+                <a16:creationId xmlns:a16="http://schemas.microsoft.com/office/drawing/2014/main" id="{F6E7FCA5-61D3-4B10-9BD5-F93C7681FB79}"/>
               </a:ext>
             </a:extLst>
           </p:cNvPr>
@@ -10788,7 +10788,7 @@
           <p:cNvPr id="27" name="">
             <a:extLst xmlns:a="http://schemas.openxmlformats.org/drawingml/2006/main">
               <a:ext uri="{FF2B5EF4-FFF2-40B4-BE49-F238E27FC236}">
-                <a16:creationId xmlns:a16="http://schemas.microsoft.com/office/drawing/2014/main" id="{E17D69FF-3331-4134-86ED-D893D453CCE0}"/>
+                <a16:creationId xmlns:a16="http://schemas.microsoft.com/office/drawing/2014/main" id="{A8366DD4-AAE9-4578-8FEC-B56EFFCCBD49}"/>
               </a:ext>
             </a:extLst>
           </p:cNvPr>
@@ -10838,7 +10838,7 @@
           <p:cNvPr id="28" name="">
             <a:extLst xmlns:a="http://schemas.openxmlformats.org/drawingml/2006/main">
               <a:ext uri="{FF2B5EF4-FFF2-40B4-BE49-F238E27FC236}">
-                <a16:creationId xmlns:a16="http://schemas.microsoft.com/office/drawing/2014/main" id="{0C565A57-A01D-49EC-9F7C-B7C04692958D}"/>
+                <a16:creationId xmlns:a16="http://schemas.microsoft.com/office/drawing/2014/main" id="{BD8F7B64-130F-4E95-9E28-77BA9B1937C4}"/>
               </a:ext>
             </a:extLst>
           </p:cNvPr>
@@ -10869,7 +10869,7 @@
           <p:cNvPr id="29" name="">
             <a:extLst xmlns:a="http://schemas.openxmlformats.org/drawingml/2006/main">
               <a:ext uri="{FF2B5EF4-FFF2-40B4-BE49-F238E27FC236}">
-                <a16:creationId xmlns:a16="http://schemas.microsoft.com/office/drawing/2014/main" id="{56F655DA-2A8E-47A7-822D-FB76B37B894E}"/>
+                <a16:creationId xmlns:a16="http://schemas.microsoft.com/office/drawing/2014/main" id="{F1860905-BDC7-4C1F-933C-E76AB9234804}"/>
               </a:ext>
             </a:extLst>
           </p:cNvPr>
@@ -10919,7 +10919,7 @@
           <p:cNvPr id="30" name="">
             <a:extLst xmlns:a="http://schemas.openxmlformats.org/drawingml/2006/main">
               <a:ext uri="{FF2B5EF4-FFF2-40B4-BE49-F238E27FC236}">
-                <a16:creationId xmlns:a16="http://schemas.microsoft.com/office/drawing/2014/main" id="{8C54337B-44FE-477D-A3D0-59BE5E827E56}"/>
+                <a16:creationId xmlns:a16="http://schemas.microsoft.com/office/drawing/2014/main" id="{FA2C9009-B9E6-4447-88BA-0999BA3EDC5B}"/>
               </a:ext>
             </a:extLst>
           </p:cNvPr>
@@ -10969,7 +10969,7 @@
           <p:cNvPr id="31" name="">
             <a:extLst xmlns:a="http://schemas.openxmlformats.org/drawingml/2006/main">
               <a:ext uri="{FF2B5EF4-FFF2-40B4-BE49-F238E27FC236}">
-                <a16:creationId xmlns:a16="http://schemas.microsoft.com/office/drawing/2014/main" id="{BF82E07A-015A-4675-9BF3-C0064BD135F3}"/>
+                <a16:creationId xmlns:a16="http://schemas.microsoft.com/office/drawing/2014/main" id="{3AB90F2D-DF1C-460B-AB89-8490ACEA9C11}"/>
               </a:ext>
             </a:extLst>
           </p:cNvPr>
@@ -11019,7 +11019,7 @@
           <p:cNvPr id="32" name="">
             <a:extLst xmlns:a="http://schemas.openxmlformats.org/drawingml/2006/main">
               <a:ext uri="{FF2B5EF4-FFF2-40B4-BE49-F238E27FC236}">
-                <a16:creationId xmlns:a16="http://schemas.microsoft.com/office/drawing/2014/main" id="{E668AA98-0E23-493B-8BC8-01CA332EBDD3}"/>
+                <a16:creationId xmlns:a16="http://schemas.microsoft.com/office/drawing/2014/main" id="{E306BF0A-EA38-4C2A-B5C0-FB961401948A}"/>
               </a:ext>
             </a:extLst>
           </p:cNvPr>
@@ -11060,7 +11060,7 @@
           <p:cNvPr id="33" name="">
             <a:extLst xmlns:a="http://schemas.openxmlformats.org/drawingml/2006/main">
               <a:ext uri="{FF2B5EF4-FFF2-40B4-BE49-F238E27FC236}">
-                <a16:creationId xmlns:a16="http://schemas.microsoft.com/office/drawing/2014/main" id="{4EADD450-7FB6-406A-AC4A-EA987FC0A04C}"/>
+                <a16:creationId xmlns:a16="http://schemas.microsoft.com/office/drawing/2014/main" id="{A81FF87B-8ABA-4713-ABBD-F6DF3BA4E7A3}"/>
               </a:ext>
             </a:extLst>
           </p:cNvPr>
@@ -11110,7 +11110,7 @@
           <p:cNvPr id="34" name="">
             <a:extLst xmlns:a="http://schemas.openxmlformats.org/drawingml/2006/main">
               <a:ext uri="{FF2B5EF4-FFF2-40B4-BE49-F238E27FC236}">
-                <a16:creationId xmlns:a16="http://schemas.microsoft.com/office/drawing/2014/main" id="{D9BCF56E-BA06-4018-8560-28BEFB577B00}"/>
+                <a16:creationId xmlns:a16="http://schemas.microsoft.com/office/drawing/2014/main" id="{967A76B7-931C-495A-A17A-54D7E1FC6B2F}"/>
               </a:ext>
             </a:extLst>
           </p:cNvPr>
@@ -11167,7 +11167,7 @@
         </p:xfrm>
         <a:graphic xmlns:a="http://schemas.openxmlformats.org/drawingml/2006/main">
           <a:graphicData uri="http://schemas.openxmlformats.org/drawingml/2006/chart">
-            <c:chart xmlns:r="http://schemas.openxmlformats.org/officeDocument/2006/relationships" xmlns:c="http://schemas.openxmlformats.org/drawingml/2006/chart" r:id="R90545a9efdcf4bcc"/>
+            <c:chart xmlns:r="http://schemas.openxmlformats.org/officeDocument/2006/relationships" xmlns:c="http://schemas.openxmlformats.org/drawingml/2006/chart" r:id="Rb3b5120400974a56"/>
           </a:graphicData>
         </a:graphic>
       </p:graphicFrame>
@@ -11176,7 +11176,7 @@
           <p:cNvPr id="36" name="">
             <a:extLst xmlns:a="http://schemas.openxmlformats.org/drawingml/2006/main">
               <a:ext uri="{FF2B5EF4-FFF2-40B4-BE49-F238E27FC236}">
-                <a16:creationId xmlns:a16="http://schemas.microsoft.com/office/drawing/2014/main" id="{255FA833-1362-408C-9C62-31DDDD731E72}"/>
+                <a16:creationId xmlns:a16="http://schemas.microsoft.com/office/drawing/2014/main" id="{84F8158F-D818-4598-8362-07E214875ABE}"/>
               </a:ext>
             </a:extLst>
           </p:cNvPr>
@@ -11207,7 +11207,7 @@
           <p:cNvPr id="37" name="">
             <a:extLst xmlns:a="http://schemas.openxmlformats.org/drawingml/2006/main">
               <a:ext uri="{FF2B5EF4-FFF2-40B4-BE49-F238E27FC236}">
-                <a16:creationId xmlns:a16="http://schemas.microsoft.com/office/drawing/2014/main" id="{C8A18A79-ABE1-474C-8BBB-34189AFA3174}"/>
+                <a16:creationId xmlns:a16="http://schemas.microsoft.com/office/drawing/2014/main" id="{788C6209-9BFB-483A-9C79-51FEADB2235F}"/>
               </a:ext>
             </a:extLst>
           </p:cNvPr>
@@ -11257,7 +11257,7 @@
           <p:cNvPr id="38" name="">
             <a:extLst xmlns:a="http://schemas.openxmlformats.org/drawingml/2006/main">
               <a:ext uri="{FF2B5EF4-FFF2-40B4-BE49-F238E27FC236}">
-                <a16:creationId xmlns:a16="http://schemas.microsoft.com/office/drawing/2014/main" id="{C2CF0D24-FFBD-497D-A181-48B6AD469F0F}"/>
+                <a16:creationId xmlns:a16="http://schemas.microsoft.com/office/drawing/2014/main" id="{96B6BEA5-4D9D-4D5F-B30B-469D2EE01A0A}"/>
               </a:ext>
             </a:extLst>
           </p:cNvPr>
@@ -11307,7 +11307,7 @@
           <p:cNvPr id="39" name="">
             <a:extLst xmlns:a="http://schemas.openxmlformats.org/drawingml/2006/main">
               <a:ext uri="{FF2B5EF4-FFF2-40B4-BE49-F238E27FC236}">
-                <a16:creationId xmlns:a16="http://schemas.microsoft.com/office/drawing/2014/main" id="{A89148BD-AF92-4281-8215-15B390B7686E}"/>
+                <a16:creationId xmlns:a16="http://schemas.microsoft.com/office/drawing/2014/main" id="{7E789006-D0CB-4578-93AC-AEBAB695164C}"/>
               </a:ext>
             </a:extLst>
           </p:cNvPr>
@@ -11357,7 +11357,7 @@
           <p:cNvPr id="40" name="">
             <a:extLst xmlns:a="http://schemas.openxmlformats.org/drawingml/2006/main">
               <a:ext uri="{FF2B5EF4-FFF2-40B4-BE49-F238E27FC236}">
-                <a16:creationId xmlns:a16="http://schemas.microsoft.com/office/drawing/2014/main" id="{237E2DCC-5425-4D84-994B-EB4F3FF4B83F}"/>
+                <a16:creationId xmlns:a16="http://schemas.microsoft.com/office/drawing/2014/main" id="{F09B4902-5A8B-4848-A919-E00048634A49}"/>
               </a:ext>
             </a:extLst>
           </p:cNvPr>
@@ -11388,7 +11388,7 @@
           <p:cNvPr id="41" name="">
             <a:extLst xmlns:a="http://schemas.openxmlformats.org/drawingml/2006/main">
               <a:ext uri="{FF2B5EF4-FFF2-40B4-BE49-F238E27FC236}">
-                <a16:creationId xmlns:a16="http://schemas.microsoft.com/office/drawing/2014/main" id="{5233AD55-B59F-4951-9A93-CAA83693ECD6}"/>
+                <a16:creationId xmlns:a16="http://schemas.microsoft.com/office/drawing/2014/main" id="{E7643521-0C39-4380-AE7E-00422C4B7A66}"/>
               </a:ext>
             </a:extLst>
           </p:cNvPr>
@@ -11438,7 +11438,7 @@
           <p:cNvPr id="42" name="">
             <a:extLst xmlns:a="http://schemas.openxmlformats.org/drawingml/2006/main">
               <a:ext uri="{FF2B5EF4-FFF2-40B4-BE49-F238E27FC236}">
-                <a16:creationId xmlns:a16="http://schemas.microsoft.com/office/drawing/2014/main" id="{28908385-8ED4-4A52-B0A3-26F47C065454}"/>
+                <a16:creationId xmlns:a16="http://schemas.microsoft.com/office/drawing/2014/main" id="{D6F94062-30BD-418E-BE5E-F6076652A627}"/>
               </a:ext>
             </a:extLst>
           </p:cNvPr>
@@ -11488,7 +11488,7 @@
           <p:cNvPr id="43" name="">
             <a:extLst xmlns:a="http://schemas.openxmlformats.org/drawingml/2006/main">
               <a:ext uri="{FF2B5EF4-FFF2-40B4-BE49-F238E27FC236}">
-                <a16:creationId xmlns:a16="http://schemas.microsoft.com/office/drawing/2014/main" id="{F5C2B3AF-3324-4D19-ABD9-A2830A0C1FF2}"/>
+                <a16:creationId xmlns:a16="http://schemas.microsoft.com/office/drawing/2014/main" id="{8AB7FB95-C6BE-45BA-9502-2E38549A38CB}"/>
               </a:ext>
             </a:extLst>
           </p:cNvPr>
@@ -11538,7 +11538,7 @@
           <p:cNvPr id="44" name="">
             <a:extLst xmlns:a="http://schemas.openxmlformats.org/drawingml/2006/main">
               <a:ext uri="{FF2B5EF4-FFF2-40B4-BE49-F238E27FC236}">
-                <a16:creationId xmlns:a16="http://schemas.microsoft.com/office/drawing/2014/main" id="{6E952D95-E862-4511-8091-059D13327721}"/>
+                <a16:creationId xmlns:a16="http://schemas.microsoft.com/office/drawing/2014/main" id="{7D04E80A-D07E-490A-A85F-7BA77223CB52}"/>
               </a:ext>
             </a:extLst>
           </p:cNvPr>
@@ -11569,7 +11569,7 @@
           <p:cNvPr id="45" name="">
             <a:extLst xmlns:a="http://schemas.openxmlformats.org/drawingml/2006/main">
               <a:ext uri="{FF2B5EF4-FFF2-40B4-BE49-F238E27FC236}">
-                <a16:creationId xmlns:a16="http://schemas.microsoft.com/office/drawing/2014/main" id="{189B2C85-7001-480A-B251-7C8E92F31901}"/>
+                <a16:creationId xmlns:a16="http://schemas.microsoft.com/office/drawing/2014/main" id="{40469E9C-8F61-48A6-853A-0E3AFBCD8BA8}"/>
               </a:ext>
             </a:extLst>
           </p:cNvPr>
@@ -11619,7 +11619,7 @@
           <p:cNvPr id="46" name="">
             <a:extLst xmlns:a="http://schemas.openxmlformats.org/drawingml/2006/main">
               <a:ext uri="{FF2B5EF4-FFF2-40B4-BE49-F238E27FC236}">
-                <a16:creationId xmlns:a16="http://schemas.microsoft.com/office/drawing/2014/main" id="{BC20A7AB-7183-4659-8E53-9B5B8A624C6A}"/>
+                <a16:creationId xmlns:a16="http://schemas.microsoft.com/office/drawing/2014/main" id="{8E2EA4D7-9459-458B-A869-DB2BCCEA0DE7}"/>
               </a:ext>
             </a:extLst>
           </p:cNvPr>
@@ -11669,7 +11669,7 @@
           <p:cNvPr id="47" name="">
             <a:extLst xmlns:a="http://schemas.openxmlformats.org/drawingml/2006/main">
               <a:ext uri="{FF2B5EF4-FFF2-40B4-BE49-F238E27FC236}">
-                <a16:creationId xmlns:a16="http://schemas.microsoft.com/office/drawing/2014/main" id="{EC2B1C03-B321-44EC-99F9-D531A4B0A8C6}"/>
+                <a16:creationId xmlns:a16="http://schemas.microsoft.com/office/drawing/2014/main" id="{56FCCCC6-0841-472F-A6EE-61E4025300E4}"/>
               </a:ext>
             </a:extLst>
           </p:cNvPr>
@@ -11719,7 +11719,7 @@
           <p:cNvPr id="48" name="">
             <a:extLst xmlns:a="http://schemas.openxmlformats.org/drawingml/2006/main">
               <a:ext uri="{FF2B5EF4-FFF2-40B4-BE49-F238E27FC236}">
-                <a16:creationId xmlns:a16="http://schemas.microsoft.com/office/drawing/2014/main" id="{5845257A-35CC-40D3-AC08-F3179989D9A4}"/>
+                <a16:creationId xmlns:a16="http://schemas.microsoft.com/office/drawing/2014/main" id="{EA42792D-2A96-4CA5-9570-3D8810E71087}"/>
               </a:ext>
             </a:extLst>
           </p:cNvPr>
@@ -11750,7 +11750,7 @@
           <p:cNvPr id="49" name="">
             <a:extLst xmlns:a="http://schemas.openxmlformats.org/drawingml/2006/main">
               <a:ext uri="{FF2B5EF4-FFF2-40B4-BE49-F238E27FC236}">
-                <a16:creationId xmlns:a16="http://schemas.microsoft.com/office/drawing/2014/main" id="{600336E2-78C5-4F26-9F36-F73CEF25EABB}"/>
+                <a16:creationId xmlns:a16="http://schemas.microsoft.com/office/drawing/2014/main" id="{2D1036F3-C659-4930-A67E-F87470C06111}"/>
               </a:ext>
             </a:extLst>
           </p:cNvPr>
@@ -11800,7 +11800,7 @@
           <p:cNvPr id="50" name="">
             <a:extLst xmlns:a="http://schemas.openxmlformats.org/drawingml/2006/main">
               <a:ext uri="{FF2B5EF4-FFF2-40B4-BE49-F238E27FC236}">
-                <a16:creationId xmlns:a16="http://schemas.microsoft.com/office/drawing/2014/main" id="{BCA6C9BD-F3C7-4153-B8D8-3BFB260E84F6}"/>
+                <a16:creationId xmlns:a16="http://schemas.microsoft.com/office/drawing/2014/main" id="{60A43BC3-6A9F-4A8D-BB70-496F9F2E7CFA}"/>
               </a:ext>
             </a:extLst>
           </p:cNvPr>
@@ -11850,7 +11850,7 @@
           <p:cNvPr id="51" name="">
             <a:extLst xmlns:a="http://schemas.openxmlformats.org/drawingml/2006/main">
               <a:ext uri="{FF2B5EF4-FFF2-40B4-BE49-F238E27FC236}">
-                <a16:creationId xmlns:a16="http://schemas.microsoft.com/office/drawing/2014/main" id="{6F102816-E451-43D0-8010-5063CDBBE32C}"/>
+                <a16:creationId xmlns:a16="http://schemas.microsoft.com/office/drawing/2014/main" id="{8E04EC7A-2B91-45AE-95E3-2A85DC1C0329}"/>
               </a:ext>
             </a:extLst>
           </p:cNvPr>
@@ -11900,7 +11900,7 @@
           <p:cNvPr id="52" name="">
             <a:extLst xmlns:a="http://schemas.openxmlformats.org/drawingml/2006/main">
               <a:ext uri="{FF2B5EF4-FFF2-40B4-BE49-F238E27FC236}">
-                <a16:creationId xmlns:a16="http://schemas.microsoft.com/office/drawing/2014/main" id="{A9945ED9-B219-44D5-A890-CA8F13B87AB9}"/>
+                <a16:creationId xmlns:a16="http://schemas.microsoft.com/office/drawing/2014/main" id="{96A672BF-F74B-4A3F-9D4F-1FA640CE8982}"/>
               </a:ext>
             </a:extLst>
           </p:cNvPr>
@@ -11931,7 +11931,7 @@
           <p:cNvPr id="53" name="">
             <a:extLst xmlns:a="http://schemas.openxmlformats.org/drawingml/2006/main">
               <a:ext uri="{FF2B5EF4-FFF2-40B4-BE49-F238E27FC236}">
-                <a16:creationId xmlns:a16="http://schemas.microsoft.com/office/drawing/2014/main" id="{5AB43D25-7E4B-46E9-AFEC-FC3E3856AAEC}"/>
+                <a16:creationId xmlns:a16="http://schemas.microsoft.com/office/drawing/2014/main" id="{1CCF48C6-10A0-47CA-B5FB-56485E495155}"/>
               </a:ext>
             </a:extLst>
           </p:cNvPr>
@@ -11981,7 +11981,7 @@
           <p:cNvPr id="54" name="">
             <a:extLst xmlns:a="http://schemas.openxmlformats.org/drawingml/2006/main">
               <a:ext uri="{FF2B5EF4-FFF2-40B4-BE49-F238E27FC236}">
-                <a16:creationId xmlns:a16="http://schemas.microsoft.com/office/drawing/2014/main" id="{2E7B209E-83F6-447D-8C14-B21D9FC9A502}"/>
+                <a16:creationId xmlns:a16="http://schemas.microsoft.com/office/drawing/2014/main" id="{7E2414AF-B9E5-42BD-AFF7-270C75BFD821}"/>
               </a:ext>
             </a:extLst>
           </p:cNvPr>
@@ -12031,7 +12031,7 @@
           <p:cNvPr id="55" name="">
             <a:extLst xmlns:a="http://schemas.openxmlformats.org/drawingml/2006/main">
               <a:ext uri="{FF2B5EF4-FFF2-40B4-BE49-F238E27FC236}">
-                <a16:creationId xmlns:a16="http://schemas.microsoft.com/office/drawing/2014/main" id="{C478A394-DA1E-4E13-9AF1-9DF21C89F099}"/>
+                <a16:creationId xmlns:a16="http://schemas.microsoft.com/office/drawing/2014/main" id="{CE294519-AAA0-4163-8F54-11DE4105C469}"/>
               </a:ext>
             </a:extLst>
           </p:cNvPr>
@@ -12081,7 +12081,7 @@
           <p:cNvPr id="56" name="">
             <a:extLst xmlns:a="http://schemas.openxmlformats.org/drawingml/2006/main">
               <a:ext uri="{FF2B5EF4-FFF2-40B4-BE49-F238E27FC236}">
-                <a16:creationId xmlns:a16="http://schemas.microsoft.com/office/drawing/2014/main" id="{6533311E-ED28-4981-AAAF-AE1615ECB0E4}"/>
+                <a16:creationId xmlns:a16="http://schemas.microsoft.com/office/drawing/2014/main" id="{86AD31F7-8738-45FA-961C-47B3ED50F2C4}"/>
               </a:ext>
             </a:extLst>
           </p:cNvPr>
@@ -12112,7 +12112,7 @@
           <p:cNvPr id="57" name="">
             <a:extLst xmlns:a="http://schemas.openxmlformats.org/drawingml/2006/main">
               <a:ext uri="{FF2B5EF4-FFF2-40B4-BE49-F238E27FC236}">
-                <a16:creationId xmlns:a16="http://schemas.microsoft.com/office/drawing/2014/main" id="{F4990246-D750-42F5-AD37-4B988986F76E}"/>
+                <a16:creationId xmlns:a16="http://schemas.microsoft.com/office/drawing/2014/main" id="{EA64E73F-3C5B-4C99-A7A9-61A2E3251D5F}"/>
               </a:ext>
             </a:extLst>
           </p:cNvPr>
@@ -12162,7 +12162,7 @@
           <p:cNvPr id="58" name="">
             <a:extLst xmlns:a="http://schemas.openxmlformats.org/drawingml/2006/main">
               <a:ext uri="{FF2B5EF4-FFF2-40B4-BE49-F238E27FC236}">
-                <a16:creationId xmlns:a16="http://schemas.microsoft.com/office/drawing/2014/main" id="{99BE628D-46DD-4E27-BE27-8942755630B0}"/>
+                <a16:creationId xmlns:a16="http://schemas.microsoft.com/office/drawing/2014/main" id="{90468DA6-FEBE-46DE-9C82-9D4F0E4BBA0A}"/>
               </a:ext>
             </a:extLst>
           </p:cNvPr>
@@ -12212,7 +12212,7 @@
           <p:cNvPr id="59" name="">
             <a:extLst xmlns:a="http://schemas.openxmlformats.org/drawingml/2006/main">
               <a:ext uri="{FF2B5EF4-FFF2-40B4-BE49-F238E27FC236}">
-                <a16:creationId xmlns:a16="http://schemas.microsoft.com/office/drawing/2014/main" id="{286E9CA6-98AF-4E83-9667-9B37C12548C0}"/>
+                <a16:creationId xmlns:a16="http://schemas.microsoft.com/office/drawing/2014/main" id="{4C97DF4B-5CB7-4CDE-8772-6CFD948CCC27}"/>
               </a:ext>
             </a:extLst>
           </p:cNvPr>
@@ -12262,7 +12262,7 @@
           <p:cNvPr id="60" name="">
             <a:extLst xmlns:a="http://schemas.openxmlformats.org/drawingml/2006/main">
               <a:ext uri="{FF2B5EF4-FFF2-40B4-BE49-F238E27FC236}">
-                <a16:creationId xmlns:a16="http://schemas.microsoft.com/office/drawing/2014/main" id="{D589FDFB-484E-4DD1-91C7-8B1460C81A37}"/>
+                <a16:creationId xmlns:a16="http://schemas.microsoft.com/office/drawing/2014/main" id="{8B6E8CF8-7BC8-43F4-BD3F-C7F9B02BD66E}"/>
               </a:ext>
             </a:extLst>
           </p:cNvPr>
@@ -12303,7 +12303,7 @@
           <p:cNvPr id="61" name="">
             <a:extLst xmlns:a="http://schemas.openxmlformats.org/drawingml/2006/main">
               <a:ext uri="{FF2B5EF4-FFF2-40B4-BE49-F238E27FC236}">
-                <a16:creationId xmlns:a16="http://schemas.microsoft.com/office/drawing/2014/main" id="{A9B40A98-0997-4AA8-BE72-B4970E9AEE03}"/>
+                <a16:creationId xmlns:a16="http://schemas.microsoft.com/office/drawing/2014/main" id="{ABC50671-3039-4BAB-98DF-27B3E979CBDA}"/>
               </a:ext>
             </a:extLst>
           </p:cNvPr>
@@ -12353,7 +12353,7 @@
           <p:cNvPr id="62" name="">
             <a:extLst xmlns:a="http://schemas.openxmlformats.org/drawingml/2006/main">
               <a:ext uri="{FF2B5EF4-FFF2-40B4-BE49-F238E27FC236}">
-                <a16:creationId xmlns:a16="http://schemas.microsoft.com/office/drawing/2014/main" id="{B403265B-AF24-4DE3-B259-9A3BE60F31FA}"/>
+                <a16:creationId xmlns:a16="http://schemas.microsoft.com/office/drawing/2014/main" id="{9B087997-74C2-4ED3-AAEE-C8FE9849AFD2}"/>
               </a:ext>
             </a:extLst>
           </p:cNvPr>
@@ -12410,7 +12410,7 @@
         </p:xfrm>
         <a:graphic xmlns:a="http://schemas.openxmlformats.org/drawingml/2006/main">
           <a:graphicData uri="http://schemas.openxmlformats.org/drawingml/2006/chart">
-            <c:chart xmlns:r="http://schemas.openxmlformats.org/officeDocument/2006/relationships" xmlns:c="http://schemas.openxmlformats.org/drawingml/2006/chart" r:id="R15a910eee77d47b2"/>
+            <c:chart xmlns:r="http://schemas.openxmlformats.org/officeDocument/2006/relationships" xmlns:c="http://schemas.openxmlformats.org/drawingml/2006/chart" r:id="Rb05c3b21cc354361"/>
           </a:graphicData>
         </a:graphic>
       </p:graphicFrame>
@@ -12419,7 +12419,7 @@
           <p:cNvPr id="64" name="">
             <a:extLst xmlns:a="http://schemas.openxmlformats.org/drawingml/2006/main">
               <a:ext uri="{FF2B5EF4-FFF2-40B4-BE49-F238E27FC236}">
-                <a16:creationId xmlns:a16="http://schemas.microsoft.com/office/drawing/2014/main" id="{E4286C9C-4DEB-4DC6-B456-1D0C353E1958}"/>
+                <a16:creationId xmlns:a16="http://schemas.microsoft.com/office/drawing/2014/main" id="{378836B3-BC64-40D1-955E-52527450EB11}"/>
               </a:ext>
             </a:extLst>
           </p:cNvPr>
@@ -12450,7 +12450,7 @@
           <p:cNvPr id="65" name="">
             <a:extLst xmlns:a="http://schemas.openxmlformats.org/drawingml/2006/main">
               <a:ext uri="{FF2B5EF4-FFF2-40B4-BE49-F238E27FC236}">
-                <a16:creationId xmlns:a16="http://schemas.microsoft.com/office/drawing/2014/main" id="{59BEE485-7B98-4279-87E6-994D22D79A2D}"/>
+                <a16:creationId xmlns:a16="http://schemas.microsoft.com/office/drawing/2014/main" id="{751870D8-C3B4-4367-A77F-EA27A73E253D}"/>
               </a:ext>
             </a:extLst>
           </p:cNvPr>
@@ -12500,7 +12500,7 @@
           <p:cNvPr id="66" name="">
             <a:extLst xmlns:a="http://schemas.openxmlformats.org/drawingml/2006/main">
               <a:ext uri="{FF2B5EF4-FFF2-40B4-BE49-F238E27FC236}">
-                <a16:creationId xmlns:a16="http://schemas.microsoft.com/office/drawing/2014/main" id="{68D4505D-7296-4746-9BD6-E4C7840CBC45}"/>
+                <a16:creationId xmlns:a16="http://schemas.microsoft.com/office/drawing/2014/main" id="{034283AC-8EA1-45D5-BBDB-C3EACA5B8583}"/>
               </a:ext>
             </a:extLst>
           </p:cNvPr>
@@ -12550,7 +12550,7 @@
           <p:cNvPr id="67" name="">
             <a:extLst xmlns:a="http://schemas.openxmlformats.org/drawingml/2006/main">
               <a:ext uri="{FF2B5EF4-FFF2-40B4-BE49-F238E27FC236}">
-                <a16:creationId xmlns:a16="http://schemas.microsoft.com/office/drawing/2014/main" id="{4F2F0FA7-0473-4745-BCEC-9B8F782DAD98}"/>
+                <a16:creationId xmlns:a16="http://schemas.microsoft.com/office/drawing/2014/main" id="{7A5CCEFD-6103-4718-BDB4-591B8EF989B1}"/>
               </a:ext>
             </a:extLst>
           </p:cNvPr>
@@ -12600,7 +12600,7 @@
           <p:cNvPr id="68" name="">
             <a:extLst xmlns:a="http://schemas.openxmlformats.org/drawingml/2006/main">
               <a:ext uri="{FF2B5EF4-FFF2-40B4-BE49-F238E27FC236}">
-                <a16:creationId xmlns:a16="http://schemas.microsoft.com/office/drawing/2014/main" id="{DCE97B9E-273E-40AF-8F58-4B2B9F5D83E9}"/>
+                <a16:creationId xmlns:a16="http://schemas.microsoft.com/office/drawing/2014/main" id="{4C175157-A7AC-4698-972A-9577A0647C90}"/>
               </a:ext>
             </a:extLst>
           </p:cNvPr>
@@ -12631,7 +12631,7 @@
           <p:cNvPr id="69" name="">
             <a:extLst xmlns:a="http://schemas.openxmlformats.org/drawingml/2006/main">
               <a:ext uri="{FF2B5EF4-FFF2-40B4-BE49-F238E27FC236}">
-                <a16:creationId xmlns:a16="http://schemas.microsoft.com/office/drawing/2014/main" id="{549CCD58-5324-43FC-83B8-39E8AD6507CC}"/>
+                <a16:creationId xmlns:a16="http://schemas.microsoft.com/office/drawing/2014/main" id="{0A58C76A-F465-44AE-8D9E-C533C8BEDDAD}"/>
               </a:ext>
             </a:extLst>
           </p:cNvPr>
@@ -12681,7 +12681,7 @@
           <p:cNvPr id="70" name="">
             <a:extLst xmlns:a="http://schemas.openxmlformats.org/drawingml/2006/main">
               <a:ext uri="{FF2B5EF4-FFF2-40B4-BE49-F238E27FC236}">
-                <a16:creationId xmlns:a16="http://schemas.microsoft.com/office/drawing/2014/main" id="{63C606EB-F6F1-4F54-A944-D65610733E84}"/>
+                <a16:creationId xmlns:a16="http://schemas.microsoft.com/office/drawing/2014/main" id="{D4860966-4809-4A64-A917-D900CFA808A9}"/>
               </a:ext>
             </a:extLst>
           </p:cNvPr>
@@ -12731,7 +12731,7 @@
           <p:cNvPr id="71" name="">
             <a:extLst xmlns:a="http://schemas.openxmlformats.org/drawingml/2006/main">
               <a:ext uri="{FF2B5EF4-FFF2-40B4-BE49-F238E27FC236}">
-                <a16:creationId xmlns:a16="http://schemas.microsoft.com/office/drawing/2014/main" id="{F581FCF7-A417-40C7-B543-2A91B1AA3E7D}"/>
+                <a16:creationId xmlns:a16="http://schemas.microsoft.com/office/drawing/2014/main" id="{0A75BB8E-1BD0-410F-B45D-404F4F02A2CC}"/>
               </a:ext>
             </a:extLst>
           </p:cNvPr>
@@ -12781,7 +12781,7 @@
           <p:cNvPr id="72" name="">
             <a:extLst xmlns:a="http://schemas.openxmlformats.org/drawingml/2006/main">
               <a:ext uri="{FF2B5EF4-FFF2-40B4-BE49-F238E27FC236}">
-                <a16:creationId xmlns:a16="http://schemas.microsoft.com/office/drawing/2014/main" id="{2CC3F2D6-D1C7-49AE-AFA9-424175085EBB}"/>
+                <a16:creationId xmlns:a16="http://schemas.microsoft.com/office/drawing/2014/main" id="{BF2F75B5-F455-4786-9F29-4EC9EDA0E424}"/>
               </a:ext>
             </a:extLst>
           </p:cNvPr>
@@ -12812,7 +12812,7 @@
           <p:cNvPr id="73" name="">
             <a:extLst xmlns:a="http://schemas.openxmlformats.org/drawingml/2006/main">
               <a:ext uri="{FF2B5EF4-FFF2-40B4-BE49-F238E27FC236}">
-                <a16:creationId xmlns:a16="http://schemas.microsoft.com/office/drawing/2014/main" id="{CF8708C2-C6AD-468E-B886-63C731A7269F}"/>
+                <a16:creationId xmlns:a16="http://schemas.microsoft.com/office/drawing/2014/main" id="{74EB3679-6C5B-4DE2-80B0-968935D09E30}"/>
               </a:ext>
             </a:extLst>
           </p:cNvPr>
@@ -12862,7 +12862,7 @@
           <p:cNvPr id="74" name="">
             <a:extLst xmlns:a="http://schemas.openxmlformats.org/drawingml/2006/main">
               <a:ext uri="{FF2B5EF4-FFF2-40B4-BE49-F238E27FC236}">
-                <a16:creationId xmlns:a16="http://schemas.microsoft.com/office/drawing/2014/main" id="{D676AD46-C9A9-4239-93B9-8B5FEC2C86B0}"/>
+                <a16:creationId xmlns:a16="http://schemas.microsoft.com/office/drawing/2014/main" id="{6A4A832F-D2A9-41CC-8DBE-0D29F687AAEC}"/>
               </a:ext>
             </a:extLst>
           </p:cNvPr>
@@ -12912,7 +12912,7 @@
           <p:cNvPr id="75" name="">
             <a:extLst xmlns:a="http://schemas.openxmlformats.org/drawingml/2006/main">
               <a:ext uri="{FF2B5EF4-FFF2-40B4-BE49-F238E27FC236}">
-                <a16:creationId xmlns:a16="http://schemas.microsoft.com/office/drawing/2014/main" id="{9AD1D6FE-E81E-4629-9C57-129F4062A963}"/>
+                <a16:creationId xmlns:a16="http://schemas.microsoft.com/office/drawing/2014/main" id="{02EC90EF-E2A2-4C6D-B95B-7E5B46407AC2}"/>
               </a:ext>
             </a:extLst>
           </p:cNvPr>
@@ -12962,7 +12962,7 @@
           <p:cNvPr id="76" name="">
             <a:extLst xmlns:a="http://schemas.openxmlformats.org/drawingml/2006/main">
               <a:ext uri="{FF2B5EF4-FFF2-40B4-BE49-F238E27FC236}">
-                <a16:creationId xmlns:a16="http://schemas.microsoft.com/office/drawing/2014/main" id="{11E76FBE-FE3F-45DF-991B-4B415F2F827D}"/>
+                <a16:creationId xmlns:a16="http://schemas.microsoft.com/office/drawing/2014/main" id="{C6AC30FF-0FBC-470D-8F7D-C85F359EC5F3}"/>
               </a:ext>
             </a:extLst>
           </p:cNvPr>
@@ -12993,7 +12993,7 @@
           <p:cNvPr id="77" name="">
             <a:extLst xmlns:a="http://schemas.openxmlformats.org/drawingml/2006/main">
               <a:ext uri="{FF2B5EF4-FFF2-40B4-BE49-F238E27FC236}">
-                <a16:creationId xmlns:a16="http://schemas.microsoft.com/office/drawing/2014/main" id="{0E627D55-DBAC-4E2E-814A-58B9014A156B}"/>
+                <a16:creationId xmlns:a16="http://schemas.microsoft.com/office/drawing/2014/main" id="{C1770970-D004-459C-A970-EDAAFEF176F2}"/>
               </a:ext>
             </a:extLst>
           </p:cNvPr>
@@ -13043,7 +13043,7 @@
           <p:cNvPr id="78" name="">
             <a:extLst xmlns:a="http://schemas.openxmlformats.org/drawingml/2006/main">
               <a:ext uri="{FF2B5EF4-FFF2-40B4-BE49-F238E27FC236}">
-                <a16:creationId xmlns:a16="http://schemas.microsoft.com/office/drawing/2014/main" id="{BA2FAE62-3DA9-4957-8C27-8888EAB24B67}"/>
+                <a16:creationId xmlns:a16="http://schemas.microsoft.com/office/drawing/2014/main" id="{2E2CB97D-3A65-48DF-91F5-8B4F97651E0B}"/>
               </a:ext>
             </a:extLst>
           </p:cNvPr>
@@ -13093,7 +13093,7 @@
           <p:cNvPr id="79" name="">
             <a:extLst xmlns:a="http://schemas.openxmlformats.org/drawingml/2006/main">
               <a:ext uri="{FF2B5EF4-FFF2-40B4-BE49-F238E27FC236}">
-                <a16:creationId xmlns:a16="http://schemas.microsoft.com/office/drawing/2014/main" id="{90F19D29-0361-4CD0-8DE5-B10753B58196}"/>
+                <a16:creationId xmlns:a16="http://schemas.microsoft.com/office/drawing/2014/main" id="{54740B25-ECCB-4CE2-8C26-B75BC636C216}"/>
               </a:ext>
             </a:extLst>
           </p:cNvPr>
@@ -13143,7 +13143,7 @@
           <p:cNvPr id="80" name="">
             <a:extLst xmlns:a="http://schemas.openxmlformats.org/drawingml/2006/main">
               <a:ext uri="{FF2B5EF4-FFF2-40B4-BE49-F238E27FC236}">
-                <a16:creationId xmlns:a16="http://schemas.microsoft.com/office/drawing/2014/main" id="{7A589ED6-0CC3-4E7F-94FB-4E22E70FF474}"/>
+                <a16:creationId xmlns:a16="http://schemas.microsoft.com/office/drawing/2014/main" id="{E411A7FE-31D9-472E-B456-3A6529BC8021}"/>
               </a:ext>
             </a:extLst>
           </p:cNvPr>
@@ -13174,7 +13174,7 @@
           <p:cNvPr id="81" name="">
             <a:extLst xmlns:a="http://schemas.openxmlformats.org/drawingml/2006/main">
               <a:ext uri="{FF2B5EF4-FFF2-40B4-BE49-F238E27FC236}">
-                <a16:creationId xmlns:a16="http://schemas.microsoft.com/office/drawing/2014/main" id="{CD0E6C09-8B4D-403E-8133-A5A16AD1B63D}"/>
+                <a16:creationId xmlns:a16="http://schemas.microsoft.com/office/drawing/2014/main" id="{FFC5D1A4-132B-4035-8ACA-24F1695D731F}"/>
               </a:ext>
             </a:extLst>
           </p:cNvPr>
@@ -13224,7 +13224,7 @@
           <p:cNvPr id="82" name="">
             <a:extLst xmlns:a="http://schemas.openxmlformats.org/drawingml/2006/main">
               <a:ext uri="{FF2B5EF4-FFF2-40B4-BE49-F238E27FC236}">
-                <a16:creationId xmlns:a16="http://schemas.microsoft.com/office/drawing/2014/main" id="{56A2B487-5AA2-4316-9F61-5A49EE6E7D0E}"/>
+                <a16:creationId xmlns:a16="http://schemas.microsoft.com/office/drawing/2014/main" id="{EF79C666-3A5B-4C7C-9CCF-086ECA886A69}"/>
               </a:ext>
             </a:extLst>
           </p:cNvPr>
@@ -13274,7 +13274,7 @@
           <p:cNvPr id="83" name="">
             <a:extLst xmlns:a="http://schemas.openxmlformats.org/drawingml/2006/main">
               <a:ext uri="{FF2B5EF4-FFF2-40B4-BE49-F238E27FC236}">
-                <a16:creationId xmlns:a16="http://schemas.microsoft.com/office/drawing/2014/main" id="{DB800A2D-E938-43BD-8803-065A38C2EBCA}"/>
+                <a16:creationId xmlns:a16="http://schemas.microsoft.com/office/drawing/2014/main" id="{4644286A-F80E-4AC1-B615-2EEA9B0DCE2A}"/>
               </a:ext>
             </a:extLst>
           </p:cNvPr>
@@ -13324,7 +13324,7 @@
           <p:cNvPr id="84" name="">
             <a:extLst xmlns:a="http://schemas.openxmlformats.org/drawingml/2006/main">
               <a:ext uri="{FF2B5EF4-FFF2-40B4-BE49-F238E27FC236}">
-                <a16:creationId xmlns:a16="http://schemas.microsoft.com/office/drawing/2014/main" id="{10AA355C-A9BA-46C6-B4A1-06039BA73F39}"/>
+                <a16:creationId xmlns:a16="http://schemas.microsoft.com/office/drawing/2014/main" id="{87069AD4-F7D7-44C0-9208-5F5FFAB9A3AF}"/>
               </a:ext>
             </a:extLst>
           </p:cNvPr>
@@ -13355,7 +13355,7 @@
           <p:cNvPr id="85" name="">
             <a:extLst xmlns:a="http://schemas.openxmlformats.org/drawingml/2006/main">
               <a:ext uri="{FF2B5EF4-FFF2-40B4-BE49-F238E27FC236}">
-                <a16:creationId xmlns:a16="http://schemas.microsoft.com/office/drawing/2014/main" id="{419C0334-CA55-4C95-A9BC-02EC149EECA5}"/>
+                <a16:creationId xmlns:a16="http://schemas.microsoft.com/office/drawing/2014/main" id="{8D0D80AE-37B4-4484-837F-79E8AC6AFB27}"/>
               </a:ext>
             </a:extLst>
           </p:cNvPr>
@@ -13405,7 +13405,7 @@
           <p:cNvPr id="86" name="">
             <a:extLst xmlns:a="http://schemas.openxmlformats.org/drawingml/2006/main">
               <a:ext uri="{FF2B5EF4-FFF2-40B4-BE49-F238E27FC236}">
-                <a16:creationId xmlns:a16="http://schemas.microsoft.com/office/drawing/2014/main" id="{421406BF-E066-4CEC-9E82-819A1540C147}"/>
+                <a16:creationId xmlns:a16="http://schemas.microsoft.com/office/drawing/2014/main" id="{2F13C95E-353F-4C99-8318-64F905A4BAD2}"/>
               </a:ext>
             </a:extLst>
           </p:cNvPr>
@@ -13455,7 +13455,7 @@
           <p:cNvPr id="87" name="">
             <a:extLst xmlns:a="http://schemas.openxmlformats.org/drawingml/2006/main">
               <a:ext uri="{FF2B5EF4-FFF2-40B4-BE49-F238E27FC236}">
-                <a16:creationId xmlns:a16="http://schemas.microsoft.com/office/drawing/2014/main" id="{64C7F834-036D-4D26-AF39-9EE3E6191CF4}"/>
+                <a16:creationId xmlns:a16="http://schemas.microsoft.com/office/drawing/2014/main" id="{4E8D0737-448D-4CEA-8EE2-F40803DD266D}"/>
               </a:ext>
             </a:extLst>
           </p:cNvPr>
@@ -13505,7 +13505,7 @@
           <p:cNvPr id="88" name="">
             <a:extLst xmlns:a="http://schemas.openxmlformats.org/drawingml/2006/main">
               <a:ext uri="{FF2B5EF4-FFF2-40B4-BE49-F238E27FC236}">
-                <a16:creationId xmlns:a16="http://schemas.microsoft.com/office/drawing/2014/main" id="{B0C6C6A6-6870-4B7D-ACF6-3D83C8B3E952}"/>
+                <a16:creationId xmlns:a16="http://schemas.microsoft.com/office/drawing/2014/main" id="{50CF3420-7A70-4FB1-B66C-C6E35E428160}"/>
               </a:ext>
             </a:extLst>
           </p:cNvPr>
@@ -13546,7 +13546,7 @@
           <p:cNvPr id="89" name="">
             <a:extLst xmlns:a="http://schemas.openxmlformats.org/drawingml/2006/main">
               <a:ext uri="{FF2B5EF4-FFF2-40B4-BE49-F238E27FC236}">
-                <a16:creationId xmlns:a16="http://schemas.microsoft.com/office/drawing/2014/main" id="{E0C05698-5E51-413C-88C9-D33654B08E85}"/>
+                <a16:creationId xmlns:a16="http://schemas.microsoft.com/office/drawing/2014/main" id="{0C03A1B3-D62F-4A8D-9708-5A1FDAFC25F3}"/>
               </a:ext>
             </a:extLst>
           </p:cNvPr>
@@ -13596,7 +13596,7 @@
           <p:cNvPr id="90" name="">
             <a:extLst xmlns:a="http://schemas.openxmlformats.org/drawingml/2006/main">
               <a:ext uri="{FF2B5EF4-FFF2-40B4-BE49-F238E27FC236}">
-                <a16:creationId xmlns:a16="http://schemas.microsoft.com/office/drawing/2014/main" id="{09AFBCE5-088D-48B4-A108-C2C2D0A5B615}"/>
+                <a16:creationId xmlns:a16="http://schemas.microsoft.com/office/drawing/2014/main" id="{35A2F299-5B8C-4D07-B3CE-49DEF0117B2F}"/>
               </a:ext>
             </a:extLst>
           </p:cNvPr>
@@ -13653,7 +13653,7 @@
         </p:xfrm>
         <a:graphic xmlns:a="http://schemas.openxmlformats.org/drawingml/2006/main">
           <a:graphicData uri="http://schemas.openxmlformats.org/drawingml/2006/chart">
-            <c:chart xmlns:r="http://schemas.openxmlformats.org/officeDocument/2006/relationships" xmlns:c="http://schemas.openxmlformats.org/drawingml/2006/chart" r:id="R6c78c71140b84a4b"/>
+            <c:chart xmlns:r="http://schemas.openxmlformats.org/officeDocument/2006/relationships" xmlns:c="http://schemas.openxmlformats.org/drawingml/2006/chart" r:id="R8ecbbbef72c64a20"/>
           </a:graphicData>
         </a:graphic>
       </p:graphicFrame>
@@ -13662,7 +13662,7 @@
           <p:cNvPr id="92" name="">
             <a:extLst xmlns:a="http://schemas.openxmlformats.org/drawingml/2006/main">
               <a:ext uri="{FF2B5EF4-FFF2-40B4-BE49-F238E27FC236}">
-                <a16:creationId xmlns:a16="http://schemas.microsoft.com/office/drawing/2014/main" id="{B5627531-816D-4ACD-8453-F894AA9E8358}"/>
+                <a16:creationId xmlns:a16="http://schemas.microsoft.com/office/drawing/2014/main" id="{E9D6DB83-39F8-42F7-ACC4-58A15EF4E8E8}"/>
               </a:ext>
             </a:extLst>
           </p:cNvPr>
@@ -13693,7 +13693,7 @@
           <p:cNvPr id="93" name="">
             <a:extLst xmlns:a="http://schemas.openxmlformats.org/drawingml/2006/main">
               <a:ext uri="{FF2B5EF4-FFF2-40B4-BE49-F238E27FC236}">
-                <a16:creationId xmlns:a16="http://schemas.microsoft.com/office/drawing/2014/main" id="{79479228-4F3F-4844-8012-2CF10441A882}"/>
+                <a16:creationId xmlns:a16="http://schemas.microsoft.com/office/drawing/2014/main" id="{B7524E7D-11D7-4684-ADF2-AEEC5D5844E2}"/>
               </a:ext>
             </a:extLst>
           </p:cNvPr>
@@ -13743,7 +13743,7 @@
           <p:cNvPr id="94" name="">
             <a:extLst xmlns:a="http://schemas.openxmlformats.org/drawingml/2006/main">
               <a:ext uri="{FF2B5EF4-FFF2-40B4-BE49-F238E27FC236}">
-                <a16:creationId xmlns:a16="http://schemas.microsoft.com/office/drawing/2014/main" id="{A5A05279-3CB8-4665-BDF8-7D9FB82EA5CB}"/>
+                <a16:creationId xmlns:a16="http://schemas.microsoft.com/office/drawing/2014/main" id="{E1B19D97-7031-4A6C-B8A5-60516C7135BC}"/>
               </a:ext>
             </a:extLst>
           </p:cNvPr>
@@ -13793,7 +13793,7 @@
           <p:cNvPr id="95" name="">
             <a:extLst xmlns:a="http://schemas.openxmlformats.org/drawingml/2006/main">
               <a:ext uri="{FF2B5EF4-FFF2-40B4-BE49-F238E27FC236}">
-                <a16:creationId xmlns:a16="http://schemas.microsoft.com/office/drawing/2014/main" id="{747B6C66-C0F4-4473-8732-2DFD230A3C22}"/>
+                <a16:creationId xmlns:a16="http://schemas.microsoft.com/office/drawing/2014/main" id="{8F2CC0EE-83E6-4ED1-868E-5AFED7B1245A}"/>
               </a:ext>
             </a:extLst>
           </p:cNvPr>
@@ -13843,7 +13843,7 @@
           <p:cNvPr id="96" name="">
             <a:extLst xmlns:a="http://schemas.openxmlformats.org/drawingml/2006/main">
               <a:ext uri="{FF2B5EF4-FFF2-40B4-BE49-F238E27FC236}">
-                <a16:creationId xmlns:a16="http://schemas.microsoft.com/office/drawing/2014/main" id="{02723246-892F-4081-9740-EB99794A7FC1}"/>
+                <a16:creationId xmlns:a16="http://schemas.microsoft.com/office/drawing/2014/main" id="{37201630-4BD5-4597-8343-8758CD51AFE2}"/>
               </a:ext>
             </a:extLst>
           </p:cNvPr>
@@ -13874,7 +13874,7 @@
           <p:cNvPr id="97" name="">
             <a:extLst xmlns:a="http://schemas.openxmlformats.org/drawingml/2006/main">
               <a:ext uri="{FF2B5EF4-FFF2-40B4-BE49-F238E27FC236}">
-                <a16:creationId xmlns:a16="http://schemas.microsoft.com/office/drawing/2014/main" id="{706D99A9-D0BB-4A74-B7B5-9143521BE6C9}"/>
+                <a16:creationId xmlns:a16="http://schemas.microsoft.com/office/drawing/2014/main" id="{0141708F-BDD0-42A0-B067-0918FD1ECEA2}"/>
               </a:ext>
             </a:extLst>
           </p:cNvPr>
@@ -13924,7 +13924,7 @@
           <p:cNvPr id="98" name="">
             <a:extLst xmlns:a="http://schemas.openxmlformats.org/drawingml/2006/main">
               <a:ext uri="{FF2B5EF4-FFF2-40B4-BE49-F238E27FC236}">
-                <a16:creationId xmlns:a16="http://schemas.microsoft.com/office/drawing/2014/main" id="{363146B9-B142-42DE-9ACC-75BEF7C8B6B7}"/>
+                <a16:creationId xmlns:a16="http://schemas.microsoft.com/office/drawing/2014/main" id="{1840FA2C-1EA3-4717-8218-8697B4FE4567}"/>
               </a:ext>
             </a:extLst>
           </p:cNvPr>
@@ -13974,7 +13974,7 @@
           <p:cNvPr id="99" name="">
             <a:extLst xmlns:a="http://schemas.openxmlformats.org/drawingml/2006/main">
               <a:ext uri="{FF2B5EF4-FFF2-40B4-BE49-F238E27FC236}">
-                <a16:creationId xmlns:a16="http://schemas.microsoft.com/office/drawing/2014/main" id="{85383A0F-EFB6-43D5-B05A-00E8DA7E4651}"/>
+                <a16:creationId xmlns:a16="http://schemas.microsoft.com/office/drawing/2014/main" id="{716F677E-2A40-4324-9F45-6EB7BC24E941}"/>
               </a:ext>
             </a:extLst>
           </p:cNvPr>
@@ -14024,7 +14024,7 @@
           <p:cNvPr id="100" name="">
             <a:extLst xmlns:a="http://schemas.openxmlformats.org/drawingml/2006/main">
               <a:ext uri="{FF2B5EF4-FFF2-40B4-BE49-F238E27FC236}">
-                <a16:creationId xmlns:a16="http://schemas.microsoft.com/office/drawing/2014/main" id="{05A4CA82-92DB-49E1-BCCF-09B1F53B6C32}"/>
+                <a16:creationId xmlns:a16="http://schemas.microsoft.com/office/drawing/2014/main" id="{2463C0FA-014A-42A3-A0E9-8FDC85148776}"/>
               </a:ext>
             </a:extLst>
           </p:cNvPr>
@@ -14055,7 +14055,7 @@
           <p:cNvPr id="101" name="">
             <a:extLst xmlns:a="http://schemas.openxmlformats.org/drawingml/2006/main">
               <a:ext uri="{FF2B5EF4-FFF2-40B4-BE49-F238E27FC236}">
-                <a16:creationId xmlns:a16="http://schemas.microsoft.com/office/drawing/2014/main" id="{49878D74-87C4-46A9-94E9-E0938F41738E}"/>
+                <a16:creationId xmlns:a16="http://schemas.microsoft.com/office/drawing/2014/main" id="{E42E6248-A0BD-41C5-B136-5AA5CEEBC5EB}"/>
               </a:ext>
             </a:extLst>
           </p:cNvPr>
@@ -14105,7 +14105,7 @@
           <p:cNvPr id="102" name="">
             <a:extLst xmlns:a="http://schemas.openxmlformats.org/drawingml/2006/main">
               <a:ext uri="{FF2B5EF4-FFF2-40B4-BE49-F238E27FC236}">
-                <a16:creationId xmlns:a16="http://schemas.microsoft.com/office/drawing/2014/main" id="{27F47573-F29F-45D1-AA20-EC43F709068D}"/>
+                <a16:creationId xmlns:a16="http://schemas.microsoft.com/office/drawing/2014/main" id="{7B8CE23F-341F-4841-B57A-6A48F7DE0384}"/>
               </a:ext>
             </a:extLst>
           </p:cNvPr>
@@ -14155,7 +14155,7 @@
           <p:cNvPr id="103" name="">
             <a:extLst xmlns:a="http://schemas.openxmlformats.org/drawingml/2006/main">
               <a:ext uri="{FF2B5EF4-FFF2-40B4-BE49-F238E27FC236}">
-                <a16:creationId xmlns:a16="http://schemas.microsoft.com/office/drawing/2014/main" id="{06A971CD-2BF1-4099-8569-EC93A7AA16F1}"/>
+                <a16:creationId xmlns:a16="http://schemas.microsoft.com/office/drawing/2014/main" id="{DDDF927A-BD98-4BFE-87EB-4761FCBBE549}"/>
               </a:ext>
             </a:extLst>
           </p:cNvPr>
@@ -14205,7 +14205,7 @@
           <p:cNvPr id="104" name="">
             <a:extLst xmlns:a="http://schemas.openxmlformats.org/drawingml/2006/main">
               <a:ext uri="{FF2B5EF4-FFF2-40B4-BE49-F238E27FC236}">
-                <a16:creationId xmlns:a16="http://schemas.microsoft.com/office/drawing/2014/main" id="{8EB45B71-0341-4B4D-A809-E367E59706C5}"/>
+                <a16:creationId xmlns:a16="http://schemas.microsoft.com/office/drawing/2014/main" id="{C4C698BB-A4E5-433E-9472-E647C9CF3610}"/>
               </a:ext>
             </a:extLst>
           </p:cNvPr>
@@ -14236,7 +14236,7 @@
           <p:cNvPr id="105" name="">
             <a:extLst xmlns:a="http://schemas.openxmlformats.org/drawingml/2006/main">
               <a:ext uri="{FF2B5EF4-FFF2-40B4-BE49-F238E27FC236}">
-                <a16:creationId xmlns:a16="http://schemas.microsoft.com/office/drawing/2014/main" id="{1A6D9820-AAB2-4DD1-A83B-C22DDCA2DD4D}"/>
+                <a16:creationId xmlns:a16="http://schemas.microsoft.com/office/drawing/2014/main" id="{21BBA740-1F0A-4FA4-8B6C-6F0F6BB78E6D}"/>
               </a:ext>
             </a:extLst>
           </p:cNvPr>
@@ -14286,7 +14286,7 @@
           <p:cNvPr id="106" name="">
             <a:extLst xmlns:a="http://schemas.openxmlformats.org/drawingml/2006/main">
               <a:ext uri="{FF2B5EF4-FFF2-40B4-BE49-F238E27FC236}">
-                <a16:creationId xmlns:a16="http://schemas.microsoft.com/office/drawing/2014/main" id="{CF88E697-9D02-4D03-ABAE-430F9B25688B}"/>
+                <a16:creationId xmlns:a16="http://schemas.microsoft.com/office/drawing/2014/main" id="{571EDCF3-43C6-41F4-8992-F02B86AAB1EB}"/>
               </a:ext>
             </a:extLst>
           </p:cNvPr>
@@ -14336,7 +14336,7 @@
           <p:cNvPr id="107" name="">
             <a:extLst xmlns:a="http://schemas.openxmlformats.org/drawingml/2006/main">
               <a:ext uri="{FF2B5EF4-FFF2-40B4-BE49-F238E27FC236}">
-                <a16:creationId xmlns:a16="http://schemas.microsoft.com/office/drawing/2014/main" id="{1B154A63-6023-46F5-9144-B92EC746A91A}"/>
+                <a16:creationId xmlns:a16="http://schemas.microsoft.com/office/drawing/2014/main" id="{F2BD5CC2-D24C-49DE-926A-2EC8C2846FF6}"/>
               </a:ext>
             </a:extLst>
           </p:cNvPr>
@@ -14386,7 +14386,7 @@
           <p:cNvPr id="108" name="">
             <a:extLst xmlns:a="http://schemas.openxmlformats.org/drawingml/2006/main">
               <a:ext uri="{FF2B5EF4-FFF2-40B4-BE49-F238E27FC236}">
-                <a16:creationId xmlns:a16="http://schemas.microsoft.com/office/drawing/2014/main" id="{FBA2152B-A205-41A9-8351-9B581BB15793}"/>
+                <a16:creationId xmlns:a16="http://schemas.microsoft.com/office/drawing/2014/main" id="{86D353D9-4935-4B04-A41E-E372B78C3595}"/>
               </a:ext>
             </a:extLst>
           </p:cNvPr>
@@ -14417,7 +14417,7 @@
           <p:cNvPr id="109" name="">
             <a:extLst xmlns:a="http://schemas.openxmlformats.org/drawingml/2006/main">
               <a:ext uri="{FF2B5EF4-FFF2-40B4-BE49-F238E27FC236}">
-                <a16:creationId xmlns:a16="http://schemas.microsoft.com/office/drawing/2014/main" id="{A01BC489-8463-4570-93A6-1AC56C4A36A7}"/>
+                <a16:creationId xmlns:a16="http://schemas.microsoft.com/office/drawing/2014/main" id="{86E85634-43ED-44A0-9088-F9623C9AA636}"/>
               </a:ext>
             </a:extLst>
           </p:cNvPr>
@@ -14467,7 +14467,7 @@
           <p:cNvPr id="110" name="">
             <a:extLst xmlns:a="http://schemas.openxmlformats.org/drawingml/2006/main">
               <a:ext uri="{FF2B5EF4-FFF2-40B4-BE49-F238E27FC236}">
-                <a16:creationId xmlns:a16="http://schemas.microsoft.com/office/drawing/2014/main" id="{0C40F82E-D7BD-4757-93DB-23BCB409D370}"/>
+                <a16:creationId xmlns:a16="http://schemas.microsoft.com/office/drawing/2014/main" id="{DE4A4406-FB1B-4604-8BC4-E082EF42DABA}"/>
               </a:ext>
             </a:extLst>
           </p:cNvPr>
@@ -14517,7 +14517,7 @@
           <p:cNvPr id="111" name="">
             <a:extLst xmlns:a="http://schemas.openxmlformats.org/drawingml/2006/main">
               <a:ext uri="{FF2B5EF4-FFF2-40B4-BE49-F238E27FC236}">
-                <a16:creationId xmlns:a16="http://schemas.microsoft.com/office/drawing/2014/main" id="{3B182FF5-FCD9-48AB-8010-EAB741DFD605}"/>
+                <a16:creationId xmlns:a16="http://schemas.microsoft.com/office/drawing/2014/main" id="{B057BF0D-CB36-48FD-80B7-D59FE589A6C7}"/>
               </a:ext>
             </a:extLst>
           </p:cNvPr>
@@ -14567,7 +14567,7 @@
           <p:cNvPr id="112" name="">
             <a:extLst xmlns:a="http://schemas.openxmlformats.org/drawingml/2006/main">
               <a:ext uri="{FF2B5EF4-FFF2-40B4-BE49-F238E27FC236}">
-                <a16:creationId xmlns:a16="http://schemas.microsoft.com/office/drawing/2014/main" id="{834785EF-841E-44C5-9551-856841039F2A}"/>
+                <a16:creationId xmlns:a16="http://schemas.microsoft.com/office/drawing/2014/main" id="{DF007F04-75B2-4BB8-96C9-E08924476231}"/>
               </a:ext>
             </a:extLst>
           </p:cNvPr>
@@ -14598,7 +14598,7 @@
           <p:cNvPr id="113" name="">
             <a:extLst xmlns:a="http://schemas.openxmlformats.org/drawingml/2006/main">
               <a:ext uri="{FF2B5EF4-FFF2-40B4-BE49-F238E27FC236}">
-                <a16:creationId xmlns:a16="http://schemas.microsoft.com/office/drawing/2014/main" id="{FAE66304-DDF8-45AC-A050-D58DEF2ADA5F}"/>
+                <a16:creationId xmlns:a16="http://schemas.microsoft.com/office/drawing/2014/main" id="{09AD5D3C-D140-490A-95DB-6570B1BCEF16}"/>
               </a:ext>
             </a:extLst>
           </p:cNvPr>
@@ -14648,7 +14648,7 @@
           <p:cNvPr id="114" name="">
             <a:extLst xmlns:a="http://schemas.openxmlformats.org/drawingml/2006/main">
               <a:ext uri="{FF2B5EF4-FFF2-40B4-BE49-F238E27FC236}">
-                <a16:creationId xmlns:a16="http://schemas.microsoft.com/office/drawing/2014/main" id="{1F369095-DD71-4E8E-9C95-A67B43D27C7A}"/>
+                <a16:creationId xmlns:a16="http://schemas.microsoft.com/office/drawing/2014/main" id="{BB8B25E9-E5AD-4000-9EF9-950C41320B7D}"/>
               </a:ext>
             </a:extLst>
           </p:cNvPr>
@@ -14698,7 +14698,7 @@
           <p:cNvPr id="115" name="">
             <a:extLst xmlns:a="http://schemas.openxmlformats.org/drawingml/2006/main">
               <a:ext uri="{FF2B5EF4-FFF2-40B4-BE49-F238E27FC236}">
-                <a16:creationId xmlns:a16="http://schemas.microsoft.com/office/drawing/2014/main" id="{555D29FA-3CD9-475B-9693-D87433BCC213}"/>
+                <a16:creationId xmlns:a16="http://schemas.microsoft.com/office/drawing/2014/main" id="{2A5F5904-A9DB-4EB5-982F-B83CC96FE7ED}"/>
               </a:ext>
             </a:extLst>
           </p:cNvPr>
@@ -14748,7 +14748,7 @@
           <p:cNvPr id="116" name="">
             <a:extLst xmlns:a="http://schemas.openxmlformats.org/drawingml/2006/main">
               <a:ext uri="{FF2B5EF4-FFF2-40B4-BE49-F238E27FC236}">
-                <a16:creationId xmlns:a16="http://schemas.microsoft.com/office/drawing/2014/main" id="{CF0F107C-F68E-4E0D-9E15-A7207CD19C51}"/>
+                <a16:creationId xmlns:a16="http://schemas.microsoft.com/office/drawing/2014/main" id="{F53AE292-3473-4546-AD54-F5F2EF3BF147}"/>
               </a:ext>
             </a:extLst>
           </p:cNvPr>
@@ -14798,7 +14798,7 @@
           <p:cNvPr id="117" name="">
             <a:extLst xmlns:a="http://schemas.openxmlformats.org/drawingml/2006/main">
               <a:ext uri="{FF2B5EF4-FFF2-40B4-BE49-F238E27FC236}">
-                <a16:creationId xmlns:a16="http://schemas.microsoft.com/office/drawing/2014/main" id="{CFE27891-FE21-4A74-8B3B-C4169CBBE692}"/>
+                <a16:creationId xmlns:a16="http://schemas.microsoft.com/office/drawing/2014/main" id="{0A97BA60-F2AC-46CF-90EB-0B01134F8ED1}"/>
               </a:ext>
             </a:extLst>
           </p:cNvPr>
@@ -14829,7 +14829,7 @@
           <p:cNvPr id="118" name="">
             <a:extLst xmlns:a="http://schemas.openxmlformats.org/drawingml/2006/main">
               <a:ext uri="{FF2B5EF4-FFF2-40B4-BE49-F238E27FC236}">
-                <a16:creationId xmlns:a16="http://schemas.microsoft.com/office/drawing/2014/main" id="{2873B12C-3924-470C-A47F-7044F758B7A7}"/>
+                <a16:creationId xmlns:a16="http://schemas.microsoft.com/office/drawing/2014/main" id="{3EFB2020-0D94-4D63-B739-96BAC4F0D038}"/>
               </a:ext>
             </a:extLst>
           </p:cNvPr>
@@ -14879,7 +14879,7 @@
           <p:cNvPr id="119" name="">
             <a:extLst xmlns:a="http://schemas.openxmlformats.org/drawingml/2006/main">
               <a:ext uri="{FF2B5EF4-FFF2-40B4-BE49-F238E27FC236}">
-                <a16:creationId xmlns:a16="http://schemas.microsoft.com/office/drawing/2014/main" id="{61E4570F-BCE1-45B6-B100-F16079F8AA1F}"/>
+                <a16:creationId xmlns:a16="http://schemas.microsoft.com/office/drawing/2014/main" id="{D39E9BA0-F4C7-4224-B860-AC84282847AF}"/>
               </a:ext>
             </a:extLst>
           </p:cNvPr>
@@ -14927,7 +14927,7 @@
     </p:spTree>
     <p:extLst>
       <p:ext uri="{BB962C8B-B14F-4D97-AF65-F5344CB8AC3E}">
-        <p14:creationId xmlns:p14="http://schemas.microsoft.com/office/powerpoint/2010/main" val="1132738270"/>
+        <p14:creationId xmlns:p14="http://schemas.microsoft.com/office/powerpoint/2010/main" val="713926699"/>
       </p:ext>
     </p:extLst>
   </p:cSld>
@@ -14958,7 +14958,7 @@
           <p:cNvPr id="120" name="">
             <a:extLst xmlns:a="http://schemas.openxmlformats.org/drawingml/2006/main">
               <a:ext uri="{FF2B5EF4-FFF2-40B4-BE49-F238E27FC236}">
-                <a16:creationId xmlns:a16="http://schemas.microsoft.com/office/drawing/2014/main" id="{24BBA7E4-4B6E-410D-97E2-A4CC85B89CD1}"/>
+                <a16:creationId xmlns:a16="http://schemas.microsoft.com/office/drawing/2014/main" id="{7E433CAA-008A-4834-B19E-A7F8172FDD1C}"/>
               </a:ext>
             </a:extLst>
           </p:cNvPr>
@@ -15008,7 +15008,7 @@
           <p:cNvPr id="2" name="">
             <a:extLst xmlns:a="http://schemas.openxmlformats.org/drawingml/2006/main">
               <a:ext uri="{FF2B5EF4-FFF2-40B4-BE49-F238E27FC236}">
-                <a16:creationId xmlns:a16="http://schemas.microsoft.com/office/drawing/2014/main" id="{B477E6E9-176B-44EA-9B36-9FCF0BF8E112}"/>
+                <a16:creationId xmlns:a16="http://schemas.microsoft.com/office/drawing/2014/main" id="{3DC5D3F8-33A3-49C2-9413-3C84626A0EA0}"/>
               </a:ext>
             </a:extLst>
           </p:cNvPr>
@@ -15058,7 +15058,7 @@
           <p:cNvPr id="3" name="">
             <a:extLst xmlns:a="http://schemas.openxmlformats.org/drawingml/2006/main">
               <a:ext uri="{FF2B5EF4-FFF2-40B4-BE49-F238E27FC236}">
-                <a16:creationId xmlns:a16="http://schemas.microsoft.com/office/drawing/2014/main" id="{F19372B1-3A9A-4961-B4E6-A84F4240CC2F}"/>
+                <a16:creationId xmlns:a16="http://schemas.microsoft.com/office/drawing/2014/main" id="{3A46309E-170E-489F-82BA-A71C839CA66E}"/>
               </a:ext>
             </a:extLst>
           </p:cNvPr>
@@ -15108,7 +15108,7 @@
           <p:cNvPr id="4" name="">
             <a:extLst xmlns:a="http://schemas.openxmlformats.org/drawingml/2006/main">
               <a:ext uri="{FF2B5EF4-FFF2-40B4-BE49-F238E27FC236}">
-                <a16:creationId xmlns:a16="http://schemas.microsoft.com/office/drawing/2014/main" id="{70D4B345-8798-473B-B958-7A62CF135B9F}"/>
+                <a16:creationId xmlns:a16="http://schemas.microsoft.com/office/drawing/2014/main" id="{734C4DD0-7D9E-4A70-8DBA-A2D7FF9383B7}"/>
               </a:ext>
             </a:extLst>
           </p:cNvPr>
@@ -15149,7 +15149,7 @@
           <p:cNvPr id="5" name="">
             <a:extLst xmlns:a="http://schemas.openxmlformats.org/drawingml/2006/main">
               <a:ext uri="{FF2B5EF4-FFF2-40B4-BE49-F238E27FC236}">
-                <a16:creationId xmlns:a16="http://schemas.microsoft.com/office/drawing/2014/main" id="{77BC3E1E-63AF-444C-93F4-D310B878725B}"/>
+                <a16:creationId xmlns:a16="http://schemas.microsoft.com/office/drawing/2014/main" id="{10FCE6CD-061B-4464-91FD-39914805D27D}"/>
               </a:ext>
             </a:extLst>
           </p:cNvPr>
@@ -15199,7 +15199,7 @@
           <p:cNvPr id="6" name="">
             <a:extLst xmlns:a="http://schemas.openxmlformats.org/drawingml/2006/main">
               <a:ext uri="{FF2B5EF4-FFF2-40B4-BE49-F238E27FC236}">
-                <a16:creationId xmlns:a16="http://schemas.microsoft.com/office/drawing/2014/main" id="{1FD8DC8E-8B1A-44B2-AC9F-78CCF5C40FFD}"/>
+                <a16:creationId xmlns:a16="http://schemas.microsoft.com/office/drawing/2014/main" id="{6FD572C2-B506-4BF7-A244-981529D10491}"/>
               </a:ext>
             </a:extLst>
           </p:cNvPr>
@@ -15256,7 +15256,7 @@
         </p:xfrm>
         <a:graphic xmlns:a="http://schemas.openxmlformats.org/drawingml/2006/main">
           <a:graphicData uri="http://schemas.openxmlformats.org/drawingml/2006/chart">
-            <c:chart xmlns:r="http://schemas.openxmlformats.org/officeDocument/2006/relationships" xmlns:c="http://schemas.openxmlformats.org/drawingml/2006/chart" r:id="Rf424bfae5a2e45d4"/>
+            <c:chart xmlns:r="http://schemas.openxmlformats.org/officeDocument/2006/relationships" xmlns:c="http://schemas.openxmlformats.org/drawingml/2006/chart" r:id="Rcf72037295914aca"/>
           </a:graphicData>
         </a:graphic>
       </p:graphicFrame>
@@ -15265,7 +15265,7 @@
           <p:cNvPr id="8" name="">
             <a:extLst xmlns:a="http://schemas.openxmlformats.org/drawingml/2006/main">
               <a:ext uri="{FF2B5EF4-FFF2-40B4-BE49-F238E27FC236}">
-                <a16:creationId xmlns:a16="http://schemas.microsoft.com/office/drawing/2014/main" id="{06FED92F-B230-496D-B83F-DCF8053E357D}"/>
+                <a16:creationId xmlns:a16="http://schemas.microsoft.com/office/drawing/2014/main" id="{115E058E-BA51-400F-A79C-F28D739C6222}"/>
               </a:ext>
             </a:extLst>
           </p:cNvPr>
@@ -15296,7 +15296,7 @@
           <p:cNvPr id="9" name="">
             <a:extLst xmlns:a="http://schemas.openxmlformats.org/drawingml/2006/main">
               <a:ext uri="{FF2B5EF4-FFF2-40B4-BE49-F238E27FC236}">
-                <a16:creationId xmlns:a16="http://schemas.microsoft.com/office/drawing/2014/main" id="{4673FE24-594D-4128-BBE3-C94190B6D50F}"/>
+                <a16:creationId xmlns:a16="http://schemas.microsoft.com/office/drawing/2014/main" id="{28712D4A-3AC5-48A8-8051-B363D83B3CE5}"/>
               </a:ext>
             </a:extLst>
           </p:cNvPr>
@@ -15346,7 +15346,7 @@
           <p:cNvPr id="10" name="">
             <a:extLst xmlns:a="http://schemas.openxmlformats.org/drawingml/2006/main">
               <a:ext uri="{FF2B5EF4-FFF2-40B4-BE49-F238E27FC236}">
-                <a16:creationId xmlns:a16="http://schemas.microsoft.com/office/drawing/2014/main" id="{05C055E7-A1A1-494F-A8AD-BFC7AE634BBB}"/>
+                <a16:creationId xmlns:a16="http://schemas.microsoft.com/office/drawing/2014/main" id="{C7A07E83-F04C-407A-9502-E782F54D88C3}"/>
               </a:ext>
             </a:extLst>
           </p:cNvPr>
@@ -15396,7 +15396,7 @@
           <p:cNvPr id="11" name="">
             <a:extLst xmlns:a="http://schemas.openxmlformats.org/drawingml/2006/main">
               <a:ext uri="{FF2B5EF4-FFF2-40B4-BE49-F238E27FC236}">
-                <a16:creationId xmlns:a16="http://schemas.microsoft.com/office/drawing/2014/main" id="{A3B7837A-CF5A-4F50-9D45-D157E069DF96}"/>
+                <a16:creationId xmlns:a16="http://schemas.microsoft.com/office/drawing/2014/main" id="{BC76F995-89D2-4657-9CA1-0A6A04B8A5EF}"/>
               </a:ext>
             </a:extLst>
           </p:cNvPr>
@@ -15446,7 +15446,7 @@
           <p:cNvPr id="12" name="">
             <a:extLst xmlns:a="http://schemas.openxmlformats.org/drawingml/2006/main">
               <a:ext uri="{FF2B5EF4-FFF2-40B4-BE49-F238E27FC236}">
-                <a16:creationId xmlns:a16="http://schemas.microsoft.com/office/drawing/2014/main" id="{D1B60C72-6A91-4F0E-9DA5-8B1B96FB9D6D}"/>
+                <a16:creationId xmlns:a16="http://schemas.microsoft.com/office/drawing/2014/main" id="{A9A10ACA-F939-42C9-AC2A-8719373C5397}"/>
               </a:ext>
             </a:extLst>
           </p:cNvPr>
@@ -15477,7 +15477,7 @@
           <p:cNvPr id="13" name="">
             <a:extLst xmlns:a="http://schemas.openxmlformats.org/drawingml/2006/main">
               <a:ext uri="{FF2B5EF4-FFF2-40B4-BE49-F238E27FC236}">
-                <a16:creationId xmlns:a16="http://schemas.microsoft.com/office/drawing/2014/main" id="{D41FB1A9-1BAD-4D25-800C-BDEE9EF42565}"/>
+                <a16:creationId xmlns:a16="http://schemas.microsoft.com/office/drawing/2014/main" id="{FDDA9860-A14E-4137-8D95-2087CDB880FF}"/>
               </a:ext>
             </a:extLst>
           </p:cNvPr>
@@ -15527,7 +15527,7 @@
           <p:cNvPr id="14" name="">
             <a:extLst xmlns:a="http://schemas.openxmlformats.org/drawingml/2006/main">
               <a:ext uri="{FF2B5EF4-FFF2-40B4-BE49-F238E27FC236}">
-                <a16:creationId xmlns:a16="http://schemas.microsoft.com/office/drawing/2014/main" id="{1BECB71C-539C-4BBE-9655-56BB33455292}"/>
+                <a16:creationId xmlns:a16="http://schemas.microsoft.com/office/drawing/2014/main" id="{BD62632C-6769-4C37-989F-1CCF80B61EE2}"/>
               </a:ext>
             </a:extLst>
           </p:cNvPr>
@@ -15577,7 +15577,7 @@
           <p:cNvPr id="15" name="">
             <a:extLst xmlns:a="http://schemas.openxmlformats.org/drawingml/2006/main">
               <a:ext uri="{FF2B5EF4-FFF2-40B4-BE49-F238E27FC236}">
-                <a16:creationId xmlns:a16="http://schemas.microsoft.com/office/drawing/2014/main" id="{60908C90-EE79-4B65-AE11-511547C3241A}"/>
+                <a16:creationId xmlns:a16="http://schemas.microsoft.com/office/drawing/2014/main" id="{A5C32440-AC40-4547-AF68-80895A256642}"/>
               </a:ext>
             </a:extLst>
           </p:cNvPr>
@@ -15627,7 +15627,7 @@
           <p:cNvPr id="16" name="">
             <a:extLst xmlns:a="http://schemas.openxmlformats.org/drawingml/2006/main">
               <a:ext uri="{FF2B5EF4-FFF2-40B4-BE49-F238E27FC236}">
-                <a16:creationId xmlns:a16="http://schemas.microsoft.com/office/drawing/2014/main" id="{85A1DAA0-C177-407E-B617-C27C4B992926}"/>
+                <a16:creationId xmlns:a16="http://schemas.microsoft.com/office/drawing/2014/main" id="{4A0C7A77-A7F3-4B88-94D7-541E4A3A51CB}"/>
               </a:ext>
             </a:extLst>
           </p:cNvPr>
@@ -15658,7 +15658,7 @@
           <p:cNvPr id="17" name="">
             <a:extLst xmlns:a="http://schemas.openxmlformats.org/drawingml/2006/main">
               <a:ext uri="{FF2B5EF4-FFF2-40B4-BE49-F238E27FC236}">
-                <a16:creationId xmlns:a16="http://schemas.microsoft.com/office/drawing/2014/main" id="{15998B27-4531-4657-8D0E-066562D1ACB5}"/>
+                <a16:creationId xmlns:a16="http://schemas.microsoft.com/office/drawing/2014/main" id="{6E09C75A-5D61-4C53-BBCB-F6BCC2DC47BB}"/>
               </a:ext>
             </a:extLst>
           </p:cNvPr>
@@ -15708,7 +15708,7 @@
           <p:cNvPr id="18" name="">
             <a:extLst xmlns:a="http://schemas.openxmlformats.org/drawingml/2006/main">
               <a:ext uri="{FF2B5EF4-FFF2-40B4-BE49-F238E27FC236}">
-                <a16:creationId xmlns:a16="http://schemas.microsoft.com/office/drawing/2014/main" id="{E453695B-5F9A-4538-8CD3-A75C614E8077}"/>
+                <a16:creationId xmlns:a16="http://schemas.microsoft.com/office/drawing/2014/main" id="{AF203AF7-3DD4-4ACA-8393-761921DBE113}"/>
               </a:ext>
             </a:extLst>
           </p:cNvPr>
@@ -15758,7 +15758,7 @@
           <p:cNvPr id="19" name="">
             <a:extLst xmlns:a="http://schemas.openxmlformats.org/drawingml/2006/main">
               <a:ext uri="{FF2B5EF4-FFF2-40B4-BE49-F238E27FC236}">
-                <a16:creationId xmlns:a16="http://schemas.microsoft.com/office/drawing/2014/main" id="{4AFDB1D4-9A13-4F69-A3DD-13D0472C74FD}"/>
+                <a16:creationId xmlns:a16="http://schemas.microsoft.com/office/drawing/2014/main" id="{70805F9B-318A-443C-843C-0CECFE030B3A}"/>
               </a:ext>
             </a:extLst>
           </p:cNvPr>
@@ -15808,7 +15808,7 @@
           <p:cNvPr id="20" name="">
             <a:extLst xmlns:a="http://schemas.openxmlformats.org/drawingml/2006/main">
               <a:ext uri="{FF2B5EF4-FFF2-40B4-BE49-F238E27FC236}">
-                <a16:creationId xmlns:a16="http://schemas.microsoft.com/office/drawing/2014/main" id="{26FF19FA-DBF0-4EFE-8C4E-DE6B7442A3D7}"/>
+                <a16:creationId xmlns:a16="http://schemas.microsoft.com/office/drawing/2014/main" id="{DCBC8B41-280C-405F-9478-D7C1024AF115}"/>
               </a:ext>
             </a:extLst>
           </p:cNvPr>
@@ -15839,7 +15839,7 @@
           <p:cNvPr id="21" name="">
             <a:extLst xmlns:a="http://schemas.openxmlformats.org/drawingml/2006/main">
               <a:ext uri="{FF2B5EF4-FFF2-40B4-BE49-F238E27FC236}">
-                <a16:creationId xmlns:a16="http://schemas.microsoft.com/office/drawing/2014/main" id="{F97D27C0-E002-46CA-979F-F5A8571AF4CB}"/>
+                <a16:creationId xmlns:a16="http://schemas.microsoft.com/office/drawing/2014/main" id="{692F24EF-33DB-4CEF-BB86-C342BDFE9725}"/>
               </a:ext>
             </a:extLst>
           </p:cNvPr>
@@ -15889,7 +15889,7 @@
           <p:cNvPr id="22" name="">
             <a:extLst xmlns:a="http://schemas.openxmlformats.org/drawingml/2006/main">
               <a:ext uri="{FF2B5EF4-FFF2-40B4-BE49-F238E27FC236}">
-                <a16:creationId xmlns:a16="http://schemas.microsoft.com/office/drawing/2014/main" id="{5B894A82-3683-48E7-A590-078E5061A1AF}"/>
+                <a16:creationId xmlns:a16="http://schemas.microsoft.com/office/drawing/2014/main" id="{842B7ACC-A6C8-4B58-A995-B5E6C6F0CC8A}"/>
               </a:ext>
             </a:extLst>
           </p:cNvPr>
@@ -15939,7 +15939,7 @@
           <p:cNvPr id="23" name="">
             <a:extLst xmlns:a="http://schemas.openxmlformats.org/drawingml/2006/main">
               <a:ext uri="{FF2B5EF4-FFF2-40B4-BE49-F238E27FC236}">
-                <a16:creationId xmlns:a16="http://schemas.microsoft.com/office/drawing/2014/main" id="{C782150F-8A07-4D44-8A59-178D7BF813F0}"/>
+                <a16:creationId xmlns:a16="http://schemas.microsoft.com/office/drawing/2014/main" id="{75E50D68-D177-4F7A-A3AD-2B3D0B050375}"/>
               </a:ext>
             </a:extLst>
           </p:cNvPr>
@@ -15989,7 +15989,7 @@
           <p:cNvPr id="24" name="">
             <a:extLst xmlns:a="http://schemas.openxmlformats.org/drawingml/2006/main">
               <a:ext uri="{FF2B5EF4-FFF2-40B4-BE49-F238E27FC236}">
-                <a16:creationId xmlns:a16="http://schemas.microsoft.com/office/drawing/2014/main" id="{4D70B5D4-905B-412F-A4CD-1D40F40DF029}"/>
+                <a16:creationId xmlns:a16="http://schemas.microsoft.com/office/drawing/2014/main" id="{D1F26503-21F0-43C2-AE21-AACD86990369}"/>
               </a:ext>
             </a:extLst>
           </p:cNvPr>
@@ -16020,7 +16020,7 @@
           <p:cNvPr id="25" name="">
             <a:extLst xmlns:a="http://schemas.openxmlformats.org/drawingml/2006/main">
               <a:ext uri="{FF2B5EF4-FFF2-40B4-BE49-F238E27FC236}">
-                <a16:creationId xmlns:a16="http://schemas.microsoft.com/office/drawing/2014/main" id="{3B4D97DB-4FB0-4957-9F34-B594F453933E}"/>
+                <a16:creationId xmlns:a16="http://schemas.microsoft.com/office/drawing/2014/main" id="{DE9FB297-4F42-40D8-BC25-C269DEDEB8B0}"/>
               </a:ext>
             </a:extLst>
           </p:cNvPr>
@@ -16070,7 +16070,7 @@
           <p:cNvPr id="26" name="">
             <a:extLst xmlns:a="http://schemas.openxmlformats.org/drawingml/2006/main">
               <a:ext uri="{FF2B5EF4-FFF2-40B4-BE49-F238E27FC236}">
-                <a16:creationId xmlns:a16="http://schemas.microsoft.com/office/drawing/2014/main" id="{9D886B06-9A63-45C4-BD52-423B047916F2}"/>
+                <a16:creationId xmlns:a16="http://schemas.microsoft.com/office/drawing/2014/main" id="{CABA40C8-8460-49B0-867F-9F756398FBB2}"/>
               </a:ext>
             </a:extLst>
           </p:cNvPr>
@@ -16120,7 +16120,7 @@
           <p:cNvPr id="27" name="">
             <a:extLst xmlns:a="http://schemas.openxmlformats.org/drawingml/2006/main">
               <a:ext uri="{FF2B5EF4-FFF2-40B4-BE49-F238E27FC236}">
-                <a16:creationId xmlns:a16="http://schemas.microsoft.com/office/drawing/2014/main" id="{640EBC3C-90EB-4462-AED1-EECD37B83730}"/>
+                <a16:creationId xmlns:a16="http://schemas.microsoft.com/office/drawing/2014/main" id="{68B5AAFA-18EF-4663-8735-49A80BFAC30F}"/>
               </a:ext>
             </a:extLst>
           </p:cNvPr>
@@ -16170,7 +16170,7 @@
           <p:cNvPr id="28" name="">
             <a:extLst xmlns:a="http://schemas.openxmlformats.org/drawingml/2006/main">
               <a:ext uri="{FF2B5EF4-FFF2-40B4-BE49-F238E27FC236}">
-                <a16:creationId xmlns:a16="http://schemas.microsoft.com/office/drawing/2014/main" id="{E4C9219B-D3A4-466B-9153-DAEB2CE688A1}"/>
+                <a16:creationId xmlns:a16="http://schemas.microsoft.com/office/drawing/2014/main" id="{38D9D3EE-8343-4B3E-B2F3-04CE45A122ED}"/>
               </a:ext>
             </a:extLst>
           </p:cNvPr>
@@ -16201,7 +16201,7 @@
           <p:cNvPr id="29" name="">
             <a:extLst xmlns:a="http://schemas.openxmlformats.org/drawingml/2006/main">
               <a:ext uri="{FF2B5EF4-FFF2-40B4-BE49-F238E27FC236}">
-                <a16:creationId xmlns:a16="http://schemas.microsoft.com/office/drawing/2014/main" id="{EFE62515-868B-4508-B5B3-A284A04052D4}"/>
+                <a16:creationId xmlns:a16="http://schemas.microsoft.com/office/drawing/2014/main" id="{F257CCB5-B6E5-4481-9F73-F8F806871D7B}"/>
               </a:ext>
             </a:extLst>
           </p:cNvPr>
@@ -16251,7 +16251,7 @@
           <p:cNvPr id="30" name="">
             <a:extLst xmlns:a="http://schemas.openxmlformats.org/drawingml/2006/main">
               <a:ext uri="{FF2B5EF4-FFF2-40B4-BE49-F238E27FC236}">
-                <a16:creationId xmlns:a16="http://schemas.microsoft.com/office/drawing/2014/main" id="{DB68D14F-64D9-4231-9C26-A97651A14F15}"/>
+                <a16:creationId xmlns:a16="http://schemas.microsoft.com/office/drawing/2014/main" id="{F4052E4B-8FEF-4D5E-81D5-10C102CE13B6}"/>
               </a:ext>
             </a:extLst>
           </p:cNvPr>
@@ -16301,7 +16301,7 @@
           <p:cNvPr id="31" name="">
             <a:extLst xmlns:a="http://schemas.openxmlformats.org/drawingml/2006/main">
               <a:ext uri="{FF2B5EF4-FFF2-40B4-BE49-F238E27FC236}">
-                <a16:creationId xmlns:a16="http://schemas.microsoft.com/office/drawing/2014/main" id="{993F9DF2-69F4-42AE-879C-20638705ABD0}"/>
+                <a16:creationId xmlns:a16="http://schemas.microsoft.com/office/drawing/2014/main" id="{40460F6E-B2AB-4B0B-B4CD-5A0CC2081028}"/>
               </a:ext>
             </a:extLst>
           </p:cNvPr>
@@ -16351,7 +16351,7 @@
           <p:cNvPr id="32" name="">
             <a:extLst xmlns:a="http://schemas.openxmlformats.org/drawingml/2006/main">
               <a:ext uri="{FF2B5EF4-FFF2-40B4-BE49-F238E27FC236}">
-                <a16:creationId xmlns:a16="http://schemas.microsoft.com/office/drawing/2014/main" id="{BFDC0A4E-81E2-4B5C-ADD4-4D5494DD1A8C}"/>
+                <a16:creationId xmlns:a16="http://schemas.microsoft.com/office/drawing/2014/main" id="{68BBD982-402C-4CEB-B9B4-3DE392AC967E}"/>
               </a:ext>
             </a:extLst>
           </p:cNvPr>
@@ -16392,7 +16392,7 @@
           <p:cNvPr id="33" name="">
             <a:extLst xmlns:a="http://schemas.openxmlformats.org/drawingml/2006/main">
               <a:ext uri="{FF2B5EF4-FFF2-40B4-BE49-F238E27FC236}">
-                <a16:creationId xmlns:a16="http://schemas.microsoft.com/office/drawing/2014/main" id="{C2CDDB08-FC8C-4603-8C9A-54B7F47F35B9}"/>
+                <a16:creationId xmlns:a16="http://schemas.microsoft.com/office/drawing/2014/main" id="{F8860750-4EA9-4DF9-8BE9-6C5C6E5A7954}"/>
               </a:ext>
             </a:extLst>
           </p:cNvPr>
@@ -16442,7 +16442,7 @@
           <p:cNvPr id="34" name="">
             <a:extLst xmlns:a="http://schemas.openxmlformats.org/drawingml/2006/main">
               <a:ext uri="{FF2B5EF4-FFF2-40B4-BE49-F238E27FC236}">
-                <a16:creationId xmlns:a16="http://schemas.microsoft.com/office/drawing/2014/main" id="{21A7D07A-41F0-466D-8C98-02DF8F2B969C}"/>
+                <a16:creationId xmlns:a16="http://schemas.microsoft.com/office/drawing/2014/main" id="{C3FA4027-BF0E-4226-BB05-D9D3E1ED7FE7}"/>
               </a:ext>
             </a:extLst>
           </p:cNvPr>
@@ -16499,7 +16499,7 @@
         </p:xfrm>
         <a:graphic xmlns:a="http://schemas.openxmlformats.org/drawingml/2006/main">
           <a:graphicData uri="http://schemas.openxmlformats.org/drawingml/2006/chart">
-            <c:chart xmlns:r="http://schemas.openxmlformats.org/officeDocument/2006/relationships" xmlns:c="http://schemas.openxmlformats.org/drawingml/2006/chart" r:id="R1b4f5f85fd414c3b"/>
+            <c:chart xmlns:r="http://schemas.openxmlformats.org/officeDocument/2006/relationships" xmlns:c="http://schemas.openxmlformats.org/drawingml/2006/chart" r:id="Rbc0a8a470b1549b4"/>
           </a:graphicData>
         </a:graphic>
       </p:graphicFrame>
@@ -16508,7 +16508,7 @@
           <p:cNvPr id="36" name="">
             <a:extLst xmlns:a="http://schemas.openxmlformats.org/drawingml/2006/main">
               <a:ext uri="{FF2B5EF4-FFF2-40B4-BE49-F238E27FC236}">
-                <a16:creationId xmlns:a16="http://schemas.microsoft.com/office/drawing/2014/main" id="{894F6845-D9A6-459F-9B0B-3C83CFE6D197}"/>
+                <a16:creationId xmlns:a16="http://schemas.microsoft.com/office/drawing/2014/main" id="{C174E929-2849-418E-A223-D6F9AB42C660}"/>
               </a:ext>
             </a:extLst>
           </p:cNvPr>
@@ -16539,7 +16539,7 @@
           <p:cNvPr id="37" name="">
             <a:extLst xmlns:a="http://schemas.openxmlformats.org/drawingml/2006/main">
               <a:ext uri="{FF2B5EF4-FFF2-40B4-BE49-F238E27FC236}">
-                <a16:creationId xmlns:a16="http://schemas.microsoft.com/office/drawing/2014/main" id="{3A1E9DFB-45B0-44A1-A198-D8F0E1EC6806}"/>
+                <a16:creationId xmlns:a16="http://schemas.microsoft.com/office/drawing/2014/main" id="{6C1A2900-54F7-4002-A3C0-3277AD8D6BF9}"/>
               </a:ext>
             </a:extLst>
           </p:cNvPr>
@@ -16589,7 +16589,7 @@
           <p:cNvPr id="38" name="">
             <a:extLst xmlns:a="http://schemas.openxmlformats.org/drawingml/2006/main">
               <a:ext uri="{FF2B5EF4-FFF2-40B4-BE49-F238E27FC236}">
-                <a16:creationId xmlns:a16="http://schemas.microsoft.com/office/drawing/2014/main" id="{9AAC4A1F-20EA-47BA-AEB6-AE82F57D51E0}"/>
+                <a16:creationId xmlns:a16="http://schemas.microsoft.com/office/drawing/2014/main" id="{544BB062-DBDF-4A33-BFF9-9E5FFF2B5717}"/>
               </a:ext>
             </a:extLst>
           </p:cNvPr>
@@ -16639,7 +16639,7 @@
           <p:cNvPr id="39" name="">
             <a:extLst xmlns:a="http://schemas.openxmlformats.org/drawingml/2006/main">
               <a:ext uri="{FF2B5EF4-FFF2-40B4-BE49-F238E27FC236}">
-                <a16:creationId xmlns:a16="http://schemas.microsoft.com/office/drawing/2014/main" id="{4AE2B97A-3A09-4E09-8897-07292897FCA5}"/>
+                <a16:creationId xmlns:a16="http://schemas.microsoft.com/office/drawing/2014/main" id="{FFBC6ECF-FEEE-439A-914C-7DCDD5CA1D67}"/>
               </a:ext>
             </a:extLst>
           </p:cNvPr>
@@ -16689,7 +16689,7 @@
           <p:cNvPr id="40" name="">
             <a:extLst xmlns:a="http://schemas.openxmlformats.org/drawingml/2006/main">
               <a:ext uri="{FF2B5EF4-FFF2-40B4-BE49-F238E27FC236}">
-                <a16:creationId xmlns:a16="http://schemas.microsoft.com/office/drawing/2014/main" id="{6BF688A9-51E1-4C0D-A29A-A10553481398}"/>
+                <a16:creationId xmlns:a16="http://schemas.microsoft.com/office/drawing/2014/main" id="{B8343388-BAE1-4337-B244-A7EE4C1EC3E1}"/>
               </a:ext>
             </a:extLst>
           </p:cNvPr>
@@ -16720,7 +16720,7 @@
           <p:cNvPr id="41" name="">
             <a:extLst xmlns:a="http://schemas.openxmlformats.org/drawingml/2006/main">
               <a:ext uri="{FF2B5EF4-FFF2-40B4-BE49-F238E27FC236}">
-                <a16:creationId xmlns:a16="http://schemas.microsoft.com/office/drawing/2014/main" id="{387BA5C5-602A-4A15-A05F-AFE5AF1ABCAF}"/>
+                <a16:creationId xmlns:a16="http://schemas.microsoft.com/office/drawing/2014/main" id="{6C51980D-0C0B-4D9F-9D3B-C615ACD0B414}"/>
               </a:ext>
             </a:extLst>
           </p:cNvPr>
@@ -16770,7 +16770,7 @@
           <p:cNvPr id="42" name="">
             <a:extLst xmlns:a="http://schemas.openxmlformats.org/drawingml/2006/main">
               <a:ext uri="{FF2B5EF4-FFF2-40B4-BE49-F238E27FC236}">
-                <a16:creationId xmlns:a16="http://schemas.microsoft.com/office/drawing/2014/main" id="{693A68E6-A933-4662-B84E-63DE2387E44C}"/>
+                <a16:creationId xmlns:a16="http://schemas.microsoft.com/office/drawing/2014/main" id="{5A2D89B4-B7FF-4536-A011-5798EC77F8AF}"/>
               </a:ext>
             </a:extLst>
           </p:cNvPr>
@@ -16820,7 +16820,7 @@
           <p:cNvPr id="43" name="">
             <a:extLst xmlns:a="http://schemas.openxmlformats.org/drawingml/2006/main">
               <a:ext uri="{FF2B5EF4-FFF2-40B4-BE49-F238E27FC236}">
-                <a16:creationId xmlns:a16="http://schemas.microsoft.com/office/drawing/2014/main" id="{197C370D-1E9B-47E1-B626-4478C3ACD7A5}"/>
+                <a16:creationId xmlns:a16="http://schemas.microsoft.com/office/drawing/2014/main" id="{7EC2FA93-E4FE-4EC7-BF54-83D56C97C80C}"/>
               </a:ext>
             </a:extLst>
           </p:cNvPr>
@@ -16870,7 +16870,7 @@
           <p:cNvPr id="44" name="">
             <a:extLst xmlns:a="http://schemas.openxmlformats.org/drawingml/2006/main">
               <a:ext uri="{FF2B5EF4-FFF2-40B4-BE49-F238E27FC236}">
-                <a16:creationId xmlns:a16="http://schemas.microsoft.com/office/drawing/2014/main" id="{EA9A3396-088B-4E2B-A29A-6390F546CE6F}"/>
+                <a16:creationId xmlns:a16="http://schemas.microsoft.com/office/drawing/2014/main" id="{7CC47B6E-82E2-49F3-866A-AE8108C95F41}"/>
               </a:ext>
             </a:extLst>
           </p:cNvPr>
@@ -16901,7 +16901,7 @@
           <p:cNvPr id="45" name="">
             <a:extLst xmlns:a="http://schemas.openxmlformats.org/drawingml/2006/main">
               <a:ext uri="{FF2B5EF4-FFF2-40B4-BE49-F238E27FC236}">
-                <a16:creationId xmlns:a16="http://schemas.microsoft.com/office/drawing/2014/main" id="{4112C30C-4F98-4228-9EB7-C928C16A105F}"/>
+                <a16:creationId xmlns:a16="http://schemas.microsoft.com/office/drawing/2014/main" id="{9A599B6C-CB86-4171-8C14-61FD1A397983}"/>
               </a:ext>
             </a:extLst>
           </p:cNvPr>
@@ -16951,7 +16951,7 @@
           <p:cNvPr id="46" name="">
             <a:extLst xmlns:a="http://schemas.openxmlformats.org/drawingml/2006/main">
               <a:ext uri="{FF2B5EF4-FFF2-40B4-BE49-F238E27FC236}">
-                <a16:creationId xmlns:a16="http://schemas.microsoft.com/office/drawing/2014/main" id="{CC7D10B4-5572-4779-ABFA-FA657D6A4F72}"/>
+                <a16:creationId xmlns:a16="http://schemas.microsoft.com/office/drawing/2014/main" id="{16C1FCEF-BA1C-47C6-98BE-A0E82815FD22}"/>
               </a:ext>
             </a:extLst>
           </p:cNvPr>
@@ -17001,7 +17001,7 @@
           <p:cNvPr id="47" name="">
             <a:extLst xmlns:a="http://schemas.openxmlformats.org/drawingml/2006/main">
               <a:ext uri="{FF2B5EF4-FFF2-40B4-BE49-F238E27FC236}">
-                <a16:creationId xmlns:a16="http://schemas.microsoft.com/office/drawing/2014/main" id="{E9AE8B60-1EA5-478F-AFF7-5F7D4030DC20}"/>
+                <a16:creationId xmlns:a16="http://schemas.microsoft.com/office/drawing/2014/main" id="{E491C160-FA6C-4C42-B85A-15B13CF1202A}"/>
               </a:ext>
             </a:extLst>
           </p:cNvPr>
@@ -17051,7 +17051,7 @@
           <p:cNvPr id="48" name="">
             <a:extLst xmlns:a="http://schemas.openxmlformats.org/drawingml/2006/main">
               <a:ext uri="{FF2B5EF4-FFF2-40B4-BE49-F238E27FC236}">
-                <a16:creationId xmlns:a16="http://schemas.microsoft.com/office/drawing/2014/main" id="{1A22B8B2-2FEB-4F1F-B840-58EF7B652439}"/>
+                <a16:creationId xmlns:a16="http://schemas.microsoft.com/office/drawing/2014/main" id="{06856F40-4816-4D77-92AA-8FB9DD5AC8FB}"/>
               </a:ext>
             </a:extLst>
           </p:cNvPr>
@@ -17082,7 +17082,7 @@
           <p:cNvPr id="49" name="">
             <a:extLst xmlns:a="http://schemas.openxmlformats.org/drawingml/2006/main">
               <a:ext uri="{FF2B5EF4-FFF2-40B4-BE49-F238E27FC236}">
-                <a16:creationId xmlns:a16="http://schemas.microsoft.com/office/drawing/2014/main" id="{4C0674FE-E5AB-4953-9F14-4B28BAC17214}"/>
+                <a16:creationId xmlns:a16="http://schemas.microsoft.com/office/drawing/2014/main" id="{637AB86B-00B6-4516-857F-5E36A8F8CD0D}"/>
               </a:ext>
             </a:extLst>
           </p:cNvPr>
@@ -17132,7 +17132,7 @@
           <p:cNvPr id="50" name="">
             <a:extLst xmlns:a="http://schemas.openxmlformats.org/drawingml/2006/main">
               <a:ext uri="{FF2B5EF4-FFF2-40B4-BE49-F238E27FC236}">
-                <a16:creationId xmlns:a16="http://schemas.microsoft.com/office/drawing/2014/main" id="{6A7B2BFD-7938-4FA8-9A91-776A79F8812A}"/>
+                <a16:creationId xmlns:a16="http://schemas.microsoft.com/office/drawing/2014/main" id="{F1EB2937-7218-4086-BA8E-9E4C7DF5CEDC}"/>
               </a:ext>
             </a:extLst>
           </p:cNvPr>
@@ -17182,7 +17182,7 @@
           <p:cNvPr id="51" name="">
             <a:extLst xmlns:a="http://schemas.openxmlformats.org/drawingml/2006/main">
               <a:ext uri="{FF2B5EF4-FFF2-40B4-BE49-F238E27FC236}">
-                <a16:creationId xmlns:a16="http://schemas.microsoft.com/office/drawing/2014/main" id="{E965FB51-EBE3-4AD7-BA47-601DB0337E55}"/>
+                <a16:creationId xmlns:a16="http://schemas.microsoft.com/office/drawing/2014/main" id="{32DAE256-3A2F-4BD6-B490-FDC91EB9C55D}"/>
               </a:ext>
             </a:extLst>
           </p:cNvPr>
@@ -17232,7 +17232,7 @@
           <p:cNvPr id="52" name="">
             <a:extLst xmlns:a="http://schemas.openxmlformats.org/drawingml/2006/main">
               <a:ext uri="{FF2B5EF4-FFF2-40B4-BE49-F238E27FC236}">
-                <a16:creationId xmlns:a16="http://schemas.microsoft.com/office/drawing/2014/main" id="{49F7120A-6B96-461A-8289-591A569DC174}"/>
+                <a16:creationId xmlns:a16="http://schemas.microsoft.com/office/drawing/2014/main" id="{D0626BB8-6BA2-4A02-9069-AA316D9CE94D}"/>
               </a:ext>
             </a:extLst>
           </p:cNvPr>
@@ -17263,7 +17263,7 @@
           <p:cNvPr id="53" name="">
             <a:extLst xmlns:a="http://schemas.openxmlformats.org/drawingml/2006/main">
               <a:ext uri="{FF2B5EF4-FFF2-40B4-BE49-F238E27FC236}">
-                <a16:creationId xmlns:a16="http://schemas.microsoft.com/office/drawing/2014/main" id="{5CDB6468-6B2E-4265-BFF4-0F4EA3642886}"/>
+                <a16:creationId xmlns:a16="http://schemas.microsoft.com/office/drawing/2014/main" id="{38238AE5-9524-46E8-B23B-003A2030FE2F}"/>
               </a:ext>
             </a:extLst>
           </p:cNvPr>
@@ -17313,7 +17313,7 @@
           <p:cNvPr id="54" name="">
             <a:extLst xmlns:a="http://schemas.openxmlformats.org/drawingml/2006/main">
               <a:ext uri="{FF2B5EF4-FFF2-40B4-BE49-F238E27FC236}">
-                <a16:creationId xmlns:a16="http://schemas.microsoft.com/office/drawing/2014/main" id="{D42C784C-4888-413A-86AC-2DCABD3FF2C4}"/>
+                <a16:creationId xmlns:a16="http://schemas.microsoft.com/office/drawing/2014/main" id="{05F11FEF-633C-4350-8E6E-727E70D6AE0F}"/>
               </a:ext>
             </a:extLst>
           </p:cNvPr>
@@ -17363,7 +17363,7 @@
           <p:cNvPr id="55" name="">
             <a:extLst xmlns:a="http://schemas.openxmlformats.org/drawingml/2006/main">
               <a:ext uri="{FF2B5EF4-FFF2-40B4-BE49-F238E27FC236}">
-                <a16:creationId xmlns:a16="http://schemas.microsoft.com/office/drawing/2014/main" id="{FF36D0C0-8383-46C3-A0E0-10054A7D8836}"/>
+                <a16:creationId xmlns:a16="http://schemas.microsoft.com/office/drawing/2014/main" id="{7EFF0145-D6F5-44BC-A2BC-7A8DC3E6E580}"/>
               </a:ext>
             </a:extLst>
           </p:cNvPr>
@@ -17413,7 +17413,7 @@
           <p:cNvPr id="56" name="">
             <a:extLst xmlns:a="http://schemas.openxmlformats.org/drawingml/2006/main">
               <a:ext uri="{FF2B5EF4-FFF2-40B4-BE49-F238E27FC236}">
-                <a16:creationId xmlns:a16="http://schemas.microsoft.com/office/drawing/2014/main" id="{D7B89B97-2CC9-4811-9B78-6876C387F3DA}"/>
+                <a16:creationId xmlns:a16="http://schemas.microsoft.com/office/drawing/2014/main" id="{5C07EE35-9C02-470F-870A-92D7C62F4B24}"/>
               </a:ext>
             </a:extLst>
           </p:cNvPr>
@@ -17444,7 +17444,7 @@
           <p:cNvPr id="57" name="">
             <a:extLst xmlns:a="http://schemas.openxmlformats.org/drawingml/2006/main">
               <a:ext uri="{FF2B5EF4-FFF2-40B4-BE49-F238E27FC236}">
-                <a16:creationId xmlns:a16="http://schemas.microsoft.com/office/drawing/2014/main" id="{F13F0B8D-2065-4153-B59F-924CA415FE52}"/>
+                <a16:creationId xmlns:a16="http://schemas.microsoft.com/office/drawing/2014/main" id="{6A243025-F392-49B2-9762-5483CB20B399}"/>
               </a:ext>
             </a:extLst>
           </p:cNvPr>
@@ -17494,7 +17494,7 @@
           <p:cNvPr id="58" name="">
             <a:extLst xmlns:a="http://schemas.openxmlformats.org/drawingml/2006/main">
               <a:ext uri="{FF2B5EF4-FFF2-40B4-BE49-F238E27FC236}">
-                <a16:creationId xmlns:a16="http://schemas.microsoft.com/office/drawing/2014/main" id="{907C7762-B685-44BC-8F3B-3FCF44A52B51}"/>
+                <a16:creationId xmlns:a16="http://schemas.microsoft.com/office/drawing/2014/main" id="{C0A99B3B-DB10-4787-8C40-460B2781A6B5}"/>
               </a:ext>
             </a:extLst>
           </p:cNvPr>
@@ -17544,7 +17544,7 @@
           <p:cNvPr id="59" name="">
             <a:extLst xmlns:a="http://schemas.openxmlformats.org/drawingml/2006/main">
               <a:ext uri="{FF2B5EF4-FFF2-40B4-BE49-F238E27FC236}">
-                <a16:creationId xmlns:a16="http://schemas.microsoft.com/office/drawing/2014/main" id="{5EA697A9-9180-426A-ABC8-8DD3A3066864}"/>
+                <a16:creationId xmlns:a16="http://schemas.microsoft.com/office/drawing/2014/main" id="{79D5D774-60EE-4161-85D8-3A41E266B2B0}"/>
               </a:ext>
             </a:extLst>
           </p:cNvPr>
@@ -17594,7 +17594,7 @@
           <p:cNvPr id="60" name="">
             <a:extLst xmlns:a="http://schemas.openxmlformats.org/drawingml/2006/main">
               <a:ext uri="{FF2B5EF4-FFF2-40B4-BE49-F238E27FC236}">
-                <a16:creationId xmlns:a16="http://schemas.microsoft.com/office/drawing/2014/main" id="{7F281FCE-A9FD-482D-9AA0-FCD3718D7038}"/>
+                <a16:creationId xmlns:a16="http://schemas.microsoft.com/office/drawing/2014/main" id="{BDF8388E-C838-4CCD-AC7B-89F6115D7834}"/>
               </a:ext>
             </a:extLst>
           </p:cNvPr>
@@ -17635,7 +17635,7 @@
           <p:cNvPr id="61" name="">
             <a:extLst xmlns:a="http://schemas.openxmlformats.org/drawingml/2006/main">
               <a:ext uri="{FF2B5EF4-FFF2-40B4-BE49-F238E27FC236}">
-                <a16:creationId xmlns:a16="http://schemas.microsoft.com/office/drawing/2014/main" id="{5AFCD6F8-8A9A-4BE2-AE83-9CC9D8B0E3FD}"/>
+                <a16:creationId xmlns:a16="http://schemas.microsoft.com/office/drawing/2014/main" id="{0D62F998-7C82-488F-9EFA-8A1CA097EC7C}"/>
               </a:ext>
             </a:extLst>
           </p:cNvPr>
@@ -17685,7 +17685,7 @@
           <p:cNvPr id="62" name="">
             <a:extLst xmlns:a="http://schemas.openxmlformats.org/drawingml/2006/main">
               <a:ext uri="{FF2B5EF4-FFF2-40B4-BE49-F238E27FC236}">
-                <a16:creationId xmlns:a16="http://schemas.microsoft.com/office/drawing/2014/main" id="{500B6BBE-861E-4520-90AB-066A8CDE5EB1}"/>
+                <a16:creationId xmlns:a16="http://schemas.microsoft.com/office/drawing/2014/main" id="{0EFC00EB-EA02-480E-859A-80FF03CD74AA}"/>
               </a:ext>
             </a:extLst>
           </p:cNvPr>
@@ -17742,7 +17742,7 @@
         </p:xfrm>
         <a:graphic xmlns:a="http://schemas.openxmlformats.org/drawingml/2006/main">
           <a:graphicData uri="http://schemas.openxmlformats.org/drawingml/2006/chart">
-            <c:chart xmlns:r="http://schemas.openxmlformats.org/officeDocument/2006/relationships" xmlns:c="http://schemas.openxmlformats.org/drawingml/2006/chart" r:id="Ref4fe60ade274b57"/>
+            <c:chart xmlns:r="http://schemas.openxmlformats.org/officeDocument/2006/relationships" xmlns:c="http://schemas.openxmlformats.org/drawingml/2006/chart" r:id="Refc8dc0994784679"/>
           </a:graphicData>
         </a:graphic>
       </p:graphicFrame>
@@ -17751,7 +17751,7 @@
           <p:cNvPr id="64" name="">
             <a:extLst xmlns:a="http://schemas.openxmlformats.org/drawingml/2006/main">
               <a:ext uri="{FF2B5EF4-FFF2-40B4-BE49-F238E27FC236}">
-                <a16:creationId xmlns:a16="http://schemas.microsoft.com/office/drawing/2014/main" id="{79861E22-60D9-4AA6-9FAD-3B94B1484032}"/>
+                <a16:creationId xmlns:a16="http://schemas.microsoft.com/office/drawing/2014/main" id="{2AAEDE0B-1A88-4DDC-899A-B6C0318ADB2A}"/>
               </a:ext>
             </a:extLst>
           </p:cNvPr>
@@ -17782,7 +17782,7 @@
           <p:cNvPr id="65" name="">
             <a:extLst xmlns:a="http://schemas.openxmlformats.org/drawingml/2006/main">
               <a:ext uri="{FF2B5EF4-FFF2-40B4-BE49-F238E27FC236}">
-                <a16:creationId xmlns:a16="http://schemas.microsoft.com/office/drawing/2014/main" id="{EF3DF6B8-8CAD-4B2C-B358-8A82B6E12058}"/>
+                <a16:creationId xmlns:a16="http://schemas.microsoft.com/office/drawing/2014/main" id="{3E06AEB9-BC22-456A-97F7-DA48CBCF721A}"/>
               </a:ext>
             </a:extLst>
           </p:cNvPr>
@@ -17832,7 +17832,7 @@
           <p:cNvPr id="66" name="">
             <a:extLst xmlns:a="http://schemas.openxmlformats.org/drawingml/2006/main">
               <a:ext uri="{FF2B5EF4-FFF2-40B4-BE49-F238E27FC236}">
-                <a16:creationId xmlns:a16="http://schemas.microsoft.com/office/drawing/2014/main" id="{924ACE9B-1370-4915-8B4B-6DDBE08B70E7}"/>
+                <a16:creationId xmlns:a16="http://schemas.microsoft.com/office/drawing/2014/main" id="{D3C3A2F1-C5E0-422A-9791-0B684B04B95D}"/>
               </a:ext>
             </a:extLst>
           </p:cNvPr>
@@ -17882,7 +17882,7 @@
           <p:cNvPr id="67" name="">
             <a:extLst xmlns:a="http://schemas.openxmlformats.org/drawingml/2006/main">
               <a:ext uri="{FF2B5EF4-FFF2-40B4-BE49-F238E27FC236}">
-                <a16:creationId xmlns:a16="http://schemas.microsoft.com/office/drawing/2014/main" id="{2BA22D93-4266-479B-BCA3-A5D9291F6CBE}"/>
+                <a16:creationId xmlns:a16="http://schemas.microsoft.com/office/drawing/2014/main" id="{9768E62B-7F9D-48B7-947D-2C47A404FC5F}"/>
               </a:ext>
             </a:extLst>
           </p:cNvPr>
@@ -17932,7 +17932,7 @@
           <p:cNvPr id="68" name="">
             <a:extLst xmlns:a="http://schemas.openxmlformats.org/drawingml/2006/main">
               <a:ext uri="{FF2B5EF4-FFF2-40B4-BE49-F238E27FC236}">
-                <a16:creationId xmlns:a16="http://schemas.microsoft.com/office/drawing/2014/main" id="{7435EAF3-5FB6-4139-B046-DB1BC0EB3CF3}"/>
+                <a16:creationId xmlns:a16="http://schemas.microsoft.com/office/drawing/2014/main" id="{BC25D6A1-BDA7-4CC6-AB2E-B221AC0F0245}"/>
               </a:ext>
             </a:extLst>
           </p:cNvPr>
@@ -17963,7 +17963,7 @@
           <p:cNvPr id="69" name="">
             <a:extLst xmlns:a="http://schemas.openxmlformats.org/drawingml/2006/main">
               <a:ext uri="{FF2B5EF4-FFF2-40B4-BE49-F238E27FC236}">
-                <a16:creationId xmlns:a16="http://schemas.microsoft.com/office/drawing/2014/main" id="{E16FF426-62F3-4DA3-86B2-1F2260239EB2}"/>
+                <a16:creationId xmlns:a16="http://schemas.microsoft.com/office/drawing/2014/main" id="{81C17AD0-A3E0-4C8C-AAB5-B2735576761D}"/>
               </a:ext>
             </a:extLst>
           </p:cNvPr>
@@ -18013,7 +18013,7 @@
           <p:cNvPr id="70" name="">
             <a:extLst xmlns:a="http://schemas.openxmlformats.org/drawingml/2006/main">
               <a:ext uri="{FF2B5EF4-FFF2-40B4-BE49-F238E27FC236}">
-                <a16:creationId xmlns:a16="http://schemas.microsoft.com/office/drawing/2014/main" id="{A2FBE401-3F24-4AB1-9AE8-32EF44C9F246}"/>
+                <a16:creationId xmlns:a16="http://schemas.microsoft.com/office/drawing/2014/main" id="{E7714D2B-27BF-41FE-BC08-D7F4A8544C2F}"/>
               </a:ext>
             </a:extLst>
           </p:cNvPr>
@@ -18063,7 +18063,7 @@
           <p:cNvPr id="71" name="">
             <a:extLst xmlns:a="http://schemas.openxmlformats.org/drawingml/2006/main">
               <a:ext uri="{FF2B5EF4-FFF2-40B4-BE49-F238E27FC236}">
-                <a16:creationId xmlns:a16="http://schemas.microsoft.com/office/drawing/2014/main" id="{9C3B0847-E6C3-44D6-B290-EF9E7F50F1B0}"/>
+                <a16:creationId xmlns:a16="http://schemas.microsoft.com/office/drawing/2014/main" id="{27A8A2FF-08EE-45AE-8EFB-3FEA794FBDEF}"/>
               </a:ext>
             </a:extLst>
           </p:cNvPr>
@@ -18113,7 +18113,7 @@
           <p:cNvPr id="72" name="">
             <a:extLst xmlns:a="http://schemas.openxmlformats.org/drawingml/2006/main">
               <a:ext uri="{FF2B5EF4-FFF2-40B4-BE49-F238E27FC236}">
-                <a16:creationId xmlns:a16="http://schemas.microsoft.com/office/drawing/2014/main" id="{FF142834-0432-414A-92F0-4A9321C2A8C9}"/>
+                <a16:creationId xmlns:a16="http://schemas.microsoft.com/office/drawing/2014/main" id="{E3C89317-6ED7-4C96-9696-AAE4AE80C5CE}"/>
               </a:ext>
             </a:extLst>
           </p:cNvPr>
@@ -18144,7 +18144,7 @@
           <p:cNvPr id="73" name="">
             <a:extLst xmlns:a="http://schemas.openxmlformats.org/drawingml/2006/main">
               <a:ext uri="{FF2B5EF4-FFF2-40B4-BE49-F238E27FC236}">
-                <a16:creationId xmlns:a16="http://schemas.microsoft.com/office/drawing/2014/main" id="{F368D700-70C3-4EAB-A481-971CD64C9278}"/>
+                <a16:creationId xmlns:a16="http://schemas.microsoft.com/office/drawing/2014/main" id="{69EBA36F-7A2E-4A14-8AD9-7358896E2AE3}"/>
               </a:ext>
             </a:extLst>
           </p:cNvPr>
@@ -18194,7 +18194,7 @@
           <p:cNvPr id="74" name="">
             <a:extLst xmlns:a="http://schemas.openxmlformats.org/drawingml/2006/main">
               <a:ext uri="{FF2B5EF4-FFF2-40B4-BE49-F238E27FC236}">
-                <a16:creationId xmlns:a16="http://schemas.microsoft.com/office/drawing/2014/main" id="{1923CEEF-06E1-48D4-AA9E-EB68F868DC26}"/>
+                <a16:creationId xmlns:a16="http://schemas.microsoft.com/office/drawing/2014/main" id="{2E726C3B-4418-4FDB-A182-14F3E91B54FA}"/>
               </a:ext>
             </a:extLst>
           </p:cNvPr>
@@ -18244,7 +18244,7 @@
           <p:cNvPr id="75" name="">
             <a:extLst xmlns:a="http://schemas.openxmlformats.org/drawingml/2006/main">
               <a:ext uri="{FF2B5EF4-FFF2-40B4-BE49-F238E27FC236}">
-                <a16:creationId xmlns:a16="http://schemas.microsoft.com/office/drawing/2014/main" id="{32533C24-B946-4EF6-9CE5-3CE33656015E}"/>
+                <a16:creationId xmlns:a16="http://schemas.microsoft.com/office/drawing/2014/main" id="{B56DA4DA-AE53-4C96-9A43-70A1AA285A10}"/>
               </a:ext>
             </a:extLst>
           </p:cNvPr>
@@ -18294,7 +18294,7 @@
           <p:cNvPr id="76" name="">
             <a:extLst xmlns:a="http://schemas.openxmlformats.org/drawingml/2006/main">
               <a:ext uri="{FF2B5EF4-FFF2-40B4-BE49-F238E27FC236}">
-                <a16:creationId xmlns:a16="http://schemas.microsoft.com/office/drawing/2014/main" id="{E6DD071D-764D-4496-809F-1749E62C56C3}"/>
+                <a16:creationId xmlns:a16="http://schemas.microsoft.com/office/drawing/2014/main" id="{BF833D6E-8385-4C80-924B-E875FB2E02FC}"/>
               </a:ext>
             </a:extLst>
           </p:cNvPr>
@@ -18325,7 +18325,7 @@
           <p:cNvPr id="77" name="">
             <a:extLst xmlns:a="http://schemas.openxmlformats.org/drawingml/2006/main">
               <a:ext uri="{FF2B5EF4-FFF2-40B4-BE49-F238E27FC236}">
-                <a16:creationId xmlns:a16="http://schemas.microsoft.com/office/drawing/2014/main" id="{0C4C9E2B-688D-4CB9-867D-0D87266FFDDD}"/>
+                <a16:creationId xmlns:a16="http://schemas.microsoft.com/office/drawing/2014/main" id="{882CC75E-79F2-48F5-BEA2-3B78B328683E}"/>
               </a:ext>
             </a:extLst>
           </p:cNvPr>
@@ -18375,7 +18375,7 @@
           <p:cNvPr id="78" name="">
             <a:extLst xmlns:a="http://schemas.openxmlformats.org/drawingml/2006/main">
               <a:ext uri="{FF2B5EF4-FFF2-40B4-BE49-F238E27FC236}">
-                <a16:creationId xmlns:a16="http://schemas.microsoft.com/office/drawing/2014/main" id="{ECE81E0F-55C8-4CFB-8D0D-7D08851863F7}"/>
+                <a16:creationId xmlns:a16="http://schemas.microsoft.com/office/drawing/2014/main" id="{09647ECD-F025-4B2D-865B-0C354D149291}"/>
               </a:ext>
             </a:extLst>
           </p:cNvPr>
@@ -18425,7 +18425,7 @@
           <p:cNvPr id="79" name="">
             <a:extLst xmlns:a="http://schemas.openxmlformats.org/drawingml/2006/main">
               <a:ext uri="{FF2B5EF4-FFF2-40B4-BE49-F238E27FC236}">
-                <a16:creationId xmlns:a16="http://schemas.microsoft.com/office/drawing/2014/main" id="{D505DF7B-75A5-4463-B3AD-96F3ACCE2A2E}"/>
+                <a16:creationId xmlns:a16="http://schemas.microsoft.com/office/drawing/2014/main" id="{81A1DA08-566A-4065-8BFA-9DAA857EA97A}"/>
               </a:ext>
             </a:extLst>
           </p:cNvPr>
@@ -18475,7 +18475,7 @@
           <p:cNvPr id="80" name="">
             <a:extLst xmlns:a="http://schemas.openxmlformats.org/drawingml/2006/main">
               <a:ext uri="{FF2B5EF4-FFF2-40B4-BE49-F238E27FC236}">
-                <a16:creationId xmlns:a16="http://schemas.microsoft.com/office/drawing/2014/main" id="{6A7F7207-3846-41D1-B164-7F828012A9EC}"/>
+                <a16:creationId xmlns:a16="http://schemas.microsoft.com/office/drawing/2014/main" id="{1699F8B9-6F54-4F70-83C6-A4E2BB7F215F}"/>
               </a:ext>
             </a:extLst>
           </p:cNvPr>
@@ -18506,7 +18506,7 @@
           <p:cNvPr id="81" name="">
             <a:extLst xmlns:a="http://schemas.openxmlformats.org/drawingml/2006/main">
               <a:ext uri="{FF2B5EF4-FFF2-40B4-BE49-F238E27FC236}">
-                <a16:creationId xmlns:a16="http://schemas.microsoft.com/office/drawing/2014/main" id="{85584A94-1B33-4412-828C-A0A129370696}"/>
+                <a16:creationId xmlns:a16="http://schemas.microsoft.com/office/drawing/2014/main" id="{05ACCADB-D476-4C47-A4FE-E2104A852619}"/>
               </a:ext>
             </a:extLst>
           </p:cNvPr>
@@ -18556,7 +18556,7 @@
           <p:cNvPr id="82" name="">
             <a:extLst xmlns:a="http://schemas.openxmlformats.org/drawingml/2006/main">
               <a:ext uri="{FF2B5EF4-FFF2-40B4-BE49-F238E27FC236}">
-                <a16:creationId xmlns:a16="http://schemas.microsoft.com/office/drawing/2014/main" id="{80824B1B-767A-4B18-B8D4-95A9F121C944}"/>
+                <a16:creationId xmlns:a16="http://schemas.microsoft.com/office/drawing/2014/main" id="{3D01964E-5D7E-438C-ADE0-FA4824644F6C}"/>
               </a:ext>
             </a:extLst>
           </p:cNvPr>
@@ -18606,7 +18606,7 @@
           <p:cNvPr id="83" name="">
             <a:extLst xmlns:a="http://schemas.openxmlformats.org/drawingml/2006/main">
               <a:ext uri="{FF2B5EF4-FFF2-40B4-BE49-F238E27FC236}">
-                <a16:creationId xmlns:a16="http://schemas.microsoft.com/office/drawing/2014/main" id="{28DCFC22-CFFD-4455-8ED6-D61315F5F4C0}"/>
+                <a16:creationId xmlns:a16="http://schemas.microsoft.com/office/drawing/2014/main" id="{1DC156BA-2505-41D6-A603-7C2DFCD710ED}"/>
               </a:ext>
             </a:extLst>
           </p:cNvPr>
@@ -18656,7 +18656,7 @@
           <p:cNvPr id="84" name="">
             <a:extLst xmlns:a="http://schemas.openxmlformats.org/drawingml/2006/main">
               <a:ext uri="{FF2B5EF4-FFF2-40B4-BE49-F238E27FC236}">
-                <a16:creationId xmlns:a16="http://schemas.microsoft.com/office/drawing/2014/main" id="{A015FE53-3FD3-4219-AB8D-D6EE521D7784}"/>
+                <a16:creationId xmlns:a16="http://schemas.microsoft.com/office/drawing/2014/main" id="{5F7D4F66-B5DC-42AC-9926-1AC50A368DD1}"/>
               </a:ext>
             </a:extLst>
           </p:cNvPr>
@@ -18687,7 +18687,7 @@
           <p:cNvPr id="85" name="">
             <a:extLst xmlns:a="http://schemas.openxmlformats.org/drawingml/2006/main">
               <a:ext uri="{FF2B5EF4-FFF2-40B4-BE49-F238E27FC236}">
-                <a16:creationId xmlns:a16="http://schemas.microsoft.com/office/drawing/2014/main" id="{592178BE-D3CD-40A5-8D9F-34B93EBD173F}"/>
+                <a16:creationId xmlns:a16="http://schemas.microsoft.com/office/drawing/2014/main" id="{EB6DEC23-2ACB-4FE6-83A1-67C2FA3BEB7C}"/>
               </a:ext>
             </a:extLst>
           </p:cNvPr>
@@ -18737,7 +18737,7 @@
           <p:cNvPr id="86" name="">
             <a:extLst xmlns:a="http://schemas.openxmlformats.org/drawingml/2006/main">
               <a:ext uri="{FF2B5EF4-FFF2-40B4-BE49-F238E27FC236}">
-                <a16:creationId xmlns:a16="http://schemas.microsoft.com/office/drawing/2014/main" id="{A87909AF-4AD0-49C5-8842-4BBFD10669C1}"/>
+                <a16:creationId xmlns:a16="http://schemas.microsoft.com/office/drawing/2014/main" id="{7ADF7F41-D210-4C9F-834E-9849C48DE950}"/>
               </a:ext>
             </a:extLst>
           </p:cNvPr>
@@ -18787,7 +18787,7 @@
           <p:cNvPr id="87" name="">
             <a:extLst xmlns:a="http://schemas.openxmlformats.org/drawingml/2006/main">
               <a:ext uri="{FF2B5EF4-FFF2-40B4-BE49-F238E27FC236}">
-                <a16:creationId xmlns:a16="http://schemas.microsoft.com/office/drawing/2014/main" id="{598BB66B-4F5A-4339-AC13-1BC3F2224724}"/>
+                <a16:creationId xmlns:a16="http://schemas.microsoft.com/office/drawing/2014/main" id="{30624887-D3AD-4486-9BDA-A6CCDA0B3B2C}"/>
               </a:ext>
             </a:extLst>
           </p:cNvPr>
@@ -18837,7 +18837,7 @@
           <p:cNvPr id="88" name="">
             <a:extLst xmlns:a="http://schemas.openxmlformats.org/drawingml/2006/main">
               <a:ext uri="{FF2B5EF4-FFF2-40B4-BE49-F238E27FC236}">
-                <a16:creationId xmlns:a16="http://schemas.microsoft.com/office/drawing/2014/main" id="{66E748B2-FC0F-4603-A50E-0786E6374500}"/>
+                <a16:creationId xmlns:a16="http://schemas.microsoft.com/office/drawing/2014/main" id="{C144D2AD-0379-4958-BABD-2D73E4D6071C}"/>
               </a:ext>
             </a:extLst>
           </p:cNvPr>
@@ -18878,7 +18878,7 @@
           <p:cNvPr id="89" name="">
             <a:extLst xmlns:a="http://schemas.openxmlformats.org/drawingml/2006/main">
               <a:ext uri="{FF2B5EF4-FFF2-40B4-BE49-F238E27FC236}">
-                <a16:creationId xmlns:a16="http://schemas.microsoft.com/office/drawing/2014/main" id="{70CAE097-FDFE-4955-AA45-BB5EE6ED3922}"/>
+                <a16:creationId xmlns:a16="http://schemas.microsoft.com/office/drawing/2014/main" id="{DE1413A8-00BE-4F7A-B826-209FA9F40D65}"/>
               </a:ext>
             </a:extLst>
           </p:cNvPr>
@@ -18928,7 +18928,7 @@
           <p:cNvPr id="90" name="">
             <a:extLst xmlns:a="http://schemas.openxmlformats.org/drawingml/2006/main">
               <a:ext uri="{FF2B5EF4-FFF2-40B4-BE49-F238E27FC236}">
-                <a16:creationId xmlns:a16="http://schemas.microsoft.com/office/drawing/2014/main" id="{84FA15E1-5238-4F9E-A087-F3409A5734EC}"/>
+                <a16:creationId xmlns:a16="http://schemas.microsoft.com/office/drawing/2014/main" id="{F398D755-7448-48D8-BDE6-37040D93992A}"/>
               </a:ext>
             </a:extLst>
           </p:cNvPr>
@@ -18985,7 +18985,7 @@
         </p:xfrm>
         <a:graphic xmlns:a="http://schemas.openxmlformats.org/drawingml/2006/main">
           <a:graphicData uri="http://schemas.openxmlformats.org/drawingml/2006/chart">
-            <c:chart xmlns:r="http://schemas.openxmlformats.org/officeDocument/2006/relationships" xmlns:c="http://schemas.openxmlformats.org/drawingml/2006/chart" r:id="R5cae6b109ce84bff"/>
+            <c:chart xmlns:r="http://schemas.openxmlformats.org/officeDocument/2006/relationships" xmlns:c="http://schemas.openxmlformats.org/drawingml/2006/chart" r:id="R7fd24921ca0c445b"/>
           </a:graphicData>
         </a:graphic>
       </p:graphicFrame>
@@ -18994,7 +18994,7 @@
           <p:cNvPr id="92" name="">
             <a:extLst xmlns:a="http://schemas.openxmlformats.org/drawingml/2006/main">
               <a:ext uri="{FF2B5EF4-FFF2-40B4-BE49-F238E27FC236}">
-                <a16:creationId xmlns:a16="http://schemas.microsoft.com/office/drawing/2014/main" id="{C6D4AE94-D34A-47DB-9779-C47FE92BB25E}"/>
+                <a16:creationId xmlns:a16="http://schemas.microsoft.com/office/drawing/2014/main" id="{BDA01EB9-DD41-4214-9267-64E9F5F5614B}"/>
               </a:ext>
             </a:extLst>
           </p:cNvPr>
@@ -19025,7 +19025,7 @@
           <p:cNvPr id="93" name="">
             <a:extLst xmlns:a="http://schemas.openxmlformats.org/drawingml/2006/main">
               <a:ext uri="{FF2B5EF4-FFF2-40B4-BE49-F238E27FC236}">
-                <a16:creationId xmlns:a16="http://schemas.microsoft.com/office/drawing/2014/main" id="{DD5AE6E3-B138-4CEE-A47A-D32B1E3C1B66}"/>
+                <a16:creationId xmlns:a16="http://schemas.microsoft.com/office/drawing/2014/main" id="{72D31714-2FE3-4FBD-ACF8-7A23F0CE86AB}"/>
               </a:ext>
             </a:extLst>
           </p:cNvPr>
@@ -19075,7 +19075,7 @@
           <p:cNvPr id="94" name="">
             <a:extLst xmlns:a="http://schemas.openxmlformats.org/drawingml/2006/main">
               <a:ext uri="{FF2B5EF4-FFF2-40B4-BE49-F238E27FC236}">
-                <a16:creationId xmlns:a16="http://schemas.microsoft.com/office/drawing/2014/main" id="{363D7694-4A03-4B3F-ABFD-0DF5FB90E6AF}"/>
+                <a16:creationId xmlns:a16="http://schemas.microsoft.com/office/drawing/2014/main" id="{2ABB00F2-7D67-4554-9932-B364EE95C9C9}"/>
               </a:ext>
             </a:extLst>
           </p:cNvPr>
@@ -19125,7 +19125,7 @@
           <p:cNvPr id="95" name="">
             <a:extLst xmlns:a="http://schemas.openxmlformats.org/drawingml/2006/main">
               <a:ext uri="{FF2B5EF4-FFF2-40B4-BE49-F238E27FC236}">
-                <a16:creationId xmlns:a16="http://schemas.microsoft.com/office/drawing/2014/main" id="{A160C0BC-6B5F-4F6B-8170-3D69FA51D89F}"/>
+                <a16:creationId xmlns:a16="http://schemas.microsoft.com/office/drawing/2014/main" id="{D55537FF-B787-4BA7-B49C-6647F8B88AF4}"/>
               </a:ext>
             </a:extLst>
           </p:cNvPr>
@@ -19175,7 +19175,7 @@
           <p:cNvPr id="96" name="">
             <a:extLst xmlns:a="http://schemas.openxmlformats.org/drawingml/2006/main">
               <a:ext uri="{FF2B5EF4-FFF2-40B4-BE49-F238E27FC236}">
-                <a16:creationId xmlns:a16="http://schemas.microsoft.com/office/drawing/2014/main" id="{BC1EAD97-73D3-4B7F-8235-02AC121D946E}"/>
+                <a16:creationId xmlns:a16="http://schemas.microsoft.com/office/drawing/2014/main" id="{D343E40A-E360-4317-934D-6BB245FDB3A6}"/>
               </a:ext>
             </a:extLst>
           </p:cNvPr>
@@ -19206,7 +19206,7 @@
           <p:cNvPr id="97" name="">
             <a:extLst xmlns:a="http://schemas.openxmlformats.org/drawingml/2006/main">
               <a:ext uri="{FF2B5EF4-FFF2-40B4-BE49-F238E27FC236}">
-                <a16:creationId xmlns:a16="http://schemas.microsoft.com/office/drawing/2014/main" id="{8A489E94-5467-4078-80A0-240013E60195}"/>
+                <a16:creationId xmlns:a16="http://schemas.microsoft.com/office/drawing/2014/main" id="{8EA98D10-0483-4C3B-A4EA-FEBFC807F97D}"/>
               </a:ext>
             </a:extLst>
           </p:cNvPr>
@@ -19256,7 +19256,7 @@
           <p:cNvPr id="98" name="">
             <a:extLst xmlns:a="http://schemas.openxmlformats.org/drawingml/2006/main">
               <a:ext uri="{FF2B5EF4-FFF2-40B4-BE49-F238E27FC236}">
-                <a16:creationId xmlns:a16="http://schemas.microsoft.com/office/drawing/2014/main" id="{93683ECA-6489-4B3A-A8BA-1A6245E8346A}"/>
+                <a16:creationId xmlns:a16="http://schemas.microsoft.com/office/drawing/2014/main" id="{23710713-70AD-467A-A392-CE8A2F404C5E}"/>
               </a:ext>
             </a:extLst>
           </p:cNvPr>
@@ -19306,7 +19306,7 @@
           <p:cNvPr id="99" name="">
             <a:extLst xmlns:a="http://schemas.openxmlformats.org/drawingml/2006/main">
               <a:ext uri="{FF2B5EF4-FFF2-40B4-BE49-F238E27FC236}">
-                <a16:creationId xmlns:a16="http://schemas.microsoft.com/office/drawing/2014/main" id="{4F63F196-66CF-4DDF-BD3F-BBBF0820617F}"/>
+                <a16:creationId xmlns:a16="http://schemas.microsoft.com/office/drawing/2014/main" id="{74E899A2-1919-4FAD-9804-FF012637C389}"/>
               </a:ext>
             </a:extLst>
           </p:cNvPr>
@@ -19356,7 +19356,7 @@
           <p:cNvPr id="100" name="">
             <a:extLst xmlns:a="http://schemas.openxmlformats.org/drawingml/2006/main">
               <a:ext uri="{FF2B5EF4-FFF2-40B4-BE49-F238E27FC236}">
-                <a16:creationId xmlns:a16="http://schemas.microsoft.com/office/drawing/2014/main" id="{6DE988EC-B813-49EB-946F-0C205C1C9CE3}"/>
+                <a16:creationId xmlns:a16="http://schemas.microsoft.com/office/drawing/2014/main" id="{C9391922-755B-4316-889F-B66C45E04AA8}"/>
               </a:ext>
             </a:extLst>
           </p:cNvPr>
@@ -19387,7 +19387,7 @@
           <p:cNvPr id="101" name="">
             <a:extLst xmlns:a="http://schemas.openxmlformats.org/drawingml/2006/main">
               <a:ext uri="{FF2B5EF4-FFF2-40B4-BE49-F238E27FC236}">
-                <a16:creationId xmlns:a16="http://schemas.microsoft.com/office/drawing/2014/main" id="{65F412F5-F891-4B88-AACC-032992B9BC2F}"/>
+                <a16:creationId xmlns:a16="http://schemas.microsoft.com/office/drawing/2014/main" id="{F59AF60B-15C2-4E9A-8158-4DB6F19B58DA}"/>
               </a:ext>
             </a:extLst>
           </p:cNvPr>
@@ -19437,7 +19437,7 @@
           <p:cNvPr id="102" name="">
             <a:extLst xmlns:a="http://schemas.openxmlformats.org/drawingml/2006/main">
               <a:ext uri="{FF2B5EF4-FFF2-40B4-BE49-F238E27FC236}">
-                <a16:creationId xmlns:a16="http://schemas.microsoft.com/office/drawing/2014/main" id="{F28B8A23-202B-49BE-865F-0D863D2C731D}"/>
+                <a16:creationId xmlns:a16="http://schemas.microsoft.com/office/drawing/2014/main" id="{667841F9-0C09-4583-99C0-0E7DD07676A1}"/>
               </a:ext>
             </a:extLst>
           </p:cNvPr>
@@ -19487,7 +19487,7 @@
           <p:cNvPr id="103" name="">
             <a:extLst xmlns:a="http://schemas.openxmlformats.org/drawingml/2006/main">
               <a:ext uri="{FF2B5EF4-FFF2-40B4-BE49-F238E27FC236}">
-                <a16:creationId xmlns:a16="http://schemas.microsoft.com/office/drawing/2014/main" id="{701ECAE5-5579-49CA-8709-2AE2D49A39DA}"/>
+                <a16:creationId xmlns:a16="http://schemas.microsoft.com/office/drawing/2014/main" id="{55B6B641-1C97-4BC8-8B89-D4C1C5A5C94C}"/>
               </a:ext>
             </a:extLst>
           </p:cNvPr>
@@ -19537,7 +19537,7 @@
           <p:cNvPr id="104" name="">
             <a:extLst xmlns:a="http://schemas.openxmlformats.org/drawingml/2006/main">
               <a:ext uri="{FF2B5EF4-FFF2-40B4-BE49-F238E27FC236}">
-                <a16:creationId xmlns:a16="http://schemas.microsoft.com/office/drawing/2014/main" id="{8594D9DF-4404-4917-921F-FDE566A55C3D}"/>
+                <a16:creationId xmlns:a16="http://schemas.microsoft.com/office/drawing/2014/main" id="{C95BF50A-31D5-4B0A-8729-1B791007F80D}"/>
               </a:ext>
             </a:extLst>
           </p:cNvPr>
@@ -19568,7 +19568,7 @@
           <p:cNvPr id="105" name="">
             <a:extLst xmlns:a="http://schemas.openxmlformats.org/drawingml/2006/main">
               <a:ext uri="{FF2B5EF4-FFF2-40B4-BE49-F238E27FC236}">
-                <a16:creationId xmlns:a16="http://schemas.microsoft.com/office/drawing/2014/main" id="{E9723A77-83ED-43BC-AEA0-D6A4F5B18C97}"/>
+                <a16:creationId xmlns:a16="http://schemas.microsoft.com/office/drawing/2014/main" id="{7D279AC7-22F6-4842-A82E-031570ED7594}"/>
               </a:ext>
             </a:extLst>
           </p:cNvPr>
@@ -19618,7 +19618,7 @@
           <p:cNvPr id="106" name="">
             <a:extLst xmlns:a="http://schemas.openxmlformats.org/drawingml/2006/main">
               <a:ext uri="{FF2B5EF4-FFF2-40B4-BE49-F238E27FC236}">
-                <a16:creationId xmlns:a16="http://schemas.microsoft.com/office/drawing/2014/main" id="{AB812334-379B-499A-BDED-7C7DE828E19C}"/>
+                <a16:creationId xmlns:a16="http://schemas.microsoft.com/office/drawing/2014/main" id="{42C97295-724F-4BE1-B936-D7704D21508A}"/>
               </a:ext>
             </a:extLst>
           </p:cNvPr>
@@ -19668,7 +19668,7 @@
           <p:cNvPr id="107" name="">
             <a:extLst xmlns:a="http://schemas.openxmlformats.org/drawingml/2006/main">
               <a:ext uri="{FF2B5EF4-FFF2-40B4-BE49-F238E27FC236}">
-                <a16:creationId xmlns:a16="http://schemas.microsoft.com/office/drawing/2014/main" id="{4D201CFD-1FB8-48D1-B2E3-C6FB28C861B8}"/>
+                <a16:creationId xmlns:a16="http://schemas.microsoft.com/office/drawing/2014/main" id="{8A03A339-0733-4A3A-B09E-A11D85E62276}"/>
               </a:ext>
             </a:extLst>
           </p:cNvPr>
@@ -19718,7 +19718,7 @@
           <p:cNvPr id="108" name="">
             <a:extLst xmlns:a="http://schemas.openxmlformats.org/drawingml/2006/main">
               <a:ext uri="{FF2B5EF4-FFF2-40B4-BE49-F238E27FC236}">
-                <a16:creationId xmlns:a16="http://schemas.microsoft.com/office/drawing/2014/main" id="{FFC61DFA-DF22-48AD-AA07-205685688F90}"/>
+                <a16:creationId xmlns:a16="http://schemas.microsoft.com/office/drawing/2014/main" id="{4A2CB9CD-BFC2-49C5-B07F-3C8A6EF6C0FF}"/>
               </a:ext>
             </a:extLst>
           </p:cNvPr>
@@ -19749,7 +19749,7 @@
           <p:cNvPr id="109" name="">
             <a:extLst xmlns:a="http://schemas.openxmlformats.org/drawingml/2006/main">
               <a:ext uri="{FF2B5EF4-FFF2-40B4-BE49-F238E27FC236}">
-                <a16:creationId xmlns:a16="http://schemas.microsoft.com/office/drawing/2014/main" id="{42F43977-F85D-42D7-A146-9B1BBC4A5105}"/>
+                <a16:creationId xmlns:a16="http://schemas.microsoft.com/office/drawing/2014/main" id="{94835006-EA1B-4EAB-B991-F9630CC9233B}"/>
               </a:ext>
             </a:extLst>
           </p:cNvPr>
@@ -19799,7 +19799,7 @@
           <p:cNvPr id="110" name="">
             <a:extLst xmlns:a="http://schemas.openxmlformats.org/drawingml/2006/main">
               <a:ext uri="{FF2B5EF4-FFF2-40B4-BE49-F238E27FC236}">
-                <a16:creationId xmlns:a16="http://schemas.microsoft.com/office/drawing/2014/main" id="{E7637CCC-CD29-484F-90BD-63E350CB81AB}"/>
+                <a16:creationId xmlns:a16="http://schemas.microsoft.com/office/drawing/2014/main" id="{C5BF135A-3D81-4765-91E0-899D90B56E29}"/>
               </a:ext>
             </a:extLst>
           </p:cNvPr>
@@ -19849,7 +19849,7 @@
           <p:cNvPr id="111" name="">
             <a:extLst xmlns:a="http://schemas.openxmlformats.org/drawingml/2006/main">
               <a:ext uri="{FF2B5EF4-FFF2-40B4-BE49-F238E27FC236}">
-                <a16:creationId xmlns:a16="http://schemas.microsoft.com/office/drawing/2014/main" id="{FA2F5656-3345-4C94-9F23-4608320BEE11}"/>
+                <a16:creationId xmlns:a16="http://schemas.microsoft.com/office/drawing/2014/main" id="{467C192C-6F60-44CF-99F7-88F080F918F9}"/>
               </a:ext>
             </a:extLst>
           </p:cNvPr>
@@ -19899,7 +19899,7 @@
           <p:cNvPr id="112" name="">
             <a:extLst xmlns:a="http://schemas.openxmlformats.org/drawingml/2006/main">
               <a:ext uri="{FF2B5EF4-FFF2-40B4-BE49-F238E27FC236}">
-                <a16:creationId xmlns:a16="http://schemas.microsoft.com/office/drawing/2014/main" id="{12F630CD-BFA9-4EFF-99B6-9E25D9CE0B6C}"/>
+                <a16:creationId xmlns:a16="http://schemas.microsoft.com/office/drawing/2014/main" id="{0928D23E-E746-4C37-9B21-38981012DF0D}"/>
               </a:ext>
             </a:extLst>
           </p:cNvPr>
@@ -19930,7 +19930,7 @@
           <p:cNvPr id="113" name="">
             <a:extLst xmlns:a="http://schemas.openxmlformats.org/drawingml/2006/main">
               <a:ext uri="{FF2B5EF4-FFF2-40B4-BE49-F238E27FC236}">
-                <a16:creationId xmlns:a16="http://schemas.microsoft.com/office/drawing/2014/main" id="{352D3666-BBD7-4258-B050-F5639F438F2D}"/>
+                <a16:creationId xmlns:a16="http://schemas.microsoft.com/office/drawing/2014/main" id="{7A0B32F7-487F-4CF6-9CC6-AD30B598C714}"/>
               </a:ext>
             </a:extLst>
           </p:cNvPr>
@@ -19980,7 +19980,7 @@
           <p:cNvPr id="114" name="">
             <a:extLst xmlns:a="http://schemas.openxmlformats.org/drawingml/2006/main">
               <a:ext uri="{FF2B5EF4-FFF2-40B4-BE49-F238E27FC236}">
-                <a16:creationId xmlns:a16="http://schemas.microsoft.com/office/drawing/2014/main" id="{542A6D69-646A-4D92-90F4-E3C0691B4A57}"/>
+                <a16:creationId xmlns:a16="http://schemas.microsoft.com/office/drawing/2014/main" id="{FE534FF8-40FD-415D-9273-4D7AFFC89DAB}"/>
               </a:ext>
             </a:extLst>
           </p:cNvPr>
@@ -20030,7 +20030,7 @@
           <p:cNvPr id="115" name="">
             <a:extLst xmlns:a="http://schemas.openxmlformats.org/drawingml/2006/main">
               <a:ext uri="{FF2B5EF4-FFF2-40B4-BE49-F238E27FC236}">
-                <a16:creationId xmlns:a16="http://schemas.microsoft.com/office/drawing/2014/main" id="{A4EB09EB-8496-4271-888F-4664CD2A9F47}"/>
+                <a16:creationId xmlns:a16="http://schemas.microsoft.com/office/drawing/2014/main" id="{317251BC-689B-4F6B-A95F-5D690FA59FCB}"/>
               </a:ext>
             </a:extLst>
           </p:cNvPr>
@@ -20080,7 +20080,7 @@
           <p:cNvPr id="116" name="">
             <a:extLst xmlns:a="http://schemas.openxmlformats.org/drawingml/2006/main">
               <a:ext uri="{FF2B5EF4-FFF2-40B4-BE49-F238E27FC236}">
-                <a16:creationId xmlns:a16="http://schemas.microsoft.com/office/drawing/2014/main" id="{D41384BA-D281-4CB5-80A3-34B5628AE663}"/>
+                <a16:creationId xmlns:a16="http://schemas.microsoft.com/office/drawing/2014/main" id="{A685C670-870F-4BD0-B905-50527BC97035}"/>
               </a:ext>
             </a:extLst>
           </p:cNvPr>
@@ -20130,7 +20130,7 @@
           <p:cNvPr id="117" name="">
             <a:extLst xmlns:a="http://schemas.openxmlformats.org/drawingml/2006/main">
               <a:ext uri="{FF2B5EF4-FFF2-40B4-BE49-F238E27FC236}">
-                <a16:creationId xmlns:a16="http://schemas.microsoft.com/office/drawing/2014/main" id="{02353208-3663-4C78-AE80-526A140AD026}"/>
+                <a16:creationId xmlns:a16="http://schemas.microsoft.com/office/drawing/2014/main" id="{2AFA16DF-B471-4A60-8AFE-AF88F7B0E696}"/>
               </a:ext>
             </a:extLst>
           </p:cNvPr>
@@ -20161,7 +20161,7 @@
           <p:cNvPr id="118" name="">
             <a:extLst xmlns:a="http://schemas.openxmlformats.org/drawingml/2006/main">
               <a:ext uri="{FF2B5EF4-FFF2-40B4-BE49-F238E27FC236}">
-                <a16:creationId xmlns:a16="http://schemas.microsoft.com/office/drawing/2014/main" id="{3610C651-E00F-4A88-B370-9D6B35DDD353}"/>
+                <a16:creationId xmlns:a16="http://schemas.microsoft.com/office/drawing/2014/main" id="{ECB29148-8669-4E76-97B6-4524096F04DE}"/>
               </a:ext>
             </a:extLst>
           </p:cNvPr>
@@ -20211,7 +20211,7 @@
           <p:cNvPr id="119" name="">
             <a:extLst xmlns:a="http://schemas.openxmlformats.org/drawingml/2006/main">
               <a:ext uri="{FF2B5EF4-FFF2-40B4-BE49-F238E27FC236}">
-                <a16:creationId xmlns:a16="http://schemas.microsoft.com/office/drawing/2014/main" id="{F5876CCC-D4F8-4553-BB94-EEE36864C40B}"/>
+                <a16:creationId xmlns:a16="http://schemas.microsoft.com/office/drawing/2014/main" id="{36F69958-4B0C-46D8-8F42-AE3B96B07C0D}"/>
               </a:ext>
             </a:extLst>
           </p:cNvPr>
@@ -20259,7 +20259,7 @@
     </p:spTree>
     <p:extLst>
       <p:ext uri="{BB962C8B-B14F-4D97-AF65-F5344CB8AC3E}">
-        <p14:creationId xmlns:p14="http://schemas.microsoft.com/office/powerpoint/2010/main" val="1672668929"/>
+        <p14:creationId xmlns:p14="http://schemas.microsoft.com/office/powerpoint/2010/main" val="1823514379"/>
       </p:ext>
     </p:extLst>
   </p:cSld>

--- a/generated_exports/ticket_timeline_price_mix_2026.pptx
+++ b/generated_exports/ticket_timeline_price_mix_2026.pptx
@@ -2,16 +2,16 @@
 <file path=ppt/presentation.xml><?xml version="1.0" encoding="utf-8"?>
 <p:presentation xmlns:p="http://schemas.openxmlformats.org/presentationml/2006/main">
   <p:sldMasterIdLst>
-    <p:sldMasterId xmlns:r="http://schemas.openxmlformats.org/officeDocument/2006/relationships" id="2147483648" r:id="R0c568de446f742c6"/>
+    <p:sldMasterId xmlns:r="http://schemas.openxmlformats.org/officeDocument/2006/relationships" id="2147483648" r:id="Rc93397cb41244906"/>
   </p:sldMasterIdLst>
   <p:notesMasterIdLst>
-    <p:notesMasterId xmlns:r="http://schemas.openxmlformats.org/officeDocument/2006/relationships" r:id="R4b7088ca1b854c68"/>
+    <p:notesMasterId xmlns:r="http://schemas.openxmlformats.org/officeDocument/2006/relationships" r:id="Rd71663c148c44835"/>
   </p:notesMasterIdLst>
   <p:sldIdLst>
-    <p:sldId xmlns:r="http://schemas.openxmlformats.org/officeDocument/2006/relationships" id="256" r:id="Rb5e2977bee0347f6"/>
-    <p:sldId xmlns:r="http://schemas.openxmlformats.org/officeDocument/2006/relationships" id="257" r:id="R72397cbb80bc47c4"/>
-    <p:sldId xmlns:r="http://schemas.openxmlformats.org/officeDocument/2006/relationships" id="258" r:id="R7c3cc9ce753f4b0e"/>
-    <p:sldId xmlns:r="http://schemas.openxmlformats.org/officeDocument/2006/relationships" id="259" r:id="R3b6fa0a7bfa64bc8"/>
+    <p:sldId xmlns:r="http://schemas.openxmlformats.org/officeDocument/2006/relationships" id="256" r:id="Rd6f79cc7c0234a6e"/>
+    <p:sldId xmlns:r="http://schemas.openxmlformats.org/officeDocument/2006/relationships" id="257" r:id="R2a4b4cc5894740f1"/>
+    <p:sldId xmlns:r="http://schemas.openxmlformats.org/officeDocument/2006/relationships" id="258" r:id="R2925816fb0d74a81"/>
+    <p:sldId xmlns:r="http://schemas.openxmlformats.org/officeDocument/2006/relationships" id="259" r:id="R69a938a63c464dbc"/>
   </p:sldIdLst>
   <p:sldSz cx="12192000" cy="6858000"/>
   <p:notesSz cx="6858000" cy="9144000"/>
@@ -802,7 +802,7 @@
   </p:cSld>
   <p:clrMap bg1="lt1" tx1="dk1" bg2="lt2" tx2="dk2" accent1="accent1" accent2="accent2" accent3="accent3" accent4="accent4" accent5="accent5" accent6="accent6" hlink="hlink" folHlink="folHlink"/>
   <p:sldLayoutIdLst>
-    <p:sldLayoutId xmlns:r="http://schemas.openxmlformats.org/officeDocument/2006/relationships" id="2147483649" r:id="Rb80d79f1d19b4e40"/>
+    <p:sldLayoutId xmlns:r="http://schemas.openxmlformats.org/officeDocument/2006/relationships" id="2147483649" r:id="R46a181c54a664195"/>
   </p:sldLayoutIdLst>
   <p:txStyles>
     <p:titleStyle>
@@ -1453,22 +1453,22 @@
               <c:formatCode>General</c:formatCode>
               <c:ptCount val="6"/>
               <c:pt idx="0">
-                <c:v>1218</c:v>
+                <c:v>1229</c:v>
               </c:pt>
               <c:pt idx="1">
-                <c:v>308</c:v>
+                <c:v>364</c:v>
               </c:pt>
               <c:pt idx="2">
-                <c:v>209</c:v>
+                <c:v>238</c:v>
               </c:pt>
               <c:pt idx="3">
-                <c:v>190</c:v>
+                <c:v>219</c:v>
               </c:pt>
               <c:pt idx="4">
-                <c:v>380</c:v>
+                <c:v>429</c:v>
               </c:pt>
               <c:pt idx="5">
-                <c:v>312</c:v>
+                <c:v>330</c:v>
               </c:pt>
             </c:numLit>
           </c:val>
@@ -1612,22 +1612,22 @@
               <c:formatCode>General</c:formatCode>
               <c:ptCount val="6"/>
               <c:pt idx="0">
-                <c:v>64</c:v>
+                <c:v>45</c:v>
               </c:pt>
               <c:pt idx="1">
-                <c:v>65</c:v>
+                <c:v>51</c:v>
               </c:pt>
               <c:pt idx="2">
-                <c:v>64</c:v>
+                <c:v>53</c:v>
               </c:pt>
               <c:pt idx="3">
-                <c:v>50</c:v>
+                <c:v>41</c:v>
               </c:pt>
               <c:pt idx="4">
-                <c:v>133</c:v>
+                <c:v>110</c:v>
               </c:pt>
               <c:pt idx="5">
-                <c:v>79</c:v>
+                <c:v>63</c:v>
               </c:pt>
             </c:numLit>
           </c:val>
@@ -1771,22 +1771,22 @@
               <c:formatCode>General</c:formatCode>
               <c:ptCount val="6"/>
               <c:pt idx="0">
-                <c:v>7</c:v>
+                <c:v>6</c:v>
               </c:pt>
               <c:pt idx="1">
-                <c:v>9</c:v>
+                <c:v>2</c:v>
               </c:pt>
               <c:pt idx="2">
-                <c:v>4</c:v>
+                <c:v>1</c:v>
               </c:pt>
               <c:pt idx="3">
-                <c:v>6</c:v>
+                <c:v>2</c:v>
               </c:pt>
               <c:pt idx="4">
-                <c:v>9</c:v>
+                <c:v>3</c:v>
               </c:pt>
               <c:pt idx="5">
-                <c:v>7</c:v>
+                <c:v>2</c:v>
               </c:pt>
             </c:numLit>
           </c:val>
@@ -2089,22 +2089,22 @@
               <c:formatCode>General</c:formatCode>
               <c:ptCount val="6"/>
               <c:pt idx="0">
-                <c:v>849</c:v>
+                <c:v>718</c:v>
               </c:pt>
               <c:pt idx="1">
-                <c:v>307</c:v>
+                <c:v>238</c:v>
               </c:pt>
               <c:pt idx="2">
-                <c:v>191</c:v>
+                <c:v>150</c:v>
               </c:pt>
               <c:pt idx="3">
-                <c:v>176</c:v>
+                <c:v>143</c:v>
               </c:pt>
               <c:pt idx="4">
-                <c:v>356</c:v>
+                <c:v>291</c:v>
               </c:pt>
               <c:pt idx="5">
-                <c:v>295</c:v>
+                <c:v>274</c:v>
               </c:pt>
             </c:numLit>
           </c:val>
@@ -2248,22 +2248,22 @@
               <c:formatCode>General</c:formatCode>
               <c:ptCount val="6"/>
               <c:pt idx="0">
-                <c:v>139</c:v>
+                <c:v>78</c:v>
               </c:pt>
               <c:pt idx="1">
+                <c:v>22</c:v>
+              </c:pt>
+              <c:pt idx="2">
+                <c:v>9</c:v>
+              </c:pt>
+              <c:pt idx="3">
+                <c:v>13</c:v>
+              </c:pt>
+              <c:pt idx="4">
                 <c:v>35</c:v>
               </c:pt>
-              <c:pt idx="2">
-                <c:v>18</c:v>
-              </c:pt>
-              <c:pt idx="3">
-                <c:v>27</c:v>
-              </c:pt>
-              <c:pt idx="4">
-                <c:v>61</c:v>
-              </c:pt>
               <c:pt idx="5">
-                <c:v>77</c:v>
+                <c:v>52</c:v>
               </c:pt>
             </c:numLit>
           </c:val>
@@ -2407,10 +2407,10 @@
               <c:formatCode>General</c:formatCode>
               <c:ptCount val="6"/>
               <c:pt idx="0">
-                <c:v>4</c:v>
+                <c:v>3</c:v>
               </c:pt>
               <c:pt idx="1">
-                <c:v>3</c:v>
+                <c:v>2</c:v>
               </c:pt>
               <c:pt idx="2">
                 <c:v>2</c:v>
@@ -2419,10 +2419,10 @@
                 <c:v>0</c:v>
               </c:pt>
               <c:pt idx="4">
-                <c:v>1</c:v>
+                <c:v>2</c:v>
               </c:pt>
               <c:pt idx="5">
-                <c:v>15</c:v>
+                <c:v>11</c:v>
               </c:pt>
             </c:numLit>
           </c:val>
@@ -2566,22 +2566,22 @@
               <c:formatCode>General</c:formatCode>
               <c:ptCount val="6"/>
               <c:pt idx="0">
-                <c:v>358</c:v>
+                <c:v>457</c:v>
               </c:pt>
               <c:pt idx="1">
-                <c:v>442</c:v>
+                <c:v>608</c:v>
               </c:pt>
               <c:pt idx="2">
-                <c:v>195</c:v>
+                <c:v>283</c:v>
               </c:pt>
               <c:pt idx="3">
-                <c:v>89</c:v>
+                <c:v>140</c:v>
               </c:pt>
               <c:pt idx="4">
-                <c:v>141</c:v>
+                <c:v>209</c:v>
               </c:pt>
               <c:pt idx="5">
-                <c:v>41</c:v>
+                <c:v>70</c:v>
               </c:pt>
             </c:numLit>
           </c:val>
@@ -2725,22 +2725,22 @@
               <c:formatCode>General</c:formatCode>
               <c:ptCount val="6"/>
               <c:pt idx="0">
-                <c:v>296</c:v>
+                <c:v>207</c:v>
               </c:pt>
               <c:pt idx="1">
-                <c:v>469</c:v>
+                <c:v>352</c:v>
               </c:pt>
               <c:pt idx="2">
-                <c:v>275</c:v>
+                <c:v>216</c:v>
               </c:pt>
               <c:pt idx="3">
-                <c:v>187</c:v>
+                <c:v>164</c:v>
               </c:pt>
               <c:pt idx="4">
-                <c:v>287</c:v>
+                <c:v>273</c:v>
               </c:pt>
               <c:pt idx="5">
-                <c:v>104</c:v>
+                <c:v>107</c:v>
               </c:pt>
             </c:numLit>
           </c:val>
@@ -2884,22 +2884,22 @@
               <c:formatCode>General</c:formatCode>
               <c:ptCount val="6"/>
               <c:pt idx="0">
-                <c:v>19</c:v>
+                <c:v>8</c:v>
               </c:pt>
               <c:pt idx="1">
-                <c:v>47</c:v>
+                <c:v>24</c:v>
               </c:pt>
               <c:pt idx="2">
-                <c:v>34</c:v>
+                <c:v>17</c:v>
               </c:pt>
               <c:pt idx="3">
-                <c:v>33</c:v>
+                <c:v>8</c:v>
               </c:pt>
               <c:pt idx="4">
-                <c:v>57</c:v>
+                <c:v>20</c:v>
               </c:pt>
               <c:pt idx="5">
-                <c:v>19</c:v>
+                <c:v>4</c:v>
               </c:pt>
             </c:numLit>
           </c:val>
@@ -3046,19 +3046,19 @@
                 <c:v>3</c:v>
               </c:pt>
               <c:pt idx="1">
-                <c:v>4</c:v>
+                <c:v>3</c:v>
               </c:pt>
               <c:pt idx="2">
-                <c:v>1</c:v>
+                <c:v>2</c:v>
               </c:pt>
               <c:pt idx="3">
                 <c:v>1</c:v>
               </c:pt>
               <c:pt idx="4">
-                <c:v>4</c:v>
+                <c:v>2</c:v>
               </c:pt>
               <c:pt idx="5">
-                <c:v>2</c:v>
+                <c:v>1</c:v>
               </c:pt>
             </c:numLit>
           </c:val>
@@ -3202,22 +3202,22 @@
               <c:formatCode>General</c:formatCode>
               <c:ptCount val="6"/>
               <c:pt idx="0">
-                <c:v>92</c:v>
+                <c:v>117</c:v>
               </c:pt>
               <c:pt idx="1">
-                <c:v>74</c:v>
+                <c:v>102</c:v>
               </c:pt>
               <c:pt idx="2">
-                <c:v>48</c:v>
+                <c:v>66</c:v>
               </c:pt>
               <c:pt idx="3">
-                <c:v>38</c:v>
+                <c:v>53</c:v>
               </c:pt>
               <c:pt idx="4">
-                <c:v>98</c:v>
+                <c:v>132</c:v>
               </c:pt>
               <c:pt idx="5">
-                <c:v>65</c:v>
+                <c:v>90</c:v>
               </c:pt>
             </c:numLit>
           </c:val>
@@ -3261,7 +3261,7 @@
           <p:cNvPr id="22" name="">
             <a:extLst xmlns:a="http://schemas.openxmlformats.org/drawingml/2006/main">
               <a:ext uri="{FF2B5EF4-FFF2-40B4-BE49-F238E27FC236}">
-                <a16:creationId xmlns:a16="http://schemas.microsoft.com/office/drawing/2014/main" id="{99CB8817-2CAA-4396-A302-2AF367E1B1EA}"/>
+                <a16:creationId xmlns:a16="http://schemas.microsoft.com/office/drawing/2014/main" id="{68499D3F-8A58-44D0-884B-3F9ADA79DA35}"/>
               </a:ext>
             </a:extLst>
           </p:cNvPr>
@@ -3311,7 +3311,7 @@
           <p:cNvPr id="2" name="">
             <a:extLst xmlns:a="http://schemas.openxmlformats.org/drawingml/2006/main">
               <a:ext uri="{FF2B5EF4-FFF2-40B4-BE49-F238E27FC236}">
-                <a16:creationId xmlns:a16="http://schemas.microsoft.com/office/drawing/2014/main" id="{6E889785-CEF4-4EBD-947C-87B7F90C3992}"/>
+                <a16:creationId xmlns:a16="http://schemas.microsoft.com/office/drawing/2014/main" id="{886B88AC-6860-40DB-8470-8FA7191F976A}"/>
               </a:ext>
             </a:extLst>
           </p:cNvPr>
@@ -3361,7 +3361,7 @@
           <p:cNvPr id="3" name="">
             <a:extLst xmlns:a="http://schemas.openxmlformats.org/drawingml/2006/main">
               <a:ext uri="{FF2B5EF4-FFF2-40B4-BE49-F238E27FC236}">
-                <a16:creationId xmlns:a16="http://schemas.microsoft.com/office/drawing/2014/main" id="{95F158F5-D247-43FC-B4CF-87BD39D26090}"/>
+                <a16:creationId xmlns:a16="http://schemas.microsoft.com/office/drawing/2014/main" id="{B5B16271-981D-4531-AC23-5C08C78BAE2D}"/>
               </a:ext>
             </a:extLst>
           </p:cNvPr>
@@ -3411,7 +3411,7 @@
           <p:cNvPr id="4" name="">
             <a:extLst xmlns:a="http://schemas.openxmlformats.org/drawingml/2006/main">
               <a:ext uri="{FF2B5EF4-FFF2-40B4-BE49-F238E27FC236}">
-                <a16:creationId xmlns:a16="http://schemas.microsoft.com/office/drawing/2014/main" id="{14B224E6-0466-4308-BB28-D6E9423BDF8F}"/>
+                <a16:creationId xmlns:a16="http://schemas.microsoft.com/office/drawing/2014/main" id="{B66BE241-14C5-43EE-9E95-CC8B84691746}"/>
               </a:ext>
             </a:extLst>
           </p:cNvPr>
@@ -3452,7 +3452,7 @@
           <p:cNvPr id="5" name="">
             <a:extLst xmlns:a="http://schemas.openxmlformats.org/drawingml/2006/main">
               <a:ext uri="{FF2B5EF4-FFF2-40B4-BE49-F238E27FC236}">
-                <a16:creationId xmlns:a16="http://schemas.microsoft.com/office/drawing/2014/main" id="{F06FE27E-240C-453B-AACE-485F4CC91C41}"/>
+                <a16:creationId xmlns:a16="http://schemas.microsoft.com/office/drawing/2014/main" id="{F4EBEA8B-15EC-4655-B857-85DFEAD8BA97}"/>
               </a:ext>
             </a:extLst>
           </p:cNvPr>
@@ -3502,7 +3502,7 @@
           <p:cNvPr id="6" name="">
             <a:extLst xmlns:a="http://schemas.openxmlformats.org/drawingml/2006/main">
               <a:ext uri="{FF2B5EF4-FFF2-40B4-BE49-F238E27FC236}">
-                <a16:creationId xmlns:a16="http://schemas.microsoft.com/office/drawing/2014/main" id="{5D9489E9-A1FE-411F-9536-355993D2A710}"/>
+                <a16:creationId xmlns:a16="http://schemas.microsoft.com/office/drawing/2014/main" id="{ECE292AA-69B2-41F2-A6CD-AEE9FC98CD0A}"/>
               </a:ext>
             </a:extLst>
           </p:cNvPr>
@@ -3542,7 +3542,7 @@
                   <a:srgbClr val="2474A6"/>
                 </a:solidFill>
               </a:rPr>
-              <a:t>5,173 priced tickets</a:t>
+              <a:t>4,852 priced tickets</a:t>
             </a:r>
           </a:p>
         </p:txBody>
@@ -3552,7 +3552,7 @@
           <p:cNvPr id="7" name="">
             <a:extLst xmlns:a="http://schemas.openxmlformats.org/drawingml/2006/main">
               <a:ext uri="{FF2B5EF4-FFF2-40B4-BE49-F238E27FC236}">
-                <a16:creationId xmlns:a16="http://schemas.microsoft.com/office/drawing/2014/main" id="{CD634985-8F8E-402E-81DF-7C2AB817875B}"/>
+                <a16:creationId xmlns:a16="http://schemas.microsoft.com/office/drawing/2014/main" id="{803B42F9-53DE-4F8C-BF58-11A1A060E740}"/>
               </a:ext>
             </a:extLst>
           </p:cNvPr>
@@ -3592,7 +3592,7 @@
                   <a:srgbClr val="526176"/>
                 </a:solidFill>
               </a:rPr>
-              <a:t>Stage average: 24.8 days</a:t>
+              <a:t>Stage average: 24.6 days</a:t>
             </a:r>
           </a:p>
         </p:txBody>
@@ -3602,7 +3602,7 @@
           <p:cNvPr id="8" name="">
             <a:extLst xmlns:a="http://schemas.openxmlformats.org/drawingml/2006/main">
               <a:ext uri="{FF2B5EF4-FFF2-40B4-BE49-F238E27FC236}">
-                <a16:creationId xmlns:a16="http://schemas.microsoft.com/office/drawing/2014/main" id="{12A7FB76-D20C-4F4B-A998-7EDC29EB3310}"/>
+                <a16:creationId xmlns:a16="http://schemas.microsoft.com/office/drawing/2014/main" id="{B394012D-F0E3-4E33-80F3-0E07652203B6}"/>
               </a:ext>
             </a:extLst>
           </p:cNvPr>
@@ -3652,7 +3652,7 @@
           <p:cNvPr id="9" name="">
             <a:extLst xmlns:a="http://schemas.openxmlformats.org/drawingml/2006/main">
               <a:ext uri="{FF2B5EF4-FFF2-40B4-BE49-F238E27FC236}">
-                <a16:creationId xmlns:a16="http://schemas.microsoft.com/office/drawing/2014/main" id="{0A9435D6-1F58-42F2-955B-6FA074CE1AA3}"/>
+                <a16:creationId xmlns:a16="http://schemas.microsoft.com/office/drawing/2014/main" id="{BB58E08A-403D-4F9A-BF4A-06C1560B0AA9}"/>
               </a:ext>
             </a:extLst>
           </p:cNvPr>
@@ -3693,7 +3693,7 @@
           <p:cNvPr id="10" name="">
             <a:extLst xmlns:a="http://schemas.openxmlformats.org/drawingml/2006/main">
               <a:ext uri="{FF2B5EF4-FFF2-40B4-BE49-F238E27FC236}">
-                <a16:creationId xmlns:a16="http://schemas.microsoft.com/office/drawing/2014/main" id="{52769EB1-BF88-4786-9193-E191ACAC9500}"/>
+                <a16:creationId xmlns:a16="http://schemas.microsoft.com/office/drawing/2014/main" id="{E893E88B-9DCE-4912-BE45-13479E799294}"/>
               </a:ext>
             </a:extLst>
           </p:cNvPr>
@@ -3743,7 +3743,7 @@
           <p:cNvPr id="11" name="">
             <a:extLst xmlns:a="http://schemas.openxmlformats.org/drawingml/2006/main">
               <a:ext uri="{FF2B5EF4-FFF2-40B4-BE49-F238E27FC236}">
-                <a16:creationId xmlns:a16="http://schemas.microsoft.com/office/drawing/2014/main" id="{022F3D33-76AF-44D8-9786-78BA0C834076}"/>
+                <a16:creationId xmlns:a16="http://schemas.microsoft.com/office/drawing/2014/main" id="{B3E97B8A-35CA-4F15-9D55-5526B2CDC993}"/>
               </a:ext>
             </a:extLst>
           </p:cNvPr>
@@ -3783,7 +3783,7 @@
                   <a:srgbClr val="2474A6"/>
                 </a:solidFill>
               </a:rPr>
-              <a:t>3,108 priced tickets</a:t>
+              <a:t>3,179 priced tickets</a:t>
             </a:r>
           </a:p>
         </p:txBody>
@@ -3793,7 +3793,7 @@
           <p:cNvPr id="12" name="">
             <a:extLst xmlns:a="http://schemas.openxmlformats.org/drawingml/2006/main">
               <a:ext uri="{FF2B5EF4-FFF2-40B4-BE49-F238E27FC236}">
-                <a16:creationId xmlns:a16="http://schemas.microsoft.com/office/drawing/2014/main" id="{EDD39959-2EE0-48BE-A18F-F881853E7529}"/>
+                <a16:creationId xmlns:a16="http://schemas.microsoft.com/office/drawing/2014/main" id="{5248EE74-F8B4-4452-9B4F-0D3D8BF2FECC}"/>
               </a:ext>
             </a:extLst>
           </p:cNvPr>
@@ -3833,7 +3833,7 @@
                   <a:srgbClr val="526176"/>
                 </a:solidFill>
               </a:rPr>
-              <a:t>Stage average: 20.6 days</a:t>
+              <a:t>Stage average: 21.0 days</a:t>
             </a:r>
           </a:p>
         </p:txBody>
@@ -3843,7 +3843,7 @@
           <p:cNvPr id="13" name="">
             <a:extLst xmlns:a="http://schemas.openxmlformats.org/drawingml/2006/main">
               <a:ext uri="{FF2B5EF4-FFF2-40B4-BE49-F238E27FC236}">
-                <a16:creationId xmlns:a16="http://schemas.microsoft.com/office/drawing/2014/main" id="{1280CDAA-48A9-423C-BFE8-12D9E000A1B0}"/>
+                <a16:creationId xmlns:a16="http://schemas.microsoft.com/office/drawing/2014/main" id="{ADF25D14-F9B7-4B41-9FA1-D1D23885A25E}"/>
               </a:ext>
             </a:extLst>
           </p:cNvPr>
@@ -3893,7 +3893,7 @@
           <p:cNvPr id="14" name="">
             <a:extLst xmlns:a="http://schemas.openxmlformats.org/drawingml/2006/main">
               <a:ext uri="{FF2B5EF4-FFF2-40B4-BE49-F238E27FC236}">
-                <a16:creationId xmlns:a16="http://schemas.microsoft.com/office/drawing/2014/main" id="{E16E5B7E-245B-4228-AB39-DDC50CFD352A}"/>
+                <a16:creationId xmlns:a16="http://schemas.microsoft.com/office/drawing/2014/main" id="{4102D0FD-2429-4312-96C3-A9030B547510}"/>
               </a:ext>
             </a:extLst>
           </p:cNvPr>
@@ -3934,7 +3934,7 @@
           <p:cNvPr id="15" name="">
             <a:extLst xmlns:a="http://schemas.openxmlformats.org/drawingml/2006/main">
               <a:ext uri="{FF2B5EF4-FFF2-40B4-BE49-F238E27FC236}">
-                <a16:creationId xmlns:a16="http://schemas.microsoft.com/office/drawing/2014/main" id="{0ACE45C9-D789-46B7-925C-9238AAD0CC62}"/>
+                <a16:creationId xmlns:a16="http://schemas.microsoft.com/office/drawing/2014/main" id="{118A18D9-0D9E-4959-8E82-D4D7F6C46C1E}"/>
               </a:ext>
             </a:extLst>
           </p:cNvPr>
@@ -3984,7 +3984,7 @@
           <p:cNvPr id="16" name="">
             <a:extLst xmlns:a="http://schemas.openxmlformats.org/drawingml/2006/main">
               <a:ext uri="{FF2B5EF4-FFF2-40B4-BE49-F238E27FC236}">
-                <a16:creationId xmlns:a16="http://schemas.microsoft.com/office/drawing/2014/main" id="{AD8AABBB-3132-42E8-B1C6-2A5EB858D305}"/>
+                <a16:creationId xmlns:a16="http://schemas.microsoft.com/office/drawing/2014/main" id="{E0903BB2-C806-42C2-9BBC-863A76416DB8}"/>
               </a:ext>
             </a:extLst>
           </p:cNvPr>
@@ -4024,7 +4024,7 @@
                   <a:srgbClr val="2474A6"/>
                 </a:solidFill>
               </a:rPr>
-              <a:t>914 priced tickets</a:t>
+              <a:t>941 priced tickets</a:t>
             </a:r>
           </a:p>
         </p:txBody>
@@ -4034,7 +4034,7 @@
           <p:cNvPr id="17" name="">
             <a:extLst xmlns:a="http://schemas.openxmlformats.org/drawingml/2006/main">
               <a:ext uri="{FF2B5EF4-FFF2-40B4-BE49-F238E27FC236}">
-                <a16:creationId xmlns:a16="http://schemas.microsoft.com/office/drawing/2014/main" id="{CEC7EB9A-0A7A-4A60-8634-E24A2BD64D15}"/>
+                <a16:creationId xmlns:a16="http://schemas.microsoft.com/office/drawing/2014/main" id="{57A1BCD2-AF17-43E5-A42B-74A0CDB18CF6}"/>
               </a:ext>
             </a:extLst>
           </p:cNvPr>
@@ -4074,7 +4074,7 @@
                   <a:srgbClr val="526176"/>
                 </a:solidFill>
               </a:rPr>
-              <a:t>Stage average: 32.6 days</a:t>
+              <a:t>Stage average: 32.5 days</a:t>
             </a:r>
           </a:p>
         </p:txBody>
@@ -4084,7 +4084,7 @@
           <p:cNvPr id="18" name="">
             <a:extLst xmlns:a="http://schemas.openxmlformats.org/drawingml/2006/main">
               <a:ext uri="{FF2B5EF4-FFF2-40B4-BE49-F238E27FC236}">
-                <a16:creationId xmlns:a16="http://schemas.microsoft.com/office/drawing/2014/main" id="{1071471F-0B21-442B-AA6B-455E2E32053B}"/>
+                <a16:creationId xmlns:a16="http://schemas.microsoft.com/office/drawing/2014/main" id="{B905E74F-5062-453E-91D9-9323932FFCAF}"/>
               </a:ext>
             </a:extLst>
           </p:cNvPr>
@@ -4134,7 +4134,7 @@
           <p:cNvPr id="19" name="">
             <a:extLst xmlns:a="http://schemas.openxmlformats.org/drawingml/2006/main">
               <a:ext uri="{FF2B5EF4-FFF2-40B4-BE49-F238E27FC236}">
-                <a16:creationId xmlns:a16="http://schemas.microsoft.com/office/drawing/2014/main" id="{65A8C77A-C026-4C45-A587-BCBC59E815D4}"/>
+                <a16:creationId xmlns:a16="http://schemas.microsoft.com/office/drawing/2014/main" id="{63FD5A03-3C7A-42D7-B7A5-BC598BAE16ED}"/>
               </a:ext>
             </a:extLst>
           </p:cNvPr>
@@ -4165,7 +4165,7 @@
           <p:cNvPr id="20" name="">
             <a:extLst xmlns:a="http://schemas.openxmlformats.org/drawingml/2006/main">
               <a:ext uri="{FF2B5EF4-FFF2-40B4-BE49-F238E27FC236}">
-                <a16:creationId xmlns:a16="http://schemas.microsoft.com/office/drawing/2014/main" id="{3EF5FA05-E318-42CA-9A11-BD48857803CC}"/>
+                <a16:creationId xmlns:a16="http://schemas.microsoft.com/office/drawing/2014/main" id="{5C002873-5164-45AC-9FB7-C2E111CA761D}"/>
               </a:ext>
             </a:extLst>
           </p:cNvPr>
@@ -4215,7 +4215,7 @@
           <p:cNvPr id="21" name="">
             <a:extLst xmlns:a="http://schemas.openxmlformats.org/drawingml/2006/main">
               <a:ext uri="{FF2B5EF4-FFF2-40B4-BE49-F238E27FC236}">
-                <a16:creationId xmlns:a16="http://schemas.microsoft.com/office/drawing/2014/main" id="{49621D31-1984-4BB5-A2D8-22A2DA18BF0B}"/>
+                <a16:creationId xmlns:a16="http://schemas.microsoft.com/office/drawing/2014/main" id="{F758A105-1C50-4CC7-BE3F-B7DE7D483899}"/>
               </a:ext>
             </a:extLst>
           </p:cNvPr>
@@ -4263,7 +4263,7 @@
     </p:spTree>
     <p:extLst>
       <p:ext uri="{BB962C8B-B14F-4D97-AF65-F5344CB8AC3E}">
-        <p14:creationId xmlns:p14="http://schemas.microsoft.com/office/powerpoint/2010/main" val="2137657363"/>
+        <p14:creationId xmlns:p14="http://schemas.microsoft.com/office/powerpoint/2010/main" val="84435438"/>
       </p:ext>
     </p:extLst>
   </p:cSld>
@@ -4294,7 +4294,7 @@
           <p:cNvPr id="120" name="">
             <a:extLst xmlns:a="http://schemas.openxmlformats.org/drawingml/2006/main">
               <a:ext uri="{FF2B5EF4-FFF2-40B4-BE49-F238E27FC236}">
-                <a16:creationId xmlns:a16="http://schemas.microsoft.com/office/drawing/2014/main" id="{460508EE-4A59-4AC2-81F3-D67F45605384}"/>
+                <a16:creationId xmlns:a16="http://schemas.microsoft.com/office/drawing/2014/main" id="{984A6D77-A69B-441B-844D-0970BD4F104E}"/>
               </a:ext>
             </a:extLst>
           </p:cNvPr>
@@ -4344,7 +4344,7 @@
           <p:cNvPr id="2" name="">
             <a:extLst xmlns:a="http://schemas.openxmlformats.org/drawingml/2006/main">
               <a:ext uri="{FF2B5EF4-FFF2-40B4-BE49-F238E27FC236}">
-                <a16:creationId xmlns:a16="http://schemas.microsoft.com/office/drawing/2014/main" id="{99D81683-FD9B-40DB-9E82-DCB78A00CD42}"/>
+                <a16:creationId xmlns:a16="http://schemas.microsoft.com/office/drawing/2014/main" id="{207E1852-FEA2-4344-BE8C-E83BB2E2AA62}"/>
               </a:ext>
             </a:extLst>
           </p:cNvPr>
@@ -4394,7 +4394,7 @@
           <p:cNvPr id="3" name="">
             <a:extLst xmlns:a="http://schemas.openxmlformats.org/drawingml/2006/main">
               <a:ext uri="{FF2B5EF4-FFF2-40B4-BE49-F238E27FC236}">
-                <a16:creationId xmlns:a16="http://schemas.microsoft.com/office/drawing/2014/main" id="{0058CFCE-769F-4D69-A133-3C76974CC07B}"/>
+                <a16:creationId xmlns:a16="http://schemas.microsoft.com/office/drawing/2014/main" id="{5BC9D6A9-69A3-43FF-AA31-3D1E2447E857}"/>
               </a:ext>
             </a:extLst>
           </p:cNvPr>
@@ -4434,7 +4434,7 @@
                   <a:srgbClr val="647287"/>
                 </a:solidFill>
               </a:rPr>
-              <a:t>5,173 priced tickets. Percentages are ticket-count share within each price band, not claim amount share.</a:t>
+              <a:t>4,852 priced tickets. Percentages are ticket-count share within each price band, not claim amount share.</a:t>
             </a:r>
           </a:p>
         </p:txBody>
@@ -4444,7 +4444,7 @@
           <p:cNvPr id="4" name="">
             <a:extLst xmlns:a="http://schemas.openxmlformats.org/drawingml/2006/main">
               <a:ext uri="{FF2B5EF4-FFF2-40B4-BE49-F238E27FC236}">
-                <a16:creationId xmlns:a16="http://schemas.microsoft.com/office/drawing/2014/main" id="{8611AB12-050C-4FB9-9EDC-24B58F3B0D45}"/>
+                <a16:creationId xmlns:a16="http://schemas.microsoft.com/office/drawing/2014/main" id="{BB5A6ABC-7661-4B30-B7E4-A2C8778F52D9}"/>
               </a:ext>
             </a:extLst>
           </p:cNvPr>
@@ -4485,7 +4485,7 @@
           <p:cNvPr id="5" name="">
             <a:extLst xmlns:a="http://schemas.openxmlformats.org/drawingml/2006/main">
               <a:ext uri="{FF2B5EF4-FFF2-40B4-BE49-F238E27FC236}">
-                <a16:creationId xmlns:a16="http://schemas.microsoft.com/office/drawing/2014/main" id="{6DBBA0CC-8A83-484D-8D40-33F11C00C147}"/>
+                <a16:creationId xmlns:a16="http://schemas.microsoft.com/office/drawing/2014/main" id="{E8CFC7B9-1235-483E-A796-0E3144398FE9}"/>
               </a:ext>
             </a:extLst>
           </p:cNvPr>
@@ -4535,7 +4535,7 @@
           <p:cNvPr id="6" name="">
             <a:extLst xmlns:a="http://schemas.openxmlformats.org/drawingml/2006/main">
               <a:ext uri="{FF2B5EF4-FFF2-40B4-BE49-F238E27FC236}">
-                <a16:creationId xmlns:a16="http://schemas.microsoft.com/office/drawing/2014/main" id="{20D8DDD0-23A7-4356-AD19-4EA1FE37EDB0}"/>
+                <a16:creationId xmlns:a16="http://schemas.microsoft.com/office/drawing/2014/main" id="{8F43DE8C-124B-4161-873D-4988B88ABAAC}"/>
               </a:ext>
             </a:extLst>
           </p:cNvPr>
@@ -4575,7 +4575,7 @@
                   <a:srgbClr val="647287"/>
                 </a:solidFill>
               </a:rPr>
-              <a:t>2,617 tickets  /  avg 22.1 days</a:t>
+              <a:t>2,809 tickets  /  avg 22.9 days</a:t>
             </a:r>
           </a:p>
         </p:txBody>
@@ -4592,7 +4592,7 @@
         </p:xfrm>
         <a:graphic xmlns:a="http://schemas.openxmlformats.org/drawingml/2006/main">
           <a:graphicData uri="http://schemas.openxmlformats.org/drawingml/2006/chart">
-            <c:chart xmlns:r="http://schemas.openxmlformats.org/officeDocument/2006/relationships" xmlns:c="http://schemas.openxmlformats.org/drawingml/2006/chart" r:id="R7496fd136aa449ab"/>
+            <c:chart xmlns:r="http://schemas.openxmlformats.org/officeDocument/2006/relationships" xmlns:c="http://schemas.openxmlformats.org/drawingml/2006/chart" r:id="Rb529e158950b4ad5"/>
           </a:graphicData>
         </a:graphic>
       </p:graphicFrame>
@@ -4601,7 +4601,7 @@
           <p:cNvPr id="8" name="">
             <a:extLst xmlns:a="http://schemas.openxmlformats.org/drawingml/2006/main">
               <a:ext uri="{FF2B5EF4-FFF2-40B4-BE49-F238E27FC236}">
-                <a16:creationId xmlns:a16="http://schemas.microsoft.com/office/drawing/2014/main" id="{D4049F2B-A4A0-4AFF-A5CC-8D65B9AB3820}"/>
+                <a16:creationId xmlns:a16="http://schemas.microsoft.com/office/drawing/2014/main" id="{DEEF8C6F-73D8-4520-98CC-42085F57D4EC}"/>
               </a:ext>
             </a:extLst>
           </p:cNvPr>
@@ -4632,7 +4632,7 @@
           <p:cNvPr id="9" name="">
             <a:extLst xmlns:a="http://schemas.openxmlformats.org/drawingml/2006/main">
               <a:ext uri="{FF2B5EF4-FFF2-40B4-BE49-F238E27FC236}">
-                <a16:creationId xmlns:a16="http://schemas.microsoft.com/office/drawing/2014/main" id="{A236E41A-4D57-498E-A71B-E36C8149AD92}"/>
+                <a16:creationId xmlns:a16="http://schemas.microsoft.com/office/drawing/2014/main" id="{E8191B34-5B8E-4275-90C5-3A14032A8186}"/>
               </a:ext>
             </a:extLst>
           </p:cNvPr>
@@ -4682,7 +4682,7 @@
           <p:cNvPr id="10" name="">
             <a:extLst xmlns:a="http://schemas.openxmlformats.org/drawingml/2006/main">
               <a:ext uri="{FF2B5EF4-FFF2-40B4-BE49-F238E27FC236}">
-                <a16:creationId xmlns:a16="http://schemas.microsoft.com/office/drawing/2014/main" id="{2B4ADA7E-59D7-4130-80F8-052DEBFEC440}"/>
+                <a16:creationId xmlns:a16="http://schemas.microsoft.com/office/drawing/2014/main" id="{8AB778CF-4621-4025-ADC6-93F7D0BDDD00}"/>
               </a:ext>
             </a:extLst>
           </p:cNvPr>
@@ -4722,7 +4722,7 @@
                   <a:srgbClr val="1D2A3D"/>
                 </a:solidFill>
               </a:rPr>
-              <a:t>1,218 tickets</a:t>
+              <a:t>1,229 tickets</a:t>
             </a:r>
           </a:p>
         </p:txBody>
@@ -4732,7 +4732,7 @@
           <p:cNvPr id="11" name="">
             <a:extLst xmlns:a="http://schemas.openxmlformats.org/drawingml/2006/main">
               <a:ext uri="{FF2B5EF4-FFF2-40B4-BE49-F238E27FC236}">
-                <a16:creationId xmlns:a16="http://schemas.microsoft.com/office/drawing/2014/main" id="{657C2973-F9B2-4C67-9D19-0A1844B708B5}"/>
+                <a16:creationId xmlns:a16="http://schemas.microsoft.com/office/drawing/2014/main" id="{75A35FC6-7C93-4DE5-A1AC-4CE4656C0455}"/>
               </a:ext>
             </a:extLst>
           </p:cNvPr>
@@ -4772,7 +4772,7 @@
                   <a:srgbClr val="1D2A3D"/>
                 </a:solidFill>
               </a:rPr>
-              <a:t>46.5%</a:t>
+              <a:t>43.8%</a:t>
             </a:r>
           </a:p>
         </p:txBody>
@@ -4782,7 +4782,7 @@
           <p:cNvPr id="12" name="">
             <a:extLst xmlns:a="http://schemas.openxmlformats.org/drawingml/2006/main">
               <a:ext uri="{FF2B5EF4-FFF2-40B4-BE49-F238E27FC236}">
-                <a16:creationId xmlns:a16="http://schemas.microsoft.com/office/drawing/2014/main" id="{9FFB2226-9D1A-4C0A-96B2-8DEF0855B618}"/>
+                <a16:creationId xmlns:a16="http://schemas.microsoft.com/office/drawing/2014/main" id="{44946F30-56AA-439C-804A-DCC7CAF34B43}"/>
               </a:ext>
             </a:extLst>
           </p:cNvPr>
@@ -4813,7 +4813,7 @@
           <p:cNvPr id="13" name="">
             <a:extLst xmlns:a="http://schemas.openxmlformats.org/drawingml/2006/main">
               <a:ext uri="{FF2B5EF4-FFF2-40B4-BE49-F238E27FC236}">
-                <a16:creationId xmlns:a16="http://schemas.microsoft.com/office/drawing/2014/main" id="{CBADA86B-ADBC-4792-9AC4-0F29486F7B9D}"/>
+                <a16:creationId xmlns:a16="http://schemas.microsoft.com/office/drawing/2014/main" id="{24FA1999-05BA-412B-B35A-225F8EB75277}"/>
               </a:ext>
             </a:extLst>
           </p:cNvPr>
@@ -4863,7 +4863,7 @@
           <p:cNvPr id="14" name="">
             <a:extLst xmlns:a="http://schemas.openxmlformats.org/drawingml/2006/main">
               <a:ext uri="{FF2B5EF4-FFF2-40B4-BE49-F238E27FC236}">
-                <a16:creationId xmlns:a16="http://schemas.microsoft.com/office/drawing/2014/main" id="{B641E753-F0A8-435D-BED5-566813EB96F2}"/>
+                <a16:creationId xmlns:a16="http://schemas.microsoft.com/office/drawing/2014/main" id="{D004D3EB-7202-4B64-956B-72A04B94AF24}"/>
               </a:ext>
             </a:extLst>
           </p:cNvPr>
@@ -4903,7 +4903,7 @@
                   <a:srgbClr val="1D2A3D"/>
                 </a:solidFill>
               </a:rPr>
-              <a:t>308 tickets</a:t>
+              <a:t>364 tickets</a:t>
             </a:r>
           </a:p>
         </p:txBody>
@@ -4913,7 +4913,7 @@
           <p:cNvPr id="15" name="">
             <a:extLst xmlns:a="http://schemas.openxmlformats.org/drawingml/2006/main">
               <a:ext uri="{FF2B5EF4-FFF2-40B4-BE49-F238E27FC236}">
-                <a16:creationId xmlns:a16="http://schemas.microsoft.com/office/drawing/2014/main" id="{350347B7-6240-44E7-A6D0-0DE6000DE518}"/>
+                <a16:creationId xmlns:a16="http://schemas.microsoft.com/office/drawing/2014/main" id="{FCE7DCB1-F31F-40DB-9139-0C91F2E7F31E}"/>
               </a:ext>
             </a:extLst>
           </p:cNvPr>
@@ -4953,7 +4953,7 @@
                   <a:srgbClr val="1D2A3D"/>
                 </a:solidFill>
               </a:rPr>
-              <a:t>11.8%</a:t>
+              <a:t>13.0%</a:t>
             </a:r>
           </a:p>
         </p:txBody>
@@ -4963,7 +4963,7 @@
           <p:cNvPr id="16" name="">
             <a:extLst xmlns:a="http://schemas.openxmlformats.org/drawingml/2006/main">
               <a:ext uri="{FF2B5EF4-FFF2-40B4-BE49-F238E27FC236}">
-                <a16:creationId xmlns:a16="http://schemas.microsoft.com/office/drawing/2014/main" id="{C4C57E0B-BA99-4495-B08D-E2A2D0A67E64}"/>
+                <a16:creationId xmlns:a16="http://schemas.microsoft.com/office/drawing/2014/main" id="{AFC12D7C-1072-4937-88A2-2E2A534D4FF6}"/>
               </a:ext>
             </a:extLst>
           </p:cNvPr>
@@ -4994,7 +4994,7 @@
           <p:cNvPr id="17" name="">
             <a:extLst xmlns:a="http://schemas.openxmlformats.org/drawingml/2006/main">
               <a:ext uri="{FF2B5EF4-FFF2-40B4-BE49-F238E27FC236}">
-                <a16:creationId xmlns:a16="http://schemas.microsoft.com/office/drawing/2014/main" id="{C3B94384-612F-4EBE-A8BF-B6D9D1988334}"/>
+                <a16:creationId xmlns:a16="http://schemas.microsoft.com/office/drawing/2014/main" id="{BB3C2DAF-C7A7-4B5D-99BB-A365D734A101}"/>
               </a:ext>
             </a:extLst>
           </p:cNvPr>
@@ -5044,7 +5044,7 @@
           <p:cNvPr id="18" name="">
             <a:extLst xmlns:a="http://schemas.openxmlformats.org/drawingml/2006/main">
               <a:ext uri="{FF2B5EF4-FFF2-40B4-BE49-F238E27FC236}">
-                <a16:creationId xmlns:a16="http://schemas.microsoft.com/office/drawing/2014/main" id="{FA47484B-653A-4B48-A58E-C81C3FB2BFF6}"/>
+                <a16:creationId xmlns:a16="http://schemas.microsoft.com/office/drawing/2014/main" id="{5D3D4876-CF7D-44FE-8C68-23B1F93A8569}"/>
               </a:ext>
             </a:extLst>
           </p:cNvPr>
@@ -5084,7 +5084,7 @@
                   <a:srgbClr val="1D2A3D"/>
                 </a:solidFill>
               </a:rPr>
-              <a:t>209 tickets</a:t>
+              <a:t>238 tickets</a:t>
             </a:r>
           </a:p>
         </p:txBody>
@@ -5094,7 +5094,7 @@
           <p:cNvPr id="19" name="">
             <a:extLst xmlns:a="http://schemas.openxmlformats.org/drawingml/2006/main">
               <a:ext uri="{FF2B5EF4-FFF2-40B4-BE49-F238E27FC236}">
-                <a16:creationId xmlns:a16="http://schemas.microsoft.com/office/drawing/2014/main" id="{537AC326-D8D8-437D-9D8C-64744756DA4F}"/>
+                <a16:creationId xmlns:a16="http://schemas.microsoft.com/office/drawing/2014/main" id="{A75D2207-2996-4BF7-A189-E61CA62492A9}"/>
               </a:ext>
             </a:extLst>
           </p:cNvPr>
@@ -5134,7 +5134,7 @@
                   <a:srgbClr val="1D2A3D"/>
                 </a:solidFill>
               </a:rPr>
-              <a:t>8.0%</a:t>
+              <a:t>8.5%</a:t>
             </a:r>
           </a:p>
         </p:txBody>
@@ -5144,7 +5144,7 @@
           <p:cNvPr id="20" name="">
             <a:extLst xmlns:a="http://schemas.openxmlformats.org/drawingml/2006/main">
               <a:ext uri="{FF2B5EF4-FFF2-40B4-BE49-F238E27FC236}">
-                <a16:creationId xmlns:a16="http://schemas.microsoft.com/office/drawing/2014/main" id="{3FB63F91-5248-4C9E-8091-5635CCFF0209}"/>
+                <a16:creationId xmlns:a16="http://schemas.microsoft.com/office/drawing/2014/main" id="{645588ED-3922-4B5C-B436-3F5101251311}"/>
               </a:ext>
             </a:extLst>
           </p:cNvPr>
@@ -5175,7 +5175,7 @@
           <p:cNvPr id="21" name="">
             <a:extLst xmlns:a="http://schemas.openxmlformats.org/drawingml/2006/main">
               <a:ext uri="{FF2B5EF4-FFF2-40B4-BE49-F238E27FC236}">
-                <a16:creationId xmlns:a16="http://schemas.microsoft.com/office/drawing/2014/main" id="{C478C477-E44A-4FCD-A13D-449B1C1560B7}"/>
+                <a16:creationId xmlns:a16="http://schemas.microsoft.com/office/drawing/2014/main" id="{F48D672A-897B-4E1A-AFE7-4EE7E1D017FC}"/>
               </a:ext>
             </a:extLst>
           </p:cNvPr>
@@ -5225,7 +5225,7 @@
           <p:cNvPr id="22" name="">
             <a:extLst xmlns:a="http://schemas.openxmlformats.org/drawingml/2006/main">
               <a:ext uri="{FF2B5EF4-FFF2-40B4-BE49-F238E27FC236}">
-                <a16:creationId xmlns:a16="http://schemas.microsoft.com/office/drawing/2014/main" id="{9929CAB8-0A00-4BF9-8A20-125F7C4416C8}"/>
+                <a16:creationId xmlns:a16="http://schemas.microsoft.com/office/drawing/2014/main" id="{67DD194D-0502-44B7-9F6E-0E1469FB6A33}"/>
               </a:ext>
             </a:extLst>
           </p:cNvPr>
@@ -5265,7 +5265,7 @@
                   <a:srgbClr val="1D2A3D"/>
                 </a:solidFill>
               </a:rPr>
-              <a:t>190 tickets</a:t>
+              <a:t>219 tickets</a:t>
             </a:r>
           </a:p>
         </p:txBody>
@@ -5275,7 +5275,7 @@
           <p:cNvPr id="23" name="">
             <a:extLst xmlns:a="http://schemas.openxmlformats.org/drawingml/2006/main">
               <a:ext uri="{FF2B5EF4-FFF2-40B4-BE49-F238E27FC236}">
-                <a16:creationId xmlns:a16="http://schemas.microsoft.com/office/drawing/2014/main" id="{90905B9F-BCE4-4197-B38A-00B4574096E8}"/>
+                <a16:creationId xmlns:a16="http://schemas.microsoft.com/office/drawing/2014/main" id="{8DE6EF10-8A6C-41C4-8332-83D9CBC5DF4C}"/>
               </a:ext>
             </a:extLst>
           </p:cNvPr>
@@ -5315,7 +5315,7 @@
                   <a:srgbClr val="1D2A3D"/>
                 </a:solidFill>
               </a:rPr>
-              <a:t>7.3%</a:t>
+              <a:t>7.8%</a:t>
             </a:r>
           </a:p>
         </p:txBody>
@@ -5325,7 +5325,7 @@
           <p:cNvPr id="24" name="">
             <a:extLst xmlns:a="http://schemas.openxmlformats.org/drawingml/2006/main">
               <a:ext uri="{FF2B5EF4-FFF2-40B4-BE49-F238E27FC236}">
-                <a16:creationId xmlns:a16="http://schemas.microsoft.com/office/drawing/2014/main" id="{B6A88E6F-E63F-40D0-A69E-F4791C1ADDCD}"/>
+                <a16:creationId xmlns:a16="http://schemas.microsoft.com/office/drawing/2014/main" id="{613A82D6-AB78-4642-A66D-9DEEDFD93ECA}"/>
               </a:ext>
             </a:extLst>
           </p:cNvPr>
@@ -5356,7 +5356,7 @@
           <p:cNvPr id="25" name="">
             <a:extLst xmlns:a="http://schemas.openxmlformats.org/drawingml/2006/main">
               <a:ext uri="{FF2B5EF4-FFF2-40B4-BE49-F238E27FC236}">
-                <a16:creationId xmlns:a16="http://schemas.microsoft.com/office/drawing/2014/main" id="{7F6E2DDF-15E3-4A6C-85D7-CF8770CCEC96}"/>
+                <a16:creationId xmlns:a16="http://schemas.microsoft.com/office/drawing/2014/main" id="{DE9CC6F6-E48B-4279-9C6A-E7C77635043A}"/>
               </a:ext>
             </a:extLst>
           </p:cNvPr>
@@ -5406,7 +5406,7 @@
           <p:cNvPr id="26" name="">
             <a:extLst xmlns:a="http://schemas.openxmlformats.org/drawingml/2006/main">
               <a:ext uri="{FF2B5EF4-FFF2-40B4-BE49-F238E27FC236}">
-                <a16:creationId xmlns:a16="http://schemas.microsoft.com/office/drawing/2014/main" id="{9BD8D197-270D-4D5F-B083-ABF13E449ACB}"/>
+                <a16:creationId xmlns:a16="http://schemas.microsoft.com/office/drawing/2014/main" id="{AE92B573-D5EA-479D-B199-87BC7FD02ADD}"/>
               </a:ext>
             </a:extLst>
           </p:cNvPr>
@@ -5446,7 +5446,7 @@
                   <a:srgbClr val="1D2A3D"/>
                 </a:solidFill>
               </a:rPr>
-              <a:t>380 tickets</a:t>
+              <a:t>429 tickets</a:t>
             </a:r>
           </a:p>
         </p:txBody>
@@ -5456,7 +5456,7 @@
           <p:cNvPr id="27" name="">
             <a:extLst xmlns:a="http://schemas.openxmlformats.org/drawingml/2006/main">
               <a:ext uri="{FF2B5EF4-FFF2-40B4-BE49-F238E27FC236}">
-                <a16:creationId xmlns:a16="http://schemas.microsoft.com/office/drawing/2014/main" id="{90BF3252-A85A-48DD-A37E-6A3C258F3305}"/>
+                <a16:creationId xmlns:a16="http://schemas.microsoft.com/office/drawing/2014/main" id="{7983E9C9-A295-4ED8-BF6A-D229ED9BB8CE}"/>
               </a:ext>
             </a:extLst>
           </p:cNvPr>
@@ -5496,7 +5496,7 @@
                   <a:srgbClr val="1D2A3D"/>
                 </a:solidFill>
               </a:rPr>
-              <a:t>14.5%</a:t>
+              <a:t>15.3%</a:t>
             </a:r>
           </a:p>
         </p:txBody>
@@ -5506,7 +5506,7 @@
           <p:cNvPr id="28" name="">
             <a:extLst xmlns:a="http://schemas.openxmlformats.org/drawingml/2006/main">
               <a:ext uri="{FF2B5EF4-FFF2-40B4-BE49-F238E27FC236}">
-                <a16:creationId xmlns:a16="http://schemas.microsoft.com/office/drawing/2014/main" id="{19020E52-1436-46D1-8F20-935D033C0A58}"/>
+                <a16:creationId xmlns:a16="http://schemas.microsoft.com/office/drawing/2014/main" id="{0CACBB15-7D41-42A6-8145-896F7851ED36}"/>
               </a:ext>
             </a:extLst>
           </p:cNvPr>
@@ -5537,7 +5537,7 @@
           <p:cNvPr id="29" name="">
             <a:extLst xmlns:a="http://schemas.openxmlformats.org/drawingml/2006/main">
               <a:ext uri="{FF2B5EF4-FFF2-40B4-BE49-F238E27FC236}">
-                <a16:creationId xmlns:a16="http://schemas.microsoft.com/office/drawing/2014/main" id="{B3F65F8B-5DD6-4FE3-A82E-36C50583BFA7}"/>
+                <a16:creationId xmlns:a16="http://schemas.microsoft.com/office/drawing/2014/main" id="{00895173-583E-4D1E-8FF2-A5783D0D49CA}"/>
               </a:ext>
             </a:extLst>
           </p:cNvPr>
@@ -5587,7 +5587,7 @@
           <p:cNvPr id="30" name="">
             <a:extLst xmlns:a="http://schemas.openxmlformats.org/drawingml/2006/main">
               <a:ext uri="{FF2B5EF4-FFF2-40B4-BE49-F238E27FC236}">
-                <a16:creationId xmlns:a16="http://schemas.microsoft.com/office/drawing/2014/main" id="{DBB0DBA5-E0FC-497E-876B-B285B3D3CA90}"/>
+                <a16:creationId xmlns:a16="http://schemas.microsoft.com/office/drawing/2014/main" id="{DE234C28-DC25-4A16-8EE4-28A81B6E8359}"/>
               </a:ext>
             </a:extLst>
           </p:cNvPr>
@@ -5627,7 +5627,7 @@
                   <a:srgbClr val="1D2A3D"/>
                 </a:solidFill>
               </a:rPr>
-              <a:t>312 tickets</a:t>
+              <a:t>330 tickets</a:t>
             </a:r>
           </a:p>
         </p:txBody>
@@ -5637,7 +5637,7 @@
           <p:cNvPr id="31" name="">
             <a:extLst xmlns:a="http://schemas.openxmlformats.org/drawingml/2006/main">
               <a:ext uri="{FF2B5EF4-FFF2-40B4-BE49-F238E27FC236}">
-                <a16:creationId xmlns:a16="http://schemas.microsoft.com/office/drawing/2014/main" id="{DD1BF183-269B-4800-B6A8-E7A0047518B4}"/>
+                <a16:creationId xmlns:a16="http://schemas.microsoft.com/office/drawing/2014/main" id="{01C8E034-6EF9-45AF-90BA-085D49CE3545}"/>
               </a:ext>
             </a:extLst>
           </p:cNvPr>
@@ -5677,7 +5677,7 @@
                   <a:srgbClr val="1D2A3D"/>
                 </a:solidFill>
               </a:rPr>
-              <a:t>11.9%</a:t>
+              <a:t>11.7%</a:t>
             </a:r>
           </a:p>
         </p:txBody>
@@ -5687,7 +5687,7 @@
           <p:cNvPr id="32" name="">
             <a:extLst xmlns:a="http://schemas.openxmlformats.org/drawingml/2006/main">
               <a:ext uri="{FF2B5EF4-FFF2-40B4-BE49-F238E27FC236}">
-                <a16:creationId xmlns:a16="http://schemas.microsoft.com/office/drawing/2014/main" id="{3EE06272-81AB-4211-8A78-75358059006D}"/>
+                <a16:creationId xmlns:a16="http://schemas.microsoft.com/office/drawing/2014/main" id="{67E3FF7E-0ACB-4490-8472-144C5513FC00}"/>
               </a:ext>
             </a:extLst>
           </p:cNvPr>
@@ -5728,7 +5728,7 @@
           <p:cNvPr id="33" name="">
             <a:extLst xmlns:a="http://schemas.openxmlformats.org/drawingml/2006/main">
               <a:ext uri="{FF2B5EF4-FFF2-40B4-BE49-F238E27FC236}">
-                <a16:creationId xmlns:a16="http://schemas.microsoft.com/office/drawing/2014/main" id="{D0670D01-18ED-467E-8E48-D40578959491}"/>
+                <a16:creationId xmlns:a16="http://schemas.microsoft.com/office/drawing/2014/main" id="{8EE7AA2F-D620-464B-A370-14B5C09E2836}"/>
               </a:ext>
             </a:extLst>
           </p:cNvPr>
@@ -5778,7 +5778,7 @@
           <p:cNvPr id="34" name="">
             <a:extLst xmlns:a="http://schemas.openxmlformats.org/drawingml/2006/main">
               <a:ext uri="{FF2B5EF4-FFF2-40B4-BE49-F238E27FC236}">
-                <a16:creationId xmlns:a16="http://schemas.microsoft.com/office/drawing/2014/main" id="{41D623E4-051F-4471-B309-ED9ABA20EA84}"/>
+                <a16:creationId xmlns:a16="http://schemas.microsoft.com/office/drawing/2014/main" id="{8ED0054E-6F90-4426-A4C9-91FC371593FD}"/>
               </a:ext>
             </a:extLst>
           </p:cNvPr>
@@ -5818,7 +5818,7 @@
                   <a:srgbClr val="647287"/>
                 </a:solidFill>
               </a:rPr>
-              <a:t>2,174 tickets  /  avg 26.1 days</a:t>
+              <a:t>1,814 tickets  /  avg 27.4 days</a:t>
             </a:r>
           </a:p>
         </p:txBody>
@@ -5835,7 +5835,7 @@
         </p:xfrm>
         <a:graphic xmlns:a="http://schemas.openxmlformats.org/drawingml/2006/main">
           <a:graphicData uri="http://schemas.openxmlformats.org/drawingml/2006/chart">
-            <c:chart xmlns:r="http://schemas.openxmlformats.org/officeDocument/2006/relationships" xmlns:c="http://schemas.openxmlformats.org/drawingml/2006/chart" r:id="Rb1b9b449baa04ea4"/>
+            <c:chart xmlns:r="http://schemas.openxmlformats.org/officeDocument/2006/relationships" xmlns:c="http://schemas.openxmlformats.org/drawingml/2006/chart" r:id="R87cd4e82542949fc"/>
           </a:graphicData>
         </a:graphic>
       </p:graphicFrame>
@@ -5844,7 +5844,7 @@
           <p:cNvPr id="36" name="">
             <a:extLst xmlns:a="http://schemas.openxmlformats.org/drawingml/2006/main">
               <a:ext uri="{FF2B5EF4-FFF2-40B4-BE49-F238E27FC236}">
-                <a16:creationId xmlns:a16="http://schemas.microsoft.com/office/drawing/2014/main" id="{73817B98-7C1D-4F40-B9CB-2C44F261C0E3}"/>
+                <a16:creationId xmlns:a16="http://schemas.microsoft.com/office/drawing/2014/main" id="{F010220C-B2C6-4762-98E3-46D705E5B9B4}"/>
               </a:ext>
             </a:extLst>
           </p:cNvPr>
@@ -5875,7 +5875,7 @@
           <p:cNvPr id="37" name="">
             <a:extLst xmlns:a="http://schemas.openxmlformats.org/drawingml/2006/main">
               <a:ext uri="{FF2B5EF4-FFF2-40B4-BE49-F238E27FC236}">
-                <a16:creationId xmlns:a16="http://schemas.microsoft.com/office/drawing/2014/main" id="{18FE8304-28ED-4243-9808-7CAC1D2D7D34}"/>
+                <a16:creationId xmlns:a16="http://schemas.microsoft.com/office/drawing/2014/main" id="{7DC7D9A2-8A31-4A1C-92C9-E52A65F267EA}"/>
               </a:ext>
             </a:extLst>
           </p:cNvPr>
@@ -5925,7 +5925,7 @@
           <p:cNvPr id="38" name="">
             <a:extLst xmlns:a="http://schemas.openxmlformats.org/drawingml/2006/main">
               <a:ext uri="{FF2B5EF4-FFF2-40B4-BE49-F238E27FC236}">
-                <a16:creationId xmlns:a16="http://schemas.microsoft.com/office/drawing/2014/main" id="{ED86667E-5DB5-46D4-86B2-CF34646F5809}"/>
+                <a16:creationId xmlns:a16="http://schemas.microsoft.com/office/drawing/2014/main" id="{B87756AE-D6CA-4C3A-8B81-330D4B822353}"/>
               </a:ext>
             </a:extLst>
           </p:cNvPr>
@@ -5965,7 +5965,7 @@
                   <a:srgbClr val="1D2A3D"/>
                 </a:solidFill>
               </a:rPr>
-              <a:t>849 tickets</a:t>
+              <a:t>718 tickets</a:t>
             </a:r>
           </a:p>
         </p:txBody>
@@ -5975,7 +5975,7 @@
           <p:cNvPr id="39" name="">
             <a:extLst xmlns:a="http://schemas.openxmlformats.org/drawingml/2006/main">
               <a:ext uri="{FF2B5EF4-FFF2-40B4-BE49-F238E27FC236}">
-                <a16:creationId xmlns:a16="http://schemas.microsoft.com/office/drawing/2014/main" id="{B331E133-D2DA-4454-86E8-CE892383EAE2}"/>
+                <a16:creationId xmlns:a16="http://schemas.microsoft.com/office/drawing/2014/main" id="{2B98BD15-1FB6-4F64-B2E6-467281553BB8}"/>
               </a:ext>
             </a:extLst>
           </p:cNvPr>
@@ -6015,7 +6015,7 @@
                   <a:srgbClr val="1D2A3D"/>
                 </a:solidFill>
               </a:rPr>
-              <a:t>39.1%</a:t>
+              <a:t>39.6%</a:t>
             </a:r>
           </a:p>
         </p:txBody>
@@ -6025,7 +6025,7 @@
           <p:cNvPr id="40" name="">
             <a:extLst xmlns:a="http://schemas.openxmlformats.org/drawingml/2006/main">
               <a:ext uri="{FF2B5EF4-FFF2-40B4-BE49-F238E27FC236}">
-                <a16:creationId xmlns:a16="http://schemas.microsoft.com/office/drawing/2014/main" id="{8F510225-CC14-4F28-B370-3DBB6A16EC8B}"/>
+                <a16:creationId xmlns:a16="http://schemas.microsoft.com/office/drawing/2014/main" id="{B28D6DAF-1D99-421F-9B54-DFDD0C03476C}"/>
               </a:ext>
             </a:extLst>
           </p:cNvPr>
@@ -6056,7 +6056,7 @@
           <p:cNvPr id="41" name="">
             <a:extLst xmlns:a="http://schemas.openxmlformats.org/drawingml/2006/main">
               <a:ext uri="{FF2B5EF4-FFF2-40B4-BE49-F238E27FC236}">
-                <a16:creationId xmlns:a16="http://schemas.microsoft.com/office/drawing/2014/main" id="{7BC5D149-8FD2-4C60-87E2-4716EA8E6219}"/>
+                <a16:creationId xmlns:a16="http://schemas.microsoft.com/office/drawing/2014/main" id="{F7FDDEC3-691F-4C9F-9F7C-5528416E8F21}"/>
               </a:ext>
             </a:extLst>
           </p:cNvPr>
@@ -6106,7 +6106,7 @@
           <p:cNvPr id="42" name="">
             <a:extLst xmlns:a="http://schemas.openxmlformats.org/drawingml/2006/main">
               <a:ext uri="{FF2B5EF4-FFF2-40B4-BE49-F238E27FC236}">
-                <a16:creationId xmlns:a16="http://schemas.microsoft.com/office/drawing/2014/main" id="{251523F7-C378-48EC-AF02-C27AEAC450A1}"/>
+                <a16:creationId xmlns:a16="http://schemas.microsoft.com/office/drawing/2014/main" id="{98726397-3972-4383-9C81-8CA937ABC515}"/>
               </a:ext>
             </a:extLst>
           </p:cNvPr>
@@ -6146,7 +6146,7 @@
                   <a:srgbClr val="1D2A3D"/>
                 </a:solidFill>
               </a:rPr>
-              <a:t>307 tickets</a:t>
+              <a:t>238 tickets</a:t>
             </a:r>
           </a:p>
         </p:txBody>
@@ -6156,7 +6156,7 @@
           <p:cNvPr id="43" name="">
             <a:extLst xmlns:a="http://schemas.openxmlformats.org/drawingml/2006/main">
               <a:ext uri="{FF2B5EF4-FFF2-40B4-BE49-F238E27FC236}">
-                <a16:creationId xmlns:a16="http://schemas.microsoft.com/office/drawing/2014/main" id="{79954268-C694-490D-9068-B403CE65B10E}"/>
+                <a16:creationId xmlns:a16="http://schemas.microsoft.com/office/drawing/2014/main" id="{D45960AC-7A16-4F5F-AB1A-C35A1B7A6472}"/>
               </a:ext>
             </a:extLst>
           </p:cNvPr>
@@ -6196,7 +6196,7 @@
                   <a:srgbClr val="1D2A3D"/>
                 </a:solidFill>
               </a:rPr>
-              <a:t>14.1%</a:t>
+              <a:t>13.1%</a:t>
             </a:r>
           </a:p>
         </p:txBody>
@@ -6206,7 +6206,7 @@
           <p:cNvPr id="44" name="">
             <a:extLst xmlns:a="http://schemas.openxmlformats.org/drawingml/2006/main">
               <a:ext uri="{FF2B5EF4-FFF2-40B4-BE49-F238E27FC236}">
-                <a16:creationId xmlns:a16="http://schemas.microsoft.com/office/drawing/2014/main" id="{95517683-7ACF-40D9-8510-6B06C427073F}"/>
+                <a16:creationId xmlns:a16="http://schemas.microsoft.com/office/drawing/2014/main" id="{DC3EC987-C8A7-4099-95CF-1B3E054FDC51}"/>
               </a:ext>
             </a:extLst>
           </p:cNvPr>
@@ -6237,7 +6237,7 @@
           <p:cNvPr id="45" name="">
             <a:extLst xmlns:a="http://schemas.openxmlformats.org/drawingml/2006/main">
               <a:ext uri="{FF2B5EF4-FFF2-40B4-BE49-F238E27FC236}">
-                <a16:creationId xmlns:a16="http://schemas.microsoft.com/office/drawing/2014/main" id="{1ED75842-CE4C-4C7B-85FE-D44A8D44FC2E}"/>
+                <a16:creationId xmlns:a16="http://schemas.microsoft.com/office/drawing/2014/main" id="{EB916F32-62FB-4506-8074-218E339913A5}"/>
               </a:ext>
             </a:extLst>
           </p:cNvPr>
@@ -6287,7 +6287,7 @@
           <p:cNvPr id="46" name="">
             <a:extLst xmlns:a="http://schemas.openxmlformats.org/drawingml/2006/main">
               <a:ext uri="{FF2B5EF4-FFF2-40B4-BE49-F238E27FC236}">
-                <a16:creationId xmlns:a16="http://schemas.microsoft.com/office/drawing/2014/main" id="{E34223E6-A51A-40A5-BAA8-F6B2A2CB42B2}"/>
+                <a16:creationId xmlns:a16="http://schemas.microsoft.com/office/drawing/2014/main" id="{E8D5C1CE-1362-44CB-AEB3-90CB92E305BB}"/>
               </a:ext>
             </a:extLst>
           </p:cNvPr>
@@ -6327,7 +6327,7 @@
                   <a:srgbClr val="1D2A3D"/>
                 </a:solidFill>
               </a:rPr>
-              <a:t>191 tickets</a:t>
+              <a:t>150 tickets</a:t>
             </a:r>
           </a:p>
         </p:txBody>
@@ -6337,7 +6337,7 @@
           <p:cNvPr id="47" name="">
             <a:extLst xmlns:a="http://schemas.openxmlformats.org/drawingml/2006/main">
               <a:ext uri="{FF2B5EF4-FFF2-40B4-BE49-F238E27FC236}">
-                <a16:creationId xmlns:a16="http://schemas.microsoft.com/office/drawing/2014/main" id="{A536220D-85E4-4C21-BBE9-587BD95FC902}"/>
+                <a16:creationId xmlns:a16="http://schemas.microsoft.com/office/drawing/2014/main" id="{56061A18-9C5D-486C-AB9E-955E88C2397B}"/>
               </a:ext>
             </a:extLst>
           </p:cNvPr>
@@ -6377,7 +6377,7 @@
                   <a:srgbClr val="1D2A3D"/>
                 </a:solidFill>
               </a:rPr>
-              <a:t>8.8%</a:t>
+              <a:t>8.3%</a:t>
             </a:r>
           </a:p>
         </p:txBody>
@@ -6387,7 +6387,7 @@
           <p:cNvPr id="48" name="">
             <a:extLst xmlns:a="http://schemas.openxmlformats.org/drawingml/2006/main">
               <a:ext uri="{FF2B5EF4-FFF2-40B4-BE49-F238E27FC236}">
-                <a16:creationId xmlns:a16="http://schemas.microsoft.com/office/drawing/2014/main" id="{3E6802C8-CC29-433D-AD57-487BB192557E}"/>
+                <a16:creationId xmlns:a16="http://schemas.microsoft.com/office/drawing/2014/main" id="{36A62820-3256-44F7-ACB4-248055ECA686}"/>
               </a:ext>
             </a:extLst>
           </p:cNvPr>
@@ -6418,7 +6418,7 @@
           <p:cNvPr id="49" name="">
             <a:extLst xmlns:a="http://schemas.openxmlformats.org/drawingml/2006/main">
               <a:ext uri="{FF2B5EF4-FFF2-40B4-BE49-F238E27FC236}">
-                <a16:creationId xmlns:a16="http://schemas.microsoft.com/office/drawing/2014/main" id="{7C6DC717-4FB3-470D-B875-877FE0DABBEB}"/>
+                <a16:creationId xmlns:a16="http://schemas.microsoft.com/office/drawing/2014/main" id="{75AD937F-674C-4E69-B3ED-0FCACFC1174F}"/>
               </a:ext>
             </a:extLst>
           </p:cNvPr>
@@ -6468,7 +6468,7 @@
           <p:cNvPr id="50" name="">
             <a:extLst xmlns:a="http://schemas.openxmlformats.org/drawingml/2006/main">
               <a:ext uri="{FF2B5EF4-FFF2-40B4-BE49-F238E27FC236}">
-                <a16:creationId xmlns:a16="http://schemas.microsoft.com/office/drawing/2014/main" id="{0C2D7F18-100C-4738-80E8-E22F86D4982F}"/>
+                <a16:creationId xmlns:a16="http://schemas.microsoft.com/office/drawing/2014/main" id="{096D713C-1FA3-4A1D-B004-F93D805908C5}"/>
               </a:ext>
             </a:extLst>
           </p:cNvPr>
@@ -6508,7 +6508,7 @@
                   <a:srgbClr val="1D2A3D"/>
                 </a:solidFill>
               </a:rPr>
-              <a:t>176 tickets</a:t>
+              <a:t>143 tickets</a:t>
             </a:r>
           </a:p>
         </p:txBody>
@@ -6518,7 +6518,7 @@
           <p:cNvPr id="51" name="">
             <a:extLst xmlns:a="http://schemas.openxmlformats.org/drawingml/2006/main">
               <a:ext uri="{FF2B5EF4-FFF2-40B4-BE49-F238E27FC236}">
-                <a16:creationId xmlns:a16="http://schemas.microsoft.com/office/drawing/2014/main" id="{0626B10E-1A4A-425E-AA1A-709455109E99}"/>
+                <a16:creationId xmlns:a16="http://schemas.microsoft.com/office/drawing/2014/main" id="{E9410038-F7D9-4EE0-BB39-5A3E6D5138B5}"/>
               </a:ext>
             </a:extLst>
           </p:cNvPr>
@@ -6558,7 +6558,7 @@
                   <a:srgbClr val="1D2A3D"/>
                 </a:solidFill>
               </a:rPr>
-              <a:t>8.1%</a:t>
+              <a:t>7.9%</a:t>
             </a:r>
           </a:p>
         </p:txBody>
@@ -6568,7 +6568,7 @@
           <p:cNvPr id="52" name="">
             <a:extLst xmlns:a="http://schemas.openxmlformats.org/drawingml/2006/main">
               <a:ext uri="{FF2B5EF4-FFF2-40B4-BE49-F238E27FC236}">
-                <a16:creationId xmlns:a16="http://schemas.microsoft.com/office/drawing/2014/main" id="{944322A9-BCA3-425F-96D0-64914D79D4DC}"/>
+                <a16:creationId xmlns:a16="http://schemas.microsoft.com/office/drawing/2014/main" id="{1804AF4F-33C9-4DDF-9834-20645FF2573C}"/>
               </a:ext>
             </a:extLst>
           </p:cNvPr>
@@ -6599,7 +6599,7 @@
           <p:cNvPr id="53" name="">
             <a:extLst xmlns:a="http://schemas.openxmlformats.org/drawingml/2006/main">
               <a:ext uri="{FF2B5EF4-FFF2-40B4-BE49-F238E27FC236}">
-                <a16:creationId xmlns:a16="http://schemas.microsoft.com/office/drawing/2014/main" id="{22B174E1-E1AC-4E88-BBFF-EBBBDFE14C30}"/>
+                <a16:creationId xmlns:a16="http://schemas.microsoft.com/office/drawing/2014/main" id="{B0CCACAB-C33F-40DF-A4AB-8E94C3DB50E3}"/>
               </a:ext>
             </a:extLst>
           </p:cNvPr>
@@ -6649,7 +6649,7 @@
           <p:cNvPr id="54" name="">
             <a:extLst xmlns:a="http://schemas.openxmlformats.org/drawingml/2006/main">
               <a:ext uri="{FF2B5EF4-FFF2-40B4-BE49-F238E27FC236}">
-                <a16:creationId xmlns:a16="http://schemas.microsoft.com/office/drawing/2014/main" id="{6CF16949-C510-45CF-8BCD-CBE1CBB3FA9E}"/>
+                <a16:creationId xmlns:a16="http://schemas.microsoft.com/office/drawing/2014/main" id="{94C034F3-65FD-4FCE-985E-C4D9028289E8}"/>
               </a:ext>
             </a:extLst>
           </p:cNvPr>
@@ -6689,7 +6689,7 @@
                   <a:srgbClr val="1D2A3D"/>
                 </a:solidFill>
               </a:rPr>
-              <a:t>356 tickets</a:t>
+              <a:t>291 tickets</a:t>
             </a:r>
           </a:p>
         </p:txBody>
@@ -6699,7 +6699,7 @@
           <p:cNvPr id="55" name="">
             <a:extLst xmlns:a="http://schemas.openxmlformats.org/drawingml/2006/main">
               <a:ext uri="{FF2B5EF4-FFF2-40B4-BE49-F238E27FC236}">
-                <a16:creationId xmlns:a16="http://schemas.microsoft.com/office/drawing/2014/main" id="{230870E6-08AA-4A56-97F0-B51F4F6FF2C0}"/>
+                <a16:creationId xmlns:a16="http://schemas.microsoft.com/office/drawing/2014/main" id="{4DD5D6E8-6BEA-4C4F-9B80-C2EE7F9568CF}"/>
               </a:ext>
             </a:extLst>
           </p:cNvPr>
@@ -6739,7 +6739,7 @@
                   <a:srgbClr val="1D2A3D"/>
                 </a:solidFill>
               </a:rPr>
-              <a:t>16.4%</a:t>
+              <a:t>16.0%</a:t>
             </a:r>
           </a:p>
         </p:txBody>
@@ -6749,7 +6749,7 @@
           <p:cNvPr id="56" name="">
             <a:extLst xmlns:a="http://schemas.openxmlformats.org/drawingml/2006/main">
               <a:ext uri="{FF2B5EF4-FFF2-40B4-BE49-F238E27FC236}">
-                <a16:creationId xmlns:a16="http://schemas.microsoft.com/office/drawing/2014/main" id="{5940BEA4-845D-4578-A6CA-AAADDEA38590}"/>
+                <a16:creationId xmlns:a16="http://schemas.microsoft.com/office/drawing/2014/main" id="{654FF6FD-B992-4FA8-8D75-99347F8548D6}"/>
               </a:ext>
             </a:extLst>
           </p:cNvPr>
@@ -6780,7 +6780,7 @@
           <p:cNvPr id="57" name="">
             <a:extLst xmlns:a="http://schemas.openxmlformats.org/drawingml/2006/main">
               <a:ext uri="{FF2B5EF4-FFF2-40B4-BE49-F238E27FC236}">
-                <a16:creationId xmlns:a16="http://schemas.microsoft.com/office/drawing/2014/main" id="{99B973D6-CC61-4268-8963-F3CA35133087}"/>
+                <a16:creationId xmlns:a16="http://schemas.microsoft.com/office/drawing/2014/main" id="{0CFEE887-F926-4C94-9328-82EF3FD5C7A2}"/>
               </a:ext>
             </a:extLst>
           </p:cNvPr>
@@ -6830,7 +6830,7 @@
           <p:cNvPr id="58" name="">
             <a:extLst xmlns:a="http://schemas.openxmlformats.org/drawingml/2006/main">
               <a:ext uri="{FF2B5EF4-FFF2-40B4-BE49-F238E27FC236}">
-                <a16:creationId xmlns:a16="http://schemas.microsoft.com/office/drawing/2014/main" id="{929702D5-21DC-4BDF-904C-01EB02577010}"/>
+                <a16:creationId xmlns:a16="http://schemas.microsoft.com/office/drawing/2014/main" id="{979093D6-E3E1-43A5-AA15-01969E49C310}"/>
               </a:ext>
             </a:extLst>
           </p:cNvPr>
@@ -6870,7 +6870,7 @@
                   <a:srgbClr val="1D2A3D"/>
                 </a:solidFill>
               </a:rPr>
-              <a:t>295 tickets</a:t>
+              <a:t>274 tickets</a:t>
             </a:r>
           </a:p>
         </p:txBody>
@@ -6880,7 +6880,7 @@
           <p:cNvPr id="59" name="">
             <a:extLst xmlns:a="http://schemas.openxmlformats.org/drawingml/2006/main">
               <a:ext uri="{FF2B5EF4-FFF2-40B4-BE49-F238E27FC236}">
-                <a16:creationId xmlns:a16="http://schemas.microsoft.com/office/drawing/2014/main" id="{AAD577E2-8A44-401B-A6A9-963C986C1E9E}"/>
+                <a16:creationId xmlns:a16="http://schemas.microsoft.com/office/drawing/2014/main" id="{8B432CE6-6029-4E9E-BC4D-F60425C2A881}"/>
               </a:ext>
             </a:extLst>
           </p:cNvPr>
@@ -6920,7 +6920,7 @@
                   <a:srgbClr val="1D2A3D"/>
                 </a:solidFill>
               </a:rPr>
-              <a:t>13.6%</a:t>
+              <a:t>15.1%</a:t>
             </a:r>
           </a:p>
         </p:txBody>
@@ -6930,7 +6930,7 @@
           <p:cNvPr id="60" name="">
             <a:extLst xmlns:a="http://schemas.openxmlformats.org/drawingml/2006/main">
               <a:ext uri="{FF2B5EF4-FFF2-40B4-BE49-F238E27FC236}">
-                <a16:creationId xmlns:a16="http://schemas.microsoft.com/office/drawing/2014/main" id="{8498A9CD-53B7-4A53-BB75-46B8841C3A47}"/>
+                <a16:creationId xmlns:a16="http://schemas.microsoft.com/office/drawing/2014/main" id="{6A7C7152-2C5C-417D-A790-E7DB27F8A593}"/>
               </a:ext>
             </a:extLst>
           </p:cNvPr>
@@ -6971,7 +6971,7 @@
           <p:cNvPr id="61" name="">
             <a:extLst xmlns:a="http://schemas.openxmlformats.org/drawingml/2006/main">
               <a:ext uri="{FF2B5EF4-FFF2-40B4-BE49-F238E27FC236}">
-                <a16:creationId xmlns:a16="http://schemas.microsoft.com/office/drawing/2014/main" id="{E999D8C9-ED18-4477-B4DB-AD171E230735}"/>
+                <a16:creationId xmlns:a16="http://schemas.microsoft.com/office/drawing/2014/main" id="{D339A8D5-24A2-41A8-8B2D-C97F44DB09EE}"/>
               </a:ext>
             </a:extLst>
           </p:cNvPr>
@@ -7021,7 +7021,7 @@
           <p:cNvPr id="62" name="">
             <a:extLst xmlns:a="http://schemas.openxmlformats.org/drawingml/2006/main">
               <a:ext uri="{FF2B5EF4-FFF2-40B4-BE49-F238E27FC236}">
-                <a16:creationId xmlns:a16="http://schemas.microsoft.com/office/drawing/2014/main" id="{B0359A5A-8373-4040-8AB7-14FF2DF1748C}"/>
+                <a16:creationId xmlns:a16="http://schemas.microsoft.com/office/drawing/2014/main" id="{07FB0276-4D74-424A-AB6C-136FA74881F5}"/>
               </a:ext>
             </a:extLst>
           </p:cNvPr>
@@ -7061,7 +7061,7 @@
                   <a:srgbClr val="647287"/>
                 </a:solidFill>
               </a:rPr>
-              <a:t>357 tickets  /  avg 34.0 days</a:t>
+              <a:t>209 tickets  /  avg 36.9 days</a:t>
             </a:r>
           </a:p>
         </p:txBody>
@@ -7078,7 +7078,7 @@
         </p:xfrm>
         <a:graphic xmlns:a="http://schemas.openxmlformats.org/drawingml/2006/main">
           <a:graphicData uri="http://schemas.openxmlformats.org/drawingml/2006/chart">
-            <c:chart xmlns:r="http://schemas.openxmlformats.org/officeDocument/2006/relationships" xmlns:c="http://schemas.openxmlformats.org/drawingml/2006/chart" r:id="Re7fa05b884954f06"/>
+            <c:chart xmlns:r="http://schemas.openxmlformats.org/officeDocument/2006/relationships" xmlns:c="http://schemas.openxmlformats.org/drawingml/2006/chart" r:id="R7aae8a0ae3674be0"/>
           </a:graphicData>
         </a:graphic>
       </p:graphicFrame>
@@ -7087,7 +7087,7 @@
           <p:cNvPr id="64" name="">
             <a:extLst xmlns:a="http://schemas.openxmlformats.org/drawingml/2006/main">
               <a:ext uri="{FF2B5EF4-FFF2-40B4-BE49-F238E27FC236}">
-                <a16:creationId xmlns:a16="http://schemas.microsoft.com/office/drawing/2014/main" id="{BAB6DA6F-0E4F-4429-85FF-A87610D2F7F1}"/>
+                <a16:creationId xmlns:a16="http://schemas.microsoft.com/office/drawing/2014/main" id="{B7A6D00B-E15E-4F77-B8A4-53E272753896}"/>
               </a:ext>
             </a:extLst>
           </p:cNvPr>
@@ -7118,7 +7118,7 @@
           <p:cNvPr id="65" name="">
             <a:extLst xmlns:a="http://schemas.openxmlformats.org/drawingml/2006/main">
               <a:ext uri="{FF2B5EF4-FFF2-40B4-BE49-F238E27FC236}">
-                <a16:creationId xmlns:a16="http://schemas.microsoft.com/office/drawing/2014/main" id="{DC5A70A9-C82F-4C0E-97C9-7A704C0C8ADA}"/>
+                <a16:creationId xmlns:a16="http://schemas.microsoft.com/office/drawing/2014/main" id="{E86FCE77-1C09-4ADC-BA34-937B926C6DEB}"/>
               </a:ext>
             </a:extLst>
           </p:cNvPr>
@@ -7168,7 +7168,7 @@
           <p:cNvPr id="66" name="">
             <a:extLst xmlns:a="http://schemas.openxmlformats.org/drawingml/2006/main">
               <a:ext uri="{FF2B5EF4-FFF2-40B4-BE49-F238E27FC236}">
-                <a16:creationId xmlns:a16="http://schemas.microsoft.com/office/drawing/2014/main" id="{D3F4AC3B-CAC8-4B21-A571-65D99B84C378}"/>
+                <a16:creationId xmlns:a16="http://schemas.microsoft.com/office/drawing/2014/main" id="{5DB6ADFF-1819-4C68-B339-D53547A573B2}"/>
               </a:ext>
             </a:extLst>
           </p:cNvPr>
@@ -7208,7 +7208,7 @@
                   <a:srgbClr val="1D2A3D"/>
                 </a:solidFill>
               </a:rPr>
-              <a:t>139 tickets</a:t>
+              <a:t>78 tickets</a:t>
             </a:r>
           </a:p>
         </p:txBody>
@@ -7218,7 +7218,7 @@
           <p:cNvPr id="67" name="">
             <a:extLst xmlns:a="http://schemas.openxmlformats.org/drawingml/2006/main">
               <a:ext uri="{FF2B5EF4-FFF2-40B4-BE49-F238E27FC236}">
-                <a16:creationId xmlns:a16="http://schemas.microsoft.com/office/drawing/2014/main" id="{C0C61CAD-B297-4C53-B9A6-4BE40AC3CB30}"/>
+                <a16:creationId xmlns:a16="http://schemas.microsoft.com/office/drawing/2014/main" id="{08471F0E-A71A-442F-9E2A-278D2B8A9CB3}"/>
               </a:ext>
             </a:extLst>
           </p:cNvPr>
@@ -7258,7 +7258,7 @@
                   <a:srgbClr val="1D2A3D"/>
                 </a:solidFill>
               </a:rPr>
-              <a:t>38.9%</a:t>
+              <a:t>37.3%</a:t>
             </a:r>
           </a:p>
         </p:txBody>
@@ -7268,7 +7268,7 @@
           <p:cNvPr id="68" name="">
             <a:extLst xmlns:a="http://schemas.openxmlformats.org/drawingml/2006/main">
               <a:ext uri="{FF2B5EF4-FFF2-40B4-BE49-F238E27FC236}">
-                <a16:creationId xmlns:a16="http://schemas.microsoft.com/office/drawing/2014/main" id="{11175EF5-7B17-44E2-966A-7C0BC5583635}"/>
+                <a16:creationId xmlns:a16="http://schemas.microsoft.com/office/drawing/2014/main" id="{59346820-8F4C-4B34-AC5F-023E9BC70E6D}"/>
               </a:ext>
             </a:extLst>
           </p:cNvPr>
@@ -7299,7 +7299,7 @@
           <p:cNvPr id="69" name="">
             <a:extLst xmlns:a="http://schemas.openxmlformats.org/drawingml/2006/main">
               <a:ext uri="{FF2B5EF4-FFF2-40B4-BE49-F238E27FC236}">
-                <a16:creationId xmlns:a16="http://schemas.microsoft.com/office/drawing/2014/main" id="{A0596240-A9CF-4D99-8F9E-ED0FB2849F6A}"/>
+                <a16:creationId xmlns:a16="http://schemas.microsoft.com/office/drawing/2014/main" id="{8C46E0D4-C3BA-4276-9B9D-DEF2F188E48A}"/>
               </a:ext>
             </a:extLst>
           </p:cNvPr>
@@ -7349,7 +7349,7 @@
           <p:cNvPr id="70" name="">
             <a:extLst xmlns:a="http://schemas.openxmlformats.org/drawingml/2006/main">
               <a:ext uri="{FF2B5EF4-FFF2-40B4-BE49-F238E27FC236}">
-                <a16:creationId xmlns:a16="http://schemas.microsoft.com/office/drawing/2014/main" id="{08EAA16B-C135-4CAD-AC24-DB96C59E7CF6}"/>
+                <a16:creationId xmlns:a16="http://schemas.microsoft.com/office/drawing/2014/main" id="{B8C7B68F-EAD2-41F4-AAF7-1CB8961B54E6}"/>
               </a:ext>
             </a:extLst>
           </p:cNvPr>
@@ -7389,7 +7389,7 @@
                   <a:srgbClr val="1D2A3D"/>
                 </a:solidFill>
               </a:rPr>
-              <a:t>35 tickets</a:t>
+              <a:t>22 tickets</a:t>
             </a:r>
           </a:p>
         </p:txBody>
@@ -7399,7 +7399,7 @@
           <p:cNvPr id="71" name="">
             <a:extLst xmlns:a="http://schemas.openxmlformats.org/drawingml/2006/main">
               <a:ext uri="{FF2B5EF4-FFF2-40B4-BE49-F238E27FC236}">
-                <a16:creationId xmlns:a16="http://schemas.microsoft.com/office/drawing/2014/main" id="{82DDB580-8C73-4DCF-AADE-386D1333514E}"/>
+                <a16:creationId xmlns:a16="http://schemas.microsoft.com/office/drawing/2014/main" id="{E9C465BA-2BDD-4382-AA02-07E11533ED21}"/>
               </a:ext>
             </a:extLst>
           </p:cNvPr>
@@ -7439,7 +7439,7 @@
                   <a:srgbClr val="1D2A3D"/>
                 </a:solidFill>
               </a:rPr>
-              <a:t>9.8%</a:t>
+              <a:t>10.5%</a:t>
             </a:r>
           </a:p>
         </p:txBody>
@@ -7449,7 +7449,7 @@
           <p:cNvPr id="72" name="">
             <a:extLst xmlns:a="http://schemas.openxmlformats.org/drawingml/2006/main">
               <a:ext uri="{FF2B5EF4-FFF2-40B4-BE49-F238E27FC236}">
-                <a16:creationId xmlns:a16="http://schemas.microsoft.com/office/drawing/2014/main" id="{A3D47704-D94A-4F17-8CCD-6AB945A141B3}"/>
+                <a16:creationId xmlns:a16="http://schemas.microsoft.com/office/drawing/2014/main" id="{E66153F6-4AD0-4F6E-8D62-2D65995EF728}"/>
               </a:ext>
             </a:extLst>
           </p:cNvPr>
@@ -7480,7 +7480,7 @@
           <p:cNvPr id="73" name="">
             <a:extLst xmlns:a="http://schemas.openxmlformats.org/drawingml/2006/main">
               <a:ext uri="{FF2B5EF4-FFF2-40B4-BE49-F238E27FC236}">
-                <a16:creationId xmlns:a16="http://schemas.microsoft.com/office/drawing/2014/main" id="{A3431812-C098-4AAE-9EB8-C59BC7166786}"/>
+                <a16:creationId xmlns:a16="http://schemas.microsoft.com/office/drawing/2014/main" id="{7FB76586-D6CE-4D69-8085-F92A05D3E31A}"/>
               </a:ext>
             </a:extLst>
           </p:cNvPr>
@@ -7530,7 +7530,7 @@
           <p:cNvPr id="74" name="">
             <a:extLst xmlns:a="http://schemas.openxmlformats.org/drawingml/2006/main">
               <a:ext uri="{FF2B5EF4-FFF2-40B4-BE49-F238E27FC236}">
-                <a16:creationId xmlns:a16="http://schemas.microsoft.com/office/drawing/2014/main" id="{82D05892-13A8-4EEF-86E2-14E4135C0909}"/>
+                <a16:creationId xmlns:a16="http://schemas.microsoft.com/office/drawing/2014/main" id="{A367010D-134B-4D09-9180-9951AD7941E8}"/>
               </a:ext>
             </a:extLst>
           </p:cNvPr>
@@ -7570,7 +7570,7 @@
                   <a:srgbClr val="1D2A3D"/>
                 </a:solidFill>
               </a:rPr>
-              <a:t>18 tickets</a:t>
+              <a:t>9 tickets</a:t>
             </a:r>
           </a:p>
         </p:txBody>
@@ -7580,7 +7580,7 @@
           <p:cNvPr id="75" name="">
             <a:extLst xmlns:a="http://schemas.openxmlformats.org/drawingml/2006/main">
               <a:ext uri="{FF2B5EF4-FFF2-40B4-BE49-F238E27FC236}">
-                <a16:creationId xmlns:a16="http://schemas.microsoft.com/office/drawing/2014/main" id="{E8F00E01-15B0-409F-B621-DE13F4D38B02}"/>
+                <a16:creationId xmlns:a16="http://schemas.microsoft.com/office/drawing/2014/main" id="{71F0BEDD-44BF-450C-B5E7-9F54C1A75D5F}"/>
               </a:ext>
             </a:extLst>
           </p:cNvPr>
@@ -7620,7 +7620,7 @@
                   <a:srgbClr val="1D2A3D"/>
                 </a:solidFill>
               </a:rPr>
-              <a:t>5.0%</a:t>
+              <a:t>4.3%</a:t>
             </a:r>
           </a:p>
         </p:txBody>
@@ -7630,7 +7630,7 @@
           <p:cNvPr id="76" name="">
             <a:extLst xmlns:a="http://schemas.openxmlformats.org/drawingml/2006/main">
               <a:ext uri="{FF2B5EF4-FFF2-40B4-BE49-F238E27FC236}">
-                <a16:creationId xmlns:a16="http://schemas.microsoft.com/office/drawing/2014/main" id="{C6BBF034-2EE0-448A-A3FA-E0B83DFD4B51}"/>
+                <a16:creationId xmlns:a16="http://schemas.microsoft.com/office/drawing/2014/main" id="{860C1EAF-54A4-4D01-B022-CB99184DF2B1}"/>
               </a:ext>
             </a:extLst>
           </p:cNvPr>
@@ -7661,7 +7661,7 @@
           <p:cNvPr id="77" name="">
             <a:extLst xmlns:a="http://schemas.openxmlformats.org/drawingml/2006/main">
               <a:ext uri="{FF2B5EF4-FFF2-40B4-BE49-F238E27FC236}">
-                <a16:creationId xmlns:a16="http://schemas.microsoft.com/office/drawing/2014/main" id="{585B4479-49D4-490A-9015-7A17DC55A6D4}"/>
+                <a16:creationId xmlns:a16="http://schemas.microsoft.com/office/drawing/2014/main" id="{7B2B95BC-71F5-4648-953D-66227119F832}"/>
               </a:ext>
             </a:extLst>
           </p:cNvPr>
@@ -7711,7 +7711,7 @@
           <p:cNvPr id="78" name="">
             <a:extLst xmlns:a="http://schemas.openxmlformats.org/drawingml/2006/main">
               <a:ext uri="{FF2B5EF4-FFF2-40B4-BE49-F238E27FC236}">
-                <a16:creationId xmlns:a16="http://schemas.microsoft.com/office/drawing/2014/main" id="{6CC7C470-C55F-4903-AA64-8D0CED7519E6}"/>
+                <a16:creationId xmlns:a16="http://schemas.microsoft.com/office/drawing/2014/main" id="{B59DC4AA-9E92-43E8-A4EF-4A8C6B375F16}"/>
               </a:ext>
             </a:extLst>
           </p:cNvPr>
@@ -7751,7 +7751,7 @@
                   <a:srgbClr val="1D2A3D"/>
                 </a:solidFill>
               </a:rPr>
-              <a:t>27 tickets</a:t>
+              <a:t>13 tickets</a:t>
             </a:r>
           </a:p>
         </p:txBody>
@@ -7761,7 +7761,7 @@
           <p:cNvPr id="79" name="">
             <a:extLst xmlns:a="http://schemas.openxmlformats.org/drawingml/2006/main">
               <a:ext uri="{FF2B5EF4-FFF2-40B4-BE49-F238E27FC236}">
-                <a16:creationId xmlns:a16="http://schemas.microsoft.com/office/drawing/2014/main" id="{F23C7DAD-8643-46A5-A3B2-91244FD64572}"/>
+                <a16:creationId xmlns:a16="http://schemas.microsoft.com/office/drawing/2014/main" id="{CF145F19-F2DA-4575-82DE-9EF5D3976AC0}"/>
               </a:ext>
             </a:extLst>
           </p:cNvPr>
@@ -7801,7 +7801,7 @@
                   <a:srgbClr val="1D2A3D"/>
                 </a:solidFill>
               </a:rPr>
-              <a:t>7.6%</a:t>
+              <a:t>6.2%</a:t>
             </a:r>
           </a:p>
         </p:txBody>
@@ -7811,7 +7811,7 @@
           <p:cNvPr id="80" name="">
             <a:extLst xmlns:a="http://schemas.openxmlformats.org/drawingml/2006/main">
               <a:ext uri="{FF2B5EF4-FFF2-40B4-BE49-F238E27FC236}">
-                <a16:creationId xmlns:a16="http://schemas.microsoft.com/office/drawing/2014/main" id="{8BCAD459-6813-4037-ABB4-4FE56F8D626E}"/>
+                <a16:creationId xmlns:a16="http://schemas.microsoft.com/office/drawing/2014/main" id="{1F874483-F224-4F40-9FBD-322CF1F4E024}"/>
               </a:ext>
             </a:extLst>
           </p:cNvPr>
@@ -7842,7 +7842,7 @@
           <p:cNvPr id="81" name="">
             <a:extLst xmlns:a="http://schemas.openxmlformats.org/drawingml/2006/main">
               <a:ext uri="{FF2B5EF4-FFF2-40B4-BE49-F238E27FC236}">
-                <a16:creationId xmlns:a16="http://schemas.microsoft.com/office/drawing/2014/main" id="{F8F8F4D6-8BA4-49A2-8696-F6C724836699}"/>
+                <a16:creationId xmlns:a16="http://schemas.microsoft.com/office/drawing/2014/main" id="{D142FE1F-063B-49D2-A074-973BA5554A85}"/>
               </a:ext>
             </a:extLst>
           </p:cNvPr>
@@ -7892,7 +7892,7 @@
           <p:cNvPr id="82" name="">
             <a:extLst xmlns:a="http://schemas.openxmlformats.org/drawingml/2006/main">
               <a:ext uri="{FF2B5EF4-FFF2-40B4-BE49-F238E27FC236}">
-                <a16:creationId xmlns:a16="http://schemas.microsoft.com/office/drawing/2014/main" id="{F2152D0C-B6AC-40E4-B64B-DC30D9CB28CF}"/>
+                <a16:creationId xmlns:a16="http://schemas.microsoft.com/office/drawing/2014/main" id="{59667427-06AF-4473-BAE9-C8B105074414}"/>
               </a:ext>
             </a:extLst>
           </p:cNvPr>
@@ -7932,7 +7932,7 @@
                   <a:srgbClr val="1D2A3D"/>
                 </a:solidFill>
               </a:rPr>
-              <a:t>61 tickets</a:t>
+              <a:t>35 tickets</a:t>
             </a:r>
           </a:p>
         </p:txBody>
@@ -7942,7 +7942,7 @@
           <p:cNvPr id="83" name="">
             <a:extLst xmlns:a="http://schemas.openxmlformats.org/drawingml/2006/main">
               <a:ext uri="{FF2B5EF4-FFF2-40B4-BE49-F238E27FC236}">
-                <a16:creationId xmlns:a16="http://schemas.microsoft.com/office/drawing/2014/main" id="{82D8C6EC-1132-4C75-B9F2-EDCA7706F262}"/>
+                <a16:creationId xmlns:a16="http://schemas.microsoft.com/office/drawing/2014/main" id="{4C0FBB3A-FD02-4BEB-9DB1-ADE795F808BA}"/>
               </a:ext>
             </a:extLst>
           </p:cNvPr>
@@ -7982,7 +7982,7 @@
                   <a:srgbClr val="1D2A3D"/>
                 </a:solidFill>
               </a:rPr>
-              <a:t>17.1%</a:t>
+              <a:t>16.7%</a:t>
             </a:r>
           </a:p>
         </p:txBody>
@@ -7992,7 +7992,7 @@
           <p:cNvPr id="84" name="">
             <a:extLst xmlns:a="http://schemas.openxmlformats.org/drawingml/2006/main">
               <a:ext uri="{FF2B5EF4-FFF2-40B4-BE49-F238E27FC236}">
-                <a16:creationId xmlns:a16="http://schemas.microsoft.com/office/drawing/2014/main" id="{237C5BA4-4733-4152-B3AC-EB5A0FB6A70F}"/>
+                <a16:creationId xmlns:a16="http://schemas.microsoft.com/office/drawing/2014/main" id="{BFC58E6D-56AF-4954-BA3A-2F5D45631C55}"/>
               </a:ext>
             </a:extLst>
           </p:cNvPr>
@@ -8023,7 +8023,7 @@
           <p:cNvPr id="85" name="">
             <a:extLst xmlns:a="http://schemas.openxmlformats.org/drawingml/2006/main">
               <a:ext uri="{FF2B5EF4-FFF2-40B4-BE49-F238E27FC236}">
-                <a16:creationId xmlns:a16="http://schemas.microsoft.com/office/drawing/2014/main" id="{3B3DE86C-56A1-48ED-8FF3-0B130765A902}"/>
+                <a16:creationId xmlns:a16="http://schemas.microsoft.com/office/drawing/2014/main" id="{BFD80E99-BCAE-4CAD-B4C6-0280446C5CA2}"/>
               </a:ext>
             </a:extLst>
           </p:cNvPr>
@@ -8073,7 +8073,7 @@
           <p:cNvPr id="86" name="">
             <a:extLst xmlns:a="http://schemas.openxmlformats.org/drawingml/2006/main">
               <a:ext uri="{FF2B5EF4-FFF2-40B4-BE49-F238E27FC236}">
-                <a16:creationId xmlns:a16="http://schemas.microsoft.com/office/drawing/2014/main" id="{E60D491E-68E8-454B-AD34-17FB22AC3198}"/>
+                <a16:creationId xmlns:a16="http://schemas.microsoft.com/office/drawing/2014/main" id="{5F72DDDB-587B-4D04-ABD7-CB7A72F93A87}"/>
               </a:ext>
             </a:extLst>
           </p:cNvPr>
@@ -8113,7 +8113,7 @@
                   <a:srgbClr val="1D2A3D"/>
                 </a:solidFill>
               </a:rPr>
-              <a:t>77 tickets</a:t>
+              <a:t>52 tickets</a:t>
             </a:r>
           </a:p>
         </p:txBody>
@@ -8123,7 +8123,7 @@
           <p:cNvPr id="87" name="">
             <a:extLst xmlns:a="http://schemas.openxmlformats.org/drawingml/2006/main">
               <a:ext uri="{FF2B5EF4-FFF2-40B4-BE49-F238E27FC236}">
-                <a16:creationId xmlns:a16="http://schemas.microsoft.com/office/drawing/2014/main" id="{9FDF2919-A6AC-4829-A09B-1D9EF3F701A9}"/>
+                <a16:creationId xmlns:a16="http://schemas.microsoft.com/office/drawing/2014/main" id="{96DC1277-157D-4BF1-ADB1-13BFFDE61B5E}"/>
               </a:ext>
             </a:extLst>
           </p:cNvPr>
@@ -8163,7 +8163,7 @@
                   <a:srgbClr val="1D2A3D"/>
                 </a:solidFill>
               </a:rPr>
-              <a:t>21.6%</a:t>
+              <a:t>24.9%</a:t>
             </a:r>
           </a:p>
         </p:txBody>
@@ -8173,7 +8173,7 @@
           <p:cNvPr id="88" name="">
             <a:extLst xmlns:a="http://schemas.openxmlformats.org/drawingml/2006/main">
               <a:ext uri="{FF2B5EF4-FFF2-40B4-BE49-F238E27FC236}">
-                <a16:creationId xmlns:a16="http://schemas.microsoft.com/office/drawing/2014/main" id="{818D86B9-E93E-42F2-A79B-8DE79CB9FEA9}"/>
+                <a16:creationId xmlns:a16="http://schemas.microsoft.com/office/drawing/2014/main" id="{064B386F-79BA-494C-B3F2-9F57ECEB0537}"/>
               </a:ext>
             </a:extLst>
           </p:cNvPr>
@@ -8214,7 +8214,7 @@
           <p:cNvPr id="89" name="">
             <a:extLst xmlns:a="http://schemas.openxmlformats.org/drawingml/2006/main">
               <a:ext uri="{FF2B5EF4-FFF2-40B4-BE49-F238E27FC236}">
-                <a16:creationId xmlns:a16="http://schemas.microsoft.com/office/drawing/2014/main" id="{FC49CC2C-1927-496A-92D6-778B9B494BAC}"/>
+                <a16:creationId xmlns:a16="http://schemas.microsoft.com/office/drawing/2014/main" id="{65CA236A-B7E3-46FD-B851-075CDCE01E69}"/>
               </a:ext>
             </a:extLst>
           </p:cNvPr>
@@ -8264,7 +8264,7 @@
           <p:cNvPr id="90" name="">
             <a:extLst xmlns:a="http://schemas.openxmlformats.org/drawingml/2006/main">
               <a:ext uri="{FF2B5EF4-FFF2-40B4-BE49-F238E27FC236}">
-                <a16:creationId xmlns:a16="http://schemas.microsoft.com/office/drawing/2014/main" id="{515038F6-0108-4A0C-B7B1-A554F05621DD}"/>
+                <a16:creationId xmlns:a16="http://schemas.microsoft.com/office/drawing/2014/main" id="{F5350985-7394-4761-B6A8-3D5733FDFE2F}"/>
               </a:ext>
             </a:extLst>
           </p:cNvPr>
@@ -8304,7 +8304,7 @@
                   <a:srgbClr val="647287"/>
                 </a:solidFill>
               </a:rPr>
-              <a:t>25 tickets  /  avg 68.0 days</a:t>
+              <a:t>20 tickets  /  avg 69.5 days</a:t>
             </a:r>
           </a:p>
         </p:txBody>
@@ -8321,7 +8321,7 @@
         </p:xfrm>
         <a:graphic xmlns:a="http://schemas.openxmlformats.org/drawingml/2006/main">
           <a:graphicData uri="http://schemas.openxmlformats.org/drawingml/2006/chart">
-            <c:chart xmlns:r="http://schemas.openxmlformats.org/officeDocument/2006/relationships" xmlns:c="http://schemas.openxmlformats.org/drawingml/2006/chart" r:id="Re4c87f6ce7df4941"/>
+            <c:chart xmlns:r="http://schemas.openxmlformats.org/officeDocument/2006/relationships" xmlns:c="http://schemas.openxmlformats.org/drawingml/2006/chart" r:id="R41e97094a8a545fe"/>
           </a:graphicData>
         </a:graphic>
       </p:graphicFrame>
@@ -8330,7 +8330,7 @@
           <p:cNvPr id="92" name="">
             <a:extLst xmlns:a="http://schemas.openxmlformats.org/drawingml/2006/main">
               <a:ext uri="{FF2B5EF4-FFF2-40B4-BE49-F238E27FC236}">
-                <a16:creationId xmlns:a16="http://schemas.microsoft.com/office/drawing/2014/main" id="{941FDBB2-8C9C-426E-B6DA-D1E76DF71076}"/>
+                <a16:creationId xmlns:a16="http://schemas.microsoft.com/office/drawing/2014/main" id="{75E9690F-5791-4755-A231-C8FC1567E4FA}"/>
               </a:ext>
             </a:extLst>
           </p:cNvPr>
@@ -8361,7 +8361,7 @@
           <p:cNvPr id="93" name="">
             <a:extLst xmlns:a="http://schemas.openxmlformats.org/drawingml/2006/main">
               <a:ext uri="{FF2B5EF4-FFF2-40B4-BE49-F238E27FC236}">
-                <a16:creationId xmlns:a16="http://schemas.microsoft.com/office/drawing/2014/main" id="{AE52B68B-C336-49F5-88F7-31BB2AE31F66}"/>
+                <a16:creationId xmlns:a16="http://schemas.microsoft.com/office/drawing/2014/main" id="{F3714C48-7DC3-4B00-9378-19185AEE7099}"/>
               </a:ext>
             </a:extLst>
           </p:cNvPr>
@@ -8411,7 +8411,7 @@
           <p:cNvPr id="94" name="">
             <a:extLst xmlns:a="http://schemas.openxmlformats.org/drawingml/2006/main">
               <a:ext uri="{FF2B5EF4-FFF2-40B4-BE49-F238E27FC236}">
-                <a16:creationId xmlns:a16="http://schemas.microsoft.com/office/drawing/2014/main" id="{C0A0A66C-242C-4E9B-AA3C-B3773D99CBD1}"/>
+                <a16:creationId xmlns:a16="http://schemas.microsoft.com/office/drawing/2014/main" id="{1B766083-4871-4789-9822-F7C5BFCBB05F}"/>
               </a:ext>
             </a:extLst>
           </p:cNvPr>
@@ -8451,7 +8451,7 @@
                   <a:srgbClr val="1D2A3D"/>
                 </a:solidFill>
               </a:rPr>
-              <a:t>4 tickets</a:t>
+              <a:t>3 tickets</a:t>
             </a:r>
           </a:p>
         </p:txBody>
@@ -8461,7 +8461,7 @@
           <p:cNvPr id="95" name="">
             <a:extLst xmlns:a="http://schemas.openxmlformats.org/drawingml/2006/main">
               <a:ext uri="{FF2B5EF4-FFF2-40B4-BE49-F238E27FC236}">
-                <a16:creationId xmlns:a16="http://schemas.microsoft.com/office/drawing/2014/main" id="{3741D688-5CD0-428E-88BD-05AFC3E64213}"/>
+                <a16:creationId xmlns:a16="http://schemas.microsoft.com/office/drawing/2014/main" id="{0ABCB982-344F-460E-A2AA-93D73BE7DF69}"/>
               </a:ext>
             </a:extLst>
           </p:cNvPr>
@@ -8501,7 +8501,7 @@
                   <a:srgbClr val="1D2A3D"/>
                 </a:solidFill>
               </a:rPr>
-              <a:t>16.0%</a:t>
+              <a:t>15.0%</a:t>
             </a:r>
           </a:p>
         </p:txBody>
@@ -8511,7 +8511,7 @@
           <p:cNvPr id="96" name="">
             <a:extLst xmlns:a="http://schemas.openxmlformats.org/drawingml/2006/main">
               <a:ext uri="{FF2B5EF4-FFF2-40B4-BE49-F238E27FC236}">
-                <a16:creationId xmlns:a16="http://schemas.microsoft.com/office/drawing/2014/main" id="{ED16D225-9A07-4B46-83D8-A81929FAE416}"/>
+                <a16:creationId xmlns:a16="http://schemas.microsoft.com/office/drawing/2014/main" id="{CE16C971-AD5D-4301-8704-C35A714F1D96}"/>
               </a:ext>
             </a:extLst>
           </p:cNvPr>
@@ -8542,7 +8542,7 @@
           <p:cNvPr id="97" name="">
             <a:extLst xmlns:a="http://schemas.openxmlformats.org/drawingml/2006/main">
               <a:ext uri="{FF2B5EF4-FFF2-40B4-BE49-F238E27FC236}">
-                <a16:creationId xmlns:a16="http://schemas.microsoft.com/office/drawing/2014/main" id="{BD05F389-5197-4E44-982B-851202993602}"/>
+                <a16:creationId xmlns:a16="http://schemas.microsoft.com/office/drawing/2014/main" id="{CDB7DEB6-0433-407E-AD57-B3F6B445EC96}"/>
               </a:ext>
             </a:extLst>
           </p:cNvPr>
@@ -8592,7 +8592,7 @@
           <p:cNvPr id="98" name="">
             <a:extLst xmlns:a="http://schemas.openxmlformats.org/drawingml/2006/main">
               <a:ext uri="{FF2B5EF4-FFF2-40B4-BE49-F238E27FC236}">
-                <a16:creationId xmlns:a16="http://schemas.microsoft.com/office/drawing/2014/main" id="{A9D30F2F-1496-4E1F-8A7F-B574E23C0582}"/>
+                <a16:creationId xmlns:a16="http://schemas.microsoft.com/office/drawing/2014/main" id="{B1A66EF0-BE51-44D4-9240-D2C5D863C137}"/>
               </a:ext>
             </a:extLst>
           </p:cNvPr>
@@ -8632,7 +8632,7 @@
                   <a:srgbClr val="1D2A3D"/>
                 </a:solidFill>
               </a:rPr>
-              <a:t>3 tickets</a:t>
+              <a:t>2 tickets</a:t>
             </a:r>
           </a:p>
         </p:txBody>
@@ -8642,7 +8642,7 @@
           <p:cNvPr id="99" name="">
             <a:extLst xmlns:a="http://schemas.openxmlformats.org/drawingml/2006/main">
               <a:ext uri="{FF2B5EF4-FFF2-40B4-BE49-F238E27FC236}">
-                <a16:creationId xmlns:a16="http://schemas.microsoft.com/office/drawing/2014/main" id="{6611E664-9A2F-4986-864E-80BA3A657FF7}"/>
+                <a16:creationId xmlns:a16="http://schemas.microsoft.com/office/drawing/2014/main" id="{BA918DD9-8F1B-4354-BE63-4A5DC6C449A5}"/>
               </a:ext>
             </a:extLst>
           </p:cNvPr>
@@ -8682,7 +8682,7 @@
                   <a:srgbClr val="1D2A3D"/>
                 </a:solidFill>
               </a:rPr>
-              <a:t>12.0%</a:t>
+              <a:t>10.0%</a:t>
             </a:r>
           </a:p>
         </p:txBody>
@@ -8692,7 +8692,7 @@
           <p:cNvPr id="100" name="">
             <a:extLst xmlns:a="http://schemas.openxmlformats.org/drawingml/2006/main">
               <a:ext uri="{FF2B5EF4-FFF2-40B4-BE49-F238E27FC236}">
-                <a16:creationId xmlns:a16="http://schemas.microsoft.com/office/drawing/2014/main" id="{35AB0254-82DF-454D-B203-348BE0822065}"/>
+                <a16:creationId xmlns:a16="http://schemas.microsoft.com/office/drawing/2014/main" id="{3B8A7A1C-FCFA-43D1-BA06-B97CD5A0EAC8}"/>
               </a:ext>
             </a:extLst>
           </p:cNvPr>
@@ -8723,7 +8723,7 @@
           <p:cNvPr id="101" name="">
             <a:extLst xmlns:a="http://schemas.openxmlformats.org/drawingml/2006/main">
               <a:ext uri="{FF2B5EF4-FFF2-40B4-BE49-F238E27FC236}">
-                <a16:creationId xmlns:a16="http://schemas.microsoft.com/office/drawing/2014/main" id="{6B51F218-4A08-4684-B2DE-A2ABCC8E3659}"/>
+                <a16:creationId xmlns:a16="http://schemas.microsoft.com/office/drawing/2014/main" id="{6414CEDD-AE22-43B3-BE41-70D45D804853}"/>
               </a:ext>
             </a:extLst>
           </p:cNvPr>
@@ -8773,7 +8773,7 @@
           <p:cNvPr id="102" name="">
             <a:extLst xmlns:a="http://schemas.openxmlformats.org/drawingml/2006/main">
               <a:ext uri="{FF2B5EF4-FFF2-40B4-BE49-F238E27FC236}">
-                <a16:creationId xmlns:a16="http://schemas.microsoft.com/office/drawing/2014/main" id="{CD6B5CBE-E79E-48AC-84F5-2670E800D3E2}"/>
+                <a16:creationId xmlns:a16="http://schemas.microsoft.com/office/drawing/2014/main" id="{31EB20CB-F94C-4C4F-97FE-560776608A1C}"/>
               </a:ext>
             </a:extLst>
           </p:cNvPr>
@@ -8823,7 +8823,7 @@
           <p:cNvPr id="103" name="">
             <a:extLst xmlns:a="http://schemas.openxmlformats.org/drawingml/2006/main">
               <a:ext uri="{FF2B5EF4-FFF2-40B4-BE49-F238E27FC236}">
-                <a16:creationId xmlns:a16="http://schemas.microsoft.com/office/drawing/2014/main" id="{4D96FE08-8DEC-4454-B98C-7A427875E416}"/>
+                <a16:creationId xmlns:a16="http://schemas.microsoft.com/office/drawing/2014/main" id="{1B571428-BC3A-4F24-95BF-23826F0D6AD0}"/>
               </a:ext>
             </a:extLst>
           </p:cNvPr>
@@ -8863,7 +8863,7 @@
                   <a:srgbClr val="1D2A3D"/>
                 </a:solidFill>
               </a:rPr>
-              <a:t>8.0%</a:t>
+              <a:t>10.0%</a:t>
             </a:r>
           </a:p>
         </p:txBody>
@@ -8873,7 +8873,7 @@
           <p:cNvPr id="104" name="">
             <a:extLst xmlns:a="http://schemas.openxmlformats.org/drawingml/2006/main">
               <a:ext uri="{FF2B5EF4-FFF2-40B4-BE49-F238E27FC236}">
-                <a16:creationId xmlns:a16="http://schemas.microsoft.com/office/drawing/2014/main" id="{38349CF6-9439-46CC-B4F6-6E245587EC9C}"/>
+                <a16:creationId xmlns:a16="http://schemas.microsoft.com/office/drawing/2014/main" id="{C5C88F00-DAD8-4A81-A67C-B33CB222AFB4}"/>
               </a:ext>
             </a:extLst>
           </p:cNvPr>
@@ -8904,7 +8904,7 @@
           <p:cNvPr id="105" name="">
             <a:extLst xmlns:a="http://schemas.openxmlformats.org/drawingml/2006/main">
               <a:ext uri="{FF2B5EF4-FFF2-40B4-BE49-F238E27FC236}">
-                <a16:creationId xmlns:a16="http://schemas.microsoft.com/office/drawing/2014/main" id="{DEAC53B9-20DC-45F7-8BE9-A857FD76644E}"/>
+                <a16:creationId xmlns:a16="http://schemas.microsoft.com/office/drawing/2014/main" id="{9F4D045D-1440-44D1-9E32-9C094AE2BF57}"/>
               </a:ext>
             </a:extLst>
           </p:cNvPr>
@@ -8954,7 +8954,7 @@
           <p:cNvPr id="106" name="">
             <a:extLst xmlns:a="http://schemas.openxmlformats.org/drawingml/2006/main">
               <a:ext uri="{FF2B5EF4-FFF2-40B4-BE49-F238E27FC236}">
-                <a16:creationId xmlns:a16="http://schemas.microsoft.com/office/drawing/2014/main" id="{A810BBBF-5D1C-4892-A1BA-AA2CC32E9E95}"/>
+                <a16:creationId xmlns:a16="http://schemas.microsoft.com/office/drawing/2014/main" id="{E1D308BB-35FF-4F38-969C-C1B70923007D}"/>
               </a:ext>
             </a:extLst>
           </p:cNvPr>
@@ -9004,7 +9004,7 @@
           <p:cNvPr id="107" name="">
             <a:extLst xmlns:a="http://schemas.openxmlformats.org/drawingml/2006/main">
               <a:ext uri="{FF2B5EF4-FFF2-40B4-BE49-F238E27FC236}">
-                <a16:creationId xmlns:a16="http://schemas.microsoft.com/office/drawing/2014/main" id="{AADA0492-E270-4CF4-9F36-7C76DD1EBCB8}"/>
+                <a16:creationId xmlns:a16="http://schemas.microsoft.com/office/drawing/2014/main" id="{B3373C83-FCA1-4F4B-A8DC-83B816DB4F6E}"/>
               </a:ext>
             </a:extLst>
           </p:cNvPr>
@@ -9054,7 +9054,7 @@
           <p:cNvPr id="108" name="">
             <a:extLst xmlns:a="http://schemas.openxmlformats.org/drawingml/2006/main">
               <a:ext uri="{FF2B5EF4-FFF2-40B4-BE49-F238E27FC236}">
-                <a16:creationId xmlns:a16="http://schemas.microsoft.com/office/drawing/2014/main" id="{19120F34-9E32-4FC0-BFE7-D84EA7AA0D51}"/>
+                <a16:creationId xmlns:a16="http://schemas.microsoft.com/office/drawing/2014/main" id="{CCE80289-51A7-463C-8698-F315362AA124}"/>
               </a:ext>
             </a:extLst>
           </p:cNvPr>
@@ -9085,7 +9085,7 @@
           <p:cNvPr id="109" name="">
             <a:extLst xmlns:a="http://schemas.openxmlformats.org/drawingml/2006/main">
               <a:ext uri="{FF2B5EF4-FFF2-40B4-BE49-F238E27FC236}">
-                <a16:creationId xmlns:a16="http://schemas.microsoft.com/office/drawing/2014/main" id="{9E5C1777-0670-4D4A-8863-B3CFD9ABE738}"/>
+                <a16:creationId xmlns:a16="http://schemas.microsoft.com/office/drawing/2014/main" id="{B8317A5D-E791-4F09-B676-B723A2D77B28}"/>
               </a:ext>
             </a:extLst>
           </p:cNvPr>
@@ -9135,7 +9135,7 @@
           <p:cNvPr id="110" name="">
             <a:extLst xmlns:a="http://schemas.openxmlformats.org/drawingml/2006/main">
               <a:ext uri="{FF2B5EF4-FFF2-40B4-BE49-F238E27FC236}">
-                <a16:creationId xmlns:a16="http://schemas.microsoft.com/office/drawing/2014/main" id="{4803076D-220B-424A-816F-73B52B70DCC4}"/>
+                <a16:creationId xmlns:a16="http://schemas.microsoft.com/office/drawing/2014/main" id="{A4FA3B98-6F59-458A-A038-0CCF2D92F947}"/>
               </a:ext>
             </a:extLst>
           </p:cNvPr>
@@ -9175,7 +9175,7 @@
                   <a:srgbClr val="1D2A3D"/>
                 </a:solidFill>
               </a:rPr>
-              <a:t>1 tickets</a:t>
+              <a:t>2 tickets</a:t>
             </a:r>
           </a:p>
         </p:txBody>
@@ -9185,7 +9185,7 @@
           <p:cNvPr id="111" name="">
             <a:extLst xmlns:a="http://schemas.openxmlformats.org/drawingml/2006/main">
               <a:ext uri="{FF2B5EF4-FFF2-40B4-BE49-F238E27FC236}">
-                <a16:creationId xmlns:a16="http://schemas.microsoft.com/office/drawing/2014/main" id="{099B21DB-D764-4459-BF39-7B1718CAFF1F}"/>
+                <a16:creationId xmlns:a16="http://schemas.microsoft.com/office/drawing/2014/main" id="{E6233F5D-178C-4C3B-8320-3087BAF6804B}"/>
               </a:ext>
             </a:extLst>
           </p:cNvPr>
@@ -9225,7 +9225,7 @@
                   <a:srgbClr val="1D2A3D"/>
                 </a:solidFill>
               </a:rPr>
-              <a:t>4.0%</a:t>
+              <a:t>10.0%</a:t>
             </a:r>
           </a:p>
         </p:txBody>
@@ -9235,7 +9235,7 @@
           <p:cNvPr id="112" name="">
             <a:extLst xmlns:a="http://schemas.openxmlformats.org/drawingml/2006/main">
               <a:ext uri="{FF2B5EF4-FFF2-40B4-BE49-F238E27FC236}">
-                <a16:creationId xmlns:a16="http://schemas.microsoft.com/office/drawing/2014/main" id="{B21B9718-C9B1-4355-A594-C96AC3AB7F65}"/>
+                <a16:creationId xmlns:a16="http://schemas.microsoft.com/office/drawing/2014/main" id="{AEB1EF9C-7F44-430D-A8B2-B19E28BC2EBD}"/>
               </a:ext>
             </a:extLst>
           </p:cNvPr>
@@ -9266,7 +9266,7 @@
           <p:cNvPr id="113" name="">
             <a:extLst xmlns:a="http://schemas.openxmlformats.org/drawingml/2006/main">
               <a:ext uri="{FF2B5EF4-FFF2-40B4-BE49-F238E27FC236}">
-                <a16:creationId xmlns:a16="http://schemas.microsoft.com/office/drawing/2014/main" id="{7E61FCD8-7D65-4AFC-AFF9-2F89AD6732FC}"/>
+                <a16:creationId xmlns:a16="http://schemas.microsoft.com/office/drawing/2014/main" id="{DEEA44A6-C791-4875-BBFA-F89D8D93EC37}"/>
               </a:ext>
             </a:extLst>
           </p:cNvPr>
@@ -9316,7 +9316,7 @@
           <p:cNvPr id="114" name="">
             <a:extLst xmlns:a="http://schemas.openxmlformats.org/drawingml/2006/main">
               <a:ext uri="{FF2B5EF4-FFF2-40B4-BE49-F238E27FC236}">
-                <a16:creationId xmlns:a16="http://schemas.microsoft.com/office/drawing/2014/main" id="{B6E5BE87-33EC-471D-8BDF-21D7F5C765E6}"/>
+                <a16:creationId xmlns:a16="http://schemas.microsoft.com/office/drawing/2014/main" id="{FD6CC4CE-B221-42D7-B506-7FF39C34CB6B}"/>
               </a:ext>
             </a:extLst>
           </p:cNvPr>
@@ -9356,7 +9356,7 @@
                   <a:srgbClr val="1D2A3D"/>
                 </a:solidFill>
               </a:rPr>
-              <a:t>15 tickets</a:t>
+              <a:t>11 tickets</a:t>
             </a:r>
           </a:p>
         </p:txBody>
@@ -9366,7 +9366,7 @@
           <p:cNvPr id="115" name="">
             <a:extLst xmlns:a="http://schemas.openxmlformats.org/drawingml/2006/main">
               <a:ext uri="{FF2B5EF4-FFF2-40B4-BE49-F238E27FC236}">
-                <a16:creationId xmlns:a16="http://schemas.microsoft.com/office/drawing/2014/main" id="{B0A2C33A-480C-4480-8D18-1383666B73F8}"/>
+                <a16:creationId xmlns:a16="http://schemas.microsoft.com/office/drawing/2014/main" id="{8C5E4BE1-8536-4D9F-90C6-75E368B52CCF}"/>
               </a:ext>
             </a:extLst>
           </p:cNvPr>
@@ -9406,7 +9406,7 @@
                   <a:srgbClr val="1D2A3D"/>
                 </a:solidFill>
               </a:rPr>
-              <a:t>60.0%</a:t>
+              <a:t>55.0%</a:t>
             </a:r>
           </a:p>
         </p:txBody>
@@ -9416,7 +9416,7 @@
           <p:cNvPr id="116" name="">
             <a:extLst xmlns:a="http://schemas.openxmlformats.org/drawingml/2006/main">
               <a:ext uri="{FF2B5EF4-FFF2-40B4-BE49-F238E27FC236}">
-                <a16:creationId xmlns:a16="http://schemas.microsoft.com/office/drawing/2014/main" id="{974CC25D-AD62-4076-B247-E794D3BD8172}"/>
+                <a16:creationId xmlns:a16="http://schemas.microsoft.com/office/drawing/2014/main" id="{CECAC4D0-987F-4573-96FC-98E3E94E2BB3}"/>
               </a:ext>
             </a:extLst>
           </p:cNvPr>
@@ -9466,7 +9466,7 @@
           <p:cNvPr id="117" name="">
             <a:extLst xmlns:a="http://schemas.openxmlformats.org/drawingml/2006/main">
               <a:ext uri="{FF2B5EF4-FFF2-40B4-BE49-F238E27FC236}">
-                <a16:creationId xmlns:a16="http://schemas.microsoft.com/office/drawing/2014/main" id="{9D67E988-5AEF-4925-AC5F-04C4C85CA1D2}"/>
+                <a16:creationId xmlns:a16="http://schemas.microsoft.com/office/drawing/2014/main" id="{B3F67ABE-B6EC-4DB4-BAFE-72F2105A417E}"/>
               </a:ext>
             </a:extLst>
           </p:cNvPr>
@@ -9497,7 +9497,7 @@
           <p:cNvPr id="118" name="">
             <a:extLst xmlns:a="http://schemas.openxmlformats.org/drawingml/2006/main">
               <a:ext uri="{FF2B5EF4-FFF2-40B4-BE49-F238E27FC236}">
-                <a16:creationId xmlns:a16="http://schemas.microsoft.com/office/drawing/2014/main" id="{C2A791ED-EF2D-4551-B4D8-9880C829701C}"/>
+                <a16:creationId xmlns:a16="http://schemas.microsoft.com/office/drawing/2014/main" id="{4A594026-E88C-4A41-94A0-B7C11B4D7D97}"/>
               </a:ext>
             </a:extLst>
           </p:cNvPr>
@@ -9547,7 +9547,7 @@
           <p:cNvPr id="119" name="">
             <a:extLst xmlns:a="http://schemas.openxmlformats.org/drawingml/2006/main">
               <a:ext uri="{FF2B5EF4-FFF2-40B4-BE49-F238E27FC236}">
-                <a16:creationId xmlns:a16="http://schemas.microsoft.com/office/drawing/2014/main" id="{70913508-E15E-4039-98EC-03DDB5C3F314}"/>
+                <a16:creationId xmlns:a16="http://schemas.microsoft.com/office/drawing/2014/main" id="{A3A266FE-2657-4399-922E-1F9E76D970F6}"/>
               </a:ext>
             </a:extLst>
           </p:cNvPr>
@@ -9595,7 +9595,7 @@
     </p:spTree>
     <p:extLst>
       <p:ext uri="{BB962C8B-B14F-4D97-AF65-F5344CB8AC3E}">
-        <p14:creationId xmlns:p14="http://schemas.microsoft.com/office/powerpoint/2010/main" val="1079828853"/>
+        <p14:creationId xmlns:p14="http://schemas.microsoft.com/office/powerpoint/2010/main" val="862302605"/>
       </p:ext>
     </p:extLst>
   </p:cSld>
@@ -9626,7 +9626,7 @@
           <p:cNvPr id="120" name="">
             <a:extLst xmlns:a="http://schemas.openxmlformats.org/drawingml/2006/main">
               <a:ext uri="{FF2B5EF4-FFF2-40B4-BE49-F238E27FC236}">
-                <a16:creationId xmlns:a16="http://schemas.microsoft.com/office/drawing/2014/main" id="{72C975AD-A7B8-4D51-87F2-6CEB2A8BE440}"/>
+                <a16:creationId xmlns:a16="http://schemas.microsoft.com/office/drawing/2014/main" id="{3EC60688-BDCA-4805-B09C-4F213529E749}"/>
               </a:ext>
             </a:extLst>
           </p:cNvPr>
@@ -9676,7 +9676,7 @@
           <p:cNvPr id="2" name="">
             <a:extLst xmlns:a="http://schemas.openxmlformats.org/drawingml/2006/main">
               <a:ext uri="{FF2B5EF4-FFF2-40B4-BE49-F238E27FC236}">
-                <a16:creationId xmlns:a16="http://schemas.microsoft.com/office/drawing/2014/main" id="{77E1B6A1-B811-4822-931A-9E09B77F5E57}"/>
+                <a16:creationId xmlns:a16="http://schemas.microsoft.com/office/drawing/2014/main" id="{B0828F56-7A83-4562-B69E-260867DECDBC}"/>
               </a:ext>
             </a:extLst>
           </p:cNvPr>
@@ -9726,7 +9726,7 @@
           <p:cNvPr id="3" name="">
             <a:extLst xmlns:a="http://schemas.openxmlformats.org/drawingml/2006/main">
               <a:ext uri="{FF2B5EF4-FFF2-40B4-BE49-F238E27FC236}">
-                <a16:creationId xmlns:a16="http://schemas.microsoft.com/office/drawing/2014/main" id="{9BC316BA-B15A-46A6-8397-EA6FD778A478}"/>
+                <a16:creationId xmlns:a16="http://schemas.microsoft.com/office/drawing/2014/main" id="{1A02CBC4-DC25-4FD5-847E-1EFC5F09559D}"/>
               </a:ext>
             </a:extLst>
           </p:cNvPr>
@@ -9766,7 +9766,7 @@
                   <a:srgbClr val="647287"/>
                 </a:solidFill>
               </a:rPr>
-              <a:t>3,108 priced tickets. Percentages are ticket-count share within each price band, not claim amount share.</a:t>
+              <a:t>3,179 priced tickets. Percentages are ticket-count share within each price band, not claim amount share.</a:t>
             </a:r>
           </a:p>
         </p:txBody>
@@ -9776,7 +9776,7 @@
           <p:cNvPr id="4" name="">
             <a:extLst xmlns:a="http://schemas.openxmlformats.org/drawingml/2006/main">
               <a:ext uri="{FF2B5EF4-FFF2-40B4-BE49-F238E27FC236}">
-                <a16:creationId xmlns:a16="http://schemas.microsoft.com/office/drawing/2014/main" id="{466CA948-5180-40FC-B796-B86DC4796105}"/>
+                <a16:creationId xmlns:a16="http://schemas.microsoft.com/office/drawing/2014/main" id="{E443C16F-9F24-4B48-8663-D704A19143BC}"/>
               </a:ext>
             </a:extLst>
           </p:cNvPr>
@@ -9817,7 +9817,7 @@
           <p:cNvPr id="5" name="">
             <a:extLst xmlns:a="http://schemas.openxmlformats.org/drawingml/2006/main">
               <a:ext uri="{FF2B5EF4-FFF2-40B4-BE49-F238E27FC236}">
-                <a16:creationId xmlns:a16="http://schemas.microsoft.com/office/drawing/2014/main" id="{CAB58F5E-02D7-49D4-8CEF-42B902704735}"/>
+                <a16:creationId xmlns:a16="http://schemas.microsoft.com/office/drawing/2014/main" id="{AEA6C283-E637-4884-8D2C-8D1C6E9392E2}"/>
               </a:ext>
             </a:extLst>
           </p:cNvPr>
@@ -9867,7 +9867,7 @@
           <p:cNvPr id="6" name="">
             <a:extLst xmlns:a="http://schemas.openxmlformats.org/drawingml/2006/main">
               <a:ext uri="{FF2B5EF4-FFF2-40B4-BE49-F238E27FC236}">
-                <a16:creationId xmlns:a16="http://schemas.microsoft.com/office/drawing/2014/main" id="{2FE6EC5F-2050-4413-B917-4114D845AFB8}"/>
+                <a16:creationId xmlns:a16="http://schemas.microsoft.com/office/drawing/2014/main" id="{A10D44AA-6FE3-4A86-A889-ED7884388666}"/>
               </a:ext>
             </a:extLst>
           </p:cNvPr>
@@ -9907,7 +9907,7 @@
                   <a:srgbClr val="647287"/>
                 </a:solidFill>
               </a:rPr>
-              <a:t>1,266 tickets  /  avg 16.8 days</a:t>
+              <a:t>1,767 tickets  /  avg 18.0 days</a:t>
             </a:r>
           </a:p>
         </p:txBody>
@@ -9924,7 +9924,7 @@
         </p:xfrm>
         <a:graphic xmlns:a="http://schemas.openxmlformats.org/drawingml/2006/main">
           <a:graphicData uri="http://schemas.openxmlformats.org/drawingml/2006/chart">
-            <c:chart xmlns:r="http://schemas.openxmlformats.org/officeDocument/2006/relationships" xmlns:c="http://schemas.openxmlformats.org/drawingml/2006/chart" r:id="R31aa60cfdc4c48a4"/>
+            <c:chart xmlns:r="http://schemas.openxmlformats.org/officeDocument/2006/relationships" xmlns:c="http://schemas.openxmlformats.org/drawingml/2006/chart" r:id="R1cdc820cd1e0438e"/>
           </a:graphicData>
         </a:graphic>
       </p:graphicFrame>
@@ -9933,7 +9933,7 @@
           <p:cNvPr id="8" name="">
             <a:extLst xmlns:a="http://schemas.openxmlformats.org/drawingml/2006/main">
               <a:ext uri="{FF2B5EF4-FFF2-40B4-BE49-F238E27FC236}">
-                <a16:creationId xmlns:a16="http://schemas.microsoft.com/office/drawing/2014/main" id="{AA079CDC-07F1-49FD-978B-A2558A38FD6C}"/>
+                <a16:creationId xmlns:a16="http://schemas.microsoft.com/office/drawing/2014/main" id="{3B7C900E-8C29-4A08-B0FD-52D95649F09D}"/>
               </a:ext>
             </a:extLst>
           </p:cNvPr>
@@ -9964,7 +9964,7 @@
           <p:cNvPr id="9" name="">
             <a:extLst xmlns:a="http://schemas.openxmlformats.org/drawingml/2006/main">
               <a:ext uri="{FF2B5EF4-FFF2-40B4-BE49-F238E27FC236}">
-                <a16:creationId xmlns:a16="http://schemas.microsoft.com/office/drawing/2014/main" id="{67424177-1A64-44AD-8970-83B530EEA242}"/>
+                <a16:creationId xmlns:a16="http://schemas.microsoft.com/office/drawing/2014/main" id="{9BD23710-E75D-49B6-B8A1-10C8029C8220}"/>
               </a:ext>
             </a:extLst>
           </p:cNvPr>
@@ -10014,7 +10014,7 @@
           <p:cNvPr id="10" name="">
             <a:extLst xmlns:a="http://schemas.openxmlformats.org/drawingml/2006/main">
               <a:ext uri="{FF2B5EF4-FFF2-40B4-BE49-F238E27FC236}">
-                <a16:creationId xmlns:a16="http://schemas.microsoft.com/office/drawing/2014/main" id="{97950D45-72BB-46AE-B13A-4D7A9DA4C926}"/>
+                <a16:creationId xmlns:a16="http://schemas.microsoft.com/office/drawing/2014/main" id="{A1D03E26-021C-4487-9926-92D8049CCA46}"/>
               </a:ext>
             </a:extLst>
           </p:cNvPr>
@@ -10054,7 +10054,7 @@
                   <a:srgbClr val="1D2A3D"/>
                 </a:solidFill>
               </a:rPr>
-              <a:t>358 tickets</a:t>
+              <a:t>457 tickets</a:t>
             </a:r>
           </a:p>
         </p:txBody>
@@ -10064,7 +10064,7 @@
           <p:cNvPr id="11" name="">
             <a:extLst xmlns:a="http://schemas.openxmlformats.org/drawingml/2006/main">
               <a:ext uri="{FF2B5EF4-FFF2-40B4-BE49-F238E27FC236}">
-                <a16:creationId xmlns:a16="http://schemas.microsoft.com/office/drawing/2014/main" id="{498579CE-6C2F-41AE-84EA-02EC028CF0E6}"/>
+                <a16:creationId xmlns:a16="http://schemas.microsoft.com/office/drawing/2014/main" id="{03E39EBD-3879-484F-A874-5870C647936F}"/>
               </a:ext>
             </a:extLst>
           </p:cNvPr>
@@ -10104,7 +10104,7 @@
                   <a:srgbClr val="1D2A3D"/>
                 </a:solidFill>
               </a:rPr>
-              <a:t>28.3%</a:t>
+              <a:t>25.9%</a:t>
             </a:r>
           </a:p>
         </p:txBody>
@@ -10114,7 +10114,7 @@
           <p:cNvPr id="12" name="">
             <a:extLst xmlns:a="http://schemas.openxmlformats.org/drawingml/2006/main">
               <a:ext uri="{FF2B5EF4-FFF2-40B4-BE49-F238E27FC236}">
-                <a16:creationId xmlns:a16="http://schemas.microsoft.com/office/drawing/2014/main" id="{16BA5D10-4614-4272-9CB4-A7D629A08C3B}"/>
+                <a16:creationId xmlns:a16="http://schemas.microsoft.com/office/drawing/2014/main" id="{95BD68A6-1E6F-4F46-89A0-5FD4F9F5AF00}"/>
               </a:ext>
             </a:extLst>
           </p:cNvPr>
@@ -10145,7 +10145,7 @@
           <p:cNvPr id="13" name="">
             <a:extLst xmlns:a="http://schemas.openxmlformats.org/drawingml/2006/main">
               <a:ext uri="{FF2B5EF4-FFF2-40B4-BE49-F238E27FC236}">
-                <a16:creationId xmlns:a16="http://schemas.microsoft.com/office/drawing/2014/main" id="{706A56DA-7298-4CB4-B326-A6BAB2830586}"/>
+                <a16:creationId xmlns:a16="http://schemas.microsoft.com/office/drawing/2014/main" id="{344978B7-B042-4160-9B96-FD0DF14FFFCE}"/>
               </a:ext>
             </a:extLst>
           </p:cNvPr>
@@ -10195,7 +10195,7 @@
           <p:cNvPr id="14" name="">
             <a:extLst xmlns:a="http://schemas.openxmlformats.org/drawingml/2006/main">
               <a:ext uri="{FF2B5EF4-FFF2-40B4-BE49-F238E27FC236}">
-                <a16:creationId xmlns:a16="http://schemas.microsoft.com/office/drawing/2014/main" id="{A605FC84-E886-4EF0-9808-D8747C41C865}"/>
+                <a16:creationId xmlns:a16="http://schemas.microsoft.com/office/drawing/2014/main" id="{AFC5FF23-F745-4900-84F5-08871FBA6391}"/>
               </a:ext>
             </a:extLst>
           </p:cNvPr>
@@ -10235,7 +10235,7 @@
                   <a:srgbClr val="1D2A3D"/>
                 </a:solidFill>
               </a:rPr>
-              <a:t>442 tickets</a:t>
+              <a:t>608 tickets</a:t>
             </a:r>
           </a:p>
         </p:txBody>
@@ -10245,7 +10245,7 @@
           <p:cNvPr id="15" name="">
             <a:extLst xmlns:a="http://schemas.openxmlformats.org/drawingml/2006/main">
               <a:ext uri="{FF2B5EF4-FFF2-40B4-BE49-F238E27FC236}">
-                <a16:creationId xmlns:a16="http://schemas.microsoft.com/office/drawing/2014/main" id="{66E1483E-40F6-46C6-9E90-45D7C652778B}"/>
+                <a16:creationId xmlns:a16="http://schemas.microsoft.com/office/drawing/2014/main" id="{D751A7F2-B7D5-42B5-A9EB-02AEF0529CA3}"/>
               </a:ext>
             </a:extLst>
           </p:cNvPr>
@@ -10285,7 +10285,7 @@
                   <a:srgbClr val="1D2A3D"/>
                 </a:solidFill>
               </a:rPr>
-              <a:t>34.9%</a:t>
+              <a:t>34.4%</a:t>
             </a:r>
           </a:p>
         </p:txBody>
@@ -10295,7 +10295,7 @@
           <p:cNvPr id="16" name="">
             <a:extLst xmlns:a="http://schemas.openxmlformats.org/drawingml/2006/main">
               <a:ext uri="{FF2B5EF4-FFF2-40B4-BE49-F238E27FC236}">
-                <a16:creationId xmlns:a16="http://schemas.microsoft.com/office/drawing/2014/main" id="{76887B5F-7D07-4571-AE86-29B2128DDC42}"/>
+                <a16:creationId xmlns:a16="http://schemas.microsoft.com/office/drawing/2014/main" id="{A8554A9E-1FD6-4FFB-8AA9-A9D9CFC04C07}"/>
               </a:ext>
             </a:extLst>
           </p:cNvPr>
@@ -10326,7 +10326,7 @@
           <p:cNvPr id="17" name="">
             <a:extLst xmlns:a="http://schemas.openxmlformats.org/drawingml/2006/main">
               <a:ext uri="{FF2B5EF4-FFF2-40B4-BE49-F238E27FC236}">
-                <a16:creationId xmlns:a16="http://schemas.microsoft.com/office/drawing/2014/main" id="{C8D67B02-247F-4264-8C67-13AD72527A57}"/>
+                <a16:creationId xmlns:a16="http://schemas.microsoft.com/office/drawing/2014/main" id="{EFBDB6F5-5821-4EF8-BF89-20D370006B5F}"/>
               </a:ext>
             </a:extLst>
           </p:cNvPr>
@@ -10376,7 +10376,7 @@
           <p:cNvPr id="18" name="">
             <a:extLst xmlns:a="http://schemas.openxmlformats.org/drawingml/2006/main">
               <a:ext uri="{FF2B5EF4-FFF2-40B4-BE49-F238E27FC236}">
-                <a16:creationId xmlns:a16="http://schemas.microsoft.com/office/drawing/2014/main" id="{7501143A-AB0C-457B-A23D-306F4714A517}"/>
+                <a16:creationId xmlns:a16="http://schemas.microsoft.com/office/drawing/2014/main" id="{64731212-C1F4-4CEB-8302-191D595BA743}"/>
               </a:ext>
             </a:extLst>
           </p:cNvPr>
@@ -10416,7 +10416,7 @@
                   <a:srgbClr val="1D2A3D"/>
                 </a:solidFill>
               </a:rPr>
-              <a:t>195 tickets</a:t>
+              <a:t>283 tickets</a:t>
             </a:r>
           </a:p>
         </p:txBody>
@@ -10426,7 +10426,7 @@
           <p:cNvPr id="19" name="">
             <a:extLst xmlns:a="http://schemas.openxmlformats.org/drawingml/2006/main">
               <a:ext uri="{FF2B5EF4-FFF2-40B4-BE49-F238E27FC236}">
-                <a16:creationId xmlns:a16="http://schemas.microsoft.com/office/drawing/2014/main" id="{5A6FB25F-BB9F-42E3-8F1A-CD1CF61EB671}"/>
+                <a16:creationId xmlns:a16="http://schemas.microsoft.com/office/drawing/2014/main" id="{610FDECD-20F6-4FF2-B8A3-85977851316B}"/>
               </a:ext>
             </a:extLst>
           </p:cNvPr>
@@ -10466,7 +10466,7 @@
                   <a:srgbClr val="1D2A3D"/>
                 </a:solidFill>
               </a:rPr>
-              <a:t>15.4%</a:t>
+              <a:t>16.0%</a:t>
             </a:r>
           </a:p>
         </p:txBody>
@@ -10476,7 +10476,7 @@
           <p:cNvPr id="20" name="">
             <a:extLst xmlns:a="http://schemas.openxmlformats.org/drawingml/2006/main">
               <a:ext uri="{FF2B5EF4-FFF2-40B4-BE49-F238E27FC236}">
-                <a16:creationId xmlns:a16="http://schemas.microsoft.com/office/drawing/2014/main" id="{6B71F067-4693-4D51-A0DD-CC656479693D}"/>
+                <a16:creationId xmlns:a16="http://schemas.microsoft.com/office/drawing/2014/main" id="{19536432-971F-4ECE-B1B6-3FD343745C2C}"/>
               </a:ext>
             </a:extLst>
           </p:cNvPr>
@@ -10507,7 +10507,7 @@
           <p:cNvPr id="21" name="">
             <a:extLst xmlns:a="http://schemas.openxmlformats.org/drawingml/2006/main">
               <a:ext uri="{FF2B5EF4-FFF2-40B4-BE49-F238E27FC236}">
-                <a16:creationId xmlns:a16="http://schemas.microsoft.com/office/drawing/2014/main" id="{DE32BCF7-D798-467F-B3D2-D5D78948227A}"/>
+                <a16:creationId xmlns:a16="http://schemas.microsoft.com/office/drawing/2014/main" id="{64B7E6B8-4DA3-4B96-8DB7-BD0B801660BA}"/>
               </a:ext>
             </a:extLst>
           </p:cNvPr>
@@ -10557,7 +10557,7 @@
           <p:cNvPr id="22" name="">
             <a:extLst xmlns:a="http://schemas.openxmlformats.org/drawingml/2006/main">
               <a:ext uri="{FF2B5EF4-FFF2-40B4-BE49-F238E27FC236}">
-                <a16:creationId xmlns:a16="http://schemas.microsoft.com/office/drawing/2014/main" id="{9BB46EFB-7779-4D4C-81D8-0FDFA931025D}"/>
+                <a16:creationId xmlns:a16="http://schemas.microsoft.com/office/drawing/2014/main" id="{D09FE264-231B-4917-85B4-FB98434BB9D1}"/>
               </a:ext>
             </a:extLst>
           </p:cNvPr>
@@ -10597,7 +10597,7 @@
                   <a:srgbClr val="1D2A3D"/>
                 </a:solidFill>
               </a:rPr>
-              <a:t>89 tickets</a:t>
+              <a:t>140 tickets</a:t>
             </a:r>
           </a:p>
         </p:txBody>
@@ -10607,7 +10607,7 @@
           <p:cNvPr id="23" name="">
             <a:extLst xmlns:a="http://schemas.openxmlformats.org/drawingml/2006/main">
               <a:ext uri="{FF2B5EF4-FFF2-40B4-BE49-F238E27FC236}">
-                <a16:creationId xmlns:a16="http://schemas.microsoft.com/office/drawing/2014/main" id="{2779C3CE-1187-47FD-AF5C-86B7C2650833}"/>
+                <a16:creationId xmlns:a16="http://schemas.microsoft.com/office/drawing/2014/main" id="{91EEF14B-3875-4766-89E4-9568FA7A98E3}"/>
               </a:ext>
             </a:extLst>
           </p:cNvPr>
@@ -10647,7 +10647,7 @@
                   <a:srgbClr val="1D2A3D"/>
                 </a:solidFill>
               </a:rPr>
-              <a:t>7.0%</a:t>
+              <a:t>7.9%</a:t>
             </a:r>
           </a:p>
         </p:txBody>
@@ -10657,7 +10657,7 @@
           <p:cNvPr id="24" name="">
             <a:extLst xmlns:a="http://schemas.openxmlformats.org/drawingml/2006/main">
               <a:ext uri="{FF2B5EF4-FFF2-40B4-BE49-F238E27FC236}">
-                <a16:creationId xmlns:a16="http://schemas.microsoft.com/office/drawing/2014/main" id="{866CC5E1-106E-4F12-8C66-B62BDD352CE0}"/>
+                <a16:creationId xmlns:a16="http://schemas.microsoft.com/office/drawing/2014/main" id="{45D52D0E-3463-46EB-89DD-C920ACE57B4C}"/>
               </a:ext>
             </a:extLst>
           </p:cNvPr>
@@ -10688,7 +10688,7 @@
           <p:cNvPr id="25" name="">
             <a:extLst xmlns:a="http://schemas.openxmlformats.org/drawingml/2006/main">
               <a:ext uri="{FF2B5EF4-FFF2-40B4-BE49-F238E27FC236}">
-                <a16:creationId xmlns:a16="http://schemas.microsoft.com/office/drawing/2014/main" id="{C3A4DA2E-6FC7-4389-BDA3-FE1E81338C65}"/>
+                <a16:creationId xmlns:a16="http://schemas.microsoft.com/office/drawing/2014/main" id="{ED9B7FAB-62CC-481F-8E01-A4381EC86CFB}"/>
               </a:ext>
             </a:extLst>
           </p:cNvPr>
@@ -10738,7 +10738,7 @@
           <p:cNvPr id="26" name="">
             <a:extLst xmlns:a="http://schemas.openxmlformats.org/drawingml/2006/main">
               <a:ext uri="{FF2B5EF4-FFF2-40B4-BE49-F238E27FC236}">
-                <a16:creationId xmlns:a16="http://schemas.microsoft.com/office/drawing/2014/main" id="{F6E7FCA5-61D3-4B10-9BD5-F93C7681FB79}"/>
+                <a16:creationId xmlns:a16="http://schemas.microsoft.com/office/drawing/2014/main" id="{2D047CB0-630A-4A75-B35F-8F701C4D1A7F}"/>
               </a:ext>
             </a:extLst>
           </p:cNvPr>
@@ -10778,7 +10778,7 @@
                   <a:srgbClr val="1D2A3D"/>
                 </a:solidFill>
               </a:rPr>
-              <a:t>141 tickets</a:t>
+              <a:t>209 tickets</a:t>
             </a:r>
           </a:p>
         </p:txBody>
@@ -10788,7 +10788,7 @@
           <p:cNvPr id="27" name="">
             <a:extLst xmlns:a="http://schemas.openxmlformats.org/drawingml/2006/main">
               <a:ext uri="{FF2B5EF4-FFF2-40B4-BE49-F238E27FC236}">
-                <a16:creationId xmlns:a16="http://schemas.microsoft.com/office/drawing/2014/main" id="{A8366DD4-AAE9-4578-8FEC-B56EFFCCBD49}"/>
+                <a16:creationId xmlns:a16="http://schemas.microsoft.com/office/drawing/2014/main" id="{D87BDE9C-5253-4DE6-B2AF-65E2D64F359F}"/>
               </a:ext>
             </a:extLst>
           </p:cNvPr>
@@ -10828,7 +10828,7 @@
                   <a:srgbClr val="1D2A3D"/>
                 </a:solidFill>
               </a:rPr>
-              <a:t>11.1%</a:t>
+              <a:t>11.8%</a:t>
             </a:r>
           </a:p>
         </p:txBody>
@@ -10838,7 +10838,7 @@
           <p:cNvPr id="28" name="">
             <a:extLst xmlns:a="http://schemas.openxmlformats.org/drawingml/2006/main">
               <a:ext uri="{FF2B5EF4-FFF2-40B4-BE49-F238E27FC236}">
-                <a16:creationId xmlns:a16="http://schemas.microsoft.com/office/drawing/2014/main" id="{BD8F7B64-130F-4E95-9E28-77BA9B1937C4}"/>
+                <a16:creationId xmlns:a16="http://schemas.microsoft.com/office/drawing/2014/main" id="{C3E90F67-0F09-4C6D-B13F-F61C91FFEB85}"/>
               </a:ext>
             </a:extLst>
           </p:cNvPr>
@@ -10869,7 +10869,7 @@
           <p:cNvPr id="29" name="">
             <a:extLst xmlns:a="http://schemas.openxmlformats.org/drawingml/2006/main">
               <a:ext uri="{FF2B5EF4-FFF2-40B4-BE49-F238E27FC236}">
-                <a16:creationId xmlns:a16="http://schemas.microsoft.com/office/drawing/2014/main" id="{F1860905-BDC7-4C1F-933C-E76AB9234804}"/>
+                <a16:creationId xmlns:a16="http://schemas.microsoft.com/office/drawing/2014/main" id="{12B30129-EA0E-4546-A131-F8A5BA9B8809}"/>
               </a:ext>
             </a:extLst>
           </p:cNvPr>
@@ -10919,7 +10919,7 @@
           <p:cNvPr id="30" name="">
             <a:extLst xmlns:a="http://schemas.openxmlformats.org/drawingml/2006/main">
               <a:ext uri="{FF2B5EF4-FFF2-40B4-BE49-F238E27FC236}">
-                <a16:creationId xmlns:a16="http://schemas.microsoft.com/office/drawing/2014/main" id="{FA2C9009-B9E6-4447-88BA-0999BA3EDC5B}"/>
+                <a16:creationId xmlns:a16="http://schemas.microsoft.com/office/drawing/2014/main" id="{85A3F77B-C633-4C51-B713-BCA7C8797F19}"/>
               </a:ext>
             </a:extLst>
           </p:cNvPr>
@@ -10959,7 +10959,7 @@
                   <a:srgbClr val="1D2A3D"/>
                 </a:solidFill>
               </a:rPr>
-              <a:t>41 tickets</a:t>
+              <a:t>70 tickets</a:t>
             </a:r>
           </a:p>
         </p:txBody>
@@ -10969,7 +10969,7 @@
           <p:cNvPr id="31" name="">
             <a:extLst xmlns:a="http://schemas.openxmlformats.org/drawingml/2006/main">
               <a:ext uri="{FF2B5EF4-FFF2-40B4-BE49-F238E27FC236}">
-                <a16:creationId xmlns:a16="http://schemas.microsoft.com/office/drawing/2014/main" id="{3AB90F2D-DF1C-460B-AB89-8490ACEA9C11}"/>
+                <a16:creationId xmlns:a16="http://schemas.microsoft.com/office/drawing/2014/main" id="{4170A410-B9CC-4E1A-8EC9-D72A85E4C5E1}"/>
               </a:ext>
             </a:extLst>
           </p:cNvPr>
@@ -11009,7 +11009,7 @@
                   <a:srgbClr val="1D2A3D"/>
                 </a:solidFill>
               </a:rPr>
-              <a:t>3.2%</a:t>
+              <a:t>4.0%</a:t>
             </a:r>
           </a:p>
         </p:txBody>
@@ -11019,7 +11019,7 @@
           <p:cNvPr id="32" name="">
             <a:extLst xmlns:a="http://schemas.openxmlformats.org/drawingml/2006/main">
               <a:ext uri="{FF2B5EF4-FFF2-40B4-BE49-F238E27FC236}">
-                <a16:creationId xmlns:a16="http://schemas.microsoft.com/office/drawing/2014/main" id="{E306BF0A-EA38-4C2A-B5C0-FB961401948A}"/>
+                <a16:creationId xmlns:a16="http://schemas.microsoft.com/office/drawing/2014/main" id="{B43E1588-A419-444C-891B-3FF2876F957B}"/>
               </a:ext>
             </a:extLst>
           </p:cNvPr>
@@ -11060,7 +11060,7 @@
           <p:cNvPr id="33" name="">
             <a:extLst xmlns:a="http://schemas.openxmlformats.org/drawingml/2006/main">
               <a:ext uri="{FF2B5EF4-FFF2-40B4-BE49-F238E27FC236}">
-                <a16:creationId xmlns:a16="http://schemas.microsoft.com/office/drawing/2014/main" id="{A81FF87B-8ABA-4713-ABBD-F6DF3BA4E7A3}"/>
+                <a16:creationId xmlns:a16="http://schemas.microsoft.com/office/drawing/2014/main" id="{3F8F2DA3-4AD2-4139-B63D-4D617073EE0E}"/>
               </a:ext>
             </a:extLst>
           </p:cNvPr>
@@ -11110,7 +11110,7 @@
           <p:cNvPr id="34" name="">
             <a:extLst xmlns:a="http://schemas.openxmlformats.org/drawingml/2006/main">
               <a:ext uri="{FF2B5EF4-FFF2-40B4-BE49-F238E27FC236}">
-                <a16:creationId xmlns:a16="http://schemas.microsoft.com/office/drawing/2014/main" id="{967A76B7-931C-495A-A17A-54D7E1FC6B2F}"/>
+                <a16:creationId xmlns:a16="http://schemas.microsoft.com/office/drawing/2014/main" id="{265A1C87-D465-470F-A9BC-88AFB68A6D6D}"/>
               </a:ext>
             </a:extLst>
           </p:cNvPr>
@@ -11150,7 +11150,7 @@
                   <a:srgbClr val="647287"/>
                 </a:solidFill>
               </a:rPr>
-              <a:t>1,618 tickets  /  avg 22.3 days</a:t>
+              <a:t>1,319 tickets  /  avg 24.6 days</a:t>
             </a:r>
           </a:p>
         </p:txBody>
@@ -11167,7 +11167,7 @@
         </p:xfrm>
         <a:graphic xmlns:a="http://schemas.openxmlformats.org/drawingml/2006/main">
           <a:graphicData uri="http://schemas.openxmlformats.org/drawingml/2006/chart">
-            <c:chart xmlns:r="http://schemas.openxmlformats.org/officeDocument/2006/relationships" xmlns:c="http://schemas.openxmlformats.org/drawingml/2006/chart" r:id="Rb3b5120400974a56"/>
+            <c:chart xmlns:r="http://schemas.openxmlformats.org/officeDocument/2006/relationships" xmlns:c="http://schemas.openxmlformats.org/drawingml/2006/chart" r:id="R215d745811014de6"/>
           </a:graphicData>
         </a:graphic>
       </p:graphicFrame>
@@ -11176,7 +11176,7 @@
           <p:cNvPr id="36" name="">
             <a:extLst xmlns:a="http://schemas.openxmlformats.org/drawingml/2006/main">
               <a:ext uri="{FF2B5EF4-FFF2-40B4-BE49-F238E27FC236}">
-                <a16:creationId xmlns:a16="http://schemas.microsoft.com/office/drawing/2014/main" id="{84F8158F-D818-4598-8362-07E214875ABE}"/>
+                <a16:creationId xmlns:a16="http://schemas.microsoft.com/office/drawing/2014/main" id="{853AFCB5-A3BC-4C4D-9A82-961364702362}"/>
               </a:ext>
             </a:extLst>
           </p:cNvPr>
@@ -11207,7 +11207,7 @@
           <p:cNvPr id="37" name="">
             <a:extLst xmlns:a="http://schemas.openxmlformats.org/drawingml/2006/main">
               <a:ext uri="{FF2B5EF4-FFF2-40B4-BE49-F238E27FC236}">
-                <a16:creationId xmlns:a16="http://schemas.microsoft.com/office/drawing/2014/main" id="{788C6209-9BFB-483A-9C79-51FEADB2235F}"/>
+                <a16:creationId xmlns:a16="http://schemas.microsoft.com/office/drawing/2014/main" id="{ED432F75-EEA2-4411-AD13-DC2939DAB370}"/>
               </a:ext>
             </a:extLst>
           </p:cNvPr>
@@ -11257,7 +11257,7 @@
           <p:cNvPr id="38" name="">
             <a:extLst xmlns:a="http://schemas.openxmlformats.org/drawingml/2006/main">
               <a:ext uri="{FF2B5EF4-FFF2-40B4-BE49-F238E27FC236}">
-                <a16:creationId xmlns:a16="http://schemas.microsoft.com/office/drawing/2014/main" id="{96B6BEA5-4D9D-4D5F-B30B-469D2EE01A0A}"/>
+                <a16:creationId xmlns:a16="http://schemas.microsoft.com/office/drawing/2014/main" id="{31CD0455-675E-48BC-9FF5-76294C97923D}"/>
               </a:ext>
             </a:extLst>
           </p:cNvPr>
@@ -11297,7 +11297,7 @@
                   <a:srgbClr val="1D2A3D"/>
                 </a:solidFill>
               </a:rPr>
-              <a:t>296 tickets</a:t>
+              <a:t>207 tickets</a:t>
             </a:r>
           </a:p>
         </p:txBody>
@@ -11307,7 +11307,7 @@
           <p:cNvPr id="39" name="">
             <a:extLst xmlns:a="http://schemas.openxmlformats.org/drawingml/2006/main">
               <a:ext uri="{FF2B5EF4-FFF2-40B4-BE49-F238E27FC236}">
-                <a16:creationId xmlns:a16="http://schemas.microsoft.com/office/drawing/2014/main" id="{7E789006-D0CB-4578-93AC-AEBAB695164C}"/>
+                <a16:creationId xmlns:a16="http://schemas.microsoft.com/office/drawing/2014/main" id="{8205791C-CF84-4F01-A781-6E12E758E5D2}"/>
               </a:ext>
             </a:extLst>
           </p:cNvPr>
@@ -11347,7 +11347,7 @@
                   <a:srgbClr val="1D2A3D"/>
                 </a:solidFill>
               </a:rPr>
-              <a:t>18.3%</a:t>
+              <a:t>15.7%</a:t>
             </a:r>
           </a:p>
         </p:txBody>
@@ -11357,7 +11357,7 @@
           <p:cNvPr id="40" name="">
             <a:extLst xmlns:a="http://schemas.openxmlformats.org/drawingml/2006/main">
               <a:ext uri="{FF2B5EF4-FFF2-40B4-BE49-F238E27FC236}">
-                <a16:creationId xmlns:a16="http://schemas.microsoft.com/office/drawing/2014/main" id="{F09B4902-5A8B-4848-A919-E00048634A49}"/>
+                <a16:creationId xmlns:a16="http://schemas.microsoft.com/office/drawing/2014/main" id="{90CC6604-50AE-43B3-ABF7-FD5398095B0E}"/>
               </a:ext>
             </a:extLst>
           </p:cNvPr>
@@ -11388,7 +11388,7 @@
           <p:cNvPr id="41" name="">
             <a:extLst xmlns:a="http://schemas.openxmlformats.org/drawingml/2006/main">
               <a:ext uri="{FF2B5EF4-FFF2-40B4-BE49-F238E27FC236}">
-                <a16:creationId xmlns:a16="http://schemas.microsoft.com/office/drawing/2014/main" id="{E7643521-0C39-4380-AE7E-00422C4B7A66}"/>
+                <a16:creationId xmlns:a16="http://schemas.microsoft.com/office/drawing/2014/main" id="{AF2D2FC6-A412-43A2-A7C4-E6FA45B6A7C1}"/>
               </a:ext>
             </a:extLst>
           </p:cNvPr>
@@ -11438,7 +11438,7 @@
           <p:cNvPr id="42" name="">
             <a:extLst xmlns:a="http://schemas.openxmlformats.org/drawingml/2006/main">
               <a:ext uri="{FF2B5EF4-FFF2-40B4-BE49-F238E27FC236}">
-                <a16:creationId xmlns:a16="http://schemas.microsoft.com/office/drawing/2014/main" id="{D6F94062-30BD-418E-BE5E-F6076652A627}"/>
+                <a16:creationId xmlns:a16="http://schemas.microsoft.com/office/drawing/2014/main" id="{AAB93B87-8BDB-4978-A7C2-1C45C3795496}"/>
               </a:ext>
             </a:extLst>
           </p:cNvPr>
@@ -11478,7 +11478,7 @@
                   <a:srgbClr val="1D2A3D"/>
                 </a:solidFill>
               </a:rPr>
-              <a:t>469 tickets</a:t>
+              <a:t>352 tickets</a:t>
             </a:r>
           </a:p>
         </p:txBody>
@@ -11488,7 +11488,7 @@
           <p:cNvPr id="43" name="">
             <a:extLst xmlns:a="http://schemas.openxmlformats.org/drawingml/2006/main">
               <a:ext uri="{FF2B5EF4-FFF2-40B4-BE49-F238E27FC236}">
-                <a16:creationId xmlns:a16="http://schemas.microsoft.com/office/drawing/2014/main" id="{8AB7FB95-C6BE-45BA-9502-2E38549A38CB}"/>
+                <a16:creationId xmlns:a16="http://schemas.microsoft.com/office/drawing/2014/main" id="{3EA0B9BD-3DC8-4171-BE45-5F9F8E29941F}"/>
               </a:ext>
             </a:extLst>
           </p:cNvPr>
@@ -11528,7 +11528,7 @@
                   <a:srgbClr val="1D2A3D"/>
                 </a:solidFill>
               </a:rPr>
-              <a:t>29.0%</a:t>
+              <a:t>26.7%</a:t>
             </a:r>
           </a:p>
         </p:txBody>
@@ -11538,7 +11538,7 @@
           <p:cNvPr id="44" name="">
             <a:extLst xmlns:a="http://schemas.openxmlformats.org/drawingml/2006/main">
               <a:ext uri="{FF2B5EF4-FFF2-40B4-BE49-F238E27FC236}">
-                <a16:creationId xmlns:a16="http://schemas.microsoft.com/office/drawing/2014/main" id="{7D04E80A-D07E-490A-A85F-7BA77223CB52}"/>
+                <a16:creationId xmlns:a16="http://schemas.microsoft.com/office/drawing/2014/main" id="{6BEF55A9-F9B0-41DC-8A80-13A832AFF9D0}"/>
               </a:ext>
             </a:extLst>
           </p:cNvPr>
@@ -11569,7 +11569,7 @@
           <p:cNvPr id="45" name="">
             <a:extLst xmlns:a="http://schemas.openxmlformats.org/drawingml/2006/main">
               <a:ext uri="{FF2B5EF4-FFF2-40B4-BE49-F238E27FC236}">
-                <a16:creationId xmlns:a16="http://schemas.microsoft.com/office/drawing/2014/main" id="{40469E9C-8F61-48A6-853A-0E3AFBCD8BA8}"/>
+                <a16:creationId xmlns:a16="http://schemas.microsoft.com/office/drawing/2014/main" id="{5AFA0B49-16B4-493B-AEF4-8ABA8A2B05C0}"/>
               </a:ext>
             </a:extLst>
           </p:cNvPr>
@@ -11619,7 +11619,7 @@
           <p:cNvPr id="46" name="">
             <a:extLst xmlns:a="http://schemas.openxmlformats.org/drawingml/2006/main">
               <a:ext uri="{FF2B5EF4-FFF2-40B4-BE49-F238E27FC236}">
-                <a16:creationId xmlns:a16="http://schemas.microsoft.com/office/drawing/2014/main" id="{8E2EA4D7-9459-458B-A869-DB2BCCEA0DE7}"/>
+                <a16:creationId xmlns:a16="http://schemas.microsoft.com/office/drawing/2014/main" id="{BB311192-9DF5-4EBD-B713-00906A3E8F14}"/>
               </a:ext>
             </a:extLst>
           </p:cNvPr>
@@ -11659,7 +11659,7 @@
                   <a:srgbClr val="1D2A3D"/>
                 </a:solidFill>
               </a:rPr>
-              <a:t>275 tickets</a:t>
+              <a:t>216 tickets</a:t>
             </a:r>
           </a:p>
         </p:txBody>
@@ -11669,7 +11669,7 @@
           <p:cNvPr id="47" name="">
             <a:extLst xmlns:a="http://schemas.openxmlformats.org/drawingml/2006/main">
               <a:ext uri="{FF2B5EF4-FFF2-40B4-BE49-F238E27FC236}">
-                <a16:creationId xmlns:a16="http://schemas.microsoft.com/office/drawing/2014/main" id="{56FCCCC6-0841-472F-A6EE-61E4025300E4}"/>
+                <a16:creationId xmlns:a16="http://schemas.microsoft.com/office/drawing/2014/main" id="{B013C4CC-DB05-435E-BF7B-E4282A97F6CC}"/>
               </a:ext>
             </a:extLst>
           </p:cNvPr>
@@ -11709,7 +11709,7 @@
                   <a:srgbClr val="1D2A3D"/>
                 </a:solidFill>
               </a:rPr>
-              <a:t>17.0%</a:t>
+              <a:t>16.4%</a:t>
             </a:r>
           </a:p>
         </p:txBody>
@@ -11719,7 +11719,7 @@
           <p:cNvPr id="48" name="">
             <a:extLst xmlns:a="http://schemas.openxmlformats.org/drawingml/2006/main">
               <a:ext uri="{FF2B5EF4-FFF2-40B4-BE49-F238E27FC236}">
-                <a16:creationId xmlns:a16="http://schemas.microsoft.com/office/drawing/2014/main" id="{EA42792D-2A96-4CA5-9570-3D8810E71087}"/>
+                <a16:creationId xmlns:a16="http://schemas.microsoft.com/office/drawing/2014/main" id="{807EE615-8832-472E-9330-21CB85904E22}"/>
               </a:ext>
             </a:extLst>
           </p:cNvPr>
@@ -11750,7 +11750,7 @@
           <p:cNvPr id="49" name="">
             <a:extLst xmlns:a="http://schemas.openxmlformats.org/drawingml/2006/main">
               <a:ext uri="{FF2B5EF4-FFF2-40B4-BE49-F238E27FC236}">
-                <a16:creationId xmlns:a16="http://schemas.microsoft.com/office/drawing/2014/main" id="{2D1036F3-C659-4930-A67E-F87470C06111}"/>
+                <a16:creationId xmlns:a16="http://schemas.microsoft.com/office/drawing/2014/main" id="{85C0D649-5A4B-4B70-80BD-404F0E44C71E}"/>
               </a:ext>
             </a:extLst>
           </p:cNvPr>
@@ -11800,7 +11800,7 @@
           <p:cNvPr id="50" name="">
             <a:extLst xmlns:a="http://schemas.openxmlformats.org/drawingml/2006/main">
               <a:ext uri="{FF2B5EF4-FFF2-40B4-BE49-F238E27FC236}">
-                <a16:creationId xmlns:a16="http://schemas.microsoft.com/office/drawing/2014/main" id="{60A43BC3-6A9F-4A8D-BB70-496F9F2E7CFA}"/>
+                <a16:creationId xmlns:a16="http://schemas.microsoft.com/office/drawing/2014/main" id="{B3326C85-2ED0-49DE-8E07-E1FF1706F804}"/>
               </a:ext>
             </a:extLst>
           </p:cNvPr>
@@ -11840,7 +11840,7 @@
                   <a:srgbClr val="1D2A3D"/>
                 </a:solidFill>
               </a:rPr>
-              <a:t>187 tickets</a:t>
+              <a:t>164 tickets</a:t>
             </a:r>
           </a:p>
         </p:txBody>
@@ -11850,7 +11850,7 @@
           <p:cNvPr id="51" name="">
             <a:extLst xmlns:a="http://schemas.openxmlformats.org/drawingml/2006/main">
               <a:ext uri="{FF2B5EF4-FFF2-40B4-BE49-F238E27FC236}">
-                <a16:creationId xmlns:a16="http://schemas.microsoft.com/office/drawing/2014/main" id="{8E04EC7A-2B91-45AE-95E3-2A85DC1C0329}"/>
+                <a16:creationId xmlns:a16="http://schemas.microsoft.com/office/drawing/2014/main" id="{1E4462A3-0477-4BB8-BB79-AEB184F6640C}"/>
               </a:ext>
             </a:extLst>
           </p:cNvPr>
@@ -11890,7 +11890,7 @@
                   <a:srgbClr val="1D2A3D"/>
                 </a:solidFill>
               </a:rPr>
-              <a:t>11.6%</a:t>
+              <a:t>12.4%</a:t>
             </a:r>
           </a:p>
         </p:txBody>
@@ -11900,7 +11900,7 @@
           <p:cNvPr id="52" name="">
             <a:extLst xmlns:a="http://schemas.openxmlformats.org/drawingml/2006/main">
               <a:ext uri="{FF2B5EF4-FFF2-40B4-BE49-F238E27FC236}">
-                <a16:creationId xmlns:a16="http://schemas.microsoft.com/office/drawing/2014/main" id="{96A672BF-F74B-4A3F-9D4F-1FA640CE8982}"/>
+                <a16:creationId xmlns:a16="http://schemas.microsoft.com/office/drawing/2014/main" id="{A5C316B8-544C-4341-B86A-DD5B5BDEF34B}"/>
               </a:ext>
             </a:extLst>
           </p:cNvPr>
@@ -11931,7 +11931,7 @@
           <p:cNvPr id="53" name="">
             <a:extLst xmlns:a="http://schemas.openxmlformats.org/drawingml/2006/main">
               <a:ext uri="{FF2B5EF4-FFF2-40B4-BE49-F238E27FC236}">
-                <a16:creationId xmlns:a16="http://schemas.microsoft.com/office/drawing/2014/main" id="{1CCF48C6-10A0-47CA-B5FB-56485E495155}"/>
+                <a16:creationId xmlns:a16="http://schemas.microsoft.com/office/drawing/2014/main" id="{A28A5D03-4845-48E1-867F-202A2E658920}"/>
               </a:ext>
             </a:extLst>
           </p:cNvPr>
@@ -11981,7 +11981,7 @@
           <p:cNvPr id="54" name="">
             <a:extLst xmlns:a="http://schemas.openxmlformats.org/drawingml/2006/main">
               <a:ext uri="{FF2B5EF4-FFF2-40B4-BE49-F238E27FC236}">
-                <a16:creationId xmlns:a16="http://schemas.microsoft.com/office/drawing/2014/main" id="{7E2414AF-B9E5-42BD-AFF7-270C75BFD821}"/>
+                <a16:creationId xmlns:a16="http://schemas.microsoft.com/office/drawing/2014/main" id="{E2295697-44D5-4568-86BB-1103B72C4F90}"/>
               </a:ext>
             </a:extLst>
           </p:cNvPr>
@@ -12021,7 +12021,7 @@
                   <a:srgbClr val="1D2A3D"/>
                 </a:solidFill>
               </a:rPr>
-              <a:t>287 tickets</a:t>
+              <a:t>273 tickets</a:t>
             </a:r>
           </a:p>
         </p:txBody>
@@ -12031,7 +12031,7 @@
           <p:cNvPr id="55" name="">
             <a:extLst xmlns:a="http://schemas.openxmlformats.org/drawingml/2006/main">
               <a:ext uri="{FF2B5EF4-FFF2-40B4-BE49-F238E27FC236}">
-                <a16:creationId xmlns:a16="http://schemas.microsoft.com/office/drawing/2014/main" id="{CE294519-AAA0-4163-8F54-11DE4105C469}"/>
+                <a16:creationId xmlns:a16="http://schemas.microsoft.com/office/drawing/2014/main" id="{D6F24CB4-8A3F-4D90-8CDF-B834486D9689}"/>
               </a:ext>
             </a:extLst>
           </p:cNvPr>
@@ -12071,7 +12071,7 @@
                   <a:srgbClr val="1D2A3D"/>
                 </a:solidFill>
               </a:rPr>
-              <a:t>17.7%</a:t>
+              <a:t>20.7%</a:t>
             </a:r>
           </a:p>
         </p:txBody>
@@ -12081,7 +12081,7 @@
           <p:cNvPr id="56" name="">
             <a:extLst xmlns:a="http://schemas.openxmlformats.org/drawingml/2006/main">
               <a:ext uri="{FF2B5EF4-FFF2-40B4-BE49-F238E27FC236}">
-                <a16:creationId xmlns:a16="http://schemas.microsoft.com/office/drawing/2014/main" id="{86AD31F7-8738-45FA-961C-47B3ED50F2C4}"/>
+                <a16:creationId xmlns:a16="http://schemas.microsoft.com/office/drawing/2014/main" id="{D5A0FF1A-73E5-45B7-AD8B-9C754AAE1B3C}"/>
               </a:ext>
             </a:extLst>
           </p:cNvPr>
@@ -12112,7 +12112,7 @@
           <p:cNvPr id="57" name="">
             <a:extLst xmlns:a="http://schemas.openxmlformats.org/drawingml/2006/main">
               <a:ext uri="{FF2B5EF4-FFF2-40B4-BE49-F238E27FC236}">
-                <a16:creationId xmlns:a16="http://schemas.microsoft.com/office/drawing/2014/main" id="{EA64E73F-3C5B-4C99-A7A9-61A2E3251D5F}"/>
+                <a16:creationId xmlns:a16="http://schemas.microsoft.com/office/drawing/2014/main" id="{400850E1-B36A-4961-A636-3AB11B15D176}"/>
               </a:ext>
             </a:extLst>
           </p:cNvPr>
@@ -12162,7 +12162,7 @@
           <p:cNvPr id="58" name="">
             <a:extLst xmlns:a="http://schemas.openxmlformats.org/drawingml/2006/main">
               <a:ext uri="{FF2B5EF4-FFF2-40B4-BE49-F238E27FC236}">
-                <a16:creationId xmlns:a16="http://schemas.microsoft.com/office/drawing/2014/main" id="{90468DA6-FEBE-46DE-9C82-9D4F0E4BBA0A}"/>
+                <a16:creationId xmlns:a16="http://schemas.microsoft.com/office/drawing/2014/main" id="{A54FC0B5-F2DA-4FEC-8B6E-899144738B77}"/>
               </a:ext>
             </a:extLst>
           </p:cNvPr>
@@ -12202,7 +12202,7 @@
                   <a:srgbClr val="1D2A3D"/>
                 </a:solidFill>
               </a:rPr>
-              <a:t>104 tickets</a:t>
+              <a:t>107 tickets</a:t>
             </a:r>
           </a:p>
         </p:txBody>
@@ -12212,7 +12212,7 @@
           <p:cNvPr id="59" name="">
             <a:extLst xmlns:a="http://schemas.openxmlformats.org/drawingml/2006/main">
               <a:ext uri="{FF2B5EF4-FFF2-40B4-BE49-F238E27FC236}">
-                <a16:creationId xmlns:a16="http://schemas.microsoft.com/office/drawing/2014/main" id="{4C97DF4B-5CB7-4CDE-8772-6CFD948CCC27}"/>
+                <a16:creationId xmlns:a16="http://schemas.microsoft.com/office/drawing/2014/main" id="{E47A9D26-2E91-4FE5-9CBA-836438BAE2C1}"/>
               </a:ext>
             </a:extLst>
           </p:cNvPr>
@@ -12252,7 +12252,7 @@
                   <a:srgbClr val="1D2A3D"/>
                 </a:solidFill>
               </a:rPr>
-              <a:t>6.4%</a:t>
+              <a:t>8.1%</a:t>
             </a:r>
           </a:p>
         </p:txBody>
@@ -12262,7 +12262,7 @@
           <p:cNvPr id="60" name="">
             <a:extLst xmlns:a="http://schemas.openxmlformats.org/drawingml/2006/main">
               <a:ext uri="{FF2B5EF4-FFF2-40B4-BE49-F238E27FC236}">
-                <a16:creationId xmlns:a16="http://schemas.microsoft.com/office/drawing/2014/main" id="{8B6E8CF8-7BC8-43F4-BD3F-C7F9B02BD66E}"/>
+                <a16:creationId xmlns:a16="http://schemas.microsoft.com/office/drawing/2014/main" id="{F587B1CC-A7EF-4AE5-A346-0693626AC246}"/>
               </a:ext>
             </a:extLst>
           </p:cNvPr>
@@ -12303,7 +12303,7 @@
           <p:cNvPr id="61" name="">
             <a:extLst xmlns:a="http://schemas.openxmlformats.org/drawingml/2006/main">
               <a:ext uri="{FF2B5EF4-FFF2-40B4-BE49-F238E27FC236}">
-                <a16:creationId xmlns:a16="http://schemas.microsoft.com/office/drawing/2014/main" id="{ABC50671-3039-4BAB-98DF-27B3E979CBDA}"/>
+                <a16:creationId xmlns:a16="http://schemas.microsoft.com/office/drawing/2014/main" id="{1A15C5B3-075F-454C-8295-B385D0D98170}"/>
               </a:ext>
             </a:extLst>
           </p:cNvPr>
@@ -12353,7 +12353,7 @@
           <p:cNvPr id="62" name="">
             <a:extLst xmlns:a="http://schemas.openxmlformats.org/drawingml/2006/main">
               <a:ext uri="{FF2B5EF4-FFF2-40B4-BE49-F238E27FC236}">
-                <a16:creationId xmlns:a16="http://schemas.microsoft.com/office/drawing/2014/main" id="{9B087997-74C2-4ED3-AAEE-C8FE9849AFD2}"/>
+                <a16:creationId xmlns:a16="http://schemas.microsoft.com/office/drawing/2014/main" id="{78BB1554-78A7-49FF-B9C1-E35FEE5032C0}"/>
               </a:ext>
             </a:extLst>
           </p:cNvPr>
@@ -12393,7 +12393,7 @@
                   <a:srgbClr val="647287"/>
                 </a:solidFill>
               </a:rPr>
-              <a:t>209 tickets  /  avg 29.2 days</a:t>
+              <a:t>81 tickets  /  avg 26.0 days</a:t>
             </a:r>
           </a:p>
         </p:txBody>
@@ -12410,7 +12410,7 @@
         </p:xfrm>
         <a:graphic xmlns:a="http://schemas.openxmlformats.org/drawingml/2006/main">
           <a:graphicData uri="http://schemas.openxmlformats.org/drawingml/2006/chart">
-            <c:chart xmlns:r="http://schemas.openxmlformats.org/officeDocument/2006/relationships" xmlns:c="http://schemas.openxmlformats.org/drawingml/2006/chart" r:id="Rb05c3b21cc354361"/>
+            <c:chart xmlns:r="http://schemas.openxmlformats.org/officeDocument/2006/relationships" xmlns:c="http://schemas.openxmlformats.org/drawingml/2006/chart" r:id="R4b7852b342ac4e29"/>
           </a:graphicData>
         </a:graphic>
       </p:graphicFrame>
@@ -12419,7 +12419,7 @@
           <p:cNvPr id="64" name="">
             <a:extLst xmlns:a="http://schemas.openxmlformats.org/drawingml/2006/main">
               <a:ext uri="{FF2B5EF4-FFF2-40B4-BE49-F238E27FC236}">
-                <a16:creationId xmlns:a16="http://schemas.microsoft.com/office/drawing/2014/main" id="{378836B3-BC64-40D1-955E-52527450EB11}"/>
+                <a16:creationId xmlns:a16="http://schemas.microsoft.com/office/drawing/2014/main" id="{3BD7A2A4-4E70-4C42-AE2E-9E1378EB2E20}"/>
               </a:ext>
             </a:extLst>
           </p:cNvPr>
@@ -12450,7 +12450,7 @@
           <p:cNvPr id="65" name="">
             <a:extLst xmlns:a="http://schemas.openxmlformats.org/drawingml/2006/main">
               <a:ext uri="{FF2B5EF4-FFF2-40B4-BE49-F238E27FC236}">
-                <a16:creationId xmlns:a16="http://schemas.microsoft.com/office/drawing/2014/main" id="{751870D8-C3B4-4367-A77F-EA27A73E253D}"/>
+                <a16:creationId xmlns:a16="http://schemas.microsoft.com/office/drawing/2014/main" id="{928C44FB-B789-4F7B-8715-E9897E699177}"/>
               </a:ext>
             </a:extLst>
           </p:cNvPr>
@@ -12500,7 +12500,7 @@
           <p:cNvPr id="66" name="">
             <a:extLst xmlns:a="http://schemas.openxmlformats.org/drawingml/2006/main">
               <a:ext uri="{FF2B5EF4-FFF2-40B4-BE49-F238E27FC236}">
-                <a16:creationId xmlns:a16="http://schemas.microsoft.com/office/drawing/2014/main" id="{034283AC-8EA1-45D5-BBDB-C3EACA5B8583}"/>
+                <a16:creationId xmlns:a16="http://schemas.microsoft.com/office/drawing/2014/main" id="{A98EC2D1-7168-414D-A6F8-418B3C265A70}"/>
               </a:ext>
             </a:extLst>
           </p:cNvPr>
@@ -12540,7 +12540,7 @@
                   <a:srgbClr val="1D2A3D"/>
                 </a:solidFill>
               </a:rPr>
-              <a:t>19 tickets</a:t>
+              <a:t>8 tickets</a:t>
             </a:r>
           </a:p>
         </p:txBody>
@@ -12550,7 +12550,7 @@
           <p:cNvPr id="67" name="">
             <a:extLst xmlns:a="http://schemas.openxmlformats.org/drawingml/2006/main">
               <a:ext uri="{FF2B5EF4-FFF2-40B4-BE49-F238E27FC236}">
-                <a16:creationId xmlns:a16="http://schemas.microsoft.com/office/drawing/2014/main" id="{7A5CCEFD-6103-4718-BDB4-591B8EF989B1}"/>
+                <a16:creationId xmlns:a16="http://schemas.microsoft.com/office/drawing/2014/main" id="{E8623285-CC50-4897-A91D-71A8E210E76D}"/>
               </a:ext>
             </a:extLst>
           </p:cNvPr>
@@ -12590,7 +12590,7 @@
                   <a:srgbClr val="1D2A3D"/>
                 </a:solidFill>
               </a:rPr>
-              <a:t>9.1%</a:t>
+              <a:t>9.9%</a:t>
             </a:r>
           </a:p>
         </p:txBody>
@@ -12600,7 +12600,7 @@
           <p:cNvPr id="68" name="">
             <a:extLst xmlns:a="http://schemas.openxmlformats.org/drawingml/2006/main">
               <a:ext uri="{FF2B5EF4-FFF2-40B4-BE49-F238E27FC236}">
-                <a16:creationId xmlns:a16="http://schemas.microsoft.com/office/drawing/2014/main" id="{4C175157-A7AC-4698-972A-9577A0647C90}"/>
+                <a16:creationId xmlns:a16="http://schemas.microsoft.com/office/drawing/2014/main" id="{039CA2E4-3CCD-41E9-BFFF-D4C23C0868CE}"/>
               </a:ext>
             </a:extLst>
           </p:cNvPr>
@@ -12631,7 +12631,7 @@
           <p:cNvPr id="69" name="">
             <a:extLst xmlns:a="http://schemas.openxmlformats.org/drawingml/2006/main">
               <a:ext uri="{FF2B5EF4-FFF2-40B4-BE49-F238E27FC236}">
-                <a16:creationId xmlns:a16="http://schemas.microsoft.com/office/drawing/2014/main" id="{0A58C76A-F465-44AE-8D9E-C533C8BEDDAD}"/>
+                <a16:creationId xmlns:a16="http://schemas.microsoft.com/office/drawing/2014/main" id="{20216868-CCBB-4E66-86B8-4942D364842C}"/>
               </a:ext>
             </a:extLst>
           </p:cNvPr>
@@ -12681,7 +12681,7 @@
           <p:cNvPr id="70" name="">
             <a:extLst xmlns:a="http://schemas.openxmlformats.org/drawingml/2006/main">
               <a:ext uri="{FF2B5EF4-FFF2-40B4-BE49-F238E27FC236}">
-                <a16:creationId xmlns:a16="http://schemas.microsoft.com/office/drawing/2014/main" id="{D4860966-4809-4A64-A917-D900CFA808A9}"/>
+                <a16:creationId xmlns:a16="http://schemas.microsoft.com/office/drawing/2014/main" id="{3F0D4F1E-1E24-4A78-9A7A-952F3112086C}"/>
               </a:ext>
             </a:extLst>
           </p:cNvPr>
@@ -12721,7 +12721,7 @@
                   <a:srgbClr val="1D2A3D"/>
                 </a:solidFill>
               </a:rPr>
-              <a:t>47 tickets</a:t>
+              <a:t>24 tickets</a:t>
             </a:r>
           </a:p>
         </p:txBody>
@@ -12731,7 +12731,7 @@
           <p:cNvPr id="71" name="">
             <a:extLst xmlns:a="http://schemas.openxmlformats.org/drawingml/2006/main">
               <a:ext uri="{FF2B5EF4-FFF2-40B4-BE49-F238E27FC236}">
-                <a16:creationId xmlns:a16="http://schemas.microsoft.com/office/drawing/2014/main" id="{0A75BB8E-1BD0-410F-B45D-404F4F02A2CC}"/>
+                <a16:creationId xmlns:a16="http://schemas.microsoft.com/office/drawing/2014/main" id="{690E079D-6D89-444C-B3B5-ABC6E160AC50}"/>
               </a:ext>
             </a:extLst>
           </p:cNvPr>
@@ -12771,7 +12771,7 @@
                   <a:srgbClr val="1D2A3D"/>
                 </a:solidFill>
               </a:rPr>
-              <a:t>22.5%</a:t>
+              <a:t>29.6%</a:t>
             </a:r>
           </a:p>
         </p:txBody>
@@ -12781,7 +12781,7 @@
           <p:cNvPr id="72" name="">
             <a:extLst xmlns:a="http://schemas.openxmlformats.org/drawingml/2006/main">
               <a:ext uri="{FF2B5EF4-FFF2-40B4-BE49-F238E27FC236}">
-                <a16:creationId xmlns:a16="http://schemas.microsoft.com/office/drawing/2014/main" id="{BF2F75B5-F455-4786-9F29-4EC9EDA0E424}"/>
+                <a16:creationId xmlns:a16="http://schemas.microsoft.com/office/drawing/2014/main" id="{97E7443A-9212-4D19-9BB1-2861EACCB0B6}"/>
               </a:ext>
             </a:extLst>
           </p:cNvPr>
@@ -12812,7 +12812,7 @@
           <p:cNvPr id="73" name="">
             <a:extLst xmlns:a="http://schemas.openxmlformats.org/drawingml/2006/main">
               <a:ext uri="{FF2B5EF4-FFF2-40B4-BE49-F238E27FC236}">
-                <a16:creationId xmlns:a16="http://schemas.microsoft.com/office/drawing/2014/main" id="{74EB3679-6C5B-4DE2-80B0-968935D09E30}"/>
+                <a16:creationId xmlns:a16="http://schemas.microsoft.com/office/drawing/2014/main" id="{4A091701-FB08-4F59-868D-9912E4CDB5E9}"/>
               </a:ext>
             </a:extLst>
           </p:cNvPr>
@@ -12862,7 +12862,7 @@
           <p:cNvPr id="74" name="">
             <a:extLst xmlns:a="http://schemas.openxmlformats.org/drawingml/2006/main">
               <a:ext uri="{FF2B5EF4-FFF2-40B4-BE49-F238E27FC236}">
-                <a16:creationId xmlns:a16="http://schemas.microsoft.com/office/drawing/2014/main" id="{6A4A832F-D2A9-41CC-8DBE-0D29F687AAEC}"/>
+                <a16:creationId xmlns:a16="http://schemas.microsoft.com/office/drawing/2014/main" id="{CA89B044-6526-4B9C-8CEB-780770C9DECE}"/>
               </a:ext>
             </a:extLst>
           </p:cNvPr>
@@ -12902,7 +12902,7 @@
                   <a:srgbClr val="1D2A3D"/>
                 </a:solidFill>
               </a:rPr>
-              <a:t>34 tickets</a:t>
+              <a:t>17 tickets</a:t>
             </a:r>
           </a:p>
         </p:txBody>
@@ -12912,7 +12912,7 @@
           <p:cNvPr id="75" name="">
             <a:extLst xmlns:a="http://schemas.openxmlformats.org/drawingml/2006/main">
               <a:ext uri="{FF2B5EF4-FFF2-40B4-BE49-F238E27FC236}">
-                <a16:creationId xmlns:a16="http://schemas.microsoft.com/office/drawing/2014/main" id="{02EC90EF-E2A2-4C6D-B95B-7E5B46407AC2}"/>
+                <a16:creationId xmlns:a16="http://schemas.microsoft.com/office/drawing/2014/main" id="{71899820-1B11-4D35-B34A-08507E705139}"/>
               </a:ext>
             </a:extLst>
           </p:cNvPr>
@@ -12952,7 +12952,7 @@
                   <a:srgbClr val="1D2A3D"/>
                 </a:solidFill>
               </a:rPr>
-              <a:t>16.3%</a:t>
+              <a:t>21.0%</a:t>
             </a:r>
           </a:p>
         </p:txBody>
@@ -12962,7 +12962,7 @@
           <p:cNvPr id="76" name="">
             <a:extLst xmlns:a="http://schemas.openxmlformats.org/drawingml/2006/main">
               <a:ext uri="{FF2B5EF4-FFF2-40B4-BE49-F238E27FC236}">
-                <a16:creationId xmlns:a16="http://schemas.microsoft.com/office/drawing/2014/main" id="{C6AC30FF-0FBC-470D-8F7D-C85F359EC5F3}"/>
+                <a16:creationId xmlns:a16="http://schemas.microsoft.com/office/drawing/2014/main" id="{F0D6D007-0332-47C1-940E-E871E45E91B0}"/>
               </a:ext>
             </a:extLst>
           </p:cNvPr>
@@ -12993,7 +12993,7 @@
           <p:cNvPr id="77" name="">
             <a:extLst xmlns:a="http://schemas.openxmlformats.org/drawingml/2006/main">
               <a:ext uri="{FF2B5EF4-FFF2-40B4-BE49-F238E27FC236}">
-                <a16:creationId xmlns:a16="http://schemas.microsoft.com/office/drawing/2014/main" id="{C1770970-D004-459C-A970-EDAAFEF176F2}"/>
+                <a16:creationId xmlns:a16="http://schemas.microsoft.com/office/drawing/2014/main" id="{9861F2B9-8D60-4311-9B5D-AEB345E188F0}"/>
               </a:ext>
             </a:extLst>
           </p:cNvPr>
@@ -13043,7 +13043,7 @@
           <p:cNvPr id="78" name="">
             <a:extLst xmlns:a="http://schemas.openxmlformats.org/drawingml/2006/main">
               <a:ext uri="{FF2B5EF4-FFF2-40B4-BE49-F238E27FC236}">
-                <a16:creationId xmlns:a16="http://schemas.microsoft.com/office/drawing/2014/main" id="{2E2CB97D-3A65-48DF-91F5-8B4F97651E0B}"/>
+                <a16:creationId xmlns:a16="http://schemas.microsoft.com/office/drawing/2014/main" id="{D37798C2-6875-4A67-908D-22D1807A8561}"/>
               </a:ext>
             </a:extLst>
           </p:cNvPr>
@@ -13083,7 +13083,7 @@
                   <a:srgbClr val="1D2A3D"/>
                 </a:solidFill>
               </a:rPr>
-              <a:t>33 tickets</a:t>
+              <a:t>8 tickets</a:t>
             </a:r>
           </a:p>
         </p:txBody>
@@ -13093,7 +13093,7 @@
           <p:cNvPr id="79" name="">
             <a:extLst xmlns:a="http://schemas.openxmlformats.org/drawingml/2006/main">
               <a:ext uri="{FF2B5EF4-FFF2-40B4-BE49-F238E27FC236}">
-                <a16:creationId xmlns:a16="http://schemas.microsoft.com/office/drawing/2014/main" id="{54740B25-ECCB-4CE2-8C26-B75BC636C216}"/>
+                <a16:creationId xmlns:a16="http://schemas.microsoft.com/office/drawing/2014/main" id="{4FE33A7E-A9E9-490A-9DC8-D6272B87DA8C}"/>
               </a:ext>
             </a:extLst>
           </p:cNvPr>
@@ -13133,7 +13133,7 @@
                   <a:srgbClr val="1D2A3D"/>
                 </a:solidFill>
               </a:rPr>
-              <a:t>15.8%</a:t>
+              <a:t>9.9%</a:t>
             </a:r>
           </a:p>
         </p:txBody>
@@ -13143,7 +13143,7 @@
           <p:cNvPr id="80" name="">
             <a:extLst xmlns:a="http://schemas.openxmlformats.org/drawingml/2006/main">
               <a:ext uri="{FF2B5EF4-FFF2-40B4-BE49-F238E27FC236}">
-                <a16:creationId xmlns:a16="http://schemas.microsoft.com/office/drawing/2014/main" id="{E411A7FE-31D9-472E-B456-3A6529BC8021}"/>
+                <a16:creationId xmlns:a16="http://schemas.microsoft.com/office/drawing/2014/main" id="{8B31BAD6-E31F-4005-9323-C09D7FF18DB1}"/>
               </a:ext>
             </a:extLst>
           </p:cNvPr>
@@ -13174,7 +13174,7 @@
           <p:cNvPr id="81" name="">
             <a:extLst xmlns:a="http://schemas.openxmlformats.org/drawingml/2006/main">
               <a:ext uri="{FF2B5EF4-FFF2-40B4-BE49-F238E27FC236}">
-                <a16:creationId xmlns:a16="http://schemas.microsoft.com/office/drawing/2014/main" id="{FFC5D1A4-132B-4035-8ACA-24F1695D731F}"/>
+                <a16:creationId xmlns:a16="http://schemas.microsoft.com/office/drawing/2014/main" id="{378BE3A5-E453-4190-ABD7-CCAF67DD0778}"/>
               </a:ext>
             </a:extLst>
           </p:cNvPr>
@@ -13224,7 +13224,7 @@
           <p:cNvPr id="82" name="">
             <a:extLst xmlns:a="http://schemas.openxmlformats.org/drawingml/2006/main">
               <a:ext uri="{FF2B5EF4-FFF2-40B4-BE49-F238E27FC236}">
-                <a16:creationId xmlns:a16="http://schemas.microsoft.com/office/drawing/2014/main" id="{EF79C666-3A5B-4C7C-9CCF-086ECA886A69}"/>
+                <a16:creationId xmlns:a16="http://schemas.microsoft.com/office/drawing/2014/main" id="{18B283B9-81D6-462D-9475-8DAE6017CADF}"/>
               </a:ext>
             </a:extLst>
           </p:cNvPr>
@@ -13264,7 +13264,7 @@
                   <a:srgbClr val="1D2A3D"/>
                 </a:solidFill>
               </a:rPr>
-              <a:t>57 tickets</a:t>
+              <a:t>20 tickets</a:t>
             </a:r>
           </a:p>
         </p:txBody>
@@ -13274,7 +13274,7 @@
           <p:cNvPr id="83" name="">
             <a:extLst xmlns:a="http://schemas.openxmlformats.org/drawingml/2006/main">
               <a:ext uri="{FF2B5EF4-FFF2-40B4-BE49-F238E27FC236}">
-                <a16:creationId xmlns:a16="http://schemas.microsoft.com/office/drawing/2014/main" id="{4644286A-F80E-4AC1-B615-2EEA9B0DCE2A}"/>
+                <a16:creationId xmlns:a16="http://schemas.microsoft.com/office/drawing/2014/main" id="{DF0E64F4-A3B7-4356-9299-F6D0167D78F2}"/>
               </a:ext>
             </a:extLst>
           </p:cNvPr>
@@ -13314,7 +13314,7 @@
                   <a:srgbClr val="1D2A3D"/>
                 </a:solidFill>
               </a:rPr>
-              <a:t>27.3%</a:t>
+              <a:t>24.7%</a:t>
             </a:r>
           </a:p>
         </p:txBody>
@@ -13324,7 +13324,7 @@
           <p:cNvPr id="84" name="">
             <a:extLst xmlns:a="http://schemas.openxmlformats.org/drawingml/2006/main">
               <a:ext uri="{FF2B5EF4-FFF2-40B4-BE49-F238E27FC236}">
-                <a16:creationId xmlns:a16="http://schemas.microsoft.com/office/drawing/2014/main" id="{87069AD4-F7D7-44C0-9208-5F5FFAB9A3AF}"/>
+                <a16:creationId xmlns:a16="http://schemas.microsoft.com/office/drawing/2014/main" id="{02141BB3-BBB9-4B2C-AB62-78C6B1A4DBC5}"/>
               </a:ext>
             </a:extLst>
           </p:cNvPr>
@@ -13355,7 +13355,7 @@
           <p:cNvPr id="85" name="">
             <a:extLst xmlns:a="http://schemas.openxmlformats.org/drawingml/2006/main">
               <a:ext uri="{FF2B5EF4-FFF2-40B4-BE49-F238E27FC236}">
-                <a16:creationId xmlns:a16="http://schemas.microsoft.com/office/drawing/2014/main" id="{8D0D80AE-37B4-4484-837F-79E8AC6AFB27}"/>
+                <a16:creationId xmlns:a16="http://schemas.microsoft.com/office/drawing/2014/main" id="{ECC7880B-01F1-483F-90BC-B9D0B032DA3B}"/>
               </a:ext>
             </a:extLst>
           </p:cNvPr>
@@ -13405,7 +13405,7 @@
           <p:cNvPr id="86" name="">
             <a:extLst xmlns:a="http://schemas.openxmlformats.org/drawingml/2006/main">
               <a:ext uri="{FF2B5EF4-FFF2-40B4-BE49-F238E27FC236}">
-                <a16:creationId xmlns:a16="http://schemas.microsoft.com/office/drawing/2014/main" id="{2F13C95E-353F-4C99-8318-64F905A4BAD2}"/>
+                <a16:creationId xmlns:a16="http://schemas.microsoft.com/office/drawing/2014/main" id="{471FB0EE-D696-4FFE-8786-D6E5660C8C27}"/>
               </a:ext>
             </a:extLst>
           </p:cNvPr>
@@ -13445,7 +13445,7 @@
                   <a:srgbClr val="1D2A3D"/>
                 </a:solidFill>
               </a:rPr>
-              <a:t>19 tickets</a:t>
+              <a:t>4 tickets</a:t>
             </a:r>
           </a:p>
         </p:txBody>
@@ -13455,7 +13455,7 @@
           <p:cNvPr id="87" name="">
             <a:extLst xmlns:a="http://schemas.openxmlformats.org/drawingml/2006/main">
               <a:ext uri="{FF2B5EF4-FFF2-40B4-BE49-F238E27FC236}">
-                <a16:creationId xmlns:a16="http://schemas.microsoft.com/office/drawing/2014/main" id="{4E8D0737-448D-4CEA-8EE2-F40803DD266D}"/>
+                <a16:creationId xmlns:a16="http://schemas.microsoft.com/office/drawing/2014/main" id="{AA8D1B71-BC39-451B-AAA9-5EC61C441025}"/>
               </a:ext>
             </a:extLst>
           </p:cNvPr>
@@ -13495,7 +13495,7 @@
                   <a:srgbClr val="1D2A3D"/>
                 </a:solidFill>
               </a:rPr>
-              <a:t>9.1%</a:t>
+              <a:t>4.9%</a:t>
             </a:r>
           </a:p>
         </p:txBody>
@@ -13505,7 +13505,7 @@
           <p:cNvPr id="88" name="">
             <a:extLst xmlns:a="http://schemas.openxmlformats.org/drawingml/2006/main">
               <a:ext uri="{FF2B5EF4-FFF2-40B4-BE49-F238E27FC236}">
-                <a16:creationId xmlns:a16="http://schemas.microsoft.com/office/drawing/2014/main" id="{50CF3420-7A70-4FB1-B66C-C6E35E428160}"/>
+                <a16:creationId xmlns:a16="http://schemas.microsoft.com/office/drawing/2014/main" id="{6336D04C-4559-450E-BCEA-FE2B0B42540F}"/>
               </a:ext>
             </a:extLst>
           </p:cNvPr>
@@ -13546,7 +13546,7 @@
           <p:cNvPr id="89" name="">
             <a:extLst xmlns:a="http://schemas.openxmlformats.org/drawingml/2006/main">
               <a:ext uri="{FF2B5EF4-FFF2-40B4-BE49-F238E27FC236}">
-                <a16:creationId xmlns:a16="http://schemas.microsoft.com/office/drawing/2014/main" id="{0C03A1B3-D62F-4A8D-9708-5A1FDAFC25F3}"/>
+                <a16:creationId xmlns:a16="http://schemas.microsoft.com/office/drawing/2014/main" id="{568CC6BD-5526-40E8-A6CF-B350044970C6}"/>
               </a:ext>
             </a:extLst>
           </p:cNvPr>
@@ -13596,7 +13596,7 @@
           <p:cNvPr id="90" name="">
             <a:extLst xmlns:a="http://schemas.openxmlformats.org/drawingml/2006/main">
               <a:ext uri="{FF2B5EF4-FFF2-40B4-BE49-F238E27FC236}">
-                <a16:creationId xmlns:a16="http://schemas.microsoft.com/office/drawing/2014/main" id="{35A2F299-5B8C-4D07-B3CE-49DEF0117B2F}"/>
+                <a16:creationId xmlns:a16="http://schemas.microsoft.com/office/drawing/2014/main" id="{EF1C032E-6DA5-427E-9FDC-0E5BF23FBE7D}"/>
               </a:ext>
             </a:extLst>
           </p:cNvPr>
@@ -13636,7 +13636,7 @@
                   <a:srgbClr val="647287"/>
                 </a:solidFill>
               </a:rPr>
-              <a:t>15 tickets  /  avg 36.7 days</a:t>
+              <a:t>12 tickets  /  avg 30.1 days</a:t>
             </a:r>
           </a:p>
         </p:txBody>
@@ -13653,7 +13653,7 @@
         </p:xfrm>
         <a:graphic xmlns:a="http://schemas.openxmlformats.org/drawingml/2006/main">
           <a:graphicData uri="http://schemas.openxmlformats.org/drawingml/2006/chart">
-            <c:chart xmlns:r="http://schemas.openxmlformats.org/officeDocument/2006/relationships" xmlns:c="http://schemas.openxmlformats.org/drawingml/2006/chart" r:id="R8ecbbbef72c64a20"/>
+            <c:chart xmlns:r="http://schemas.openxmlformats.org/officeDocument/2006/relationships" xmlns:c="http://schemas.openxmlformats.org/drawingml/2006/chart" r:id="R7c6126e6200749a4"/>
           </a:graphicData>
         </a:graphic>
       </p:graphicFrame>
@@ -13662,7 +13662,7 @@
           <p:cNvPr id="92" name="">
             <a:extLst xmlns:a="http://schemas.openxmlformats.org/drawingml/2006/main">
               <a:ext uri="{FF2B5EF4-FFF2-40B4-BE49-F238E27FC236}">
-                <a16:creationId xmlns:a16="http://schemas.microsoft.com/office/drawing/2014/main" id="{E9D6DB83-39F8-42F7-ACC4-58A15EF4E8E8}"/>
+                <a16:creationId xmlns:a16="http://schemas.microsoft.com/office/drawing/2014/main" id="{3FA6FE8A-F089-41DE-BEF0-3F77DF2376A6}"/>
               </a:ext>
             </a:extLst>
           </p:cNvPr>
@@ -13693,7 +13693,7 @@
           <p:cNvPr id="93" name="">
             <a:extLst xmlns:a="http://schemas.openxmlformats.org/drawingml/2006/main">
               <a:ext uri="{FF2B5EF4-FFF2-40B4-BE49-F238E27FC236}">
-                <a16:creationId xmlns:a16="http://schemas.microsoft.com/office/drawing/2014/main" id="{B7524E7D-11D7-4684-ADF2-AEEC5D5844E2}"/>
+                <a16:creationId xmlns:a16="http://schemas.microsoft.com/office/drawing/2014/main" id="{81666D90-CDB6-463B-A576-15AFABE97679}"/>
               </a:ext>
             </a:extLst>
           </p:cNvPr>
@@ -13743,7 +13743,7 @@
           <p:cNvPr id="94" name="">
             <a:extLst xmlns:a="http://schemas.openxmlformats.org/drawingml/2006/main">
               <a:ext uri="{FF2B5EF4-FFF2-40B4-BE49-F238E27FC236}">
-                <a16:creationId xmlns:a16="http://schemas.microsoft.com/office/drawing/2014/main" id="{E1B19D97-7031-4A6C-B8A5-60516C7135BC}"/>
+                <a16:creationId xmlns:a16="http://schemas.microsoft.com/office/drawing/2014/main" id="{32B92485-EBDB-4AA1-A422-C20B0054E6C9}"/>
               </a:ext>
             </a:extLst>
           </p:cNvPr>
@@ -13793,7 +13793,7 @@
           <p:cNvPr id="95" name="">
             <a:extLst xmlns:a="http://schemas.openxmlformats.org/drawingml/2006/main">
               <a:ext uri="{FF2B5EF4-FFF2-40B4-BE49-F238E27FC236}">
-                <a16:creationId xmlns:a16="http://schemas.microsoft.com/office/drawing/2014/main" id="{8F2CC0EE-83E6-4ED1-868E-5AFED7B1245A}"/>
+                <a16:creationId xmlns:a16="http://schemas.microsoft.com/office/drawing/2014/main" id="{9E965E17-61F1-4B86-B724-5939A6B9127D}"/>
               </a:ext>
             </a:extLst>
           </p:cNvPr>
@@ -13833,7 +13833,7 @@
                   <a:srgbClr val="1D2A3D"/>
                 </a:solidFill>
               </a:rPr>
-              <a:t>20.0%</a:t>
+              <a:t>25.0%</a:t>
             </a:r>
           </a:p>
         </p:txBody>
@@ -13843,7 +13843,7 @@
           <p:cNvPr id="96" name="">
             <a:extLst xmlns:a="http://schemas.openxmlformats.org/drawingml/2006/main">
               <a:ext uri="{FF2B5EF4-FFF2-40B4-BE49-F238E27FC236}">
-                <a16:creationId xmlns:a16="http://schemas.microsoft.com/office/drawing/2014/main" id="{37201630-4BD5-4597-8343-8758CD51AFE2}"/>
+                <a16:creationId xmlns:a16="http://schemas.microsoft.com/office/drawing/2014/main" id="{2FBF1423-0449-4D3B-B3BC-8D010B00FCA4}"/>
               </a:ext>
             </a:extLst>
           </p:cNvPr>
@@ -13874,7 +13874,7 @@
           <p:cNvPr id="97" name="">
             <a:extLst xmlns:a="http://schemas.openxmlformats.org/drawingml/2006/main">
               <a:ext uri="{FF2B5EF4-FFF2-40B4-BE49-F238E27FC236}">
-                <a16:creationId xmlns:a16="http://schemas.microsoft.com/office/drawing/2014/main" id="{0141708F-BDD0-42A0-B067-0918FD1ECEA2}"/>
+                <a16:creationId xmlns:a16="http://schemas.microsoft.com/office/drawing/2014/main" id="{C89CBD59-A8A8-4830-883F-E47DA50EFB1C}"/>
               </a:ext>
             </a:extLst>
           </p:cNvPr>
@@ -13924,7 +13924,7 @@
           <p:cNvPr id="98" name="">
             <a:extLst xmlns:a="http://schemas.openxmlformats.org/drawingml/2006/main">
               <a:ext uri="{FF2B5EF4-FFF2-40B4-BE49-F238E27FC236}">
-                <a16:creationId xmlns:a16="http://schemas.microsoft.com/office/drawing/2014/main" id="{1840FA2C-1EA3-4717-8218-8697B4FE4567}"/>
+                <a16:creationId xmlns:a16="http://schemas.microsoft.com/office/drawing/2014/main" id="{10F7CF03-40D6-468D-AB26-FEE4ABA99022}"/>
               </a:ext>
             </a:extLst>
           </p:cNvPr>
@@ -13964,7 +13964,7 @@
                   <a:srgbClr val="1D2A3D"/>
                 </a:solidFill>
               </a:rPr>
-              <a:t>4 tickets</a:t>
+              <a:t>3 tickets</a:t>
             </a:r>
           </a:p>
         </p:txBody>
@@ -13974,7 +13974,7 @@
           <p:cNvPr id="99" name="">
             <a:extLst xmlns:a="http://schemas.openxmlformats.org/drawingml/2006/main">
               <a:ext uri="{FF2B5EF4-FFF2-40B4-BE49-F238E27FC236}">
-                <a16:creationId xmlns:a16="http://schemas.microsoft.com/office/drawing/2014/main" id="{716F677E-2A40-4324-9F45-6EB7BC24E941}"/>
+                <a16:creationId xmlns:a16="http://schemas.microsoft.com/office/drawing/2014/main" id="{688D4FEE-4953-43BB-BEA3-9C14CED55385}"/>
               </a:ext>
             </a:extLst>
           </p:cNvPr>
@@ -14014,7 +14014,7 @@
                   <a:srgbClr val="1D2A3D"/>
                 </a:solidFill>
               </a:rPr>
-              <a:t>26.7%</a:t>
+              <a:t>25.0%</a:t>
             </a:r>
           </a:p>
         </p:txBody>
@@ -14024,7 +14024,7 @@
           <p:cNvPr id="100" name="">
             <a:extLst xmlns:a="http://schemas.openxmlformats.org/drawingml/2006/main">
               <a:ext uri="{FF2B5EF4-FFF2-40B4-BE49-F238E27FC236}">
-                <a16:creationId xmlns:a16="http://schemas.microsoft.com/office/drawing/2014/main" id="{2463C0FA-014A-42A3-A0E9-8FDC85148776}"/>
+                <a16:creationId xmlns:a16="http://schemas.microsoft.com/office/drawing/2014/main" id="{CDE60D8A-7520-46D9-8D9C-AF949449FBC3}"/>
               </a:ext>
             </a:extLst>
           </p:cNvPr>
@@ -14055,7 +14055,7 @@
           <p:cNvPr id="101" name="">
             <a:extLst xmlns:a="http://schemas.openxmlformats.org/drawingml/2006/main">
               <a:ext uri="{FF2B5EF4-FFF2-40B4-BE49-F238E27FC236}">
-                <a16:creationId xmlns:a16="http://schemas.microsoft.com/office/drawing/2014/main" id="{E42E6248-A0BD-41C5-B136-5AA5CEEBC5EB}"/>
+                <a16:creationId xmlns:a16="http://schemas.microsoft.com/office/drawing/2014/main" id="{703731F7-2D0F-47E9-A065-DC8D192B6853}"/>
               </a:ext>
             </a:extLst>
           </p:cNvPr>
@@ -14105,7 +14105,7 @@
           <p:cNvPr id="102" name="">
             <a:extLst xmlns:a="http://schemas.openxmlformats.org/drawingml/2006/main">
               <a:ext uri="{FF2B5EF4-FFF2-40B4-BE49-F238E27FC236}">
-                <a16:creationId xmlns:a16="http://schemas.microsoft.com/office/drawing/2014/main" id="{7B8CE23F-341F-4841-B57A-6A48F7DE0384}"/>
+                <a16:creationId xmlns:a16="http://schemas.microsoft.com/office/drawing/2014/main" id="{41D37EDB-2D57-4BB5-8132-BD4451494944}"/>
               </a:ext>
             </a:extLst>
           </p:cNvPr>
@@ -14145,7 +14145,7 @@
                   <a:srgbClr val="1D2A3D"/>
                 </a:solidFill>
               </a:rPr>
-              <a:t>1 tickets</a:t>
+              <a:t>2 tickets</a:t>
             </a:r>
           </a:p>
         </p:txBody>
@@ -14155,7 +14155,7 @@
           <p:cNvPr id="103" name="">
             <a:extLst xmlns:a="http://schemas.openxmlformats.org/drawingml/2006/main">
               <a:ext uri="{FF2B5EF4-FFF2-40B4-BE49-F238E27FC236}">
-                <a16:creationId xmlns:a16="http://schemas.microsoft.com/office/drawing/2014/main" id="{DDDF927A-BD98-4BFE-87EB-4761FCBBE549}"/>
+                <a16:creationId xmlns:a16="http://schemas.microsoft.com/office/drawing/2014/main" id="{34906AAB-7530-40F9-B67C-54F54B7FA56A}"/>
               </a:ext>
             </a:extLst>
           </p:cNvPr>
@@ -14195,7 +14195,7 @@
                   <a:srgbClr val="1D2A3D"/>
                 </a:solidFill>
               </a:rPr>
-              <a:t>6.7%</a:t>
+              <a:t>16.7%</a:t>
             </a:r>
           </a:p>
         </p:txBody>
@@ -14205,7 +14205,7 @@
           <p:cNvPr id="104" name="">
             <a:extLst xmlns:a="http://schemas.openxmlformats.org/drawingml/2006/main">
               <a:ext uri="{FF2B5EF4-FFF2-40B4-BE49-F238E27FC236}">
-                <a16:creationId xmlns:a16="http://schemas.microsoft.com/office/drawing/2014/main" id="{C4C698BB-A4E5-433E-9472-E647C9CF3610}"/>
+                <a16:creationId xmlns:a16="http://schemas.microsoft.com/office/drawing/2014/main" id="{485E92DF-891B-4976-B821-81827359FB79}"/>
               </a:ext>
             </a:extLst>
           </p:cNvPr>
@@ -14236,7 +14236,7 @@
           <p:cNvPr id="105" name="">
             <a:extLst xmlns:a="http://schemas.openxmlformats.org/drawingml/2006/main">
               <a:ext uri="{FF2B5EF4-FFF2-40B4-BE49-F238E27FC236}">
-                <a16:creationId xmlns:a16="http://schemas.microsoft.com/office/drawing/2014/main" id="{21BBA740-1F0A-4FA4-8B6C-6F0F6BB78E6D}"/>
+                <a16:creationId xmlns:a16="http://schemas.microsoft.com/office/drawing/2014/main" id="{B8989A53-6257-4D81-9F9B-F3AFEC90E98F}"/>
               </a:ext>
             </a:extLst>
           </p:cNvPr>
@@ -14286,7 +14286,7 @@
           <p:cNvPr id="106" name="">
             <a:extLst xmlns:a="http://schemas.openxmlformats.org/drawingml/2006/main">
               <a:ext uri="{FF2B5EF4-FFF2-40B4-BE49-F238E27FC236}">
-                <a16:creationId xmlns:a16="http://schemas.microsoft.com/office/drawing/2014/main" id="{571EDCF3-43C6-41F4-8992-F02B86AAB1EB}"/>
+                <a16:creationId xmlns:a16="http://schemas.microsoft.com/office/drawing/2014/main" id="{5FD0C26A-1A69-4311-9F97-C25CA621788E}"/>
               </a:ext>
             </a:extLst>
           </p:cNvPr>
@@ -14336,7 +14336,7 @@
           <p:cNvPr id="107" name="">
             <a:extLst xmlns:a="http://schemas.openxmlformats.org/drawingml/2006/main">
               <a:ext uri="{FF2B5EF4-FFF2-40B4-BE49-F238E27FC236}">
-                <a16:creationId xmlns:a16="http://schemas.microsoft.com/office/drawing/2014/main" id="{F2BD5CC2-D24C-49DE-926A-2EC8C2846FF6}"/>
+                <a16:creationId xmlns:a16="http://schemas.microsoft.com/office/drawing/2014/main" id="{A7B9C496-277F-4F65-BE9B-DAA33E32A11C}"/>
               </a:ext>
             </a:extLst>
           </p:cNvPr>
@@ -14376,7 +14376,7 @@
                   <a:srgbClr val="1D2A3D"/>
                 </a:solidFill>
               </a:rPr>
-              <a:t>6.7%</a:t>
+              <a:t>8.3%</a:t>
             </a:r>
           </a:p>
         </p:txBody>
@@ -14386,7 +14386,7 @@
           <p:cNvPr id="108" name="">
             <a:extLst xmlns:a="http://schemas.openxmlformats.org/drawingml/2006/main">
               <a:ext uri="{FF2B5EF4-FFF2-40B4-BE49-F238E27FC236}">
-                <a16:creationId xmlns:a16="http://schemas.microsoft.com/office/drawing/2014/main" id="{86D353D9-4935-4B04-A41E-E372B78C3595}"/>
+                <a16:creationId xmlns:a16="http://schemas.microsoft.com/office/drawing/2014/main" id="{065648C1-665C-47D1-88D7-89F0AAE2CEB5}"/>
               </a:ext>
             </a:extLst>
           </p:cNvPr>
@@ -14417,7 +14417,7 @@
           <p:cNvPr id="109" name="">
             <a:extLst xmlns:a="http://schemas.openxmlformats.org/drawingml/2006/main">
               <a:ext uri="{FF2B5EF4-FFF2-40B4-BE49-F238E27FC236}">
-                <a16:creationId xmlns:a16="http://schemas.microsoft.com/office/drawing/2014/main" id="{86E85634-43ED-44A0-9088-F9623C9AA636}"/>
+                <a16:creationId xmlns:a16="http://schemas.microsoft.com/office/drawing/2014/main" id="{5C8A89B9-8F08-4D30-A690-2FE25EA4C479}"/>
               </a:ext>
             </a:extLst>
           </p:cNvPr>
@@ -14467,7 +14467,7 @@
           <p:cNvPr id="110" name="">
             <a:extLst xmlns:a="http://schemas.openxmlformats.org/drawingml/2006/main">
               <a:ext uri="{FF2B5EF4-FFF2-40B4-BE49-F238E27FC236}">
-                <a16:creationId xmlns:a16="http://schemas.microsoft.com/office/drawing/2014/main" id="{DE4A4406-FB1B-4604-8BC4-E082EF42DABA}"/>
+                <a16:creationId xmlns:a16="http://schemas.microsoft.com/office/drawing/2014/main" id="{27FA619D-FF46-44FA-8E1D-BA19F9049631}"/>
               </a:ext>
             </a:extLst>
           </p:cNvPr>
@@ -14507,7 +14507,7 @@
                   <a:srgbClr val="1D2A3D"/>
                 </a:solidFill>
               </a:rPr>
-              <a:t>4 tickets</a:t>
+              <a:t>2 tickets</a:t>
             </a:r>
           </a:p>
         </p:txBody>
@@ -14517,7 +14517,7 @@
           <p:cNvPr id="111" name="">
             <a:extLst xmlns:a="http://schemas.openxmlformats.org/drawingml/2006/main">
               <a:ext uri="{FF2B5EF4-FFF2-40B4-BE49-F238E27FC236}">
-                <a16:creationId xmlns:a16="http://schemas.microsoft.com/office/drawing/2014/main" id="{B057BF0D-CB36-48FD-80B7-D59FE589A6C7}"/>
+                <a16:creationId xmlns:a16="http://schemas.microsoft.com/office/drawing/2014/main" id="{E9BDD55C-704F-4166-A33B-DE06B4209C92}"/>
               </a:ext>
             </a:extLst>
           </p:cNvPr>
@@ -14557,7 +14557,7 @@
                   <a:srgbClr val="1D2A3D"/>
                 </a:solidFill>
               </a:rPr>
-              <a:t>26.7%</a:t>
+              <a:t>16.7%</a:t>
             </a:r>
           </a:p>
         </p:txBody>
@@ -14567,7 +14567,7 @@
           <p:cNvPr id="112" name="">
             <a:extLst xmlns:a="http://schemas.openxmlformats.org/drawingml/2006/main">
               <a:ext uri="{FF2B5EF4-FFF2-40B4-BE49-F238E27FC236}">
-                <a16:creationId xmlns:a16="http://schemas.microsoft.com/office/drawing/2014/main" id="{DF007F04-75B2-4BB8-96C9-E08924476231}"/>
+                <a16:creationId xmlns:a16="http://schemas.microsoft.com/office/drawing/2014/main" id="{8FB8C2F2-7ECC-4104-9FDA-B2F033629DA4}"/>
               </a:ext>
             </a:extLst>
           </p:cNvPr>
@@ -14598,7 +14598,7 @@
           <p:cNvPr id="113" name="">
             <a:extLst xmlns:a="http://schemas.openxmlformats.org/drawingml/2006/main">
               <a:ext uri="{FF2B5EF4-FFF2-40B4-BE49-F238E27FC236}">
-                <a16:creationId xmlns:a16="http://schemas.microsoft.com/office/drawing/2014/main" id="{09AD5D3C-D140-490A-95DB-6570B1BCEF16}"/>
+                <a16:creationId xmlns:a16="http://schemas.microsoft.com/office/drawing/2014/main" id="{5666E36D-806D-45F0-A784-2E590E9944FC}"/>
               </a:ext>
             </a:extLst>
           </p:cNvPr>
@@ -14648,7 +14648,7 @@
           <p:cNvPr id="114" name="">
             <a:extLst xmlns:a="http://schemas.openxmlformats.org/drawingml/2006/main">
               <a:ext uri="{FF2B5EF4-FFF2-40B4-BE49-F238E27FC236}">
-                <a16:creationId xmlns:a16="http://schemas.microsoft.com/office/drawing/2014/main" id="{BB8B25E9-E5AD-4000-9EF9-950C41320B7D}"/>
+                <a16:creationId xmlns:a16="http://schemas.microsoft.com/office/drawing/2014/main" id="{C18F13C5-1F47-4D2F-B89F-6677CC3CADD3}"/>
               </a:ext>
             </a:extLst>
           </p:cNvPr>
@@ -14688,7 +14688,7 @@
                   <a:srgbClr val="1D2A3D"/>
                 </a:solidFill>
               </a:rPr>
-              <a:t>2 tickets</a:t>
+              <a:t>1 tickets</a:t>
             </a:r>
           </a:p>
         </p:txBody>
@@ -14698,7 +14698,7 @@
           <p:cNvPr id="115" name="">
             <a:extLst xmlns:a="http://schemas.openxmlformats.org/drawingml/2006/main">
               <a:ext uri="{FF2B5EF4-FFF2-40B4-BE49-F238E27FC236}">
-                <a16:creationId xmlns:a16="http://schemas.microsoft.com/office/drawing/2014/main" id="{2A5F5904-A9DB-4EB5-982F-B83CC96FE7ED}"/>
+                <a16:creationId xmlns:a16="http://schemas.microsoft.com/office/drawing/2014/main" id="{86667698-5153-49AA-AFBE-A7BA76C86F52}"/>
               </a:ext>
             </a:extLst>
           </p:cNvPr>
@@ -14738,7 +14738,7 @@
                   <a:srgbClr val="1D2A3D"/>
                 </a:solidFill>
               </a:rPr>
-              <a:t>13.3%</a:t>
+              <a:t>8.3%</a:t>
             </a:r>
           </a:p>
         </p:txBody>
@@ -14748,7 +14748,7 @@
           <p:cNvPr id="116" name="">
             <a:extLst xmlns:a="http://schemas.openxmlformats.org/drawingml/2006/main">
               <a:ext uri="{FF2B5EF4-FFF2-40B4-BE49-F238E27FC236}">
-                <a16:creationId xmlns:a16="http://schemas.microsoft.com/office/drawing/2014/main" id="{F53AE292-3473-4546-AD54-F5F2EF3BF147}"/>
+                <a16:creationId xmlns:a16="http://schemas.microsoft.com/office/drawing/2014/main" id="{9739E210-AF72-41C0-91EB-775712418FCF}"/>
               </a:ext>
             </a:extLst>
           </p:cNvPr>
@@ -14798,7 +14798,7 @@
           <p:cNvPr id="117" name="">
             <a:extLst xmlns:a="http://schemas.openxmlformats.org/drawingml/2006/main">
               <a:ext uri="{FF2B5EF4-FFF2-40B4-BE49-F238E27FC236}">
-                <a16:creationId xmlns:a16="http://schemas.microsoft.com/office/drawing/2014/main" id="{0A97BA60-F2AC-46CF-90EB-0B01134F8ED1}"/>
+                <a16:creationId xmlns:a16="http://schemas.microsoft.com/office/drawing/2014/main" id="{A49E9E96-4864-4512-B99A-C147C8719C87}"/>
               </a:ext>
             </a:extLst>
           </p:cNvPr>
@@ -14829,7 +14829,7 @@
           <p:cNvPr id="118" name="">
             <a:extLst xmlns:a="http://schemas.openxmlformats.org/drawingml/2006/main">
               <a:ext uri="{FF2B5EF4-FFF2-40B4-BE49-F238E27FC236}">
-                <a16:creationId xmlns:a16="http://schemas.microsoft.com/office/drawing/2014/main" id="{3EFB2020-0D94-4D63-B739-96BAC4F0D038}"/>
+                <a16:creationId xmlns:a16="http://schemas.microsoft.com/office/drawing/2014/main" id="{B88156C6-31FD-4544-9D4D-34D479076D05}"/>
               </a:ext>
             </a:extLst>
           </p:cNvPr>
@@ -14879,7 +14879,7 @@
           <p:cNvPr id="119" name="">
             <a:extLst xmlns:a="http://schemas.openxmlformats.org/drawingml/2006/main">
               <a:ext uri="{FF2B5EF4-FFF2-40B4-BE49-F238E27FC236}">
-                <a16:creationId xmlns:a16="http://schemas.microsoft.com/office/drawing/2014/main" id="{D39E9BA0-F4C7-4224-B860-AC84282847AF}"/>
+                <a16:creationId xmlns:a16="http://schemas.microsoft.com/office/drawing/2014/main" id="{8F8566BD-2ADF-497A-994D-51E47D13A33B}"/>
               </a:ext>
             </a:extLst>
           </p:cNvPr>
@@ -14927,7 +14927,7 @@
     </p:spTree>
     <p:extLst>
       <p:ext uri="{BB962C8B-B14F-4D97-AF65-F5344CB8AC3E}">
-        <p14:creationId xmlns:p14="http://schemas.microsoft.com/office/powerpoint/2010/main" val="713926699"/>
+        <p14:creationId xmlns:p14="http://schemas.microsoft.com/office/powerpoint/2010/main" val="1450735807"/>
       </p:ext>
     </p:extLst>
   </p:cSld>
@@ -14958,7 +14958,7 @@
           <p:cNvPr id="120" name="">
             <a:extLst xmlns:a="http://schemas.openxmlformats.org/drawingml/2006/main">
               <a:ext uri="{FF2B5EF4-FFF2-40B4-BE49-F238E27FC236}">
-                <a16:creationId xmlns:a16="http://schemas.microsoft.com/office/drawing/2014/main" id="{7E433CAA-008A-4834-B19E-A7F8172FDD1C}"/>
+                <a16:creationId xmlns:a16="http://schemas.microsoft.com/office/drawing/2014/main" id="{8C66612A-5239-4962-BC92-10F33FC2AEC3}"/>
               </a:ext>
             </a:extLst>
           </p:cNvPr>
@@ -15008,7 +15008,7 @@
           <p:cNvPr id="2" name="">
             <a:extLst xmlns:a="http://schemas.openxmlformats.org/drawingml/2006/main">
               <a:ext uri="{FF2B5EF4-FFF2-40B4-BE49-F238E27FC236}">
-                <a16:creationId xmlns:a16="http://schemas.microsoft.com/office/drawing/2014/main" id="{3DC5D3F8-33A3-49C2-9413-3C84626A0EA0}"/>
+                <a16:creationId xmlns:a16="http://schemas.microsoft.com/office/drawing/2014/main" id="{31A26BF9-A525-4B5A-9ACD-88F01BCA69FA}"/>
               </a:ext>
             </a:extLst>
           </p:cNvPr>
@@ -15058,7 +15058,7 @@
           <p:cNvPr id="3" name="">
             <a:extLst xmlns:a="http://schemas.openxmlformats.org/drawingml/2006/main">
               <a:ext uri="{FF2B5EF4-FFF2-40B4-BE49-F238E27FC236}">
-                <a16:creationId xmlns:a16="http://schemas.microsoft.com/office/drawing/2014/main" id="{3A46309E-170E-489F-82BA-A71C839CA66E}"/>
+                <a16:creationId xmlns:a16="http://schemas.microsoft.com/office/drawing/2014/main" id="{BCDB789F-3A22-4C22-86BC-2F23A739F112}"/>
               </a:ext>
             </a:extLst>
           </p:cNvPr>
@@ -15098,7 +15098,7 @@
                   <a:srgbClr val="647287"/>
                 </a:solidFill>
               </a:rPr>
-              <a:t>914 priced tickets. Percentages are ticket-count share within each price band, not claim amount share.</a:t>
+              <a:t>941 priced tickets. Percentages are ticket-count share within each price band, not claim amount share.</a:t>
             </a:r>
           </a:p>
         </p:txBody>
@@ -15108,7 +15108,7 @@
           <p:cNvPr id="4" name="">
             <a:extLst xmlns:a="http://schemas.openxmlformats.org/drawingml/2006/main">
               <a:ext uri="{FF2B5EF4-FFF2-40B4-BE49-F238E27FC236}">
-                <a16:creationId xmlns:a16="http://schemas.microsoft.com/office/drawing/2014/main" id="{734C4DD0-7D9E-4A70-8DBA-A2D7FF9383B7}"/>
+                <a16:creationId xmlns:a16="http://schemas.microsoft.com/office/drawing/2014/main" id="{78555513-2779-4D4D-A835-7816FE5CDA37}"/>
               </a:ext>
             </a:extLst>
           </p:cNvPr>
@@ -15149,7 +15149,7 @@
           <p:cNvPr id="5" name="">
             <a:extLst xmlns:a="http://schemas.openxmlformats.org/drawingml/2006/main">
               <a:ext uri="{FF2B5EF4-FFF2-40B4-BE49-F238E27FC236}">
-                <a16:creationId xmlns:a16="http://schemas.microsoft.com/office/drawing/2014/main" id="{10FCE6CD-061B-4464-91FD-39914805D27D}"/>
+                <a16:creationId xmlns:a16="http://schemas.microsoft.com/office/drawing/2014/main" id="{EB2F6C6D-5273-45EB-84D6-305BDA1C73DB}"/>
               </a:ext>
             </a:extLst>
           </p:cNvPr>
@@ -15199,7 +15199,7 @@
           <p:cNvPr id="6" name="">
             <a:extLst xmlns:a="http://schemas.openxmlformats.org/drawingml/2006/main">
               <a:ext uri="{FF2B5EF4-FFF2-40B4-BE49-F238E27FC236}">
-                <a16:creationId xmlns:a16="http://schemas.microsoft.com/office/drawing/2014/main" id="{6FD572C2-B506-4BF7-A244-981529D10491}"/>
+                <a16:creationId xmlns:a16="http://schemas.microsoft.com/office/drawing/2014/main" id="{AE2DF9C1-73E7-4486-BDA4-BC63223C54B0}"/>
               </a:ext>
             </a:extLst>
           </p:cNvPr>
@@ -15239,7 +15239,7 @@
                   <a:srgbClr val="647287"/>
                 </a:solidFill>
               </a:rPr>
-              <a:t>415 tickets  /  avg 30.5 days</a:t>
+              <a:t>560 tickets  /  avg 31.5 days</a:t>
             </a:r>
           </a:p>
         </p:txBody>
@@ -15256,7 +15256,7 @@
         </p:xfrm>
         <a:graphic xmlns:a="http://schemas.openxmlformats.org/drawingml/2006/main">
           <a:graphicData uri="http://schemas.openxmlformats.org/drawingml/2006/chart">
-            <c:chart xmlns:r="http://schemas.openxmlformats.org/officeDocument/2006/relationships" xmlns:c="http://schemas.openxmlformats.org/drawingml/2006/chart" r:id="Rcf72037295914aca"/>
+            <c:chart xmlns:r="http://schemas.openxmlformats.org/officeDocument/2006/relationships" xmlns:c="http://schemas.openxmlformats.org/drawingml/2006/chart" r:id="R451833be5b7d4138"/>
           </a:graphicData>
         </a:graphic>
       </p:graphicFrame>
@@ -15265,7 +15265,7 @@
           <p:cNvPr id="8" name="">
             <a:extLst xmlns:a="http://schemas.openxmlformats.org/drawingml/2006/main">
               <a:ext uri="{FF2B5EF4-FFF2-40B4-BE49-F238E27FC236}">
-                <a16:creationId xmlns:a16="http://schemas.microsoft.com/office/drawing/2014/main" id="{115E058E-BA51-400F-A79C-F28D739C6222}"/>
+                <a16:creationId xmlns:a16="http://schemas.microsoft.com/office/drawing/2014/main" id="{B7010F34-FFDB-41AF-915A-6E325066FBF2}"/>
               </a:ext>
             </a:extLst>
           </p:cNvPr>
@@ -15296,7 +15296,7 @@
           <p:cNvPr id="9" name="">
             <a:extLst xmlns:a="http://schemas.openxmlformats.org/drawingml/2006/main">
               <a:ext uri="{FF2B5EF4-FFF2-40B4-BE49-F238E27FC236}">
-                <a16:creationId xmlns:a16="http://schemas.microsoft.com/office/drawing/2014/main" id="{28712D4A-3AC5-48A8-8051-B363D83B3CE5}"/>
+                <a16:creationId xmlns:a16="http://schemas.microsoft.com/office/drawing/2014/main" id="{9208048B-AFBE-435B-B8B9-FB58372C6D8C}"/>
               </a:ext>
             </a:extLst>
           </p:cNvPr>
@@ -15346,7 +15346,7 @@
           <p:cNvPr id="10" name="">
             <a:extLst xmlns:a="http://schemas.openxmlformats.org/drawingml/2006/main">
               <a:ext uri="{FF2B5EF4-FFF2-40B4-BE49-F238E27FC236}">
-                <a16:creationId xmlns:a16="http://schemas.microsoft.com/office/drawing/2014/main" id="{C7A07E83-F04C-407A-9502-E782F54D88C3}"/>
+                <a16:creationId xmlns:a16="http://schemas.microsoft.com/office/drawing/2014/main" id="{AD93E487-7569-4EFB-9868-4C8B7BA37FDA}"/>
               </a:ext>
             </a:extLst>
           </p:cNvPr>
@@ -15386,7 +15386,7 @@
                   <a:srgbClr val="1D2A3D"/>
                 </a:solidFill>
               </a:rPr>
-              <a:t>92 tickets</a:t>
+              <a:t>117 tickets</a:t>
             </a:r>
           </a:p>
         </p:txBody>
@@ -15396,7 +15396,7 @@
           <p:cNvPr id="11" name="">
             <a:extLst xmlns:a="http://schemas.openxmlformats.org/drawingml/2006/main">
               <a:ext uri="{FF2B5EF4-FFF2-40B4-BE49-F238E27FC236}">
-                <a16:creationId xmlns:a16="http://schemas.microsoft.com/office/drawing/2014/main" id="{BC76F995-89D2-4657-9CA1-0A6A04B8A5EF}"/>
+                <a16:creationId xmlns:a16="http://schemas.microsoft.com/office/drawing/2014/main" id="{FEA0DFD5-5A36-46EE-9732-FB556989F01C}"/>
               </a:ext>
             </a:extLst>
           </p:cNvPr>
@@ -15436,7 +15436,7 @@
                   <a:srgbClr val="1D2A3D"/>
                 </a:solidFill>
               </a:rPr>
-              <a:t>22.2%</a:t>
+              <a:t>20.9%</a:t>
             </a:r>
           </a:p>
         </p:txBody>
@@ -15446,7 +15446,7 @@
           <p:cNvPr id="12" name="">
             <a:extLst xmlns:a="http://schemas.openxmlformats.org/drawingml/2006/main">
               <a:ext uri="{FF2B5EF4-FFF2-40B4-BE49-F238E27FC236}">
-                <a16:creationId xmlns:a16="http://schemas.microsoft.com/office/drawing/2014/main" id="{A9A10ACA-F939-42C9-AC2A-8719373C5397}"/>
+                <a16:creationId xmlns:a16="http://schemas.microsoft.com/office/drawing/2014/main" id="{0A57DBEB-51B2-42AD-B058-142939DB1508}"/>
               </a:ext>
             </a:extLst>
           </p:cNvPr>
@@ -15477,7 +15477,7 @@
           <p:cNvPr id="13" name="">
             <a:extLst xmlns:a="http://schemas.openxmlformats.org/drawingml/2006/main">
               <a:ext uri="{FF2B5EF4-FFF2-40B4-BE49-F238E27FC236}">
-                <a16:creationId xmlns:a16="http://schemas.microsoft.com/office/drawing/2014/main" id="{FDDA9860-A14E-4137-8D95-2087CDB880FF}"/>
+                <a16:creationId xmlns:a16="http://schemas.microsoft.com/office/drawing/2014/main" id="{312240F0-76FA-4E2A-8D94-FA470DF5804D}"/>
               </a:ext>
             </a:extLst>
           </p:cNvPr>
@@ -15527,7 +15527,7 @@
           <p:cNvPr id="14" name="">
             <a:extLst xmlns:a="http://schemas.openxmlformats.org/drawingml/2006/main">
               <a:ext uri="{FF2B5EF4-FFF2-40B4-BE49-F238E27FC236}">
-                <a16:creationId xmlns:a16="http://schemas.microsoft.com/office/drawing/2014/main" id="{BD62632C-6769-4C37-989F-1CCF80B61EE2}"/>
+                <a16:creationId xmlns:a16="http://schemas.microsoft.com/office/drawing/2014/main" id="{825A81E7-EA64-4F06-B383-07A0C945BFED}"/>
               </a:ext>
             </a:extLst>
           </p:cNvPr>
@@ -15567,7 +15567,7 @@
                   <a:srgbClr val="1D2A3D"/>
                 </a:solidFill>
               </a:rPr>
-              <a:t>74 tickets</a:t>
+              <a:t>102 tickets</a:t>
             </a:r>
           </a:p>
         </p:txBody>
@@ -15577,7 +15577,7 @@
           <p:cNvPr id="15" name="">
             <a:extLst xmlns:a="http://schemas.openxmlformats.org/drawingml/2006/main">
               <a:ext uri="{FF2B5EF4-FFF2-40B4-BE49-F238E27FC236}">
-                <a16:creationId xmlns:a16="http://schemas.microsoft.com/office/drawing/2014/main" id="{A5C32440-AC40-4547-AF68-80895A256642}"/>
+                <a16:creationId xmlns:a16="http://schemas.microsoft.com/office/drawing/2014/main" id="{DE80B2CE-5063-43CA-9FF7-A5F478EA319F}"/>
               </a:ext>
             </a:extLst>
           </p:cNvPr>
@@ -15617,7 +15617,7 @@
                   <a:srgbClr val="1D2A3D"/>
                 </a:solidFill>
               </a:rPr>
-              <a:t>17.8%</a:t>
+              <a:t>18.2%</a:t>
             </a:r>
           </a:p>
         </p:txBody>
@@ -15627,7 +15627,7 @@
           <p:cNvPr id="16" name="">
             <a:extLst xmlns:a="http://schemas.openxmlformats.org/drawingml/2006/main">
               <a:ext uri="{FF2B5EF4-FFF2-40B4-BE49-F238E27FC236}">
-                <a16:creationId xmlns:a16="http://schemas.microsoft.com/office/drawing/2014/main" id="{4A0C7A77-A7F3-4B88-94D7-541E4A3A51CB}"/>
+                <a16:creationId xmlns:a16="http://schemas.microsoft.com/office/drawing/2014/main" id="{D3BCEC1E-2603-4FA4-A4E0-08657CFE8CAF}"/>
               </a:ext>
             </a:extLst>
           </p:cNvPr>
@@ -15658,7 +15658,7 @@
           <p:cNvPr id="17" name="">
             <a:extLst xmlns:a="http://schemas.openxmlformats.org/drawingml/2006/main">
               <a:ext uri="{FF2B5EF4-FFF2-40B4-BE49-F238E27FC236}">
-                <a16:creationId xmlns:a16="http://schemas.microsoft.com/office/drawing/2014/main" id="{6E09C75A-5D61-4C53-BBCB-F6BCC2DC47BB}"/>
+                <a16:creationId xmlns:a16="http://schemas.microsoft.com/office/drawing/2014/main" id="{50F888D0-3326-4800-A1C2-2B9BB89FD025}"/>
               </a:ext>
             </a:extLst>
           </p:cNvPr>
@@ -15708,7 +15708,7 @@
           <p:cNvPr id="18" name="">
             <a:extLst xmlns:a="http://schemas.openxmlformats.org/drawingml/2006/main">
               <a:ext uri="{FF2B5EF4-FFF2-40B4-BE49-F238E27FC236}">
-                <a16:creationId xmlns:a16="http://schemas.microsoft.com/office/drawing/2014/main" id="{AF203AF7-3DD4-4ACA-8393-761921DBE113}"/>
+                <a16:creationId xmlns:a16="http://schemas.microsoft.com/office/drawing/2014/main" id="{B4445534-CD80-401B-AEA8-03EFAE7DB5C5}"/>
               </a:ext>
             </a:extLst>
           </p:cNvPr>
@@ -15748,7 +15748,7 @@
                   <a:srgbClr val="1D2A3D"/>
                 </a:solidFill>
               </a:rPr>
-              <a:t>48 tickets</a:t>
+              <a:t>66 tickets</a:t>
             </a:r>
           </a:p>
         </p:txBody>
@@ -15758,7 +15758,7 @@
           <p:cNvPr id="19" name="">
             <a:extLst xmlns:a="http://schemas.openxmlformats.org/drawingml/2006/main">
               <a:ext uri="{FF2B5EF4-FFF2-40B4-BE49-F238E27FC236}">
-                <a16:creationId xmlns:a16="http://schemas.microsoft.com/office/drawing/2014/main" id="{70805F9B-318A-443C-843C-0CECFE030B3A}"/>
+                <a16:creationId xmlns:a16="http://schemas.microsoft.com/office/drawing/2014/main" id="{E92E4AE2-341D-4998-B3A1-B01EBE7669C8}"/>
               </a:ext>
             </a:extLst>
           </p:cNvPr>
@@ -15798,7 +15798,7 @@
                   <a:srgbClr val="1D2A3D"/>
                 </a:solidFill>
               </a:rPr>
-              <a:t>11.6%</a:t>
+              <a:t>11.8%</a:t>
             </a:r>
           </a:p>
         </p:txBody>
@@ -15808,7 +15808,7 @@
           <p:cNvPr id="20" name="">
             <a:extLst xmlns:a="http://schemas.openxmlformats.org/drawingml/2006/main">
               <a:ext uri="{FF2B5EF4-FFF2-40B4-BE49-F238E27FC236}">
-                <a16:creationId xmlns:a16="http://schemas.microsoft.com/office/drawing/2014/main" id="{DCBC8B41-280C-405F-9478-D7C1024AF115}"/>
+                <a16:creationId xmlns:a16="http://schemas.microsoft.com/office/drawing/2014/main" id="{CFA18D91-66E9-49F7-8E31-E20D83811CCC}"/>
               </a:ext>
             </a:extLst>
           </p:cNvPr>
@@ -15839,7 +15839,7 @@
           <p:cNvPr id="21" name="">
             <a:extLst xmlns:a="http://schemas.openxmlformats.org/drawingml/2006/main">
               <a:ext uri="{FF2B5EF4-FFF2-40B4-BE49-F238E27FC236}">
-                <a16:creationId xmlns:a16="http://schemas.microsoft.com/office/drawing/2014/main" id="{692F24EF-33DB-4CEF-BB86-C342BDFE9725}"/>
+                <a16:creationId xmlns:a16="http://schemas.microsoft.com/office/drawing/2014/main" id="{DA8A0205-61D6-4818-973D-4B44045DC182}"/>
               </a:ext>
             </a:extLst>
           </p:cNvPr>
@@ -15889,7 +15889,7 @@
           <p:cNvPr id="22" name="">
             <a:extLst xmlns:a="http://schemas.openxmlformats.org/drawingml/2006/main">
               <a:ext uri="{FF2B5EF4-FFF2-40B4-BE49-F238E27FC236}">
-                <a16:creationId xmlns:a16="http://schemas.microsoft.com/office/drawing/2014/main" id="{842B7ACC-A6C8-4B58-A995-B5E6C6F0CC8A}"/>
+                <a16:creationId xmlns:a16="http://schemas.microsoft.com/office/drawing/2014/main" id="{CF81EBF4-E6A1-4702-94A9-0D8296AE43C6}"/>
               </a:ext>
             </a:extLst>
           </p:cNvPr>
@@ -15929,7 +15929,7 @@
                   <a:srgbClr val="1D2A3D"/>
                 </a:solidFill>
               </a:rPr>
-              <a:t>38 tickets</a:t>
+              <a:t>53 tickets</a:t>
             </a:r>
           </a:p>
         </p:txBody>
@@ -15939,7 +15939,7 @@
           <p:cNvPr id="23" name="">
             <a:extLst xmlns:a="http://schemas.openxmlformats.org/drawingml/2006/main">
               <a:ext uri="{FF2B5EF4-FFF2-40B4-BE49-F238E27FC236}">
-                <a16:creationId xmlns:a16="http://schemas.microsoft.com/office/drawing/2014/main" id="{75E50D68-D177-4F7A-A3AD-2B3D0B050375}"/>
+                <a16:creationId xmlns:a16="http://schemas.microsoft.com/office/drawing/2014/main" id="{F8F7B216-E0A2-4F9D-98CD-294D567FEEA6}"/>
               </a:ext>
             </a:extLst>
           </p:cNvPr>
@@ -15979,7 +15979,7 @@
                   <a:srgbClr val="1D2A3D"/>
                 </a:solidFill>
               </a:rPr>
-              <a:t>9.2%</a:t>
+              <a:t>9.5%</a:t>
             </a:r>
           </a:p>
         </p:txBody>
@@ -15989,7 +15989,7 @@
           <p:cNvPr id="24" name="">
             <a:extLst xmlns:a="http://schemas.openxmlformats.org/drawingml/2006/main">
               <a:ext uri="{FF2B5EF4-FFF2-40B4-BE49-F238E27FC236}">
-                <a16:creationId xmlns:a16="http://schemas.microsoft.com/office/drawing/2014/main" id="{D1F26503-21F0-43C2-AE21-AACD86990369}"/>
+                <a16:creationId xmlns:a16="http://schemas.microsoft.com/office/drawing/2014/main" id="{B27C466D-7B85-4CA3-BB40-30E90E570B08}"/>
               </a:ext>
             </a:extLst>
           </p:cNvPr>
@@ -16020,7 +16020,7 @@
           <p:cNvPr id="25" name="">
             <a:extLst xmlns:a="http://schemas.openxmlformats.org/drawingml/2006/main">
               <a:ext uri="{FF2B5EF4-FFF2-40B4-BE49-F238E27FC236}">
-                <a16:creationId xmlns:a16="http://schemas.microsoft.com/office/drawing/2014/main" id="{DE9FB297-4F42-40D8-BC25-C269DEDEB8B0}"/>
+                <a16:creationId xmlns:a16="http://schemas.microsoft.com/office/drawing/2014/main" id="{A17A151A-8603-45E5-A1CE-BE5BC1996C7E}"/>
               </a:ext>
             </a:extLst>
           </p:cNvPr>
@@ -16070,7 +16070,7 @@
           <p:cNvPr id="26" name="">
             <a:extLst xmlns:a="http://schemas.openxmlformats.org/drawingml/2006/main">
               <a:ext uri="{FF2B5EF4-FFF2-40B4-BE49-F238E27FC236}">
-                <a16:creationId xmlns:a16="http://schemas.microsoft.com/office/drawing/2014/main" id="{CABA40C8-8460-49B0-867F-9F756398FBB2}"/>
+                <a16:creationId xmlns:a16="http://schemas.microsoft.com/office/drawing/2014/main" id="{00F791E8-24CD-45F2-B151-B9E8315A216A}"/>
               </a:ext>
             </a:extLst>
           </p:cNvPr>
@@ -16110,7 +16110,7 @@
                   <a:srgbClr val="1D2A3D"/>
                 </a:solidFill>
               </a:rPr>
-              <a:t>98 tickets</a:t>
+              <a:t>132 tickets</a:t>
             </a:r>
           </a:p>
         </p:txBody>
@@ -16120,7 +16120,7 @@
           <p:cNvPr id="27" name="">
             <a:extLst xmlns:a="http://schemas.openxmlformats.org/drawingml/2006/main">
               <a:ext uri="{FF2B5EF4-FFF2-40B4-BE49-F238E27FC236}">
-                <a16:creationId xmlns:a16="http://schemas.microsoft.com/office/drawing/2014/main" id="{68B5AAFA-18EF-4663-8735-49A80BFAC30F}"/>
+                <a16:creationId xmlns:a16="http://schemas.microsoft.com/office/drawing/2014/main" id="{C7CE9131-622A-4AD5-B687-FC74AB5B4C3B}"/>
               </a:ext>
             </a:extLst>
           </p:cNvPr>
@@ -16170,7 +16170,7 @@
           <p:cNvPr id="28" name="">
             <a:extLst xmlns:a="http://schemas.openxmlformats.org/drawingml/2006/main">
               <a:ext uri="{FF2B5EF4-FFF2-40B4-BE49-F238E27FC236}">
-                <a16:creationId xmlns:a16="http://schemas.microsoft.com/office/drawing/2014/main" id="{38D9D3EE-8343-4B3E-B2F3-04CE45A122ED}"/>
+                <a16:creationId xmlns:a16="http://schemas.microsoft.com/office/drawing/2014/main" id="{4C8858BA-09D0-4C0D-8D4E-328A6D7B357B}"/>
               </a:ext>
             </a:extLst>
           </p:cNvPr>
@@ -16201,7 +16201,7 @@
           <p:cNvPr id="29" name="">
             <a:extLst xmlns:a="http://schemas.openxmlformats.org/drawingml/2006/main">
               <a:ext uri="{FF2B5EF4-FFF2-40B4-BE49-F238E27FC236}">
-                <a16:creationId xmlns:a16="http://schemas.microsoft.com/office/drawing/2014/main" id="{F257CCB5-B6E5-4481-9F73-F8F806871D7B}"/>
+                <a16:creationId xmlns:a16="http://schemas.microsoft.com/office/drawing/2014/main" id="{1AED2FE4-AA6F-4796-9665-E66AD35E775F}"/>
               </a:ext>
             </a:extLst>
           </p:cNvPr>
@@ -16251,7 +16251,7 @@
           <p:cNvPr id="30" name="">
             <a:extLst xmlns:a="http://schemas.openxmlformats.org/drawingml/2006/main">
               <a:ext uri="{FF2B5EF4-FFF2-40B4-BE49-F238E27FC236}">
-                <a16:creationId xmlns:a16="http://schemas.microsoft.com/office/drawing/2014/main" id="{F4052E4B-8FEF-4D5E-81D5-10C102CE13B6}"/>
+                <a16:creationId xmlns:a16="http://schemas.microsoft.com/office/drawing/2014/main" id="{19E1778D-84E6-4A80-B7B4-D88D5F3EE7FB}"/>
               </a:ext>
             </a:extLst>
           </p:cNvPr>
@@ -16291,7 +16291,7 @@
                   <a:srgbClr val="1D2A3D"/>
                 </a:solidFill>
               </a:rPr>
-              <a:t>65 tickets</a:t>
+              <a:t>90 tickets</a:t>
             </a:r>
           </a:p>
         </p:txBody>
@@ -16301,7 +16301,7 @@
           <p:cNvPr id="31" name="">
             <a:extLst xmlns:a="http://schemas.openxmlformats.org/drawingml/2006/main">
               <a:ext uri="{FF2B5EF4-FFF2-40B4-BE49-F238E27FC236}">
-                <a16:creationId xmlns:a16="http://schemas.microsoft.com/office/drawing/2014/main" id="{40460F6E-B2AB-4B0B-B4CD-5A0CC2081028}"/>
+                <a16:creationId xmlns:a16="http://schemas.microsoft.com/office/drawing/2014/main" id="{11A95A23-C12B-451C-8215-A5BBC48C0B40}"/>
               </a:ext>
             </a:extLst>
           </p:cNvPr>
@@ -16341,7 +16341,7 @@
                   <a:srgbClr val="1D2A3D"/>
                 </a:solidFill>
               </a:rPr>
-              <a:t>15.7%</a:t>
+              <a:t>16.1%</a:t>
             </a:r>
           </a:p>
         </p:txBody>
@@ -16351,7 +16351,7 @@
           <p:cNvPr id="32" name="">
             <a:extLst xmlns:a="http://schemas.openxmlformats.org/drawingml/2006/main">
               <a:ext uri="{FF2B5EF4-FFF2-40B4-BE49-F238E27FC236}">
-                <a16:creationId xmlns:a16="http://schemas.microsoft.com/office/drawing/2014/main" id="{68BBD982-402C-4CEB-B9B4-3DE392AC967E}"/>
+                <a16:creationId xmlns:a16="http://schemas.microsoft.com/office/drawing/2014/main" id="{9DDA31ED-4BBE-423F-8144-5ADA51406B73}"/>
               </a:ext>
             </a:extLst>
           </p:cNvPr>
@@ -16392,7 +16392,7 @@
           <p:cNvPr id="33" name="">
             <a:extLst xmlns:a="http://schemas.openxmlformats.org/drawingml/2006/main">
               <a:ext uri="{FF2B5EF4-FFF2-40B4-BE49-F238E27FC236}">
-                <a16:creationId xmlns:a16="http://schemas.microsoft.com/office/drawing/2014/main" id="{F8860750-4EA9-4DF9-8BE9-6C5C6E5A7954}"/>
+                <a16:creationId xmlns:a16="http://schemas.microsoft.com/office/drawing/2014/main" id="{C10B05B4-B5B1-47F6-ABBA-502CF2977811}"/>
               </a:ext>
             </a:extLst>
           </p:cNvPr>
@@ -16442,7 +16442,7 @@
           <p:cNvPr id="34" name="">
             <a:extLst xmlns:a="http://schemas.openxmlformats.org/drawingml/2006/main">
               <a:ext uri="{FF2B5EF4-FFF2-40B4-BE49-F238E27FC236}">
-                <a16:creationId xmlns:a16="http://schemas.microsoft.com/office/drawing/2014/main" id="{C3FA4027-BF0E-4226-BB05-D9D3E1ED7FE7}"/>
+                <a16:creationId xmlns:a16="http://schemas.microsoft.com/office/drawing/2014/main" id="{2AA7721C-C3BD-438C-861A-725D29410A08}"/>
               </a:ext>
             </a:extLst>
           </p:cNvPr>
@@ -16482,7 +16482,7 @@
                   <a:srgbClr val="647287"/>
                 </a:solidFill>
               </a:rPr>
-              <a:t>455 tickets  /  avg 34.7 days</a:t>
+              <a:t>363 tickets  /  avg 34.5 days</a:t>
             </a:r>
           </a:p>
         </p:txBody>
@@ -16499,7 +16499,7 @@
         </p:xfrm>
         <a:graphic xmlns:a="http://schemas.openxmlformats.org/drawingml/2006/main">
           <a:graphicData uri="http://schemas.openxmlformats.org/drawingml/2006/chart">
-            <c:chart xmlns:r="http://schemas.openxmlformats.org/officeDocument/2006/relationships" xmlns:c="http://schemas.openxmlformats.org/drawingml/2006/chart" r:id="Rbc0a8a470b1549b4"/>
+            <c:chart xmlns:r="http://schemas.openxmlformats.org/officeDocument/2006/relationships" xmlns:c="http://schemas.openxmlformats.org/drawingml/2006/chart" r:id="Rc66cdc2a910f4d23"/>
           </a:graphicData>
         </a:graphic>
       </p:graphicFrame>
@@ -16508,7 +16508,7 @@
           <p:cNvPr id="36" name="">
             <a:extLst xmlns:a="http://schemas.openxmlformats.org/drawingml/2006/main">
               <a:ext uri="{FF2B5EF4-FFF2-40B4-BE49-F238E27FC236}">
-                <a16:creationId xmlns:a16="http://schemas.microsoft.com/office/drawing/2014/main" id="{C174E929-2849-418E-A223-D6F9AB42C660}"/>
+                <a16:creationId xmlns:a16="http://schemas.microsoft.com/office/drawing/2014/main" id="{3685CF5D-A35E-4EEC-BA2D-0927967D32C0}"/>
               </a:ext>
             </a:extLst>
           </p:cNvPr>
@@ -16539,7 +16539,7 @@
           <p:cNvPr id="37" name="">
             <a:extLst xmlns:a="http://schemas.openxmlformats.org/drawingml/2006/main">
               <a:ext uri="{FF2B5EF4-FFF2-40B4-BE49-F238E27FC236}">
-                <a16:creationId xmlns:a16="http://schemas.microsoft.com/office/drawing/2014/main" id="{6C1A2900-54F7-4002-A3C0-3277AD8D6BF9}"/>
+                <a16:creationId xmlns:a16="http://schemas.microsoft.com/office/drawing/2014/main" id="{5A45F40C-888D-41E7-95DE-D6D3844B67EE}"/>
               </a:ext>
             </a:extLst>
           </p:cNvPr>
@@ -16589,7 +16589,7 @@
           <p:cNvPr id="38" name="">
             <a:extLst xmlns:a="http://schemas.openxmlformats.org/drawingml/2006/main">
               <a:ext uri="{FF2B5EF4-FFF2-40B4-BE49-F238E27FC236}">
-                <a16:creationId xmlns:a16="http://schemas.microsoft.com/office/drawing/2014/main" id="{544BB062-DBDF-4A33-BFF9-9E5FFF2B5717}"/>
+                <a16:creationId xmlns:a16="http://schemas.microsoft.com/office/drawing/2014/main" id="{525A2BF6-0765-4004-A256-2E52550CDA8E}"/>
               </a:ext>
             </a:extLst>
           </p:cNvPr>
@@ -16629,7 +16629,7 @@
                   <a:srgbClr val="1D2A3D"/>
                 </a:solidFill>
               </a:rPr>
-              <a:t>64 tickets</a:t>
+              <a:t>45 tickets</a:t>
             </a:r>
           </a:p>
         </p:txBody>
@@ -16639,7 +16639,7 @@
           <p:cNvPr id="39" name="">
             <a:extLst xmlns:a="http://schemas.openxmlformats.org/drawingml/2006/main">
               <a:ext uri="{FF2B5EF4-FFF2-40B4-BE49-F238E27FC236}">
-                <a16:creationId xmlns:a16="http://schemas.microsoft.com/office/drawing/2014/main" id="{FFBC6ECF-FEEE-439A-914C-7DCDD5CA1D67}"/>
+                <a16:creationId xmlns:a16="http://schemas.microsoft.com/office/drawing/2014/main" id="{10308D08-05FB-4327-8883-B648C3C65D2C}"/>
               </a:ext>
             </a:extLst>
           </p:cNvPr>
@@ -16679,7 +16679,7 @@
                   <a:srgbClr val="1D2A3D"/>
                 </a:solidFill>
               </a:rPr>
-              <a:t>14.1%</a:t>
+              <a:t>12.4%</a:t>
             </a:r>
           </a:p>
         </p:txBody>
@@ -16689,7 +16689,7 @@
           <p:cNvPr id="40" name="">
             <a:extLst xmlns:a="http://schemas.openxmlformats.org/drawingml/2006/main">
               <a:ext uri="{FF2B5EF4-FFF2-40B4-BE49-F238E27FC236}">
-                <a16:creationId xmlns:a16="http://schemas.microsoft.com/office/drawing/2014/main" id="{B8343388-BAE1-4337-B244-A7EE4C1EC3E1}"/>
+                <a16:creationId xmlns:a16="http://schemas.microsoft.com/office/drawing/2014/main" id="{A97D9B3A-3D68-44A1-9405-E44C5E5A9C6B}"/>
               </a:ext>
             </a:extLst>
           </p:cNvPr>
@@ -16720,7 +16720,7 @@
           <p:cNvPr id="41" name="">
             <a:extLst xmlns:a="http://schemas.openxmlformats.org/drawingml/2006/main">
               <a:ext uri="{FF2B5EF4-FFF2-40B4-BE49-F238E27FC236}">
-                <a16:creationId xmlns:a16="http://schemas.microsoft.com/office/drawing/2014/main" id="{6C51980D-0C0B-4D9F-9D3B-C615ACD0B414}"/>
+                <a16:creationId xmlns:a16="http://schemas.microsoft.com/office/drawing/2014/main" id="{7B6A5DB4-9EA0-40E1-9488-765603E54749}"/>
               </a:ext>
             </a:extLst>
           </p:cNvPr>
@@ -16770,7 +16770,7 @@
           <p:cNvPr id="42" name="">
             <a:extLst xmlns:a="http://schemas.openxmlformats.org/drawingml/2006/main">
               <a:ext uri="{FF2B5EF4-FFF2-40B4-BE49-F238E27FC236}">
-                <a16:creationId xmlns:a16="http://schemas.microsoft.com/office/drawing/2014/main" id="{5A2D89B4-B7FF-4536-A011-5798EC77F8AF}"/>
+                <a16:creationId xmlns:a16="http://schemas.microsoft.com/office/drawing/2014/main" id="{CD1C6FE2-2B51-41FD-8119-B45D13D2CEF4}"/>
               </a:ext>
             </a:extLst>
           </p:cNvPr>
@@ -16810,7 +16810,7 @@
                   <a:srgbClr val="1D2A3D"/>
                 </a:solidFill>
               </a:rPr>
-              <a:t>65 tickets</a:t>
+              <a:t>51 tickets</a:t>
             </a:r>
           </a:p>
         </p:txBody>
@@ -16820,7 +16820,7 @@
           <p:cNvPr id="43" name="">
             <a:extLst xmlns:a="http://schemas.openxmlformats.org/drawingml/2006/main">
               <a:ext uri="{FF2B5EF4-FFF2-40B4-BE49-F238E27FC236}">
-                <a16:creationId xmlns:a16="http://schemas.microsoft.com/office/drawing/2014/main" id="{7EC2FA93-E4FE-4EC7-BF54-83D56C97C80C}"/>
+                <a16:creationId xmlns:a16="http://schemas.microsoft.com/office/drawing/2014/main" id="{A89F9E25-E817-4C0C-9086-E06C4A2CA108}"/>
               </a:ext>
             </a:extLst>
           </p:cNvPr>
@@ -16860,7 +16860,7 @@
                   <a:srgbClr val="1D2A3D"/>
                 </a:solidFill>
               </a:rPr>
-              <a:t>14.3%</a:t>
+              <a:t>14.0%</a:t>
             </a:r>
           </a:p>
         </p:txBody>
@@ -16870,7 +16870,7 @@
           <p:cNvPr id="44" name="">
             <a:extLst xmlns:a="http://schemas.openxmlformats.org/drawingml/2006/main">
               <a:ext uri="{FF2B5EF4-FFF2-40B4-BE49-F238E27FC236}">
-                <a16:creationId xmlns:a16="http://schemas.microsoft.com/office/drawing/2014/main" id="{7CC47B6E-82E2-49F3-866A-AE8108C95F41}"/>
+                <a16:creationId xmlns:a16="http://schemas.microsoft.com/office/drawing/2014/main" id="{44D8CDDE-35B9-4B76-A495-9306757F5CEB}"/>
               </a:ext>
             </a:extLst>
           </p:cNvPr>
@@ -16901,7 +16901,7 @@
           <p:cNvPr id="45" name="">
             <a:extLst xmlns:a="http://schemas.openxmlformats.org/drawingml/2006/main">
               <a:ext uri="{FF2B5EF4-FFF2-40B4-BE49-F238E27FC236}">
-                <a16:creationId xmlns:a16="http://schemas.microsoft.com/office/drawing/2014/main" id="{9A599B6C-CB86-4171-8C14-61FD1A397983}"/>
+                <a16:creationId xmlns:a16="http://schemas.microsoft.com/office/drawing/2014/main" id="{C831FB5D-E364-453E-8E9B-E4EEE44F67E8}"/>
               </a:ext>
             </a:extLst>
           </p:cNvPr>
@@ -16951,7 +16951,7 @@
           <p:cNvPr id="46" name="">
             <a:extLst xmlns:a="http://schemas.openxmlformats.org/drawingml/2006/main">
               <a:ext uri="{FF2B5EF4-FFF2-40B4-BE49-F238E27FC236}">
-                <a16:creationId xmlns:a16="http://schemas.microsoft.com/office/drawing/2014/main" id="{16C1FCEF-BA1C-47C6-98BE-A0E82815FD22}"/>
+                <a16:creationId xmlns:a16="http://schemas.microsoft.com/office/drawing/2014/main" id="{B0FC7B3D-E827-4624-A1E1-06696CD5B675}"/>
               </a:ext>
             </a:extLst>
           </p:cNvPr>
@@ -16991,7 +16991,7 @@
                   <a:srgbClr val="1D2A3D"/>
                 </a:solidFill>
               </a:rPr>
-              <a:t>64 tickets</a:t>
+              <a:t>53 tickets</a:t>
             </a:r>
           </a:p>
         </p:txBody>
@@ -17001,7 +17001,7 @@
           <p:cNvPr id="47" name="">
             <a:extLst xmlns:a="http://schemas.openxmlformats.org/drawingml/2006/main">
               <a:ext uri="{FF2B5EF4-FFF2-40B4-BE49-F238E27FC236}">
-                <a16:creationId xmlns:a16="http://schemas.microsoft.com/office/drawing/2014/main" id="{E491C160-FA6C-4C42-B85A-15B13CF1202A}"/>
+                <a16:creationId xmlns:a16="http://schemas.microsoft.com/office/drawing/2014/main" id="{5EBC17DF-DBCA-45B3-B4A4-0DA20D77E686}"/>
               </a:ext>
             </a:extLst>
           </p:cNvPr>
@@ -17041,7 +17041,7 @@
                   <a:srgbClr val="1D2A3D"/>
                 </a:solidFill>
               </a:rPr>
-              <a:t>14.1%</a:t>
+              <a:t>14.6%</a:t>
             </a:r>
           </a:p>
         </p:txBody>
@@ -17051,7 +17051,7 @@
           <p:cNvPr id="48" name="">
             <a:extLst xmlns:a="http://schemas.openxmlformats.org/drawingml/2006/main">
               <a:ext uri="{FF2B5EF4-FFF2-40B4-BE49-F238E27FC236}">
-                <a16:creationId xmlns:a16="http://schemas.microsoft.com/office/drawing/2014/main" id="{06856F40-4816-4D77-92AA-8FB9DD5AC8FB}"/>
+                <a16:creationId xmlns:a16="http://schemas.microsoft.com/office/drawing/2014/main" id="{1E7DBABE-99F3-4DC8-91BA-4C7B92413DDA}"/>
               </a:ext>
             </a:extLst>
           </p:cNvPr>
@@ -17082,7 +17082,7 @@
           <p:cNvPr id="49" name="">
             <a:extLst xmlns:a="http://schemas.openxmlformats.org/drawingml/2006/main">
               <a:ext uri="{FF2B5EF4-FFF2-40B4-BE49-F238E27FC236}">
-                <a16:creationId xmlns:a16="http://schemas.microsoft.com/office/drawing/2014/main" id="{637AB86B-00B6-4516-857F-5E36A8F8CD0D}"/>
+                <a16:creationId xmlns:a16="http://schemas.microsoft.com/office/drawing/2014/main" id="{88F1FD8B-166D-41CA-8AD6-5E574EB1C84A}"/>
               </a:ext>
             </a:extLst>
           </p:cNvPr>
@@ -17132,7 +17132,7 @@
           <p:cNvPr id="50" name="">
             <a:extLst xmlns:a="http://schemas.openxmlformats.org/drawingml/2006/main">
               <a:ext uri="{FF2B5EF4-FFF2-40B4-BE49-F238E27FC236}">
-                <a16:creationId xmlns:a16="http://schemas.microsoft.com/office/drawing/2014/main" id="{F1EB2937-7218-4086-BA8E-9E4C7DF5CEDC}"/>
+                <a16:creationId xmlns:a16="http://schemas.microsoft.com/office/drawing/2014/main" id="{BD1E22F0-760E-49FB-AA70-72CFB4898993}"/>
               </a:ext>
             </a:extLst>
           </p:cNvPr>
@@ -17172,7 +17172,7 @@
                   <a:srgbClr val="1D2A3D"/>
                 </a:solidFill>
               </a:rPr>
-              <a:t>50 tickets</a:t>
+              <a:t>41 tickets</a:t>
             </a:r>
           </a:p>
         </p:txBody>
@@ -17182,7 +17182,7 @@
           <p:cNvPr id="51" name="">
             <a:extLst xmlns:a="http://schemas.openxmlformats.org/drawingml/2006/main">
               <a:ext uri="{FF2B5EF4-FFF2-40B4-BE49-F238E27FC236}">
-                <a16:creationId xmlns:a16="http://schemas.microsoft.com/office/drawing/2014/main" id="{32DAE256-3A2F-4BD6-B490-FDC91EB9C55D}"/>
+                <a16:creationId xmlns:a16="http://schemas.microsoft.com/office/drawing/2014/main" id="{FBF2076B-CB8F-4EA7-BDF5-446F20B7A988}"/>
               </a:ext>
             </a:extLst>
           </p:cNvPr>
@@ -17222,7 +17222,7 @@
                   <a:srgbClr val="1D2A3D"/>
                 </a:solidFill>
               </a:rPr>
-              <a:t>11.0%</a:t>
+              <a:t>11.3%</a:t>
             </a:r>
           </a:p>
         </p:txBody>
@@ -17232,7 +17232,7 @@
           <p:cNvPr id="52" name="">
             <a:extLst xmlns:a="http://schemas.openxmlformats.org/drawingml/2006/main">
               <a:ext uri="{FF2B5EF4-FFF2-40B4-BE49-F238E27FC236}">
-                <a16:creationId xmlns:a16="http://schemas.microsoft.com/office/drawing/2014/main" id="{D0626BB8-6BA2-4A02-9069-AA316D9CE94D}"/>
+                <a16:creationId xmlns:a16="http://schemas.microsoft.com/office/drawing/2014/main" id="{CBE64A8E-9723-42C2-ACFD-CA670A6EE5C3}"/>
               </a:ext>
             </a:extLst>
           </p:cNvPr>
@@ -17263,7 +17263,7 @@
           <p:cNvPr id="53" name="">
             <a:extLst xmlns:a="http://schemas.openxmlformats.org/drawingml/2006/main">
               <a:ext uri="{FF2B5EF4-FFF2-40B4-BE49-F238E27FC236}">
-                <a16:creationId xmlns:a16="http://schemas.microsoft.com/office/drawing/2014/main" id="{38238AE5-9524-46E8-B23B-003A2030FE2F}"/>
+                <a16:creationId xmlns:a16="http://schemas.microsoft.com/office/drawing/2014/main" id="{D36DD146-C67C-462F-AB01-D7ED58F0EE5A}"/>
               </a:ext>
             </a:extLst>
           </p:cNvPr>
@@ -17313,7 +17313,7 @@
           <p:cNvPr id="54" name="">
             <a:extLst xmlns:a="http://schemas.openxmlformats.org/drawingml/2006/main">
               <a:ext uri="{FF2B5EF4-FFF2-40B4-BE49-F238E27FC236}">
-                <a16:creationId xmlns:a16="http://schemas.microsoft.com/office/drawing/2014/main" id="{05F11FEF-633C-4350-8E6E-727E70D6AE0F}"/>
+                <a16:creationId xmlns:a16="http://schemas.microsoft.com/office/drawing/2014/main" id="{8D4209A4-5969-4381-B5F4-A397206E53F2}"/>
               </a:ext>
             </a:extLst>
           </p:cNvPr>
@@ -17353,7 +17353,7 @@
                   <a:srgbClr val="1D2A3D"/>
                 </a:solidFill>
               </a:rPr>
-              <a:t>133 tickets</a:t>
+              <a:t>110 tickets</a:t>
             </a:r>
           </a:p>
         </p:txBody>
@@ -17363,7 +17363,7 @@
           <p:cNvPr id="55" name="">
             <a:extLst xmlns:a="http://schemas.openxmlformats.org/drawingml/2006/main">
               <a:ext uri="{FF2B5EF4-FFF2-40B4-BE49-F238E27FC236}">
-                <a16:creationId xmlns:a16="http://schemas.microsoft.com/office/drawing/2014/main" id="{7EFF0145-D6F5-44BC-A2BC-7A8DC3E6E580}"/>
+                <a16:creationId xmlns:a16="http://schemas.microsoft.com/office/drawing/2014/main" id="{4DF9F9F2-7B46-48E3-AAEE-3C00C4EBDBF8}"/>
               </a:ext>
             </a:extLst>
           </p:cNvPr>
@@ -17403,7 +17403,7 @@
                   <a:srgbClr val="1D2A3D"/>
                 </a:solidFill>
               </a:rPr>
-              <a:t>29.2%</a:t>
+              <a:t>30.3%</a:t>
             </a:r>
           </a:p>
         </p:txBody>
@@ -17413,7 +17413,7 @@
           <p:cNvPr id="56" name="">
             <a:extLst xmlns:a="http://schemas.openxmlformats.org/drawingml/2006/main">
               <a:ext uri="{FF2B5EF4-FFF2-40B4-BE49-F238E27FC236}">
-                <a16:creationId xmlns:a16="http://schemas.microsoft.com/office/drawing/2014/main" id="{5C07EE35-9C02-470F-870A-92D7C62F4B24}"/>
+                <a16:creationId xmlns:a16="http://schemas.microsoft.com/office/drawing/2014/main" id="{D2376211-2747-40DD-A8B4-875DF1E27F03}"/>
               </a:ext>
             </a:extLst>
           </p:cNvPr>
@@ -17444,7 +17444,7 @@
           <p:cNvPr id="57" name="">
             <a:extLst xmlns:a="http://schemas.openxmlformats.org/drawingml/2006/main">
               <a:ext uri="{FF2B5EF4-FFF2-40B4-BE49-F238E27FC236}">
-                <a16:creationId xmlns:a16="http://schemas.microsoft.com/office/drawing/2014/main" id="{6A243025-F392-49B2-9762-5483CB20B399}"/>
+                <a16:creationId xmlns:a16="http://schemas.microsoft.com/office/drawing/2014/main" id="{6D1D1310-8E25-4F31-834E-465F5B676D53}"/>
               </a:ext>
             </a:extLst>
           </p:cNvPr>
@@ -17494,7 +17494,7 @@
           <p:cNvPr id="58" name="">
             <a:extLst xmlns:a="http://schemas.openxmlformats.org/drawingml/2006/main">
               <a:ext uri="{FF2B5EF4-FFF2-40B4-BE49-F238E27FC236}">
-                <a16:creationId xmlns:a16="http://schemas.microsoft.com/office/drawing/2014/main" id="{C0A99B3B-DB10-4787-8C40-460B2781A6B5}"/>
+                <a16:creationId xmlns:a16="http://schemas.microsoft.com/office/drawing/2014/main" id="{96F6B98D-906A-47EA-BE99-7CE37DBED264}"/>
               </a:ext>
             </a:extLst>
           </p:cNvPr>
@@ -17534,7 +17534,7 @@
                   <a:srgbClr val="1D2A3D"/>
                 </a:solidFill>
               </a:rPr>
-              <a:t>79 tickets</a:t>
+              <a:t>63 tickets</a:t>
             </a:r>
           </a:p>
         </p:txBody>
@@ -17544,7 +17544,7 @@
           <p:cNvPr id="59" name="">
             <a:extLst xmlns:a="http://schemas.openxmlformats.org/drawingml/2006/main">
               <a:ext uri="{FF2B5EF4-FFF2-40B4-BE49-F238E27FC236}">
-                <a16:creationId xmlns:a16="http://schemas.microsoft.com/office/drawing/2014/main" id="{79D5D774-60EE-4161-85D8-3A41E266B2B0}"/>
+                <a16:creationId xmlns:a16="http://schemas.microsoft.com/office/drawing/2014/main" id="{953E88D6-8748-4BAE-8737-B0F492E4AEDD}"/>
               </a:ext>
             </a:extLst>
           </p:cNvPr>
@@ -17594,7 +17594,7 @@
           <p:cNvPr id="60" name="">
             <a:extLst xmlns:a="http://schemas.openxmlformats.org/drawingml/2006/main">
               <a:ext uri="{FF2B5EF4-FFF2-40B4-BE49-F238E27FC236}">
-                <a16:creationId xmlns:a16="http://schemas.microsoft.com/office/drawing/2014/main" id="{BDF8388E-C838-4CCD-AC7B-89F6115D7834}"/>
+                <a16:creationId xmlns:a16="http://schemas.microsoft.com/office/drawing/2014/main" id="{E0EC6501-F493-4D6D-82CF-5348A61FC695}"/>
               </a:ext>
             </a:extLst>
           </p:cNvPr>
@@ -17635,7 +17635,7 @@
           <p:cNvPr id="61" name="">
             <a:extLst xmlns:a="http://schemas.openxmlformats.org/drawingml/2006/main">
               <a:ext uri="{FF2B5EF4-FFF2-40B4-BE49-F238E27FC236}">
-                <a16:creationId xmlns:a16="http://schemas.microsoft.com/office/drawing/2014/main" id="{0D62F998-7C82-488F-9EFA-8A1CA097EC7C}"/>
+                <a16:creationId xmlns:a16="http://schemas.microsoft.com/office/drawing/2014/main" id="{D23A7135-D527-429B-ACDB-FF43C05FAC6B}"/>
               </a:ext>
             </a:extLst>
           </p:cNvPr>
@@ -17685,7 +17685,7 @@
           <p:cNvPr id="62" name="">
             <a:extLst xmlns:a="http://schemas.openxmlformats.org/drawingml/2006/main">
               <a:ext uri="{FF2B5EF4-FFF2-40B4-BE49-F238E27FC236}">
-                <a16:creationId xmlns:a16="http://schemas.microsoft.com/office/drawing/2014/main" id="{0EFC00EB-EA02-480E-859A-80FF03CD74AA}"/>
+                <a16:creationId xmlns:a16="http://schemas.microsoft.com/office/drawing/2014/main" id="{43FFFAEA-6594-4F5A-A011-F8CB3BE122B7}"/>
               </a:ext>
             </a:extLst>
           </p:cNvPr>
@@ -17725,7 +17725,7 @@
                   <a:srgbClr val="647287"/>
                 </a:solidFill>
               </a:rPr>
-              <a:t>42 tickets  /  avg 29.8 days</a:t>
+              <a:t>16 tickets  /  avg 25.1 days</a:t>
             </a:r>
           </a:p>
         </p:txBody>
@@ -17742,7 +17742,7 @@
         </p:xfrm>
         <a:graphic xmlns:a="http://schemas.openxmlformats.org/drawingml/2006/main">
           <a:graphicData uri="http://schemas.openxmlformats.org/drawingml/2006/chart">
-            <c:chart xmlns:r="http://schemas.openxmlformats.org/officeDocument/2006/relationships" xmlns:c="http://schemas.openxmlformats.org/drawingml/2006/chart" r:id="Refc8dc0994784679"/>
+            <c:chart xmlns:r="http://schemas.openxmlformats.org/officeDocument/2006/relationships" xmlns:c="http://schemas.openxmlformats.org/drawingml/2006/chart" r:id="R601f4180664341aa"/>
           </a:graphicData>
         </a:graphic>
       </p:graphicFrame>
@@ -17751,7 +17751,7 @@
           <p:cNvPr id="64" name="">
             <a:extLst xmlns:a="http://schemas.openxmlformats.org/drawingml/2006/main">
               <a:ext uri="{FF2B5EF4-FFF2-40B4-BE49-F238E27FC236}">
-                <a16:creationId xmlns:a16="http://schemas.microsoft.com/office/drawing/2014/main" id="{2AAEDE0B-1A88-4DDC-899A-B6C0318ADB2A}"/>
+                <a16:creationId xmlns:a16="http://schemas.microsoft.com/office/drawing/2014/main" id="{1DA59EF5-6211-4E48-AA4C-3CE0E89AB925}"/>
               </a:ext>
             </a:extLst>
           </p:cNvPr>
@@ -17782,7 +17782,7 @@
           <p:cNvPr id="65" name="">
             <a:extLst xmlns:a="http://schemas.openxmlformats.org/drawingml/2006/main">
               <a:ext uri="{FF2B5EF4-FFF2-40B4-BE49-F238E27FC236}">
-                <a16:creationId xmlns:a16="http://schemas.microsoft.com/office/drawing/2014/main" id="{3E06AEB9-BC22-456A-97F7-DA48CBCF721A}"/>
+                <a16:creationId xmlns:a16="http://schemas.microsoft.com/office/drawing/2014/main" id="{CBC0A5C4-E156-4E8E-9DC6-E764EE1A5958}"/>
               </a:ext>
             </a:extLst>
           </p:cNvPr>
@@ -17832,7 +17832,7 @@
           <p:cNvPr id="66" name="">
             <a:extLst xmlns:a="http://schemas.openxmlformats.org/drawingml/2006/main">
               <a:ext uri="{FF2B5EF4-FFF2-40B4-BE49-F238E27FC236}">
-                <a16:creationId xmlns:a16="http://schemas.microsoft.com/office/drawing/2014/main" id="{D3C3A2F1-C5E0-422A-9791-0B684B04B95D}"/>
+                <a16:creationId xmlns:a16="http://schemas.microsoft.com/office/drawing/2014/main" id="{BC67B880-10B2-4026-9387-5059D47413A2}"/>
               </a:ext>
             </a:extLst>
           </p:cNvPr>
@@ -17872,7 +17872,7 @@
                   <a:srgbClr val="1D2A3D"/>
                 </a:solidFill>
               </a:rPr>
-              <a:t>7 tickets</a:t>
+              <a:t>6 tickets</a:t>
             </a:r>
           </a:p>
         </p:txBody>
@@ -17882,7 +17882,7 @@
           <p:cNvPr id="67" name="">
             <a:extLst xmlns:a="http://schemas.openxmlformats.org/drawingml/2006/main">
               <a:ext uri="{FF2B5EF4-FFF2-40B4-BE49-F238E27FC236}">
-                <a16:creationId xmlns:a16="http://schemas.microsoft.com/office/drawing/2014/main" id="{9768E62B-7F9D-48B7-947D-2C47A404FC5F}"/>
+                <a16:creationId xmlns:a16="http://schemas.microsoft.com/office/drawing/2014/main" id="{4AE98B29-AB04-4018-856F-A4D3320E44C9}"/>
               </a:ext>
             </a:extLst>
           </p:cNvPr>
@@ -17922,7 +17922,7 @@
                   <a:srgbClr val="1D2A3D"/>
                 </a:solidFill>
               </a:rPr>
-              <a:t>16.7%</a:t>
+              <a:t>37.5%</a:t>
             </a:r>
           </a:p>
         </p:txBody>
@@ -17932,7 +17932,7 @@
           <p:cNvPr id="68" name="">
             <a:extLst xmlns:a="http://schemas.openxmlformats.org/drawingml/2006/main">
               <a:ext uri="{FF2B5EF4-FFF2-40B4-BE49-F238E27FC236}">
-                <a16:creationId xmlns:a16="http://schemas.microsoft.com/office/drawing/2014/main" id="{BC25D6A1-BDA7-4CC6-AB2E-B221AC0F0245}"/>
+                <a16:creationId xmlns:a16="http://schemas.microsoft.com/office/drawing/2014/main" id="{459EDB3E-A11B-4C26-854A-B5D04C52E87B}"/>
               </a:ext>
             </a:extLst>
           </p:cNvPr>
@@ -17963,7 +17963,7 @@
           <p:cNvPr id="69" name="">
             <a:extLst xmlns:a="http://schemas.openxmlformats.org/drawingml/2006/main">
               <a:ext uri="{FF2B5EF4-FFF2-40B4-BE49-F238E27FC236}">
-                <a16:creationId xmlns:a16="http://schemas.microsoft.com/office/drawing/2014/main" id="{81C17AD0-A3E0-4C8C-AAB5-B2735576761D}"/>
+                <a16:creationId xmlns:a16="http://schemas.microsoft.com/office/drawing/2014/main" id="{ABB5EC44-8CE2-44B7-A457-C278FEB801B3}"/>
               </a:ext>
             </a:extLst>
           </p:cNvPr>
@@ -18013,7 +18013,7 @@
           <p:cNvPr id="70" name="">
             <a:extLst xmlns:a="http://schemas.openxmlformats.org/drawingml/2006/main">
               <a:ext uri="{FF2B5EF4-FFF2-40B4-BE49-F238E27FC236}">
-                <a16:creationId xmlns:a16="http://schemas.microsoft.com/office/drawing/2014/main" id="{E7714D2B-27BF-41FE-BC08-D7F4A8544C2F}"/>
+                <a16:creationId xmlns:a16="http://schemas.microsoft.com/office/drawing/2014/main" id="{48C5A9A0-2FB4-4710-85BB-91160C18C4AA}"/>
               </a:ext>
             </a:extLst>
           </p:cNvPr>
@@ -18053,7 +18053,7 @@
                   <a:srgbClr val="1D2A3D"/>
                 </a:solidFill>
               </a:rPr>
-              <a:t>9 tickets</a:t>
+              <a:t>2 tickets</a:t>
             </a:r>
           </a:p>
         </p:txBody>
@@ -18063,7 +18063,7 @@
           <p:cNvPr id="71" name="">
             <a:extLst xmlns:a="http://schemas.openxmlformats.org/drawingml/2006/main">
               <a:ext uri="{FF2B5EF4-FFF2-40B4-BE49-F238E27FC236}">
-                <a16:creationId xmlns:a16="http://schemas.microsoft.com/office/drawing/2014/main" id="{27A8A2FF-08EE-45AE-8EFB-3FEA794FBDEF}"/>
+                <a16:creationId xmlns:a16="http://schemas.microsoft.com/office/drawing/2014/main" id="{2CA33BC6-D55A-4590-9045-283C8E5807A4}"/>
               </a:ext>
             </a:extLst>
           </p:cNvPr>
@@ -18103,7 +18103,7 @@
                   <a:srgbClr val="1D2A3D"/>
                 </a:solidFill>
               </a:rPr>
-              <a:t>21.4%</a:t>
+              <a:t>12.5%</a:t>
             </a:r>
           </a:p>
         </p:txBody>
@@ -18113,7 +18113,7 @@
           <p:cNvPr id="72" name="">
             <a:extLst xmlns:a="http://schemas.openxmlformats.org/drawingml/2006/main">
               <a:ext uri="{FF2B5EF4-FFF2-40B4-BE49-F238E27FC236}">
-                <a16:creationId xmlns:a16="http://schemas.microsoft.com/office/drawing/2014/main" id="{E3C89317-6ED7-4C96-9696-AAE4AE80C5CE}"/>
+                <a16:creationId xmlns:a16="http://schemas.microsoft.com/office/drawing/2014/main" id="{B95A4880-D14A-43FE-918E-9C54B1D4FE73}"/>
               </a:ext>
             </a:extLst>
           </p:cNvPr>
@@ -18144,7 +18144,7 @@
           <p:cNvPr id="73" name="">
             <a:extLst xmlns:a="http://schemas.openxmlformats.org/drawingml/2006/main">
               <a:ext uri="{FF2B5EF4-FFF2-40B4-BE49-F238E27FC236}">
-                <a16:creationId xmlns:a16="http://schemas.microsoft.com/office/drawing/2014/main" id="{69EBA36F-7A2E-4A14-8AD9-7358896E2AE3}"/>
+                <a16:creationId xmlns:a16="http://schemas.microsoft.com/office/drawing/2014/main" id="{8F76F589-1427-4946-B182-8C24D0EAAF59}"/>
               </a:ext>
             </a:extLst>
           </p:cNvPr>
@@ -18194,7 +18194,7 @@
           <p:cNvPr id="74" name="">
             <a:extLst xmlns:a="http://schemas.openxmlformats.org/drawingml/2006/main">
               <a:ext uri="{FF2B5EF4-FFF2-40B4-BE49-F238E27FC236}">
-                <a16:creationId xmlns:a16="http://schemas.microsoft.com/office/drawing/2014/main" id="{2E726C3B-4418-4FDB-A182-14F3E91B54FA}"/>
+                <a16:creationId xmlns:a16="http://schemas.microsoft.com/office/drawing/2014/main" id="{BB44CE7E-4D27-4BBD-90BE-970DD4B218BA}"/>
               </a:ext>
             </a:extLst>
           </p:cNvPr>
@@ -18234,7 +18234,7 @@
                   <a:srgbClr val="1D2A3D"/>
                 </a:solidFill>
               </a:rPr>
-              <a:t>4 tickets</a:t>
+              <a:t>1 tickets</a:t>
             </a:r>
           </a:p>
         </p:txBody>
@@ -18244,7 +18244,7 @@
           <p:cNvPr id="75" name="">
             <a:extLst xmlns:a="http://schemas.openxmlformats.org/drawingml/2006/main">
               <a:ext uri="{FF2B5EF4-FFF2-40B4-BE49-F238E27FC236}">
-                <a16:creationId xmlns:a16="http://schemas.microsoft.com/office/drawing/2014/main" id="{B56DA4DA-AE53-4C96-9A43-70A1AA285A10}"/>
+                <a16:creationId xmlns:a16="http://schemas.microsoft.com/office/drawing/2014/main" id="{C2615621-039E-4E84-9D20-3EFA04A8B140}"/>
               </a:ext>
             </a:extLst>
           </p:cNvPr>
@@ -18284,7 +18284,7 @@
                   <a:srgbClr val="1D2A3D"/>
                 </a:solidFill>
               </a:rPr>
-              <a:t>9.5%</a:t>
+              <a:t>6.2%</a:t>
             </a:r>
           </a:p>
         </p:txBody>
@@ -18294,7 +18294,7 @@
           <p:cNvPr id="76" name="">
             <a:extLst xmlns:a="http://schemas.openxmlformats.org/drawingml/2006/main">
               <a:ext uri="{FF2B5EF4-FFF2-40B4-BE49-F238E27FC236}">
-                <a16:creationId xmlns:a16="http://schemas.microsoft.com/office/drawing/2014/main" id="{BF833D6E-8385-4C80-924B-E875FB2E02FC}"/>
+                <a16:creationId xmlns:a16="http://schemas.microsoft.com/office/drawing/2014/main" id="{A36F89BA-EFFC-4D09-AD8A-77F460A960CB}"/>
               </a:ext>
             </a:extLst>
           </p:cNvPr>
@@ -18325,7 +18325,7 @@
           <p:cNvPr id="77" name="">
             <a:extLst xmlns:a="http://schemas.openxmlformats.org/drawingml/2006/main">
               <a:ext uri="{FF2B5EF4-FFF2-40B4-BE49-F238E27FC236}">
-                <a16:creationId xmlns:a16="http://schemas.microsoft.com/office/drawing/2014/main" id="{882CC75E-79F2-48F5-BEA2-3B78B328683E}"/>
+                <a16:creationId xmlns:a16="http://schemas.microsoft.com/office/drawing/2014/main" id="{F25106CC-D683-477A-ABAF-2AAC8AD48E71}"/>
               </a:ext>
             </a:extLst>
           </p:cNvPr>
@@ -18375,7 +18375,7 @@
           <p:cNvPr id="78" name="">
             <a:extLst xmlns:a="http://schemas.openxmlformats.org/drawingml/2006/main">
               <a:ext uri="{FF2B5EF4-FFF2-40B4-BE49-F238E27FC236}">
-                <a16:creationId xmlns:a16="http://schemas.microsoft.com/office/drawing/2014/main" id="{09647ECD-F025-4B2D-865B-0C354D149291}"/>
+                <a16:creationId xmlns:a16="http://schemas.microsoft.com/office/drawing/2014/main" id="{CA06BAA2-448B-4344-8D9F-E3327CF5032E}"/>
               </a:ext>
             </a:extLst>
           </p:cNvPr>
@@ -18415,7 +18415,7 @@
                   <a:srgbClr val="1D2A3D"/>
                 </a:solidFill>
               </a:rPr>
-              <a:t>6 tickets</a:t>
+              <a:t>2 tickets</a:t>
             </a:r>
           </a:p>
         </p:txBody>
@@ -18425,7 +18425,7 @@
           <p:cNvPr id="79" name="">
             <a:extLst xmlns:a="http://schemas.openxmlformats.org/drawingml/2006/main">
               <a:ext uri="{FF2B5EF4-FFF2-40B4-BE49-F238E27FC236}">
-                <a16:creationId xmlns:a16="http://schemas.microsoft.com/office/drawing/2014/main" id="{81A1DA08-566A-4065-8BFA-9DAA857EA97A}"/>
+                <a16:creationId xmlns:a16="http://schemas.microsoft.com/office/drawing/2014/main" id="{58B0956E-91BE-4B06-9D23-84F799DCDE4C}"/>
               </a:ext>
             </a:extLst>
           </p:cNvPr>
@@ -18465,7 +18465,7 @@
                   <a:srgbClr val="1D2A3D"/>
                 </a:solidFill>
               </a:rPr>
-              <a:t>14.3%</a:t>
+              <a:t>12.5%</a:t>
             </a:r>
           </a:p>
         </p:txBody>
@@ -18475,7 +18475,7 @@
           <p:cNvPr id="80" name="">
             <a:extLst xmlns:a="http://schemas.openxmlformats.org/drawingml/2006/main">
               <a:ext uri="{FF2B5EF4-FFF2-40B4-BE49-F238E27FC236}">
-                <a16:creationId xmlns:a16="http://schemas.microsoft.com/office/drawing/2014/main" id="{1699F8B9-6F54-4F70-83C6-A4E2BB7F215F}"/>
+                <a16:creationId xmlns:a16="http://schemas.microsoft.com/office/drawing/2014/main" id="{4A2ACA32-6380-4AA5-AD77-B2FDC62E9B9D}"/>
               </a:ext>
             </a:extLst>
           </p:cNvPr>
@@ -18506,7 +18506,7 @@
           <p:cNvPr id="81" name="">
             <a:extLst xmlns:a="http://schemas.openxmlformats.org/drawingml/2006/main">
               <a:ext uri="{FF2B5EF4-FFF2-40B4-BE49-F238E27FC236}">
-                <a16:creationId xmlns:a16="http://schemas.microsoft.com/office/drawing/2014/main" id="{05ACCADB-D476-4C47-A4FE-E2104A852619}"/>
+                <a16:creationId xmlns:a16="http://schemas.microsoft.com/office/drawing/2014/main" id="{B529674C-D9F5-4A31-A3C1-F895BF808EC0}"/>
               </a:ext>
             </a:extLst>
           </p:cNvPr>
@@ -18556,7 +18556,7 @@
           <p:cNvPr id="82" name="">
             <a:extLst xmlns:a="http://schemas.openxmlformats.org/drawingml/2006/main">
               <a:ext uri="{FF2B5EF4-FFF2-40B4-BE49-F238E27FC236}">
-                <a16:creationId xmlns:a16="http://schemas.microsoft.com/office/drawing/2014/main" id="{3D01964E-5D7E-438C-ADE0-FA4824644F6C}"/>
+                <a16:creationId xmlns:a16="http://schemas.microsoft.com/office/drawing/2014/main" id="{CF5232C7-7DBC-450C-9351-B17FE8DF9081}"/>
               </a:ext>
             </a:extLst>
           </p:cNvPr>
@@ -18596,7 +18596,7 @@
                   <a:srgbClr val="1D2A3D"/>
                 </a:solidFill>
               </a:rPr>
-              <a:t>9 tickets</a:t>
+              <a:t>3 tickets</a:t>
             </a:r>
           </a:p>
         </p:txBody>
@@ -18606,7 +18606,7 @@
           <p:cNvPr id="83" name="">
             <a:extLst xmlns:a="http://schemas.openxmlformats.org/drawingml/2006/main">
               <a:ext uri="{FF2B5EF4-FFF2-40B4-BE49-F238E27FC236}">
-                <a16:creationId xmlns:a16="http://schemas.microsoft.com/office/drawing/2014/main" id="{1DC156BA-2505-41D6-A603-7C2DFCD710ED}"/>
+                <a16:creationId xmlns:a16="http://schemas.microsoft.com/office/drawing/2014/main" id="{65A05C26-5AAF-4B1E-BD9B-9EC8876FC72D}"/>
               </a:ext>
             </a:extLst>
           </p:cNvPr>
@@ -18646,7 +18646,7 @@
                   <a:srgbClr val="1D2A3D"/>
                 </a:solidFill>
               </a:rPr>
-              <a:t>21.4%</a:t>
+              <a:t>18.8%</a:t>
             </a:r>
           </a:p>
         </p:txBody>
@@ -18656,7 +18656,7 @@
           <p:cNvPr id="84" name="">
             <a:extLst xmlns:a="http://schemas.openxmlformats.org/drawingml/2006/main">
               <a:ext uri="{FF2B5EF4-FFF2-40B4-BE49-F238E27FC236}">
-                <a16:creationId xmlns:a16="http://schemas.microsoft.com/office/drawing/2014/main" id="{5F7D4F66-B5DC-42AC-9926-1AC50A368DD1}"/>
+                <a16:creationId xmlns:a16="http://schemas.microsoft.com/office/drawing/2014/main" id="{7440D08F-8717-4627-A638-31274990EE58}"/>
               </a:ext>
             </a:extLst>
           </p:cNvPr>
@@ -18687,7 +18687,7 @@
           <p:cNvPr id="85" name="">
             <a:extLst xmlns:a="http://schemas.openxmlformats.org/drawingml/2006/main">
               <a:ext uri="{FF2B5EF4-FFF2-40B4-BE49-F238E27FC236}">
-                <a16:creationId xmlns:a16="http://schemas.microsoft.com/office/drawing/2014/main" id="{EB6DEC23-2ACB-4FE6-83A1-67C2FA3BEB7C}"/>
+                <a16:creationId xmlns:a16="http://schemas.microsoft.com/office/drawing/2014/main" id="{6EBB3637-EF70-4D42-9950-7AAAEE3BB00E}"/>
               </a:ext>
             </a:extLst>
           </p:cNvPr>
@@ -18737,7 +18737,7 @@
           <p:cNvPr id="86" name="">
             <a:extLst xmlns:a="http://schemas.openxmlformats.org/drawingml/2006/main">
               <a:ext uri="{FF2B5EF4-FFF2-40B4-BE49-F238E27FC236}">
-                <a16:creationId xmlns:a16="http://schemas.microsoft.com/office/drawing/2014/main" id="{7ADF7F41-D210-4C9F-834E-9849C48DE950}"/>
+                <a16:creationId xmlns:a16="http://schemas.microsoft.com/office/drawing/2014/main" id="{F3F5C34B-9867-4CC5-B358-FAF7092C5123}"/>
               </a:ext>
             </a:extLst>
           </p:cNvPr>
@@ -18777,7 +18777,7 @@
                   <a:srgbClr val="1D2A3D"/>
                 </a:solidFill>
               </a:rPr>
-              <a:t>7 tickets</a:t>
+              <a:t>2 tickets</a:t>
             </a:r>
           </a:p>
         </p:txBody>
@@ -18787,7 +18787,7 @@
           <p:cNvPr id="87" name="">
             <a:extLst xmlns:a="http://schemas.openxmlformats.org/drawingml/2006/main">
               <a:ext uri="{FF2B5EF4-FFF2-40B4-BE49-F238E27FC236}">
-                <a16:creationId xmlns:a16="http://schemas.microsoft.com/office/drawing/2014/main" id="{30624887-D3AD-4486-9BDA-A6CCDA0B3B2C}"/>
+                <a16:creationId xmlns:a16="http://schemas.microsoft.com/office/drawing/2014/main" id="{408456A5-2666-46A6-8941-4170B405AB0F}"/>
               </a:ext>
             </a:extLst>
           </p:cNvPr>
@@ -18827,7 +18827,7 @@
                   <a:srgbClr val="1D2A3D"/>
                 </a:solidFill>
               </a:rPr>
-              <a:t>16.7%</a:t>
+              <a:t>12.5%</a:t>
             </a:r>
           </a:p>
         </p:txBody>
@@ -18837,7 +18837,7 @@
           <p:cNvPr id="88" name="">
             <a:extLst xmlns:a="http://schemas.openxmlformats.org/drawingml/2006/main">
               <a:ext uri="{FF2B5EF4-FFF2-40B4-BE49-F238E27FC236}">
-                <a16:creationId xmlns:a16="http://schemas.microsoft.com/office/drawing/2014/main" id="{C144D2AD-0379-4958-BABD-2D73E4D6071C}"/>
+                <a16:creationId xmlns:a16="http://schemas.microsoft.com/office/drawing/2014/main" id="{05C1F32C-052F-4548-95E6-50AA6AC12D61}"/>
               </a:ext>
             </a:extLst>
           </p:cNvPr>
@@ -18878,7 +18878,7 @@
           <p:cNvPr id="89" name="">
             <a:extLst xmlns:a="http://schemas.openxmlformats.org/drawingml/2006/main">
               <a:ext uri="{FF2B5EF4-FFF2-40B4-BE49-F238E27FC236}">
-                <a16:creationId xmlns:a16="http://schemas.microsoft.com/office/drawing/2014/main" id="{DE1413A8-00BE-4F7A-B826-209FA9F40D65}"/>
+                <a16:creationId xmlns:a16="http://schemas.microsoft.com/office/drawing/2014/main" id="{2F91B834-38DD-4C54-9EE7-208E2E445CD7}"/>
               </a:ext>
             </a:extLst>
           </p:cNvPr>
@@ -18928,7 +18928,7 @@
           <p:cNvPr id="90" name="">
             <a:extLst xmlns:a="http://schemas.openxmlformats.org/drawingml/2006/main">
               <a:ext uri="{FF2B5EF4-FFF2-40B4-BE49-F238E27FC236}">
-                <a16:creationId xmlns:a16="http://schemas.microsoft.com/office/drawing/2014/main" id="{F398D755-7448-48D8-BDE6-37040D93992A}"/>
+                <a16:creationId xmlns:a16="http://schemas.microsoft.com/office/drawing/2014/main" id="{8B249932-6633-4F7B-AC71-2DF49FE4F27D}"/>
               </a:ext>
             </a:extLst>
           </p:cNvPr>
@@ -18985,7 +18985,7 @@
         </p:xfrm>
         <a:graphic xmlns:a="http://schemas.openxmlformats.org/drawingml/2006/main">
           <a:graphicData uri="http://schemas.openxmlformats.org/drawingml/2006/chart">
-            <c:chart xmlns:r="http://schemas.openxmlformats.org/officeDocument/2006/relationships" xmlns:c="http://schemas.openxmlformats.org/drawingml/2006/chart" r:id="R7fd24921ca0c445b"/>
+            <c:chart xmlns:r="http://schemas.openxmlformats.org/officeDocument/2006/relationships" xmlns:c="http://schemas.openxmlformats.org/drawingml/2006/chart" r:id="Re9f74e7e5850413d"/>
           </a:graphicData>
         </a:graphic>
       </p:graphicFrame>
@@ -18994,7 +18994,7 @@
           <p:cNvPr id="92" name="">
             <a:extLst xmlns:a="http://schemas.openxmlformats.org/drawingml/2006/main">
               <a:ext uri="{FF2B5EF4-FFF2-40B4-BE49-F238E27FC236}">
-                <a16:creationId xmlns:a16="http://schemas.microsoft.com/office/drawing/2014/main" id="{BDA01EB9-DD41-4214-9267-64E9F5F5614B}"/>
+                <a16:creationId xmlns:a16="http://schemas.microsoft.com/office/drawing/2014/main" id="{6950BD55-72FB-44F7-8B03-BC5DC7C52AE0}"/>
               </a:ext>
             </a:extLst>
           </p:cNvPr>
@@ -19025,7 +19025,7 @@
           <p:cNvPr id="93" name="">
             <a:extLst xmlns:a="http://schemas.openxmlformats.org/drawingml/2006/main">
               <a:ext uri="{FF2B5EF4-FFF2-40B4-BE49-F238E27FC236}">
-                <a16:creationId xmlns:a16="http://schemas.microsoft.com/office/drawing/2014/main" id="{72D31714-2FE3-4FBD-ACF8-7A23F0CE86AB}"/>
+                <a16:creationId xmlns:a16="http://schemas.microsoft.com/office/drawing/2014/main" id="{16E1D71D-3DE1-4C0F-9EE6-F22AB729C020}"/>
               </a:ext>
             </a:extLst>
           </p:cNvPr>
@@ -19075,7 +19075,7 @@
           <p:cNvPr id="94" name="">
             <a:extLst xmlns:a="http://schemas.openxmlformats.org/drawingml/2006/main">
               <a:ext uri="{FF2B5EF4-FFF2-40B4-BE49-F238E27FC236}">
-                <a16:creationId xmlns:a16="http://schemas.microsoft.com/office/drawing/2014/main" id="{2ABB00F2-7D67-4554-9932-B364EE95C9C9}"/>
+                <a16:creationId xmlns:a16="http://schemas.microsoft.com/office/drawing/2014/main" id="{3A7CAA81-B87F-440D-8BA4-69031B504456}"/>
               </a:ext>
             </a:extLst>
           </p:cNvPr>
@@ -19125,7 +19125,7 @@
           <p:cNvPr id="95" name="">
             <a:extLst xmlns:a="http://schemas.openxmlformats.org/drawingml/2006/main">
               <a:ext uri="{FF2B5EF4-FFF2-40B4-BE49-F238E27FC236}">
-                <a16:creationId xmlns:a16="http://schemas.microsoft.com/office/drawing/2014/main" id="{D55537FF-B787-4BA7-B49C-6647F8B88AF4}"/>
+                <a16:creationId xmlns:a16="http://schemas.microsoft.com/office/drawing/2014/main" id="{B35660B8-0853-426F-87B4-31D322D03C85}"/>
               </a:ext>
             </a:extLst>
           </p:cNvPr>
@@ -19175,7 +19175,7 @@
           <p:cNvPr id="96" name="">
             <a:extLst xmlns:a="http://schemas.openxmlformats.org/drawingml/2006/main">
               <a:ext uri="{FF2B5EF4-FFF2-40B4-BE49-F238E27FC236}">
-                <a16:creationId xmlns:a16="http://schemas.microsoft.com/office/drawing/2014/main" id="{D343E40A-E360-4317-934D-6BB245FDB3A6}"/>
+                <a16:creationId xmlns:a16="http://schemas.microsoft.com/office/drawing/2014/main" id="{AFAFCABB-3F0F-42A5-B245-C5EDC2A17218}"/>
               </a:ext>
             </a:extLst>
           </p:cNvPr>
@@ -19206,7 +19206,7 @@
           <p:cNvPr id="97" name="">
             <a:extLst xmlns:a="http://schemas.openxmlformats.org/drawingml/2006/main">
               <a:ext uri="{FF2B5EF4-FFF2-40B4-BE49-F238E27FC236}">
-                <a16:creationId xmlns:a16="http://schemas.microsoft.com/office/drawing/2014/main" id="{8EA98D10-0483-4C3B-A4EA-FEBFC807F97D}"/>
+                <a16:creationId xmlns:a16="http://schemas.microsoft.com/office/drawing/2014/main" id="{080A229A-9348-456B-BBFD-CFC6CC8D5F99}"/>
               </a:ext>
             </a:extLst>
           </p:cNvPr>
@@ -19256,7 +19256,7 @@
           <p:cNvPr id="98" name="">
             <a:extLst xmlns:a="http://schemas.openxmlformats.org/drawingml/2006/main">
               <a:ext uri="{FF2B5EF4-FFF2-40B4-BE49-F238E27FC236}">
-                <a16:creationId xmlns:a16="http://schemas.microsoft.com/office/drawing/2014/main" id="{23710713-70AD-467A-A392-CE8A2F404C5E}"/>
+                <a16:creationId xmlns:a16="http://schemas.microsoft.com/office/drawing/2014/main" id="{F72FFEE8-4B44-40E6-B20A-BB4602122BE4}"/>
               </a:ext>
             </a:extLst>
           </p:cNvPr>
@@ -19306,7 +19306,7 @@
           <p:cNvPr id="99" name="">
             <a:extLst xmlns:a="http://schemas.openxmlformats.org/drawingml/2006/main">
               <a:ext uri="{FF2B5EF4-FFF2-40B4-BE49-F238E27FC236}">
-                <a16:creationId xmlns:a16="http://schemas.microsoft.com/office/drawing/2014/main" id="{74E899A2-1919-4FAD-9804-FF012637C389}"/>
+                <a16:creationId xmlns:a16="http://schemas.microsoft.com/office/drawing/2014/main" id="{0A02F1F7-48F3-4DAE-8B4F-70212B90C030}"/>
               </a:ext>
             </a:extLst>
           </p:cNvPr>
@@ -19356,7 +19356,7 @@
           <p:cNvPr id="100" name="">
             <a:extLst xmlns:a="http://schemas.openxmlformats.org/drawingml/2006/main">
               <a:ext uri="{FF2B5EF4-FFF2-40B4-BE49-F238E27FC236}">
-                <a16:creationId xmlns:a16="http://schemas.microsoft.com/office/drawing/2014/main" id="{C9391922-755B-4316-889F-B66C45E04AA8}"/>
+                <a16:creationId xmlns:a16="http://schemas.microsoft.com/office/drawing/2014/main" id="{4947B0CD-2AE4-4AE0-BF7D-0126E05F335A}"/>
               </a:ext>
             </a:extLst>
           </p:cNvPr>
@@ -19387,7 +19387,7 @@
           <p:cNvPr id="101" name="">
             <a:extLst xmlns:a="http://schemas.openxmlformats.org/drawingml/2006/main">
               <a:ext uri="{FF2B5EF4-FFF2-40B4-BE49-F238E27FC236}">
-                <a16:creationId xmlns:a16="http://schemas.microsoft.com/office/drawing/2014/main" id="{F59AF60B-15C2-4E9A-8158-4DB6F19B58DA}"/>
+                <a16:creationId xmlns:a16="http://schemas.microsoft.com/office/drawing/2014/main" id="{9D562E36-BB1B-4C82-BEE3-DB2A12844F45}"/>
               </a:ext>
             </a:extLst>
           </p:cNvPr>
@@ -19437,7 +19437,7 @@
           <p:cNvPr id="102" name="">
             <a:extLst xmlns:a="http://schemas.openxmlformats.org/drawingml/2006/main">
               <a:ext uri="{FF2B5EF4-FFF2-40B4-BE49-F238E27FC236}">
-                <a16:creationId xmlns:a16="http://schemas.microsoft.com/office/drawing/2014/main" id="{667841F9-0C09-4583-99C0-0E7DD07676A1}"/>
+                <a16:creationId xmlns:a16="http://schemas.microsoft.com/office/drawing/2014/main" id="{B4EE539A-4813-4B42-89CF-54669D2C83A8}"/>
               </a:ext>
             </a:extLst>
           </p:cNvPr>
@@ -19487,7 +19487,7 @@
           <p:cNvPr id="103" name="">
             <a:extLst xmlns:a="http://schemas.openxmlformats.org/drawingml/2006/main">
               <a:ext uri="{FF2B5EF4-FFF2-40B4-BE49-F238E27FC236}">
-                <a16:creationId xmlns:a16="http://schemas.microsoft.com/office/drawing/2014/main" id="{55B6B641-1C97-4BC8-8B89-D4C1C5A5C94C}"/>
+                <a16:creationId xmlns:a16="http://schemas.microsoft.com/office/drawing/2014/main" id="{D86A7AAB-891B-464D-A95C-B0D76BA36EBA}"/>
               </a:ext>
             </a:extLst>
           </p:cNvPr>
@@ -19537,7 +19537,7 @@
           <p:cNvPr id="104" name="">
             <a:extLst xmlns:a="http://schemas.openxmlformats.org/drawingml/2006/main">
               <a:ext uri="{FF2B5EF4-FFF2-40B4-BE49-F238E27FC236}">
-                <a16:creationId xmlns:a16="http://schemas.microsoft.com/office/drawing/2014/main" id="{C95BF50A-31D5-4B0A-8729-1B791007F80D}"/>
+                <a16:creationId xmlns:a16="http://schemas.microsoft.com/office/drawing/2014/main" id="{0679E4BC-26B5-4313-A365-580E689942F4}"/>
               </a:ext>
             </a:extLst>
           </p:cNvPr>
@@ -19568,7 +19568,7 @@
           <p:cNvPr id="105" name="">
             <a:extLst xmlns:a="http://schemas.openxmlformats.org/drawingml/2006/main">
               <a:ext uri="{FF2B5EF4-FFF2-40B4-BE49-F238E27FC236}">
-                <a16:creationId xmlns:a16="http://schemas.microsoft.com/office/drawing/2014/main" id="{7D279AC7-22F6-4842-A82E-031570ED7594}"/>
+                <a16:creationId xmlns:a16="http://schemas.microsoft.com/office/drawing/2014/main" id="{3F90F758-51CD-4435-A106-F8641C5B54A3}"/>
               </a:ext>
             </a:extLst>
           </p:cNvPr>
@@ -19618,7 +19618,7 @@
           <p:cNvPr id="106" name="">
             <a:extLst xmlns:a="http://schemas.openxmlformats.org/drawingml/2006/main">
               <a:ext uri="{FF2B5EF4-FFF2-40B4-BE49-F238E27FC236}">
-                <a16:creationId xmlns:a16="http://schemas.microsoft.com/office/drawing/2014/main" id="{42C97295-724F-4BE1-B936-D7704D21508A}"/>
+                <a16:creationId xmlns:a16="http://schemas.microsoft.com/office/drawing/2014/main" id="{11CE4E87-81A9-4D34-9D55-C276A55FBD10}"/>
               </a:ext>
             </a:extLst>
           </p:cNvPr>
@@ -19668,7 +19668,7 @@
           <p:cNvPr id="107" name="">
             <a:extLst xmlns:a="http://schemas.openxmlformats.org/drawingml/2006/main">
               <a:ext uri="{FF2B5EF4-FFF2-40B4-BE49-F238E27FC236}">
-                <a16:creationId xmlns:a16="http://schemas.microsoft.com/office/drawing/2014/main" id="{8A03A339-0733-4A3A-B09E-A11D85E62276}"/>
+                <a16:creationId xmlns:a16="http://schemas.microsoft.com/office/drawing/2014/main" id="{344C561B-38BF-448D-BEC4-9EB3219FEA04}"/>
               </a:ext>
             </a:extLst>
           </p:cNvPr>
@@ -19718,7 +19718,7 @@
           <p:cNvPr id="108" name="">
             <a:extLst xmlns:a="http://schemas.openxmlformats.org/drawingml/2006/main">
               <a:ext uri="{FF2B5EF4-FFF2-40B4-BE49-F238E27FC236}">
-                <a16:creationId xmlns:a16="http://schemas.microsoft.com/office/drawing/2014/main" id="{4A2CB9CD-BFC2-49C5-B07F-3C8A6EF6C0FF}"/>
+                <a16:creationId xmlns:a16="http://schemas.microsoft.com/office/drawing/2014/main" id="{C80AE621-E44D-429D-B8DA-FDACB0F905D9}"/>
               </a:ext>
             </a:extLst>
           </p:cNvPr>
@@ -19749,7 +19749,7 @@
           <p:cNvPr id="109" name="">
             <a:extLst xmlns:a="http://schemas.openxmlformats.org/drawingml/2006/main">
               <a:ext uri="{FF2B5EF4-FFF2-40B4-BE49-F238E27FC236}">
-                <a16:creationId xmlns:a16="http://schemas.microsoft.com/office/drawing/2014/main" id="{94835006-EA1B-4EAB-B991-F9630CC9233B}"/>
+                <a16:creationId xmlns:a16="http://schemas.microsoft.com/office/drawing/2014/main" id="{EE9E498F-3F2D-4C32-BD77-1FE19987D36C}"/>
               </a:ext>
             </a:extLst>
           </p:cNvPr>
@@ -19799,7 +19799,7 @@
           <p:cNvPr id="110" name="">
             <a:extLst xmlns:a="http://schemas.openxmlformats.org/drawingml/2006/main">
               <a:ext uri="{FF2B5EF4-FFF2-40B4-BE49-F238E27FC236}">
-                <a16:creationId xmlns:a16="http://schemas.microsoft.com/office/drawing/2014/main" id="{C5BF135A-3D81-4765-91E0-899D90B56E29}"/>
+                <a16:creationId xmlns:a16="http://schemas.microsoft.com/office/drawing/2014/main" id="{674A67E6-DD74-4726-B839-72B586F58704}"/>
               </a:ext>
             </a:extLst>
           </p:cNvPr>
@@ -19849,7 +19849,7 @@
           <p:cNvPr id="111" name="">
             <a:extLst xmlns:a="http://schemas.openxmlformats.org/drawingml/2006/main">
               <a:ext uri="{FF2B5EF4-FFF2-40B4-BE49-F238E27FC236}">
-                <a16:creationId xmlns:a16="http://schemas.microsoft.com/office/drawing/2014/main" id="{467C192C-6F60-44CF-99F7-88F080F918F9}"/>
+                <a16:creationId xmlns:a16="http://schemas.microsoft.com/office/drawing/2014/main" id="{6E307E5A-12E5-43C0-8005-5E58828E0B63}"/>
               </a:ext>
             </a:extLst>
           </p:cNvPr>
@@ -19899,7 +19899,7 @@
           <p:cNvPr id="112" name="">
             <a:extLst xmlns:a="http://schemas.openxmlformats.org/drawingml/2006/main">
               <a:ext uri="{FF2B5EF4-FFF2-40B4-BE49-F238E27FC236}">
-                <a16:creationId xmlns:a16="http://schemas.microsoft.com/office/drawing/2014/main" id="{0928D23E-E746-4C37-9B21-38981012DF0D}"/>
+                <a16:creationId xmlns:a16="http://schemas.microsoft.com/office/drawing/2014/main" id="{A02D050C-1575-4775-9E7D-2082676936E6}"/>
               </a:ext>
             </a:extLst>
           </p:cNvPr>
@@ -19930,7 +19930,7 @@
           <p:cNvPr id="113" name="">
             <a:extLst xmlns:a="http://schemas.openxmlformats.org/drawingml/2006/main">
               <a:ext uri="{FF2B5EF4-FFF2-40B4-BE49-F238E27FC236}">
-                <a16:creationId xmlns:a16="http://schemas.microsoft.com/office/drawing/2014/main" id="{7A0B32F7-487F-4CF6-9CC6-AD30B598C714}"/>
+                <a16:creationId xmlns:a16="http://schemas.microsoft.com/office/drawing/2014/main" id="{9A749155-2AC2-4C9C-AA60-2FCC6E5C702D}"/>
               </a:ext>
             </a:extLst>
           </p:cNvPr>
@@ -19980,7 +19980,7 @@
           <p:cNvPr id="114" name="">
             <a:extLst xmlns:a="http://schemas.openxmlformats.org/drawingml/2006/main">
               <a:ext uri="{FF2B5EF4-FFF2-40B4-BE49-F238E27FC236}">
-                <a16:creationId xmlns:a16="http://schemas.microsoft.com/office/drawing/2014/main" id="{FE534FF8-40FD-415D-9273-4D7AFFC89DAB}"/>
+                <a16:creationId xmlns:a16="http://schemas.microsoft.com/office/drawing/2014/main" id="{EFA90191-B6F1-45BD-82CE-4ABEAAF00BD0}"/>
               </a:ext>
             </a:extLst>
           </p:cNvPr>
@@ -20030,7 +20030,7 @@
           <p:cNvPr id="115" name="">
             <a:extLst xmlns:a="http://schemas.openxmlformats.org/drawingml/2006/main">
               <a:ext uri="{FF2B5EF4-FFF2-40B4-BE49-F238E27FC236}">
-                <a16:creationId xmlns:a16="http://schemas.microsoft.com/office/drawing/2014/main" id="{317251BC-689B-4F6B-A95F-5D690FA59FCB}"/>
+                <a16:creationId xmlns:a16="http://schemas.microsoft.com/office/drawing/2014/main" id="{F93A99F5-310B-420A-8C1D-5F771B725F26}"/>
               </a:ext>
             </a:extLst>
           </p:cNvPr>
@@ -20080,7 +20080,7 @@
           <p:cNvPr id="116" name="">
             <a:extLst xmlns:a="http://schemas.openxmlformats.org/drawingml/2006/main">
               <a:ext uri="{FF2B5EF4-FFF2-40B4-BE49-F238E27FC236}">
-                <a16:creationId xmlns:a16="http://schemas.microsoft.com/office/drawing/2014/main" id="{A685C670-870F-4BD0-B905-50527BC97035}"/>
+                <a16:creationId xmlns:a16="http://schemas.microsoft.com/office/drawing/2014/main" id="{20741FC3-0E89-4605-8B60-045076563709}"/>
               </a:ext>
             </a:extLst>
           </p:cNvPr>
@@ -20130,7 +20130,7 @@
           <p:cNvPr id="117" name="">
             <a:extLst xmlns:a="http://schemas.openxmlformats.org/drawingml/2006/main">
               <a:ext uri="{FF2B5EF4-FFF2-40B4-BE49-F238E27FC236}">
-                <a16:creationId xmlns:a16="http://schemas.microsoft.com/office/drawing/2014/main" id="{2AFA16DF-B471-4A60-8AFE-AF88F7B0E696}"/>
+                <a16:creationId xmlns:a16="http://schemas.microsoft.com/office/drawing/2014/main" id="{BC434BCC-8940-492E-BC9A-9A3A6C3CDC58}"/>
               </a:ext>
             </a:extLst>
           </p:cNvPr>
@@ -20161,7 +20161,7 @@
           <p:cNvPr id="118" name="">
             <a:extLst xmlns:a="http://schemas.openxmlformats.org/drawingml/2006/main">
               <a:ext uri="{FF2B5EF4-FFF2-40B4-BE49-F238E27FC236}">
-                <a16:creationId xmlns:a16="http://schemas.microsoft.com/office/drawing/2014/main" id="{ECB29148-8669-4E76-97B6-4524096F04DE}"/>
+                <a16:creationId xmlns:a16="http://schemas.microsoft.com/office/drawing/2014/main" id="{8DA0F796-D4C6-40AE-A51D-6FB04B3336CD}"/>
               </a:ext>
             </a:extLst>
           </p:cNvPr>
@@ -20211,7 +20211,7 @@
           <p:cNvPr id="119" name="">
             <a:extLst xmlns:a="http://schemas.openxmlformats.org/drawingml/2006/main">
               <a:ext uri="{FF2B5EF4-FFF2-40B4-BE49-F238E27FC236}">
-                <a16:creationId xmlns:a16="http://schemas.microsoft.com/office/drawing/2014/main" id="{36F69958-4B0C-46D8-8F42-AE3B96B07C0D}"/>
+                <a16:creationId xmlns:a16="http://schemas.microsoft.com/office/drawing/2014/main" id="{5232E635-434D-4E18-BE69-75C45E0C7E9A}"/>
               </a:ext>
             </a:extLst>
           </p:cNvPr>
@@ -20259,7 +20259,7 @@
     </p:spTree>
     <p:extLst>
       <p:ext uri="{BB962C8B-B14F-4D97-AF65-F5344CB8AC3E}">
-        <p14:creationId xmlns:p14="http://schemas.microsoft.com/office/powerpoint/2010/main" val="1823514379"/>
+        <p14:creationId xmlns:p14="http://schemas.microsoft.com/office/powerpoint/2010/main" val="1005930429"/>
       </p:ext>
     </p:extLst>
   </p:cSld>

--- a/generated_exports/ticket_timeline_price_mix_2026.pptx
+++ b/generated_exports/ticket_timeline_price_mix_2026.pptx
@@ -2,16 +2,16 @@
 <file path=ppt/presentation.xml><?xml version="1.0" encoding="utf-8"?>
 <p:presentation xmlns:p="http://schemas.openxmlformats.org/presentationml/2006/main">
   <p:sldMasterIdLst>
-    <p:sldMasterId xmlns:r="http://schemas.openxmlformats.org/officeDocument/2006/relationships" id="2147483648" r:id="Rc93397cb41244906"/>
+    <p:sldMasterId xmlns:r="http://schemas.openxmlformats.org/officeDocument/2006/relationships" id="2147483648" r:id="R16bfc07bd5634563"/>
   </p:sldMasterIdLst>
   <p:notesMasterIdLst>
-    <p:notesMasterId xmlns:r="http://schemas.openxmlformats.org/officeDocument/2006/relationships" r:id="Rd71663c148c44835"/>
+    <p:notesMasterId xmlns:r="http://schemas.openxmlformats.org/officeDocument/2006/relationships" r:id="R2d2d6ab7b7194aed"/>
   </p:notesMasterIdLst>
   <p:sldIdLst>
-    <p:sldId xmlns:r="http://schemas.openxmlformats.org/officeDocument/2006/relationships" id="256" r:id="Rd6f79cc7c0234a6e"/>
-    <p:sldId xmlns:r="http://schemas.openxmlformats.org/officeDocument/2006/relationships" id="257" r:id="R2a4b4cc5894740f1"/>
-    <p:sldId xmlns:r="http://schemas.openxmlformats.org/officeDocument/2006/relationships" id="258" r:id="R2925816fb0d74a81"/>
-    <p:sldId xmlns:r="http://schemas.openxmlformats.org/officeDocument/2006/relationships" id="259" r:id="R69a938a63c464dbc"/>
+    <p:sldId xmlns:r="http://schemas.openxmlformats.org/officeDocument/2006/relationships" id="256" r:id="R6ef5ac97c8f843b6"/>
+    <p:sldId xmlns:r="http://schemas.openxmlformats.org/officeDocument/2006/relationships" id="257" r:id="R3860d1a386d440e1"/>
+    <p:sldId xmlns:r="http://schemas.openxmlformats.org/officeDocument/2006/relationships" id="258" r:id="R4c0e53345894438a"/>
+    <p:sldId xmlns:r="http://schemas.openxmlformats.org/officeDocument/2006/relationships" id="259" r:id="R4bf03da32b5b4cc1"/>
   </p:sldIdLst>
   <p:sldSz cx="12192000" cy="6858000"/>
   <p:notesSz cx="6858000" cy="9144000"/>
@@ -802,7 +802,7 @@
   </p:cSld>
   <p:clrMap bg1="lt1" tx1="dk1" bg2="lt2" tx2="dk2" accent1="accent1" accent2="accent2" accent3="accent3" accent4="accent4" accent5="accent5" accent6="accent6" hlink="hlink" folHlink="folHlink"/>
   <p:sldLayoutIdLst>
-    <p:sldLayoutId xmlns:r="http://schemas.openxmlformats.org/officeDocument/2006/relationships" id="2147483649" r:id="R46a181c54a664195"/>
+    <p:sldLayoutId xmlns:r="http://schemas.openxmlformats.org/officeDocument/2006/relationships" id="2147483649" r:id="R65b0691e654b4a64"/>
   </p:sldLayoutIdLst>
   <p:txStyles>
     <p:titleStyle>
@@ -3261,7 +3261,7 @@
           <p:cNvPr id="22" name="">
             <a:extLst xmlns:a="http://schemas.openxmlformats.org/drawingml/2006/main">
               <a:ext uri="{FF2B5EF4-FFF2-40B4-BE49-F238E27FC236}">
-                <a16:creationId xmlns:a16="http://schemas.microsoft.com/office/drawing/2014/main" id="{68499D3F-8A58-44D0-884B-3F9ADA79DA35}"/>
+                <a16:creationId xmlns:a16="http://schemas.microsoft.com/office/drawing/2014/main" id="{309F71A0-B060-483D-AACA-B36A9F95C03F}"/>
               </a:ext>
             </a:extLst>
           </p:cNvPr>
@@ -3311,7 +3311,7 @@
           <p:cNvPr id="2" name="">
             <a:extLst xmlns:a="http://schemas.openxmlformats.org/drawingml/2006/main">
               <a:ext uri="{FF2B5EF4-FFF2-40B4-BE49-F238E27FC236}">
-                <a16:creationId xmlns:a16="http://schemas.microsoft.com/office/drawing/2014/main" id="{886B88AC-6860-40DB-8470-8FA7191F976A}"/>
+                <a16:creationId xmlns:a16="http://schemas.microsoft.com/office/drawing/2014/main" id="{EE2281FE-A74C-48C7-A2D8-DAEDD4FCF444}"/>
               </a:ext>
             </a:extLst>
           </p:cNvPr>
@@ -3361,7 +3361,7 @@
           <p:cNvPr id="3" name="">
             <a:extLst xmlns:a="http://schemas.openxmlformats.org/drawingml/2006/main">
               <a:ext uri="{FF2B5EF4-FFF2-40B4-BE49-F238E27FC236}">
-                <a16:creationId xmlns:a16="http://schemas.microsoft.com/office/drawing/2014/main" id="{B5B16271-981D-4531-AC23-5C08C78BAE2D}"/>
+                <a16:creationId xmlns:a16="http://schemas.microsoft.com/office/drawing/2014/main" id="{AB8D07B5-1E9F-4256-B513-33FADACAC8A6}"/>
               </a:ext>
             </a:extLst>
           </p:cNvPr>
@@ -3411,7 +3411,7 @@
           <p:cNvPr id="4" name="">
             <a:extLst xmlns:a="http://schemas.openxmlformats.org/drawingml/2006/main">
               <a:ext uri="{FF2B5EF4-FFF2-40B4-BE49-F238E27FC236}">
-                <a16:creationId xmlns:a16="http://schemas.microsoft.com/office/drawing/2014/main" id="{B66BE241-14C5-43EE-9E95-CC8B84691746}"/>
+                <a16:creationId xmlns:a16="http://schemas.microsoft.com/office/drawing/2014/main" id="{70625749-70CB-42F2-B7C7-A41FFDB8B8E7}"/>
               </a:ext>
             </a:extLst>
           </p:cNvPr>
@@ -3452,7 +3452,7 @@
           <p:cNvPr id="5" name="">
             <a:extLst xmlns:a="http://schemas.openxmlformats.org/drawingml/2006/main">
               <a:ext uri="{FF2B5EF4-FFF2-40B4-BE49-F238E27FC236}">
-                <a16:creationId xmlns:a16="http://schemas.microsoft.com/office/drawing/2014/main" id="{F4EBEA8B-15EC-4655-B857-85DFEAD8BA97}"/>
+                <a16:creationId xmlns:a16="http://schemas.microsoft.com/office/drawing/2014/main" id="{E62C7CF5-8A93-4775-A0D7-CA31D077517F}"/>
               </a:ext>
             </a:extLst>
           </p:cNvPr>
@@ -3502,7 +3502,7 @@
           <p:cNvPr id="6" name="">
             <a:extLst xmlns:a="http://schemas.openxmlformats.org/drawingml/2006/main">
               <a:ext uri="{FF2B5EF4-FFF2-40B4-BE49-F238E27FC236}">
-                <a16:creationId xmlns:a16="http://schemas.microsoft.com/office/drawing/2014/main" id="{ECE292AA-69B2-41F2-A6CD-AEE9FC98CD0A}"/>
+                <a16:creationId xmlns:a16="http://schemas.microsoft.com/office/drawing/2014/main" id="{98B2A6A8-4C13-4AF5-9A6B-6FAB76656F43}"/>
               </a:ext>
             </a:extLst>
           </p:cNvPr>
@@ -3552,7 +3552,7 @@
           <p:cNvPr id="7" name="">
             <a:extLst xmlns:a="http://schemas.openxmlformats.org/drawingml/2006/main">
               <a:ext uri="{FF2B5EF4-FFF2-40B4-BE49-F238E27FC236}">
-                <a16:creationId xmlns:a16="http://schemas.microsoft.com/office/drawing/2014/main" id="{803B42F9-53DE-4F8C-BF58-11A1A060E740}"/>
+                <a16:creationId xmlns:a16="http://schemas.microsoft.com/office/drawing/2014/main" id="{42238093-D9E7-4C1B-BE88-7A5965BC05C8}"/>
               </a:ext>
             </a:extLst>
           </p:cNvPr>
@@ -3602,7 +3602,7 @@
           <p:cNvPr id="8" name="">
             <a:extLst xmlns:a="http://schemas.openxmlformats.org/drawingml/2006/main">
               <a:ext uri="{FF2B5EF4-FFF2-40B4-BE49-F238E27FC236}">
-                <a16:creationId xmlns:a16="http://schemas.microsoft.com/office/drawing/2014/main" id="{B394012D-F0E3-4E33-80F3-0E07652203B6}"/>
+                <a16:creationId xmlns:a16="http://schemas.microsoft.com/office/drawing/2014/main" id="{A1455D91-6026-452A-9D7E-1A7D8D7CF347}"/>
               </a:ext>
             </a:extLst>
           </p:cNvPr>
@@ -3652,7 +3652,7 @@
           <p:cNvPr id="9" name="">
             <a:extLst xmlns:a="http://schemas.openxmlformats.org/drawingml/2006/main">
               <a:ext uri="{FF2B5EF4-FFF2-40B4-BE49-F238E27FC236}">
-                <a16:creationId xmlns:a16="http://schemas.microsoft.com/office/drawing/2014/main" id="{BB58E08A-403D-4F9A-BF4A-06C1560B0AA9}"/>
+                <a16:creationId xmlns:a16="http://schemas.microsoft.com/office/drawing/2014/main" id="{F2C53964-FDB8-4CD2-9BD0-4EFC961B6CDB}"/>
               </a:ext>
             </a:extLst>
           </p:cNvPr>
@@ -3693,7 +3693,7 @@
           <p:cNvPr id="10" name="">
             <a:extLst xmlns:a="http://schemas.openxmlformats.org/drawingml/2006/main">
               <a:ext uri="{FF2B5EF4-FFF2-40B4-BE49-F238E27FC236}">
-                <a16:creationId xmlns:a16="http://schemas.microsoft.com/office/drawing/2014/main" id="{E893E88B-9DCE-4912-BE45-13479E799294}"/>
+                <a16:creationId xmlns:a16="http://schemas.microsoft.com/office/drawing/2014/main" id="{7B8CBAEB-CEE3-4242-B490-E9382523CD3F}"/>
               </a:ext>
             </a:extLst>
           </p:cNvPr>
@@ -3743,7 +3743,7 @@
           <p:cNvPr id="11" name="">
             <a:extLst xmlns:a="http://schemas.openxmlformats.org/drawingml/2006/main">
               <a:ext uri="{FF2B5EF4-FFF2-40B4-BE49-F238E27FC236}">
-                <a16:creationId xmlns:a16="http://schemas.microsoft.com/office/drawing/2014/main" id="{B3E97B8A-35CA-4F15-9D55-5526B2CDC993}"/>
+                <a16:creationId xmlns:a16="http://schemas.microsoft.com/office/drawing/2014/main" id="{0E3FDA5A-3459-4C49-88E2-3B145D46C835}"/>
               </a:ext>
             </a:extLst>
           </p:cNvPr>
@@ -3793,7 +3793,7 @@
           <p:cNvPr id="12" name="">
             <a:extLst xmlns:a="http://schemas.openxmlformats.org/drawingml/2006/main">
               <a:ext uri="{FF2B5EF4-FFF2-40B4-BE49-F238E27FC236}">
-                <a16:creationId xmlns:a16="http://schemas.microsoft.com/office/drawing/2014/main" id="{5248EE74-F8B4-4452-9B4F-0D3D8BF2FECC}"/>
+                <a16:creationId xmlns:a16="http://schemas.microsoft.com/office/drawing/2014/main" id="{89231894-8802-46CB-99A0-20950C0E50B0}"/>
               </a:ext>
             </a:extLst>
           </p:cNvPr>
@@ -3843,7 +3843,7 @@
           <p:cNvPr id="13" name="">
             <a:extLst xmlns:a="http://schemas.openxmlformats.org/drawingml/2006/main">
               <a:ext uri="{FF2B5EF4-FFF2-40B4-BE49-F238E27FC236}">
-                <a16:creationId xmlns:a16="http://schemas.microsoft.com/office/drawing/2014/main" id="{ADF25D14-F9B7-4B41-9FA1-D1D23885A25E}"/>
+                <a16:creationId xmlns:a16="http://schemas.microsoft.com/office/drawing/2014/main" id="{EE3E4F41-1F39-4DB1-8B7E-C24E0B6C3EE8}"/>
               </a:ext>
             </a:extLst>
           </p:cNvPr>
@@ -3893,7 +3893,7 @@
           <p:cNvPr id="14" name="">
             <a:extLst xmlns:a="http://schemas.openxmlformats.org/drawingml/2006/main">
               <a:ext uri="{FF2B5EF4-FFF2-40B4-BE49-F238E27FC236}">
-                <a16:creationId xmlns:a16="http://schemas.microsoft.com/office/drawing/2014/main" id="{4102D0FD-2429-4312-96C3-A9030B547510}"/>
+                <a16:creationId xmlns:a16="http://schemas.microsoft.com/office/drawing/2014/main" id="{B4D05967-17B2-4991-9675-D833A788C463}"/>
               </a:ext>
             </a:extLst>
           </p:cNvPr>
@@ -3934,7 +3934,7 @@
           <p:cNvPr id="15" name="">
             <a:extLst xmlns:a="http://schemas.openxmlformats.org/drawingml/2006/main">
               <a:ext uri="{FF2B5EF4-FFF2-40B4-BE49-F238E27FC236}">
-                <a16:creationId xmlns:a16="http://schemas.microsoft.com/office/drawing/2014/main" id="{118A18D9-0D9E-4959-8E82-D4D7F6C46C1E}"/>
+                <a16:creationId xmlns:a16="http://schemas.microsoft.com/office/drawing/2014/main" id="{A6BB0048-9F67-4B7B-805C-C79C6FB4BF4B}"/>
               </a:ext>
             </a:extLst>
           </p:cNvPr>
@@ -3984,7 +3984,7 @@
           <p:cNvPr id="16" name="">
             <a:extLst xmlns:a="http://schemas.openxmlformats.org/drawingml/2006/main">
               <a:ext uri="{FF2B5EF4-FFF2-40B4-BE49-F238E27FC236}">
-                <a16:creationId xmlns:a16="http://schemas.microsoft.com/office/drawing/2014/main" id="{E0903BB2-C806-42C2-9BBC-863A76416DB8}"/>
+                <a16:creationId xmlns:a16="http://schemas.microsoft.com/office/drawing/2014/main" id="{2C723DA3-987B-401C-AA35-C63AF1CFEA0E}"/>
               </a:ext>
             </a:extLst>
           </p:cNvPr>
@@ -4034,7 +4034,7 @@
           <p:cNvPr id="17" name="">
             <a:extLst xmlns:a="http://schemas.openxmlformats.org/drawingml/2006/main">
               <a:ext uri="{FF2B5EF4-FFF2-40B4-BE49-F238E27FC236}">
-                <a16:creationId xmlns:a16="http://schemas.microsoft.com/office/drawing/2014/main" id="{57A1BCD2-AF17-43E5-A42B-74A0CDB18CF6}"/>
+                <a16:creationId xmlns:a16="http://schemas.microsoft.com/office/drawing/2014/main" id="{8DC0E6E2-20AF-4375-8745-F17DB05AF9EA}"/>
               </a:ext>
             </a:extLst>
           </p:cNvPr>
@@ -4084,7 +4084,7 @@
           <p:cNvPr id="18" name="">
             <a:extLst xmlns:a="http://schemas.openxmlformats.org/drawingml/2006/main">
               <a:ext uri="{FF2B5EF4-FFF2-40B4-BE49-F238E27FC236}">
-                <a16:creationId xmlns:a16="http://schemas.microsoft.com/office/drawing/2014/main" id="{B905E74F-5062-453E-91D9-9323932FFCAF}"/>
+                <a16:creationId xmlns:a16="http://schemas.microsoft.com/office/drawing/2014/main" id="{206C4425-E977-4202-A120-E26362C0E4D1}"/>
               </a:ext>
             </a:extLst>
           </p:cNvPr>
@@ -4134,7 +4134,7 @@
           <p:cNvPr id="19" name="">
             <a:extLst xmlns:a="http://schemas.openxmlformats.org/drawingml/2006/main">
               <a:ext uri="{FF2B5EF4-FFF2-40B4-BE49-F238E27FC236}">
-                <a16:creationId xmlns:a16="http://schemas.microsoft.com/office/drawing/2014/main" id="{63FD5A03-3C7A-42D7-B7A5-BC598BAE16ED}"/>
+                <a16:creationId xmlns:a16="http://schemas.microsoft.com/office/drawing/2014/main" id="{DBEA2082-0D89-4635-A943-6B47C8910466}"/>
               </a:ext>
             </a:extLst>
           </p:cNvPr>
@@ -4165,7 +4165,7 @@
           <p:cNvPr id="20" name="">
             <a:extLst xmlns:a="http://schemas.openxmlformats.org/drawingml/2006/main">
               <a:ext uri="{FF2B5EF4-FFF2-40B4-BE49-F238E27FC236}">
-                <a16:creationId xmlns:a16="http://schemas.microsoft.com/office/drawing/2014/main" id="{5C002873-5164-45AC-9FB7-C2E111CA761D}"/>
+                <a16:creationId xmlns:a16="http://schemas.microsoft.com/office/drawing/2014/main" id="{BE38BA6B-740E-4A82-8C29-237AC93FA4CA}"/>
               </a:ext>
             </a:extLst>
           </p:cNvPr>
@@ -4215,7 +4215,7 @@
           <p:cNvPr id="21" name="">
             <a:extLst xmlns:a="http://schemas.openxmlformats.org/drawingml/2006/main">
               <a:ext uri="{FF2B5EF4-FFF2-40B4-BE49-F238E27FC236}">
-                <a16:creationId xmlns:a16="http://schemas.microsoft.com/office/drawing/2014/main" id="{F758A105-1C50-4CC7-BE3F-B7DE7D483899}"/>
+                <a16:creationId xmlns:a16="http://schemas.microsoft.com/office/drawing/2014/main" id="{C3261A67-CD10-4F24-ACBD-774378DC19A0}"/>
               </a:ext>
             </a:extLst>
           </p:cNvPr>
@@ -4263,7 +4263,7 @@
     </p:spTree>
     <p:extLst>
       <p:ext uri="{BB962C8B-B14F-4D97-AF65-F5344CB8AC3E}">
-        <p14:creationId xmlns:p14="http://schemas.microsoft.com/office/powerpoint/2010/main" val="84435438"/>
+        <p14:creationId xmlns:p14="http://schemas.microsoft.com/office/powerpoint/2010/main" val="293470101"/>
       </p:ext>
     </p:extLst>
   </p:cSld>
@@ -4294,7 +4294,7 @@
           <p:cNvPr id="120" name="">
             <a:extLst xmlns:a="http://schemas.openxmlformats.org/drawingml/2006/main">
               <a:ext uri="{FF2B5EF4-FFF2-40B4-BE49-F238E27FC236}">
-                <a16:creationId xmlns:a16="http://schemas.microsoft.com/office/drawing/2014/main" id="{984A6D77-A69B-441B-844D-0970BD4F104E}"/>
+                <a16:creationId xmlns:a16="http://schemas.microsoft.com/office/drawing/2014/main" id="{DF9F2CA3-EC9B-4321-9A6D-01C7AD78497A}"/>
               </a:ext>
             </a:extLst>
           </p:cNvPr>
@@ -4344,7 +4344,7 @@
           <p:cNvPr id="2" name="">
             <a:extLst xmlns:a="http://schemas.openxmlformats.org/drawingml/2006/main">
               <a:ext uri="{FF2B5EF4-FFF2-40B4-BE49-F238E27FC236}">
-                <a16:creationId xmlns:a16="http://schemas.microsoft.com/office/drawing/2014/main" id="{207E1852-FEA2-4344-BE8C-E83BB2E2AA62}"/>
+                <a16:creationId xmlns:a16="http://schemas.microsoft.com/office/drawing/2014/main" id="{9AD14360-1274-4C32-9DF9-2AAAA6F242E0}"/>
               </a:ext>
             </a:extLst>
           </p:cNvPr>
@@ -4394,7 +4394,7 @@
           <p:cNvPr id="3" name="">
             <a:extLst xmlns:a="http://schemas.openxmlformats.org/drawingml/2006/main">
               <a:ext uri="{FF2B5EF4-FFF2-40B4-BE49-F238E27FC236}">
-                <a16:creationId xmlns:a16="http://schemas.microsoft.com/office/drawing/2014/main" id="{5BC9D6A9-69A3-43FF-AA31-3D1E2447E857}"/>
+                <a16:creationId xmlns:a16="http://schemas.microsoft.com/office/drawing/2014/main" id="{9490131F-D988-49C2-97DF-C2FF3C9FBC9E}"/>
               </a:ext>
             </a:extLst>
           </p:cNvPr>
@@ -4444,7 +4444,7 @@
           <p:cNvPr id="4" name="">
             <a:extLst xmlns:a="http://schemas.openxmlformats.org/drawingml/2006/main">
               <a:ext uri="{FF2B5EF4-FFF2-40B4-BE49-F238E27FC236}">
-                <a16:creationId xmlns:a16="http://schemas.microsoft.com/office/drawing/2014/main" id="{BB5A6ABC-7661-4B30-B7E4-A2C8778F52D9}"/>
+                <a16:creationId xmlns:a16="http://schemas.microsoft.com/office/drawing/2014/main" id="{6F112358-1B9E-4A26-9FC2-290E4F2CABC2}"/>
               </a:ext>
             </a:extLst>
           </p:cNvPr>
@@ -4485,7 +4485,7 @@
           <p:cNvPr id="5" name="">
             <a:extLst xmlns:a="http://schemas.openxmlformats.org/drawingml/2006/main">
               <a:ext uri="{FF2B5EF4-FFF2-40B4-BE49-F238E27FC236}">
-                <a16:creationId xmlns:a16="http://schemas.microsoft.com/office/drawing/2014/main" id="{E8CFC7B9-1235-483E-A796-0E3144398FE9}"/>
+                <a16:creationId xmlns:a16="http://schemas.microsoft.com/office/drawing/2014/main" id="{F06975BA-5428-4167-88CC-66FE80028512}"/>
               </a:ext>
             </a:extLst>
           </p:cNvPr>
@@ -4535,7 +4535,7 @@
           <p:cNvPr id="6" name="">
             <a:extLst xmlns:a="http://schemas.openxmlformats.org/drawingml/2006/main">
               <a:ext uri="{FF2B5EF4-FFF2-40B4-BE49-F238E27FC236}">
-                <a16:creationId xmlns:a16="http://schemas.microsoft.com/office/drawing/2014/main" id="{8F43DE8C-124B-4161-873D-4988B88ABAAC}"/>
+                <a16:creationId xmlns:a16="http://schemas.microsoft.com/office/drawing/2014/main" id="{59C5F741-48BE-4AF5-A3F3-C75752CF8A88}"/>
               </a:ext>
             </a:extLst>
           </p:cNvPr>
@@ -4592,7 +4592,7 @@
         </p:xfrm>
         <a:graphic xmlns:a="http://schemas.openxmlformats.org/drawingml/2006/main">
           <a:graphicData uri="http://schemas.openxmlformats.org/drawingml/2006/chart">
-            <c:chart xmlns:r="http://schemas.openxmlformats.org/officeDocument/2006/relationships" xmlns:c="http://schemas.openxmlformats.org/drawingml/2006/chart" r:id="Rb529e158950b4ad5"/>
+            <c:chart xmlns:r="http://schemas.openxmlformats.org/officeDocument/2006/relationships" xmlns:c="http://schemas.openxmlformats.org/drawingml/2006/chart" r:id="R69f3d3e4a82f4e80"/>
           </a:graphicData>
         </a:graphic>
       </p:graphicFrame>
@@ -4601,7 +4601,7 @@
           <p:cNvPr id="8" name="">
             <a:extLst xmlns:a="http://schemas.openxmlformats.org/drawingml/2006/main">
               <a:ext uri="{FF2B5EF4-FFF2-40B4-BE49-F238E27FC236}">
-                <a16:creationId xmlns:a16="http://schemas.microsoft.com/office/drawing/2014/main" id="{DEEF8C6F-73D8-4520-98CC-42085F57D4EC}"/>
+                <a16:creationId xmlns:a16="http://schemas.microsoft.com/office/drawing/2014/main" id="{D33C2E8E-5530-4112-BC70-20B09EB8C10B}"/>
               </a:ext>
             </a:extLst>
           </p:cNvPr>
@@ -4632,7 +4632,7 @@
           <p:cNvPr id="9" name="">
             <a:extLst xmlns:a="http://schemas.openxmlformats.org/drawingml/2006/main">
               <a:ext uri="{FF2B5EF4-FFF2-40B4-BE49-F238E27FC236}">
-                <a16:creationId xmlns:a16="http://schemas.microsoft.com/office/drawing/2014/main" id="{E8191B34-5B8E-4275-90C5-3A14032A8186}"/>
+                <a16:creationId xmlns:a16="http://schemas.microsoft.com/office/drawing/2014/main" id="{7AD8ECA1-2543-400E-93A7-6F1B53DBC418}"/>
               </a:ext>
             </a:extLst>
           </p:cNvPr>
@@ -4682,7 +4682,7 @@
           <p:cNvPr id="10" name="">
             <a:extLst xmlns:a="http://schemas.openxmlformats.org/drawingml/2006/main">
               <a:ext uri="{FF2B5EF4-FFF2-40B4-BE49-F238E27FC236}">
-                <a16:creationId xmlns:a16="http://schemas.microsoft.com/office/drawing/2014/main" id="{8AB778CF-4621-4025-ADC6-93F7D0BDDD00}"/>
+                <a16:creationId xmlns:a16="http://schemas.microsoft.com/office/drawing/2014/main" id="{527D027E-D405-4AA9-A247-258CEA37CCCC}"/>
               </a:ext>
             </a:extLst>
           </p:cNvPr>
@@ -4732,7 +4732,7 @@
           <p:cNvPr id="11" name="">
             <a:extLst xmlns:a="http://schemas.openxmlformats.org/drawingml/2006/main">
               <a:ext uri="{FF2B5EF4-FFF2-40B4-BE49-F238E27FC236}">
-                <a16:creationId xmlns:a16="http://schemas.microsoft.com/office/drawing/2014/main" id="{75A35FC6-7C93-4DE5-A1AC-4CE4656C0455}"/>
+                <a16:creationId xmlns:a16="http://schemas.microsoft.com/office/drawing/2014/main" id="{AAC92877-D53E-40D7-BFB3-BF7652157EA5}"/>
               </a:ext>
             </a:extLst>
           </p:cNvPr>
@@ -4782,7 +4782,7 @@
           <p:cNvPr id="12" name="">
             <a:extLst xmlns:a="http://schemas.openxmlformats.org/drawingml/2006/main">
               <a:ext uri="{FF2B5EF4-FFF2-40B4-BE49-F238E27FC236}">
-                <a16:creationId xmlns:a16="http://schemas.microsoft.com/office/drawing/2014/main" id="{44946F30-56AA-439C-804A-DCC7CAF34B43}"/>
+                <a16:creationId xmlns:a16="http://schemas.microsoft.com/office/drawing/2014/main" id="{37AD6238-14A3-4655-84A4-39EDF2A4C162}"/>
               </a:ext>
             </a:extLst>
           </p:cNvPr>
@@ -4813,7 +4813,7 @@
           <p:cNvPr id="13" name="">
             <a:extLst xmlns:a="http://schemas.openxmlformats.org/drawingml/2006/main">
               <a:ext uri="{FF2B5EF4-FFF2-40B4-BE49-F238E27FC236}">
-                <a16:creationId xmlns:a16="http://schemas.microsoft.com/office/drawing/2014/main" id="{24FA1999-05BA-412B-B35A-225F8EB75277}"/>
+                <a16:creationId xmlns:a16="http://schemas.microsoft.com/office/drawing/2014/main" id="{4889DAF5-4789-4759-910E-DCFDD142334B}"/>
               </a:ext>
             </a:extLst>
           </p:cNvPr>
@@ -4863,7 +4863,7 @@
           <p:cNvPr id="14" name="">
             <a:extLst xmlns:a="http://schemas.openxmlformats.org/drawingml/2006/main">
               <a:ext uri="{FF2B5EF4-FFF2-40B4-BE49-F238E27FC236}">
-                <a16:creationId xmlns:a16="http://schemas.microsoft.com/office/drawing/2014/main" id="{D004D3EB-7202-4B64-956B-72A04B94AF24}"/>
+                <a16:creationId xmlns:a16="http://schemas.microsoft.com/office/drawing/2014/main" id="{DCAB0209-F1E8-45A5-99D5-A9461056744A}"/>
               </a:ext>
             </a:extLst>
           </p:cNvPr>
@@ -4913,7 +4913,7 @@
           <p:cNvPr id="15" name="">
             <a:extLst xmlns:a="http://schemas.openxmlformats.org/drawingml/2006/main">
               <a:ext uri="{FF2B5EF4-FFF2-40B4-BE49-F238E27FC236}">
-                <a16:creationId xmlns:a16="http://schemas.microsoft.com/office/drawing/2014/main" id="{FCE7DCB1-F31F-40DB-9139-0C91F2E7F31E}"/>
+                <a16:creationId xmlns:a16="http://schemas.microsoft.com/office/drawing/2014/main" id="{6B18AC62-D5D8-4B67-B16D-F805E57F0B1A}"/>
               </a:ext>
             </a:extLst>
           </p:cNvPr>
@@ -4963,7 +4963,7 @@
           <p:cNvPr id="16" name="">
             <a:extLst xmlns:a="http://schemas.openxmlformats.org/drawingml/2006/main">
               <a:ext uri="{FF2B5EF4-FFF2-40B4-BE49-F238E27FC236}">
-                <a16:creationId xmlns:a16="http://schemas.microsoft.com/office/drawing/2014/main" id="{AFC12D7C-1072-4937-88A2-2E2A534D4FF6}"/>
+                <a16:creationId xmlns:a16="http://schemas.microsoft.com/office/drawing/2014/main" id="{6AF964C6-F777-47FA-B938-2DF810A9C4D4}"/>
               </a:ext>
             </a:extLst>
           </p:cNvPr>
@@ -4994,7 +4994,7 @@
           <p:cNvPr id="17" name="">
             <a:extLst xmlns:a="http://schemas.openxmlformats.org/drawingml/2006/main">
               <a:ext uri="{FF2B5EF4-FFF2-40B4-BE49-F238E27FC236}">
-                <a16:creationId xmlns:a16="http://schemas.microsoft.com/office/drawing/2014/main" id="{BB3C2DAF-C7A7-4B5D-99BB-A365D734A101}"/>
+                <a16:creationId xmlns:a16="http://schemas.microsoft.com/office/drawing/2014/main" id="{86F8CA3D-BA4C-4935-9380-FBD8CD83D308}"/>
               </a:ext>
             </a:extLst>
           </p:cNvPr>
@@ -5044,7 +5044,7 @@
           <p:cNvPr id="18" name="">
             <a:extLst xmlns:a="http://schemas.openxmlformats.org/drawingml/2006/main">
               <a:ext uri="{FF2B5EF4-FFF2-40B4-BE49-F238E27FC236}">
-                <a16:creationId xmlns:a16="http://schemas.microsoft.com/office/drawing/2014/main" id="{5D3D4876-CF7D-44FE-8C68-23B1F93A8569}"/>
+                <a16:creationId xmlns:a16="http://schemas.microsoft.com/office/drawing/2014/main" id="{B49DF5F2-277D-4DF8-BCB6-B1A365B9D4AC}"/>
               </a:ext>
             </a:extLst>
           </p:cNvPr>
@@ -5094,7 +5094,7 @@
           <p:cNvPr id="19" name="">
             <a:extLst xmlns:a="http://schemas.openxmlformats.org/drawingml/2006/main">
               <a:ext uri="{FF2B5EF4-FFF2-40B4-BE49-F238E27FC236}">
-                <a16:creationId xmlns:a16="http://schemas.microsoft.com/office/drawing/2014/main" id="{A75D2207-2996-4BF7-A189-E61CA62492A9}"/>
+                <a16:creationId xmlns:a16="http://schemas.microsoft.com/office/drawing/2014/main" id="{63F3BA50-BC15-4E5E-8391-BD6AFD061539}"/>
               </a:ext>
             </a:extLst>
           </p:cNvPr>
@@ -5144,7 +5144,7 @@
           <p:cNvPr id="20" name="">
             <a:extLst xmlns:a="http://schemas.openxmlformats.org/drawingml/2006/main">
               <a:ext uri="{FF2B5EF4-FFF2-40B4-BE49-F238E27FC236}">
-                <a16:creationId xmlns:a16="http://schemas.microsoft.com/office/drawing/2014/main" id="{645588ED-3922-4B5C-B436-3F5101251311}"/>
+                <a16:creationId xmlns:a16="http://schemas.microsoft.com/office/drawing/2014/main" id="{8B76CF6F-BEDC-48B7-9997-6BDA1C3BD658}"/>
               </a:ext>
             </a:extLst>
           </p:cNvPr>
@@ -5175,7 +5175,7 @@
           <p:cNvPr id="21" name="">
             <a:extLst xmlns:a="http://schemas.openxmlformats.org/drawingml/2006/main">
               <a:ext uri="{FF2B5EF4-FFF2-40B4-BE49-F238E27FC236}">
-                <a16:creationId xmlns:a16="http://schemas.microsoft.com/office/drawing/2014/main" id="{F48D672A-897B-4E1A-AFE7-4EE7E1D017FC}"/>
+                <a16:creationId xmlns:a16="http://schemas.microsoft.com/office/drawing/2014/main" id="{F19DF63D-9043-4EBC-865F-C33BE16928D4}"/>
               </a:ext>
             </a:extLst>
           </p:cNvPr>
@@ -5225,7 +5225,7 @@
           <p:cNvPr id="22" name="">
             <a:extLst xmlns:a="http://schemas.openxmlformats.org/drawingml/2006/main">
               <a:ext uri="{FF2B5EF4-FFF2-40B4-BE49-F238E27FC236}">
-                <a16:creationId xmlns:a16="http://schemas.microsoft.com/office/drawing/2014/main" id="{67DD194D-0502-44B7-9F6E-0E1469FB6A33}"/>
+                <a16:creationId xmlns:a16="http://schemas.microsoft.com/office/drawing/2014/main" id="{ABC67F3A-4450-4786-882F-89F29B481144}"/>
               </a:ext>
             </a:extLst>
           </p:cNvPr>
@@ -5275,7 +5275,7 @@
           <p:cNvPr id="23" name="">
             <a:extLst xmlns:a="http://schemas.openxmlformats.org/drawingml/2006/main">
               <a:ext uri="{FF2B5EF4-FFF2-40B4-BE49-F238E27FC236}">
-                <a16:creationId xmlns:a16="http://schemas.microsoft.com/office/drawing/2014/main" id="{8DE6EF10-8A6C-41C4-8332-83D9CBC5DF4C}"/>
+                <a16:creationId xmlns:a16="http://schemas.microsoft.com/office/drawing/2014/main" id="{CE91F990-245E-4F70-B7BA-C01EA3FD8E29}"/>
               </a:ext>
             </a:extLst>
           </p:cNvPr>
@@ -5325,7 +5325,7 @@
           <p:cNvPr id="24" name="">
             <a:extLst xmlns:a="http://schemas.openxmlformats.org/drawingml/2006/main">
               <a:ext uri="{FF2B5EF4-FFF2-40B4-BE49-F238E27FC236}">
-                <a16:creationId xmlns:a16="http://schemas.microsoft.com/office/drawing/2014/main" id="{613A82D6-AB78-4642-A66D-9DEEDFD93ECA}"/>
+                <a16:creationId xmlns:a16="http://schemas.microsoft.com/office/drawing/2014/main" id="{AF51BD98-5802-4A3F-9E71-260D59326218}"/>
               </a:ext>
             </a:extLst>
           </p:cNvPr>
@@ -5356,7 +5356,7 @@
           <p:cNvPr id="25" name="">
             <a:extLst xmlns:a="http://schemas.openxmlformats.org/drawingml/2006/main">
               <a:ext uri="{FF2B5EF4-FFF2-40B4-BE49-F238E27FC236}">
-                <a16:creationId xmlns:a16="http://schemas.microsoft.com/office/drawing/2014/main" id="{DE9CC6F6-E48B-4279-9C6A-E7C77635043A}"/>
+                <a16:creationId xmlns:a16="http://schemas.microsoft.com/office/drawing/2014/main" id="{34FADFA5-EAF5-46A6-AA39-8C1DD84FE8F0}"/>
               </a:ext>
             </a:extLst>
           </p:cNvPr>
@@ -5406,7 +5406,7 @@
           <p:cNvPr id="26" name="">
             <a:extLst xmlns:a="http://schemas.openxmlformats.org/drawingml/2006/main">
               <a:ext uri="{FF2B5EF4-FFF2-40B4-BE49-F238E27FC236}">
-                <a16:creationId xmlns:a16="http://schemas.microsoft.com/office/drawing/2014/main" id="{AE92B573-D5EA-479D-B199-87BC7FD02ADD}"/>
+                <a16:creationId xmlns:a16="http://schemas.microsoft.com/office/drawing/2014/main" id="{92D108CE-E76E-4119-9463-72961DB7C696}"/>
               </a:ext>
             </a:extLst>
           </p:cNvPr>
@@ -5456,7 +5456,7 @@
           <p:cNvPr id="27" name="">
             <a:extLst xmlns:a="http://schemas.openxmlformats.org/drawingml/2006/main">
               <a:ext uri="{FF2B5EF4-FFF2-40B4-BE49-F238E27FC236}">
-                <a16:creationId xmlns:a16="http://schemas.microsoft.com/office/drawing/2014/main" id="{7983E9C9-A295-4ED8-BF6A-D229ED9BB8CE}"/>
+                <a16:creationId xmlns:a16="http://schemas.microsoft.com/office/drawing/2014/main" id="{0D9C47B0-39FD-4970-869D-319605D737B4}"/>
               </a:ext>
             </a:extLst>
           </p:cNvPr>
@@ -5506,7 +5506,7 @@
           <p:cNvPr id="28" name="">
             <a:extLst xmlns:a="http://schemas.openxmlformats.org/drawingml/2006/main">
               <a:ext uri="{FF2B5EF4-FFF2-40B4-BE49-F238E27FC236}">
-                <a16:creationId xmlns:a16="http://schemas.microsoft.com/office/drawing/2014/main" id="{0CACBB15-7D41-42A6-8145-896F7851ED36}"/>
+                <a16:creationId xmlns:a16="http://schemas.microsoft.com/office/drawing/2014/main" id="{4BF056A6-0CE0-465F-8B7A-B3E8B7D974E1}"/>
               </a:ext>
             </a:extLst>
           </p:cNvPr>
@@ -5537,7 +5537,7 @@
           <p:cNvPr id="29" name="">
             <a:extLst xmlns:a="http://schemas.openxmlformats.org/drawingml/2006/main">
               <a:ext uri="{FF2B5EF4-FFF2-40B4-BE49-F238E27FC236}">
-                <a16:creationId xmlns:a16="http://schemas.microsoft.com/office/drawing/2014/main" id="{00895173-583E-4D1E-8FF2-A5783D0D49CA}"/>
+                <a16:creationId xmlns:a16="http://schemas.microsoft.com/office/drawing/2014/main" id="{48C3EC63-F5E1-4E23-8C25-363E1D5B158D}"/>
               </a:ext>
             </a:extLst>
           </p:cNvPr>
@@ -5587,7 +5587,7 @@
           <p:cNvPr id="30" name="">
             <a:extLst xmlns:a="http://schemas.openxmlformats.org/drawingml/2006/main">
               <a:ext uri="{FF2B5EF4-FFF2-40B4-BE49-F238E27FC236}">
-                <a16:creationId xmlns:a16="http://schemas.microsoft.com/office/drawing/2014/main" id="{DE234C28-DC25-4A16-8EE4-28A81B6E8359}"/>
+                <a16:creationId xmlns:a16="http://schemas.microsoft.com/office/drawing/2014/main" id="{B3E1DFE8-4A4E-4D8D-A936-197FC15835F3}"/>
               </a:ext>
             </a:extLst>
           </p:cNvPr>
@@ -5637,7 +5637,7 @@
           <p:cNvPr id="31" name="">
             <a:extLst xmlns:a="http://schemas.openxmlformats.org/drawingml/2006/main">
               <a:ext uri="{FF2B5EF4-FFF2-40B4-BE49-F238E27FC236}">
-                <a16:creationId xmlns:a16="http://schemas.microsoft.com/office/drawing/2014/main" id="{01C8E034-6EF9-45AF-90BA-085D49CE3545}"/>
+                <a16:creationId xmlns:a16="http://schemas.microsoft.com/office/drawing/2014/main" id="{33E69DD3-3D21-4813-8062-69611D1577B5}"/>
               </a:ext>
             </a:extLst>
           </p:cNvPr>
@@ -5687,7 +5687,7 @@
           <p:cNvPr id="32" name="">
             <a:extLst xmlns:a="http://schemas.openxmlformats.org/drawingml/2006/main">
               <a:ext uri="{FF2B5EF4-FFF2-40B4-BE49-F238E27FC236}">
-                <a16:creationId xmlns:a16="http://schemas.microsoft.com/office/drawing/2014/main" id="{67E3FF7E-0ACB-4490-8472-144C5513FC00}"/>
+                <a16:creationId xmlns:a16="http://schemas.microsoft.com/office/drawing/2014/main" id="{E2614DE1-0A65-4409-9DA0-BE5D86DEDFE6}"/>
               </a:ext>
             </a:extLst>
           </p:cNvPr>
@@ -5728,7 +5728,7 @@
           <p:cNvPr id="33" name="">
             <a:extLst xmlns:a="http://schemas.openxmlformats.org/drawingml/2006/main">
               <a:ext uri="{FF2B5EF4-FFF2-40B4-BE49-F238E27FC236}">
-                <a16:creationId xmlns:a16="http://schemas.microsoft.com/office/drawing/2014/main" id="{8EE7AA2F-D620-464B-A370-14B5C09E2836}"/>
+                <a16:creationId xmlns:a16="http://schemas.microsoft.com/office/drawing/2014/main" id="{E51C6A21-B069-43BE-A0A2-A002F2AE9F38}"/>
               </a:ext>
             </a:extLst>
           </p:cNvPr>
@@ -5778,7 +5778,7 @@
           <p:cNvPr id="34" name="">
             <a:extLst xmlns:a="http://schemas.openxmlformats.org/drawingml/2006/main">
               <a:ext uri="{FF2B5EF4-FFF2-40B4-BE49-F238E27FC236}">
-                <a16:creationId xmlns:a16="http://schemas.microsoft.com/office/drawing/2014/main" id="{8ED0054E-6F90-4426-A4C9-91FC371593FD}"/>
+                <a16:creationId xmlns:a16="http://schemas.microsoft.com/office/drawing/2014/main" id="{01F9A966-21EB-4FA3-87BA-024C2A6C553A}"/>
               </a:ext>
             </a:extLst>
           </p:cNvPr>
@@ -5835,7 +5835,7 @@
         </p:xfrm>
         <a:graphic xmlns:a="http://schemas.openxmlformats.org/drawingml/2006/main">
           <a:graphicData uri="http://schemas.openxmlformats.org/drawingml/2006/chart">
-            <c:chart xmlns:r="http://schemas.openxmlformats.org/officeDocument/2006/relationships" xmlns:c="http://schemas.openxmlformats.org/drawingml/2006/chart" r:id="R87cd4e82542949fc"/>
+            <c:chart xmlns:r="http://schemas.openxmlformats.org/officeDocument/2006/relationships" xmlns:c="http://schemas.openxmlformats.org/drawingml/2006/chart" r:id="R63e5aeefc3be4fbb"/>
           </a:graphicData>
         </a:graphic>
       </p:graphicFrame>
@@ -5844,7 +5844,7 @@
           <p:cNvPr id="36" name="">
             <a:extLst xmlns:a="http://schemas.openxmlformats.org/drawingml/2006/main">
               <a:ext uri="{FF2B5EF4-FFF2-40B4-BE49-F238E27FC236}">
-                <a16:creationId xmlns:a16="http://schemas.microsoft.com/office/drawing/2014/main" id="{F010220C-B2C6-4762-98E3-46D705E5B9B4}"/>
+                <a16:creationId xmlns:a16="http://schemas.microsoft.com/office/drawing/2014/main" id="{1AF49D44-BCCD-43FF-ACFD-0C9E4661AF55}"/>
               </a:ext>
             </a:extLst>
           </p:cNvPr>
@@ -5875,7 +5875,7 @@
           <p:cNvPr id="37" name="">
             <a:extLst xmlns:a="http://schemas.openxmlformats.org/drawingml/2006/main">
               <a:ext uri="{FF2B5EF4-FFF2-40B4-BE49-F238E27FC236}">
-                <a16:creationId xmlns:a16="http://schemas.microsoft.com/office/drawing/2014/main" id="{7DC7D9A2-8A31-4A1C-92C9-E52A65F267EA}"/>
+                <a16:creationId xmlns:a16="http://schemas.microsoft.com/office/drawing/2014/main" id="{00A36FB5-2A09-48D8-ACA1-AF5A6E5CFDEC}"/>
               </a:ext>
             </a:extLst>
           </p:cNvPr>
@@ -5925,7 +5925,7 @@
           <p:cNvPr id="38" name="">
             <a:extLst xmlns:a="http://schemas.openxmlformats.org/drawingml/2006/main">
               <a:ext uri="{FF2B5EF4-FFF2-40B4-BE49-F238E27FC236}">
-                <a16:creationId xmlns:a16="http://schemas.microsoft.com/office/drawing/2014/main" id="{B87756AE-D6CA-4C3A-8B81-330D4B822353}"/>
+                <a16:creationId xmlns:a16="http://schemas.microsoft.com/office/drawing/2014/main" id="{2CD62907-7004-4A9D-B4DB-F02E223D319E}"/>
               </a:ext>
             </a:extLst>
           </p:cNvPr>
@@ -5975,7 +5975,7 @@
           <p:cNvPr id="39" name="">
             <a:extLst xmlns:a="http://schemas.openxmlformats.org/drawingml/2006/main">
               <a:ext uri="{FF2B5EF4-FFF2-40B4-BE49-F238E27FC236}">
-                <a16:creationId xmlns:a16="http://schemas.microsoft.com/office/drawing/2014/main" id="{2B98BD15-1FB6-4F64-B2E6-467281553BB8}"/>
+                <a16:creationId xmlns:a16="http://schemas.microsoft.com/office/drawing/2014/main" id="{C2250A17-B220-4479-83B3-AEBAE83F0692}"/>
               </a:ext>
             </a:extLst>
           </p:cNvPr>
@@ -6025,7 +6025,7 @@
           <p:cNvPr id="40" name="">
             <a:extLst xmlns:a="http://schemas.openxmlformats.org/drawingml/2006/main">
               <a:ext uri="{FF2B5EF4-FFF2-40B4-BE49-F238E27FC236}">
-                <a16:creationId xmlns:a16="http://schemas.microsoft.com/office/drawing/2014/main" id="{B28D6DAF-1D99-421F-9B54-DFDD0C03476C}"/>
+                <a16:creationId xmlns:a16="http://schemas.microsoft.com/office/drawing/2014/main" id="{BF239BE1-93CB-406E-822D-084EFA52BC2C}"/>
               </a:ext>
             </a:extLst>
           </p:cNvPr>
@@ -6056,7 +6056,7 @@
           <p:cNvPr id="41" name="">
             <a:extLst xmlns:a="http://schemas.openxmlformats.org/drawingml/2006/main">
               <a:ext uri="{FF2B5EF4-FFF2-40B4-BE49-F238E27FC236}">
-                <a16:creationId xmlns:a16="http://schemas.microsoft.com/office/drawing/2014/main" id="{F7FDDEC3-691F-4C9F-9F7C-5528416E8F21}"/>
+                <a16:creationId xmlns:a16="http://schemas.microsoft.com/office/drawing/2014/main" id="{26408DAF-4574-47FF-A957-EC06137CD3A4}"/>
               </a:ext>
             </a:extLst>
           </p:cNvPr>
@@ -6106,7 +6106,7 @@
           <p:cNvPr id="42" name="">
             <a:extLst xmlns:a="http://schemas.openxmlformats.org/drawingml/2006/main">
               <a:ext uri="{FF2B5EF4-FFF2-40B4-BE49-F238E27FC236}">
-                <a16:creationId xmlns:a16="http://schemas.microsoft.com/office/drawing/2014/main" id="{98726397-3972-4383-9C81-8CA937ABC515}"/>
+                <a16:creationId xmlns:a16="http://schemas.microsoft.com/office/drawing/2014/main" id="{C618C00B-CED3-40E8-9CA6-27224749AD22}"/>
               </a:ext>
             </a:extLst>
           </p:cNvPr>
@@ -6156,7 +6156,7 @@
           <p:cNvPr id="43" name="">
             <a:extLst xmlns:a="http://schemas.openxmlformats.org/drawingml/2006/main">
               <a:ext uri="{FF2B5EF4-FFF2-40B4-BE49-F238E27FC236}">
-                <a16:creationId xmlns:a16="http://schemas.microsoft.com/office/drawing/2014/main" id="{D45960AC-7A16-4F5F-AB1A-C35A1B7A6472}"/>
+                <a16:creationId xmlns:a16="http://schemas.microsoft.com/office/drawing/2014/main" id="{127D54AF-9F86-4E65-BD58-C01A4A3E44E9}"/>
               </a:ext>
             </a:extLst>
           </p:cNvPr>
@@ -6206,7 +6206,7 @@
           <p:cNvPr id="44" name="">
             <a:extLst xmlns:a="http://schemas.openxmlformats.org/drawingml/2006/main">
               <a:ext uri="{FF2B5EF4-FFF2-40B4-BE49-F238E27FC236}">
-                <a16:creationId xmlns:a16="http://schemas.microsoft.com/office/drawing/2014/main" id="{DC3EC987-C8A7-4099-95CF-1B3E054FDC51}"/>
+                <a16:creationId xmlns:a16="http://schemas.microsoft.com/office/drawing/2014/main" id="{99CA8DE1-9A6A-4DE7-8043-C5D5DEC1AAC0}"/>
               </a:ext>
             </a:extLst>
           </p:cNvPr>
@@ -6237,7 +6237,7 @@
           <p:cNvPr id="45" name="">
             <a:extLst xmlns:a="http://schemas.openxmlformats.org/drawingml/2006/main">
               <a:ext uri="{FF2B5EF4-FFF2-40B4-BE49-F238E27FC236}">
-                <a16:creationId xmlns:a16="http://schemas.microsoft.com/office/drawing/2014/main" id="{EB916F32-62FB-4506-8074-218E339913A5}"/>
+                <a16:creationId xmlns:a16="http://schemas.microsoft.com/office/drawing/2014/main" id="{7E8B16D4-E611-4CBE-9238-8E37103DF7D9}"/>
               </a:ext>
             </a:extLst>
           </p:cNvPr>
@@ -6287,7 +6287,7 @@
           <p:cNvPr id="46" name="">
             <a:extLst xmlns:a="http://schemas.openxmlformats.org/drawingml/2006/main">
               <a:ext uri="{FF2B5EF4-FFF2-40B4-BE49-F238E27FC236}">
-                <a16:creationId xmlns:a16="http://schemas.microsoft.com/office/drawing/2014/main" id="{E8D5C1CE-1362-44CB-AEB3-90CB92E305BB}"/>
+                <a16:creationId xmlns:a16="http://schemas.microsoft.com/office/drawing/2014/main" id="{0F22883F-3F95-4871-9B82-74B10FBFAC92}"/>
               </a:ext>
             </a:extLst>
           </p:cNvPr>
@@ -6337,7 +6337,7 @@
           <p:cNvPr id="47" name="">
             <a:extLst xmlns:a="http://schemas.openxmlformats.org/drawingml/2006/main">
               <a:ext uri="{FF2B5EF4-FFF2-40B4-BE49-F238E27FC236}">
-                <a16:creationId xmlns:a16="http://schemas.microsoft.com/office/drawing/2014/main" id="{56061A18-9C5D-486C-AB9E-955E88C2397B}"/>
+                <a16:creationId xmlns:a16="http://schemas.microsoft.com/office/drawing/2014/main" id="{5E2699E9-30D4-4ECF-B796-3B086121E5B1}"/>
               </a:ext>
             </a:extLst>
           </p:cNvPr>
@@ -6387,7 +6387,7 @@
           <p:cNvPr id="48" name="">
             <a:extLst xmlns:a="http://schemas.openxmlformats.org/drawingml/2006/main">
               <a:ext uri="{FF2B5EF4-FFF2-40B4-BE49-F238E27FC236}">
-                <a16:creationId xmlns:a16="http://schemas.microsoft.com/office/drawing/2014/main" id="{36A62820-3256-44F7-ACB4-248055ECA686}"/>
+                <a16:creationId xmlns:a16="http://schemas.microsoft.com/office/drawing/2014/main" id="{21788DFF-FDD1-4888-9118-09CF0C3E92DF}"/>
               </a:ext>
             </a:extLst>
           </p:cNvPr>
@@ -6418,7 +6418,7 @@
           <p:cNvPr id="49" name="">
             <a:extLst xmlns:a="http://schemas.openxmlformats.org/drawingml/2006/main">
               <a:ext uri="{FF2B5EF4-FFF2-40B4-BE49-F238E27FC236}">
-                <a16:creationId xmlns:a16="http://schemas.microsoft.com/office/drawing/2014/main" id="{75AD937F-674C-4E69-B3ED-0FCACFC1174F}"/>
+                <a16:creationId xmlns:a16="http://schemas.microsoft.com/office/drawing/2014/main" id="{53AD0416-C2FE-45F8-AD66-684B7C6DB75D}"/>
               </a:ext>
             </a:extLst>
           </p:cNvPr>
@@ -6468,7 +6468,7 @@
           <p:cNvPr id="50" name="">
             <a:extLst xmlns:a="http://schemas.openxmlformats.org/drawingml/2006/main">
               <a:ext uri="{FF2B5EF4-FFF2-40B4-BE49-F238E27FC236}">
-                <a16:creationId xmlns:a16="http://schemas.microsoft.com/office/drawing/2014/main" id="{096D713C-1FA3-4A1D-B004-F93D805908C5}"/>
+                <a16:creationId xmlns:a16="http://schemas.microsoft.com/office/drawing/2014/main" id="{F5A88002-36B9-421B-AE05-D10DF4847122}"/>
               </a:ext>
             </a:extLst>
           </p:cNvPr>
@@ -6518,7 +6518,7 @@
           <p:cNvPr id="51" name="">
             <a:extLst xmlns:a="http://schemas.openxmlformats.org/drawingml/2006/main">
               <a:ext uri="{FF2B5EF4-FFF2-40B4-BE49-F238E27FC236}">
-                <a16:creationId xmlns:a16="http://schemas.microsoft.com/office/drawing/2014/main" id="{E9410038-F7D9-4EE0-BB39-5A3E6D5138B5}"/>
+                <a16:creationId xmlns:a16="http://schemas.microsoft.com/office/drawing/2014/main" id="{0F0A0FDC-E874-4A56-BAD9-8E85AF647754}"/>
               </a:ext>
             </a:extLst>
           </p:cNvPr>
@@ -6568,7 +6568,7 @@
           <p:cNvPr id="52" name="">
             <a:extLst xmlns:a="http://schemas.openxmlformats.org/drawingml/2006/main">
               <a:ext uri="{FF2B5EF4-FFF2-40B4-BE49-F238E27FC236}">
-                <a16:creationId xmlns:a16="http://schemas.microsoft.com/office/drawing/2014/main" id="{1804AF4F-33C9-4DDF-9834-20645FF2573C}"/>
+                <a16:creationId xmlns:a16="http://schemas.microsoft.com/office/drawing/2014/main" id="{A22C0F2F-76F5-40EE-89C4-89CBC58661AB}"/>
               </a:ext>
             </a:extLst>
           </p:cNvPr>
@@ -6599,7 +6599,7 @@
           <p:cNvPr id="53" name="">
             <a:extLst xmlns:a="http://schemas.openxmlformats.org/drawingml/2006/main">
               <a:ext uri="{FF2B5EF4-FFF2-40B4-BE49-F238E27FC236}">
-                <a16:creationId xmlns:a16="http://schemas.microsoft.com/office/drawing/2014/main" id="{B0CCACAB-C33F-40DF-A4AB-8E94C3DB50E3}"/>
+                <a16:creationId xmlns:a16="http://schemas.microsoft.com/office/drawing/2014/main" id="{A7A43081-0656-4576-961B-5D2ADA2D2741}"/>
               </a:ext>
             </a:extLst>
           </p:cNvPr>
@@ -6649,7 +6649,7 @@
           <p:cNvPr id="54" name="">
             <a:extLst xmlns:a="http://schemas.openxmlformats.org/drawingml/2006/main">
               <a:ext uri="{FF2B5EF4-FFF2-40B4-BE49-F238E27FC236}">
-                <a16:creationId xmlns:a16="http://schemas.microsoft.com/office/drawing/2014/main" id="{94C034F3-65FD-4FCE-985E-C4D9028289E8}"/>
+                <a16:creationId xmlns:a16="http://schemas.microsoft.com/office/drawing/2014/main" id="{7F82885D-3F66-445B-868B-6121FEE61A95}"/>
               </a:ext>
             </a:extLst>
           </p:cNvPr>
@@ -6699,7 +6699,7 @@
           <p:cNvPr id="55" name="">
             <a:extLst xmlns:a="http://schemas.openxmlformats.org/drawingml/2006/main">
               <a:ext uri="{FF2B5EF4-FFF2-40B4-BE49-F238E27FC236}">
-                <a16:creationId xmlns:a16="http://schemas.microsoft.com/office/drawing/2014/main" id="{4DD5D6E8-6BEA-4C4F-9B80-C2EE7F9568CF}"/>
+                <a16:creationId xmlns:a16="http://schemas.microsoft.com/office/drawing/2014/main" id="{ECDF0758-3C11-4A3C-A010-B5BDF225D870}"/>
               </a:ext>
             </a:extLst>
           </p:cNvPr>
@@ -6749,7 +6749,7 @@
           <p:cNvPr id="56" name="">
             <a:extLst xmlns:a="http://schemas.openxmlformats.org/drawingml/2006/main">
               <a:ext uri="{FF2B5EF4-FFF2-40B4-BE49-F238E27FC236}">
-                <a16:creationId xmlns:a16="http://schemas.microsoft.com/office/drawing/2014/main" id="{654FF6FD-B992-4FA8-8D75-99347F8548D6}"/>
+                <a16:creationId xmlns:a16="http://schemas.microsoft.com/office/drawing/2014/main" id="{A67F5DAD-CB34-47BB-8114-A566692DC297}"/>
               </a:ext>
             </a:extLst>
           </p:cNvPr>
@@ -6780,7 +6780,7 @@
           <p:cNvPr id="57" name="">
             <a:extLst xmlns:a="http://schemas.openxmlformats.org/drawingml/2006/main">
               <a:ext uri="{FF2B5EF4-FFF2-40B4-BE49-F238E27FC236}">
-                <a16:creationId xmlns:a16="http://schemas.microsoft.com/office/drawing/2014/main" id="{0CFEE887-F926-4C94-9328-82EF3FD5C7A2}"/>
+                <a16:creationId xmlns:a16="http://schemas.microsoft.com/office/drawing/2014/main" id="{D36F186B-188E-4BC7-A000-56884171A18D}"/>
               </a:ext>
             </a:extLst>
           </p:cNvPr>
@@ -6830,7 +6830,7 @@
           <p:cNvPr id="58" name="">
             <a:extLst xmlns:a="http://schemas.openxmlformats.org/drawingml/2006/main">
               <a:ext uri="{FF2B5EF4-FFF2-40B4-BE49-F238E27FC236}">
-                <a16:creationId xmlns:a16="http://schemas.microsoft.com/office/drawing/2014/main" id="{979093D6-E3E1-43A5-AA15-01969E49C310}"/>
+                <a16:creationId xmlns:a16="http://schemas.microsoft.com/office/drawing/2014/main" id="{1D817217-C213-4304-9E88-96548716F1F3}"/>
               </a:ext>
             </a:extLst>
           </p:cNvPr>
@@ -6880,7 +6880,7 @@
           <p:cNvPr id="59" name="">
             <a:extLst xmlns:a="http://schemas.openxmlformats.org/drawingml/2006/main">
               <a:ext uri="{FF2B5EF4-FFF2-40B4-BE49-F238E27FC236}">
-                <a16:creationId xmlns:a16="http://schemas.microsoft.com/office/drawing/2014/main" id="{8B432CE6-6029-4E9E-BC4D-F60425C2A881}"/>
+                <a16:creationId xmlns:a16="http://schemas.microsoft.com/office/drawing/2014/main" id="{E4A9C149-192F-4784-B4B0-8A2EE37CC882}"/>
               </a:ext>
             </a:extLst>
           </p:cNvPr>
@@ -6930,7 +6930,7 @@
           <p:cNvPr id="60" name="">
             <a:extLst xmlns:a="http://schemas.openxmlformats.org/drawingml/2006/main">
               <a:ext uri="{FF2B5EF4-FFF2-40B4-BE49-F238E27FC236}">
-                <a16:creationId xmlns:a16="http://schemas.microsoft.com/office/drawing/2014/main" id="{6A7C7152-2C5C-417D-A790-E7DB27F8A593}"/>
+                <a16:creationId xmlns:a16="http://schemas.microsoft.com/office/drawing/2014/main" id="{77ACBAB8-C231-483C-BF62-3D213EE18480}"/>
               </a:ext>
             </a:extLst>
           </p:cNvPr>
@@ -6971,7 +6971,7 @@
           <p:cNvPr id="61" name="">
             <a:extLst xmlns:a="http://schemas.openxmlformats.org/drawingml/2006/main">
               <a:ext uri="{FF2B5EF4-FFF2-40B4-BE49-F238E27FC236}">
-                <a16:creationId xmlns:a16="http://schemas.microsoft.com/office/drawing/2014/main" id="{D339A8D5-24A2-41A8-8B2D-C97F44DB09EE}"/>
+                <a16:creationId xmlns:a16="http://schemas.microsoft.com/office/drawing/2014/main" id="{E18A3AD8-F269-42ED-8586-8B47FB48EE72}"/>
               </a:ext>
             </a:extLst>
           </p:cNvPr>
@@ -7021,7 +7021,7 @@
           <p:cNvPr id="62" name="">
             <a:extLst xmlns:a="http://schemas.openxmlformats.org/drawingml/2006/main">
               <a:ext uri="{FF2B5EF4-FFF2-40B4-BE49-F238E27FC236}">
-                <a16:creationId xmlns:a16="http://schemas.microsoft.com/office/drawing/2014/main" id="{07FB0276-4D74-424A-AB6C-136FA74881F5}"/>
+                <a16:creationId xmlns:a16="http://schemas.microsoft.com/office/drawing/2014/main" id="{2C15D0AF-C464-4859-AEAC-6D1E7FA0F60F}"/>
               </a:ext>
             </a:extLst>
           </p:cNvPr>
@@ -7078,7 +7078,7 @@
         </p:xfrm>
         <a:graphic xmlns:a="http://schemas.openxmlformats.org/drawingml/2006/main">
           <a:graphicData uri="http://schemas.openxmlformats.org/drawingml/2006/chart">
-            <c:chart xmlns:r="http://schemas.openxmlformats.org/officeDocument/2006/relationships" xmlns:c="http://schemas.openxmlformats.org/drawingml/2006/chart" r:id="R7aae8a0ae3674be0"/>
+            <c:chart xmlns:r="http://schemas.openxmlformats.org/officeDocument/2006/relationships" xmlns:c="http://schemas.openxmlformats.org/drawingml/2006/chart" r:id="R569b90cbd8294e27"/>
           </a:graphicData>
         </a:graphic>
       </p:graphicFrame>
@@ -7087,7 +7087,7 @@
           <p:cNvPr id="64" name="">
             <a:extLst xmlns:a="http://schemas.openxmlformats.org/drawingml/2006/main">
               <a:ext uri="{FF2B5EF4-FFF2-40B4-BE49-F238E27FC236}">
-                <a16:creationId xmlns:a16="http://schemas.microsoft.com/office/drawing/2014/main" id="{B7A6D00B-E15E-4F77-B8A4-53E272753896}"/>
+                <a16:creationId xmlns:a16="http://schemas.microsoft.com/office/drawing/2014/main" id="{74A89BD1-61C0-490F-BD2D-B27B69A38CD9}"/>
               </a:ext>
             </a:extLst>
           </p:cNvPr>
@@ -7118,7 +7118,7 @@
           <p:cNvPr id="65" name="">
             <a:extLst xmlns:a="http://schemas.openxmlformats.org/drawingml/2006/main">
               <a:ext uri="{FF2B5EF4-FFF2-40B4-BE49-F238E27FC236}">
-                <a16:creationId xmlns:a16="http://schemas.microsoft.com/office/drawing/2014/main" id="{E86FCE77-1C09-4ADC-BA34-937B926C6DEB}"/>
+                <a16:creationId xmlns:a16="http://schemas.microsoft.com/office/drawing/2014/main" id="{0131C977-8D73-40DC-8D7E-6547F55C4F98}"/>
               </a:ext>
             </a:extLst>
           </p:cNvPr>
@@ -7168,7 +7168,7 @@
           <p:cNvPr id="66" name="">
             <a:extLst xmlns:a="http://schemas.openxmlformats.org/drawingml/2006/main">
               <a:ext uri="{FF2B5EF4-FFF2-40B4-BE49-F238E27FC236}">
-                <a16:creationId xmlns:a16="http://schemas.microsoft.com/office/drawing/2014/main" id="{5DB6ADFF-1819-4C68-B339-D53547A573B2}"/>
+                <a16:creationId xmlns:a16="http://schemas.microsoft.com/office/drawing/2014/main" id="{E0F2693A-D86D-4676-B1B7-18C889810B7A}"/>
               </a:ext>
             </a:extLst>
           </p:cNvPr>
@@ -7218,7 +7218,7 @@
           <p:cNvPr id="67" name="">
             <a:extLst xmlns:a="http://schemas.openxmlformats.org/drawingml/2006/main">
               <a:ext uri="{FF2B5EF4-FFF2-40B4-BE49-F238E27FC236}">
-                <a16:creationId xmlns:a16="http://schemas.microsoft.com/office/drawing/2014/main" id="{08471F0E-A71A-442F-9E2A-278D2B8A9CB3}"/>
+                <a16:creationId xmlns:a16="http://schemas.microsoft.com/office/drawing/2014/main" id="{903852C8-A78E-4761-9AEB-E7A340B9DED2}"/>
               </a:ext>
             </a:extLst>
           </p:cNvPr>
@@ -7268,7 +7268,7 @@
           <p:cNvPr id="68" name="">
             <a:extLst xmlns:a="http://schemas.openxmlformats.org/drawingml/2006/main">
               <a:ext uri="{FF2B5EF4-FFF2-40B4-BE49-F238E27FC236}">
-                <a16:creationId xmlns:a16="http://schemas.microsoft.com/office/drawing/2014/main" id="{59346820-8F4C-4B34-AC5F-023E9BC70E6D}"/>
+                <a16:creationId xmlns:a16="http://schemas.microsoft.com/office/drawing/2014/main" id="{2D8206AF-89A9-436E-9527-BA420E9C4330}"/>
               </a:ext>
             </a:extLst>
           </p:cNvPr>
@@ -7299,7 +7299,7 @@
           <p:cNvPr id="69" name="">
             <a:extLst xmlns:a="http://schemas.openxmlformats.org/drawingml/2006/main">
               <a:ext uri="{FF2B5EF4-FFF2-40B4-BE49-F238E27FC236}">
-                <a16:creationId xmlns:a16="http://schemas.microsoft.com/office/drawing/2014/main" id="{8C46E0D4-C3BA-4276-9B9D-DEF2F188E48A}"/>
+                <a16:creationId xmlns:a16="http://schemas.microsoft.com/office/drawing/2014/main" id="{4B6477B7-7384-46BD-9D32-DCD9668DE260}"/>
               </a:ext>
             </a:extLst>
           </p:cNvPr>
@@ -7349,7 +7349,7 @@
           <p:cNvPr id="70" name="">
             <a:extLst xmlns:a="http://schemas.openxmlformats.org/drawingml/2006/main">
               <a:ext uri="{FF2B5EF4-FFF2-40B4-BE49-F238E27FC236}">
-                <a16:creationId xmlns:a16="http://schemas.microsoft.com/office/drawing/2014/main" id="{B8C7B68F-EAD2-41F4-AAF7-1CB8961B54E6}"/>
+                <a16:creationId xmlns:a16="http://schemas.microsoft.com/office/drawing/2014/main" id="{9DB98A68-92F1-4D67-9E63-045CBE58D2FB}"/>
               </a:ext>
             </a:extLst>
           </p:cNvPr>
@@ -7399,7 +7399,7 @@
           <p:cNvPr id="71" name="">
             <a:extLst xmlns:a="http://schemas.openxmlformats.org/drawingml/2006/main">
               <a:ext uri="{FF2B5EF4-FFF2-40B4-BE49-F238E27FC236}">
-                <a16:creationId xmlns:a16="http://schemas.microsoft.com/office/drawing/2014/main" id="{E9C465BA-2BDD-4382-AA02-07E11533ED21}"/>
+                <a16:creationId xmlns:a16="http://schemas.microsoft.com/office/drawing/2014/main" id="{E17BECD6-9962-4A0D-9598-28140177E6D2}"/>
               </a:ext>
             </a:extLst>
           </p:cNvPr>
@@ -7449,7 +7449,7 @@
           <p:cNvPr id="72" name="">
             <a:extLst xmlns:a="http://schemas.openxmlformats.org/drawingml/2006/main">
               <a:ext uri="{FF2B5EF4-FFF2-40B4-BE49-F238E27FC236}">
-                <a16:creationId xmlns:a16="http://schemas.microsoft.com/office/drawing/2014/main" id="{E66153F6-4AD0-4F6E-8D62-2D65995EF728}"/>
+                <a16:creationId xmlns:a16="http://schemas.microsoft.com/office/drawing/2014/main" id="{D9F745E7-03B5-43D1-A0E7-B2CBE326E0CA}"/>
               </a:ext>
             </a:extLst>
           </p:cNvPr>
@@ -7480,7 +7480,7 @@
           <p:cNvPr id="73" name="">
             <a:extLst xmlns:a="http://schemas.openxmlformats.org/drawingml/2006/main">
               <a:ext uri="{FF2B5EF4-FFF2-40B4-BE49-F238E27FC236}">
-                <a16:creationId xmlns:a16="http://schemas.microsoft.com/office/drawing/2014/main" id="{7FB76586-D6CE-4D69-8085-F92A05D3E31A}"/>
+                <a16:creationId xmlns:a16="http://schemas.microsoft.com/office/drawing/2014/main" id="{AA796B78-DCB4-4583-98A6-97A8CB4EE396}"/>
               </a:ext>
             </a:extLst>
           </p:cNvPr>
@@ -7530,7 +7530,7 @@
           <p:cNvPr id="74" name="">
             <a:extLst xmlns:a="http://schemas.openxmlformats.org/drawingml/2006/main">
               <a:ext uri="{FF2B5EF4-FFF2-40B4-BE49-F238E27FC236}">
-                <a16:creationId xmlns:a16="http://schemas.microsoft.com/office/drawing/2014/main" id="{A367010D-134B-4D09-9180-9951AD7941E8}"/>
+                <a16:creationId xmlns:a16="http://schemas.microsoft.com/office/drawing/2014/main" id="{8A5963FD-CCCF-4166-B665-B98A89B07043}"/>
               </a:ext>
             </a:extLst>
           </p:cNvPr>
@@ -7580,7 +7580,7 @@
           <p:cNvPr id="75" name="">
             <a:extLst xmlns:a="http://schemas.openxmlformats.org/drawingml/2006/main">
               <a:ext uri="{FF2B5EF4-FFF2-40B4-BE49-F238E27FC236}">
-                <a16:creationId xmlns:a16="http://schemas.microsoft.com/office/drawing/2014/main" id="{71F0BEDD-44BF-450C-B5E7-9F54C1A75D5F}"/>
+                <a16:creationId xmlns:a16="http://schemas.microsoft.com/office/drawing/2014/main" id="{129A4E5F-ED94-42ED-896C-91F528C8A642}"/>
               </a:ext>
             </a:extLst>
           </p:cNvPr>
@@ -7630,7 +7630,7 @@
           <p:cNvPr id="76" name="">
             <a:extLst xmlns:a="http://schemas.openxmlformats.org/drawingml/2006/main">
               <a:ext uri="{FF2B5EF4-FFF2-40B4-BE49-F238E27FC236}">
-                <a16:creationId xmlns:a16="http://schemas.microsoft.com/office/drawing/2014/main" id="{860C1EAF-54A4-4D01-B022-CB99184DF2B1}"/>
+                <a16:creationId xmlns:a16="http://schemas.microsoft.com/office/drawing/2014/main" id="{8BF84FC0-9B79-4A80-99ED-054F1985EF2A}"/>
               </a:ext>
             </a:extLst>
           </p:cNvPr>
@@ -7661,7 +7661,7 @@
           <p:cNvPr id="77" name="">
             <a:extLst xmlns:a="http://schemas.openxmlformats.org/drawingml/2006/main">
               <a:ext uri="{FF2B5EF4-FFF2-40B4-BE49-F238E27FC236}">
-                <a16:creationId xmlns:a16="http://schemas.microsoft.com/office/drawing/2014/main" id="{7B2B95BC-71F5-4648-953D-66227119F832}"/>
+                <a16:creationId xmlns:a16="http://schemas.microsoft.com/office/drawing/2014/main" id="{3E9D91E0-0404-4996-87D1-F7B0256C99EC}"/>
               </a:ext>
             </a:extLst>
           </p:cNvPr>
@@ -7711,7 +7711,7 @@
           <p:cNvPr id="78" name="">
             <a:extLst xmlns:a="http://schemas.openxmlformats.org/drawingml/2006/main">
               <a:ext uri="{FF2B5EF4-FFF2-40B4-BE49-F238E27FC236}">
-                <a16:creationId xmlns:a16="http://schemas.microsoft.com/office/drawing/2014/main" id="{B59DC4AA-9E92-43E8-A4EF-4A8C6B375F16}"/>
+                <a16:creationId xmlns:a16="http://schemas.microsoft.com/office/drawing/2014/main" id="{B2402FD4-0471-44F8-8865-C3C9491C57F2}"/>
               </a:ext>
             </a:extLst>
           </p:cNvPr>
@@ -7761,7 +7761,7 @@
           <p:cNvPr id="79" name="">
             <a:extLst xmlns:a="http://schemas.openxmlformats.org/drawingml/2006/main">
               <a:ext uri="{FF2B5EF4-FFF2-40B4-BE49-F238E27FC236}">
-                <a16:creationId xmlns:a16="http://schemas.microsoft.com/office/drawing/2014/main" id="{CF145F19-F2DA-4575-82DE-9EF5D3976AC0}"/>
+                <a16:creationId xmlns:a16="http://schemas.microsoft.com/office/drawing/2014/main" id="{1FFBD3E3-086D-4405-83EA-896DDB178CBD}"/>
               </a:ext>
             </a:extLst>
           </p:cNvPr>
@@ -7811,7 +7811,7 @@
           <p:cNvPr id="80" name="">
             <a:extLst xmlns:a="http://schemas.openxmlformats.org/drawingml/2006/main">
               <a:ext uri="{FF2B5EF4-FFF2-40B4-BE49-F238E27FC236}">
-                <a16:creationId xmlns:a16="http://schemas.microsoft.com/office/drawing/2014/main" id="{1F874483-F224-4F40-9FBD-322CF1F4E024}"/>
+                <a16:creationId xmlns:a16="http://schemas.microsoft.com/office/drawing/2014/main" id="{7626F44B-BECE-4B42-B3B6-D3F44F2BED3B}"/>
               </a:ext>
             </a:extLst>
           </p:cNvPr>
@@ -7842,7 +7842,7 @@
           <p:cNvPr id="81" name="">
             <a:extLst xmlns:a="http://schemas.openxmlformats.org/drawingml/2006/main">
               <a:ext uri="{FF2B5EF4-FFF2-40B4-BE49-F238E27FC236}">
-                <a16:creationId xmlns:a16="http://schemas.microsoft.com/office/drawing/2014/main" id="{D142FE1F-063B-49D2-A074-973BA5554A85}"/>
+                <a16:creationId xmlns:a16="http://schemas.microsoft.com/office/drawing/2014/main" id="{509ABCE1-D850-4022-A49C-5147A2F7F81A}"/>
               </a:ext>
             </a:extLst>
           </p:cNvPr>
@@ -7892,7 +7892,7 @@
           <p:cNvPr id="82" name="">
             <a:extLst xmlns:a="http://schemas.openxmlformats.org/drawingml/2006/main">
               <a:ext uri="{FF2B5EF4-FFF2-40B4-BE49-F238E27FC236}">
-                <a16:creationId xmlns:a16="http://schemas.microsoft.com/office/drawing/2014/main" id="{59667427-06AF-4473-BAE9-C8B105074414}"/>
+                <a16:creationId xmlns:a16="http://schemas.microsoft.com/office/drawing/2014/main" id="{0904575E-766D-424A-BA09-CFADA5C8D35C}"/>
               </a:ext>
             </a:extLst>
           </p:cNvPr>
@@ -7942,7 +7942,7 @@
           <p:cNvPr id="83" name="">
             <a:extLst xmlns:a="http://schemas.openxmlformats.org/drawingml/2006/main">
               <a:ext uri="{FF2B5EF4-FFF2-40B4-BE49-F238E27FC236}">
-                <a16:creationId xmlns:a16="http://schemas.microsoft.com/office/drawing/2014/main" id="{4C0FBB3A-FD02-4BEB-9DB1-ADE795F808BA}"/>
+                <a16:creationId xmlns:a16="http://schemas.microsoft.com/office/drawing/2014/main" id="{B5EFF2F6-0F35-4E22-A9D4-231F665DE7FD}"/>
               </a:ext>
             </a:extLst>
           </p:cNvPr>
@@ -7992,7 +7992,7 @@
           <p:cNvPr id="84" name="">
             <a:extLst xmlns:a="http://schemas.openxmlformats.org/drawingml/2006/main">
               <a:ext uri="{FF2B5EF4-FFF2-40B4-BE49-F238E27FC236}">
-                <a16:creationId xmlns:a16="http://schemas.microsoft.com/office/drawing/2014/main" id="{BFC58E6D-56AF-4954-BA3A-2F5D45631C55}"/>
+                <a16:creationId xmlns:a16="http://schemas.microsoft.com/office/drawing/2014/main" id="{F3CB3A6D-3D7D-437B-B9C2-85D99514F6F1}"/>
               </a:ext>
             </a:extLst>
           </p:cNvPr>
@@ -8023,7 +8023,7 @@
           <p:cNvPr id="85" name="">
             <a:extLst xmlns:a="http://schemas.openxmlformats.org/drawingml/2006/main">
               <a:ext uri="{FF2B5EF4-FFF2-40B4-BE49-F238E27FC236}">
-                <a16:creationId xmlns:a16="http://schemas.microsoft.com/office/drawing/2014/main" id="{BFD80E99-BCAE-4CAD-B4C6-0280446C5CA2}"/>
+                <a16:creationId xmlns:a16="http://schemas.microsoft.com/office/drawing/2014/main" id="{7DF966F0-4854-4E18-A9B4-85A7F69E8174}"/>
               </a:ext>
             </a:extLst>
           </p:cNvPr>
@@ -8073,7 +8073,7 @@
           <p:cNvPr id="86" name="">
             <a:extLst xmlns:a="http://schemas.openxmlformats.org/drawingml/2006/main">
               <a:ext uri="{FF2B5EF4-FFF2-40B4-BE49-F238E27FC236}">
-                <a16:creationId xmlns:a16="http://schemas.microsoft.com/office/drawing/2014/main" id="{5F72DDDB-587B-4D04-ABD7-CB7A72F93A87}"/>
+                <a16:creationId xmlns:a16="http://schemas.microsoft.com/office/drawing/2014/main" id="{0D3A6E13-18E2-46AD-A42B-51E22214A579}"/>
               </a:ext>
             </a:extLst>
           </p:cNvPr>
@@ -8123,7 +8123,7 @@
           <p:cNvPr id="87" name="">
             <a:extLst xmlns:a="http://schemas.openxmlformats.org/drawingml/2006/main">
               <a:ext uri="{FF2B5EF4-FFF2-40B4-BE49-F238E27FC236}">
-                <a16:creationId xmlns:a16="http://schemas.microsoft.com/office/drawing/2014/main" id="{96DC1277-157D-4BF1-ADB1-13BFFDE61B5E}"/>
+                <a16:creationId xmlns:a16="http://schemas.microsoft.com/office/drawing/2014/main" id="{581E1BCD-EFBC-404A-B0AE-FDE62E63E6FC}"/>
               </a:ext>
             </a:extLst>
           </p:cNvPr>
@@ -8173,7 +8173,7 @@
           <p:cNvPr id="88" name="">
             <a:extLst xmlns:a="http://schemas.openxmlformats.org/drawingml/2006/main">
               <a:ext uri="{FF2B5EF4-FFF2-40B4-BE49-F238E27FC236}">
-                <a16:creationId xmlns:a16="http://schemas.microsoft.com/office/drawing/2014/main" id="{064B386F-79BA-494C-B3F2-9F57ECEB0537}"/>
+                <a16:creationId xmlns:a16="http://schemas.microsoft.com/office/drawing/2014/main" id="{9AE9C698-E895-41E9-A95F-5523AC1066D0}"/>
               </a:ext>
             </a:extLst>
           </p:cNvPr>
@@ -8214,7 +8214,7 @@
           <p:cNvPr id="89" name="">
             <a:extLst xmlns:a="http://schemas.openxmlformats.org/drawingml/2006/main">
               <a:ext uri="{FF2B5EF4-FFF2-40B4-BE49-F238E27FC236}">
-                <a16:creationId xmlns:a16="http://schemas.microsoft.com/office/drawing/2014/main" id="{65CA236A-B7E3-46FD-B851-075CDCE01E69}"/>
+                <a16:creationId xmlns:a16="http://schemas.microsoft.com/office/drawing/2014/main" id="{161512D6-45D5-4309-9D23-AE4A173C1E0A}"/>
               </a:ext>
             </a:extLst>
           </p:cNvPr>
@@ -8264,7 +8264,7 @@
           <p:cNvPr id="90" name="">
             <a:extLst xmlns:a="http://schemas.openxmlformats.org/drawingml/2006/main">
               <a:ext uri="{FF2B5EF4-FFF2-40B4-BE49-F238E27FC236}">
-                <a16:creationId xmlns:a16="http://schemas.microsoft.com/office/drawing/2014/main" id="{F5350985-7394-4761-B6A8-3D5733FDFE2F}"/>
+                <a16:creationId xmlns:a16="http://schemas.microsoft.com/office/drawing/2014/main" id="{E8ED82AC-84FB-4E7C-95D0-C1B67D0644B0}"/>
               </a:ext>
             </a:extLst>
           </p:cNvPr>
@@ -8321,7 +8321,7 @@
         </p:xfrm>
         <a:graphic xmlns:a="http://schemas.openxmlformats.org/drawingml/2006/main">
           <a:graphicData uri="http://schemas.openxmlformats.org/drawingml/2006/chart">
-            <c:chart xmlns:r="http://schemas.openxmlformats.org/officeDocument/2006/relationships" xmlns:c="http://schemas.openxmlformats.org/drawingml/2006/chart" r:id="R41e97094a8a545fe"/>
+            <c:chart xmlns:r="http://schemas.openxmlformats.org/officeDocument/2006/relationships" xmlns:c="http://schemas.openxmlformats.org/drawingml/2006/chart" r:id="R25e2dcfdc379449a"/>
           </a:graphicData>
         </a:graphic>
       </p:graphicFrame>
@@ -8330,7 +8330,7 @@
           <p:cNvPr id="92" name="">
             <a:extLst xmlns:a="http://schemas.openxmlformats.org/drawingml/2006/main">
               <a:ext uri="{FF2B5EF4-FFF2-40B4-BE49-F238E27FC236}">
-                <a16:creationId xmlns:a16="http://schemas.microsoft.com/office/drawing/2014/main" id="{75E9690F-5791-4755-A231-C8FC1567E4FA}"/>
+                <a16:creationId xmlns:a16="http://schemas.microsoft.com/office/drawing/2014/main" id="{B23F84A5-3C5A-4A6B-B13E-427C3566C405}"/>
               </a:ext>
             </a:extLst>
           </p:cNvPr>
@@ -8361,7 +8361,7 @@
           <p:cNvPr id="93" name="">
             <a:extLst xmlns:a="http://schemas.openxmlformats.org/drawingml/2006/main">
               <a:ext uri="{FF2B5EF4-FFF2-40B4-BE49-F238E27FC236}">
-                <a16:creationId xmlns:a16="http://schemas.microsoft.com/office/drawing/2014/main" id="{F3714C48-7DC3-4B00-9378-19185AEE7099}"/>
+                <a16:creationId xmlns:a16="http://schemas.microsoft.com/office/drawing/2014/main" id="{161F5E20-8B3B-4A71-95A1-9BA182AA31E9}"/>
               </a:ext>
             </a:extLst>
           </p:cNvPr>
@@ -8411,7 +8411,7 @@
           <p:cNvPr id="94" name="">
             <a:extLst xmlns:a="http://schemas.openxmlformats.org/drawingml/2006/main">
               <a:ext uri="{FF2B5EF4-FFF2-40B4-BE49-F238E27FC236}">
-                <a16:creationId xmlns:a16="http://schemas.microsoft.com/office/drawing/2014/main" id="{1B766083-4871-4789-9822-F7C5BFCBB05F}"/>
+                <a16:creationId xmlns:a16="http://schemas.microsoft.com/office/drawing/2014/main" id="{8376CDE7-E95C-4049-B174-7DEF0FE993F2}"/>
               </a:ext>
             </a:extLst>
           </p:cNvPr>
@@ -8461,7 +8461,7 @@
           <p:cNvPr id="95" name="">
             <a:extLst xmlns:a="http://schemas.openxmlformats.org/drawingml/2006/main">
               <a:ext uri="{FF2B5EF4-FFF2-40B4-BE49-F238E27FC236}">
-                <a16:creationId xmlns:a16="http://schemas.microsoft.com/office/drawing/2014/main" id="{0ABCB982-344F-460E-A2AA-93D73BE7DF69}"/>
+                <a16:creationId xmlns:a16="http://schemas.microsoft.com/office/drawing/2014/main" id="{F7F2C86D-EB09-4857-BB96-6883C7215BFF}"/>
               </a:ext>
             </a:extLst>
           </p:cNvPr>
@@ -8511,7 +8511,7 @@
           <p:cNvPr id="96" name="">
             <a:extLst xmlns:a="http://schemas.openxmlformats.org/drawingml/2006/main">
               <a:ext uri="{FF2B5EF4-FFF2-40B4-BE49-F238E27FC236}">
-                <a16:creationId xmlns:a16="http://schemas.microsoft.com/office/drawing/2014/main" id="{CE16C971-AD5D-4301-8704-C35A714F1D96}"/>
+                <a16:creationId xmlns:a16="http://schemas.microsoft.com/office/drawing/2014/main" id="{2D75384B-AA28-485E-91EA-111BDE63F982}"/>
               </a:ext>
             </a:extLst>
           </p:cNvPr>
@@ -8542,7 +8542,7 @@
           <p:cNvPr id="97" name="">
             <a:extLst xmlns:a="http://schemas.openxmlformats.org/drawingml/2006/main">
               <a:ext uri="{FF2B5EF4-FFF2-40B4-BE49-F238E27FC236}">
-                <a16:creationId xmlns:a16="http://schemas.microsoft.com/office/drawing/2014/main" id="{CDB7DEB6-0433-407E-AD57-B3F6B445EC96}"/>
+                <a16:creationId xmlns:a16="http://schemas.microsoft.com/office/drawing/2014/main" id="{C1BF868D-5BF5-4570-BE4D-4A5425739398}"/>
               </a:ext>
             </a:extLst>
           </p:cNvPr>
@@ -8592,7 +8592,7 @@
           <p:cNvPr id="98" name="">
             <a:extLst xmlns:a="http://schemas.openxmlformats.org/drawingml/2006/main">
               <a:ext uri="{FF2B5EF4-FFF2-40B4-BE49-F238E27FC236}">
-                <a16:creationId xmlns:a16="http://schemas.microsoft.com/office/drawing/2014/main" id="{B1A66EF0-BE51-44D4-9240-D2C5D863C137}"/>
+                <a16:creationId xmlns:a16="http://schemas.microsoft.com/office/drawing/2014/main" id="{92D5ABE6-A583-470A-89C8-61670016D2C5}"/>
               </a:ext>
             </a:extLst>
           </p:cNvPr>
@@ -8642,7 +8642,7 @@
           <p:cNvPr id="99" name="">
             <a:extLst xmlns:a="http://schemas.openxmlformats.org/drawingml/2006/main">
               <a:ext uri="{FF2B5EF4-FFF2-40B4-BE49-F238E27FC236}">
-                <a16:creationId xmlns:a16="http://schemas.microsoft.com/office/drawing/2014/main" id="{BA918DD9-8F1B-4354-BE63-4A5DC6C449A5}"/>
+                <a16:creationId xmlns:a16="http://schemas.microsoft.com/office/drawing/2014/main" id="{67E380E1-856E-4D91-BD52-C000DDB147C1}"/>
               </a:ext>
             </a:extLst>
           </p:cNvPr>
@@ -8692,7 +8692,7 @@
           <p:cNvPr id="100" name="">
             <a:extLst xmlns:a="http://schemas.openxmlformats.org/drawingml/2006/main">
               <a:ext uri="{FF2B5EF4-FFF2-40B4-BE49-F238E27FC236}">
-                <a16:creationId xmlns:a16="http://schemas.microsoft.com/office/drawing/2014/main" id="{3B8A7A1C-FCFA-43D1-BA06-B97CD5A0EAC8}"/>
+                <a16:creationId xmlns:a16="http://schemas.microsoft.com/office/drawing/2014/main" id="{E9918FE9-45F4-49D9-89A4-E2263DF1AC29}"/>
               </a:ext>
             </a:extLst>
           </p:cNvPr>
@@ -8723,7 +8723,7 @@
           <p:cNvPr id="101" name="">
             <a:extLst xmlns:a="http://schemas.openxmlformats.org/drawingml/2006/main">
               <a:ext uri="{FF2B5EF4-FFF2-40B4-BE49-F238E27FC236}">
-                <a16:creationId xmlns:a16="http://schemas.microsoft.com/office/drawing/2014/main" id="{6414CEDD-AE22-43B3-BE41-70D45D804853}"/>
+                <a16:creationId xmlns:a16="http://schemas.microsoft.com/office/drawing/2014/main" id="{2327192E-CE28-4888-996D-602D538FD4E3}"/>
               </a:ext>
             </a:extLst>
           </p:cNvPr>
@@ -8773,7 +8773,7 @@
           <p:cNvPr id="102" name="">
             <a:extLst xmlns:a="http://schemas.openxmlformats.org/drawingml/2006/main">
               <a:ext uri="{FF2B5EF4-FFF2-40B4-BE49-F238E27FC236}">
-                <a16:creationId xmlns:a16="http://schemas.microsoft.com/office/drawing/2014/main" id="{31EB20CB-F94C-4C4F-97FE-560776608A1C}"/>
+                <a16:creationId xmlns:a16="http://schemas.microsoft.com/office/drawing/2014/main" id="{7AB27E19-4F22-4906-9873-92C528572F94}"/>
               </a:ext>
             </a:extLst>
           </p:cNvPr>
@@ -8823,7 +8823,7 @@
           <p:cNvPr id="103" name="">
             <a:extLst xmlns:a="http://schemas.openxmlformats.org/drawingml/2006/main">
               <a:ext uri="{FF2B5EF4-FFF2-40B4-BE49-F238E27FC236}">
-                <a16:creationId xmlns:a16="http://schemas.microsoft.com/office/drawing/2014/main" id="{1B571428-BC3A-4F24-95BF-23826F0D6AD0}"/>
+                <a16:creationId xmlns:a16="http://schemas.microsoft.com/office/drawing/2014/main" id="{6C3D7F8F-4247-402F-9FE7-DB261AA4A022}"/>
               </a:ext>
             </a:extLst>
           </p:cNvPr>
@@ -8873,7 +8873,7 @@
           <p:cNvPr id="104" name="">
             <a:extLst xmlns:a="http://schemas.openxmlformats.org/drawingml/2006/main">
               <a:ext uri="{FF2B5EF4-FFF2-40B4-BE49-F238E27FC236}">
-                <a16:creationId xmlns:a16="http://schemas.microsoft.com/office/drawing/2014/main" id="{C5C88F00-DAD8-4A81-A67C-B33CB222AFB4}"/>
+                <a16:creationId xmlns:a16="http://schemas.microsoft.com/office/drawing/2014/main" id="{FADF8B61-1533-4658-AB03-D96AE69C3616}"/>
               </a:ext>
             </a:extLst>
           </p:cNvPr>
@@ -8904,7 +8904,7 @@
           <p:cNvPr id="105" name="">
             <a:extLst xmlns:a="http://schemas.openxmlformats.org/drawingml/2006/main">
               <a:ext uri="{FF2B5EF4-FFF2-40B4-BE49-F238E27FC236}">
-                <a16:creationId xmlns:a16="http://schemas.microsoft.com/office/drawing/2014/main" id="{9F4D045D-1440-44D1-9E32-9C094AE2BF57}"/>
+                <a16:creationId xmlns:a16="http://schemas.microsoft.com/office/drawing/2014/main" id="{984A946E-556D-4B18-9C58-3DB851E5DCD3}"/>
               </a:ext>
             </a:extLst>
           </p:cNvPr>
@@ -8954,7 +8954,7 @@
           <p:cNvPr id="106" name="">
             <a:extLst xmlns:a="http://schemas.openxmlformats.org/drawingml/2006/main">
               <a:ext uri="{FF2B5EF4-FFF2-40B4-BE49-F238E27FC236}">
-                <a16:creationId xmlns:a16="http://schemas.microsoft.com/office/drawing/2014/main" id="{E1D308BB-35FF-4F38-969C-C1B70923007D}"/>
+                <a16:creationId xmlns:a16="http://schemas.microsoft.com/office/drawing/2014/main" id="{3B9E05CD-B418-42B0-8F5C-C4E1BD239245}"/>
               </a:ext>
             </a:extLst>
           </p:cNvPr>
@@ -9004,7 +9004,7 @@
           <p:cNvPr id="107" name="">
             <a:extLst xmlns:a="http://schemas.openxmlformats.org/drawingml/2006/main">
               <a:ext uri="{FF2B5EF4-FFF2-40B4-BE49-F238E27FC236}">
-                <a16:creationId xmlns:a16="http://schemas.microsoft.com/office/drawing/2014/main" id="{B3373C83-FCA1-4F4B-A8DC-83B816DB4F6E}"/>
+                <a16:creationId xmlns:a16="http://schemas.microsoft.com/office/drawing/2014/main" id="{716C981D-3B9E-412B-B776-F097934DEAC3}"/>
               </a:ext>
             </a:extLst>
           </p:cNvPr>
@@ -9054,7 +9054,7 @@
           <p:cNvPr id="108" name="">
             <a:extLst xmlns:a="http://schemas.openxmlformats.org/drawingml/2006/main">
               <a:ext uri="{FF2B5EF4-FFF2-40B4-BE49-F238E27FC236}">
-                <a16:creationId xmlns:a16="http://schemas.microsoft.com/office/drawing/2014/main" id="{CCE80289-51A7-463C-8698-F315362AA124}"/>
+                <a16:creationId xmlns:a16="http://schemas.microsoft.com/office/drawing/2014/main" id="{AC7EE6F6-C949-42A9-8C28-80326F431F9F}"/>
               </a:ext>
             </a:extLst>
           </p:cNvPr>
@@ -9085,7 +9085,7 @@
           <p:cNvPr id="109" name="">
             <a:extLst xmlns:a="http://schemas.openxmlformats.org/drawingml/2006/main">
               <a:ext uri="{FF2B5EF4-FFF2-40B4-BE49-F238E27FC236}">
-                <a16:creationId xmlns:a16="http://schemas.microsoft.com/office/drawing/2014/main" id="{B8317A5D-E791-4F09-B676-B723A2D77B28}"/>
+                <a16:creationId xmlns:a16="http://schemas.microsoft.com/office/drawing/2014/main" id="{6F29CB19-FD53-4A4F-8CE7-79EF53568699}"/>
               </a:ext>
             </a:extLst>
           </p:cNvPr>
@@ -9135,7 +9135,7 @@
           <p:cNvPr id="110" name="">
             <a:extLst xmlns:a="http://schemas.openxmlformats.org/drawingml/2006/main">
               <a:ext uri="{FF2B5EF4-FFF2-40B4-BE49-F238E27FC236}">
-                <a16:creationId xmlns:a16="http://schemas.microsoft.com/office/drawing/2014/main" id="{A4FA3B98-6F59-458A-A038-0CCF2D92F947}"/>
+                <a16:creationId xmlns:a16="http://schemas.microsoft.com/office/drawing/2014/main" id="{02C926B4-DC6C-438D-811B-51B25E5E49EE}"/>
               </a:ext>
             </a:extLst>
           </p:cNvPr>
@@ -9185,7 +9185,7 @@
           <p:cNvPr id="111" name="">
             <a:extLst xmlns:a="http://schemas.openxmlformats.org/drawingml/2006/main">
               <a:ext uri="{FF2B5EF4-FFF2-40B4-BE49-F238E27FC236}">
-                <a16:creationId xmlns:a16="http://schemas.microsoft.com/office/drawing/2014/main" id="{E6233F5D-178C-4C3B-8320-3087BAF6804B}"/>
+                <a16:creationId xmlns:a16="http://schemas.microsoft.com/office/drawing/2014/main" id="{1266AEFC-6351-49D5-BBC9-4659CCF93702}"/>
               </a:ext>
             </a:extLst>
           </p:cNvPr>
@@ -9235,7 +9235,7 @@
           <p:cNvPr id="112" name="">
             <a:extLst xmlns:a="http://schemas.openxmlformats.org/drawingml/2006/main">
               <a:ext uri="{FF2B5EF4-FFF2-40B4-BE49-F238E27FC236}">
-                <a16:creationId xmlns:a16="http://schemas.microsoft.com/office/drawing/2014/main" id="{AEB1EF9C-7F44-430D-A8B2-B19E28BC2EBD}"/>
+                <a16:creationId xmlns:a16="http://schemas.microsoft.com/office/drawing/2014/main" id="{9515E8C5-BB3C-498D-867F-DBC0CDC9E68F}"/>
               </a:ext>
             </a:extLst>
           </p:cNvPr>
@@ -9266,7 +9266,7 @@
           <p:cNvPr id="113" name="">
             <a:extLst xmlns:a="http://schemas.openxmlformats.org/drawingml/2006/main">
               <a:ext uri="{FF2B5EF4-FFF2-40B4-BE49-F238E27FC236}">
-                <a16:creationId xmlns:a16="http://schemas.microsoft.com/office/drawing/2014/main" id="{DEEA44A6-C791-4875-BBFA-F89D8D93EC37}"/>
+                <a16:creationId xmlns:a16="http://schemas.microsoft.com/office/drawing/2014/main" id="{011C2E58-B062-4F8E-9838-37C3FF145642}"/>
               </a:ext>
             </a:extLst>
           </p:cNvPr>
@@ -9316,7 +9316,7 @@
           <p:cNvPr id="114" name="">
             <a:extLst xmlns:a="http://schemas.openxmlformats.org/drawingml/2006/main">
               <a:ext uri="{FF2B5EF4-FFF2-40B4-BE49-F238E27FC236}">
-                <a16:creationId xmlns:a16="http://schemas.microsoft.com/office/drawing/2014/main" id="{FD6CC4CE-B221-42D7-B506-7FF39C34CB6B}"/>
+                <a16:creationId xmlns:a16="http://schemas.microsoft.com/office/drawing/2014/main" id="{BEF60224-99DA-4BA4-9D35-616B2662E124}"/>
               </a:ext>
             </a:extLst>
           </p:cNvPr>
@@ -9366,7 +9366,7 @@
           <p:cNvPr id="115" name="">
             <a:extLst xmlns:a="http://schemas.openxmlformats.org/drawingml/2006/main">
               <a:ext uri="{FF2B5EF4-FFF2-40B4-BE49-F238E27FC236}">
-                <a16:creationId xmlns:a16="http://schemas.microsoft.com/office/drawing/2014/main" id="{8C5E4BE1-8536-4D9F-90C6-75E368B52CCF}"/>
+                <a16:creationId xmlns:a16="http://schemas.microsoft.com/office/drawing/2014/main" id="{0EB73E31-1C77-4ABB-82D4-276254DA1203}"/>
               </a:ext>
             </a:extLst>
           </p:cNvPr>
@@ -9416,7 +9416,7 @@
           <p:cNvPr id="116" name="">
             <a:extLst xmlns:a="http://schemas.openxmlformats.org/drawingml/2006/main">
               <a:ext uri="{FF2B5EF4-FFF2-40B4-BE49-F238E27FC236}">
-                <a16:creationId xmlns:a16="http://schemas.microsoft.com/office/drawing/2014/main" id="{CECAC4D0-987F-4573-96FC-98E3E94E2BB3}"/>
+                <a16:creationId xmlns:a16="http://schemas.microsoft.com/office/drawing/2014/main" id="{356C7925-AC93-412E-B706-42EBDBBDFCCB}"/>
               </a:ext>
             </a:extLst>
           </p:cNvPr>
@@ -9466,7 +9466,7 @@
           <p:cNvPr id="117" name="">
             <a:extLst xmlns:a="http://schemas.openxmlformats.org/drawingml/2006/main">
               <a:ext uri="{FF2B5EF4-FFF2-40B4-BE49-F238E27FC236}">
-                <a16:creationId xmlns:a16="http://schemas.microsoft.com/office/drawing/2014/main" id="{B3F67ABE-B6EC-4DB4-BAFE-72F2105A417E}"/>
+                <a16:creationId xmlns:a16="http://schemas.microsoft.com/office/drawing/2014/main" id="{AB891A97-25A5-4596-882E-DC7D0F7A2468}"/>
               </a:ext>
             </a:extLst>
           </p:cNvPr>
@@ -9497,7 +9497,7 @@
           <p:cNvPr id="118" name="">
             <a:extLst xmlns:a="http://schemas.openxmlformats.org/drawingml/2006/main">
               <a:ext uri="{FF2B5EF4-FFF2-40B4-BE49-F238E27FC236}">
-                <a16:creationId xmlns:a16="http://schemas.microsoft.com/office/drawing/2014/main" id="{4A594026-E88C-4A41-94A0-B7C11B4D7D97}"/>
+                <a16:creationId xmlns:a16="http://schemas.microsoft.com/office/drawing/2014/main" id="{4B69343F-54CD-4485-8A91-1298E5324319}"/>
               </a:ext>
             </a:extLst>
           </p:cNvPr>
@@ -9547,7 +9547,7 @@
           <p:cNvPr id="119" name="">
             <a:extLst xmlns:a="http://schemas.openxmlformats.org/drawingml/2006/main">
               <a:ext uri="{FF2B5EF4-FFF2-40B4-BE49-F238E27FC236}">
-                <a16:creationId xmlns:a16="http://schemas.microsoft.com/office/drawing/2014/main" id="{A3A266FE-2657-4399-922E-1F9E76D970F6}"/>
+                <a16:creationId xmlns:a16="http://schemas.microsoft.com/office/drawing/2014/main" id="{5D42A98B-ADF4-4D41-9B30-2A95F899863E}"/>
               </a:ext>
             </a:extLst>
           </p:cNvPr>
@@ -9595,7 +9595,7 @@
     </p:spTree>
     <p:extLst>
       <p:ext uri="{BB962C8B-B14F-4D97-AF65-F5344CB8AC3E}">
-        <p14:creationId xmlns:p14="http://schemas.microsoft.com/office/powerpoint/2010/main" val="862302605"/>
+        <p14:creationId xmlns:p14="http://schemas.microsoft.com/office/powerpoint/2010/main" val="1511502285"/>
       </p:ext>
     </p:extLst>
   </p:cSld>
@@ -9626,7 +9626,7 @@
           <p:cNvPr id="120" name="">
             <a:extLst xmlns:a="http://schemas.openxmlformats.org/drawingml/2006/main">
               <a:ext uri="{FF2B5EF4-FFF2-40B4-BE49-F238E27FC236}">
-                <a16:creationId xmlns:a16="http://schemas.microsoft.com/office/drawing/2014/main" id="{3EC60688-BDCA-4805-B09C-4F213529E749}"/>
+                <a16:creationId xmlns:a16="http://schemas.microsoft.com/office/drawing/2014/main" id="{65D56762-30AB-4BB0-89ED-51575C58A540}"/>
               </a:ext>
             </a:extLst>
           </p:cNvPr>
@@ -9676,7 +9676,7 @@
           <p:cNvPr id="2" name="">
             <a:extLst xmlns:a="http://schemas.openxmlformats.org/drawingml/2006/main">
               <a:ext uri="{FF2B5EF4-FFF2-40B4-BE49-F238E27FC236}">
-                <a16:creationId xmlns:a16="http://schemas.microsoft.com/office/drawing/2014/main" id="{B0828F56-7A83-4562-B69E-260867DECDBC}"/>
+                <a16:creationId xmlns:a16="http://schemas.microsoft.com/office/drawing/2014/main" id="{B5EFDF20-7B3F-4E5A-ADD6-4E5575F9ABAE}"/>
               </a:ext>
             </a:extLst>
           </p:cNvPr>
@@ -9726,7 +9726,7 @@
           <p:cNvPr id="3" name="">
             <a:extLst xmlns:a="http://schemas.openxmlformats.org/drawingml/2006/main">
               <a:ext uri="{FF2B5EF4-FFF2-40B4-BE49-F238E27FC236}">
-                <a16:creationId xmlns:a16="http://schemas.microsoft.com/office/drawing/2014/main" id="{1A02CBC4-DC25-4FD5-847E-1EFC5F09559D}"/>
+                <a16:creationId xmlns:a16="http://schemas.microsoft.com/office/drawing/2014/main" id="{69ABB387-2D63-4A8A-90E8-5E08F98251F9}"/>
               </a:ext>
             </a:extLst>
           </p:cNvPr>
@@ -9776,7 +9776,7 @@
           <p:cNvPr id="4" name="">
             <a:extLst xmlns:a="http://schemas.openxmlformats.org/drawingml/2006/main">
               <a:ext uri="{FF2B5EF4-FFF2-40B4-BE49-F238E27FC236}">
-                <a16:creationId xmlns:a16="http://schemas.microsoft.com/office/drawing/2014/main" id="{E443C16F-9F24-4B48-8663-D704A19143BC}"/>
+                <a16:creationId xmlns:a16="http://schemas.microsoft.com/office/drawing/2014/main" id="{017CE32A-72BA-4278-A7BB-C5EF5E6DF152}"/>
               </a:ext>
             </a:extLst>
           </p:cNvPr>
@@ -9817,7 +9817,7 @@
           <p:cNvPr id="5" name="">
             <a:extLst xmlns:a="http://schemas.openxmlformats.org/drawingml/2006/main">
               <a:ext uri="{FF2B5EF4-FFF2-40B4-BE49-F238E27FC236}">
-                <a16:creationId xmlns:a16="http://schemas.microsoft.com/office/drawing/2014/main" id="{AEA6C283-E637-4884-8D2C-8D1C6E9392E2}"/>
+                <a16:creationId xmlns:a16="http://schemas.microsoft.com/office/drawing/2014/main" id="{E6217E1C-903C-4C13-B9C2-049B2BF06F6C}"/>
               </a:ext>
             </a:extLst>
           </p:cNvPr>
@@ -9867,7 +9867,7 @@
           <p:cNvPr id="6" name="">
             <a:extLst xmlns:a="http://schemas.openxmlformats.org/drawingml/2006/main">
               <a:ext uri="{FF2B5EF4-FFF2-40B4-BE49-F238E27FC236}">
-                <a16:creationId xmlns:a16="http://schemas.microsoft.com/office/drawing/2014/main" id="{A10D44AA-6FE3-4A86-A889-ED7884388666}"/>
+                <a16:creationId xmlns:a16="http://schemas.microsoft.com/office/drawing/2014/main" id="{9D585B1C-87BA-4E68-9908-313CA749C897}"/>
               </a:ext>
             </a:extLst>
           </p:cNvPr>
@@ -9924,7 +9924,7 @@
         </p:xfrm>
         <a:graphic xmlns:a="http://schemas.openxmlformats.org/drawingml/2006/main">
           <a:graphicData uri="http://schemas.openxmlformats.org/drawingml/2006/chart">
-            <c:chart xmlns:r="http://schemas.openxmlformats.org/officeDocument/2006/relationships" xmlns:c="http://schemas.openxmlformats.org/drawingml/2006/chart" r:id="R1cdc820cd1e0438e"/>
+            <c:chart xmlns:r="http://schemas.openxmlformats.org/officeDocument/2006/relationships" xmlns:c="http://schemas.openxmlformats.org/drawingml/2006/chart" r:id="R9b7785e62fb541d0"/>
           </a:graphicData>
         </a:graphic>
       </p:graphicFrame>
@@ -9933,7 +9933,7 @@
           <p:cNvPr id="8" name="">
             <a:extLst xmlns:a="http://schemas.openxmlformats.org/drawingml/2006/main">
               <a:ext uri="{FF2B5EF4-FFF2-40B4-BE49-F238E27FC236}">
-                <a16:creationId xmlns:a16="http://schemas.microsoft.com/office/drawing/2014/main" id="{3B7C900E-8C29-4A08-B0FD-52D95649F09D}"/>
+                <a16:creationId xmlns:a16="http://schemas.microsoft.com/office/drawing/2014/main" id="{B314C164-2EE4-4EB1-9CE9-D96B677D1A2B}"/>
               </a:ext>
             </a:extLst>
           </p:cNvPr>
@@ -9964,7 +9964,7 @@
           <p:cNvPr id="9" name="">
             <a:extLst xmlns:a="http://schemas.openxmlformats.org/drawingml/2006/main">
               <a:ext uri="{FF2B5EF4-FFF2-40B4-BE49-F238E27FC236}">
-                <a16:creationId xmlns:a16="http://schemas.microsoft.com/office/drawing/2014/main" id="{9BD23710-E75D-49B6-B8A1-10C8029C8220}"/>
+                <a16:creationId xmlns:a16="http://schemas.microsoft.com/office/drawing/2014/main" id="{678D3707-0ED8-4AC2-90BC-29E1C4B503EE}"/>
               </a:ext>
             </a:extLst>
           </p:cNvPr>
@@ -10014,7 +10014,7 @@
           <p:cNvPr id="10" name="">
             <a:extLst xmlns:a="http://schemas.openxmlformats.org/drawingml/2006/main">
               <a:ext uri="{FF2B5EF4-FFF2-40B4-BE49-F238E27FC236}">
-                <a16:creationId xmlns:a16="http://schemas.microsoft.com/office/drawing/2014/main" id="{A1D03E26-021C-4487-9926-92D8049CCA46}"/>
+                <a16:creationId xmlns:a16="http://schemas.microsoft.com/office/drawing/2014/main" id="{57CE363C-9558-43C9-8853-6C1F2E9A71F1}"/>
               </a:ext>
             </a:extLst>
           </p:cNvPr>
@@ -10064,7 +10064,7 @@
           <p:cNvPr id="11" name="">
             <a:extLst xmlns:a="http://schemas.openxmlformats.org/drawingml/2006/main">
               <a:ext uri="{FF2B5EF4-FFF2-40B4-BE49-F238E27FC236}">
-                <a16:creationId xmlns:a16="http://schemas.microsoft.com/office/drawing/2014/main" id="{03E39EBD-3879-484F-A874-5870C647936F}"/>
+                <a16:creationId xmlns:a16="http://schemas.microsoft.com/office/drawing/2014/main" id="{2D2B8C87-9710-4B7F-9512-8286A7BC1E6F}"/>
               </a:ext>
             </a:extLst>
           </p:cNvPr>
@@ -10114,7 +10114,7 @@
           <p:cNvPr id="12" name="">
             <a:extLst xmlns:a="http://schemas.openxmlformats.org/drawingml/2006/main">
               <a:ext uri="{FF2B5EF4-FFF2-40B4-BE49-F238E27FC236}">
-                <a16:creationId xmlns:a16="http://schemas.microsoft.com/office/drawing/2014/main" id="{95BD68A6-1E6F-4F46-89A0-5FD4F9F5AF00}"/>
+                <a16:creationId xmlns:a16="http://schemas.microsoft.com/office/drawing/2014/main" id="{FA50B174-E0CB-4ADC-9356-795D02BA0B71}"/>
               </a:ext>
             </a:extLst>
           </p:cNvPr>
@@ -10145,7 +10145,7 @@
           <p:cNvPr id="13" name="">
             <a:extLst xmlns:a="http://schemas.openxmlformats.org/drawingml/2006/main">
               <a:ext uri="{FF2B5EF4-FFF2-40B4-BE49-F238E27FC236}">
-                <a16:creationId xmlns:a16="http://schemas.microsoft.com/office/drawing/2014/main" id="{344978B7-B042-4160-9B96-FD0DF14FFFCE}"/>
+                <a16:creationId xmlns:a16="http://schemas.microsoft.com/office/drawing/2014/main" id="{A6CCF0DE-4694-4401-AFE5-A47213C883EE}"/>
               </a:ext>
             </a:extLst>
           </p:cNvPr>
@@ -10195,7 +10195,7 @@
           <p:cNvPr id="14" name="">
             <a:extLst xmlns:a="http://schemas.openxmlformats.org/drawingml/2006/main">
               <a:ext uri="{FF2B5EF4-FFF2-40B4-BE49-F238E27FC236}">
-                <a16:creationId xmlns:a16="http://schemas.microsoft.com/office/drawing/2014/main" id="{AFC5FF23-F745-4900-84F5-08871FBA6391}"/>
+                <a16:creationId xmlns:a16="http://schemas.microsoft.com/office/drawing/2014/main" id="{A5A78503-3160-4527-9D41-FEED7B6E93D3}"/>
               </a:ext>
             </a:extLst>
           </p:cNvPr>
@@ -10245,7 +10245,7 @@
           <p:cNvPr id="15" name="">
             <a:extLst xmlns:a="http://schemas.openxmlformats.org/drawingml/2006/main">
               <a:ext uri="{FF2B5EF4-FFF2-40B4-BE49-F238E27FC236}">
-                <a16:creationId xmlns:a16="http://schemas.microsoft.com/office/drawing/2014/main" id="{D751A7F2-B7D5-42B5-A9EB-02AEF0529CA3}"/>
+                <a16:creationId xmlns:a16="http://schemas.microsoft.com/office/drawing/2014/main" id="{6C14E069-A818-4484-9E6D-5B219328421E}"/>
               </a:ext>
             </a:extLst>
           </p:cNvPr>
@@ -10295,7 +10295,7 @@
           <p:cNvPr id="16" name="">
             <a:extLst xmlns:a="http://schemas.openxmlformats.org/drawingml/2006/main">
               <a:ext uri="{FF2B5EF4-FFF2-40B4-BE49-F238E27FC236}">
-                <a16:creationId xmlns:a16="http://schemas.microsoft.com/office/drawing/2014/main" id="{A8554A9E-1FD6-4FFB-8AA9-A9D9CFC04C07}"/>
+                <a16:creationId xmlns:a16="http://schemas.microsoft.com/office/drawing/2014/main" id="{E26C84D0-5336-4FD1-A36B-5E3847889A64}"/>
               </a:ext>
             </a:extLst>
           </p:cNvPr>
@@ -10326,7 +10326,7 @@
           <p:cNvPr id="17" name="">
             <a:extLst xmlns:a="http://schemas.openxmlformats.org/drawingml/2006/main">
               <a:ext uri="{FF2B5EF4-FFF2-40B4-BE49-F238E27FC236}">
-                <a16:creationId xmlns:a16="http://schemas.microsoft.com/office/drawing/2014/main" id="{EFBDB6F5-5821-4EF8-BF89-20D370006B5F}"/>
+                <a16:creationId xmlns:a16="http://schemas.microsoft.com/office/drawing/2014/main" id="{35005EB0-FD9D-4066-B5A4-A68410394E22}"/>
               </a:ext>
             </a:extLst>
           </p:cNvPr>
@@ -10376,7 +10376,7 @@
           <p:cNvPr id="18" name="">
             <a:extLst xmlns:a="http://schemas.openxmlformats.org/drawingml/2006/main">
               <a:ext uri="{FF2B5EF4-FFF2-40B4-BE49-F238E27FC236}">
-                <a16:creationId xmlns:a16="http://schemas.microsoft.com/office/drawing/2014/main" id="{64731212-C1F4-4CEB-8302-191D595BA743}"/>
+                <a16:creationId xmlns:a16="http://schemas.microsoft.com/office/drawing/2014/main" id="{5520F250-9150-45E5-8C1D-61EACF4EEDA5}"/>
               </a:ext>
             </a:extLst>
           </p:cNvPr>
@@ -10426,7 +10426,7 @@
           <p:cNvPr id="19" name="">
             <a:extLst xmlns:a="http://schemas.openxmlformats.org/drawingml/2006/main">
               <a:ext uri="{FF2B5EF4-FFF2-40B4-BE49-F238E27FC236}">
-                <a16:creationId xmlns:a16="http://schemas.microsoft.com/office/drawing/2014/main" id="{610FDECD-20F6-4FF2-B8A3-85977851316B}"/>
+                <a16:creationId xmlns:a16="http://schemas.microsoft.com/office/drawing/2014/main" id="{43DCF6A1-4877-4CD1-B711-4CE7B20BAF85}"/>
               </a:ext>
             </a:extLst>
           </p:cNvPr>
@@ -10476,7 +10476,7 @@
           <p:cNvPr id="20" name="">
             <a:extLst xmlns:a="http://schemas.openxmlformats.org/drawingml/2006/main">
               <a:ext uri="{FF2B5EF4-FFF2-40B4-BE49-F238E27FC236}">
-                <a16:creationId xmlns:a16="http://schemas.microsoft.com/office/drawing/2014/main" id="{19536432-971F-4ECE-B1B6-3FD343745C2C}"/>
+                <a16:creationId xmlns:a16="http://schemas.microsoft.com/office/drawing/2014/main" id="{9ABF8033-6348-402C-BD2C-6A0AC9709808}"/>
               </a:ext>
             </a:extLst>
           </p:cNvPr>
@@ -10507,7 +10507,7 @@
           <p:cNvPr id="21" name="">
             <a:extLst xmlns:a="http://schemas.openxmlformats.org/drawingml/2006/main">
               <a:ext uri="{FF2B5EF4-FFF2-40B4-BE49-F238E27FC236}">
-                <a16:creationId xmlns:a16="http://schemas.microsoft.com/office/drawing/2014/main" id="{64B7E6B8-4DA3-4B96-8DB7-BD0B801660BA}"/>
+                <a16:creationId xmlns:a16="http://schemas.microsoft.com/office/drawing/2014/main" id="{71EC807F-892F-4B48-93B3-F553EE644D8D}"/>
               </a:ext>
             </a:extLst>
           </p:cNvPr>
@@ -10557,7 +10557,7 @@
           <p:cNvPr id="22" name="">
             <a:extLst xmlns:a="http://schemas.openxmlformats.org/drawingml/2006/main">
               <a:ext uri="{FF2B5EF4-FFF2-40B4-BE49-F238E27FC236}">
-                <a16:creationId xmlns:a16="http://schemas.microsoft.com/office/drawing/2014/main" id="{D09FE264-231B-4917-85B4-FB98434BB9D1}"/>
+                <a16:creationId xmlns:a16="http://schemas.microsoft.com/office/drawing/2014/main" id="{F227719F-4B6D-405B-8026-19FD9A5A3C6C}"/>
               </a:ext>
             </a:extLst>
           </p:cNvPr>
@@ -10607,7 +10607,7 @@
           <p:cNvPr id="23" name="">
             <a:extLst xmlns:a="http://schemas.openxmlformats.org/drawingml/2006/main">
               <a:ext uri="{FF2B5EF4-FFF2-40B4-BE49-F238E27FC236}">
-                <a16:creationId xmlns:a16="http://schemas.microsoft.com/office/drawing/2014/main" id="{91EEF14B-3875-4766-89E4-9568FA7A98E3}"/>
+                <a16:creationId xmlns:a16="http://schemas.microsoft.com/office/drawing/2014/main" id="{D844BD4E-D10E-470D-9D38-12A9FADA21C5}"/>
               </a:ext>
             </a:extLst>
           </p:cNvPr>
@@ -10657,7 +10657,7 @@
           <p:cNvPr id="24" name="">
             <a:extLst xmlns:a="http://schemas.openxmlformats.org/drawingml/2006/main">
               <a:ext uri="{FF2B5EF4-FFF2-40B4-BE49-F238E27FC236}">
-                <a16:creationId xmlns:a16="http://schemas.microsoft.com/office/drawing/2014/main" id="{45D52D0E-3463-46EB-89DD-C920ACE57B4C}"/>
+                <a16:creationId xmlns:a16="http://schemas.microsoft.com/office/drawing/2014/main" id="{0F02919E-9AB9-42F0-BC07-7FF0EDFDD936}"/>
               </a:ext>
             </a:extLst>
           </p:cNvPr>
@@ -10688,7 +10688,7 @@
           <p:cNvPr id="25" name="">
             <a:extLst xmlns:a="http://schemas.openxmlformats.org/drawingml/2006/main">
               <a:ext uri="{FF2B5EF4-FFF2-40B4-BE49-F238E27FC236}">
-                <a16:creationId xmlns:a16="http://schemas.microsoft.com/office/drawing/2014/main" id="{ED9B7FAB-62CC-481F-8E01-A4381EC86CFB}"/>
+                <a16:creationId xmlns:a16="http://schemas.microsoft.com/office/drawing/2014/main" id="{A27CCF22-EDEC-4817-9B9E-F478F657D4D0}"/>
               </a:ext>
             </a:extLst>
           </p:cNvPr>
@@ -10738,7 +10738,7 @@
           <p:cNvPr id="26" name="">
             <a:extLst xmlns:a="http://schemas.openxmlformats.org/drawingml/2006/main">
               <a:ext uri="{FF2B5EF4-FFF2-40B4-BE49-F238E27FC236}">
-                <a16:creationId xmlns:a16="http://schemas.microsoft.com/office/drawing/2014/main" id="{2D047CB0-630A-4A75-B35F-8F701C4D1A7F}"/>
+                <a16:creationId xmlns:a16="http://schemas.microsoft.com/office/drawing/2014/main" id="{0B9B4312-ECCA-48A2-A90B-32150967A3B6}"/>
               </a:ext>
             </a:extLst>
           </p:cNvPr>
@@ -10788,7 +10788,7 @@
           <p:cNvPr id="27" name="">
             <a:extLst xmlns:a="http://schemas.openxmlformats.org/drawingml/2006/main">
               <a:ext uri="{FF2B5EF4-FFF2-40B4-BE49-F238E27FC236}">
-                <a16:creationId xmlns:a16="http://schemas.microsoft.com/office/drawing/2014/main" id="{D87BDE9C-5253-4DE6-B2AF-65E2D64F359F}"/>
+                <a16:creationId xmlns:a16="http://schemas.microsoft.com/office/drawing/2014/main" id="{6D398EBA-3179-4E48-AAE9-82BEC7A7A4FF}"/>
               </a:ext>
             </a:extLst>
           </p:cNvPr>
@@ -10838,7 +10838,7 @@
           <p:cNvPr id="28" name="">
             <a:extLst xmlns:a="http://schemas.openxmlformats.org/drawingml/2006/main">
               <a:ext uri="{FF2B5EF4-FFF2-40B4-BE49-F238E27FC236}">
-                <a16:creationId xmlns:a16="http://schemas.microsoft.com/office/drawing/2014/main" id="{C3E90F67-0F09-4C6D-B13F-F61C91FFEB85}"/>
+                <a16:creationId xmlns:a16="http://schemas.microsoft.com/office/drawing/2014/main" id="{05D90C8B-1131-404C-8E30-082E1C0A6D1E}"/>
               </a:ext>
             </a:extLst>
           </p:cNvPr>
@@ -10869,7 +10869,7 @@
           <p:cNvPr id="29" name="">
             <a:extLst xmlns:a="http://schemas.openxmlformats.org/drawingml/2006/main">
               <a:ext uri="{FF2B5EF4-FFF2-40B4-BE49-F238E27FC236}">
-                <a16:creationId xmlns:a16="http://schemas.microsoft.com/office/drawing/2014/main" id="{12B30129-EA0E-4546-A131-F8A5BA9B8809}"/>
+                <a16:creationId xmlns:a16="http://schemas.microsoft.com/office/drawing/2014/main" id="{2A2E0BE4-BF9D-4F7E-B278-31366A6F8DFF}"/>
               </a:ext>
             </a:extLst>
           </p:cNvPr>
@@ -10919,7 +10919,7 @@
           <p:cNvPr id="30" name="">
             <a:extLst xmlns:a="http://schemas.openxmlformats.org/drawingml/2006/main">
               <a:ext uri="{FF2B5EF4-FFF2-40B4-BE49-F238E27FC236}">
-                <a16:creationId xmlns:a16="http://schemas.microsoft.com/office/drawing/2014/main" id="{85A3F77B-C633-4C51-B713-BCA7C8797F19}"/>
+                <a16:creationId xmlns:a16="http://schemas.microsoft.com/office/drawing/2014/main" id="{F1CD3AEE-C830-428F-AD58-4475A2228D20}"/>
               </a:ext>
             </a:extLst>
           </p:cNvPr>
@@ -10969,7 +10969,7 @@
           <p:cNvPr id="31" name="">
             <a:extLst xmlns:a="http://schemas.openxmlformats.org/drawingml/2006/main">
               <a:ext uri="{FF2B5EF4-FFF2-40B4-BE49-F238E27FC236}">
-                <a16:creationId xmlns:a16="http://schemas.microsoft.com/office/drawing/2014/main" id="{4170A410-B9CC-4E1A-8EC9-D72A85E4C5E1}"/>
+                <a16:creationId xmlns:a16="http://schemas.microsoft.com/office/drawing/2014/main" id="{F49FE681-C847-41A0-AB96-947103B1AD05}"/>
               </a:ext>
             </a:extLst>
           </p:cNvPr>
@@ -11019,7 +11019,7 @@
           <p:cNvPr id="32" name="">
             <a:extLst xmlns:a="http://schemas.openxmlformats.org/drawingml/2006/main">
               <a:ext uri="{FF2B5EF4-FFF2-40B4-BE49-F238E27FC236}">
-                <a16:creationId xmlns:a16="http://schemas.microsoft.com/office/drawing/2014/main" id="{B43E1588-A419-444C-891B-3FF2876F957B}"/>
+                <a16:creationId xmlns:a16="http://schemas.microsoft.com/office/drawing/2014/main" id="{CC9620A8-44B3-429D-86B9-BAC684117C73}"/>
               </a:ext>
             </a:extLst>
           </p:cNvPr>
@@ -11060,7 +11060,7 @@
           <p:cNvPr id="33" name="">
             <a:extLst xmlns:a="http://schemas.openxmlformats.org/drawingml/2006/main">
               <a:ext uri="{FF2B5EF4-FFF2-40B4-BE49-F238E27FC236}">
-                <a16:creationId xmlns:a16="http://schemas.microsoft.com/office/drawing/2014/main" id="{3F8F2DA3-4AD2-4139-B63D-4D617073EE0E}"/>
+                <a16:creationId xmlns:a16="http://schemas.microsoft.com/office/drawing/2014/main" id="{1D01C450-1132-41CC-86FB-F8E9D0D05CF9}"/>
               </a:ext>
             </a:extLst>
           </p:cNvPr>
@@ -11110,7 +11110,7 @@
           <p:cNvPr id="34" name="">
             <a:extLst xmlns:a="http://schemas.openxmlformats.org/drawingml/2006/main">
               <a:ext uri="{FF2B5EF4-FFF2-40B4-BE49-F238E27FC236}">
-                <a16:creationId xmlns:a16="http://schemas.microsoft.com/office/drawing/2014/main" id="{265A1C87-D465-470F-A9BC-88AFB68A6D6D}"/>
+                <a16:creationId xmlns:a16="http://schemas.microsoft.com/office/drawing/2014/main" id="{2EA2BE77-9907-49B3-9F0F-AD6502E2999C}"/>
               </a:ext>
             </a:extLst>
           </p:cNvPr>
@@ -11167,7 +11167,7 @@
         </p:xfrm>
         <a:graphic xmlns:a="http://schemas.openxmlformats.org/drawingml/2006/main">
           <a:graphicData uri="http://schemas.openxmlformats.org/drawingml/2006/chart">
-            <c:chart xmlns:r="http://schemas.openxmlformats.org/officeDocument/2006/relationships" xmlns:c="http://schemas.openxmlformats.org/drawingml/2006/chart" r:id="R215d745811014de6"/>
+            <c:chart xmlns:r="http://schemas.openxmlformats.org/officeDocument/2006/relationships" xmlns:c="http://schemas.openxmlformats.org/drawingml/2006/chart" r:id="R760f9e019f304246"/>
           </a:graphicData>
         </a:graphic>
       </p:graphicFrame>
@@ -11176,7 +11176,7 @@
           <p:cNvPr id="36" name="">
             <a:extLst xmlns:a="http://schemas.openxmlformats.org/drawingml/2006/main">
               <a:ext uri="{FF2B5EF4-FFF2-40B4-BE49-F238E27FC236}">
-                <a16:creationId xmlns:a16="http://schemas.microsoft.com/office/drawing/2014/main" id="{853AFCB5-A3BC-4C4D-9A82-961364702362}"/>
+                <a16:creationId xmlns:a16="http://schemas.microsoft.com/office/drawing/2014/main" id="{50332A18-9A32-4781-992A-3E32FF38D1F6}"/>
               </a:ext>
             </a:extLst>
           </p:cNvPr>
@@ -11207,7 +11207,7 @@
           <p:cNvPr id="37" name="">
             <a:extLst xmlns:a="http://schemas.openxmlformats.org/drawingml/2006/main">
               <a:ext uri="{FF2B5EF4-FFF2-40B4-BE49-F238E27FC236}">
-                <a16:creationId xmlns:a16="http://schemas.microsoft.com/office/drawing/2014/main" id="{ED432F75-EEA2-4411-AD13-DC2939DAB370}"/>
+                <a16:creationId xmlns:a16="http://schemas.microsoft.com/office/drawing/2014/main" id="{9503EC91-3A48-4645-B2BC-D603270D9237}"/>
               </a:ext>
             </a:extLst>
           </p:cNvPr>
@@ -11257,7 +11257,7 @@
           <p:cNvPr id="38" name="">
             <a:extLst xmlns:a="http://schemas.openxmlformats.org/drawingml/2006/main">
               <a:ext uri="{FF2B5EF4-FFF2-40B4-BE49-F238E27FC236}">
-                <a16:creationId xmlns:a16="http://schemas.microsoft.com/office/drawing/2014/main" id="{31CD0455-675E-48BC-9FF5-76294C97923D}"/>
+                <a16:creationId xmlns:a16="http://schemas.microsoft.com/office/drawing/2014/main" id="{9C3A8B27-D43F-4EA6-85E9-073315EC48EF}"/>
               </a:ext>
             </a:extLst>
           </p:cNvPr>
@@ -11307,7 +11307,7 @@
           <p:cNvPr id="39" name="">
             <a:extLst xmlns:a="http://schemas.openxmlformats.org/drawingml/2006/main">
               <a:ext uri="{FF2B5EF4-FFF2-40B4-BE49-F238E27FC236}">
-                <a16:creationId xmlns:a16="http://schemas.microsoft.com/office/drawing/2014/main" id="{8205791C-CF84-4F01-A781-6E12E758E5D2}"/>
+                <a16:creationId xmlns:a16="http://schemas.microsoft.com/office/drawing/2014/main" id="{56640566-76DD-4420-B08A-DE073B788638}"/>
               </a:ext>
             </a:extLst>
           </p:cNvPr>
@@ -11357,7 +11357,7 @@
           <p:cNvPr id="40" name="">
             <a:extLst xmlns:a="http://schemas.openxmlformats.org/drawingml/2006/main">
               <a:ext uri="{FF2B5EF4-FFF2-40B4-BE49-F238E27FC236}">
-                <a16:creationId xmlns:a16="http://schemas.microsoft.com/office/drawing/2014/main" id="{90CC6604-50AE-43B3-ABF7-FD5398095B0E}"/>
+                <a16:creationId xmlns:a16="http://schemas.microsoft.com/office/drawing/2014/main" id="{F596C221-205F-4B7C-AA55-3C4B4D77B120}"/>
               </a:ext>
             </a:extLst>
           </p:cNvPr>
@@ -11388,7 +11388,7 @@
           <p:cNvPr id="41" name="">
             <a:extLst xmlns:a="http://schemas.openxmlformats.org/drawingml/2006/main">
               <a:ext uri="{FF2B5EF4-FFF2-40B4-BE49-F238E27FC236}">
-                <a16:creationId xmlns:a16="http://schemas.microsoft.com/office/drawing/2014/main" id="{AF2D2FC6-A412-43A2-A7C4-E6FA45B6A7C1}"/>
+                <a16:creationId xmlns:a16="http://schemas.microsoft.com/office/drawing/2014/main" id="{0396120D-7458-4F29-A2D3-7C2D3AD97EDC}"/>
               </a:ext>
             </a:extLst>
           </p:cNvPr>
@@ -11438,7 +11438,7 @@
           <p:cNvPr id="42" name="">
             <a:extLst xmlns:a="http://schemas.openxmlformats.org/drawingml/2006/main">
               <a:ext uri="{FF2B5EF4-FFF2-40B4-BE49-F238E27FC236}">
-                <a16:creationId xmlns:a16="http://schemas.microsoft.com/office/drawing/2014/main" id="{AAB93B87-8BDB-4978-A7C2-1C45C3795496}"/>
+                <a16:creationId xmlns:a16="http://schemas.microsoft.com/office/drawing/2014/main" id="{4826EADF-BABA-4CA9-8FDD-ACC5E062F65F}"/>
               </a:ext>
             </a:extLst>
           </p:cNvPr>
@@ -11488,7 +11488,7 @@
           <p:cNvPr id="43" name="">
             <a:extLst xmlns:a="http://schemas.openxmlformats.org/drawingml/2006/main">
               <a:ext uri="{FF2B5EF4-FFF2-40B4-BE49-F238E27FC236}">
-                <a16:creationId xmlns:a16="http://schemas.microsoft.com/office/drawing/2014/main" id="{3EA0B9BD-3DC8-4171-BE45-5F9F8E29941F}"/>
+                <a16:creationId xmlns:a16="http://schemas.microsoft.com/office/drawing/2014/main" id="{5205B25A-2589-443C-A2DB-E228FBADF717}"/>
               </a:ext>
             </a:extLst>
           </p:cNvPr>
@@ -11538,7 +11538,7 @@
           <p:cNvPr id="44" name="">
             <a:extLst xmlns:a="http://schemas.openxmlformats.org/drawingml/2006/main">
               <a:ext uri="{FF2B5EF4-FFF2-40B4-BE49-F238E27FC236}">
-                <a16:creationId xmlns:a16="http://schemas.microsoft.com/office/drawing/2014/main" id="{6BEF55A9-F9B0-41DC-8A80-13A832AFF9D0}"/>
+                <a16:creationId xmlns:a16="http://schemas.microsoft.com/office/drawing/2014/main" id="{0C4EAAD6-C150-4FAA-B00C-A7DDC33443AB}"/>
               </a:ext>
             </a:extLst>
           </p:cNvPr>
@@ -11569,7 +11569,7 @@
           <p:cNvPr id="45" name="">
             <a:extLst xmlns:a="http://schemas.openxmlformats.org/drawingml/2006/main">
               <a:ext uri="{FF2B5EF4-FFF2-40B4-BE49-F238E27FC236}">
-                <a16:creationId xmlns:a16="http://schemas.microsoft.com/office/drawing/2014/main" id="{5AFA0B49-16B4-493B-AEF4-8ABA8A2B05C0}"/>
+                <a16:creationId xmlns:a16="http://schemas.microsoft.com/office/drawing/2014/main" id="{67281A2C-E027-4044-9955-1ADC7013FD74}"/>
               </a:ext>
             </a:extLst>
           </p:cNvPr>
@@ -11619,7 +11619,7 @@
           <p:cNvPr id="46" name="">
             <a:extLst xmlns:a="http://schemas.openxmlformats.org/drawingml/2006/main">
               <a:ext uri="{FF2B5EF4-FFF2-40B4-BE49-F238E27FC236}">
-                <a16:creationId xmlns:a16="http://schemas.microsoft.com/office/drawing/2014/main" id="{BB311192-9DF5-4EBD-B713-00906A3E8F14}"/>
+                <a16:creationId xmlns:a16="http://schemas.microsoft.com/office/drawing/2014/main" id="{DB9A1DC1-8F7E-4471-8CCD-89F7979AEFB4}"/>
               </a:ext>
             </a:extLst>
           </p:cNvPr>
@@ -11669,7 +11669,7 @@
           <p:cNvPr id="47" name="">
             <a:extLst xmlns:a="http://schemas.openxmlformats.org/drawingml/2006/main">
               <a:ext uri="{FF2B5EF4-FFF2-40B4-BE49-F238E27FC236}">
-                <a16:creationId xmlns:a16="http://schemas.microsoft.com/office/drawing/2014/main" id="{B013C4CC-DB05-435E-BF7B-E4282A97F6CC}"/>
+                <a16:creationId xmlns:a16="http://schemas.microsoft.com/office/drawing/2014/main" id="{B9197D5D-BE2D-4F7D-8E0B-70A210FB0991}"/>
               </a:ext>
             </a:extLst>
           </p:cNvPr>
@@ -11719,7 +11719,7 @@
           <p:cNvPr id="48" name="">
             <a:extLst xmlns:a="http://schemas.openxmlformats.org/drawingml/2006/main">
               <a:ext uri="{FF2B5EF4-FFF2-40B4-BE49-F238E27FC236}">
-                <a16:creationId xmlns:a16="http://schemas.microsoft.com/office/drawing/2014/main" id="{807EE615-8832-472E-9330-21CB85904E22}"/>
+                <a16:creationId xmlns:a16="http://schemas.microsoft.com/office/drawing/2014/main" id="{383996DB-7648-4757-B0E6-F310020B5127}"/>
               </a:ext>
             </a:extLst>
           </p:cNvPr>
@@ -11750,7 +11750,7 @@
           <p:cNvPr id="49" name="">
             <a:extLst xmlns:a="http://schemas.openxmlformats.org/drawingml/2006/main">
               <a:ext uri="{FF2B5EF4-FFF2-40B4-BE49-F238E27FC236}">
-                <a16:creationId xmlns:a16="http://schemas.microsoft.com/office/drawing/2014/main" id="{85C0D649-5A4B-4B70-80BD-404F0E44C71E}"/>
+                <a16:creationId xmlns:a16="http://schemas.microsoft.com/office/drawing/2014/main" id="{270A6039-0F69-40FB-A3E9-4BE03F8CE0E9}"/>
               </a:ext>
             </a:extLst>
           </p:cNvPr>
@@ -11800,7 +11800,7 @@
           <p:cNvPr id="50" name="">
             <a:extLst xmlns:a="http://schemas.openxmlformats.org/drawingml/2006/main">
               <a:ext uri="{FF2B5EF4-FFF2-40B4-BE49-F238E27FC236}">
-                <a16:creationId xmlns:a16="http://schemas.microsoft.com/office/drawing/2014/main" id="{B3326C85-2ED0-49DE-8E07-E1FF1706F804}"/>
+                <a16:creationId xmlns:a16="http://schemas.microsoft.com/office/drawing/2014/main" id="{B0FD363E-76C0-4FAE-85F0-4CFBFE5BF70B}"/>
               </a:ext>
             </a:extLst>
           </p:cNvPr>
@@ -11850,7 +11850,7 @@
           <p:cNvPr id="51" name="">
             <a:extLst xmlns:a="http://schemas.openxmlformats.org/drawingml/2006/main">
               <a:ext uri="{FF2B5EF4-FFF2-40B4-BE49-F238E27FC236}">
-                <a16:creationId xmlns:a16="http://schemas.microsoft.com/office/drawing/2014/main" id="{1E4462A3-0477-4BB8-BB79-AEB184F6640C}"/>
+                <a16:creationId xmlns:a16="http://schemas.microsoft.com/office/drawing/2014/main" id="{7D6B91F6-1BE3-4D26-880A-FC77793833AA}"/>
               </a:ext>
             </a:extLst>
           </p:cNvPr>
@@ -11900,7 +11900,7 @@
           <p:cNvPr id="52" name="">
             <a:extLst xmlns:a="http://schemas.openxmlformats.org/drawingml/2006/main">
               <a:ext uri="{FF2B5EF4-FFF2-40B4-BE49-F238E27FC236}">
-                <a16:creationId xmlns:a16="http://schemas.microsoft.com/office/drawing/2014/main" id="{A5C316B8-544C-4341-B86A-DD5B5BDEF34B}"/>
+                <a16:creationId xmlns:a16="http://schemas.microsoft.com/office/drawing/2014/main" id="{D7662B35-CD74-4D01-BF8B-8985EC39FCD5}"/>
               </a:ext>
             </a:extLst>
           </p:cNvPr>
@@ -11931,7 +11931,7 @@
           <p:cNvPr id="53" name="">
             <a:extLst xmlns:a="http://schemas.openxmlformats.org/drawingml/2006/main">
               <a:ext uri="{FF2B5EF4-FFF2-40B4-BE49-F238E27FC236}">
-                <a16:creationId xmlns:a16="http://schemas.microsoft.com/office/drawing/2014/main" id="{A28A5D03-4845-48E1-867F-202A2E658920}"/>
+                <a16:creationId xmlns:a16="http://schemas.microsoft.com/office/drawing/2014/main" id="{4E48ABAF-FDEF-42E3-9848-5907876ADDA0}"/>
               </a:ext>
             </a:extLst>
           </p:cNvPr>
@@ -11981,7 +11981,7 @@
           <p:cNvPr id="54" name="">
             <a:extLst xmlns:a="http://schemas.openxmlformats.org/drawingml/2006/main">
               <a:ext uri="{FF2B5EF4-FFF2-40B4-BE49-F238E27FC236}">
-                <a16:creationId xmlns:a16="http://schemas.microsoft.com/office/drawing/2014/main" id="{E2295697-44D5-4568-86BB-1103B72C4F90}"/>
+                <a16:creationId xmlns:a16="http://schemas.microsoft.com/office/drawing/2014/main" id="{3BD98025-2E46-4754-BC0C-9B6EDBEB3227}"/>
               </a:ext>
             </a:extLst>
           </p:cNvPr>
@@ -12031,7 +12031,7 @@
           <p:cNvPr id="55" name="">
             <a:extLst xmlns:a="http://schemas.openxmlformats.org/drawingml/2006/main">
               <a:ext uri="{FF2B5EF4-FFF2-40B4-BE49-F238E27FC236}">
-                <a16:creationId xmlns:a16="http://schemas.microsoft.com/office/drawing/2014/main" id="{D6F24CB4-8A3F-4D90-8CDF-B834486D9689}"/>
+                <a16:creationId xmlns:a16="http://schemas.microsoft.com/office/drawing/2014/main" id="{DADD9B59-3CF0-4949-A9C8-0D0CC0380DEC}"/>
               </a:ext>
             </a:extLst>
           </p:cNvPr>
@@ -12081,7 +12081,7 @@
           <p:cNvPr id="56" name="">
             <a:extLst xmlns:a="http://schemas.openxmlformats.org/drawingml/2006/main">
               <a:ext uri="{FF2B5EF4-FFF2-40B4-BE49-F238E27FC236}">
-                <a16:creationId xmlns:a16="http://schemas.microsoft.com/office/drawing/2014/main" id="{D5A0FF1A-73E5-45B7-AD8B-9C754AAE1B3C}"/>
+                <a16:creationId xmlns:a16="http://schemas.microsoft.com/office/drawing/2014/main" id="{FA3F9A20-110D-40E9-8AEC-704341346320}"/>
               </a:ext>
             </a:extLst>
           </p:cNvPr>
@@ -12112,7 +12112,7 @@
           <p:cNvPr id="57" name="">
             <a:extLst xmlns:a="http://schemas.openxmlformats.org/drawingml/2006/main">
               <a:ext uri="{FF2B5EF4-FFF2-40B4-BE49-F238E27FC236}">
-                <a16:creationId xmlns:a16="http://schemas.microsoft.com/office/drawing/2014/main" id="{400850E1-B36A-4961-A636-3AB11B15D176}"/>
+                <a16:creationId xmlns:a16="http://schemas.microsoft.com/office/drawing/2014/main" id="{DC09E156-7B66-4712-A331-015D1D3356AF}"/>
               </a:ext>
             </a:extLst>
           </p:cNvPr>
@@ -12162,7 +12162,7 @@
           <p:cNvPr id="58" name="">
             <a:extLst xmlns:a="http://schemas.openxmlformats.org/drawingml/2006/main">
               <a:ext uri="{FF2B5EF4-FFF2-40B4-BE49-F238E27FC236}">
-                <a16:creationId xmlns:a16="http://schemas.microsoft.com/office/drawing/2014/main" id="{A54FC0B5-F2DA-4FEC-8B6E-899144738B77}"/>
+                <a16:creationId xmlns:a16="http://schemas.microsoft.com/office/drawing/2014/main" id="{4966216B-31B0-46CA-9CCD-96D2C882D8F8}"/>
               </a:ext>
             </a:extLst>
           </p:cNvPr>
@@ -12212,7 +12212,7 @@
           <p:cNvPr id="59" name="">
             <a:extLst xmlns:a="http://schemas.openxmlformats.org/drawingml/2006/main">
               <a:ext uri="{FF2B5EF4-FFF2-40B4-BE49-F238E27FC236}">
-                <a16:creationId xmlns:a16="http://schemas.microsoft.com/office/drawing/2014/main" id="{E47A9D26-2E91-4FE5-9CBA-836438BAE2C1}"/>
+                <a16:creationId xmlns:a16="http://schemas.microsoft.com/office/drawing/2014/main" id="{FAC3EF85-E0B5-4ED8-B241-D7E72D3438A8}"/>
               </a:ext>
             </a:extLst>
           </p:cNvPr>
@@ -12262,7 +12262,7 @@
           <p:cNvPr id="60" name="">
             <a:extLst xmlns:a="http://schemas.openxmlformats.org/drawingml/2006/main">
               <a:ext uri="{FF2B5EF4-FFF2-40B4-BE49-F238E27FC236}">
-                <a16:creationId xmlns:a16="http://schemas.microsoft.com/office/drawing/2014/main" id="{F587B1CC-A7EF-4AE5-A346-0693626AC246}"/>
+                <a16:creationId xmlns:a16="http://schemas.microsoft.com/office/drawing/2014/main" id="{682706E9-D860-4087-AB4E-07C2002588AD}"/>
               </a:ext>
             </a:extLst>
           </p:cNvPr>
@@ -12303,7 +12303,7 @@
           <p:cNvPr id="61" name="">
             <a:extLst xmlns:a="http://schemas.openxmlformats.org/drawingml/2006/main">
               <a:ext uri="{FF2B5EF4-FFF2-40B4-BE49-F238E27FC236}">
-                <a16:creationId xmlns:a16="http://schemas.microsoft.com/office/drawing/2014/main" id="{1A15C5B3-075F-454C-8295-B385D0D98170}"/>
+                <a16:creationId xmlns:a16="http://schemas.microsoft.com/office/drawing/2014/main" id="{15E695A6-BB8E-453A-BBC0-F0EA8CC8B756}"/>
               </a:ext>
             </a:extLst>
           </p:cNvPr>
@@ -12353,7 +12353,7 @@
           <p:cNvPr id="62" name="">
             <a:extLst xmlns:a="http://schemas.openxmlformats.org/drawingml/2006/main">
               <a:ext uri="{FF2B5EF4-FFF2-40B4-BE49-F238E27FC236}">
-                <a16:creationId xmlns:a16="http://schemas.microsoft.com/office/drawing/2014/main" id="{78BB1554-78A7-49FF-B9C1-E35FEE5032C0}"/>
+                <a16:creationId xmlns:a16="http://schemas.microsoft.com/office/drawing/2014/main" id="{BD77B80D-F102-4704-ABDC-364359C6F6C1}"/>
               </a:ext>
             </a:extLst>
           </p:cNvPr>
@@ -12410,7 +12410,7 @@
         </p:xfrm>
         <a:graphic xmlns:a="http://schemas.openxmlformats.org/drawingml/2006/main">
           <a:graphicData uri="http://schemas.openxmlformats.org/drawingml/2006/chart">
-            <c:chart xmlns:r="http://schemas.openxmlformats.org/officeDocument/2006/relationships" xmlns:c="http://schemas.openxmlformats.org/drawingml/2006/chart" r:id="R4b7852b342ac4e29"/>
+            <c:chart xmlns:r="http://schemas.openxmlformats.org/officeDocument/2006/relationships" xmlns:c="http://schemas.openxmlformats.org/drawingml/2006/chart" r:id="R664306526acc4ead"/>
           </a:graphicData>
         </a:graphic>
       </p:graphicFrame>
@@ -12419,7 +12419,7 @@
           <p:cNvPr id="64" name="">
             <a:extLst xmlns:a="http://schemas.openxmlformats.org/drawingml/2006/main">
               <a:ext uri="{FF2B5EF4-FFF2-40B4-BE49-F238E27FC236}">
-                <a16:creationId xmlns:a16="http://schemas.microsoft.com/office/drawing/2014/main" id="{3BD7A2A4-4E70-4C42-AE2E-9E1378EB2E20}"/>
+                <a16:creationId xmlns:a16="http://schemas.microsoft.com/office/drawing/2014/main" id="{4D16E8CA-3281-489B-B0D2-4F611FF8C338}"/>
               </a:ext>
             </a:extLst>
           </p:cNvPr>
@@ -12450,7 +12450,7 @@
           <p:cNvPr id="65" name="">
             <a:extLst xmlns:a="http://schemas.openxmlformats.org/drawingml/2006/main">
               <a:ext uri="{FF2B5EF4-FFF2-40B4-BE49-F238E27FC236}">
-                <a16:creationId xmlns:a16="http://schemas.microsoft.com/office/drawing/2014/main" id="{928C44FB-B789-4F7B-8715-E9897E699177}"/>
+                <a16:creationId xmlns:a16="http://schemas.microsoft.com/office/drawing/2014/main" id="{E4D3F6EB-AB00-4C76-9B06-432FF09C7656}"/>
               </a:ext>
             </a:extLst>
           </p:cNvPr>
@@ -12500,7 +12500,7 @@
           <p:cNvPr id="66" name="">
             <a:extLst xmlns:a="http://schemas.openxmlformats.org/drawingml/2006/main">
               <a:ext uri="{FF2B5EF4-FFF2-40B4-BE49-F238E27FC236}">
-                <a16:creationId xmlns:a16="http://schemas.microsoft.com/office/drawing/2014/main" id="{A98EC2D1-7168-414D-A6F8-418B3C265A70}"/>
+                <a16:creationId xmlns:a16="http://schemas.microsoft.com/office/drawing/2014/main" id="{CB8C5F54-4346-43BF-AE8D-7247F8C8EFCF}"/>
               </a:ext>
             </a:extLst>
           </p:cNvPr>
@@ -12550,7 +12550,7 @@
           <p:cNvPr id="67" name="">
             <a:extLst xmlns:a="http://schemas.openxmlformats.org/drawingml/2006/main">
               <a:ext uri="{FF2B5EF4-FFF2-40B4-BE49-F238E27FC236}">
-                <a16:creationId xmlns:a16="http://schemas.microsoft.com/office/drawing/2014/main" id="{E8623285-CC50-4897-A91D-71A8E210E76D}"/>
+                <a16:creationId xmlns:a16="http://schemas.microsoft.com/office/drawing/2014/main" id="{99E6BAFE-3F3E-4D8E-B6F6-F76693E633C5}"/>
               </a:ext>
             </a:extLst>
           </p:cNvPr>
@@ -12600,7 +12600,7 @@
           <p:cNvPr id="68" name="">
             <a:extLst xmlns:a="http://schemas.openxmlformats.org/drawingml/2006/main">
               <a:ext uri="{FF2B5EF4-FFF2-40B4-BE49-F238E27FC236}">
-                <a16:creationId xmlns:a16="http://schemas.microsoft.com/office/drawing/2014/main" id="{039CA2E4-3CCD-41E9-BFFF-D4C23C0868CE}"/>
+                <a16:creationId xmlns:a16="http://schemas.microsoft.com/office/drawing/2014/main" id="{76531A41-34EB-4DA0-B9D0-E540A965408E}"/>
               </a:ext>
             </a:extLst>
           </p:cNvPr>
@@ -12631,7 +12631,7 @@
           <p:cNvPr id="69" name="">
             <a:extLst xmlns:a="http://schemas.openxmlformats.org/drawingml/2006/main">
               <a:ext uri="{FF2B5EF4-FFF2-40B4-BE49-F238E27FC236}">
-                <a16:creationId xmlns:a16="http://schemas.microsoft.com/office/drawing/2014/main" id="{20216868-CCBB-4E66-86B8-4942D364842C}"/>
+                <a16:creationId xmlns:a16="http://schemas.microsoft.com/office/drawing/2014/main" id="{2F0919A9-F597-451B-B077-8482ED307675}"/>
               </a:ext>
             </a:extLst>
           </p:cNvPr>
@@ -12681,7 +12681,7 @@
           <p:cNvPr id="70" name="">
             <a:extLst xmlns:a="http://schemas.openxmlformats.org/drawingml/2006/main">
               <a:ext uri="{FF2B5EF4-FFF2-40B4-BE49-F238E27FC236}">
-                <a16:creationId xmlns:a16="http://schemas.microsoft.com/office/drawing/2014/main" id="{3F0D4F1E-1E24-4A78-9A7A-952F3112086C}"/>
+                <a16:creationId xmlns:a16="http://schemas.microsoft.com/office/drawing/2014/main" id="{D79F22EA-ABF5-45C1-BDDB-AE44A31F2FD8}"/>
               </a:ext>
             </a:extLst>
           </p:cNvPr>
@@ -12731,7 +12731,7 @@
           <p:cNvPr id="71" name="">
             <a:extLst xmlns:a="http://schemas.openxmlformats.org/drawingml/2006/main">
               <a:ext uri="{FF2B5EF4-FFF2-40B4-BE49-F238E27FC236}">
-                <a16:creationId xmlns:a16="http://schemas.microsoft.com/office/drawing/2014/main" id="{690E079D-6D89-444C-B3B5-ABC6E160AC50}"/>
+                <a16:creationId xmlns:a16="http://schemas.microsoft.com/office/drawing/2014/main" id="{7BD333DC-7BDA-447F-BC89-28FD14704FC6}"/>
               </a:ext>
             </a:extLst>
           </p:cNvPr>
@@ -12781,7 +12781,7 @@
           <p:cNvPr id="72" name="">
             <a:extLst xmlns:a="http://schemas.openxmlformats.org/drawingml/2006/main">
               <a:ext uri="{FF2B5EF4-FFF2-40B4-BE49-F238E27FC236}">
-                <a16:creationId xmlns:a16="http://schemas.microsoft.com/office/drawing/2014/main" id="{97E7443A-9212-4D19-9BB1-2861EACCB0B6}"/>
+                <a16:creationId xmlns:a16="http://schemas.microsoft.com/office/drawing/2014/main" id="{F90A40ED-6909-42A7-87A0-F2EC6E372C77}"/>
               </a:ext>
             </a:extLst>
           </p:cNvPr>
@@ -12812,7 +12812,7 @@
           <p:cNvPr id="73" name="">
             <a:extLst xmlns:a="http://schemas.openxmlformats.org/drawingml/2006/main">
               <a:ext uri="{FF2B5EF4-FFF2-40B4-BE49-F238E27FC236}">
-                <a16:creationId xmlns:a16="http://schemas.microsoft.com/office/drawing/2014/main" id="{4A091701-FB08-4F59-868D-9912E4CDB5E9}"/>
+                <a16:creationId xmlns:a16="http://schemas.microsoft.com/office/drawing/2014/main" id="{25991AF3-88E2-4226-830F-FC891CA89E31}"/>
               </a:ext>
             </a:extLst>
           </p:cNvPr>
@@ -12862,7 +12862,7 @@
           <p:cNvPr id="74" name="">
             <a:extLst xmlns:a="http://schemas.openxmlformats.org/drawingml/2006/main">
               <a:ext uri="{FF2B5EF4-FFF2-40B4-BE49-F238E27FC236}">
-                <a16:creationId xmlns:a16="http://schemas.microsoft.com/office/drawing/2014/main" id="{CA89B044-6526-4B9C-8CEB-780770C9DECE}"/>
+                <a16:creationId xmlns:a16="http://schemas.microsoft.com/office/drawing/2014/main" id="{B4A759A2-CEA0-4755-8F01-B34E180F9218}"/>
               </a:ext>
             </a:extLst>
           </p:cNvPr>
@@ -12912,7 +12912,7 @@
           <p:cNvPr id="75" name="">
             <a:extLst xmlns:a="http://schemas.openxmlformats.org/drawingml/2006/main">
               <a:ext uri="{FF2B5EF4-FFF2-40B4-BE49-F238E27FC236}">
-                <a16:creationId xmlns:a16="http://schemas.microsoft.com/office/drawing/2014/main" id="{71899820-1B11-4D35-B34A-08507E705139}"/>
+                <a16:creationId xmlns:a16="http://schemas.microsoft.com/office/drawing/2014/main" id="{A6279D1A-606B-4435-8AB0-C1FA191A2FCD}"/>
               </a:ext>
             </a:extLst>
           </p:cNvPr>
@@ -12962,7 +12962,7 @@
           <p:cNvPr id="76" name="">
             <a:extLst xmlns:a="http://schemas.openxmlformats.org/drawingml/2006/main">
               <a:ext uri="{FF2B5EF4-FFF2-40B4-BE49-F238E27FC236}">
-                <a16:creationId xmlns:a16="http://schemas.microsoft.com/office/drawing/2014/main" id="{F0D6D007-0332-47C1-940E-E871E45E91B0}"/>
+                <a16:creationId xmlns:a16="http://schemas.microsoft.com/office/drawing/2014/main" id="{5921843D-4D7F-4425-9710-6EFDBAFFB497}"/>
               </a:ext>
             </a:extLst>
           </p:cNvPr>
@@ -12993,7 +12993,7 @@
           <p:cNvPr id="77" name="">
             <a:extLst xmlns:a="http://schemas.openxmlformats.org/drawingml/2006/main">
               <a:ext uri="{FF2B5EF4-FFF2-40B4-BE49-F238E27FC236}">
-                <a16:creationId xmlns:a16="http://schemas.microsoft.com/office/drawing/2014/main" id="{9861F2B9-8D60-4311-9B5D-AEB345E188F0}"/>
+                <a16:creationId xmlns:a16="http://schemas.microsoft.com/office/drawing/2014/main" id="{9347CFDA-2918-4CCA-AEA9-2E535B18431F}"/>
               </a:ext>
             </a:extLst>
           </p:cNvPr>
@@ -13043,7 +13043,7 @@
           <p:cNvPr id="78" name="">
             <a:extLst xmlns:a="http://schemas.openxmlformats.org/drawingml/2006/main">
               <a:ext uri="{FF2B5EF4-FFF2-40B4-BE49-F238E27FC236}">
-                <a16:creationId xmlns:a16="http://schemas.microsoft.com/office/drawing/2014/main" id="{D37798C2-6875-4A67-908D-22D1807A8561}"/>
+                <a16:creationId xmlns:a16="http://schemas.microsoft.com/office/drawing/2014/main" id="{EE78B56D-9962-4F4E-96C0-EFB9EDFD1BC6}"/>
               </a:ext>
             </a:extLst>
           </p:cNvPr>
@@ -13093,7 +13093,7 @@
           <p:cNvPr id="79" name="">
             <a:extLst xmlns:a="http://schemas.openxmlformats.org/drawingml/2006/main">
               <a:ext uri="{FF2B5EF4-FFF2-40B4-BE49-F238E27FC236}">
-                <a16:creationId xmlns:a16="http://schemas.microsoft.com/office/drawing/2014/main" id="{4FE33A7E-A9E9-490A-9DC8-D6272B87DA8C}"/>
+                <a16:creationId xmlns:a16="http://schemas.microsoft.com/office/drawing/2014/main" id="{60467FC8-7BFE-4F98-8AC7-65B7E1D94CC5}"/>
               </a:ext>
             </a:extLst>
           </p:cNvPr>
@@ -13143,7 +13143,7 @@
           <p:cNvPr id="80" name="">
             <a:extLst xmlns:a="http://schemas.openxmlformats.org/drawingml/2006/main">
               <a:ext uri="{FF2B5EF4-FFF2-40B4-BE49-F238E27FC236}">
-                <a16:creationId xmlns:a16="http://schemas.microsoft.com/office/drawing/2014/main" id="{8B31BAD6-E31F-4005-9323-C09D7FF18DB1}"/>
+                <a16:creationId xmlns:a16="http://schemas.microsoft.com/office/drawing/2014/main" id="{E4C47C39-C9D6-4713-A51B-11C323DC9A25}"/>
               </a:ext>
             </a:extLst>
           </p:cNvPr>
@@ -13174,7 +13174,7 @@
           <p:cNvPr id="81" name="">
             <a:extLst xmlns:a="http://schemas.openxmlformats.org/drawingml/2006/main">
               <a:ext uri="{FF2B5EF4-FFF2-40B4-BE49-F238E27FC236}">
-                <a16:creationId xmlns:a16="http://schemas.microsoft.com/office/drawing/2014/main" id="{378BE3A5-E453-4190-ABD7-CCAF67DD0778}"/>
+                <a16:creationId xmlns:a16="http://schemas.microsoft.com/office/drawing/2014/main" id="{CBA36B28-2668-49CF-A75B-ADF636FB2E91}"/>
               </a:ext>
             </a:extLst>
           </p:cNvPr>
@@ -13224,7 +13224,7 @@
           <p:cNvPr id="82" name="">
             <a:extLst xmlns:a="http://schemas.openxmlformats.org/drawingml/2006/main">
               <a:ext uri="{FF2B5EF4-FFF2-40B4-BE49-F238E27FC236}">
-                <a16:creationId xmlns:a16="http://schemas.microsoft.com/office/drawing/2014/main" id="{18B283B9-81D6-462D-9475-8DAE6017CADF}"/>
+                <a16:creationId xmlns:a16="http://schemas.microsoft.com/office/drawing/2014/main" id="{85999A43-CECF-4639-8063-1025D2C3D016}"/>
               </a:ext>
             </a:extLst>
           </p:cNvPr>
@@ -13274,7 +13274,7 @@
           <p:cNvPr id="83" name="">
             <a:extLst xmlns:a="http://schemas.openxmlformats.org/drawingml/2006/main">
               <a:ext uri="{FF2B5EF4-FFF2-40B4-BE49-F238E27FC236}">
-                <a16:creationId xmlns:a16="http://schemas.microsoft.com/office/drawing/2014/main" id="{DF0E64F4-A3B7-4356-9299-F6D0167D78F2}"/>
+                <a16:creationId xmlns:a16="http://schemas.microsoft.com/office/drawing/2014/main" id="{AC397793-546C-4B93-A368-DF3AAB6EE978}"/>
               </a:ext>
             </a:extLst>
           </p:cNvPr>
@@ -13324,7 +13324,7 @@
           <p:cNvPr id="84" name="">
             <a:extLst xmlns:a="http://schemas.openxmlformats.org/drawingml/2006/main">
               <a:ext uri="{FF2B5EF4-FFF2-40B4-BE49-F238E27FC236}">
-                <a16:creationId xmlns:a16="http://schemas.microsoft.com/office/drawing/2014/main" id="{02141BB3-BBB9-4B2C-AB62-78C6B1A4DBC5}"/>
+                <a16:creationId xmlns:a16="http://schemas.microsoft.com/office/drawing/2014/main" id="{091800F6-F4FE-4FA1-9AA2-8D3D37D52D60}"/>
               </a:ext>
             </a:extLst>
           </p:cNvPr>
@@ -13355,7 +13355,7 @@
           <p:cNvPr id="85" name="">
             <a:extLst xmlns:a="http://schemas.openxmlformats.org/drawingml/2006/main">
               <a:ext uri="{FF2B5EF4-FFF2-40B4-BE49-F238E27FC236}">
-                <a16:creationId xmlns:a16="http://schemas.microsoft.com/office/drawing/2014/main" id="{ECC7880B-01F1-483F-90BC-B9D0B032DA3B}"/>
+                <a16:creationId xmlns:a16="http://schemas.microsoft.com/office/drawing/2014/main" id="{6CB77906-0E2F-4BD3-8DB5-1754E630EE9C}"/>
               </a:ext>
             </a:extLst>
           </p:cNvPr>
@@ -13405,7 +13405,7 @@
           <p:cNvPr id="86" name="">
             <a:extLst xmlns:a="http://schemas.openxmlformats.org/drawingml/2006/main">
               <a:ext uri="{FF2B5EF4-FFF2-40B4-BE49-F238E27FC236}">
-                <a16:creationId xmlns:a16="http://schemas.microsoft.com/office/drawing/2014/main" id="{471FB0EE-D696-4FFE-8786-D6E5660C8C27}"/>
+                <a16:creationId xmlns:a16="http://schemas.microsoft.com/office/drawing/2014/main" id="{8A9F25D3-2308-4B1A-ADF0-20A100C679B0}"/>
               </a:ext>
             </a:extLst>
           </p:cNvPr>
@@ -13455,7 +13455,7 @@
           <p:cNvPr id="87" name="">
             <a:extLst xmlns:a="http://schemas.openxmlformats.org/drawingml/2006/main">
               <a:ext uri="{FF2B5EF4-FFF2-40B4-BE49-F238E27FC236}">
-                <a16:creationId xmlns:a16="http://schemas.microsoft.com/office/drawing/2014/main" id="{AA8D1B71-BC39-451B-AAA9-5EC61C441025}"/>
+                <a16:creationId xmlns:a16="http://schemas.microsoft.com/office/drawing/2014/main" id="{D3CCEE5A-33E7-413E-908B-A4CE1346BD27}"/>
               </a:ext>
             </a:extLst>
           </p:cNvPr>
@@ -13505,7 +13505,7 @@
           <p:cNvPr id="88" name="">
             <a:extLst xmlns:a="http://schemas.openxmlformats.org/drawingml/2006/main">
               <a:ext uri="{FF2B5EF4-FFF2-40B4-BE49-F238E27FC236}">
-                <a16:creationId xmlns:a16="http://schemas.microsoft.com/office/drawing/2014/main" id="{6336D04C-4559-450E-BCEA-FE2B0B42540F}"/>
+                <a16:creationId xmlns:a16="http://schemas.microsoft.com/office/drawing/2014/main" id="{47E595F3-529E-402E-A302-6F39A4FB3356}"/>
               </a:ext>
             </a:extLst>
           </p:cNvPr>
@@ -13546,7 +13546,7 @@
           <p:cNvPr id="89" name="">
             <a:extLst xmlns:a="http://schemas.openxmlformats.org/drawingml/2006/main">
               <a:ext uri="{FF2B5EF4-FFF2-40B4-BE49-F238E27FC236}">
-                <a16:creationId xmlns:a16="http://schemas.microsoft.com/office/drawing/2014/main" id="{568CC6BD-5526-40E8-A6CF-B350044970C6}"/>
+                <a16:creationId xmlns:a16="http://schemas.microsoft.com/office/drawing/2014/main" id="{295EFC63-CFF3-412F-9A89-575154D7D7DE}"/>
               </a:ext>
             </a:extLst>
           </p:cNvPr>
@@ -13596,7 +13596,7 @@
           <p:cNvPr id="90" name="">
             <a:extLst xmlns:a="http://schemas.openxmlformats.org/drawingml/2006/main">
               <a:ext uri="{FF2B5EF4-FFF2-40B4-BE49-F238E27FC236}">
-                <a16:creationId xmlns:a16="http://schemas.microsoft.com/office/drawing/2014/main" id="{EF1C032E-6DA5-427E-9FDC-0E5BF23FBE7D}"/>
+                <a16:creationId xmlns:a16="http://schemas.microsoft.com/office/drawing/2014/main" id="{E32F5F9D-ACF7-4217-AC5C-6A956193DD19}"/>
               </a:ext>
             </a:extLst>
           </p:cNvPr>
@@ -13653,7 +13653,7 @@
         </p:xfrm>
         <a:graphic xmlns:a="http://schemas.openxmlformats.org/drawingml/2006/main">
           <a:graphicData uri="http://schemas.openxmlformats.org/drawingml/2006/chart">
-            <c:chart xmlns:r="http://schemas.openxmlformats.org/officeDocument/2006/relationships" xmlns:c="http://schemas.openxmlformats.org/drawingml/2006/chart" r:id="R7c6126e6200749a4"/>
+            <c:chart xmlns:r="http://schemas.openxmlformats.org/officeDocument/2006/relationships" xmlns:c="http://schemas.openxmlformats.org/drawingml/2006/chart" r:id="Ra33c3b8b4aa04489"/>
           </a:graphicData>
         </a:graphic>
       </p:graphicFrame>
@@ -13662,7 +13662,7 @@
           <p:cNvPr id="92" name="">
             <a:extLst xmlns:a="http://schemas.openxmlformats.org/drawingml/2006/main">
               <a:ext uri="{FF2B5EF4-FFF2-40B4-BE49-F238E27FC236}">
-                <a16:creationId xmlns:a16="http://schemas.microsoft.com/office/drawing/2014/main" id="{3FA6FE8A-F089-41DE-BEF0-3F77DF2376A6}"/>
+                <a16:creationId xmlns:a16="http://schemas.microsoft.com/office/drawing/2014/main" id="{2DDA5959-2B5B-403F-92D5-CC52782C327A}"/>
               </a:ext>
             </a:extLst>
           </p:cNvPr>
@@ -13693,7 +13693,7 @@
           <p:cNvPr id="93" name="">
             <a:extLst xmlns:a="http://schemas.openxmlformats.org/drawingml/2006/main">
               <a:ext uri="{FF2B5EF4-FFF2-40B4-BE49-F238E27FC236}">
-                <a16:creationId xmlns:a16="http://schemas.microsoft.com/office/drawing/2014/main" id="{81666D90-CDB6-463B-A576-15AFABE97679}"/>
+                <a16:creationId xmlns:a16="http://schemas.microsoft.com/office/drawing/2014/main" id="{4F757F46-380C-414F-91C3-83DB14F46286}"/>
               </a:ext>
             </a:extLst>
           </p:cNvPr>
@@ -13743,7 +13743,7 @@
           <p:cNvPr id="94" name="">
             <a:extLst xmlns:a="http://schemas.openxmlformats.org/drawingml/2006/main">
               <a:ext uri="{FF2B5EF4-FFF2-40B4-BE49-F238E27FC236}">
-                <a16:creationId xmlns:a16="http://schemas.microsoft.com/office/drawing/2014/main" id="{32B92485-EBDB-4AA1-A422-C20B0054E6C9}"/>
+                <a16:creationId xmlns:a16="http://schemas.microsoft.com/office/drawing/2014/main" id="{8495214A-B872-4F69-AAB0-DEF7BA4FD6C9}"/>
               </a:ext>
             </a:extLst>
           </p:cNvPr>
@@ -13793,7 +13793,7 @@
           <p:cNvPr id="95" name="">
             <a:extLst xmlns:a="http://schemas.openxmlformats.org/drawingml/2006/main">
               <a:ext uri="{FF2B5EF4-FFF2-40B4-BE49-F238E27FC236}">
-                <a16:creationId xmlns:a16="http://schemas.microsoft.com/office/drawing/2014/main" id="{9E965E17-61F1-4B86-B724-5939A6B9127D}"/>
+                <a16:creationId xmlns:a16="http://schemas.microsoft.com/office/drawing/2014/main" id="{45915756-2EE2-4980-8AA5-C80FDFE76E54}"/>
               </a:ext>
             </a:extLst>
           </p:cNvPr>
@@ -13843,7 +13843,7 @@
           <p:cNvPr id="96" name="">
             <a:extLst xmlns:a="http://schemas.openxmlformats.org/drawingml/2006/main">
               <a:ext uri="{FF2B5EF4-FFF2-40B4-BE49-F238E27FC236}">
-                <a16:creationId xmlns:a16="http://schemas.microsoft.com/office/drawing/2014/main" id="{2FBF1423-0449-4D3B-B3BC-8D010B00FCA4}"/>
+                <a16:creationId xmlns:a16="http://schemas.microsoft.com/office/drawing/2014/main" id="{4BE757DB-8DE0-48E7-B501-544E27DE63E3}"/>
               </a:ext>
             </a:extLst>
           </p:cNvPr>
@@ -13874,7 +13874,7 @@
           <p:cNvPr id="97" name="">
             <a:extLst xmlns:a="http://schemas.openxmlformats.org/drawingml/2006/main">
               <a:ext uri="{FF2B5EF4-FFF2-40B4-BE49-F238E27FC236}">
-                <a16:creationId xmlns:a16="http://schemas.microsoft.com/office/drawing/2014/main" id="{C89CBD59-A8A8-4830-883F-E47DA50EFB1C}"/>
+                <a16:creationId xmlns:a16="http://schemas.microsoft.com/office/drawing/2014/main" id="{A48B68D0-607B-4A9C-91E8-7DD794C9513E}"/>
               </a:ext>
             </a:extLst>
           </p:cNvPr>
@@ -13924,7 +13924,7 @@
           <p:cNvPr id="98" name="">
             <a:extLst xmlns:a="http://schemas.openxmlformats.org/drawingml/2006/main">
               <a:ext uri="{FF2B5EF4-FFF2-40B4-BE49-F238E27FC236}">
-                <a16:creationId xmlns:a16="http://schemas.microsoft.com/office/drawing/2014/main" id="{10F7CF03-40D6-468D-AB26-FEE4ABA99022}"/>
+                <a16:creationId xmlns:a16="http://schemas.microsoft.com/office/drawing/2014/main" id="{F6F11A74-490F-4A78-874F-911962DA0B9D}"/>
               </a:ext>
             </a:extLst>
           </p:cNvPr>
@@ -13974,7 +13974,7 @@
           <p:cNvPr id="99" name="">
             <a:extLst xmlns:a="http://schemas.openxmlformats.org/drawingml/2006/main">
               <a:ext uri="{FF2B5EF4-FFF2-40B4-BE49-F238E27FC236}">
-                <a16:creationId xmlns:a16="http://schemas.microsoft.com/office/drawing/2014/main" id="{688D4FEE-4953-43BB-BEA3-9C14CED55385}"/>
+                <a16:creationId xmlns:a16="http://schemas.microsoft.com/office/drawing/2014/main" id="{E954F591-DA43-4425-9F5C-9F0E5AD77C26}"/>
               </a:ext>
             </a:extLst>
           </p:cNvPr>
@@ -14024,7 +14024,7 @@
           <p:cNvPr id="100" name="">
             <a:extLst xmlns:a="http://schemas.openxmlformats.org/drawingml/2006/main">
               <a:ext uri="{FF2B5EF4-FFF2-40B4-BE49-F238E27FC236}">
-                <a16:creationId xmlns:a16="http://schemas.microsoft.com/office/drawing/2014/main" id="{CDE60D8A-7520-46D9-8D9C-AF949449FBC3}"/>
+                <a16:creationId xmlns:a16="http://schemas.microsoft.com/office/drawing/2014/main" id="{E0FD21F3-2786-470F-9E82-579FF1AF84EA}"/>
               </a:ext>
             </a:extLst>
           </p:cNvPr>
@@ -14055,7 +14055,7 @@
           <p:cNvPr id="101" name="">
             <a:extLst xmlns:a="http://schemas.openxmlformats.org/drawingml/2006/main">
               <a:ext uri="{FF2B5EF4-FFF2-40B4-BE49-F238E27FC236}">
-                <a16:creationId xmlns:a16="http://schemas.microsoft.com/office/drawing/2014/main" id="{703731F7-2D0F-47E9-A065-DC8D192B6853}"/>
+                <a16:creationId xmlns:a16="http://schemas.microsoft.com/office/drawing/2014/main" id="{B715776B-8F22-4C14-9758-306BC578ABB5}"/>
               </a:ext>
             </a:extLst>
           </p:cNvPr>
@@ -14105,7 +14105,7 @@
           <p:cNvPr id="102" name="">
             <a:extLst xmlns:a="http://schemas.openxmlformats.org/drawingml/2006/main">
               <a:ext uri="{FF2B5EF4-FFF2-40B4-BE49-F238E27FC236}">
-                <a16:creationId xmlns:a16="http://schemas.microsoft.com/office/drawing/2014/main" id="{41D37EDB-2D57-4BB5-8132-BD4451494944}"/>
+                <a16:creationId xmlns:a16="http://schemas.microsoft.com/office/drawing/2014/main" id="{486C4FE9-BFFD-48A5-90CC-88ECA5E65E68}"/>
               </a:ext>
             </a:extLst>
           </p:cNvPr>
@@ -14155,7 +14155,7 @@
           <p:cNvPr id="103" name="">
             <a:extLst xmlns:a="http://schemas.openxmlformats.org/drawingml/2006/main">
               <a:ext uri="{FF2B5EF4-FFF2-40B4-BE49-F238E27FC236}">
-                <a16:creationId xmlns:a16="http://schemas.microsoft.com/office/drawing/2014/main" id="{34906AAB-7530-40F9-B67C-54F54B7FA56A}"/>
+                <a16:creationId xmlns:a16="http://schemas.microsoft.com/office/drawing/2014/main" id="{C717B6BE-4023-4DB2-B826-5182EF6CA2E4}"/>
               </a:ext>
             </a:extLst>
           </p:cNvPr>
@@ -14205,7 +14205,7 @@
           <p:cNvPr id="104" name="">
             <a:extLst xmlns:a="http://schemas.openxmlformats.org/drawingml/2006/main">
               <a:ext uri="{FF2B5EF4-FFF2-40B4-BE49-F238E27FC236}">
-                <a16:creationId xmlns:a16="http://schemas.microsoft.com/office/drawing/2014/main" id="{485E92DF-891B-4976-B821-81827359FB79}"/>
+                <a16:creationId xmlns:a16="http://schemas.microsoft.com/office/drawing/2014/main" id="{2E70E443-C566-4EFD-B2A9-112FFFE5F04C}"/>
               </a:ext>
             </a:extLst>
           </p:cNvPr>
@@ -14236,7 +14236,7 @@
           <p:cNvPr id="105" name="">
             <a:extLst xmlns:a="http://schemas.openxmlformats.org/drawingml/2006/main">
               <a:ext uri="{FF2B5EF4-FFF2-40B4-BE49-F238E27FC236}">
-                <a16:creationId xmlns:a16="http://schemas.microsoft.com/office/drawing/2014/main" id="{B8989A53-6257-4D81-9F9B-F3AFEC90E98F}"/>
+                <a16:creationId xmlns:a16="http://schemas.microsoft.com/office/drawing/2014/main" id="{00BA3214-EB37-44B1-827F-69BA514FAAB6}"/>
               </a:ext>
             </a:extLst>
           </p:cNvPr>
@@ -14286,7 +14286,7 @@
           <p:cNvPr id="106" name="">
             <a:extLst xmlns:a="http://schemas.openxmlformats.org/drawingml/2006/main">
               <a:ext uri="{FF2B5EF4-FFF2-40B4-BE49-F238E27FC236}">
-                <a16:creationId xmlns:a16="http://schemas.microsoft.com/office/drawing/2014/main" id="{5FD0C26A-1A69-4311-9F97-C25CA621788E}"/>
+                <a16:creationId xmlns:a16="http://schemas.microsoft.com/office/drawing/2014/main" id="{CB199150-DAEE-4465-8327-77FB0938956F}"/>
               </a:ext>
             </a:extLst>
           </p:cNvPr>
@@ -14336,7 +14336,7 @@
           <p:cNvPr id="107" name="">
             <a:extLst xmlns:a="http://schemas.openxmlformats.org/drawingml/2006/main">
               <a:ext uri="{FF2B5EF4-FFF2-40B4-BE49-F238E27FC236}">
-                <a16:creationId xmlns:a16="http://schemas.microsoft.com/office/drawing/2014/main" id="{A7B9C496-277F-4F65-BE9B-DAA33E32A11C}"/>
+                <a16:creationId xmlns:a16="http://schemas.microsoft.com/office/drawing/2014/main" id="{D3DB699C-CE7D-468C-8564-4F448E89D53F}"/>
               </a:ext>
             </a:extLst>
           </p:cNvPr>
@@ -14386,7 +14386,7 @@
           <p:cNvPr id="108" name="">
             <a:extLst xmlns:a="http://schemas.openxmlformats.org/drawingml/2006/main">
               <a:ext uri="{FF2B5EF4-FFF2-40B4-BE49-F238E27FC236}">
-                <a16:creationId xmlns:a16="http://schemas.microsoft.com/office/drawing/2014/main" id="{065648C1-665C-47D1-88D7-89F0AAE2CEB5}"/>
+                <a16:creationId xmlns:a16="http://schemas.microsoft.com/office/drawing/2014/main" id="{2862CDD3-74CF-4D7A-82A9-6A822C33E4A6}"/>
               </a:ext>
             </a:extLst>
           </p:cNvPr>
@@ -14417,7 +14417,7 @@
           <p:cNvPr id="109" name="">
             <a:extLst xmlns:a="http://schemas.openxmlformats.org/drawingml/2006/main">
               <a:ext uri="{FF2B5EF4-FFF2-40B4-BE49-F238E27FC236}">
-                <a16:creationId xmlns:a16="http://schemas.microsoft.com/office/drawing/2014/main" id="{5C8A89B9-8F08-4D30-A690-2FE25EA4C479}"/>
+                <a16:creationId xmlns:a16="http://schemas.microsoft.com/office/drawing/2014/main" id="{D11D389C-6903-4CB4-889C-2EECDB79EA03}"/>
               </a:ext>
             </a:extLst>
           </p:cNvPr>
@@ -14467,7 +14467,7 @@
           <p:cNvPr id="110" name="">
             <a:extLst xmlns:a="http://schemas.openxmlformats.org/drawingml/2006/main">
               <a:ext uri="{FF2B5EF4-FFF2-40B4-BE49-F238E27FC236}">
-                <a16:creationId xmlns:a16="http://schemas.microsoft.com/office/drawing/2014/main" id="{27FA619D-FF46-44FA-8E1D-BA19F9049631}"/>
+                <a16:creationId xmlns:a16="http://schemas.microsoft.com/office/drawing/2014/main" id="{97372AD2-D6D6-40D5-BC62-F1361A3D3832}"/>
               </a:ext>
             </a:extLst>
           </p:cNvPr>
@@ -14517,7 +14517,7 @@
           <p:cNvPr id="111" name="">
             <a:extLst xmlns:a="http://schemas.openxmlformats.org/drawingml/2006/main">
               <a:ext uri="{FF2B5EF4-FFF2-40B4-BE49-F238E27FC236}">
-                <a16:creationId xmlns:a16="http://schemas.microsoft.com/office/drawing/2014/main" id="{E9BDD55C-704F-4166-A33B-DE06B4209C92}"/>
+                <a16:creationId xmlns:a16="http://schemas.microsoft.com/office/drawing/2014/main" id="{0F39E527-6EE0-4F9C-A12D-E34CAE5060C2}"/>
               </a:ext>
             </a:extLst>
           </p:cNvPr>
@@ -14567,7 +14567,7 @@
           <p:cNvPr id="112" name="">
             <a:extLst xmlns:a="http://schemas.openxmlformats.org/drawingml/2006/main">
               <a:ext uri="{FF2B5EF4-FFF2-40B4-BE49-F238E27FC236}">
-                <a16:creationId xmlns:a16="http://schemas.microsoft.com/office/drawing/2014/main" id="{8FB8C2F2-7ECC-4104-9FDA-B2F033629DA4}"/>
+                <a16:creationId xmlns:a16="http://schemas.microsoft.com/office/drawing/2014/main" id="{469EA18F-1D21-4C7E-B81C-5BE8FA99FD39}"/>
               </a:ext>
             </a:extLst>
           </p:cNvPr>
@@ -14598,7 +14598,7 @@
           <p:cNvPr id="113" name="">
             <a:extLst xmlns:a="http://schemas.openxmlformats.org/drawingml/2006/main">
               <a:ext uri="{FF2B5EF4-FFF2-40B4-BE49-F238E27FC236}">
-                <a16:creationId xmlns:a16="http://schemas.microsoft.com/office/drawing/2014/main" id="{5666E36D-806D-45F0-A784-2E590E9944FC}"/>
+                <a16:creationId xmlns:a16="http://schemas.microsoft.com/office/drawing/2014/main" id="{E475BBB4-3944-4C72-9C64-65CED603A127}"/>
               </a:ext>
             </a:extLst>
           </p:cNvPr>
@@ -14648,7 +14648,7 @@
           <p:cNvPr id="114" name="">
             <a:extLst xmlns:a="http://schemas.openxmlformats.org/drawingml/2006/main">
               <a:ext uri="{FF2B5EF4-FFF2-40B4-BE49-F238E27FC236}">
-                <a16:creationId xmlns:a16="http://schemas.microsoft.com/office/drawing/2014/main" id="{C18F13C5-1F47-4D2F-B89F-6677CC3CADD3}"/>
+                <a16:creationId xmlns:a16="http://schemas.microsoft.com/office/drawing/2014/main" id="{AD8DFAE2-38BE-4799-9B50-7E17214B5F14}"/>
               </a:ext>
             </a:extLst>
           </p:cNvPr>
@@ -14698,7 +14698,7 @@
           <p:cNvPr id="115" name="">
             <a:extLst xmlns:a="http://schemas.openxmlformats.org/drawingml/2006/main">
               <a:ext uri="{FF2B5EF4-FFF2-40B4-BE49-F238E27FC236}">
-                <a16:creationId xmlns:a16="http://schemas.microsoft.com/office/drawing/2014/main" id="{86667698-5153-49AA-AFBE-A7BA76C86F52}"/>
+                <a16:creationId xmlns:a16="http://schemas.microsoft.com/office/drawing/2014/main" id="{A61D5811-F424-4B8F-9AAB-AA02596ACFE3}"/>
               </a:ext>
             </a:extLst>
           </p:cNvPr>
@@ -14748,7 +14748,7 @@
           <p:cNvPr id="116" name="">
             <a:extLst xmlns:a="http://schemas.openxmlformats.org/drawingml/2006/main">
               <a:ext uri="{FF2B5EF4-FFF2-40B4-BE49-F238E27FC236}">
-                <a16:creationId xmlns:a16="http://schemas.microsoft.com/office/drawing/2014/main" id="{9739E210-AF72-41C0-91EB-775712418FCF}"/>
+                <a16:creationId xmlns:a16="http://schemas.microsoft.com/office/drawing/2014/main" id="{28432E08-B5B7-4DAE-B6D6-E30F504470CA}"/>
               </a:ext>
             </a:extLst>
           </p:cNvPr>
@@ -14798,7 +14798,7 @@
           <p:cNvPr id="117" name="">
             <a:extLst xmlns:a="http://schemas.openxmlformats.org/drawingml/2006/main">
               <a:ext uri="{FF2B5EF4-FFF2-40B4-BE49-F238E27FC236}">
-                <a16:creationId xmlns:a16="http://schemas.microsoft.com/office/drawing/2014/main" id="{A49E9E96-4864-4512-B99A-C147C8719C87}"/>
+                <a16:creationId xmlns:a16="http://schemas.microsoft.com/office/drawing/2014/main" id="{8C04528F-27D7-40C7-A837-DD5A8B6629EB}"/>
               </a:ext>
             </a:extLst>
           </p:cNvPr>
@@ -14829,7 +14829,7 @@
           <p:cNvPr id="118" name="">
             <a:extLst xmlns:a="http://schemas.openxmlformats.org/drawingml/2006/main">
               <a:ext uri="{FF2B5EF4-FFF2-40B4-BE49-F238E27FC236}">
-                <a16:creationId xmlns:a16="http://schemas.microsoft.com/office/drawing/2014/main" id="{B88156C6-31FD-4544-9D4D-34D479076D05}"/>
+                <a16:creationId xmlns:a16="http://schemas.microsoft.com/office/drawing/2014/main" id="{B2453CB9-4E85-4943-9F76-A2F9DAC99447}"/>
               </a:ext>
             </a:extLst>
           </p:cNvPr>
@@ -14879,7 +14879,7 @@
           <p:cNvPr id="119" name="">
             <a:extLst xmlns:a="http://schemas.openxmlformats.org/drawingml/2006/main">
               <a:ext uri="{FF2B5EF4-FFF2-40B4-BE49-F238E27FC236}">
-                <a16:creationId xmlns:a16="http://schemas.microsoft.com/office/drawing/2014/main" id="{8F8566BD-2ADF-497A-994D-51E47D13A33B}"/>
+                <a16:creationId xmlns:a16="http://schemas.microsoft.com/office/drawing/2014/main" id="{64AC964E-711E-499C-910C-9D435D65C452}"/>
               </a:ext>
             </a:extLst>
           </p:cNvPr>
@@ -14927,7 +14927,7 @@
     </p:spTree>
     <p:extLst>
       <p:ext uri="{BB962C8B-B14F-4D97-AF65-F5344CB8AC3E}">
-        <p14:creationId xmlns:p14="http://schemas.microsoft.com/office/powerpoint/2010/main" val="1450735807"/>
+        <p14:creationId xmlns:p14="http://schemas.microsoft.com/office/powerpoint/2010/main" val="536532392"/>
       </p:ext>
     </p:extLst>
   </p:cSld>
@@ -14958,7 +14958,7 @@
           <p:cNvPr id="120" name="">
             <a:extLst xmlns:a="http://schemas.openxmlformats.org/drawingml/2006/main">
               <a:ext uri="{FF2B5EF4-FFF2-40B4-BE49-F238E27FC236}">
-                <a16:creationId xmlns:a16="http://schemas.microsoft.com/office/drawing/2014/main" id="{8C66612A-5239-4962-BC92-10F33FC2AEC3}"/>
+                <a16:creationId xmlns:a16="http://schemas.microsoft.com/office/drawing/2014/main" id="{057C6ECF-458F-43CD-97AF-801DA8D832DC}"/>
               </a:ext>
             </a:extLst>
           </p:cNvPr>
@@ -15008,7 +15008,7 @@
           <p:cNvPr id="2" name="">
             <a:extLst xmlns:a="http://schemas.openxmlformats.org/drawingml/2006/main">
               <a:ext uri="{FF2B5EF4-FFF2-40B4-BE49-F238E27FC236}">
-                <a16:creationId xmlns:a16="http://schemas.microsoft.com/office/drawing/2014/main" id="{31A26BF9-A525-4B5A-9ACD-88F01BCA69FA}"/>
+                <a16:creationId xmlns:a16="http://schemas.microsoft.com/office/drawing/2014/main" id="{4502A172-1065-49B2-970E-E72A4BF7BFA5}"/>
               </a:ext>
             </a:extLst>
           </p:cNvPr>
@@ -15058,7 +15058,7 @@
           <p:cNvPr id="3" name="">
             <a:extLst xmlns:a="http://schemas.openxmlformats.org/drawingml/2006/main">
               <a:ext uri="{FF2B5EF4-FFF2-40B4-BE49-F238E27FC236}">
-                <a16:creationId xmlns:a16="http://schemas.microsoft.com/office/drawing/2014/main" id="{BCDB789F-3A22-4C22-86BC-2F23A739F112}"/>
+                <a16:creationId xmlns:a16="http://schemas.microsoft.com/office/drawing/2014/main" id="{54D4F91E-F53C-4CFE-BEEC-9CF3C5CCDC99}"/>
               </a:ext>
             </a:extLst>
           </p:cNvPr>
@@ -15108,7 +15108,7 @@
           <p:cNvPr id="4" name="">
             <a:extLst xmlns:a="http://schemas.openxmlformats.org/drawingml/2006/main">
               <a:ext uri="{FF2B5EF4-FFF2-40B4-BE49-F238E27FC236}">
-                <a16:creationId xmlns:a16="http://schemas.microsoft.com/office/drawing/2014/main" id="{78555513-2779-4D4D-A835-7816FE5CDA37}"/>
+                <a16:creationId xmlns:a16="http://schemas.microsoft.com/office/drawing/2014/main" id="{D897085A-2E5F-4240-BA0E-FD82A6F82086}"/>
               </a:ext>
             </a:extLst>
           </p:cNvPr>
@@ -15149,7 +15149,7 @@
           <p:cNvPr id="5" name="">
             <a:extLst xmlns:a="http://schemas.openxmlformats.org/drawingml/2006/main">
               <a:ext uri="{FF2B5EF4-FFF2-40B4-BE49-F238E27FC236}">
-                <a16:creationId xmlns:a16="http://schemas.microsoft.com/office/drawing/2014/main" id="{EB2F6C6D-5273-45EB-84D6-305BDA1C73DB}"/>
+                <a16:creationId xmlns:a16="http://schemas.microsoft.com/office/drawing/2014/main" id="{BA9E8C8C-96C4-468E-9865-040215BDA6E1}"/>
               </a:ext>
             </a:extLst>
           </p:cNvPr>
@@ -15199,7 +15199,7 @@
           <p:cNvPr id="6" name="">
             <a:extLst xmlns:a="http://schemas.openxmlformats.org/drawingml/2006/main">
               <a:ext uri="{FF2B5EF4-FFF2-40B4-BE49-F238E27FC236}">
-                <a16:creationId xmlns:a16="http://schemas.microsoft.com/office/drawing/2014/main" id="{AE2DF9C1-73E7-4486-BDA4-BC63223C54B0}"/>
+                <a16:creationId xmlns:a16="http://schemas.microsoft.com/office/drawing/2014/main" id="{580B55BA-19DD-4564-A4AC-A5177BC64F75}"/>
               </a:ext>
             </a:extLst>
           </p:cNvPr>
@@ -15256,7 +15256,7 @@
         </p:xfrm>
         <a:graphic xmlns:a="http://schemas.openxmlformats.org/drawingml/2006/main">
           <a:graphicData uri="http://schemas.openxmlformats.org/drawingml/2006/chart">
-            <c:chart xmlns:r="http://schemas.openxmlformats.org/officeDocument/2006/relationships" xmlns:c="http://schemas.openxmlformats.org/drawingml/2006/chart" r:id="R451833be5b7d4138"/>
+            <c:chart xmlns:r="http://schemas.openxmlformats.org/officeDocument/2006/relationships" xmlns:c="http://schemas.openxmlformats.org/drawingml/2006/chart" r:id="Rd429f065ee0c4342"/>
           </a:graphicData>
         </a:graphic>
       </p:graphicFrame>
@@ -15265,7 +15265,7 @@
           <p:cNvPr id="8" name="">
             <a:extLst xmlns:a="http://schemas.openxmlformats.org/drawingml/2006/main">
               <a:ext uri="{FF2B5EF4-FFF2-40B4-BE49-F238E27FC236}">
-                <a16:creationId xmlns:a16="http://schemas.microsoft.com/office/drawing/2014/main" id="{B7010F34-FFDB-41AF-915A-6E325066FBF2}"/>
+                <a16:creationId xmlns:a16="http://schemas.microsoft.com/office/drawing/2014/main" id="{20B3BA16-5876-46A1-9334-C749EC627BAC}"/>
               </a:ext>
             </a:extLst>
           </p:cNvPr>
@@ -15296,7 +15296,7 @@
           <p:cNvPr id="9" name="">
             <a:extLst xmlns:a="http://schemas.openxmlformats.org/drawingml/2006/main">
               <a:ext uri="{FF2B5EF4-FFF2-40B4-BE49-F238E27FC236}">
-                <a16:creationId xmlns:a16="http://schemas.microsoft.com/office/drawing/2014/main" id="{9208048B-AFBE-435B-B8B9-FB58372C6D8C}"/>
+                <a16:creationId xmlns:a16="http://schemas.microsoft.com/office/drawing/2014/main" id="{A3DD37C5-EF8A-4AD1-B88C-29D36A71E741}"/>
               </a:ext>
             </a:extLst>
           </p:cNvPr>
@@ -15346,7 +15346,7 @@
           <p:cNvPr id="10" name="">
             <a:extLst xmlns:a="http://schemas.openxmlformats.org/drawingml/2006/main">
               <a:ext uri="{FF2B5EF4-FFF2-40B4-BE49-F238E27FC236}">
-                <a16:creationId xmlns:a16="http://schemas.microsoft.com/office/drawing/2014/main" id="{AD93E487-7569-4EFB-9868-4C8B7BA37FDA}"/>
+                <a16:creationId xmlns:a16="http://schemas.microsoft.com/office/drawing/2014/main" id="{D1269C83-2EBB-40CF-8274-2658B07276BB}"/>
               </a:ext>
             </a:extLst>
           </p:cNvPr>
@@ -15396,7 +15396,7 @@
           <p:cNvPr id="11" name="">
             <a:extLst xmlns:a="http://schemas.openxmlformats.org/drawingml/2006/main">
               <a:ext uri="{FF2B5EF4-FFF2-40B4-BE49-F238E27FC236}">
-                <a16:creationId xmlns:a16="http://schemas.microsoft.com/office/drawing/2014/main" id="{FEA0DFD5-5A36-46EE-9732-FB556989F01C}"/>
+                <a16:creationId xmlns:a16="http://schemas.microsoft.com/office/drawing/2014/main" id="{791B1C6A-F243-4C5B-8A42-B23F7AC94609}"/>
               </a:ext>
             </a:extLst>
           </p:cNvPr>
@@ -15446,7 +15446,7 @@
           <p:cNvPr id="12" name="">
             <a:extLst xmlns:a="http://schemas.openxmlformats.org/drawingml/2006/main">
               <a:ext uri="{FF2B5EF4-FFF2-40B4-BE49-F238E27FC236}">
-                <a16:creationId xmlns:a16="http://schemas.microsoft.com/office/drawing/2014/main" id="{0A57DBEB-51B2-42AD-B058-142939DB1508}"/>
+                <a16:creationId xmlns:a16="http://schemas.microsoft.com/office/drawing/2014/main" id="{79FAD495-7FFB-4083-8281-249AA9AB5AAC}"/>
               </a:ext>
             </a:extLst>
           </p:cNvPr>
@@ -15477,7 +15477,7 @@
           <p:cNvPr id="13" name="">
             <a:extLst xmlns:a="http://schemas.openxmlformats.org/drawingml/2006/main">
               <a:ext uri="{FF2B5EF4-FFF2-40B4-BE49-F238E27FC236}">
-                <a16:creationId xmlns:a16="http://schemas.microsoft.com/office/drawing/2014/main" id="{312240F0-76FA-4E2A-8D94-FA470DF5804D}"/>
+                <a16:creationId xmlns:a16="http://schemas.microsoft.com/office/drawing/2014/main" id="{CD0ED237-0779-49B9-AFFA-168DAC4B0E23}"/>
               </a:ext>
             </a:extLst>
           </p:cNvPr>
@@ -15527,7 +15527,7 @@
           <p:cNvPr id="14" name="">
             <a:extLst xmlns:a="http://schemas.openxmlformats.org/drawingml/2006/main">
               <a:ext uri="{FF2B5EF4-FFF2-40B4-BE49-F238E27FC236}">
-                <a16:creationId xmlns:a16="http://schemas.microsoft.com/office/drawing/2014/main" id="{825A81E7-EA64-4F06-B383-07A0C945BFED}"/>
+                <a16:creationId xmlns:a16="http://schemas.microsoft.com/office/drawing/2014/main" id="{383612B6-A834-45C3-85D0-DA671730267B}"/>
               </a:ext>
             </a:extLst>
           </p:cNvPr>
@@ -15577,7 +15577,7 @@
           <p:cNvPr id="15" name="">
             <a:extLst xmlns:a="http://schemas.openxmlformats.org/drawingml/2006/main">
               <a:ext uri="{FF2B5EF4-FFF2-40B4-BE49-F238E27FC236}">
-                <a16:creationId xmlns:a16="http://schemas.microsoft.com/office/drawing/2014/main" id="{DE80B2CE-5063-43CA-9FF7-A5F478EA319F}"/>
+                <a16:creationId xmlns:a16="http://schemas.microsoft.com/office/drawing/2014/main" id="{5AE2B1D7-FA92-4038-8DF0-421141A152EF}"/>
               </a:ext>
             </a:extLst>
           </p:cNvPr>
@@ -15627,7 +15627,7 @@
           <p:cNvPr id="16" name="">
             <a:extLst xmlns:a="http://schemas.openxmlformats.org/drawingml/2006/main">
               <a:ext uri="{FF2B5EF4-FFF2-40B4-BE49-F238E27FC236}">
-                <a16:creationId xmlns:a16="http://schemas.microsoft.com/office/drawing/2014/main" id="{D3BCEC1E-2603-4FA4-A4E0-08657CFE8CAF}"/>
+                <a16:creationId xmlns:a16="http://schemas.microsoft.com/office/drawing/2014/main" id="{E11C2DEE-2167-4231-B066-D409C7762E78}"/>
               </a:ext>
             </a:extLst>
           </p:cNvPr>
@@ -15658,7 +15658,7 @@
           <p:cNvPr id="17" name="">
             <a:extLst xmlns:a="http://schemas.openxmlformats.org/drawingml/2006/main">
               <a:ext uri="{FF2B5EF4-FFF2-40B4-BE49-F238E27FC236}">
-                <a16:creationId xmlns:a16="http://schemas.microsoft.com/office/drawing/2014/main" id="{50F888D0-3326-4800-A1C2-2B9BB89FD025}"/>
+                <a16:creationId xmlns:a16="http://schemas.microsoft.com/office/drawing/2014/main" id="{94D74C73-EC05-478E-957B-D6C488C28C8E}"/>
               </a:ext>
             </a:extLst>
           </p:cNvPr>
@@ -15708,7 +15708,7 @@
           <p:cNvPr id="18" name="">
             <a:extLst xmlns:a="http://schemas.openxmlformats.org/drawingml/2006/main">
               <a:ext uri="{FF2B5EF4-FFF2-40B4-BE49-F238E27FC236}">
-                <a16:creationId xmlns:a16="http://schemas.microsoft.com/office/drawing/2014/main" id="{B4445534-CD80-401B-AEA8-03EFAE7DB5C5}"/>
+                <a16:creationId xmlns:a16="http://schemas.microsoft.com/office/drawing/2014/main" id="{EC64D3B0-9383-4731-91C3-610936F24C2C}"/>
               </a:ext>
             </a:extLst>
           </p:cNvPr>
@@ -15758,7 +15758,7 @@
           <p:cNvPr id="19" name="">
             <a:extLst xmlns:a="http://schemas.openxmlformats.org/drawingml/2006/main">
               <a:ext uri="{FF2B5EF4-FFF2-40B4-BE49-F238E27FC236}">
-                <a16:creationId xmlns:a16="http://schemas.microsoft.com/office/drawing/2014/main" id="{E92E4AE2-341D-4998-B3A1-B01EBE7669C8}"/>
+                <a16:creationId xmlns:a16="http://schemas.microsoft.com/office/drawing/2014/main" id="{B873549D-0C83-4BE6-A962-1652AC035982}"/>
               </a:ext>
             </a:extLst>
           </p:cNvPr>
@@ -15808,7 +15808,7 @@
           <p:cNvPr id="20" name="">
             <a:extLst xmlns:a="http://schemas.openxmlformats.org/drawingml/2006/main">
               <a:ext uri="{FF2B5EF4-FFF2-40B4-BE49-F238E27FC236}">
-                <a16:creationId xmlns:a16="http://schemas.microsoft.com/office/drawing/2014/main" id="{CFA18D91-66E9-49F7-8E31-E20D83811CCC}"/>
+                <a16:creationId xmlns:a16="http://schemas.microsoft.com/office/drawing/2014/main" id="{87097CF5-64EC-46B2-A1EB-3C95878893D9}"/>
               </a:ext>
             </a:extLst>
           </p:cNvPr>
@@ -15839,7 +15839,7 @@
           <p:cNvPr id="21" name="">
             <a:extLst xmlns:a="http://schemas.openxmlformats.org/drawingml/2006/main">
               <a:ext uri="{FF2B5EF4-FFF2-40B4-BE49-F238E27FC236}">
-                <a16:creationId xmlns:a16="http://schemas.microsoft.com/office/drawing/2014/main" id="{DA8A0205-61D6-4818-973D-4B44045DC182}"/>
+                <a16:creationId xmlns:a16="http://schemas.microsoft.com/office/drawing/2014/main" id="{3F8628AC-6F59-45FC-A942-BC2DF707A68C}"/>
               </a:ext>
             </a:extLst>
           </p:cNvPr>
@@ -15889,7 +15889,7 @@
           <p:cNvPr id="22" name="">
             <a:extLst xmlns:a="http://schemas.openxmlformats.org/drawingml/2006/main">
               <a:ext uri="{FF2B5EF4-FFF2-40B4-BE49-F238E27FC236}">
-                <a16:creationId xmlns:a16="http://schemas.microsoft.com/office/drawing/2014/main" id="{CF81EBF4-E6A1-4702-94A9-0D8296AE43C6}"/>
+                <a16:creationId xmlns:a16="http://schemas.microsoft.com/office/drawing/2014/main" id="{B04264DD-F64A-47EC-B5EE-73D18DA763FC}"/>
               </a:ext>
             </a:extLst>
           </p:cNvPr>
@@ -15939,7 +15939,7 @@
           <p:cNvPr id="23" name="">
             <a:extLst xmlns:a="http://schemas.openxmlformats.org/drawingml/2006/main">
               <a:ext uri="{FF2B5EF4-FFF2-40B4-BE49-F238E27FC236}">
-                <a16:creationId xmlns:a16="http://schemas.microsoft.com/office/drawing/2014/main" id="{F8F7B216-E0A2-4F9D-98CD-294D567FEEA6}"/>
+                <a16:creationId xmlns:a16="http://schemas.microsoft.com/office/drawing/2014/main" id="{A5460627-2D88-4D01-BEE5-A697C19CAB10}"/>
               </a:ext>
             </a:extLst>
           </p:cNvPr>
@@ -15989,7 +15989,7 @@
           <p:cNvPr id="24" name="">
             <a:extLst xmlns:a="http://schemas.openxmlformats.org/drawingml/2006/main">
               <a:ext uri="{FF2B5EF4-FFF2-40B4-BE49-F238E27FC236}">
-                <a16:creationId xmlns:a16="http://schemas.microsoft.com/office/drawing/2014/main" id="{B27C466D-7B85-4CA3-BB40-30E90E570B08}"/>
+                <a16:creationId xmlns:a16="http://schemas.microsoft.com/office/drawing/2014/main" id="{700D2BBB-DF8B-4ED3-B6AB-22E969EA738D}"/>
               </a:ext>
             </a:extLst>
           </p:cNvPr>
@@ -16020,7 +16020,7 @@
           <p:cNvPr id="25" name="">
             <a:extLst xmlns:a="http://schemas.openxmlformats.org/drawingml/2006/main">
               <a:ext uri="{FF2B5EF4-FFF2-40B4-BE49-F238E27FC236}">
-                <a16:creationId xmlns:a16="http://schemas.microsoft.com/office/drawing/2014/main" id="{A17A151A-8603-45E5-A1CE-BE5BC1996C7E}"/>
+                <a16:creationId xmlns:a16="http://schemas.microsoft.com/office/drawing/2014/main" id="{1FF9C323-AC35-4A3C-AC6B-3A85E816002F}"/>
               </a:ext>
             </a:extLst>
           </p:cNvPr>
@@ -16070,7 +16070,7 @@
           <p:cNvPr id="26" name="">
             <a:extLst xmlns:a="http://schemas.openxmlformats.org/drawingml/2006/main">
               <a:ext uri="{FF2B5EF4-FFF2-40B4-BE49-F238E27FC236}">
-                <a16:creationId xmlns:a16="http://schemas.microsoft.com/office/drawing/2014/main" id="{00F791E8-24CD-45F2-B151-B9E8315A216A}"/>
+                <a16:creationId xmlns:a16="http://schemas.microsoft.com/office/drawing/2014/main" id="{567BBFE6-42BC-4958-8388-403E6A60A034}"/>
               </a:ext>
             </a:extLst>
           </p:cNvPr>
@@ -16120,7 +16120,7 @@
           <p:cNvPr id="27" name="">
             <a:extLst xmlns:a="http://schemas.openxmlformats.org/drawingml/2006/main">
               <a:ext uri="{FF2B5EF4-FFF2-40B4-BE49-F238E27FC236}">
-                <a16:creationId xmlns:a16="http://schemas.microsoft.com/office/drawing/2014/main" id="{C7CE9131-622A-4AD5-B687-FC74AB5B4C3B}"/>
+                <a16:creationId xmlns:a16="http://schemas.microsoft.com/office/drawing/2014/main" id="{C0F63EF3-2473-46BB-A1F2-1443819CF67E}"/>
               </a:ext>
             </a:extLst>
           </p:cNvPr>
@@ -16170,7 +16170,7 @@
           <p:cNvPr id="28" name="">
             <a:extLst xmlns:a="http://schemas.openxmlformats.org/drawingml/2006/main">
               <a:ext uri="{FF2B5EF4-FFF2-40B4-BE49-F238E27FC236}">
-                <a16:creationId xmlns:a16="http://schemas.microsoft.com/office/drawing/2014/main" id="{4C8858BA-09D0-4C0D-8D4E-328A6D7B357B}"/>
+                <a16:creationId xmlns:a16="http://schemas.microsoft.com/office/drawing/2014/main" id="{85FB0A9C-41C6-4906-AFBB-239F5ECCA3A3}"/>
               </a:ext>
             </a:extLst>
           </p:cNvPr>
@@ -16201,7 +16201,7 @@
           <p:cNvPr id="29" name="">
             <a:extLst xmlns:a="http://schemas.openxmlformats.org/drawingml/2006/main">
               <a:ext uri="{FF2B5EF4-FFF2-40B4-BE49-F238E27FC236}">
-                <a16:creationId xmlns:a16="http://schemas.microsoft.com/office/drawing/2014/main" id="{1AED2FE4-AA6F-4796-9665-E66AD35E775F}"/>
+                <a16:creationId xmlns:a16="http://schemas.microsoft.com/office/drawing/2014/main" id="{453529E2-C75F-49FB-9F55-60AE2A285766}"/>
               </a:ext>
             </a:extLst>
           </p:cNvPr>
@@ -16251,7 +16251,7 @@
           <p:cNvPr id="30" name="">
             <a:extLst xmlns:a="http://schemas.openxmlformats.org/drawingml/2006/main">
               <a:ext uri="{FF2B5EF4-FFF2-40B4-BE49-F238E27FC236}">
-                <a16:creationId xmlns:a16="http://schemas.microsoft.com/office/drawing/2014/main" id="{19E1778D-84E6-4A80-B7B4-D88D5F3EE7FB}"/>
+                <a16:creationId xmlns:a16="http://schemas.microsoft.com/office/drawing/2014/main" id="{0B03D048-3F0A-4D14-958C-56ACC9B970E5}"/>
               </a:ext>
             </a:extLst>
           </p:cNvPr>
@@ -16301,7 +16301,7 @@
           <p:cNvPr id="31" name="">
             <a:extLst xmlns:a="http://schemas.openxmlformats.org/drawingml/2006/main">
               <a:ext uri="{FF2B5EF4-FFF2-40B4-BE49-F238E27FC236}">
-                <a16:creationId xmlns:a16="http://schemas.microsoft.com/office/drawing/2014/main" id="{11A95A23-C12B-451C-8215-A5BBC48C0B40}"/>
+                <a16:creationId xmlns:a16="http://schemas.microsoft.com/office/drawing/2014/main" id="{B4FE35B1-0371-4E41-8AF2-4946854187F4}"/>
               </a:ext>
             </a:extLst>
           </p:cNvPr>
@@ -16351,7 +16351,7 @@
           <p:cNvPr id="32" name="">
             <a:extLst xmlns:a="http://schemas.openxmlformats.org/drawingml/2006/main">
               <a:ext uri="{FF2B5EF4-FFF2-40B4-BE49-F238E27FC236}">
-                <a16:creationId xmlns:a16="http://schemas.microsoft.com/office/drawing/2014/main" id="{9DDA31ED-4BBE-423F-8144-5ADA51406B73}"/>
+                <a16:creationId xmlns:a16="http://schemas.microsoft.com/office/drawing/2014/main" id="{92B0C5CB-B5EC-4636-8F14-496B10ECE971}"/>
               </a:ext>
             </a:extLst>
           </p:cNvPr>
@@ -16392,7 +16392,7 @@
           <p:cNvPr id="33" name="">
             <a:extLst xmlns:a="http://schemas.openxmlformats.org/drawingml/2006/main">
               <a:ext uri="{FF2B5EF4-FFF2-40B4-BE49-F238E27FC236}">
-                <a16:creationId xmlns:a16="http://schemas.microsoft.com/office/drawing/2014/main" id="{C10B05B4-B5B1-47F6-ABBA-502CF2977811}"/>
+                <a16:creationId xmlns:a16="http://schemas.microsoft.com/office/drawing/2014/main" id="{E0689479-F55F-4E88-85F0-5E4246F2E18D}"/>
               </a:ext>
             </a:extLst>
           </p:cNvPr>
@@ -16442,7 +16442,7 @@
           <p:cNvPr id="34" name="">
             <a:extLst xmlns:a="http://schemas.openxmlformats.org/drawingml/2006/main">
               <a:ext uri="{FF2B5EF4-FFF2-40B4-BE49-F238E27FC236}">
-                <a16:creationId xmlns:a16="http://schemas.microsoft.com/office/drawing/2014/main" id="{2AA7721C-C3BD-438C-861A-725D29410A08}"/>
+                <a16:creationId xmlns:a16="http://schemas.microsoft.com/office/drawing/2014/main" id="{FC31242F-45F6-490B-92C1-62927F78A78B}"/>
               </a:ext>
             </a:extLst>
           </p:cNvPr>
@@ -16499,7 +16499,7 @@
         </p:xfrm>
         <a:graphic xmlns:a="http://schemas.openxmlformats.org/drawingml/2006/main">
           <a:graphicData uri="http://schemas.openxmlformats.org/drawingml/2006/chart">
-            <c:chart xmlns:r="http://schemas.openxmlformats.org/officeDocument/2006/relationships" xmlns:c="http://schemas.openxmlformats.org/drawingml/2006/chart" r:id="Rc66cdc2a910f4d23"/>
+            <c:chart xmlns:r="http://schemas.openxmlformats.org/officeDocument/2006/relationships" xmlns:c="http://schemas.openxmlformats.org/drawingml/2006/chart" r:id="R8637c74c38fc4683"/>
           </a:graphicData>
         </a:graphic>
       </p:graphicFrame>
@@ -16508,7 +16508,7 @@
           <p:cNvPr id="36" name="">
             <a:extLst xmlns:a="http://schemas.openxmlformats.org/drawingml/2006/main">
               <a:ext uri="{FF2B5EF4-FFF2-40B4-BE49-F238E27FC236}">
-                <a16:creationId xmlns:a16="http://schemas.microsoft.com/office/drawing/2014/main" id="{3685CF5D-A35E-4EEC-BA2D-0927967D32C0}"/>
+                <a16:creationId xmlns:a16="http://schemas.microsoft.com/office/drawing/2014/main" id="{DB757EB1-18FB-40F1-A410-5051D8619539}"/>
               </a:ext>
             </a:extLst>
           </p:cNvPr>
@@ -16539,7 +16539,7 @@
           <p:cNvPr id="37" name="">
             <a:extLst xmlns:a="http://schemas.openxmlformats.org/drawingml/2006/main">
               <a:ext uri="{FF2B5EF4-FFF2-40B4-BE49-F238E27FC236}">
-                <a16:creationId xmlns:a16="http://schemas.microsoft.com/office/drawing/2014/main" id="{5A45F40C-888D-41E7-95DE-D6D3844B67EE}"/>
+                <a16:creationId xmlns:a16="http://schemas.microsoft.com/office/drawing/2014/main" id="{61C1D2BD-C639-48D3-9F1D-B6B27A7B8CCB}"/>
               </a:ext>
             </a:extLst>
           </p:cNvPr>
@@ -16589,7 +16589,7 @@
           <p:cNvPr id="38" name="">
             <a:extLst xmlns:a="http://schemas.openxmlformats.org/drawingml/2006/main">
               <a:ext uri="{FF2B5EF4-FFF2-40B4-BE49-F238E27FC236}">
-                <a16:creationId xmlns:a16="http://schemas.microsoft.com/office/drawing/2014/main" id="{525A2BF6-0765-4004-A256-2E52550CDA8E}"/>
+                <a16:creationId xmlns:a16="http://schemas.microsoft.com/office/drawing/2014/main" id="{B471103D-33A9-4A36-8371-47827BD57B87}"/>
               </a:ext>
             </a:extLst>
           </p:cNvPr>
@@ -16639,7 +16639,7 @@
           <p:cNvPr id="39" name="">
             <a:extLst xmlns:a="http://schemas.openxmlformats.org/drawingml/2006/main">
               <a:ext uri="{FF2B5EF4-FFF2-40B4-BE49-F238E27FC236}">
-                <a16:creationId xmlns:a16="http://schemas.microsoft.com/office/drawing/2014/main" id="{10308D08-05FB-4327-8883-B648C3C65D2C}"/>
+                <a16:creationId xmlns:a16="http://schemas.microsoft.com/office/drawing/2014/main" id="{3CF062A8-28BF-4D23-809B-CB735C6ABB75}"/>
               </a:ext>
             </a:extLst>
           </p:cNvPr>
@@ -16689,7 +16689,7 @@
           <p:cNvPr id="40" name="">
             <a:extLst xmlns:a="http://schemas.openxmlformats.org/drawingml/2006/main">
               <a:ext uri="{FF2B5EF4-FFF2-40B4-BE49-F238E27FC236}">
-                <a16:creationId xmlns:a16="http://schemas.microsoft.com/office/drawing/2014/main" id="{A97D9B3A-3D68-44A1-9405-E44C5E5A9C6B}"/>
+                <a16:creationId xmlns:a16="http://schemas.microsoft.com/office/drawing/2014/main" id="{4EB15B5E-3275-43C8-B82D-C3E237D348E7}"/>
               </a:ext>
             </a:extLst>
           </p:cNvPr>
@@ -16720,7 +16720,7 @@
           <p:cNvPr id="41" name="">
             <a:extLst xmlns:a="http://schemas.openxmlformats.org/drawingml/2006/main">
               <a:ext uri="{FF2B5EF4-FFF2-40B4-BE49-F238E27FC236}">
-                <a16:creationId xmlns:a16="http://schemas.microsoft.com/office/drawing/2014/main" id="{7B6A5DB4-9EA0-40E1-9488-765603E54749}"/>
+                <a16:creationId xmlns:a16="http://schemas.microsoft.com/office/drawing/2014/main" id="{55BEDB6E-E988-4DA9-99AD-D11F6DA08F1A}"/>
               </a:ext>
             </a:extLst>
           </p:cNvPr>
@@ -16770,7 +16770,7 @@
           <p:cNvPr id="42" name="">
             <a:extLst xmlns:a="http://schemas.openxmlformats.org/drawingml/2006/main">
               <a:ext uri="{FF2B5EF4-FFF2-40B4-BE49-F238E27FC236}">
-                <a16:creationId xmlns:a16="http://schemas.microsoft.com/office/drawing/2014/main" id="{CD1C6FE2-2B51-41FD-8119-B45D13D2CEF4}"/>
+                <a16:creationId xmlns:a16="http://schemas.microsoft.com/office/drawing/2014/main" id="{4D9A2505-4389-4ACE-B8BD-5DB409205232}"/>
               </a:ext>
             </a:extLst>
           </p:cNvPr>
@@ -16820,7 +16820,7 @@
           <p:cNvPr id="43" name="">
             <a:extLst xmlns:a="http://schemas.openxmlformats.org/drawingml/2006/main">
               <a:ext uri="{FF2B5EF4-FFF2-40B4-BE49-F238E27FC236}">
-                <a16:creationId xmlns:a16="http://schemas.microsoft.com/office/drawing/2014/main" id="{A89F9E25-E817-4C0C-9086-E06C4A2CA108}"/>
+                <a16:creationId xmlns:a16="http://schemas.microsoft.com/office/drawing/2014/main" id="{D2F9730D-BCD0-405C-BF2F-BE06C418D411}"/>
               </a:ext>
             </a:extLst>
           </p:cNvPr>
@@ -16870,7 +16870,7 @@
           <p:cNvPr id="44" name="">
             <a:extLst xmlns:a="http://schemas.openxmlformats.org/drawingml/2006/main">
               <a:ext uri="{FF2B5EF4-FFF2-40B4-BE49-F238E27FC236}">
-                <a16:creationId xmlns:a16="http://schemas.microsoft.com/office/drawing/2014/main" id="{44D8CDDE-35B9-4B76-A495-9306757F5CEB}"/>
+                <a16:creationId xmlns:a16="http://schemas.microsoft.com/office/drawing/2014/main" id="{A3629FA0-C445-43C0-967B-212F8FD01E3C}"/>
               </a:ext>
             </a:extLst>
           </p:cNvPr>
@@ -16901,7 +16901,7 @@
           <p:cNvPr id="45" name="">
             <a:extLst xmlns:a="http://schemas.openxmlformats.org/drawingml/2006/main">
               <a:ext uri="{FF2B5EF4-FFF2-40B4-BE49-F238E27FC236}">
-                <a16:creationId xmlns:a16="http://schemas.microsoft.com/office/drawing/2014/main" id="{C831FB5D-E364-453E-8E9B-E4EEE44F67E8}"/>
+                <a16:creationId xmlns:a16="http://schemas.microsoft.com/office/drawing/2014/main" id="{552340EC-31D6-45D0-89C9-78F30B042405}"/>
               </a:ext>
             </a:extLst>
           </p:cNvPr>
@@ -16951,7 +16951,7 @@
           <p:cNvPr id="46" name="">
             <a:extLst xmlns:a="http://schemas.openxmlformats.org/drawingml/2006/main">
               <a:ext uri="{FF2B5EF4-FFF2-40B4-BE49-F238E27FC236}">
-                <a16:creationId xmlns:a16="http://schemas.microsoft.com/office/drawing/2014/main" id="{B0FC7B3D-E827-4624-A1E1-06696CD5B675}"/>
+                <a16:creationId xmlns:a16="http://schemas.microsoft.com/office/drawing/2014/main" id="{26663063-2CC1-4E22-902F-CD9BB4E4AB73}"/>
               </a:ext>
             </a:extLst>
           </p:cNvPr>
@@ -17001,7 +17001,7 @@
           <p:cNvPr id="47" name="">
             <a:extLst xmlns:a="http://schemas.openxmlformats.org/drawingml/2006/main">
               <a:ext uri="{FF2B5EF4-FFF2-40B4-BE49-F238E27FC236}">
-                <a16:creationId xmlns:a16="http://schemas.microsoft.com/office/drawing/2014/main" id="{5EBC17DF-DBCA-45B3-B4A4-0DA20D77E686}"/>
+                <a16:creationId xmlns:a16="http://schemas.microsoft.com/office/drawing/2014/main" id="{F4AB9B99-D8E7-459E-B34F-D94AAD984AE7}"/>
               </a:ext>
             </a:extLst>
           </p:cNvPr>
@@ -17051,7 +17051,7 @@
           <p:cNvPr id="48" name="">
             <a:extLst xmlns:a="http://schemas.openxmlformats.org/drawingml/2006/main">
               <a:ext uri="{FF2B5EF4-FFF2-40B4-BE49-F238E27FC236}">
-                <a16:creationId xmlns:a16="http://schemas.microsoft.com/office/drawing/2014/main" id="{1E7DBABE-99F3-4DC8-91BA-4C7B92413DDA}"/>
+                <a16:creationId xmlns:a16="http://schemas.microsoft.com/office/drawing/2014/main" id="{D398401E-F349-4F4D-995A-32FEB26C355A}"/>
               </a:ext>
             </a:extLst>
           </p:cNvPr>
@@ -17082,7 +17082,7 @@
           <p:cNvPr id="49" name="">
             <a:extLst xmlns:a="http://schemas.openxmlformats.org/drawingml/2006/main">
               <a:ext uri="{FF2B5EF4-FFF2-40B4-BE49-F238E27FC236}">
-                <a16:creationId xmlns:a16="http://schemas.microsoft.com/office/drawing/2014/main" id="{88F1FD8B-166D-41CA-8AD6-5E574EB1C84A}"/>
+                <a16:creationId xmlns:a16="http://schemas.microsoft.com/office/drawing/2014/main" id="{EBB3804F-1DC2-4A2C-80F5-7809BB574CBC}"/>
               </a:ext>
             </a:extLst>
           </p:cNvPr>
@@ -17132,7 +17132,7 @@
           <p:cNvPr id="50" name="">
             <a:extLst xmlns:a="http://schemas.openxmlformats.org/drawingml/2006/main">
               <a:ext uri="{FF2B5EF4-FFF2-40B4-BE49-F238E27FC236}">
-                <a16:creationId xmlns:a16="http://schemas.microsoft.com/office/drawing/2014/main" id="{BD1E22F0-760E-49FB-AA70-72CFB4898993}"/>
+                <a16:creationId xmlns:a16="http://schemas.microsoft.com/office/drawing/2014/main" id="{D73CFB54-2F60-4507-9203-45ED511BA665}"/>
               </a:ext>
             </a:extLst>
           </p:cNvPr>
@@ -17182,7 +17182,7 @@
           <p:cNvPr id="51" name="">
             <a:extLst xmlns:a="http://schemas.openxmlformats.org/drawingml/2006/main">
               <a:ext uri="{FF2B5EF4-FFF2-40B4-BE49-F238E27FC236}">
-                <a16:creationId xmlns:a16="http://schemas.microsoft.com/office/drawing/2014/main" id="{FBF2076B-CB8F-4EA7-BDF5-446F20B7A988}"/>
+                <a16:creationId xmlns:a16="http://schemas.microsoft.com/office/drawing/2014/main" id="{AC649F43-C17E-40F7-B8F9-3FC404A2FC18}"/>
               </a:ext>
             </a:extLst>
           </p:cNvPr>
@@ -17232,7 +17232,7 @@
           <p:cNvPr id="52" name="">
             <a:extLst xmlns:a="http://schemas.openxmlformats.org/drawingml/2006/main">
               <a:ext uri="{FF2B5EF4-FFF2-40B4-BE49-F238E27FC236}">
-                <a16:creationId xmlns:a16="http://schemas.microsoft.com/office/drawing/2014/main" id="{CBE64A8E-9723-42C2-ACFD-CA670A6EE5C3}"/>
+                <a16:creationId xmlns:a16="http://schemas.microsoft.com/office/drawing/2014/main" id="{CC0CC006-732B-44A0-B5C0-3AA680D5B76E}"/>
               </a:ext>
             </a:extLst>
           </p:cNvPr>
@@ -17263,7 +17263,7 @@
           <p:cNvPr id="53" name="">
             <a:extLst xmlns:a="http://schemas.openxmlformats.org/drawingml/2006/main">
               <a:ext uri="{FF2B5EF4-FFF2-40B4-BE49-F238E27FC236}">
-                <a16:creationId xmlns:a16="http://schemas.microsoft.com/office/drawing/2014/main" id="{D36DD146-C67C-462F-AB01-D7ED58F0EE5A}"/>
+                <a16:creationId xmlns:a16="http://schemas.microsoft.com/office/drawing/2014/main" id="{26168D9E-6C05-4ADD-8F71-DAB5F2873562}"/>
               </a:ext>
             </a:extLst>
           </p:cNvPr>
@@ -17313,7 +17313,7 @@
           <p:cNvPr id="54" name="">
             <a:extLst xmlns:a="http://schemas.openxmlformats.org/drawingml/2006/main">
               <a:ext uri="{FF2B5EF4-FFF2-40B4-BE49-F238E27FC236}">
-                <a16:creationId xmlns:a16="http://schemas.microsoft.com/office/drawing/2014/main" id="{8D4209A4-5969-4381-B5F4-A397206E53F2}"/>
+                <a16:creationId xmlns:a16="http://schemas.microsoft.com/office/drawing/2014/main" id="{5E2A6EED-1712-4822-B218-B302184D9CA9}"/>
               </a:ext>
             </a:extLst>
           </p:cNvPr>
@@ -17363,7 +17363,7 @@
           <p:cNvPr id="55" name="">
             <a:extLst xmlns:a="http://schemas.openxmlformats.org/drawingml/2006/main">
               <a:ext uri="{FF2B5EF4-FFF2-40B4-BE49-F238E27FC236}">
-                <a16:creationId xmlns:a16="http://schemas.microsoft.com/office/drawing/2014/main" id="{4DF9F9F2-7B46-48E3-AAEE-3C00C4EBDBF8}"/>
+                <a16:creationId xmlns:a16="http://schemas.microsoft.com/office/drawing/2014/main" id="{7C6BC14D-13C3-40E5-9EC0-338B03DC0557}"/>
               </a:ext>
             </a:extLst>
           </p:cNvPr>
@@ -17413,7 +17413,7 @@
           <p:cNvPr id="56" name="">
             <a:extLst xmlns:a="http://schemas.openxmlformats.org/drawingml/2006/main">
               <a:ext uri="{FF2B5EF4-FFF2-40B4-BE49-F238E27FC236}">
-                <a16:creationId xmlns:a16="http://schemas.microsoft.com/office/drawing/2014/main" id="{D2376211-2747-40DD-A8B4-875DF1E27F03}"/>
+                <a16:creationId xmlns:a16="http://schemas.microsoft.com/office/drawing/2014/main" id="{1079A044-F2B5-45CF-A088-3AFD534C5535}"/>
               </a:ext>
             </a:extLst>
           </p:cNvPr>
@@ -17444,7 +17444,7 @@
           <p:cNvPr id="57" name="">
             <a:extLst xmlns:a="http://schemas.openxmlformats.org/drawingml/2006/main">
               <a:ext uri="{FF2B5EF4-FFF2-40B4-BE49-F238E27FC236}">
-                <a16:creationId xmlns:a16="http://schemas.microsoft.com/office/drawing/2014/main" id="{6D1D1310-8E25-4F31-834E-465F5B676D53}"/>
+                <a16:creationId xmlns:a16="http://schemas.microsoft.com/office/drawing/2014/main" id="{435DD384-1F2F-42AA-B157-A88F17979B67}"/>
               </a:ext>
             </a:extLst>
           </p:cNvPr>
@@ -17494,7 +17494,7 @@
           <p:cNvPr id="58" name="">
             <a:extLst xmlns:a="http://schemas.openxmlformats.org/drawingml/2006/main">
               <a:ext uri="{FF2B5EF4-FFF2-40B4-BE49-F238E27FC236}">
-                <a16:creationId xmlns:a16="http://schemas.microsoft.com/office/drawing/2014/main" id="{96F6B98D-906A-47EA-BE99-7CE37DBED264}"/>
+                <a16:creationId xmlns:a16="http://schemas.microsoft.com/office/drawing/2014/main" id="{72F278DB-C693-4A54-B49D-F00C83F879A7}"/>
               </a:ext>
             </a:extLst>
           </p:cNvPr>
@@ -17544,7 +17544,7 @@
           <p:cNvPr id="59" name="">
             <a:extLst xmlns:a="http://schemas.openxmlformats.org/drawingml/2006/main">
               <a:ext uri="{FF2B5EF4-FFF2-40B4-BE49-F238E27FC236}">
-                <a16:creationId xmlns:a16="http://schemas.microsoft.com/office/drawing/2014/main" id="{953E88D6-8748-4BAE-8737-B0F492E4AEDD}"/>
+                <a16:creationId xmlns:a16="http://schemas.microsoft.com/office/drawing/2014/main" id="{FBB33D3B-6A58-41FC-AC25-B153C42632CE}"/>
               </a:ext>
             </a:extLst>
           </p:cNvPr>
@@ -17594,7 +17594,7 @@
           <p:cNvPr id="60" name="">
             <a:extLst xmlns:a="http://schemas.openxmlformats.org/drawingml/2006/main">
               <a:ext uri="{FF2B5EF4-FFF2-40B4-BE49-F238E27FC236}">
-                <a16:creationId xmlns:a16="http://schemas.microsoft.com/office/drawing/2014/main" id="{E0EC6501-F493-4D6D-82CF-5348A61FC695}"/>
+                <a16:creationId xmlns:a16="http://schemas.microsoft.com/office/drawing/2014/main" id="{FCE55DD6-9BB5-475C-8AD7-521152E915FE}"/>
               </a:ext>
             </a:extLst>
           </p:cNvPr>
@@ -17635,7 +17635,7 @@
           <p:cNvPr id="61" name="">
             <a:extLst xmlns:a="http://schemas.openxmlformats.org/drawingml/2006/main">
               <a:ext uri="{FF2B5EF4-FFF2-40B4-BE49-F238E27FC236}">
-                <a16:creationId xmlns:a16="http://schemas.microsoft.com/office/drawing/2014/main" id="{D23A7135-D527-429B-ACDB-FF43C05FAC6B}"/>
+                <a16:creationId xmlns:a16="http://schemas.microsoft.com/office/drawing/2014/main" id="{00C2D0E6-009A-43E0-AD01-A916C301E2EF}"/>
               </a:ext>
             </a:extLst>
           </p:cNvPr>
@@ -17685,7 +17685,7 @@
           <p:cNvPr id="62" name="">
             <a:extLst xmlns:a="http://schemas.openxmlformats.org/drawingml/2006/main">
               <a:ext uri="{FF2B5EF4-FFF2-40B4-BE49-F238E27FC236}">
-                <a16:creationId xmlns:a16="http://schemas.microsoft.com/office/drawing/2014/main" id="{43FFFAEA-6594-4F5A-A011-F8CB3BE122B7}"/>
+                <a16:creationId xmlns:a16="http://schemas.microsoft.com/office/drawing/2014/main" id="{A8544ED2-764B-4AE0-B7FA-17D134F1C4FB}"/>
               </a:ext>
             </a:extLst>
           </p:cNvPr>
@@ -17742,7 +17742,7 @@
         </p:xfrm>
         <a:graphic xmlns:a="http://schemas.openxmlformats.org/drawingml/2006/main">
           <a:graphicData uri="http://schemas.openxmlformats.org/drawingml/2006/chart">
-            <c:chart xmlns:r="http://schemas.openxmlformats.org/officeDocument/2006/relationships" xmlns:c="http://schemas.openxmlformats.org/drawingml/2006/chart" r:id="R601f4180664341aa"/>
+            <c:chart xmlns:r="http://schemas.openxmlformats.org/officeDocument/2006/relationships" xmlns:c="http://schemas.openxmlformats.org/drawingml/2006/chart" r:id="R5d47ed2a16744d8f"/>
           </a:graphicData>
         </a:graphic>
       </p:graphicFrame>
@@ -17751,7 +17751,7 @@
           <p:cNvPr id="64" name="">
             <a:extLst xmlns:a="http://schemas.openxmlformats.org/drawingml/2006/main">
               <a:ext uri="{FF2B5EF4-FFF2-40B4-BE49-F238E27FC236}">
-                <a16:creationId xmlns:a16="http://schemas.microsoft.com/office/drawing/2014/main" id="{1DA59EF5-6211-4E48-AA4C-3CE0E89AB925}"/>
+                <a16:creationId xmlns:a16="http://schemas.microsoft.com/office/drawing/2014/main" id="{AB8B4999-12A6-4616-ADA0-8653FF98E763}"/>
               </a:ext>
             </a:extLst>
           </p:cNvPr>
@@ -17782,7 +17782,7 @@
           <p:cNvPr id="65" name="">
             <a:extLst xmlns:a="http://schemas.openxmlformats.org/drawingml/2006/main">
               <a:ext uri="{FF2B5EF4-FFF2-40B4-BE49-F238E27FC236}">
-                <a16:creationId xmlns:a16="http://schemas.microsoft.com/office/drawing/2014/main" id="{CBC0A5C4-E156-4E8E-9DC6-E764EE1A5958}"/>
+                <a16:creationId xmlns:a16="http://schemas.microsoft.com/office/drawing/2014/main" id="{B44D0AC3-D753-4009-8F78-439574FB0528}"/>
               </a:ext>
             </a:extLst>
           </p:cNvPr>
@@ -17832,7 +17832,7 @@
           <p:cNvPr id="66" name="">
             <a:extLst xmlns:a="http://schemas.openxmlformats.org/drawingml/2006/main">
               <a:ext uri="{FF2B5EF4-FFF2-40B4-BE49-F238E27FC236}">
-                <a16:creationId xmlns:a16="http://schemas.microsoft.com/office/drawing/2014/main" id="{BC67B880-10B2-4026-9387-5059D47413A2}"/>
+                <a16:creationId xmlns:a16="http://schemas.microsoft.com/office/drawing/2014/main" id="{E195C1B2-F382-4919-8528-3AB7EEFFD498}"/>
               </a:ext>
             </a:extLst>
           </p:cNvPr>
@@ -17882,7 +17882,7 @@
           <p:cNvPr id="67" name="">
             <a:extLst xmlns:a="http://schemas.openxmlformats.org/drawingml/2006/main">
               <a:ext uri="{FF2B5EF4-FFF2-40B4-BE49-F238E27FC236}">
-                <a16:creationId xmlns:a16="http://schemas.microsoft.com/office/drawing/2014/main" id="{4AE98B29-AB04-4018-856F-A4D3320E44C9}"/>
+                <a16:creationId xmlns:a16="http://schemas.microsoft.com/office/drawing/2014/main" id="{3835F494-8D66-46B3-B8E0-72235F86CE96}"/>
               </a:ext>
             </a:extLst>
           </p:cNvPr>
@@ -17932,7 +17932,7 @@
           <p:cNvPr id="68" name="">
             <a:extLst xmlns:a="http://schemas.openxmlformats.org/drawingml/2006/main">
               <a:ext uri="{FF2B5EF4-FFF2-40B4-BE49-F238E27FC236}">
-                <a16:creationId xmlns:a16="http://schemas.microsoft.com/office/drawing/2014/main" id="{459EDB3E-A11B-4C26-854A-B5D04C52E87B}"/>
+                <a16:creationId xmlns:a16="http://schemas.microsoft.com/office/drawing/2014/main" id="{97DA9031-4914-4996-A822-A55E139CC837}"/>
               </a:ext>
             </a:extLst>
           </p:cNvPr>
@@ -17963,7 +17963,7 @@
           <p:cNvPr id="69" name="">
             <a:extLst xmlns:a="http://schemas.openxmlformats.org/drawingml/2006/main">
               <a:ext uri="{FF2B5EF4-FFF2-40B4-BE49-F238E27FC236}">
-                <a16:creationId xmlns:a16="http://schemas.microsoft.com/office/drawing/2014/main" id="{ABB5EC44-8CE2-44B7-A457-C278FEB801B3}"/>
+                <a16:creationId xmlns:a16="http://schemas.microsoft.com/office/drawing/2014/main" id="{C927503E-FF01-4284-9183-18D5EEB5D046}"/>
               </a:ext>
             </a:extLst>
           </p:cNvPr>
@@ -18013,7 +18013,7 @@
           <p:cNvPr id="70" name="">
             <a:extLst xmlns:a="http://schemas.openxmlformats.org/drawingml/2006/main">
               <a:ext uri="{FF2B5EF4-FFF2-40B4-BE49-F238E27FC236}">
-                <a16:creationId xmlns:a16="http://schemas.microsoft.com/office/drawing/2014/main" id="{48C5A9A0-2FB4-4710-85BB-91160C18C4AA}"/>
+                <a16:creationId xmlns:a16="http://schemas.microsoft.com/office/drawing/2014/main" id="{88C1AC47-4F96-48CB-A528-6DA0F880D9E2}"/>
               </a:ext>
             </a:extLst>
           </p:cNvPr>
@@ -18063,7 +18063,7 @@
           <p:cNvPr id="71" name="">
             <a:extLst xmlns:a="http://schemas.openxmlformats.org/drawingml/2006/main">
               <a:ext uri="{FF2B5EF4-FFF2-40B4-BE49-F238E27FC236}">
-                <a16:creationId xmlns:a16="http://schemas.microsoft.com/office/drawing/2014/main" id="{2CA33BC6-D55A-4590-9045-283C8E5807A4}"/>
+                <a16:creationId xmlns:a16="http://schemas.microsoft.com/office/drawing/2014/main" id="{63722A73-9BFC-48CF-B30F-736F4C676584}"/>
               </a:ext>
             </a:extLst>
           </p:cNvPr>
@@ -18113,7 +18113,7 @@
           <p:cNvPr id="72" name="">
             <a:extLst xmlns:a="http://schemas.openxmlformats.org/drawingml/2006/main">
               <a:ext uri="{FF2B5EF4-FFF2-40B4-BE49-F238E27FC236}">
-                <a16:creationId xmlns:a16="http://schemas.microsoft.com/office/drawing/2014/main" id="{B95A4880-D14A-43FE-918E-9C54B1D4FE73}"/>
+                <a16:creationId xmlns:a16="http://schemas.microsoft.com/office/drawing/2014/main" id="{00624540-D195-4BFA-A043-2DE917CD8767}"/>
               </a:ext>
             </a:extLst>
           </p:cNvPr>
@@ -18144,7 +18144,7 @@
           <p:cNvPr id="73" name="">
             <a:extLst xmlns:a="http://schemas.openxmlformats.org/drawingml/2006/main">
               <a:ext uri="{FF2B5EF4-FFF2-40B4-BE49-F238E27FC236}">
-                <a16:creationId xmlns:a16="http://schemas.microsoft.com/office/drawing/2014/main" id="{8F76F589-1427-4946-B182-8C24D0EAAF59}"/>
+                <a16:creationId xmlns:a16="http://schemas.microsoft.com/office/drawing/2014/main" id="{2CC5B57A-4F39-4A94-8F69-BF6B4D06EA0A}"/>
               </a:ext>
             </a:extLst>
           </p:cNvPr>
@@ -18194,7 +18194,7 @@
           <p:cNvPr id="74" name="">
             <a:extLst xmlns:a="http://schemas.openxmlformats.org/drawingml/2006/main">
               <a:ext uri="{FF2B5EF4-FFF2-40B4-BE49-F238E27FC236}">
-                <a16:creationId xmlns:a16="http://schemas.microsoft.com/office/drawing/2014/main" id="{BB44CE7E-4D27-4BBD-90BE-970DD4B218BA}"/>
+                <a16:creationId xmlns:a16="http://schemas.microsoft.com/office/drawing/2014/main" id="{B0876643-61F1-4DE3-9B4E-6C7CDBA2E5E3}"/>
               </a:ext>
             </a:extLst>
           </p:cNvPr>
@@ -18244,7 +18244,7 @@
           <p:cNvPr id="75" name="">
             <a:extLst xmlns:a="http://schemas.openxmlformats.org/drawingml/2006/main">
               <a:ext uri="{FF2B5EF4-FFF2-40B4-BE49-F238E27FC236}">
-                <a16:creationId xmlns:a16="http://schemas.microsoft.com/office/drawing/2014/main" id="{C2615621-039E-4E84-9D20-3EFA04A8B140}"/>
+                <a16:creationId xmlns:a16="http://schemas.microsoft.com/office/drawing/2014/main" id="{A4825F90-F149-49CD-A6CE-CC8E804C6A71}"/>
               </a:ext>
             </a:extLst>
           </p:cNvPr>
@@ -18294,7 +18294,7 @@
           <p:cNvPr id="76" name="">
             <a:extLst xmlns:a="http://schemas.openxmlformats.org/drawingml/2006/main">
               <a:ext uri="{FF2B5EF4-FFF2-40B4-BE49-F238E27FC236}">
-                <a16:creationId xmlns:a16="http://schemas.microsoft.com/office/drawing/2014/main" id="{A36F89BA-EFFC-4D09-AD8A-77F460A960CB}"/>
+                <a16:creationId xmlns:a16="http://schemas.microsoft.com/office/drawing/2014/main" id="{740FB06E-EDC4-4F94-A80E-2ADF3D787187}"/>
               </a:ext>
             </a:extLst>
           </p:cNvPr>
@@ -18325,7 +18325,7 @@
           <p:cNvPr id="77" name="">
             <a:extLst xmlns:a="http://schemas.openxmlformats.org/drawingml/2006/main">
               <a:ext uri="{FF2B5EF4-FFF2-40B4-BE49-F238E27FC236}">
-                <a16:creationId xmlns:a16="http://schemas.microsoft.com/office/drawing/2014/main" id="{F25106CC-D683-477A-ABAF-2AAC8AD48E71}"/>
+                <a16:creationId xmlns:a16="http://schemas.microsoft.com/office/drawing/2014/main" id="{10130292-7016-48F3-9E4F-9F182850EC49}"/>
               </a:ext>
             </a:extLst>
           </p:cNvPr>
@@ -18375,7 +18375,7 @@
           <p:cNvPr id="78" name="">
             <a:extLst xmlns:a="http://schemas.openxmlformats.org/drawingml/2006/main">
               <a:ext uri="{FF2B5EF4-FFF2-40B4-BE49-F238E27FC236}">
-                <a16:creationId xmlns:a16="http://schemas.microsoft.com/office/drawing/2014/main" id="{CA06BAA2-448B-4344-8D9F-E3327CF5032E}"/>
+                <a16:creationId xmlns:a16="http://schemas.microsoft.com/office/drawing/2014/main" id="{6993A5D8-FBCF-461D-B393-69A0AB33C281}"/>
               </a:ext>
             </a:extLst>
           </p:cNvPr>
@@ -18425,7 +18425,7 @@
           <p:cNvPr id="79" name="">
             <a:extLst xmlns:a="http://schemas.openxmlformats.org/drawingml/2006/main">
               <a:ext uri="{FF2B5EF4-FFF2-40B4-BE49-F238E27FC236}">
-                <a16:creationId xmlns:a16="http://schemas.microsoft.com/office/drawing/2014/main" id="{58B0956E-91BE-4B06-9D23-84F799DCDE4C}"/>
+                <a16:creationId xmlns:a16="http://schemas.microsoft.com/office/drawing/2014/main" id="{F783A5DE-90EF-4C59-B9F5-BE97097AC67A}"/>
               </a:ext>
             </a:extLst>
           </p:cNvPr>
@@ -18475,7 +18475,7 @@
           <p:cNvPr id="80" name="">
             <a:extLst xmlns:a="http://schemas.openxmlformats.org/drawingml/2006/main">
               <a:ext uri="{FF2B5EF4-FFF2-40B4-BE49-F238E27FC236}">
-                <a16:creationId xmlns:a16="http://schemas.microsoft.com/office/drawing/2014/main" id="{4A2ACA32-6380-4AA5-AD77-B2FDC62E9B9D}"/>
+                <a16:creationId xmlns:a16="http://schemas.microsoft.com/office/drawing/2014/main" id="{B44B0920-CB2E-4550-8017-03A3341DC4DA}"/>
               </a:ext>
             </a:extLst>
           </p:cNvPr>
@@ -18506,7 +18506,7 @@
           <p:cNvPr id="81" name="">
             <a:extLst xmlns:a="http://schemas.openxmlformats.org/drawingml/2006/main">
               <a:ext uri="{FF2B5EF4-FFF2-40B4-BE49-F238E27FC236}">
-                <a16:creationId xmlns:a16="http://schemas.microsoft.com/office/drawing/2014/main" id="{B529674C-D9F5-4A31-A3C1-F895BF808EC0}"/>
+                <a16:creationId xmlns:a16="http://schemas.microsoft.com/office/drawing/2014/main" id="{F93CAAFD-AD53-4CAA-A7EA-F4F2AC9325C9}"/>
               </a:ext>
             </a:extLst>
           </p:cNvPr>
@@ -18556,7 +18556,7 @@
           <p:cNvPr id="82" name="">
             <a:extLst xmlns:a="http://schemas.openxmlformats.org/drawingml/2006/main">
               <a:ext uri="{FF2B5EF4-FFF2-40B4-BE49-F238E27FC236}">
-                <a16:creationId xmlns:a16="http://schemas.microsoft.com/office/drawing/2014/main" id="{CF5232C7-7DBC-450C-9351-B17FE8DF9081}"/>
+                <a16:creationId xmlns:a16="http://schemas.microsoft.com/office/drawing/2014/main" id="{9EACCF8A-BB11-4444-8B63-CDD6803B0232}"/>
               </a:ext>
             </a:extLst>
           </p:cNvPr>
@@ -18606,7 +18606,7 @@
           <p:cNvPr id="83" name="">
             <a:extLst xmlns:a="http://schemas.openxmlformats.org/drawingml/2006/main">
               <a:ext uri="{FF2B5EF4-FFF2-40B4-BE49-F238E27FC236}">
-                <a16:creationId xmlns:a16="http://schemas.microsoft.com/office/drawing/2014/main" id="{65A05C26-5AAF-4B1E-BD9B-9EC8876FC72D}"/>
+                <a16:creationId xmlns:a16="http://schemas.microsoft.com/office/drawing/2014/main" id="{DD249165-E6F2-4B02-A7D0-19D64A6A0F7E}"/>
               </a:ext>
             </a:extLst>
           </p:cNvPr>
@@ -18656,7 +18656,7 @@
           <p:cNvPr id="84" name="">
             <a:extLst xmlns:a="http://schemas.openxmlformats.org/drawingml/2006/main">
               <a:ext uri="{FF2B5EF4-FFF2-40B4-BE49-F238E27FC236}">
-                <a16:creationId xmlns:a16="http://schemas.microsoft.com/office/drawing/2014/main" id="{7440D08F-8717-4627-A638-31274990EE58}"/>
+                <a16:creationId xmlns:a16="http://schemas.microsoft.com/office/drawing/2014/main" id="{C00EFFB7-5FF9-4C7D-8A74-73A5FD88F9AC}"/>
               </a:ext>
             </a:extLst>
           </p:cNvPr>
@@ -18687,7 +18687,7 @@
           <p:cNvPr id="85" name="">
             <a:extLst xmlns:a="http://schemas.openxmlformats.org/drawingml/2006/main">
               <a:ext uri="{FF2B5EF4-FFF2-40B4-BE49-F238E27FC236}">
-                <a16:creationId xmlns:a16="http://schemas.microsoft.com/office/drawing/2014/main" id="{6EBB3637-EF70-4D42-9950-7AAAEE3BB00E}"/>
+                <a16:creationId xmlns:a16="http://schemas.microsoft.com/office/drawing/2014/main" id="{393D4D97-6E6C-4D1C-B07F-1CD68B5EEEA0}"/>
               </a:ext>
             </a:extLst>
           </p:cNvPr>
@@ -18737,7 +18737,7 @@
           <p:cNvPr id="86" name="">
             <a:extLst xmlns:a="http://schemas.openxmlformats.org/drawingml/2006/main">
               <a:ext uri="{FF2B5EF4-FFF2-40B4-BE49-F238E27FC236}">
-                <a16:creationId xmlns:a16="http://schemas.microsoft.com/office/drawing/2014/main" id="{F3F5C34B-9867-4CC5-B358-FAF7092C5123}"/>
+                <a16:creationId xmlns:a16="http://schemas.microsoft.com/office/drawing/2014/main" id="{0AD74664-01C4-4F18-908F-FE0E461BF08F}"/>
               </a:ext>
             </a:extLst>
           </p:cNvPr>
@@ -18787,7 +18787,7 @@
           <p:cNvPr id="87" name="">
             <a:extLst xmlns:a="http://schemas.openxmlformats.org/drawingml/2006/main">
               <a:ext uri="{FF2B5EF4-FFF2-40B4-BE49-F238E27FC236}">
-                <a16:creationId xmlns:a16="http://schemas.microsoft.com/office/drawing/2014/main" id="{408456A5-2666-46A6-8941-4170B405AB0F}"/>
+                <a16:creationId xmlns:a16="http://schemas.microsoft.com/office/drawing/2014/main" id="{DEAFD078-17CF-431B-A98D-F60FDD381901}"/>
               </a:ext>
             </a:extLst>
           </p:cNvPr>
@@ -18837,7 +18837,7 @@
           <p:cNvPr id="88" name="">
             <a:extLst xmlns:a="http://schemas.openxmlformats.org/drawingml/2006/main">
               <a:ext uri="{FF2B5EF4-FFF2-40B4-BE49-F238E27FC236}">
-                <a16:creationId xmlns:a16="http://schemas.microsoft.com/office/drawing/2014/main" id="{05C1F32C-052F-4548-95E6-50AA6AC12D61}"/>
+                <a16:creationId xmlns:a16="http://schemas.microsoft.com/office/drawing/2014/main" id="{7E34ADA1-10F0-4D97-88D7-78106273FD18}"/>
               </a:ext>
             </a:extLst>
           </p:cNvPr>
@@ -18878,7 +18878,7 @@
           <p:cNvPr id="89" name="">
             <a:extLst xmlns:a="http://schemas.openxmlformats.org/drawingml/2006/main">
               <a:ext uri="{FF2B5EF4-FFF2-40B4-BE49-F238E27FC236}">
-                <a16:creationId xmlns:a16="http://schemas.microsoft.com/office/drawing/2014/main" id="{2F91B834-38DD-4C54-9EE7-208E2E445CD7}"/>
+                <a16:creationId xmlns:a16="http://schemas.microsoft.com/office/drawing/2014/main" id="{A9987126-B6E6-4526-BB84-8034AD2F524E}"/>
               </a:ext>
             </a:extLst>
           </p:cNvPr>
@@ -18928,7 +18928,7 @@
           <p:cNvPr id="90" name="">
             <a:extLst xmlns:a="http://schemas.openxmlformats.org/drawingml/2006/main">
               <a:ext uri="{FF2B5EF4-FFF2-40B4-BE49-F238E27FC236}">
-                <a16:creationId xmlns:a16="http://schemas.microsoft.com/office/drawing/2014/main" id="{8B249932-6633-4F7B-AC71-2DF49FE4F27D}"/>
+                <a16:creationId xmlns:a16="http://schemas.microsoft.com/office/drawing/2014/main" id="{3E0B6F41-6D1E-4186-89B3-2B14F79B7843}"/>
               </a:ext>
             </a:extLst>
           </p:cNvPr>
@@ -18985,7 +18985,7 @@
         </p:xfrm>
         <a:graphic xmlns:a="http://schemas.openxmlformats.org/drawingml/2006/main">
           <a:graphicData uri="http://schemas.openxmlformats.org/drawingml/2006/chart">
-            <c:chart xmlns:r="http://schemas.openxmlformats.org/officeDocument/2006/relationships" xmlns:c="http://schemas.openxmlformats.org/drawingml/2006/chart" r:id="Re9f74e7e5850413d"/>
+            <c:chart xmlns:r="http://schemas.openxmlformats.org/officeDocument/2006/relationships" xmlns:c="http://schemas.openxmlformats.org/drawingml/2006/chart" r:id="Rc2f3aee4dbf44af5"/>
           </a:graphicData>
         </a:graphic>
       </p:graphicFrame>
@@ -18994,7 +18994,7 @@
           <p:cNvPr id="92" name="">
             <a:extLst xmlns:a="http://schemas.openxmlformats.org/drawingml/2006/main">
               <a:ext uri="{FF2B5EF4-FFF2-40B4-BE49-F238E27FC236}">
-                <a16:creationId xmlns:a16="http://schemas.microsoft.com/office/drawing/2014/main" id="{6950BD55-72FB-44F7-8B03-BC5DC7C52AE0}"/>
+                <a16:creationId xmlns:a16="http://schemas.microsoft.com/office/drawing/2014/main" id="{DE8ABAB8-FA8C-476A-A5FE-A119FD781502}"/>
               </a:ext>
             </a:extLst>
           </p:cNvPr>
@@ -19025,7 +19025,7 @@
           <p:cNvPr id="93" name="">
             <a:extLst xmlns:a="http://schemas.openxmlformats.org/drawingml/2006/main">
               <a:ext uri="{FF2B5EF4-FFF2-40B4-BE49-F238E27FC236}">
-                <a16:creationId xmlns:a16="http://schemas.microsoft.com/office/drawing/2014/main" id="{16E1D71D-3DE1-4C0F-9EE6-F22AB729C020}"/>
+                <a16:creationId xmlns:a16="http://schemas.microsoft.com/office/drawing/2014/main" id="{5FBC89FB-9AD4-4969-B5E4-D9488DBEBE0F}"/>
               </a:ext>
             </a:extLst>
           </p:cNvPr>
@@ -19075,7 +19075,7 @@
           <p:cNvPr id="94" name="">
             <a:extLst xmlns:a="http://schemas.openxmlformats.org/drawingml/2006/main">
               <a:ext uri="{FF2B5EF4-FFF2-40B4-BE49-F238E27FC236}">
-                <a16:creationId xmlns:a16="http://schemas.microsoft.com/office/drawing/2014/main" id="{3A7CAA81-B87F-440D-8BA4-69031B504456}"/>
+                <a16:creationId xmlns:a16="http://schemas.microsoft.com/office/drawing/2014/main" id="{B4264128-AC85-4D2A-8B47-CFAD65508C23}"/>
               </a:ext>
             </a:extLst>
           </p:cNvPr>
@@ -19125,7 +19125,7 @@
           <p:cNvPr id="95" name="">
             <a:extLst xmlns:a="http://schemas.openxmlformats.org/drawingml/2006/main">
               <a:ext uri="{FF2B5EF4-FFF2-40B4-BE49-F238E27FC236}">
-                <a16:creationId xmlns:a16="http://schemas.microsoft.com/office/drawing/2014/main" id="{B35660B8-0853-426F-87B4-31D322D03C85}"/>
+                <a16:creationId xmlns:a16="http://schemas.microsoft.com/office/drawing/2014/main" id="{D774D630-8522-4551-82BA-E98E44099695}"/>
               </a:ext>
             </a:extLst>
           </p:cNvPr>
@@ -19175,7 +19175,7 @@
           <p:cNvPr id="96" name="">
             <a:extLst xmlns:a="http://schemas.openxmlformats.org/drawingml/2006/main">
               <a:ext uri="{FF2B5EF4-FFF2-40B4-BE49-F238E27FC236}">
-                <a16:creationId xmlns:a16="http://schemas.microsoft.com/office/drawing/2014/main" id="{AFAFCABB-3F0F-42A5-B245-C5EDC2A17218}"/>
+                <a16:creationId xmlns:a16="http://schemas.microsoft.com/office/drawing/2014/main" id="{48365A39-6409-477F-9249-364C9CEAD8C7}"/>
               </a:ext>
             </a:extLst>
           </p:cNvPr>
@@ -19206,7 +19206,7 @@
           <p:cNvPr id="97" name="">
             <a:extLst xmlns:a="http://schemas.openxmlformats.org/drawingml/2006/main">
               <a:ext uri="{FF2B5EF4-FFF2-40B4-BE49-F238E27FC236}">
-                <a16:creationId xmlns:a16="http://schemas.microsoft.com/office/drawing/2014/main" id="{080A229A-9348-456B-BBFD-CFC6CC8D5F99}"/>
+                <a16:creationId xmlns:a16="http://schemas.microsoft.com/office/drawing/2014/main" id="{47B2D5EE-FE98-4943-983C-D942D824D8AC}"/>
               </a:ext>
             </a:extLst>
           </p:cNvPr>
@@ -19256,7 +19256,7 @@
           <p:cNvPr id="98" name="">
             <a:extLst xmlns:a="http://schemas.openxmlformats.org/drawingml/2006/main">
               <a:ext uri="{FF2B5EF4-FFF2-40B4-BE49-F238E27FC236}">
-                <a16:creationId xmlns:a16="http://schemas.microsoft.com/office/drawing/2014/main" id="{F72FFEE8-4B44-40E6-B20A-BB4602122BE4}"/>
+                <a16:creationId xmlns:a16="http://schemas.microsoft.com/office/drawing/2014/main" id="{A1805A03-29A5-4E56-AC56-EF2372A1B090}"/>
               </a:ext>
             </a:extLst>
           </p:cNvPr>
@@ -19306,7 +19306,7 @@
           <p:cNvPr id="99" name="">
             <a:extLst xmlns:a="http://schemas.openxmlformats.org/drawingml/2006/main">
               <a:ext uri="{FF2B5EF4-FFF2-40B4-BE49-F238E27FC236}">
-                <a16:creationId xmlns:a16="http://schemas.microsoft.com/office/drawing/2014/main" id="{0A02F1F7-48F3-4DAE-8B4F-70212B90C030}"/>
+                <a16:creationId xmlns:a16="http://schemas.microsoft.com/office/drawing/2014/main" id="{10B80FCE-9642-494C-93A7-38B7CFAEF0F5}"/>
               </a:ext>
             </a:extLst>
           </p:cNvPr>
@@ -19356,7 +19356,7 @@
           <p:cNvPr id="100" name="">
             <a:extLst xmlns:a="http://schemas.openxmlformats.org/drawingml/2006/main">
               <a:ext uri="{FF2B5EF4-FFF2-40B4-BE49-F238E27FC236}">
-                <a16:creationId xmlns:a16="http://schemas.microsoft.com/office/drawing/2014/main" id="{4947B0CD-2AE4-4AE0-BF7D-0126E05F335A}"/>
+                <a16:creationId xmlns:a16="http://schemas.microsoft.com/office/drawing/2014/main" id="{16BFCA54-8324-465C-9449-769A898A3922}"/>
               </a:ext>
             </a:extLst>
           </p:cNvPr>
@@ -19387,7 +19387,7 @@
           <p:cNvPr id="101" name="">
             <a:extLst xmlns:a="http://schemas.openxmlformats.org/drawingml/2006/main">
               <a:ext uri="{FF2B5EF4-FFF2-40B4-BE49-F238E27FC236}">
-                <a16:creationId xmlns:a16="http://schemas.microsoft.com/office/drawing/2014/main" id="{9D562E36-BB1B-4C82-BEE3-DB2A12844F45}"/>
+                <a16:creationId xmlns:a16="http://schemas.microsoft.com/office/drawing/2014/main" id="{0A8B16C4-661E-4A12-ACD0-258568B41C81}"/>
               </a:ext>
             </a:extLst>
           </p:cNvPr>
@@ -19437,7 +19437,7 @@
           <p:cNvPr id="102" name="">
             <a:extLst xmlns:a="http://schemas.openxmlformats.org/drawingml/2006/main">
               <a:ext uri="{FF2B5EF4-FFF2-40B4-BE49-F238E27FC236}">
-                <a16:creationId xmlns:a16="http://schemas.microsoft.com/office/drawing/2014/main" id="{B4EE539A-4813-4B42-89CF-54669D2C83A8}"/>
+                <a16:creationId xmlns:a16="http://schemas.microsoft.com/office/drawing/2014/main" id="{1D3788A4-6FB4-46CA-801D-8D4C4B0EC027}"/>
               </a:ext>
             </a:extLst>
           </p:cNvPr>
@@ -19487,7 +19487,7 @@
           <p:cNvPr id="103" name="">
             <a:extLst xmlns:a="http://schemas.openxmlformats.org/drawingml/2006/main">
               <a:ext uri="{FF2B5EF4-FFF2-40B4-BE49-F238E27FC236}">
-                <a16:creationId xmlns:a16="http://schemas.microsoft.com/office/drawing/2014/main" id="{D86A7AAB-891B-464D-A95C-B0D76BA36EBA}"/>
+                <a16:creationId xmlns:a16="http://schemas.microsoft.com/office/drawing/2014/main" id="{52B19A7B-73BE-4A62-81F3-A2720979D2ED}"/>
               </a:ext>
             </a:extLst>
           </p:cNvPr>
@@ -19537,7 +19537,7 @@
           <p:cNvPr id="104" name="">
             <a:extLst xmlns:a="http://schemas.openxmlformats.org/drawingml/2006/main">
               <a:ext uri="{FF2B5EF4-FFF2-40B4-BE49-F238E27FC236}">
-                <a16:creationId xmlns:a16="http://schemas.microsoft.com/office/drawing/2014/main" id="{0679E4BC-26B5-4313-A365-580E689942F4}"/>
+                <a16:creationId xmlns:a16="http://schemas.microsoft.com/office/drawing/2014/main" id="{AC73A752-9BF2-4385-8EF8-CC2EC68FED9C}"/>
               </a:ext>
             </a:extLst>
           </p:cNvPr>
@@ -19568,7 +19568,7 @@
           <p:cNvPr id="105" name="">
             <a:extLst xmlns:a="http://schemas.openxmlformats.org/drawingml/2006/main">
               <a:ext uri="{FF2B5EF4-FFF2-40B4-BE49-F238E27FC236}">
-                <a16:creationId xmlns:a16="http://schemas.microsoft.com/office/drawing/2014/main" id="{3F90F758-51CD-4435-A106-F8641C5B54A3}"/>
+                <a16:creationId xmlns:a16="http://schemas.microsoft.com/office/drawing/2014/main" id="{87AD8292-4113-40AD-A805-9659296B7E4A}"/>
               </a:ext>
             </a:extLst>
           </p:cNvPr>
@@ -19618,7 +19618,7 @@
           <p:cNvPr id="106" name="">
             <a:extLst xmlns:a="http://schemas.openxmlformats.org/drawingml/2006/main">
               <a:ext uri="{FF2B5EF4-FFF2-40B4-BE49-F238E27FC236}">
-                <a16:creationId xmlns:a16="http://schemas.microsoft.com/office/drawing/2014/main" id="{11CE4E87-81A9-4D34-9D55-C276A55FBD10}"/>
+                <a16:creationId xmlns:a16="http://schemas.microsoft.com/office/drawing/2014/main" id="{0F96EA9B-0EEE-4AB6-87D0-11A4855567A2}"/>
               </a:ext>
             </a:extLst>
           </p:cNvPr>
@@ -19668,7 +19668,7 @@
           <p:cNvPr id="107" name="">
             <a:extLst xmlns:a="http://schemas.openxmlformats.org/drawingml/2006/main">
               <a:ext uri="{FF2B5EF4-FFF2-40B4-BE49-F238E27FC236}">
-                <a16:creationId xmlns:a16="http://schemas.microsoft.com/office/drawing/2014/main" id="{344C561B-38BF-448D-BEC4-9EB3219FEA04}"/>
+                <a16:creationId xmlns:a16="http://schemas.microsoft.com/office/drawing/2014/main" id="{967C0E04-79AD-4E95-A986-BA05AF6C466C}"/>
               </a:ext>
             </a:extLst>
           </p:cNvPr>
@@ -19718,7 +19718,7 @@
           <p:cNvPr id="108" name="">
             <a:extLst xmlns:a="http://schemas.openxmlformats.org/drawingml/2006/main">
               <a:ext uri="{FF2B5EF4-FFF2-40B4-BE49-F238E27FC236}">
-                <a16:creationId xmlns:a16="http://schemas.microsoft.com/office/drawing/2014/main" id="{C80AE621-E44D-429D-B8DA-FDACB0F905D9}"/>
+                <a16:creationId xmlns:a16="http://schemas.microsoft.com/office/drawing/2014/main" id="{717625B4-4D1F-4AD9-A0B4-FE0179FC4F5A}"/>
               </a:ext>
             </a:extLst>
           </p:cNvPr>
@@ -19749,7 +19749,7 @@
           <p:cNvPr id="109" name="">
             <a:extLst xmlns:a="http://schemas.openxmlformats.org/drawingml/2006/main">
               <a:ext uri="{FF2B5EF4-FFF2-40B4-BE49-F238E27FC236}">
-                <a16:creationId xmlns:a16="http://schemas.microsoft.com/office/drawing/2014/main" id="{EE9E498F-3F2D-4C32-BD77-1FE19987D36C}"/>
+                <a16:creationId xmlns:a16="http://schemas.microsoft.com/office/drawing/2014/main" id="{2FCDC849-0EEF-4EDF-A323-978AFA8850CA}"/>
               </a:ext>
             </a:extLst>
           </p:cNvPr>
@@ -19799,7 +19799,7 @@
           <p:cNvPr id="110" name="">
             <a:extLst xmlns:a="http://schemas.openxmlformats.org/drawingml/2006/main">
               <a:ext uri="{FF2B5EF4-FFF2-40B4-BE49-F238E27FC236}">
-                <a16:creationId xmlns:a16="http://schemas.microsoft.com/office/drawing/2014/main" id="{674A67E6-DD74-4726-B839-72B586F58704}"/>
+                <a16:creationId xmlns:a16="http://schemas.microsoft.com/office/drawing/2014/main" id="{8501C776-71AA-48D9-96D0-74DDB02A21C3}"/>
               </a:ext>
             </a:extLst>
           </p:cNvPr>
@@ -19849,7 +19849,7 @@
           <p:cNvPr id="111" name="">
             <a:extLst xmlns:a="http://schemas.openxmlformats.org/drawingml/2006/main">
               <a:ext uri="{FF2B5EF4-FFF2-40B4-BE49-F238E27FC236}">
-                <a16:creationId xmlns:a16="http://schemas.microsoft.com/office/drawing/2014/main" id="{6E307E5A-12E5-43C0-8005-5E58828E0B63}"/>
+                <a16:creationId xmlns:a16="http://schemas.microsoft.com/office/drawing/2014/main" id="{1EAEAC75-710A-409E-8392-6E41331350A2}"/>
               </a:ext>
             </a:extLst>
           </p:cNvPr>
@@ -19899,7 +19899,7 @@
           <p:cNvPr id="112" name="">
             <a:extLst xmlns:a="http://schemas.openxmlformats.org/drawingml/2006/main">
               <a:ext uri="{FF2B5EF4-FFF2-40B4-BE49-F238E27FC236}">
-                <a16:creationId xmlns:a16="http://schemas.microsoft.com/office/drawing/2014/main" id="{A02D050C-1575-4775-9E7D-2082676936E6}"/>
+                <a16:creationId xmlns:a16="http://schemas.microsoft.com/office/drawing/2014/main" id="{15A3BC7F-4672-447A-BBAA-BD2C928C1D52}"/>
               </a:ext>
             </a:extLst>
           </p:cNvPr>
@@ -19930,7 +19930,7 @@
           <p:cNvPr id="113" name="">
             <a:extLst xmlns:a="http://schemas.openxmlformats.org/drawingml/2006/main">
               <a:ext uri="{FF2B5EF4-FFF2-40B4-BE49-F238E27FC236}">
-                <a16:creationId xmlns:a16="http://schemas.microsoft.com/office/drawing/2014/main" id="{9A749155-2AC2-4C9C-AA60-2FCC6E5C702D}"/>
+                <a16:creationId xmlns:a16="http://schemas.microsoft.com/office/drawing/2014/main" id="{FBF245D4-4D1F-4899-B596-3AA12661256E}"/>
               </a:ext>
             </a:extLst>
           </p:cNvPr>
@@ -19980,7 +19980,7 @@
           <p:cNvPr id="114" name="">
             <a:extLst xmlns:a="http://schemas.openxmlformats.org/drawingml/2006/main">
               <a:ext uri="{FF2B5EF4-FFF2-40B4-BE49-F238E27FC236}">
-                <a16:creationId xmlns:a16="http://schemas.microsoft.com/office/drawing/2014/main" id="{EFA90191-B6F1-45BD-82CE-4ABEAAF00BD0}"/>
+                <a16:creationId xmlns:a16="http://schemas.microsoft.com/office/drawing/2014/main" id="{60CFE1C0-3560-4EB6-9066-E23BCDCEF6FE}"/>
               </a:ext>
             </a:extLst>
           </p:cNvPr>
@@ -20030,7 +20030,7 @@
           <p:cNvPr id="115" name="">
             <a:extLst xmlns:a="http://schemas.openxmlformats.org/drawingml/2006/main">
               <a:ext uri="{FF2B5EF4-FFF2-40B4-BE49-F238E27FC236}">
-                <a16:creationId xmlns:a16="http://schemas.microsoft.com/office/drawing/2014/main" id="{F93A99F5-310B-420A-8C1D-5F771B725F26}"/>
+                <a16:creationId xmlns:a16="http://schemas.microsoft.com/office/drawing/2014/main" id="{D1045BDD-6AEB-45D8-B0A5-4FA11490E713}"/>
               </a:ext>
             </a:extLst>
           </p:cNvPr>
@@ -20080,7 +20080,7 @@
           <p:cNvPr id="116" name="">
             <a:extLst xmlns:a="http://schemas.openxmlformats.org/drawingml/2006/main">
               <a:ext uri="{FF2B5EF4-FFF2-40B4-BE49-F238E27FC236}">
-                <a16:creationId xmlns:a16="http://schemas.microsoft.com/office/drawing/2014/main" id="{20741FC3-0E89-4605-8B60-045076563709}"/>
+                <a16:creationId xmlns:a16="http://schemas.microsoft.com/office/drawing/2014/main" id="{1B4E58FA-4988-48A7-98E1-EB759CF3F9F8}"/>
               </a:ext>
             </a:extLst>
           </p:cNvPr>
@@ -20130,7 +20130,7 @@
           <p:cNvPr id="117" name="">
             <a:extLst xmlns:a="http://schemas.openxmlformats.org/drawingml/2006/main">
               <a:ext uri="{FF2B5EF4-FFF2-40B4-BE49-F238E27FC236}">
-                <a16:creationId xmlns:a16="http://schemas.microsoft.com/office/drawing/2014/main" id="{BC434BCC-8940-492E-BC9A-9A3A6C3CDC58}"/>
+                <a16:creationId xmlns:a16="http://schemas.microsoft.com/office/drawing/2014/main" id="{886AEF2A-331E-4738-A8FE-FCDE54E62BEC}"/>
               </a:ext>
             </a:extLst>
           </p:cNvPr>
@@ -20161,7 +20161,7 @@
           <p:cNvPr id="118" name="">
             <a:extLst xmlns:a="http://schemas.openxmlformats.org/drawingml/2006/main">
               <a:ext uri="{FF2B5EF4-FFF2-40B4-BE49-F238E27FC236}">
-                <a16:creationId xmlns:a16="http://schemas.microsoft.com/office/drawing/2014/main" id="{8DA0F796-D4C6-40AE-A51D-6FB04B3336CD}"/>
+                <a16:creationId xmlns:a16="http://schemas.microsoft.com/office/drawing/2014/main" id="{3DFB88A3-6D47-4E68-9040-66CC49A19F66}"/>
               </a:ext>
             </a:extLst>
           </p:cNvPr>
@@ -20211,7 +20211,7 @@
           <p:cNvPr id="119" name="">
             <a:extLst xmlns:a="http://schemas.openxmlformats.org/drawingml/2006/main">
               <a:ext uri="{FF2B5EF4-FFF2-40B4-BE49-F238E27FC236}">
-                <a16:creationId xmlns:a16="http://schemas.microsoft.com/office/drawing/2014/main" id="{5232E635-434D-4E18-BE69-75C45E0C7E9A}"/>
+                <a16:creationId xmlns:a16="http://schemas.microsoft.com/office/drawing/2014/main" id="{4868F856-FED1-48D5-928D-F51F498A398C}"/>
               </a:ext>
             </a:extLst>
           </p:cNvPr>
@@ -20259,7 +20259,7 @@
     </p:spTree>
     <p:extLst>
       <p:ext uri="{BB962C8B-B14F-4D97-AF65-F5344CB8AC3E}">
-        <p14:creationId xmlns:p14="http://schemas.microsoft.com/office/powerpoint/2010/main" val="1005930429"/>
+        <p14:creationId xmlns:p14="http://schemas.microsoft.com/office/powerpoint/2010/main" val="1499251768"/>
       </p:ext>
     </p:extLst>
   </p:cSld>
